--- a/Analysis/AP1_AlphaGenome_results.pptx
+++ b/Analysis/AP1_AlphaGenome_results.pptx
@@ -118,17 +118,17 @@
   <p:extLst>
     <p:ext uri="{521415D9-36F7-43E2-AB2F-B90AF26B5E84}">
       <p14:sectionLst xmlns:p14="http://schemas.microsoft.com/office/powerpoint/2010/main">
-        <p14:section name="Opening" id="{a33bfdfe-1127-c08a-71ca-71cc907b92dc}">
+        <p14:section name="Opening" id="{ff433115-9018-34ee-f477-cd82dbf7be35}">
           <p14:sldIdLst>
             <p14:sldId id="256"/>
           </p14:sldIdLst>
         </p14:section>
-        <p14:section name="Design" id="{fc9e2001-5d38-295c-ba9a-dc062a776286}">
+        <p14:section name="Design" id="{bda7a694-89d3-613e-0e28-a6ac29cee23c}">
           <p14:sldIdLst>
             <p14:sldId id="257"/>
           </p14:sldIdLst>
         </p14:section>
-        <p14:section name="Findings" id="{028c7b16-5f1c-943d-d73a-b99a79e97881}">
+        <p14:section name="Findings" id="{7fb85f0c-cd5e-446e-1c11-2933e4705097}">
           <p14:sldIdLst>
             <p14:sldId id="258"/>
             <p14:sldId id="259"/>
@@ -140,7 +140,7 @@
             <p14:sldId id="265"/>
           </p14:sldIdLst>
         </p14:section>
-        <p14:section name="Conclusion" id="{19910ed1-e335-6f9d-b935-56d2257b769e}">
+        <p14:section name="Conclusion" id="{afde0942-2935-4f67-ce67-4b9029a80c3f}">
           <p14:sldIdLst>
             <p14:sldId id="266"/>
             <p14:sldId id="267"/>
@@ -1671,7 +1671,7 @@
         </p:nvSpPr>
         <p:spPr>
           <a:xfrm>
-            <a:off x="822960" y="3611880"/>
+            <a:off x="822960" y="3703320"/>
             <a:ext cx="10515600" cy="1371600"/>
           </a:xfrm>
           <a:prstGeom prst="rect">
@@ -2448,7 +2448,7 @@
         </p:nvSpPr>
         <p:spPr>
           <a:xfrm>
-            <a:off x="822960" y="3611880"/>
+            <a:off x="822960" y="3703320"/>
             <a:ext cx="10515600" cy="1371600"/>
           </a:xfrm>
           <a:prstGeom prst="rect">
@@ -2498,8 +2498,8 @@
         </p:nvSpPr>
         <p:spPr>
           <a:xfrm>
-            <a:off x="822960" y="2011680"/>
-            <a:ext cx="2194560" cy="0"/>
+            <a:off x="896112" y="3493008"/>
+            <a:ext cx="2011680" cy="0"/>
           </a:xfrm>
           <a:prstGeom prst="line">
             <a:avLst/>
@@ -2592,7 +2592,7 @@
         </p:blipFill>
         <p:spPr>
           <a:xfrm>
-            <a:off x="502920" y="1828800"/>
+            <a:off x="502920" y="2377440"/>
             <a:ext cx="11155680" cy="3383280"/>
           </a:xfrm>
           <a:prstGeom prst="rect">
@@ -2609,11 +2609,11 @@
         <p:spPr>
           <a:xfrm>
             <a:off x="502920" y="1097280"/>
-            <a:ext cx="5440680" cy="658368"/>
+            <a:ext cx="5440680" cy="1051560"/>
           </a:xfrm>
           <a:prstGeom prst="roundRect">
             <a:avLst>
-              <a:gd name="adj" fmla="val 8333"/>
+              <a:gd name="adj" fmla="val 5217"/>
             </a:avLst>
           </a:prstGeom>
           <a:solidFill>
@@ -2672,7 +2672,7 @@
         <p:spPr>
           <a:xfrm>
             <a:off x="612648" y="1755648"/>
-            <a:ext cx="5221224" cy="-73152"/>
+            <a:ext cx="5221224" cy="320040"/>
           </a:xfrm>
           <a:prstGeom prst="rect">
             <a:avLst/>
@@ -2708,11 +2708,11 @@
         <p:spPr>
           <a:xfrm>
             <a:off x="6217920" y="1097280"/>
-            <a:ext cx="5440680" cy="658368"/>
+            <a:ext cx="5440680" cy="1051560"/>
           </a:xfrm>
           <a:prstGeom prst="roundRect">
             <a:avLst>
-              <a:gd name="adj" fmla="val 8333"/>
+              <a:gd name="adj" fmla="val 5217"/>
             </a:avLst>
           </a:prstGeom>
           <a:solidFill>
@@ -2771,7 +2771,7 @@
         <p:spPr>
           <a:xfrm>
             <a:off x="6327648" y="1755648"/>
-            <a:ext cx="5221224" cy="-73152"/>
+            <a:ext cx="5221224" cy="320040"/>
           </a:xfrm>
           <a:prstGeom prst="rect">
             <a:avLst/>
@@ -3401,16 +3401,14 @@
       </p:sp>
       <p:sp>
         <p:nvSpPr>
-          <p:cNvPr id="3" name="Text 0"/>
-          <p:cNvSpPr/>
-          <p:nvPr>
-            <p:ph idx="101" type="body" hasCustomPrompt="1"/>
-          </p:nvPr>
+          <p:cNvPr id="3" name="Text 1"/>
+          <p:cNvSpPr txBox="1"/>
+          <p:nvPr/>
         </p:nvSpPr>
         <p:spPr>
           <a:xfrm>
             <a:off x="502920" y="1234440"/>
-            <a:ext cx="11155680" cy="5120640"/>
+            <a:ext cx="5760720" cy="3657600"/>
           </a:xfrm>
           <a:prstGeom prst="rect">
             <a:avLst/>
@@ -3419,16 +3417,16 @@
           <a:ln/>
         </p:spPr>
         <p:txBody>
-          <a:bodyPr wrap="square" rtlCol="0" anchor="t"/>
-          <a:lstStyle/>
-          <a:p>
-            <a:pPr algn="l" indent="0" marL="0">
+          <a:bodyPr wrap="square" lIns="0" tIns="0" rIns="0" bIns="0" rtlCol="0" anchor="ctr"/>
+          <a:lstStyle/>
+          <a:p>
+            <a:pPr indent="0" marL="0">
               <a:buNone/>
             </a:pPr>
             <a:r>
               <a:rPr lang="en-US" sz="1900" b="1" dirty="0">
                 <a:solidFill>
-                  <a:schemeClr val="tx1"/>
+                  <a:srgbClr val="111111"/>
                 </a:solidFill>
               </a:rPr>
               <a:t>Threshold (binary call)</a:t>
@@ -3436,7 +3434,7 @@
             <a:endParaRPr lang="en-US" sz="1700" dirty="0"/>
           </a:p>
           <a:p>
-            <a:pPr algn="l" indent="0" marL="0">
+            <a:pPr indent="0" marL="0">
               <a:spcAft>
                 <a:spcPts val="1400"/>
               </a:spcAft>
@@ -3445,7 +3443,7 @@
             <a:r>
               <a:rPr lang="en-US" sz="1700" dirty="0">
                 <a:solidFill>
-                  <a:schemeClr val="tx1"/>
+                  <a:srgbClr val="111111"/>
                 </a:solidFill>
               </a:rPr>
               <a:t>The TOBIAS footprint is absent in young and called in aged. 396 Age Up sites, 179 Age Down. Stable = called in all three conditions.</a:t>
@@ -3453,13 +3451,13 @@
             <a:endParaRPr lang="en-US" sz="1700" dirty="0"/>
           </a:p>
           <a:p>
-            <a:pPr algn="l" indent="0" marL="0">
+            <a:pPr indent="0" marL="0">
               <a:buNone/>
             </a:pPr>
             <a:r>
               <a:rPr lang="en-US" sz="1900" b="1" dirty="0">
                 <a:solidFill>
-                  <a:schemeClr val="tx1"/>
+                  <a:srgbClr val="111111"/>
                 </a:solidFill>
               </a:rPr>
               <a:t>Δscore (graded)</a:t>
@@ -3467,7 +3465,7 @@
             <a:endParaRPr lang="en-US" sz="1700" dirty="0"/>
           </a:p>
           <a:p>
-            <a:pPr algn="l" indent="0" marL="0">
+            <a:pPr indent="0" marL="0">
               <a:spcAft>
                 <a:spcPts val="1400"/>
               </a:spcAft>
@@ -3476,7 +3474,7 @@
             <a:r>
               <a:rPr lang="en-US" sz="1700" dirty="0">
                 <a:solidFill>
-                  <a:schemeClr val="tx1"/>
+                  <a:srgbClr val="111111"/>
                 </a:solidFill>
               </a:rPr>
               <a:t>The top fifth of the change in binding score, whether or not the call ever crossed the line. 736 sites each way.</a:t>
@@ -3484,7 +3482,7 @@
             <a:endParaRPr lang="en-US" sz="1700" dirty="0"/>
           </a:p>
           <a:p>
-            <a:pPr algn="l" indent="0" marL="0">
+            <a:pPr indent="0" marL="0">
               <a:buNone/>
             </a:pPr>
             <a:r>
@@ -3507,12 +3505,12 @@
         </p:nvSpPr>
         <p:spPr>
           <a:xfrm>
-            <a:off x="502920" y="5029200"/>
-            <a:ext cx="5440680" cy="1188720"/>
+            <a:off x="502920" y="5074920"/>
+            <a:ext cx="5440680" cy="1234440"/>
           </a:xfrm>
           <a:prstGeom prst="roundRect">
             <a:avLst>
-              <a:gd name="adj" fmla="val 4615"/>
+              <a:gd name="adj" fmla="val 4444"/>
             </a:avLst>
           </a:prstGeom>
           <a:solidFill>
@@ -3534,7 +3532,7 @@
         </p:nvSpPr>
         <p:spPr>
           <a:xfrm>
-            <a:off x="612648" y="5120640"/>
+            <a:off x="612648" y="5166360"/>
             <a:ext cx="5221224" cy="548640"/>
           </a:xfrm>
           <a:prstGeom prst="rect">
@@ -3570,8 +3568,8 @@
         </p:nvSpPr>
         <p:spPr>
           <a:xfrm>
-            <a:off x="612648" y="5687568"/>
-            <a:ext cx="5221224" cy="457200"/>
+            <a:off x="612648" y="5733288"/>
+            <a:ext cx="5221224" cy="502920"/>
           </a:xfrm>
           <a:prstGeom prst="rect">
             <a:avLst/>
@@ -3592,21 +3590,7 @@
                   <a:srgbClr val="595959"/>
                 </a:solidFill>
               </a:rPr>
-              <a:t>Δscore vs measured</a:t>
-            </a:r>
-            <a:endParaRPr lang="en-US" sz="1200" dirty="0"/>
-          </a:p>
-          <a:p>
-            <a:pPr algn="ctr" indent="0" marL="0">
-              <a:buNone/>
-            </a:pPr>
-            <a:r>
-              <a:rPr lang="en-US" sz="1200" dirty="0">
-                <a:solidFill>
-                  <a:srgbClr val="595959"/>
-                </a:solidFill>
-              </a:rPr>
-              <a:t>snATAC change (age)</a:t>
+              <a:t>Δscore vs measured snATAC change (age)</a:t>
             </a:r>
             <a:endParaRPr lang="en-US" sz="1200" dirty="0"/>
           </a:p>
@@ -3620,12 +3604,12 @@
         </p:nvSpPr>
         <p:spPr>
           <a:xfrm>
-            <a:off x="6217920" y="5029200"/>
-            <a:ext cx="5440680" cy="1188720"/>
+            <a:off x="6217920" y="5074920"/>
+            <a:ext cx="5440680" cy="1234440"/>
           </a:xfrm>
           <a:prstGeom prst="roundRect">
             <a:avLst>
-              <a:gd name="adj" fmla="val 4615"/>
+              <a:gd name="adj" fmla="val 4444"/>
             </a:avLst>
           </a:prstGeom>
           <a:solidFill>
@@ -3647,7 +3631,7 @@
         </p:nvSpPr>
         <p:spPr>
           <a:xfrm>
-            <a:off x="6327648" y="5120640"/>
+            <a:off x="6327648" y="5166360"/>
             <a:ext cx="5221224" cy="548640"/>
           </a:xfrm>
           <a:prstGeom prst="rect">
@@ -3683,8 +3667,8 @@
         </p:nvSpPr>
         <p:spPr>
           <a:xfrm>
-            <a:off x="6327648" y="5687568"/>
-            <a:ext cx="5221224" cy="457200"/>
+            <a:off x="6327648" y="5733288"/>
+            <a:ext cx="5221224" cy="502920"/>
           </a:xfrm>
           <a:prstGeom prst="rect">
             <a:avLst/>
@@ -3705,21 +3689,7 @@
                   <a:srgbClr val="595959"/>
                 </a:solidFill>
               </a:rPr>
-              <a:t>threshold class vs</a:t>
-            </a:r>
-            <a:endParaRPr lang="en-US" sz="1200" dirty="0"/>
-          </a:p>
-          <a:p>
-            <a:pPr algn="ctr" indent="0" marL="0">
-              <a:buNone/>
-            </a:pPr>
-            <a:r>
-              <a:rPr lang="en-US" sz="1200" dirty="0">
-                <a:solidFill>
-                  <a:srgbClr val="595959"/>
-                </a:solidFill>
-              </a:rPr>
-              <a:t>measured change</a:t>
+              <a:t>threshold class vs measured change</a:t>
             </a:r>
             <a:endParaRPr lang="en-US" sz="1200" dirty="0"/>
           </a:p>
@@ -3771,8 +3741,8 @@
         </p:nvSpPr>
         <p:spPr>
           <a:xfrm>
-            <a:off x="6492240" y="3749040"/>
-            <a:ext cx="5166360" cy="914400"/>
+            <a:off x="6492240" y="3886200"/>
+            <a:ext cx="5166360" cy="822960"/>
           </a:xfrm>
           <a:prstGeom prst="rect">
             <a:avLst/>
@@ -3796,6 +3766,36 @@
               <a:t>The Δscore definition tracks the measured data about twice as well.</a:t>
             </a:r>
             <a:endParaRPr lang="en-US" sz="1500" dirty="0"/>
+          </a:p>
+        </p:txBody>
+      </p:sp>
+      <p:sp>
+        <p:nvSpPr>
+          <p:cNvPr id="13" name="Text 0"/>
+          <p:cNvSpPr/>
+          <p:nvPr>
+            <p:ph idx="101" type="body" hasCustomPrompt="1"/>
+          </p:nvPr>
+        </p:nvSpPr>
+        <p:spPr>
+          <a:xfrm>
+            <a:off x="502920" y="1234440"/>
+            <a:ext cx="11155680" cy="5120640"/>
+          </a:xfrm>
+          <a:prstGeom prst="rect">
+            <a:avLst/>
+          </a:prstGeom>
+          <a:noFill/>
+          <a:ln/>
+        </p:spPr>
+        <p:txBody>
+          <a:bodyPr wrap="square" rtlCol="0" anchor="t"/>
+          <a:lstStyle/>
+          <a:p>
+            <a:pPr algn="l" indent="0" marL="0">
+              <a:buNone/>
+            </a:pPr>
+            <a:endParaRPr lang="en-US" sz="1700" dirty="0"/>
           </a:p>
         </p:txBody>
       </p:sp>
@@ -4104,8 +4104,8 @@
         </p:blipFill>
         <p:spPr>
           <a:xfrm>
-            <a:off x="685800" y="1051560"/>
-            <a:ext cx="7589520" cy="4617720"/>
+            <a:off x="502920" y="1097280"/>
+            <a:ext cx="7498080" cy="4572000"/>
           </a:xfrm>
           <a:prstGeom prst="rect">
             <a:avLst/>
@@ -4120,8 +4120,8 @@
         </p:nvSpPr>
         <p:spPr>
           <a:xfrm>
-            <a:off x="8503920" y="1463040"/>
-            <a:ext cx="3154680" cy="3291840"/>
+            <a:off x="8275320" y="1554480"/>
+            <a:ext cx="3383280" cy="3474720"/>
           </a:xfrm>
           <a:prstGeom prst="rect">
             <a:avLst/>
@@ -4912,7 +4912,7 @@
         </p:blipFill>
         <p:spPr>
           <a:xfrm>
-            <a:off x="502920" y="1691640"/>
+            <a:off x="502920" y="1234440"/>
             <a:ext cx="11155680" cy="3246120"/>
           </a:xfrm>
           <a:prstGeom prst="rect">
@@ -4928,7 +4928,7 @@
         </p:nvSpPr>
         <p:spPr>
           <a:xfrm>
-            <a:off x="502920" y="5074920"/>
+            <a:off x="502920" y="4709160"/>
             <a:ext cx="2583180" cy="1051560"/>
           </a:xfrm>
           <a:prstGeom prst="roundRect">
@@ -4955,7 +4955,7 @@
         </p:nvSpPr>
         <p:spPr>
           <a:xfrm>
-            <a:off x="612648" y="5166360"/>
+            <a:off x="612648" y="4800600"/>
             <a:ext cx="2363724" cy="548640"/>
           </a:xfrm>
           <a:prstGeom prst="rect">
@@ -4991,7 +4991,7 @@
         </p:nvSpPr>
         <p:spPr>
           <a:xfrm>
-            <a:off x="612648" y="5733288"/>
+            <a:off x="612648" y="5367528"/>
             <a:ext cx="2363724" cy="320040"/>
           </a:xfrm>
           <a:prstGeom prst="rect">
@@ -5027,7 +5027,7 @@
         </p:nvSpPr>
         <p:spPr>
           <a:xfrm>
-            <a:off x="3360420" y="5074920"/>
+            <a:off x="3360420" y="4709160"/>
             <a:ext cx="2583180" cy="1051560"/>
           </a:xfrm>
           <a:prstGeom prst="roundRect">
@@ -5054,7 +5054,7 @@
         </p:nvSpPr>
         <p:spPr>
           <a:xfrm>
-            <a:off x="3470148" y="5166360"/>
+            <a:off x="3470148" y="4800600"/>
             <a:ext cx="2363724" cy="548640"/>
           </a:xfrm>
           <a:prstGeom prst="rect">
@@ -5090,7 +5090,7 @@
         </p:nvSpPr>
         <p:spPr>
           <a:xfrm>
-            <a:off x="3470148" y="5733288"/>
+            <a:off x="3470148" y="5367528"/>
             <a:ext cx="2363724" cy="320040"/>
           </a:xfrm>
           <a:prstGeom prst="rect">
@@ -5126,7 +5126,7 @@
         </p:nvSpPr>
         <p:spPr>
           <a:xfrm>
-            <a:off x="6217920" y="5074920"/>
+            <a:off x="6217920" y="4709160"/>
             <a:ext cx="2583180" cy="1051560"/>
           </a:xfrm>
           <a:prstGeom prst="roundRect">
@@ -5153,7 +5153,7 @@
         </p:nvSpPr>
         <p:spPr>
           <a:xfrm>
-            <a:off x="6327648" y="5166360"/>
+            <a:off x="6327648" y="4800600"/>
             <a:ext cx="2363724" cy="548640"/>
           </a:xfrm>
           <a:prstGeom prst="rect">
@@ -5189,7 +5189,7 @@
         </p:nvSpPr>
         <p:spPr>
           <a:xfrm>
-            <a:off x="6327648" y="5733288"/>
+            <a:off x="6327648" y="5367528"/>
             <a:ext cx="2363724" cy="320040"/>
           </a:xfrm>
           <a:prstGeom prst="rect">
@@ -5225,7 +5225,7 @@
         </p:nvSpPr>
         <p:spPr>
           <a:xfrm>
-            <a:off x="9075420" y="5074920"/>
+            <a:off x="9075420" y="4709160"/>
             <a:ext cx="2583180" cy="1051560"/>
           </a:xfrm>
           <a:prstGeom prst="roundRect">
@@ -5252,7 +5252,7 @@
         </p:nvSpPr>
         <p:spPr>
           <a:xfrm>
-            <a:off x="9185148" y="5166360"/>
+            <a:off x="9185148" y="4800600"/>
             <a:ext cx="2363724" cy="548640"/>
           </a:xfrm>
           <a:prstGeom prst="rect">
@@ -5288,7 +5288,7 @@
         </p:nvSpPr>
         <p:spPr>
           <a:xfrm>
-            <a:off x="9185148" y="5733288"/>
+            <a:off x="9185148" y="5367528"/>
             <a:ext cx="2363724" cy="320040"/>
           </a:xfrm>
           <a:prstGeom prst="rect">
@@ -5475,16 +5475,14 @@
       </p:sp>
       <p:sp>
         <p:nvSpPr>
-          <p:cNvPr id="3" name="Text 0"/>
-          <p:cNvSpPr/>
-          <p:nvPr>
-            <p:ph idx="101" type="body" hasCustomPrompt="1"/>
-          </p:nvPr>
+          <p:cNvPr id="3" name="Text 1"/>
+          <p:cNvSpPr txBox="1"/>
+          <p:nvPr/>
         </p:nvSpPr>
         <p:spPr>
           <a:xfrm>
             <a:off x="502920" y="1234440"/>
-            <a:ext cx="11155680" cy="5120640"/>
+            <a:ext cx="6720840" cy="3657600"/>
           </a:xfrm>
           <a:prstGeom prst="rect">
             <a:avLst/>
@@ -5493,10 +5491,10 @@
           <a:ln/>
         </p:spPr>
         <p:txBody>
-          <a:bodyPr wrap="square" rtlCol="0" anchor="t"/>
-          <a:lstStyle/>
-          <a:p>
-            <a:pPr algn="l" indent="0" marL="0">
+          <a:bodyPr wrap="square" lIns="0" tIns="0" rIns="0" bIns="0" rtlCol="0" anchor="ctr"/>
+          <a:lstStyle/>
+          <a:p>
+            <a:pPr indent="0" marL="0">
               <a:spcAft>
                 <a:spcPts val="1600"/>
               </a:spcAft>
@@ -5505,7 +5503,7 @@
             <a:r>
               <a:rPr lang="en-US" sz="1700" dirty="0">
                 <a:solidFill>
-                  <a:schemeClr val="tx1"/>
+                  <a:srgbClr val="111111"/>
                 </a:solidFill>
               </a:rPr>
               <a:t>Sites in the top fifth of binding-score gain with age differ from matched controls in four ways, and they all point the same direction:</a:t>
@@ -5513,14 +5511,14 @@
             <a:endParaRPr lang="en-US" sz="1700" dirty="0"/>
           </a:p>
           <a:p>
-            <a:pPr algn="l" marL="342900" indent="-342900">
+            <a:pPr marL="342900" indent="-342900">
               <a:buSzPct val="100000"/>
               <a:buChar char="•"/>
             </a:pPr>
             <a:r>
               <a:rPr lang="en-US" sz="1700" dirty="0">
                 <a:solidFill>
-                  <a:schemeClr val="tx1"/>
+                  <a:srgbClr val="111111"/>
                 </a:solidFill>
               </a:rPr>
               <a:t>They gain more from an added motif copy  (+0.38 vs +0.32, FDR &lt; 0.001)</a:t>
@@ -5528,14 +5526,14 @@
             <a:endParaRPr lang="en-US" sz="1700" dirty="0"/>
           </a:p>
           <a:p>
-            <a:pPr algn="l" marL="342900" indent="-342900">
+            <a:pPr marL="342900" indent="-342900">
               <a:buSzPct val="100000"/>
               <a:buChar char="•"/>
             </a:pPr>
             <a:r>
               <a:rPr lang="en-US" sz="1700" dirty="0">
                 <a:solidFill>
-                  <a:schemeClr val="tx1"/>
+                  <a:srgbClr val="111111"/>
                 </a:solidFill>
               </a:rPr>
               <a:t>They benefit more when that copy is near  (FDR 0.003)</a:t>
@@ -5543,14 +5541,14 @@
             <a:endParaRPr lang="en-US" sz="1700" dirty="0"/>
           </a:p>
           <a:p>
-            <a:pPr algn="l" marL="342900" indent="-342900">
+            <a:pPr marL="342900" indent="-342900">
               <a:buSzPct val="100000"/>
               <a:buChar char="•"/>
             </a:pPr>
             <a:r>
               <a:rPr lang="en-US" sz="1700" dirty="0">
                 <a:solidFill>
-                  <a:schemeClr val="tx1"/>
+                  <a:srgbClr val="111111"/>
                 </a:solidFill>
               </a:rPr>
               <a:t>They lose more from one damaged core base  (−0.60 vs −0.51, FDR 0.023)</a:t>
@@ -5558,7 +5556,7 @@
             <a:endParaRPr lang="en-US" sz="1700" dirty="0"/>
           </a:p>
           <a:p>
-            <a:pPr algn="l" marL="342900" indent="-342900">
+            <a:pPr marL="342900" indent="-342900">
               <a:spcAft>
                 <a:spcPts val="1600"/>
               </a:spcAft>
@@ -5568,7 +5566,7 @@
             <a:r>
               <a:rPr lang="en-US" sz="1700" dirty="0">
                 <a:solidFill>
-                  <a:schemeClr val="tx1"/>
+                  <a:srgbClr val="111111"/>
                 </a:solidFill>
               </a:rPr>
               <a:t>They carry a perfect consensus core more often  (84.5% vs 78.6%, p = 0.02)</a:t>
@@ -5654,7 +5652,7 @@
         </p:nvSpPr>
         <p:spPr>
           <a:xfrm>
-            <a:off x="502920" y="5120640"/>
+            <a:off x="502920" y="5074920"/>
             <a:ext cx="11155680" cy="548640"/>
           </a:xfrm>
           <a:prstGeom prst="rect">
@@ -5679,6 +5677,36 @@
               <a:t>Ageing gains AP-1 sites over losses 2.2 : 1. Exercise reverses it, 0.67 : 1.</a:t>
             </a:r>
             <a:endParaRPr lang="en-US" sz="1600" dirty="0"/>
+          </a:p>
+        </p:txBody>
+      </p:sp>
+      <p:sp>
+        <p:nvSpPr>
+          <p:cNvPr id="7" name="Text 0"/>
+          <p:cNvSpPr/>
+          <p:nvPr>
+            <p:ph idx="101" type="body" hasCustomPrompt="1"/>
+          </p:nvPr>
+        </p:nvSpPr>
+        <p:spPr>
+          <a:xfrm>
+            <a:off x="502920" y="1234440"/>
+            <a:ext cx="11155680" cy="5120640"/>
+          </a:xfrm>
+          <a:prstGeom prst="rect">
+            <a:avLst/>
+          </a:prstGeom>
+          <a:noFill/>
+          <a:ln/>
+        </p:spPr>
+        <p:txBody>
+          <a:bodyPr wrap="square" rtlCol="0" anchor="t"/>
+          <a:lstStyle/>
+          <a:p>
+            <a:pPr algn="l" indent="0" marL="0">
+              <a:buNone/>
+            </a:pPr>
+            <a:endParaRPr lang="en-US" sz="1700" dirty="0"/>
           </a:p>
         </p:txBody>
       </p:sp>

--- a/Analysis/AP1_AlphaGenome_results.pptx
+++ b/Analysis/AP1_AlphaGenome_results.pptx
@@ -17,9 +17,10 @@
     <p:sldId id="265" r:id="rId11"/>
     <p:sldId id="266" r:id="rId12"/>
     <p:sldId id="267" r:id="rId13"/>
+    <p:sldId id="268" r:id="rId14"/>
   </p:sldIdLst>
   <p:notesMasterIdLst>
-    <p:notesMasterId r:id="rId14"/>
+    <p:notesMasterId r:id="rId15"/>
   </p:notesMasterIdLst>
   <p:sldSz cx="12192000" cy="6858000"/>
   <p:notesSz cx="6858000" cy="12192000"/>
@@ -118,19 +119,19 @@
   <p:extLst>
     <p:ext uri="{521415D9-36F7-43E2-AB2F-B90AF26B5E84}">
       <p14:sectionLst xmlns:p14="http://schemas.microsoft.com/office/powerpoint/2010/main">
-        <p14:section name="Opening" id="{ff433115-9018-34ee-f477-cd82dbf7be35}">
+        <p14:section name="Opening" id="{448975b8-ac3e-4efe-f95f-ab45b2feecbf}">
           <p14:sldIdLst>
             <p14:sldId id="256"/>
           </p14:sldIdLst>
         </p14:section>
-        <p14:section name="Design" id="{bda7a694-89d3-613e-0e28-a6ac29cee23c}">
+        <p14:section name="Design" id="{7b400548-adce-797a-2158-b22833177468}">
           <p14:sldIdLst>
             <p14:sldId id="257"/>
+            <p14:sldId id="258"/>
           </p14:sldIdLst>
         </p14:section>
-        <p14:section name="Findings" id="{7fb85f0c-cd5e-446e-1c11-2933e4705097}">
+        <p14:section name="Findings" id="{59c579fd-2353-7f93-d2fc-d5830a213de7}">
           <p14:sldIdLst>
-            <p14:sldId id="258"/>
             <p14:sldId id="259"/>
             <p14:sldId id="260"/>
             <p14:sldId id="261"/>
@@ -138,12 +139,13 @@
             <p14:sldId id="263"/>
             <p14:sldId id="264"/>
             <p14:sldId id="265"/>
+            <p14:sldId id="266"/>
           </p14:sldIdLst>
         </p14:section>
-        <p14:section name="Conclusion" id="{afde0942-2935-4f67-ce67-4b9029a80c3f}">
+        <p14:section name="Conclusion" id="{884b4574-6906-0da0-bab7-0e37e59b21eb}">
           <p14:sldIdLst>
-            <p14:sldId id="266"/>
             <p14:sldId id="267"/>
+            <p14:sldId id="268"/>
           </p14:sldIdLst>
         </p14:section>
       </p14:sectionLst>
@@ -638,7 +640,7 @@
           <a:p>
             <a:r>
               <a:rPr lang="en-US" dirty="0"/>
-              <a:t>The comparable quantity is a ratio within each element, so assay scale cancels. The class direction disagrees: in the MPRA responsive elements depend MORE on their sequence, which separates intrinsic potential from what sets accessibility in the genome.</a:t>
+              <a:t>The titration experiment was designed before this hypothesis existed, so this is a prediction rather than a fit. Caveat: the motif-sensitivity result does not survive matching on measured accessibility; the core-quality result does.</a:t>
             </a:r>
             <a:endParaRPr lang="en-US" dirty="0"/>
           </a:p>
@@ -726,7 +728,7 @@
           <a:p>
             <a:r>
               <a:rPr lang="en-US" dirty="0"/>
-              <a:t>The negative result is well controlled and is itself the point: responsiveness is not encoded in local sequence architecture.</a:t>
+              <a:t>The comparable quantity is a ratio within each element, so assay scale cancels. The class direction disagrees: in the MPRA responsive elements depend MORE on their sequence, which separates intrinsic potential from what sets accessibility in the genome.</a:t>
             </a:r>
             <a:endParaRPr lang="en-US" dirty="0"/>
           </a:p>
@@ -814,7 +816,7 @@
           <a:p>
             <a:r>
               <a:rPr lang="en-US" dirty="0"/>
-              <a:t>Also open: whether the MEF2 deficit at Dynamic sites is detection or genuine differential occupancy of equally-present motifs.</a:t>
+              <a:t>The negative result is well controlled and is itself the point: responsiveness is not encoded in local sequence architecture.</a:t>
             </a:r>
             <a:endParaRPr lang="en-US" dirty="0"/>
           </a:p>
@@ -838,6 +840,94 @@
             <a:fld id="{F7021451-1387-4CA6-816F-3879F97B5CBC}" type="slidenum">
               <a:rPr lang="en-US"/>
               <a:t>12</a:t>
+            </a:fld>
+            <a:endParaRPr lang="en-US"/>
+          </a:p>
+        </p:txBody>
+      </p:sp>
+    </p:spTree>
+    <p:extLst>
+      <p:ext uri="{BB962C8B-B14F-4D97-AF65-F5344CB8AC3E}">
+        <p14:creationId xmlns:p14="http://schemas.microsoft.com/office/powerpoint/2010/main" val="1024086991"/>
+      </p:ext>
+    </p:extLst>
+  </p:cSld>
+  <p:clrMapOvr>
+    <a:masterClrMapping/>
+  </p:clrMapOvr>
+</p:notes>
+</file>
+
+<file path=ppt/notesSlides/notesSlide13.xml><?xml version="1.0" encoding="utf-8"?>
+<p:notes xmlns:a="http://schemas.openxmlformats.org/drawingml/2006/main" xmlns:r="http://schemas.openxmlformats.org/officeDocument/2006/relationships" xmlns:p="http://schemas.openxmlformats.org/presentationml/2006/main">
+  <p:cSld>
+    <p:spTree>
+      <p:nvGrpSpPr>
+        <p:cNvPr id="1" name=""/>
+        <p:cNvGrpSpPr/>
+        <p:nvPr/>
+      </p:nvGrpSpPr>
+      <p:grpSpPr>
+        <a:xfrm>
+          <a:off x="0" y="0"/>
+          <a:ext cx="0" cy="0"/>
+          <a:chOff x="0" y="0"/>
+          <a:chExt cx="0" cy="0"/>
+        </a:xfrm>
+      </p:grpSpPr>
+      <p:sp>
+        <p:nvSpPr>
+          <p:cNvPr id="2" name="Slide Image Placeholder 1"/>
+          <p:cNvSpPr>
+            <a:spLocks noGrp="1" noRot="1" noChangeAspect="1"/>
+          </p:cNvSpPr>
+          <p:nvPr>
+            <p:ph type="sldImg"/>
+          </p:nvPr>
+        </p:nvSpPr>
+        <p:spPr/>
+      </p:sp>
+      <p:sp>
+        <p:nvSpPr>
+          <p:cNvPr id="3" name="Notes Placeholder 2"/>
+          <p:cNvSpPr>
+            <a:spLocks noGrp="1"/>
+          </p:cNvSpPr>
+          <p:nvPr>
+            <p:ph type="body" idx="1"/>
+          </p:nvPr>
+        </p:nvSpPr>
+        <p:spPr/>
+        <p:txBody>
+          <a:bodyPr/>
+          <a:lstStyle/>
+          <a:p>
+            <a:r>
+              <a:rPr lang="en-US" dirty="0"/>
+              <a:t>Also open: whether the MEF2 deficit at Dynamic sites is detection or genuine differential occupancy of equally-present motifs.</a:t>
+            </a:r>
+            <a:endParaRPr lang="en-US" dirty="0"/>
+          </a:p>
+        </p:txBody>
+      </p:sp>
+      <p:sp>
+        <p:nvSpPr>
+          <p:cNvPr id="4" name="Slide Number Placeholder 3"/>
+          <p:cNvSpPr>
+            <a:spLocks noGrp="1"/>
+          </p:cNvSpPr>
+          <p:nvPr>
+            <p:ph type="sldNum" sz="quarter" idx="10"/>
+          </p:nvPr>
+        </p:nvSpPr>
+        <p:spPr/>
+        <p:txBody>
+          <a:bodyPr/>
+          <a:lstStyle/>
+          <a:p>
+            <a:fld id="{F7021451-1387-4CA6-816F-3879F97B5CBC}" type="slidenum">
+              <a:rPr lang="en-US"/>
+              <a:t>13</a:t>
             </a:fld>
             <a:endParaRPr lang="en-US"/>
           </a:p>
@@ -990,7 +1080,7 @@
           <a:p>
             <a:r>
               <a:rPr lang="en-US" dirty="0"/>
-              <a:t>Raw, Dynamic sites lose less to every wide edit. After matching on predicted accessibility, peak width and TSS distance, nothing survives. A classifier on the whole response profile is at chance, AUC 0.49.</a:t>
+              <a:t>The 131 kb window is what AlphaGenome takes as input; we only ever edit the middle 600 bp. Each tile is 3 replicate random replacements, averaged. Effects are log2(edited / native).</a:t>
             </a:r>
             <a:endParaRPr lang="en-US" dirty="0"/>
           </a:p>
@@ -1078,7 +1168,7 @@
           <a:p>
             <a:r>
               <a:rPr lang="en-US" dirty="0"/>
-              <a:t>Importance is the loss from replacing a 10 bp tile over that factor's footprint, measured against the site's own footprint-free tiles. Holds under five different adjustments.</a:t>
+              <a:t>Raw, Dynamic sites lose less to every wide edit. After matching on predicted accessibility, peak width and TSS distance, nothing survives. A classifier on the whole response profile is at chance, AUC 0.49.</a:t>
             </a:r>
             <a:endParaRPr lang="en-US" dirty="0"/>
           </a:p>
@@ -1166,7 +1256,7 @@
           <a:p>
             <a:r>
               <a:rPr lang="en-US" dirty="0"/>
-              <a:t>MEF2 is enriched 2.67x at 11-25 bp against 1.47x for KLF/SP, modal spacing 14 bp between centres. No 10-11 bp repeat survives correction, so no fixed protein-protein register.</a:t>
+              <a:t>Importance is the loss from replacing a 10 bp tile over that factor's footprint, measured against the site's own footprint-free tiles, holding under five adjustments. The class comparison is at site level inside the 442 matched pairs; nothing survives BH correction. AP-1's own footprints are the one uncorrected p &lt; 0.05, and Dynamic sites lean slightly MORE on them.</a:t>
             </a:r>
             <a:endParaRPr lang="en-US" dirty="0"/>
           </a:p>
@@ -1254,7 +1344,7 @@
           <a:p>
             <a:r>
               <a:rPr lang="en-US" dirty="0"/>
-              <a:t>Top: a Stable site, 85% of its dependence on the AP-1 motif. Bottom: an age-gained site where the AP-1 motif is worth -0.18 and the strongest other window -1.48. Tnfaip8 rises with age, matching the AP-1 gain.</a:t>
+              <a:t>MEF2 is enriched 2.67x at 11-25 bp against 1.47x for KLF/SP, modal spacing 14 bp between centres. No 10-11 bp repeat survives correction, so no fixed protein-protein register.</a:t>
             </a:r>
             <a:endParaRPr lang="en-US" dirty="0"/>
           </a:p>
@@ -1342,7 +1432,7 @@
           <a:p>
             <a:r>
               <a:rPr lang="en-US" dirty="0"/>
-              <a:t>10 of 16 scan features separate Dynamic from matched Stable. Share of dependence within 85 bp 0.63 vs 0.74, spread 94 vs 86 bp, largest single-base effect 0.74 vs 0.90. Age Up is the most diffuse class of all.</a:t>
+              <a:t>Top: a Stable site, 85% of its dependence on the AP-1 motif. Bottom: an age-gained site where the AP-1 motif is worth -0.18 and the strongest other window -1.48. Tnfaip8 rises with age, matching the AP-1 gain.</a:t>
             </a:r>
             <a:endParaRPr lang="en-US" dirty="0"/>
           </a:p>
@@ -1430,7 +1520,7 @@
           <a:p>
             <a:r>
               <a:rPr lang="en-US" dirty="0"/>
-              <a:t>The dose-response slope tracks core quality measured independently from the genome sequence, rho 0.30. Orientation is irrelevant, as expected for a near-palindrome.</a:t>
+              <a:t>10 of 16 scan features separate Dynamic from matched Stable. Share of dependence within 85 bp 0.63 vs 0.74, spread 94 vs 86 bp, largest single-base effect 0.74 vs 0.90. Age Up is the most diffuse class of all.</a:t>
             </a:r>
             <a:endParaRPr lang="en-US" dirty="0"/>
           </a:p>
@@ -1518,7 +1608,7 @@
           <a:p>
             <a:r>
               <a:rPr lang="en-US" dirty="0"/>
-              <a:t>The titration experiment was designed before this hypothesis existed, so this is a prediction rather than a fit. Caveat: the motif-sensitivity result does not survive matching on measured accessibility; the core-quality result does.</a:t>
+              <a:t>The dose-response slope tracks core quality measured independently from the genome sequence, rho 0.30. Orientation is irrelevant, as expected for a near-palindrome.</a:t>
             </a:r>
             <a:endParaRPr lang="en-US" dirty="0"/>
           </a:p>
@@ -2570,7 +2660,7 @@
                   <a:schemeClr val="tx1"/>
                 </a:solidFill>
               </a:rPr>
-              <a:t>An independent reporter assay agrees</a:t>
+              <a:t>Age-gained sites read AP-1 dosage more sharply</a:t>
             </a:r>
             <a:endParaRPr lang="en-US" sz="2800" dirty="0"/>
           </a:p>
@@ -2578,7 +2668,7 @@
       </p:sp>
       <p:pic>
         <p:nvPicPr>
-          <p:cNvPr id="3" name="Image 0" descr="/Users/z5162865/WongLab/AlphaGenome_Ap1/Analysis/mpra_scan/figures/m1_mpra_vs_scan.png">    </p:cNvPr>
+          <p:cNvPr id="3" name="Image 0" descr="/Users/z5162865/WongLab/AlphaGenome_Ap1/Analysis/slide_figures/s5_age_gained.png">    </p:cNvPr>
           <p:cNvPicPr>
             <a:picLocks noChangeAspect="1"/>
           </p:cNvPicPr>
@@ -2592,8 +2682,8 @@
         </p:blipFill>
         <p:spPr>
           <a:xfrm>
-            <a:off x="502920" y="2377440"/>
-            <a:ext cx="11155680" cy="3383280"/>
+            <a:off x="805222" y="1097280"/>
+            <a:ext cx="10551077" cy="3794760"/>
           </a:xfrm>
           <a:prstGeom prst="rect">
             <a:avLst/>
@@ -2602,41 +2692,65 @@
       </p:pic>
       <p:sp>
         <p:nvSpPr>
-          <p:cNvPr id="4" name="stat-0"/>
-          <p:cNvSpPr/>
+          <p:cNvPr id="4" name="massaction"/>
+          <p:cNvSpPr txBox="1"/>
           <p:nvPr/>
         </p:nvSpPr>
         <p:spPr>
           <a:xfrm>
-            <a:off x="502920" y="1097280"/>
-            <a:ext cx="5440680" cy="1051560"/>
-          </a:xfrm>
-          <a:prstGeom prst="roundRect">
-            <a:avLst>
-              <a:gd name="adj" fmla="val 5217"/>
-            </a:avLst>
+            <a:off x="502920" y="5029200"/>
+            <a:ext cx="11155680" cy="914400"/>
+          </a:xfrm>
+          <a:prstGeom prst="rect">
+            <a:avLst/>
           </a:prstGeom>
           <a:solidFill>
             <a:srgbClr val="F2F2F2"/>
           </a:solidFill>
-          <a:ln w="12700">
-            <a:solidFill>
-              <a:srgbClr val="E2E2E2"/>
-            </a:solidFill>
-            <a:prstDash val="solid"/>
-          </a:ln>
-        </p:spPr>
-      </p:sp>
-      <p:sp>
-        <p:nvSpPr>
-          <p:cNvPr id="5" name="Text 2"/>
-          <p:cNvSpPr txBox="1"/>
-          <p:nvPr/>
-        </p:nvSpPr>
-        <p:spPr>
-          <a:xfrm>
-            <a:off x="612648" y="1188720"/>
-            <a:ext cx="5221224" cy="548640"/>
+          <a:ln/>
+        </p:spPr>
+        <p:txBody>
+          <a:bodyPr wrap="square" lIns="152400" tIns="152400" rIns="152400" bIns="152400" rtlCol="0" anchor="ctr"/>
+          <a:lstStyle/>
+          <a:p>
+            <a:pPr indent="0" marL="0">
+              <a:buNone/>
+            </a:pPr>
+            <a:r>
+              <a:rPr lang="en-US" sz="1700" b="1" dirty="0">
+                <a:solidFill>
+                  <a:srgbClr val="C2551C"/>
+                </a:solidFill>
+              </a:rPr>
+              <a:t>Mass action   </a:t>
+            </a:r>
+            <a:pPr indent="0" marL="0">
+              <a:buNone/>
+            </a:pPr>
+            <a:r>
+              <a:rPr lang="en-US" sz="1500" dirty="0">
+                <a:solidFill>
+                  <a:srgbClr val="000000"/>
+                </a:solidFill>
+              </a:rPr>
+              <a:t>if ageing raises AP-1 activity, occupancy rises first at the highest-affinity motifs — exactly the sites that gain. Losing binding is not the reverse: age-lost sites show no sequence signature at all.</a:t>
+            </a:r>
+            <a:endParaRPr lang="en-US" sz="1700" dirty="0"/>
+          </a:p>
+        </p:txBody>
+      </p:sp>
+      <p:sp>
+        <p:nvSpPr>
+          <p:cNvPr id="6" name="Text 0"/>
+          <p:cNvSpPr/>
+          <p:nvPr>
+            <p:ph idx="101" type="body" hasCustomPrompt="1"/>
+          </p:nvPr>
+        </p:nvSpPr>
+        <p:spPr>
+          <a:xfrm>
+            <a:off x="502920" y="5943600"/>
+            <a:ext cx="11155680" cy="658368"/>
           </a:xfrm>
           <a:prstGeom prst="rect">
             <a:avLst/>
@@ -2645,204 +2759,12 @@
           <a:ln/>
         </p:spPr>
         <p:txBody>
-          <a:bodyPr wrap="square" lIns="0" tIns="0" rIns="0" bIns="0" rtlCol="0" anchor="ctr"/>
-          <a:lstStyle/>
-          <a:p>
-            <a:pPr algn="ctr" indent="0" marL="0">
-              <a:buNone/>
-            </a:pPr>
-            <a:r>
-              <a:rPr lang="en-US" sz="3000" b="1" dirty="0">
-                <a:solidFill>
-                  <a:srgbClr val="1F6FB2"/>
-                </a:solidFill>
-              </a:rPr>
-              <a:t>7.5%</a:t>
-            </a:r>
-            <a:endParaRPr lang="en-US" sz="3000" dirty="0"/>
-          </a:p>
-        </p:txBody>
-      </p:sp>
-      <p:sp>
-        <p:nvSpPr>
-          <p:cNvPr id="6" name="Text 3"/>
-          <p:cNvSpPr txBox="1"/>
-          <p:nvPr/>
-        </p:nvSpPr>
-        <p:spPr>
-          <a:xfrm>
-            <a:off x="612648" y="1755648"/>
-            <a:ext cx="5221224" cy="320040"/>
-          </a:xfrm>
-          <a:prstGeom prst="rect">
-            <a:avLst/>
-          </a:prstGeom>
-          <a:noFill/>
-          <a:ln/>
-        </p:spPr>
-        <p:txBody>
-          <a:bodyPr wrap="square" lIns="0" tIns="0" rIns="0" bIns="0" rtlCol="0" anchor="ctr"/>
-          <a:lstStyle/>
-          <a:p>
-            <a:pPr algn="ctr" indent="0" marL="0">
-              <a:buNone/>
-            </a:pPr>
-            <a:r>
-              <a:rPr lang="en-US" sz="1200" dirty="0">
-                <a:solidFill>
-                  <a:srgbClr val="595959"/>
-                </a:solidFill>
-              </a:rPr>
-              <a:t>AlphaGenome: the motif's share of local dependence</a:t>
-            </a:r>
-            <a:endParaRPr lang="en-US" sz="1200" dirty="0"/>
-          </a:p>
-        </p:txBody>
-      </p:sp>
-      <p:sp>
-        <p:nvSpPr>
-          <p:cNvPr id="7" name="stat-1"/>
-          <p:cNvSpPr/>
-          <p:nvPr/>
-        </p:nvSpPr>
-        <p:spPr>
-          <a:xfrm>
-            <a:off x="6217920" y="1097280"/>
-            <a:ext cx="5440680" cy="1051560"/>
-          </a:xfrm>
-          <a:prstGeom prst="roundRect">
-            <a:avLst>
-              <a:gd name="adj" fmla="val 5217"/>
-            </a:avLst>
-          </a:prstGeom>
-          <a:solidFill>
-            <a:srgbClr val="F2F2F2"/>
-          </a:solidFill>
-          <a:ln w="12700">
-            <a:solidFill>
-              <a:srgbClr val="E2E2E2"/>
-            </a:solidFill>
-            <a:prstDash val="solid"/>
-          </a:ln>
-        </p:spPr>
-      </p:sp>
-      <p:sp>
-        <p:nvSpPr>
-          <p:cNvPr id="8" name="Text 5"/>
-          <p:cNvSpPr txBox="1"/>
-          <p:nvPr/>
-        </p:nvSpPr>
-        <p:spPr>
-          <a:xfrm>
-            <a:off x="6327648" y="1188720"/>
-            <a:ext cx="5221224" cy="548640"/>
-          </a:xfrm>
-          <a:prstGeom prst="rect">
-            <a:avLst/>
-          </a:prstGeom>
-          <a:noFill/>
-          <a:ln/>
-        </p:spPr>
-        <p:txBody>
-          <a:bodyPr wrap="square" lIns="0" tIns="0" rIns="0" bIns="0" rtlCol="0" anchor="ctr"/>
-          <a:lstStyle/>
-          <a:p>
-            <a:pPr algn="ctr" indent="0" marL="0">
-              <a:buNone/>
-            </a:pPr>
-            <a:r>
-              <a:rPr lang="en-US" sz="3000" b="1" dirty="0">
-                <a:solidFill>
-                  <a:srgbClr val="C2551C"/>
-                </a:solidFill>
-              </a:rPr>
-              <a:t>9.3%</a:t>
-            </a:r>
-            <a:endParaRPr lang="en-US" sz="3000" dirty="0"/>
-          </a:p>
-        </p:txBody>
-      </p:sp>
-      <p:sp>
-        <p:nvSpPr>
-          <p:cNvPr id="9" name="Text 6"/>
-          <p:cNvSpPr txBox="1"/>
-          <p:nvPr/>
-        </p:nvSpPr>
-        <p:spPr>
-          <a:xfrm>
-            <a:off x="6327648" y="1755648"/>
-            <a:ext cx="5221224" cy="320040"/>
-          </a:xfrm>
-          <a:prstGeom prst="rect">
-            <a:avLst/>
-          </a:prstGeom>
-          <a:noFill/>
-          <a:ln/>
-        </p:spPr>
-        <p:txBody>
-          <a:bodyPr wrap="square" lIns="0" tIns="0" rIns="0" bIns="0" rtlCol="0" anchor="ctr"/>
-          <a:lstStyle/>
-          <a:p>
-            <a:pPr algn="ctr" indent="0" marL="0">
-              <a:buNone/>
-            </a:pPr>
-            <a:r>
-              <a:rPr lang="en-US" sz="1200" dirty="0">
-                <a:solidFill>
-                  <a:srgbClr val="595959"/>
-                </a:solidFill>
-              </a:rPr>
-              <a:t>fibroblast MPRA: the same quantity, measured in the lab</a:t>
-            </a:r>
-            <a:endParaRPr lang="en-US" sz="1200" dirty="0"/>
-          </a:p>
-        </p:txBody>
-      </p:sp>
-      <p:sp>
-        <p:nvSpPr>
-          <p:cNvPr id="10" name="Text 0"/>
-          <p:cNvSpPr/>
-          <p:nvPr>
-            <p:ph idx="101" type="body" hasCustomPrompt="1"/>
-          </p:nvPr>
-        </p:nvSpPr>
-        <p:spPr>
-          <a:xfrm>
-            <a:off x="502920" y="5943600"/>
-            <a:ext cx="11155680" cy="658368"/>
-          </a:xfrm>
-          <a:prstGeom prst="rect">
-            <a:avLst/>
-          </a:prstGeom>
-          <a:noFill/>
-          <a:ln/>
-        </p:spPr>
-        <p:txBody>
           <a:bodyPr wrap="square" rtlCol="0" anchor="t"/>
           <a:lstStyle/>
           <a:p>
             <a:pPr algn="l" indent="0" marL="0">
               <a:buNone/>
             </a:pPr>
-            <a:r>
-              <a:rPr lang="en-US" sz="1500" b="1" dirty="0">
-                <a:solidFill>
-                  <a:srgbClr val="C2551C"/>
-                </a:solidFill>
-              </a:rPr>
-              <a:t>Takeaway   </a:t>
-            </a:r>
-            <a:pPr algn="l" indent="0" marL="0">
-              <a:buNone/>
-            </a:pPr>
-            <a:r>
-              <a:rPr lang="en-US" sz="1500" dirty="0">
-                <a:solidFill>
-                  <a:srgbClr val="111111"/>
-                </a:solidFill>
-              </a:rPr>
-              <a:t>two assays, different cell types and readouts, both put the AP-1 motif under a tenth of its 170 bp surroundings</a:t>
-            </a:r>
             <a:endParaRPr lang="en-US" sz="1500" dirty="0"/>
           </a:p>
         </p:txBody>
@@ -2949,24 +2871,73 @@
                   <a:schemeClr val="tx1"/>
                 </a:solidFill>
               </a:rPr>
-              <a:t>What this changes</a:t>
+              <a:t>An independent reporter assay agrees</a:t>
             </a:r>
             <a:endParaRPr lang="en-US" sz="2800" dirty="0"/>
           </a:p>
         </p:txBody>
       </p:sp>
-      <p:sp>
-        <p:nvSpPr>
-          <p:cNvPr id="3" name="Text 0"/>
+      <p:pic>
+        <p:nvPicPr>
+          <p:cNvPr id="3" name="Image 0" descr="/Users/z5162865/WongLab/AlphaGenome_Ap1/Analysis/slide_figures/s6_mpra.png">    </p:cNvPr>
+          <p:cNvPicPr>
+            <a:picLocks noChangeAspect="1"/>
+          </p:cNvPicPr>
+          <p:nvPr/>
+        </p:nvPicPr>
+        <p:blipFill>
+          <a:blip r:embed="rId1"/>
+          <a:stretch>
+            <a:fillRect/>
+          </a:stretch>
+        </p:blipFill>
+        <p:spPr>
+          <a:xfrm>
+            <a:off x="1191113" y="2240280"/>
+            <a:ext cx="9779295" cy="3520440"/>
+          </a:xfrm>
+          <a:prstGeom prst="rect">
+            <a:avLst/>
+          </a:prstGeom>
+        </p:spPr>
+      </p:pic>
+      <p:sp>
+        <p:nvSpPr>
+          <p:cNvPr id="4" name="stat-0"/>
           <p:cNvSpPr/>
-          <p:nvPr>
-            <p:ph idx="101" type="body" hasCustomPrompt="1"/>
-          </p:nvPr>
-        </p:nvSpPr>
-        <p:spPr>
-          <a:xfrm>
-            <a:off x="502920" y="1234440"/>
-            <a:ext cx="11155680" cy="5120640"/>
+          <p:nvPr/>
+        </p:nvSpPr>
+        <p:spPr>
+          <a:xfrm>
+            <a:off x="502920" y="1097280"/>
+            <a:ext cx="5440680" cy="1051560"/>
+          </a:xfrm>
+          <a:prstGeom prst="roundRect">
+            <a:avLst>
+              <a:gd name="adj" fmla="val 5217"/>
+            </a:avLst>
+          </a:prstGeom>
+          <a:solidFill>
+            <a:srgbClr val="F2F2F2"/>
+          </a:solidFill>
+          <a:ln w="12700">
+            <a:solidFill>
+              <a:srgbClr val="E2E2E2"/>
+            </a:solidFill>
+            <a:prstDash val="solid"/>
+          </a:ln>
+        </p:spPr>
+      </p:sp>
+      <p:sp>
+        <p:nvSpPr>
+          <p:cNvPr id="5" name="Text 2"/>
+          <p:cNvSpPr txBox="1"/>
+          <p:nvPr/>
+        </p:nvSpPr>
+        <p:spPr>
+          <a:xfrm>
+            <a:off x="612648" y="1188720"/>
+            <a:ext cx="5221224" cy="548640"/>
           </a:xfrm>
           <a:prstGeom prst="rect">
             <a:avLst/>
@@ -2975,6 +2946,179 @@
           <a:ln/>
         </p:spPr>
         <p:txBody>
+          <a:bodyPr wrap="square" lIns="0" tIns="0" rIns="0" bIns="0" rtlCol="0" anchor="ctr"/>
+          <a:lstStyle/>
+          <a:p>
+            <a:pPr algn="ctr" indent="0" marL="0">
+              <a:buNone/>
+            </a:pPr>
+            <a:r>
+              <a:rPr lang="en-US" sz="3000" b="1" dirty="0">
+                <a:solidFill>
+                  <a:srgbClr val="1F6FB2"/>
+                </a:solidFill>
+              </a:rPr>
+              <a:t>7.5%</a:t>
+            </a:r>
+            <a:endParaRPr lang="en-US" sz="3000" dirty="0"/>
+          </a:p>
+        </p:txBody>
+      </p:sp>
+      <p:sp>
+        <p:nvSpPr>
+          <p:cNvPr id="6" name="Text 3"/>
+          <p:cNvSpPr txBox="1"/>
+          <p:nvPr/>
+        </p:nvSpPr>
+        <p:spPr>
+          <a:xfrm>
+            <a:off x="612648" y="1755648"/>
+            <a:ext cx="5221224" cy="320040"/>
+          </a:xfrm>
+          <a:prstGeom prst="rect">
+            <a:avLst/>
+          </a:prstGeom>
+          <a:noFill/>
+          <a:ln/>
+        </p:spPr>
+        <p:txBody>
+          <a:bodyPr wrap="square" lIns="0" tIns="0" rIns="0" bIns="0" rtlCol="0" anchor="ctr"/>
+          <a:lstStyle/>
+          <a:p>
+            <a:pPr algn="ctr" indent="0" marL="0">
+              <a:buNone/>
+            </a:pPr>
+            <a:r>
+              <a:rPr lang="en-US" sz="1200" dirty="0">
+                <a:solidFill>
+                  <a:srgbClr val="595959"/>
+                </a:solidFill>
+              </a:rPr>
+              <a:t>AlphaGenome: the motif's share of local dependence</a:t>
+            </a:r>
+            <a:endParaRPr lang="en-US" sz="1200" dirty="0"/>
+          </a:p>
+        </p:txBody>
+      </p:sp>
+      <p:sp>
+        <p:nvSpPr>
+          <p:cNvPr id="7" name="stat-1"/>
+          <p:cNvSpPr/>
+          <p:nvPr/>
+        </p:nvSpPr>
+        <p:spPr>
+          <a:xfrm>
+            <a:off x="6217920" y="1097280"/>
+            <a:ext cx="5440680" cy="1051560"/>
+          </a:xfrm>
+          <a:prstGeom prst="roundRect">
+            <a:avLst>
+              <a:gd name="adj" fmla="val 5217"/>
+            </a:avLst>
+          </a:prstGeom>
+          <a:solidFill>
+            <a:srgbClr val="F2F2F2"/>
+          </a:solidFill>
+          <a:ln w="12700">
+            <a:solidFill>
+              <a:srgbClr val="E2E2E2"/>
+            </a:solidFill>
+            <a:prstDash val="solid"/>
+          </a:ln>
+        </p:spPr>
+      </p:sp>
+      <p:sp>
+        <p:nvSpPr>
+          <p:cNvPr id="8" name="Text 5"/>
+          <p:cNvSpPr txBox="1"/>
+          <p:nvPr/>
+        </p:nvSpPr>
+        <p:spPr>
+          <a:xfrm>
+            <a:off x="6327648" y="1188720"/>
+            <a:ext cx="5221224" cy="548640"/>
+          </a:xfrm>
+          <a:prstGeom prst="rect">
+            <a:avLst/>
+          </a:prstGeom>
+          <a:noFill/>
+          <a:ln/>
+        </p:spPr>
+        <p:txBody>
+          <a:bodyPr wrap="square" lIns="0" tIns="0" rIns="0" bIns="0" rtlCol="0" anchor="ctr"/>
+          <a:lstStyle/>
+          <a:p>
+            <a:pPr algn="ctr" indent="0" marL="0">
+              <a:buNone/>
+            </a:pPr>
+            <a:r>
+              <a:rPr lang="en-US" sz="3000" b="1" dirty="0">
+                <a:solidFill>
+                  <a:srgbClr val="C2551C"/>
+                </a:solidFill>
+              </a:rPr>
+              <a:t>9.3%</a:t>
+            </a:r>
+            <a:endParaRPr lang="en-US" sz="3000" dirty="0"/>
+          </a:p>
+        </p:txBody>
+      </p:sp>
+      <p:sp>
+        <p:nvSpPr>
+          <p:cNvPr id="9" name="Text 6"/>
+          <p:cNvSpPr txBox="1"/>
+          <p:nvPr/>
+        </p:nvSpPr>
+        <p:spPr>
+          <a:xfrm>
+            <a:off x="6327648" y="1755648"/>
+            <a:ext cx="5221224" cy="320040"/>
+          </a:xfrm>
+          <a:prstGeom prst="rect">
+            <a:avLst/>
+          </a:prstGeom>
+          <a:noFill/>
+          <a:ln/>
+        </p:spPr>
+        <p:txBody>
+          <a:bodyPr wrap="square" lIns="0" tIns="0" rIns="0" bIns="0" rtlCol="0" anchor="ctr"/>
+          <a:lstStyle/>
+          <a:p>
+            <a:pPr algn="ctr" indent="0" marL="0">
+              <a:buNone/>
+            </a:pPr>
+            <a:r>
+              <a:rPr lang="en-US" sz="1200" dirty="0">
+                <a:solidFill>
+                  <a:srgbClr val="595959"/>
+                </a:solidFill>
+              </a:rPr>
+              <a:t>fibroblast MPRA: the same quantity, measured in the lab</a:t>
+            </a:r>
+            <a:endParaRPr lang="en-US" sz="1200" dirty="0"/>
+          </a:p>
+        </p:txBody>
+      </p:sp>
+      <p:sp>
+        <p:nvSpPr>
+          <p:cNvPr id="10" name="Text 0"/>
+          <p:cNvSpPr/>
+          <p:nvPr>
+            <p:ph idx="101" type="body" hasCustomPrompt="1"/>
+          </p:nvPr>
+        </p:nvSpPr>
+        <p:spPr>
+          <a:xfrm>
+            <a:off x="502920" y="5943600"/>
+            <a:ext cx="11155680" cy="658368"/>
+          </a:xfrm>
+          <a:prstGeom prst="rect">
+            <a:avLst/>
+          </a:prstGeom>
+          <a:noFill/>
+          <a:ln/>
+        </p:spPr>
+        <p:txBody>
           <a:bodyPr wrap="square" rtlCol="0" anchor="t"/>
           <a:lstStyle/>
           <a:p>
@@ -2982,90 +3126,25 @@
               <a:buNone/>
             </a:pPr>
             <a:r>
-              <a:rPr lang="en-US" sz="1900" b="1" dirty="0">
-                <a:solidFill>
-                  <a:schemeClr val="tx1"/>
-                </a:solidFill>
-              </a:rPr>
-              <a:t>A responsive AP-1 site is a marginal one, not a differently-built one</a:t>
-            </a:r>
-            <a:endParaRPr lang="en-US" sz="1700" dirty="0"/>
-          </a:p>
-          <a:p>
+              <a:rPr lang="en-US" sz="1500" b="1" dirty="0">
+                <a:solidFill>
+                  <a:srgbClr val="C2551C"/>
+                </a:solidFill>
+              </a:rPr>
+              <a:t>Takeaway   </a:t>
+            </a:r>
             <a:pPr algn="l" indent="0" marL="0">
-              <a:spcAft>
-                <a:spcPts val="1600"/>
-              </a:spcAft>
-              <a:buNone/>
-            </a:pPr>
-            <a:r>
-              <a:rPr lang="en-US" sz="1700" dirty="0">
-                <a:solidFill>
-                  <a:schemeClr val="tx1"/>
-                </a:solidFill>
-              </a:rPr>
-              <a:t>Weaker AP-1 motif, fewer AP-1 motifs around it, sparser and less MEF2-rich neighbourhood, dependence spread thinly across the element. Nothing about how it responds to mutation differs.</a:t>
-            </a:r>
-            <a:endParaRPr lang="en-US" sz="1700" dirty="0"/>
-          </a:p>
-          <a:p>
-            <a:pPr algn="l" indent="0" marL="0">
-              <a:buNone/>
-            </a:pPr>
-            <a:r>
-              <a:rPr lang="en-US" sz="1900" b="1" dirty="0">
-                <a:solidFill>
-                  <a:schemeClr val="tx1"/>
-                </a:solidFill>
-              </a:rPr>
-              <a:t>That is why it fluctuates</a:t>
-            </a:r>
-            <a:endParaRPr lang="en-US" sz="1700" dirty="0"/>
-          </a:p>
-          <a:p>
-            <a:pPr algn="l" indent="0" marL="0">
-              <a:spcAft>
-                <a:spcPts val="1600"/>
-              </a:spcAft>
-              <a:buNone/>
-            </a:pPr>
-            <a:r>
-              <a:rPr lang="en-US" sz="1700" dirty="0">
-                <a:solidFill>
-                  <a:schemeClr val="tx1"/>
-                </a:solidFill>
-              </a:rPr>
-              <a:t>A weak motif in a poorly-supported enhancer sits near the occupancy threshold, so its binding tracks how much AP-1 protein is available — which is what ageing changes.</a:t>
-            </a:r>
-            <a:endParaRPr lang="en-US" sz="1700" dirty="0"/>
-          </a:p>
-          <a:p>
-            <a:pPr algn="l" indent="0" marL="0">
-              <a:buNone/>
-            </a:pPr>
-            <a:r>
-              <a:rPr lang="en-US" sz="1900" b="1" dirty="0">
-                <a:solidFill>
-                  <a:schemeClr val="tx1"/>
-                </a:solidFill>
-              </a:rPr>
-              <a:t>Gain and loss are different events</a:t>
-            </a:r>
-            <a:endParaRPr lang="en-US" sz="1700" dirty="0"/>
-          </a:p>
-          <a:p>
-            <a:pPr algn="l" indent="0" marL="0">
-              <a:buNone/>
-            </a:pPr>
-            <a:r>
-              <a:rPr lang="en-US" sz="1700" dirty="0">
-                <a:solidFill>
-                  <a:schemeClr val="tx1"/>
-                </a:solidFill>
-              </a:rPr>
-              <a:t>Age-gained sites have better cores and read dosage more sharply. Age-lost sites are MEF2-rich, high-scoring sites drifting down, with no sequence signature of their own.</a:t>
-            </a:r>
-            <a:endParaRPr lang="en-US" sz="1700" dirty="0"/>
+              <a:buNone/>
+            </a:pPr>
+            <a:r>
+              <a:rPr lang="en-US" sz="1500" dirty="0">
+                <a:solidFill>
+                  <a:srgbClr val="111111"/>
+                </a:solidFill>
+              </a:rPr>
+              <a:t>two assays, different cell types and readouts, both put the AP-1 motif under a tenth of its 170 bp surroundings</a:t>
+            </a:r>
+            <a:endParaRPr lang="en-US" sz="1500" dirty="0"/>
           </a:p>
         </p:txBody>
       </p:sp>
@@ -3171,7 +3250,7 @@
                   <a:schemeClr val="tx1"/>
                 </a:solidFill>
               </a:rPr>
-              <a:t>Where this goes next</a:t>
+              <a:t>What this changes</a:t>
             </a:r>
             <a:endParaRPr lang="en-US" sz="2800" dirty="0"/>
           </a:p>
@@ -3209,14 +3288,14 @@
                   <a:schemeClr val="tx1"/>
                 </a:solidFill>
               </a:rPr>
-              <a:t>Fine-tuned condition-aware head</a:t>
+              <a:t>A responsive AP-1 site is a marginal one, not a differently-built one</a:t>
             </a:r>
             <a:endParaRPr lang="en-US" sz="1700" dirty="0"/>
           </a:p>
           <a:p>
             <a:pPr algn="l" indent="0" marL="0">
               <a:spcAft>
-                <a:spcPts val="1400"/>
+                <a:spcPts val="1600"/>
               </a:spcAft>
               <a:buNone/>
             </a:pPr>
@@ -3226,7 +3305,7 @@
                   <a:schemeClr val="tx1"/>
                 </a:solidFill>
               </a:rPr>
-              <a:t>A frozen-trunk probe on our own cardiomyocyte and fibroblast ATAC already reaches profile r = 0.65 against 0.59 for the built-in heart head, training 0.01% of the model. Next: 1 bp insertion targets, then LoRA.</a:t>
+              <a:t>Weaker AP-1 motif, fewer AP-1 motifs around it, sparser and less MEF2-rich neighbourhood, dependence spread thinly across the element. Nothing about how it responds to mutation differs.</a:t>
             </a:r>
             <a:endParaRPr lang="en-US" sz="1700" dirty="0"/>
           </a:p>
@@ -3240,14 +3319,14 @@
                   <a:schemeClr val="tx1"/>
                 </a:solidFill>
               </a:rPr>
-              <a:t>Does AP-1 activity actually rise with age?</a:t>
+              <a:t>That is why it fluctuates</a:t>
             </a:r>
             <a:endParaRPr lang="en-US" sz="1700" dirty="0"/>
           </a:p>
           <a:p>
             <a:pPr algn="l" indent="0" marL="0">
               <a:spcAft>
-                <a:spcPts val="1400"/>
+                <a:spcPts val="1600"/>
               </a:spcAft>
               <a:buNone/>
             </a:pPr>
@@ -3257,7 +3336,7 @@
                   <a:schemeClr val="tx1"/>
                 </a:solidFill>
               </a:rPr>
-              <a:t>The mass-action reading rests on it. One check against the RNA.</a:t>
+              <a:t>A weak motif in a poorly-supported enhancer sits near the occupancy threshold, so its binding tracks how much AP-1 protein is available — which is what ageing changes.</a:t>
             </a:r>
             <a:endParaRPr lang="en-US" sz="1700" dirty="0"/>
           </a:p>
@@ -3271,7 +3350,7 @@
                   <a:schemeClr val="tx1"/>
                 </a:solidFill>
               </a:rPr>
-              <a:t>Fibroblast scan</a:t>
+              <a:t>Gain and loss are different events</a:t>
             </a:r>
             <a:endParaRPr lang="en-US" sz="1700" dirty="0"/>
           </a:p>
@@ -3285,7 +3364,7 @@
                   <a:schemeClr val="tx1"/>
                 </a:solidFill>
               </a:rPr>
-              <a:t>If MEF2 also tops the partner ranking in fibroblasts, the ranking is a model artefact rather than cardiac biology. This is the sharpest available control.</a:t>
+              <a:t>Age-gained sites have better cores and read dosage more sharply. Age-lost sites are MEF2-rich, high-scoring sites drifting down, with no sequence signature of their own.</a:t>
             </a:r>
             <a:endParaRPr lang="en-US" sz="1700" dirty="0"/>
           </a:p>
@@ -3331,6 +3410,228 @@
             <a:fld id="{F7021451-1387-4CA6-816F-3879F97B5CBC}" type="slidenum">
               <a:rPr b="0" lang="en-US"/>
               <a:t>12</a:t>
+            </a:fld>
+            <a:endParaRPr lang="en-US"/>
+          </a:p>
+        </p:txBody>
+      </p:sp>
+    </p:spTree>
+  </p:cSld>
+  <p:clrMapOvr>
+    <a:masterClrMapping/>
+  </p:clrMapOvr>
+</p:sld>
+</file>
+
+<file path=ppt/slides/slide13.xml><?xml version="1.0" encoding="utf-8"?>
+<p:sld xmlns:a="http://schemas.openxmlformats.org/drawingml/2006/main" xmlns:r="http://schemas.openxmlformats.org/officeDocument/2006/relationships" xmlns:p="http://schemas.openxmlformats.org/presentationml/2006/main">
+  <p:cSld name="Slide 13">
+    <p:spTree>
+      <p:nvGrpSpPr>
+        <p:cNvPr id="1" name=""/>
+        <p:cNvGrpSpPr/>
+        <p:nvPr/>
+      </p:nvGrpSpPr>
+      <p:grpSpPr>
+        <a:xfrm>
+          <a:off x="0" y="0"/>
+          <a:ext cx="0" cy="0"/>
+          <a:chOff x="0" y="0"/>
+          <a:chExt cx="0" cy="0"/>
+        </a:xfrm>
+      </p:grpSpPr>
+      <p:sp>
+        <p:nvSpPr>
+          <p:cNvPr id="2" name="Text 0"/>
+          <p:cNvSpPr/>
+          <p:nvPr>
+            <p:ph idx="100" type="title" hasCustomPrompt="1"/>
+          </p:nvPr>
+        </p:nvSpPr>
+        <p:spPr>
+          <a:xfrm>
+            <a:off x="502920" y="301752"/>
+            <a:ext cx="11155680" cy="685800"/>
+          </a:xfrm>
+          <a:prstGeom prst="rect">
+            <a:avLst/>
+          </a:prstGeom>
+          <a:noFill/>
+          <a:ln/>
+        </p:spPr>
+        <p:txBody>
+          <a:bodyPr wrap="square" rtlCol="0" anchor="ctr"/>
+          <a:lstStyle/>
+          <a:p>
+            <a:pPr algn="l" indent="0" marL="0">
+              <a:buNone/>
+            </a:pPr>
+            <a:r>
+              <a:rPr lang="en-US" sz="2800" b="1" dirty="0">
+                <a:solidFill>
+                  <a:schemeClr val="tx1"/>
+                </a:solidFill>
+              </a:rPr>
+              <a:t>Where this goes next</a:t>
+            </a:r>
+            <a:endParaRPr lang="en-US" sz="2800" dirty="0"/>
+          </a:p>
+        </p:txBody>
+      </p:sp>
+      <p:sp>
+        <p:nvSpPr>
+          <p:cNvPr id="3" name="Text 0"/>
+          <p:cNvSpPr/>
+          <p:nvPr>
+            <p:ph idx="101" type="body" hasCustomPrompt="1"/>
+          </p:nvPr>
+        </p:nvSpPr>
+        <p:spPr>
+          <a:xfrm>
+            <a:off x="502920" y="1234440"/>
+            <a:ext cx="11155680" cy="5120640"/>
+          </a:xfrm>
+          <a:prstGeom prst="rect">
+            <a:avLst/>
+          </a:prstGeom>
+          <a:noFill/>
+          <a:ln/>
+        </p:spPr>
+        <p:txBody>
+          <a:bodyPr wrap="square" rtlCol="0" anchor="t"/>
+          <a:lstStyle/>
+          <a:p>
+            <a:pPr algn="l" indent="0" marL="0">
+              <a:buNone/>
+            </a:pPr>
+            <a:r>
+              <a:rPr lang="en-US" sz="1900" b="1" dirty="0">
+                <a:solidFill>
+                  <a:schemeClr val="tx1"/>
+                </a:solidFill>
+              </a:rPr>
+              <a:t>Fine-tuned condition-aware head</a:t>
+            </a:r>
+            <a:endParaRPr lang="en-US" sz="1700" dirty="0"/>
+          </a:p>
+          <a:p>
+            <a:pPr algn="l" indent="0" marL="0">
+              <a:spcAft>
+                <a:spcPts val="1400"/>
+              </a:spcAft>
+              <a:buNone/>
+            </a:pPr>
+            <a:r>
+              <a:rPr lang="en-US" sz="1700" dirty="0">
+                <a:solidFill>
+                  <a:schemeClr val="tx1"/>
+                </a:solidFill>
+              </a:rPr>
+              <a:t>A frozen-trunk probe on our own cardiomyocyte and fibroblast ATAC already reaches profile r = 0.65 against 0.59 for the built-in heart head, training 0.01% of the model. Next: 1 bp insertion targets, then LoRA.</a:t>
+            </a:r>
+            <a:endParaRPr lang="en-US" sz="1700" dirty="0"/>
+          </a:p>
+          <a:p>
+            <a:pPr algn="l" indent="0" marL="0">
+              <a:buNone/>
+            </a:pPr>
+            <a:r>
+              <a:rPr lang="en-US" sz="1900" b="1" dirty="0">
+                <a:solidFill>
+                  <a:schemeClr val="tx1"/>
+                </a:solidFill>
+              </a:rPr>
+              <a:t>Does AP-1 activity actually rise with age?</a:t>
+            </a:r>
+            <a:endParaRPr lang="en-US" sz="1700" dirty="0"/>
+          </a:p>
+          <a:p>
+            <a:pPr algn="l" indent="0" marL="0">
+              <a:spcAft>
+                <a:spcPts val="1400"/>
+              </a:spcAft>
+              <a:buNone/>
+            </a:pPr>
+            <a:r>
+              <a:rPr lang="en-US" sz="1700" dirty="0">
+                <a:solidFill>
+                  <a:schemeClr val="tx1"/>
+                </a:solidFill>
+              </a:rPr>
+              <a:t>The mass-action reading rests on it. One check against the RNA.</a:t>
+            </a:r>
+            <a:endParaRPr lang="en-US" sz="1700" dirty="0"/>
+          </a:p>
+          <a:p>
+            <a:pPr algn="l" indent="0" marL="0">
+              <a:buNone/>
+            </a:pPr>
+            <a:r>
+              <a:rPr lang="en-US" sz="1900" b="1" dirty="0">
+                <a:solidFill>
+                  <a:schemeClr val="tx1"/>
+                </a:solidFill>
+              </a:rPr>
+              <a:t>Fibroblast scan</a:t>
+            </a:r>
+            <a:endParaRPr lang="en-US" sz="1700" dirty="0"/>
+          </a:p>
+          <a:p>
+            <a:pPr algn="l" indent="0" marL="0">
+              <a:buNone/>
+            </a:pPr>
+            <a:r>
+              <a:rPr lang="en-US" sz="1700" dirty="0">
+                <a:solidFill>
+                  <a:schemeClr val="tx1"/>
+                </a:solidFill>
+              </a:rPr>
+              <a:t>If MEF2 also tops the partner ranking in fibroblasts, the ranking is a model artefact rather than cardiac biology. This is the sharpest available control.</a:t>
+            </a:r>
+            <a:endParaRPr lang="en-US" sz="1700" dirty="0"/>
+          </a:p>
+        </p:txBody>
+      </p:sp>
+      <p:sp>
+        <p:nvSpPr>
+          <p:cNvPr id="25" name="Slide Number Placeholder 0"/>
+          <p:cNvSpPr>
+            <a:spLocks noGrp="1"/>
+          </p:cNvSpPr>
+          <p:nvPr>
+            <p:ph type="sldNum" sz="quarter" idx="4294967295"/>
+          </p:nvPr>
+        </p:nvSpPr>
+        <p:spPr>
+          <a:xfrm>
+            <a:off x="11658600" y="6446520"/>
+            <a:ext cx="800000" cy="300000"/>
+          </a:xfrm>
+          <a:prstGeom prst="rect">
+            <a:avLst/>
+          </a:prstGeom>
+          <a:extLst>
+            <a:ext uri="{C572A759-6A51-4108-AA02-DFA0A04FC94B}">
+              <ma14:wrappingTextBoxFlag xmlns:ma14="http://schemas.microsoft.com/office/mac/drawingml/2011/main" val="0"/>
+            </a:ext>
+          </a:extLst>
+        </p:spPr>
+        <p:txBody>
+          <a:bodyPr/>
+          <a:lstStyle>
+            <a:lvl1pPr>
+              <a:defRPr sz="1000">
+                <a:solidFill>
+                  <a:srgbClr val="A6A6A6"/>
+                </a:solidFill>
+              </a:defRPr>
+            </a:lvl1pPr>
+          </a:lstStyle>
+          <a:p>
+            <a:pPr algn="l"/>
+            <a:fld id="{F7021451-1387-4CA6-816F-3879F97B5CBC}" type="slidenum">
+              <a:rPr b="0" lang="en-US"/>
+              <a:t>13</a:t>
             </a:fld>
             <a:endParaRPr lang="en-US"/>
           </a:p>
@@ -3704,7 +4005,7 @@
         <p:spPr>
           <a:xfrm>
             <a:off x="6492240" y="1371600"/>
-            <a:ext cx="5166360" cy="2194560"/>
+            <a:ext cx="5166360" cy="1371600"/>
           </a:xfrm>
           <a:prstGeom prst="rect">
             <a:avLst/>
@@ -3741,7 +4042,7 @@
         </p:nvSpPr>
         <p:spPr>
           <a:xfrm>
-            <a:off x="6492240" y="3886200"/>
+            <a:off x="6492240" y="2971800"/>
             <a:ext cx="5166360" cy="822960"/>
           </a:xfrm>
           <a:prstGeom prst="rect">
@@ -3901,7 +4202,7 @@
                   <a:schemeClr val="tx1"/>
                 </a:solidFill>
               </a:rPr>
-              <a:t>Responsive sites are not built differently</a:t>
+              <a:t>What we did to every site</a:t>
             </a:r>
             <a:endParaRPr lang="en-US" sz="2800" dirty="0"/>
           </a:p>
@@ -3909,7 +4210,7 @@
       </p:sp>
       <p:pic>
         <p:nvPicPr>
-          <p:cNvPr id="3" name="Image 0" descr="/Users/z5162865/WongLab/AlphaGenome_Ap1/Analysis/dynamic/figures/y5_mutation_type_profile.png">    </p:cNvPr>
+          <p:cNvPr id="3" name="Image 0" descr="/Users/z5162865/WongLab/AlphaGenome_Ap1/Analysis/slide_figures/s1_method_schematic.png">    </p:cNvPr>
           <p:cNvPicPr>
             <a:picLocks noChangeAspect="1"/>
           </p:cNvPicPr>
@@ -3923,8 +4224,8 @@
         </p:blipFill>
         <p:spPr>
           <a:xfrm>
-            <a:off x="1325880" y="1051560"/>
-            <a:ext cx="9509760" cy="4754880"/>
+            <a:off x="623066" y="1097280"/>
+            <a:ext cx="10915388" cy="4663440"/>
           </a:xfrm>
           <a:prstGeom prst="rect">
             <a:avLst/>
@@ -3974,7 +4275,7 @@
                   <a:srgbClr val="111111"/>
                 </a:solidFill>
               </a:rPr>
-              <a:t>all 21 mutation types agree within 0.14 log2 once chromatin context is matched; the raw gap was context, not sequence</a:t>
+              <a:t>3,678 sites × 364 edits each, every edit read as the change in predicted accessibility over the surrounding 170 bp</a:t>
             </a:r>
             <a:endParaRPr lang="en-US" sz="1500" dirty="0"/>
           </a:p>
@@ -4082,7 +4383,7 @@
                   <a:schemeClr val="tx1"/>
                 </a:solidFill>
               </a:rPr>
-              <a:t>What these sites actually depend on is MEF2</a:t>
+              <a:t>Most of the difference is chromatin, not sequence</a:t>
             </a:r>
             <a:endParaRPr lang="en-US" sz="2800" dirty="0"/>
           </a:p>
@@ -4090,7 +4391,7 @@
       </p:sp>
       <p:pic>
         <p:nvPicPr>
-          <p:cNvPr id="3" name="Image 0" descr="/Users/z5162865/WongLab/AlphaGenome_Ap1/Analysis/partners/figures/p1_tile_importance_by_family.png">    </p:cNvPr>
+          <p:cNvPr id="3" name="Image 0" descr="/Users/z5162865/WongLab/AlphaGenome_Ap1/Analysis/slide_figures/s2_matched_null.png">    </p:cNvPr>
           <p:cNvPicPr>
             <a:picLocks noChangeAspect="1"/>
           </p:cNvPicPr>
@@ -4104,8 +4405,8 @@
         </p:blipFill>
         <p:spPr>
           <a:xfrm>
-            <a:off x="502920" y="1097280"/>
-            <a:ext cx="7498080" cy="4572000"/>
+            <a:off x="663702" y="1097280"/>
+            <a:ext cx="10834117" cy="4663440"/>
           </a:xfrm>
           <a:prstGeom prst="rect">
             <a:avLst/>
@@ -4114,14 +4415,16 @@
       </p:pic>
       <p:sp>
         <p:nvSpPr>
-          <p:cNvPr id="4" name="Text 1"/>
-          <p:cNvSpPr txBox="1"/>
-          <p:nvPr/>
-        </p:nvSpPr>
-        <p:spPr>
-          <a:xfrm>
-            <a:off x="8275320" y="1554480"/>
-            <a:ext cx="3383280" cy="3474720"/>
+          <p:cNvPr id="4" name="Text 0"/>
+          <p:cNvSpPr/>
+          <p:nvPr>
+            <p:ph idx="101" type="body" hasCustomPrompt="1"/>
+          </p:nvPr>
+        </p:nvSpPr>
+        <p:spPr>
+          <a:xfrm>
+            <a:off x="502920" y="5943600"/>
+            <a:ext cx="11155680" cy="658368"/>
           </a:xfrm>
           <a:prstGeom prst="rect">
             <a:avLst/>
@@ -4130,116 +4433,30 @@
           <a:ln/>
         </p:spPr>
         <p:txBody>
-          <a:bodyPr wrap="square" lIns="0" tIns="0" rIns="0" bIns="0" rtlCol="0" anchor="ctr"/>
-          <a:lstStyle/>
-          <a:p>
-            <a:pPr indent="0" marL="0">
-              <a:buNone/>
-            </a:pPr>
-            <a:r>
-              <a:rPr lang="en-US" sz="2200" b="1" dirty="0">
+          <a:bodyPr wrap="square" rtlCol="0" anchor="t"/>
+          <a:lstStyle/>
+          <a:p>
+            <a:pPr algn="l" indent="0" marL="0">
+              <a:buNone/>
+            </a:pPr>
+            <a:r>
+              <a:rPr lang="en-US" sz="1500" b="1" dirty="0">
                 <a:solidFill>
                   <a:srgbClr val="C2551C"/>
                 </a:solidFill>
               </a:rPr>
-              <a:t>2.49 million</a:t>
-            </a:r>
-            <a:endParaRPr lang="en-US" sz="2200" dirty="0"/>
-          </a:p>
-          <a:p>
-            <a:pPr indent="0" marL="0">
-              <a:spcAft>
-                <a:spcPts val="1600"/>
-              </a:spcAft>
-              <a:buNone/>
-            </a:pPr>
-            <a:r>
-              <a:rPr lang="en-US" sz="1400" dirty="0">
-                <a:solidFill>
-                  <a:srgbClr val="595959"/>
-                </a:solidFill>
-              </a:rPr>
-              <a:t>footprinted cardiomyocyte TFBS mapped onto the scan</a:t>
-            </a:r>
-            <a:endParaRPr lang="en-US" sz="2200" dirty="0"/>
-          </a:p>
-          <a:p>
-            <a:pPr indent="0" marL="0">
-              <a:spcAft>
-                <a:spcPts val="1200"/>
-              </a:spcAft>
+              <a:t>Takeaway   </a:t>
+            </a:r>
+            <a:pPr algn="l" indent="0" marL="0">
               <a:buNone/>
             </a:pPr>
             <a:r>
               <a:rPr lang="en-US" sz="1500" dirty="0">
                 <a:solidFill>
-                  <a:srgbClr val="000000"/>
-                </a:solidFill>
-              </a:rPr>
-              <a:t>A MEF2 neighbour matters about eight times more than a second AP-1 site.</a:t>
-            </a:r>
-            <a:endParaRPr lang="en-US" sz="2200" dirty="0"/>
-          </a:p>
-          <a:p>
-            <a:pPr indent="0" marL="0">
-              <a:buNone/>
-            </a:pPr>
-            <a:r>
-              <a:rPr lang="en-US" sz="1500" dirty="0">
-                <a:solidFill>
-                  <a:srgbClr val="595959"/>
-                </a:solidFill>
-              </a:rPr>
-              <a:t>The commonest factors — KLF/SP — matter least.</a:t>
-            </a:r>
-            <a:endParaRPr lang="en-US" sz="2200" dirty="0"/>
-          </a:p>
-        </p:txBody>
-      </p:sp>
-      <p:sp>
-        <p:nvSpPr>
-          <p:cNvPr id="5" name="Text 0"/>
-          <p:cNvSpPr/>
-          <p:nvPr>
-            <p:ph idx="101" type="body" hasCustomPrompt="1"/>
-          </p:nvPr>
-        </p:nvSpPr>
-        <p:spPr>
-          <a:xfrm>
-            <a:off x="502920" y="5943600"/>
-            <a:ext cx="11155680" cy="658368"/>
-          </a:xfrm>
-          <a:prstGeom prst="rect">
-            <a:avLst/>
-          </a:prstGeom>
-          <a:noFill/>
-          <a:ln/>
-        </p:spPr>
-        <p:txBody>
-          <a:bodyPr wrap="square" rtlCol="0" anchor="t"/>
-          <a:lstStyle/>
-          <a:p>
-            <a:pPr algn="l" indent="0" marL="0">
-              <a:buNone/>
-            </a:pPr>
-            <a:r>
-              <a:rPr lang="en-US" sz="1500" b="1" dirty="0">
-                <a:solidFill>
-                  <a:srgbClr val="C2551C"/>
-                </a:solidFill>
-              </a:rPr>
-              <a:t>Takeaway   </a:t>
-            </a:r>
-            <a:pPr algn="l" indent="0" marL="0">
-              <a:buNone/>
-            </a:pPr>
-            <a:r>
-              <a:rPr lang="en-US" sz="1500" dirty="0">
-                <a:solidFill>
                   <a:srgbClr val="111111"/>
                 </a:solidFill>
               </a:rPr>
-              <a:t>the model rediscovered the cardiac programme — MEF2, GATA, NFI, TEAD — without being told any of it</a:t>
+              <a:t>the motif and the whole peak behave the same once context is matched; a residual 170 bp difference survives, and the next slide shows what it is</a:t>
             </a:r>
             <a:endParaRPr lang="en-US" sz="1500" dirty="0"/>
           </a:p>
@@ -4347,7 +4564,7 @@
                   <a:schemeClr val="tx1"/>
                 </a:solidFill>
               </a:rPr>
-              <a:t>Partners sit just outside the motif, with no helical phasing</a:t>
+              <a:t>Both classes lean on the same partners</a:t>
             </a:r>
             <a:endParaRPr lang="en-US" sz="2800" dirty="0"/>
           </a:p>
@@ -4355,7 +4572,7 @@
       </p:sp>
       <p:pic>
         <p:nvPicPr>
-          <p:cNvPr id="3" name="Image 0" descr="/Users/z5162865/WongLab/AlphaGenome_Ap1/Analysis/distance_rules/figures/r3_close_range.png">    </p:cNvPr>
+          <p:cNvPr id="3" name="Image 0" descr="/Users/z5162865/WongLab/AlphaGenome_Ap1/Analysis/slide_figures/s8_partners.png">    </p:cNvPr>
           <p:cNvPicPr>
             <a:picLocks noChangeAspect="1"/>
           </p:cNvPicPr>
@@ -4369,8 +4586,8 @@
         </p:blipFill>
         <p:spPr>
           <a:xfrm>
-            <a:off x="1463040" y="1371600"/>
-            <a:ext cx="9235440" cy="4251960"/>
+            <a:off x="502920" y="1335951"/>
+            <a:ext cx="8229600" cy="4094658"/>
           </a:xfrm>
           <a:prstGeom prst="rect">
             <a:avLst/>
@@ -4379,7 +4596,108 @@
       </p:pic>
       <p:sp>
         <p:nvSpPr>
-          <p:cNvPr id="4" name="Text 0"/>
+          <p:cNvPr id="4" name="Text 1"/>
+          <p:cNvSpPr txBox="1"/>
+          <p:nvPr/>
+        </p:nvSpPr>
+        <p:spPr>
+          <a:xfrm>
+            <a:off x="8915400" y="1371600"/>
+            <a:ext cx="2743200" cy="4023360"/>
+          </a:xfrm>
+          <a:prstGeom prst="rect">
+            <a:avLst/>
+          </a:prstGeom>
+          <a:noFill/>
+          <a:ln/>
+        </p:spPr>
+        <p:txBody>
+          <a:bodyPr wrap="square" lIns="0" tIns="0" rIns="0" bIns="0" rtlCol="0" anchor="ctr"/>
+          <a:lstStyle/>
+          <a:p>
+            <a:pPr indent="0" marL="0">
+              <a:buNone/>
+            </a:pPr>
+            <a:r>
+              <a:rPr lang="en-US" sz="2200" b="1" dirty="0">
+                <a:solidFill>
+                  <a:srgbClr val="C2551C"/>
+                </a:solidFill>
+              </a:rPr>
+              <a:t>2.49 million</a:t>
+            </a:r>
+            <a:endParaRPr lang="en-US" sz="2200" dirty="0"/>
+          </a:p>
+          <a:p>
+            <a:pPr indent="0" marL="0">
+              <a:spcAft>
+                <a:spcPts val="1400"/>
+              </a:spcAft>
+              <a:buNone/>
+            </a:pPr>
+            <a:r>
+              <a:rPr lang="en-US" sz="1400" dirty="0">
+                <a:solidFill>
+                  <a:srgbClr val="595959"/>
+                </a:solidFill>
+              </a:rPr>
+              <a:t>footprinted cardiomyocyte TFBS mapped onto the scan</a:t>
+            </a:r>
+            <a:endParaRPr lang="en-US" sz="2200" dirty="0"/>
+          </a:p>
+          <a:p>
+            <a:pPr indent="0" marL="0">
+              <a:spcAft>
+                <a:spcPts val="1200"/>
+              </a:spcAft>
+              <a:buNone/>
+            </a:pPr>
+            <a:r>
+              <a:rPr lang="en-US" sz="1450" dirty="0">
+                <a:solidFill>
+                  <a:srgbClr val="000000"/>
+                </a:solidFill>
+              </a:rPr>
+              <a:t>The ranking is the validation: MEF2, GATA, NFI and TEAD come out on top, and the model was never told any of them.</a:t>
+            </a:r>
+            <a:endParaRPr lang="en-US" sz="2200" dirty="0"/>
+          </a:p>
+          <a:p>
+            <a:pPr indent="0" marL="0">
+              <a:spcAft>
+                <a:spcPts val="1200"/>
+              </a:spcAft>
+              <a:buNone/>
+            </a:pPr>
+            <a:r>
+              <a:rPr lang="en-US" sz="1450" dirty="0">
+                <a:solidFill>
+                  <a:srgbClr val="000000"/>
+                </a:solidFill>
+              </a:rPr>
+              <a:t>The class split is the question, and the answer is no. Not one family matters more to a Dynamic site than to its matched Stable partner.</a:t>
+            </a:r>
+            <a:endParaRPr lang="en-US" sz="2200" dirty="0"/>
+          </a:p>
+          <a:p>
+            <a:pPr indent="0" marL="0">
+              <a:buNone/>
+            </a:pPr>
+            <a:r>
+              <a:rPr lang="en-US" sz="1450" i="1" dirty="0">
+                <a:solidFill>
+                  <a:srgbClr val="595959"/>
+                </a:solidFill>
+              </a:rPr>
+              <a:t>Whatever makes a site responsive, it is not a different cast of neighbours.</a:t>
+            </a:r>
+            <a:endParaRPr lang="en-US" sz="2200" dirty="0"/>
+          </a:p>
+        </p:txBody>
+      </p:sp>
+      <p:sp>
+        <p:nvSpPr>
+          <p:cNvPr id="5" name="Text 0"/>
           <p:cNvSpPr/>
           <p:nvPr>
             <p:ph idx="101" type="body" hasCustomPrompt="1"/>
@@ -4420,7 +4738,7 @@
                   <a:srgbClr val="111111"/>
                 </a:solidFill>
               </a:rPr>
-              <a:t>cooperative occupancy across a nucleosome-scale window, not a rigid composite element</a:t>
+              <a:t>the cast of partners is identical in both classes — what differs is how the dependence is spread across them</a:t>
             </a:r>
             <a:endParaRPr lang="en-US" sz="1500" dirty="0"/>
           </a:p>
@@ -4528,7 +4846,7 @@
                   <a:schemeClr val="tx1"/>
                 </a:solidFill>
               </a:rPr>
-              <a:t>One locus, two architectures</a:t>
+              <a:t>The partner that matters is the one that sits closest</a:t>
             </a:r>
             <a:endParaRPr lang="en-US" sz="2800" dirty="0"/>
           </a:p>
@@ -4536,7 +4854,7 @@
       </p:sp>
       <p:pic>
         <p:nvPicPr>
-          <p:cNvPr id="3" name="Image 0" descr="/Users/z5162865/WongLab/AlphaGenome_Ap1/Analysis/example_track/example_scan_track.png">    </p:cNvPr>
+          <p:cNvPr id="3" name="Image 0" descr="/Users/z5162865/WongLab/AlphaGenome_Ap1/Analysis/slide_figures/s7_spacing.png">    </p:cNvPr>
           <p:cNvPicPr>
             <a:picLocks noChangeAspect="1"/>
           </p:cNvPicPr>
@@ -4550,8 +4868,8 @@
         </p:blipFill>
         <p:spPr>
           <a:xfrm>
-            <a:off x="1600200" y="1005840"/>
-            <a:ext cx="8961120" cy="4800600"/>
+            <a:off x="502920" y="1143849"/>
+            <a:ext cx="11155680" cy="4570302"/>
           </a:xfrm>
           <a:prstGeom prst="rect">
             <a:avLst/>
@@ -4601,7 +4919,7 @@
                   <a:srgbClr val="111111"/>
                 </a:solidFill>
               </a:rPr>
-              <a:t>at the age-gained site every cardiac cofactor is bound in all three conditions — only AP-1 switches</a:t>
+              <a:t>MEF2 is 2.67× enriched immediately beside the motif (FDR 0.004); KLF/SP, the commonest factor, is not</a:t>
             </a:r>
             <a:endParaRPr lang="en-US" sz="1500" dirty="0"/>
           </a:p>
@@ -4709,7 +5027,7 @@
                   <a:schemeClr val="tx1"/>
                 </a:solidFill>
               </a:rPr>
-              <a:t>Responsive sites spread their dependence out</a:t>
+              <a:t>One locus, two architectures</a:t>
             </a:r>
             <a:endParaRPr lang="en-US" sz="2800" dirty="0"/>
           </a:p>
@@ -4717,7 +5035,7 @@
       </p:sp>
       <p:pic>
         <p:nvPicPr>
-          <p:cNvPr id="3" name="Image 0" descr="/Users/z5162865/WongLab/AlphaGenome_Ap1/Analysis/scan_features/figures/y1_scan_features_by_class.png">    </p:cNvPr>
+          <p:cNvPr id="3" name="Image 0" descr="/Users/z5162865/WongLab/AlphaGenome_Ap1/Analysis/example_track/example_scan_track.png">    </p:cNvPr>
           <p:cNvPicPr>
             <a:picLocks noChangeAspect="1"/>
           </p:cNvPicPr>
@@ -4731,8 +5049,8 @@
         </p:blipFill>
         <p:spPr>
           <a:xfrm>
-            <a:off x="1737360" y="1024128"/>
-            <a:ext cx="8686800" cy="4754880"/>
+            <a:off x="1202961" y="1051560"/>
+            <a:ext cx="9755599" cy="4754880"/>
           </a:xfrm>
           <a:prstGeom prst="rect">
             <a:avLst/>
@@ -4782,7 +5100,7 @@
                   <a:srgbClr val="111111"/>
                 </a:solidFill>
               </a:rPr>
-              <a:t>gaining a binding call goes with diffuse dependence; losing one does not — gain and loss are not mirror images</a:t>
+              <a:t>at the age-gained site every cardiac cofactor is bound in all three conditions — only AP-1 switches</a:t>
             </a:r>
             <a:endParaRPr lang="en-US" sz="1500" dirty="0"/>
           </a:p>
@@ -4890,7 +5208,7 @@
                   <a:schemeClr val="tx1"/>
                 </a:solidFill>
               </a:rPr>
-              <a:t>Motif strength is a switch; position is a dial</a:t>
+              <a:t>Responsive sites spread their dependence out</a:t>
             </a:r>
             <a:endParaRPr lang="en-US" sz="2800" dirty="0"/>
           </a:p>
@@ -4898,7 +5216,7 @@
       </p:sp>
       <p:pic>
         <p:nvPicPr>
-          <p:cNvPr id="3" name="Image 0" descr="/Users/z5162865/WongLab/AlphaGenome_Ap1/Analysis/titration/figures/z1_titration_overview.png">    </p:cNvPr>
+          <p:cNvPr id="3" name="Image 0" descr="/Users/z5162865/WongLab/AlphaGenome_Ap1/Analysis/slide_figures/s3_dependence.png">    </p:cNvPr>
           <p:cNvPicPr>
             <a:picLocks noChangeAspect="1"/>
           </p:cNvPicPr>
@@ -4912,8 +5230,8 @@
         </p:blipFill>
         <p:spPr>
           <a:xfrm>
-            <a:off x="502920" y="1234440"/>
-            <a:ext cx="11155680" cy="3246120"/>
+            <a:off x="502920" y="1449013"/>
+            <a:ext cx="11155680" cy="3959974"/>
           </a:xfrm>
           <a:prstGeom prst="rect">
             <a:avLst/>
@@ -4922,41 +5240,16 @@
       </p:pic>
       <p:sp>
         <p:nvSpPr>
-          <p:cNvPr id="4" name="stat-0"/>
+          <p:cNvPr id="4" name="Text 0"/>
           <p:cNvSpPr/>
-          <p:nvPr/>
-        </p:nvSpPr>
-        <p:spPr>
-          <a:xfrm>
-            <a:off x="502920" y="4709160"/>
-            <a:ext cx="2583180" cy="1051560"/>
-          </a:xfrm>
-          <a:prstGeom prst="roundRect">
-            <a:avLst>
-              <a:gd name="adj" fmla="val 5217"/>
-            </a:avLst>
-          </a:prstGeom>
-          <a:solidFill>
-            <a:srgbClr val="F2F2F2"/>
-          </a:solidFill>
-          <a:ln w="12700">
-            <a:solidFill>
-              <a:srgbClr val="E2E2E2"/>
-            </a:solidFill>
-            <a:prstDash val="solid"/>
-          </a:ln>
-        </p:spPr>
-      </p:sp>
-      <p:sp>
-        <p:nvSpPr>
-          <p:cNvPr id="5" name="Text 2"/>
-          <p:cNvSpPr txBox="1"/>
-          <p:nvPr/>
-        </p:nvSpPr>
-        <p:spPr>
-          <a:xfrm>
-            <a:off x="612648" y="4800600"/>
-            <a:ext cx="2363724" cy="548640"/>
+          <p:nvPr>
+            <p:ph idx="101" type="body" hasCustomPrompt="1"/>
+          </p:nvPr>
+        </p:nvSpPr>
+        <p:spPr>
+          <a:xfrm>
+            <a:off x="502920" y="5943600"/>
+            <a:ext cx="11155680" cy="658368"/>
           </a:xfrm>
           <a:prstGeom prst="rect">
             <a:avLst/>
@@ -4965,401 +5258,30 @@
           <a:ln/>
         </p:spPr>
         <p:txBody>
-          <a:bodyPr wrap="square" lIns="0" tIns="0" rIns="0" bIns="0" rtlCol="0" anchor="ctr"/>
-          <a:lstStyle/>
-          <a:p>
-            <a:pPr algn="ctr" indent="0" marL="0">
-              <a:buNone/>
-            </a:pPr>
-            <a:r>
-              <a:rPr lang="en-US" sz="3000" b="1" dirty="0">
+          <a:bodyPr wrap="square" rtlCol="0" anchor="t"/>
+          <a:lstStyle/>
+          <a:p>
+            <a:pPr algn="l" indent="0" marL="0">
+              <a:buNone/>
+            </a:pPr>
+            <a:r>
+              <a:rPr lang="en-US" sz="1500" b="1" dirty="0">
+                <a:solidFill>
+                  <a:srgbClr val="C2551C"/>
+                </a:solidFill>
+              </a:rPr>
+              <a:t>Takeaway   </a:t>
+            </a:r>
+            <a:pPr algn="l" indent="0" marL="0">
+              <a:buNone/>
+            </a:pPr>
+            <a:r>
+              <a:rPr lang="en-US" sz="1500" dirty="0">
                 <a:solidFill>
                   <a:srgbClr val="111111"/>
                 </a:solidFill>
               </a:rPr>
-              <a:t>−0.45</a:t>
-            </a:r>
-            <a:endParaRPr lang="en-US" sz="3000" dirty="0"/>
-          </a:p>
-        </p:txBody>
-      </p:sp>
-      <p:sp>
-        <p:nvSpPr>
-          <p:cNvPr id="6" name="Text 3"/>
-          <p:cNvSpPr txBox="1"/>
-          <p:nvPr/>
-        </p:nvSpPr>
-        <p:spPr>
-          <a:xfrm>
-            <a:off x="612648" y="5367528"/>
-            <a:ext cx="2363724" cy="320040"/>
-          </a:xfrm>
-          <a:prstGeom prst="rect">
-            <a:avLst/>
-          </a:prstGeom>
-          <a:noFill/>
-          <a:ln/>
-        </p:spPr>
-        <p:txBody>
-          <a:bodyPr wrap="square" lIns="0" tIns="0" rIns="0" bIns="0" rtlCol="0" anchor="ctr"/>
-          <a:lstStyle/>
-          <a:p>
-            <a:pPr algn="ctr" indent="0" marL="0">
-              <a:buNone/>
-            </a:pPr>
-            <a:r>
-              <a:rPr lang="en-US" sz="1200" dirty="0">
-                <a:solidFill>
-                  <a:srgbClr val="595959"/>
-                </a:solidFill>
-              </a:rPr>
-              <a:t>cost of changing one core base</a:t>
-            </a:r>
-            <a:endParaRPr lang="en-US" sz="1200" dirty="0"/>
-          </a:p>
-        </p:txBody>
-      </p:sp>
-      <p:sp>
-        <p:nvSpPr>
-          <p:cNvPr id="7" name="stat-1"/>
-          <p:cNvSpPr/>
-          <p:nvPr/>
-        </p:nvSpPr>
-        <p:spPr>
-          <a:xfrm>
-            <a:off x="3360420" y="4709160"/>
-            <a:ext cx="2583180" cy="1051560"/>
-          </a:xfrm>
-          <a:prstGeom prst="roundRect">
-            <a:avLst>
-              <a:gd name="adj" fmla="val 5217"/>
-            </a:avLst>
-          </a:prstGeom>
-          <a:solidFill>
-            <a:srgbClr val="F2F2F2"/>
-          </a:solidFill>
-          <a:ln w="12700">
-            <a:solidFill>
-              <a:srgbClr val="E2E2E2"/>
-            </a:solidFill>
-            <a:prstDash val="solid"/>
-          </a:ln>
-        </p:spPr>
-      </p:sp>
-      <p:sp>
-        <p:nvSpPr>
-          <p:cNvPr id="8" name="Text 5"/>
-          <p:cNvSpPr txBox="1"/>
-          <p:nvPr/>
-        </p:nvSpPr>
-        <p:spPr>
-          <a:xfrm>
-            <a:off x="3470148" y="4800600"/>
-            <a:ext cx="2363724" cy="548640"/>
-          </a:xfrm>
-          <a:prstGeom prst="rect">
-            <a:avLst/>
-          </a:prstGeom>
-          <a:noFill/>
-          <a:ln/>
-        </p:spPr>
-        <p:txBody>
-          <a:bodyPr wrap="square" lIns="0" tIns="0" rIns="0" bIns="0" rtlCol="0" anchor="ctr"/>
-          <a:lstStyle/>
-          <a:p>
-            <a:pPr algn="ctr" indent="0" marL="0">
-              <a:buNone/>
-            </a:pPr>
-            <a:r>
-              <a:rPr lang="en-US" sz="3000" b="1" dirty="0">
-                <a:solidFill>
-                  <a:srgbClr val="111111"/>
-                </a:solidFill>
-              </a:rPr>
-              <a:t>−0.56</a:t>
-            </a:r>
-            <a:endParaRPr lang="en-US" sz="3000" dirty="0"/>
-          </a:p>
-        </p:txBody>
-      </p:sp>
-      <p:sp>
-        <p:nvSpPr>
-          <p:cNvPr id="9" name="Text 6"/>
-          <p:cNvSpPr txBox="1"/>
-          <p:nvPr/>
-        </p:nvSpPr>
-        <p:spPr>
-          <a:xfrm>
-            <a:off x="3470148" y="5367528"/>
-            <a:ext cx="2363724" cy="320040"/>
-          </a:xfrm>
-          <a:prstGeom prst="rect">
-            <a:avLst/>
-          </a:prstGeom>
-          <a:noFill/>
-          <a:ln/>
-        </p:spPr>
-        <p:txBody>
-          <a:bodyPr wrap="square" lIns="0" tIns="0" rIns="0" bIns="0" rtlCol="0" anchor="ctr"/>
-          <a:lstStyle/>
-          <a:p>
-            <a:pPr algn="ctr" indent="0" marL="0">
-              <a:buNone/>
-            </a:pPr>
-            <a:r>
-              <a:rPr lang="en-US" sz="1200" dirty="0">
-                <a:solidFill>
-                  <a:srgbClr val="595959"/>
-                </a:solidFill>
-              </a:rPr>
-              <a:t>cost of changing all seven</a:t>
-            </a:r>
-            <a:endParaRPr lang="en-US" sz="1200" dirty="0"/>
-          </a:p>
-        </p:txBody>
-      </p:sp>
-      <p:sp>
-        <p:nvSpPr>
-          <p:cNvPr id="10" name="stat-2"/>
-          <p:cNvSpPr/>
-          <p:nvPr/>
-        </p:nvSpPr>
-        <p:spPr>
-          <a:xfrm>
-            <a:off x="6217920" y="4709160"/>
-            <a:ext cx="2583180" cy="1051560"/>
-          </a:xfrm>
-          <a:prstGeom prst="roundRect">
-            <a:avLst>
-              <a:gd name="adj" fmla="val 5217"/>
-            </a:avLst>
-          </a:prstGeom>
-          <a:solidFill>
-            <a:srgbClr val="F2F2F2"/>
-          </a:solidFill>
-          <a:ln w="12700">
-            <a:solidFill>
-              <a:srgbClr val="E2E2E2"/>
-            </a:solidFill>
-            <a:prstDash val="solid"/>
-          </a:ln>
-        </p:spPr>
-      </p:sp>
-      <p:sp>
-        <p:nvSpPr>
-          <p:cNvPr id="11" name="Text 8"/>
-          <p:cNvSpPr txBox="1"/>
-          <p:nvPr/>
-        </p:nvSpPr>
-        <p:spPr>
-          <a:xfrm>
-            <a:off x="6327648" y="4800600"/>
-            <a:ext cx="2363724" cy="548640"/>
-          </a:xfrm>
-          <a:prstGeom prst="rect">
-            <a:avLst/>
-          </a:prstGeom>
-          <a:noFill/>
-          <a:ln/>
-        </p:spPr>
-        <p:txBody>
-          <a:bodyPr wrap="square" lIns="0" tIns="0" rIns="0" bIns="0" rtlCol="0" anchor="ctr"/>
-          <a:lstStyle/>
-          <a:p>
-            <a:pPr algn="ctr" indent="0" marL="0">
-              <a:buNone/>
-            </a:pPr>
-            <a:r>
-              <a:rPr lang="en-US" sz="3000" b="1" dirty="0">
-                <a:solidFill>
-                  <a:srgbClr val="111111"/>
-                </a:solidFill>
-              </a:rPr>
-              <a:t>+0.28</a:t>
-            </a:r>
-            <a:endParaRPr lang="en-US" sz="3000" dirty="0"/>
-          </a:p>
-        </p:txBody>
-      </p:sp>
-      <p:sp>
-        <p:nvSpPr>
-          <p:cNvPr id="12" name="Text 9"/>
-          <p:cNvSpPr txBox="1"/>
-          <p:nvPr/>
-        </p:nvSpPr>
-        <p:spPr>
-          <a:xfrm>
-            <a:off x="6327648" y="5367528"/>
-            <a:ext cx="2363724" cy="320040"/>
-          </a:xfrm>
-          <a:prstGeom prst="rect">
-            <a:avLst/>
-          </a:prstGeom>
-          <a:noFill/>
-          <a:ln/>
-        </p:spPr>
-        <p:txBody>
-          <a:bodyPr wrap="square" lIns="0" tIns="0" rIns="0" bIns="0" rtlCol="0" anchor="ctr"/>
-          <a:lstStyle/>
-          <a:p>
-            <a:pPr algn="ctr" indent="0" marL="0">
-              <a:buNone/>
-            </a:pPr>
-            <a:r>
-              <a:rPr lang="en-US" sz="1200" dirty="0">
-                <a:solidFill>
-                  <a:srgbClr val="595959"/>
-                </a:solidFill>
-              </a:rPr>
-              <a:t>net value of a second copy</a:t>
-            </a:r>
-            <a:endParaRPr lang="en-US" sz="1200" dirty="0"/>
-          </a:p>
-        </p:txBody>
-      </p:sp>
-      <p:sp>
-        <p:nvSpPr>
-          <p:cNvPr id="13" name="stat-3"/>
-          <p:cNvSpPr/>
-          <p:nvPr/>
-        </p:nvSpPr>
-        <p:spPr>
-          <a:xfrm>
-            <a:off x="9075420" y="4709160"/>
-            <a:ext cx="2583180" cy="1051560"/>
-          </a:xfrm>
-          <a:prstGeom prst="roundRect">
-            <a:avLst>
-              <a:gd name="adj" fmla="val 5217"/>
-            </a:avLst>
-          </a:prstGeom>
-          <a:solidFill>
-            <a:srgbClr val="F2F2F2"/>
-          </a:solidFill>
-          <a:ln w="12700">
-            <a:solidFill>
-              <a:srgbClr val="E2E2E2"/>
-            </a:solidFill>
-            <a:prstDash val="solid"/>
-          </a:ln>
-        </p:spPr>
-      </p:sp>
-      <p:sp>
-        <p:nvSpPr>
-          <p:cNvPr id="14" name="Text 11"/>
-          <p:cNvSpPr txBox="1"/>
-          <p:nvPr/>
-        </p:nvSpPr>
-        <p:spPr>
-          <a:xfrm>
-            <a:off x="9185148" y="4800600"/>
-            <a:ext cx="2363724" cy="548640"/>
-          </a:xfrm>
-          <a:prstGeom prst="rect">
-            <a:avLst/>
-          </a:prstGeom>
-          <a:noFill/>
-          <a:ln/>
-        </p:spPr>
-        <p:txBody>
-          <a:bodyPr wrap="square" lIns="0" tIns="0" rIns="0" bIns="0" rtlCol="0" anchor="ctr"/>
-          <a:lstStyle/>
-          <a:p>
-            <a:pPr algn="ctr" indent="0" marL="0">
-              <a:buNone/>
-            </a:pPr>
-            <a:r>
-              <a:rPr lang="en-US" sz="3000" b="1" dirty="0">
-                <a:solidFill>
-                  <a:srgbClr val="C2551C"/>
-                </a:solidFill>
-              </a:rPr>
-              <a:t>±40 bp</a:t>
-            </a:r>
-            <a:endParaRPr lang="en-US" sz="3000" dirty="0"/>
-          </a:p>
-        </p:txBody>
-      </p:sp>
-      <p:sp>
-        <p:nvSpPr>
-          <p:cNvPr id="15" name="Text 12"/>
-          <p:cNvSpPr txBox="1"/>
-          <p:nvPr/>
-        </p:nvSpPr>
-        <p:spPr>
-          <a:xfrm>
-            <a:off x="9185148" y="5367528"/>
-            <a:ext cx="2363724" cy="320040"/>
-          </a:xfrm>
-          <a:prstGeom prst="rect">
-            <a:avLst/>
-          </a:prstGeom>
-          <a:noFill/>
-          <a:ln/>
-        </p:spPr>
-        <p:txBody>
-          <a:bodyPr wrap="square" lIns="0" tIns="0" rIns="0" bIns="0" rtlCol="0" anchor="ctr"/>
-          <a:lstStyle/>
-          <a:p>
-            <a:pPr algn="ctr" indent="0" marL="0">
-              <a:buNone/>
-            </a:pPr>
-            <a:r>
-              <a:rPr lang="en-US" sz="1200" dirty="0">
-                <a:solidFill>
-                  <a:srgbClr val="595959"/>
-                </a:solidFill>
-              </a:rPr>
-              <a:t>where that copy helps most</a:t>
-            </a:r>
-            <a:endParaRPr lang="en-US" sz="1200" dirty="0"/>
-          </a:p>
-        </p:txBody>
-      </p:sp>
-      <p:sp>
-        <p:nvSpPr>
-          <p:cNvPr id="16" name="Text 0"/>
-          <p:cNvSpPr/>
-          <p:nvPr>
-            <p:ph idx="101" type="body" hasCustomPrompt="1"/>
-          </p:nvPr>
-        </p:nvSpPr>
-        <p:spPr>
-          <a:xfrm>
-            <a:off x="502920" y="5943600"/>
-            <a:ext cx="11155680" cy="658368"/>
-          </a:xfrm>
-          <a:prstGeom prst="rect">
-            <a:avLst/>
-          </a:prstGeom>
-          <a:noFill/>
-          <a:ln/>
-        </p:spPr>
-        <p:txBody>
-          <a:bodyPr wrap="square" rtlCol="0" anchor="t"/>
-          <a:lstStyle/>
-          <a:p>
-            <a:pPr algn="l" indent="0" marL="0">
-              <a:buNone/>
-            </a:pPr>
-            <a:r>
-              <a:rPr lang="en-US" sz="1500" b="1" dirty="0">
-                <a:solidFill>
-                  <a:srgbClr val="C2551C"/>
-                </a:solidFill>
-              </a:rPr>
-              <a:t>Takeaway   </a:t>
-            </a:r>
-            <a:pPr algn="l" indent="0" marL="0">
-              <a:buNone/>
-            </a:pPr>
-            <a:r>
-              <a:rPr lang="en-US" sz="1500" dirty="0">
-                <a:solidFill>
-                  <a:srgbClr val="111111"/>
-                </a:solidFill>
-              </a:rPr>
-              <a:t>one wrong base costs nearly as much as destroying the motif; a half-site is worth nothing</a:t>
+              <a:t>this is the part that survives matching: a responsive site has no single anchor holding it open</a:t>
             </a:r>
             <a:endParaRPr lang="en-US" sz="1500" dirty="0"/>
           </a:p>
@@ -5467,193 +5389,73 @@
                   <a:schemeClr val="tx1"/>
                 </a:solidFill>
               </a:rPr>
-              <a:t>Age-gained sites read AP-1 dosage more sharply</a:t>
+              <a:t>Motif strength is a switch; position is a dial</a:t>
             </a:r>
             <a:endParaRPr lang="en-US" sz="2800" dirty="0"/>
           </a:p>
         </p:txBody>
       </p:sp>
-      <p:sp>
-        <p:nvSpPr>
-          <p:cNvPr id="3" name="Text 1"/>
-          <p:cNvSpPr txBox="1"/>
+      <p:pic>
+        <p:nvPicPr>
+          <p:cNvPr id="3" name="Image 0" descr="/Users/z5162865/WongLab/AlphaGenome_Ap1/Analysis/slide_figures/s4_titration.png">    </p:cNvPr>
+          <p:cNvPicPr>
+            <a:picLocks noChangeAspect="1"/>
+          </p:cNvPicPr>
           <p:nvPr/>
-        </p:nvSpPr>
-        <p:spPr>
-          <a:xfrm>
-            <a:off x="502920" y="1234440"/>
-            <a:ext cx="6720840" cy="3657600"/>
-          </a:xfrm>
-          <a:prstGeom prst="rect">
-            <a:avLst/>
-          </a:prstGeom>
-          <a:noFill/>
-          <a:ln/>
-        </p:spPr>
-        <p:txBody>
-          <a:bodyPr wrap="square" lIns="0" tIns="0" rIns="0" bIns="0" rtlCol="0" anchor="ctr"/>
-          <a:lstStyle/>
-          <a:p>
-            <a:pPr indent="0" marL="0">
-              <a:spcAft>
-                <a:spcPts val="1600"/>
-              </a:spcAft>
-              <a:buNone/>
-            </a:pPr>
-            <a:r>
-              <a:rPr lang="en-US" sz="1700" dirty="0">
-                <a:solidFill>
-                  <a:srgbClr val="111111"/>
-                </a:solidFill>
-              </a:rPr>
-              <a:t>Sites in the top fifth of binding-score gain with age differ from matched controls in four ways, and they all point the same direction:</a:t>
-            </a:r>
-            <a:endParaRPr lang="en-US" sz="1700" dirty="0"/>
-          </a:p>
-          <a:p>
-            <a:pPr marL="342900" indent="-342900">
-              <a:buSzPct val="100000"/>
-              <a:buChar char="•"/>
-            </a:pPr>
-            <a:r>
-              <a:rPr lang="en-US" sz="1700" dirty="0">
-                <a:solidFill>
-                  <a:srgbClr val="111111"/>
-                </a:solidFill>
-              </a:rPr>
-              <a:t>They gain more from an added motif copy  (+0.38 vs +0.32, FDR &lt; 0.001)</a:t>
-            </a:r>
-            <a:endParaRPr lang="en-US" sz="1700" dirty="0"/>
-          </a:p>
-          <a:p>
-            <a:pPr marL="342900" indent="-342900">
-              <a:buSzPct val="100000"/>
-              <a:buChar char="•"/>
-            </a:pPr>
-            <a:r>
-              <a:rPr lang="en-US" sz="1700" dirty="0">
-                <a:solidFill>
-                  <a:srgbClr val="111111"/>
-                </a:solidFill>
-              </a:rPr>
-              <a:t>They benefit more when that copy is near  (FDR 0.003)</a:t>
-            </a:r>
-            <a:endParaRPr lang="en-US" sz="1700" dirty="0"/>
-          </a:p>
-          <a:p>
-            <a:pPr marL="342900" indent="-342900">
-              <a:buSzPct val="100000"/>
-              <a:buChar char="•"/>
-            </a:pPr>
-            <a:r>
-              <a:rPr lang="en-US" sz="1700" dirty="0">
-                <a:solidFill>
-                  <a:srgbClr val="111111"/>
-                </a:solidFill>
-              </a:rPr>
-              <a:t>They lose more from one damaged core base  (−0.60 vs −0.51, FDR 0.023)</a:t>
-            </a:r>
-            <a:endParaRPr lang="en-US" sz="1700" dirty="0"/>
-          </a:p>
-          <a:p>
-            <a:pPr marL="342900" indent="-342900">
-              <a:spcAft>
-                <a:spcPts val="1600"/>
-              </a:spcAft>
-              <a:buSzPct val="100000"/>
-              <a:buChar char="•"/>
-            </a:pPr>
-            <a:r>
-              <a:rPr lang="en-US" sz="1700" dirty="0">
-                <a:solidFill>
-                  <a:srgbClr val="111111"/>
-                </a:solidFill>
-              </a:rPr>
-              <a:t>They carry a perfect consensus core more often  (84.5% vs 78.6%, p = 0.02)</a:t>
-            </a:r>
-            <a:endParaRPr lang="en-US" sz="1700" dirty="0"/>
-          </a:p>
-        </p:txBody>
-      </p:sp>
-      <p:sp>
-        <p:nvSpPr>
-          <p:cNvPr id="4" name="massaction"/>
-          <p:cNvSpPr txBox="1"/>
+        </p:nvPicPr>
+        <p:blipFill>
+          <a:blip r:embed="rId1"/>
+          <a:stretch>
+            <a:fillRect/>
+          </a:stretch>
+        </p:blipFill>
+        <p:spPr>
+          <a:xfrm>
+            <a:off x="2577695" y="1097280"/>
+            <a:ext cx="7006130" cy="3429000"/>
+          </a:xfrm>
+          <a:prstGeom prst="rect">
+            <a:avLst/>
+          </a:prstGeom>
+        </p:spPr>
+      </p:pic>
+      <p:sp>
+        <p:nvSpPr>
+          <p:cNvPr id="4" name="stat-0"/>
+          <p:cNvSpPr/>
           <p:nvPr/>
         </p:nvSpPr>
         <p:spPr>
           <a:xfrm>
-            <a:off x="7498080" y="1371600"/>
-            <a:ext cx="4160520" cy="3017520"/>
-          </a:xfrm>
-          <a:prstGeom prst="rect">
-            <a:avLst/>
+            <a:off x="502920" y="4709160"/>
+            <a:ext cx="2583180" cy="1051560"/>
+          </a:xfrm>
+          <a:prstGeom prst="roundRect">
+            <a:avLst>
+              <a:gd name="adj" fmla="val 5217"/>
+            </a:avLst>
           </a:prstGeom>
           <a:solidFill>
             <a:srgbClr val="F2F2F2"/>
           </a:solidFill>
-          <a:ln/>
-        </p:spPr>
-        <p:txBody>
-          <a:bodyPr wrap="square" lIns="177800" tIns="177800" rIns="177800" bIns="177800" rtlCol="0" anchor="ctr"/>
-          <a:lstStyle/>
-          <a:p>
-            <a:pPr indent="0" marL="0">
-              <a:buNone/>
-            </a:pPr>
-            <a:r>
-              <a:rPr lang="en-US" sz="1900" b="1" dirty="0">
-                <a:solidFill>
-                  <a:srgbClr val="C2551C"/>
-                </a:solidFill>
-              </a:rPr>
-              <a:t>Mass action</a:t>
-            </a:r>
-            <a:endParaRPr lang="en-US" sz="1900" dirty="0"/>
-          </a:p>
-          <a:p>
-            <a:pPr indent="0" marL="0">
-              <a:spcAft>
-                <a:spcPts val="1200"/>
-              </a:spcAft>
-              <a:buNone/>
-            </a:pPr>
-            <a:r>
-              <a:rPr lang="en-US" sz="1500" dirty="0">
-                <a:solidFill>
-                  <a:srgbClr val="000000"/>
-                </a:solidFill>
-              </a:rPr>
-              <a:t>If ageing raises AP-1 activity, occupancy rises first at the highest-affinity motifs. Those are exactly the sites that gain.</a:t>
-            </a:r>
-            <a:endParaRPr lang="en-US" sz="1900" dirty="0"/>
-          </a:p>
-          <a:p>
-            <a:pPr indent="0" marL="0">
-              <a:buNone/>
-            </a:pPr>
-            <a:r>
-              <a:rPr lang="en-US" sz="1500" dirty="0">
-                <a:solidFill>
-                  <a:srgbClr val="595959"/>
-                </a:solidFill>
-              </a:rPr>
-              <a:t>Losing binding is not the reverse: age-lost sites show no sequence signature at all.</a:t>
-            </a:r>
-            <a:endParaRPr lang="en-US" sz="1900" dirty="0"/>
-          </a:p>
-        </p:txBody>
-      </p:sp>
-      <p:sp>
-        <p:nvSpPr>
-          <p:cNvPr id="5" name="Text 3"/>
+          <a:ln w="12700">
+            <a:solidFill>
+              <a:srgbClr val="E2E2E2"/>
+            </a:solidFill>
+            <a:prstDash val="solid"/>
+          </a:ln>
+        </p:spPr>
+      </p:sp>
+      <p:sp>
+        <p:nvSpPr>
+          <p:cNvPr id="5" name="Text 2"/>
           <p:cNvSpPr txBox="1"/>
           <p:nvPr/>
         </p:nvSpPr>
         <p:spPr>
           <a:xfrm>
-            <a:off x="502920" y="5074920"/>
-            <a:ext cx="11155680" cy="548640"/>
+            <a:off x="612648" y="4800600"/>
+            <a:ext cx="2363724" cy="548640"/>
           </a:xfrm>
           <a:prstGeom prst="rect">
             <a:avLst/>
@@ -5665,33 +5467,31 @@
           <a:bodyPr wrap="square" lIns="0" tIns="0" rIns="0" bIns="0" rtlCol="0" anchor="ctr"/>
           <a:lstStyle/>
           <a:p>
-            <a:pPr indent="0" marL="0">
-              <a:buNone/>
-            </a:pPr>
-            <a:r>
-              <a:rPr lang="en-US" sz="1600" i="1" dirty="0">
+            <a:pPr algn="ctr" indent="0" marL="0">
+              <a:buNone/>
+            </a:pPr>
+            <a:r>
+              <a:rPr lang="en-US" sz="3000" b="1" dirty="0">
                 <a:solidFill>
                   <a:srgbClr val="111111"/>
                 </a:solidFill>
               </a:rPr>
-              <a:t>Ageing gains AP-1 sites over losses 2.2 : 1. Exercise reverses it, 0.67 : 1.</a:t>
-            </a:r>
-            <a:endParaRPr lang="en-US" sz="1600" dirty="0"/>
-          </a:p>
-        </p:txBody>
-      </p:sp>
-      <p:sp>
-        <p:nvSpPr>
-          <p:cNvPr id="7" name="Text 0"/>
-          <p:cNvSpPr/>
-          <p:nvPr>
-            <p:ph idx="101" type="body" hasCustomPrompt="1"/>
-          </p:nvPr>
-        </p:nvSpPr>
-        <p:spPr>
-          <a:xfrm>
-            <a:off x="502920" y="1234440"/>
-            <a:ext cx="11155680" cy="5120640"/>
+              <a:t>−0.45</a:t>
+            </a:r>
+            <a:endParaRPr lang="en-US" sz="3000" dirty="0"/>
+          </a:p>
+        </p:txBody>
+      </p:sp>
+      <p:sp>
+        <p:nvSpPr>
+          <p:cNvPr id="6" name="Text 3"/>
+          <p:cNvSpPr txBox="1"/>
+          <p:nvPr/>
+        </p:nvSpPr>
+        <p:spPr>
+          <a:xfrm>
+            <a:off x="612648" y="5367528"/>
+            <a:ext cx="2363724" cy="320040"/>
           </a:xfrm>
           <a:prstGeom prst="rect">
             <a:avLst/>
@@ -5700,13 +5500,367 @@
           <a:ln/>
         </p:spPr>
         <p:txBody>
+          <a:bodyPr wrap="square" lIns="0" tIns="0" rIns="0" bIns="0" rtlCol="0" anchor="ctr"/>
+          <a:lstStyle/>
+          <a:p>
+            <a:pPr algn="ctr" indent="0" marL="0">
+              <a:buNone/>
+            </a:pPr>
+            <a:r>
+              <a:rPr lang="en-US" sz="1200" dirty="0">
+                <a:solidFill>
+                  <a:srgbClr val="595959"/>
+                </a:solidFill>
+              </a:rPr>
+              <a:t>cost of changing one core base</a:t>
+            </a:r>
+            <a:endParaRPr lang="en-US" sz="1200" dirty="0"/>
+          </a:p>
+        </p:txBody>
+      </p:sp>
+      <p:sp>
+        <p:nvSpPr>
+          <p:cNvPr id="7" name="stat-1"/>
+          <p:cNvSpPr/>
+          <p:nvPr/>
+        </p:nvSpPr>
+        <p:spPr>
+          <a:xfrm>
+            <a:off x="3360420" y="4709160"/>
+            <a:ext cx="2583180" cy="1051560"/>
+          </a:xfrm>
+          <a:prstGeom prst="roundRect">
+            <a:avLst>
+              <a:gd name="adj" fmla="val 5217"/>
+            </a:avLst>
+          </a:prstGeom>
+          <a:solidFill>
+            <a:srgbClr val="F2F2F2"/>
+          </a:solidFill>
+          <a:ln w="12700">
+            <a:solidFill>
+              <a:srgbClr val="E2E2E2"/>
+            </a:solidFill>
+            <a:prstDash val="solid"/>
+          </a:ln>
+        </p:spPr>
+      </p:sp>
+      <p:sp>
+        <p:nvSpPr>
+          <p:cNvPr id="8" name="Text 5"/>
+          <p:cNvSpPr txBox="1"/>
+          <p:nvPr/>
+        </p:nvSpPr>
+        <p:spPr>
+          <a:xfrm>
+            <a:off x="3470148" y="4800600"/>
+            <a:ext cx="2363724" cy="548640"/>
+          </a:xfrm>
+          <a:prstGeom prst="rect">
+            <a:avLst/>
+          </a:prstGeom>
+          <a:noFill/>
+          <a:ln/>
+        </p:spPr>
+        <p:txBody>
+          <a:bodyPr wrap="square" lIns="0" tIns="0" rIns="0" bIns="0" rtlCol="0" anchor="ctr"/>
+          <a:lstStyle/>
+          <a:p>
+            <a:pPr algn="ctr" indent="0" marL="0">
+              <a:buNone/>
+            </a:pPr>
+            <a:r>
+              <a:rPr lang="en-US" sz="3000" b="1" dirty="0">
+                <a:solidFill>
+                  <a:srgbClr val="111111"/>
+                </a:solidFill>
+              </a:rPr>
+              <a:t>−0.56</a:t>
+            </a:r>
+            <a:endParaRPr lang="en-US" sz="3000" dirty="0"/>
+          </a:p>
+        </p:txBody>
+      </p:sp>
+      <p:sp>
+        <p:nvSpPr>
+          <p:cNvPr id="9" name="Text 6"/>
+          <p:cNvSpPr txBox="1"/>
+          <p:nvPr/>
+        </p:nvSpPr>
+        <p:spPr>
+          <a:xfrm>
+            <a:off x="3470148" y="5367528"/>
+            <a:ext cx="2363724" cy="320040"/>
+          </a:xfrm>
+          <a:prstGeom prst="rect">
+            <a:avLst/>
+          </a:prstGeom>
+          <a:noFill/>
+          <a:ln/>
+        </p:spPr>
+        <p:txBody>
+          <a:bodyPr wrap="square" lIns="0" tIns="0" rIns="0" bIns="0" rtlCol="0" anchor="ctr"/>
+          <a:lstStyle/>
+          <a:p>
+            <a:pPr algn="ctr" indent="0" marL="0">
+              <a:buNone/>
+            </a:pPr>
+            <a:r>
+              <a:rPr lang="en-US" sz="1200" dirty="0">
+                <a:solidFill>
+                  <a:srgbClr val="595959"/>
+                </a:solidFill>
+              </a:rPr>
+              <a:t>cost of changing all seven</a:t>
+            </a:r>
+            <a:endParaRPr lang="en-US" sz="1200" dirty="0"/>
+          </a:p>
+        </p:txBody>
+      </p:sp>
+      <p:sp>
+        <p:nvSpPr>
+          <p:cNvPr id="10" name="stat-2"/>
+          <p:cNvSpPr/>
+          <p:nvPr/>
+        </p:nvSpPr>
+        <p:spPr>
+          <a:xfrm>
+            <a:off x="6217920" y="4709160"/>
+            <a:ext cx="2583180" cy="1051560"/>
+          </a:xfrm>
+          <a:prstGeom prst="roundRect">
+            <a:avLst>
+              <a:gd name="adj" fmla="val 5217"/>
+            </a:avLst>
+          </a:prstGeom>
+          <a:solidFill>
+            <a:srgbClr val="F2F2F2"/>
+          </a:solidFill>
+          <a:ln w="12700">
+            <a:solidFill>
+              <a:srgbClr val="E2E2E2"/>
+            </a:solidFill>
+            <a:prstDash val="solid"/>
+          </a:ln>
+        </p:spPr>
+      </p:sp>
+      <p:sp>
+        <p:nvSpPr>
+          <p:cNvPr id="11" name="Text 8"/>
+          <p:cNvSpPr txBox="1"/>
+          <p:nvPr/>
+        </p:nvSpPr>
+        <p:spPr>
+          <a:xfrm>
+            <a:off x="6327648" y="4800600"/>
+            <a:ext cx="2363724" cy="548640"/>
+          </a:xfrm>
+          <a:prstGeom prst="rect">
+            <a:avLst/>
+          </a:prstGeom>
+          <a:noFill/>
+          <a:ln/>
+        </p:spPr>
+        <p:txBody>
+          <a:bodyPr wrap="square" lIns="0" tIns="0" rIns="0" bIns="0" rtlCol="0" anchor="ctr"/>
+          <a:lstStyle/>
+          <a:p>
+            <a:pPr algn="ctr" indent="0" marL="0">
+              <a:buNone/>
+            </a:pPr>
+            <a:r>
+              <a:rPr lang="en-US" sz="3000" b="1" dirty="0">
+                <a:solidFill>
+                  <a:srgbClr val="111111"/>
+                </a:solidFill>
+              </a:rPr>
+              <a:t>−0.29</a:t>
+            </a:r>
+            <a:endParaRPr lang="en-US" sz="3000" dirty="0"/>
+          </a:p>
+        </p:txBody>
+      </p:sp>
+      <p:sp>
+        <p:nvSpPr>
+          <p:cNvPr id="12" name="Text 9"/>
+          <p:cNvSpPr txBox="1"/>
+          <p:nvPr/>
+        </p:nvSpPr>
+        <p:spPr>
+          <a:xfrm>
+            <a:off x="6327648" y="5367528"/>
+            <a:ext cx="2363724" cy="320040"/>
+          </a:xfrm>
+          <a:prstGeom prst="rect">
+            <a:avLst/>
+          </a:prstGeom>
+          <a:noFill/>
+          <a:ln/>
+        </p:spPr>
+        <p:txBody>
+          <a:bodyPr wrap="square" lIns="0" tIns="0" rIns="0" bIns="0" rtlCol="0" anchor="ctr"/>
+          <a:lstStyle/>
+          <a:p>
+            <a:pPr algn="ctr" indent="0" marL="0">
+              <a:buNone/>
+            </a:pPr>
+            <a:r>
+              <a:rPr lang="en-US" sz="1200" dirty="0">
+                <a:solidFill>
+                  <a:srgbClr val="595959"/>
+                </a:solidFill>
+              </a:rPr>
+              <a:t>destroyed, re-inserted nearby</a:t>
+            </a:r>
+            <a:endParaRPr lang="en-US" sz="1200" dirty="0"/>
+          </a:p>
+        </p:txBody>
+      </p:sp>
+      <p:sp>
+        <p:nvSpPr>
+          <p:cNvPr id="13" name="stat-3"/>
+          <p:cNvSpPr/>
+          <p:nvPr/>
+        </p:nvSpPr>
+        <p:spPr>
+          <a:xfrm>
+            <a:off x="9075420" y="4709160"/>
+            <a:ext cx="2583180" cy="1051560"/>
+          </a:xfrm>
+          <a:prstGeom prst="roundRect">
+            <a:avLst>
+              <a:gd name="adj" fmla="val 5217"/>
+            </a:avLst>
+          </a:prstGeom>
+          <a:solidFill>
+            <a:srgbClr val="F2F2F2"/>
+          </a:solidFill>
+          <a:ln w="12700">
+            <a:solidFill>
+              <a:srgbClr val="E2E2E2"/>
+            </a:solidFill>
+            <a:prstDash val="solid"/>
+          </a:ln>
+        </p:spPr>
+      </p:sp>
+      <p:sp>
+        <p:nvSpPr>
+          <p:cNvPr id="14" name="Text 11"/>
+          <p:cNvSpPr txBox="1"/>
+          <p:nvPr/>
+        </p:nvSpPr>
+        <p:spPr>
+          <a:xfrm>
+            <a:off x="9185148" y="4800600"/>
+            <a:ext cx="2363724" cy="548640"/>
+          </a:xfrm>
+          <a:prstGeom prst="rect">
+            <a:avLst/>
+          </a:prstGeom>
+          <a:noFill/>
+          <a:ln/>
+        </p:spPr>
+        <p:txBody>
+          <a:bodyPr wrap="square" lIns="0" tIns="0" rIns="0" bIns="0" rtlCol="0" anchor="ctr"/>
+          <a:lstStyle/>
+          <a:p>
+            <a:pPr algn="ctr" indent="0" marL="0">
+              <a:buNone/>
+            </a:pPr>
+            <a:r>
+              <a:rPr lang="en-US" sz="3000" b="1" dirty="0">
+                <a:solidFill>
+                  <a:srgbClr val="C2551C"/>
+                </a:solidFill>
+              </a:rPr>
+              <a:t>±20–40 bp</a:t>
+            </a:r>
+            <a:endParaRPr lang="en-US" sz="3000" dirty="0"/>
+          </a:p>
+        </p:txBody>
+      </p:sp>
+      <p:sp>
+        <p:nvSpPr>
+          <p:cNvPr id="15" name="Text 12"/>
+          <p:cNvSpPr txBox="1"/>
+          <p:nvPr/>
+        </p:nvSpPr>
+        <p:spPr>
+          <a:xfrm>
+            <a:off x="9185148" y="5367528"/>
+            <a:ext cx="2363724" cy="320040"/>
+          </a:xfrm>
+          <a:prstGeom prst="rect">
+            <a:avLst/>
+          </a:prstGeom>
+          <a:noFill/>
+          <a:ln/>
+        </p:spPr>
+        <p:txBody>
+          <a:bodyPr wrap="square" lIns="0" tIns="0" rIns="0" bIns="0" rtlCol="0" anchor="ctr"/>
+          <a:lstStyle/>
+          <a:p>
+            <a:pPr algn="ctr" indent="0" marL="0">
+              <a:buNone/>
+            </a:pPr>
+            <a:r>
+              <a:rPr lang="en-US" sz="1200" dirty="0">
+                <a:solidFill>
+                  <a:srgbClr val="595959"/>
+                </a:solidFill>
+              </a:rPr>
+              <a:t>where a motif works best</a:t>
+            </a:r>
+            <a:endParaRPr lang="en-US" sz="1200" dirty="0"/>
+          </a:p>
+        </p:txBody>
+      </p:sp>
+      <p:sp>
+        <p:nvSpPr>
+          <p:cNvPr id="16" name="Text 0"/>
+          <p:cNvSpPr/>
+          <p:nvPr>
+            <p:ph idx="101" type="body" hasCustomPrompt="1"/>
+          </p:nvPr>
+        </p:nvSpPr>
+        <p:spPr>
+          <a:xfrm>
+            <a:off x="502920" y="5943600"/>
+            <a:ext cx="11155680" cy="658368"/>
+          </a:xfrm>
+          <a:prstGeom prst="rect">
+            <a:avLst/>
+          </a:prstGeom>
+          <a:noFill/>
+          <a:ln/>
+        </p:spPr>
+        <p:txBody>
           <a:bodyPr wrap="square" rtlCol="0" anchor="t"/>
           <a:lstStyle/>
           <a:p>
             <a:pPr algn="l" indent="0" marL="0">
               <a:buNone/>
             </a:pPr>
-            <a:endParaRPr lang="en-US" sz="1700" dirty="0"/>
+            <a:r>
+              <a:rPr lang="en-US" sz="1500" b="1" dirty="0">
+                <a:solidFill>
+                  <a:srgbClr val="C2551C"/>
+                </a:solidFill>
+              </a:rPr>
+              <a:t>Takeaway   </a:t>
+            </a:r>
+            <a:pPr algn="l" indent="0" marL="0">
+              <a:buNone/>
+            </a:pPr>
+            <a:r>
+              <a:rPr lang="en-US" sz="1500" dirty="0">
+                <a:solidFill>
+                  <a:srgbClr val="111111"/>
+                </a:solidFill>
+              </a:rPr>
+              <a:t>a motif moved elsewhere recovers only a third of what destroying it cost — position matters, not just presence</a:t>
+            </a:r>
+            <a:endParaRPr lang="en-US" sz="1500" dirty="0"/>
           </a:p>
         </p:txBody>
       </p:sp>

--- a/Analysis/AP1_AlphaGenome_results.pptx
+++ b/Analysis/AP1_AlphaGenome_results.pptx
@@ -119,18 +119,18 @@
   <p:extLst>
     <p:ext uri="{521415D9-36F7-43E2-AB2F-B90AF26B5E84}">
       <p14:sectionLst xmlns:p14="http://schemas.microsoft.com/office/powerpoint/2010/main">
-        <p14:section name="Opening" id="{448975b8-ac3e-4efe-f95f-ab45b2feecbf}">
+        <p14:section name="Opening" id="{59c41bb3-2150-5909-bd5c-8c37af43eed1}">
           <p14:sldIdLst>
             <p14:sldId id="256"/>
           </p14:sldIdLst>
         </p14:section>
-        <p14:section name="Design" id="{7b400548-adce-797a-2158-b22833177468}">
+        <p14:section name="Design" id="{fc44c119-ce92-d7c3-f082-531e9d85fde1}">
           <p14:sldIdLst>
             <p14:sldId id="257"/>
             <p14:sldId id="258"/>
           </p14:sldIdLst>
         </p14:section>
-        <p14:section name="Findings" id="{59c579fd-2353-7f93-d2fc-d5830a213de7}">
+        <p14:section name="Findings" id="{131e7957-5d27-3996-71a0-83a81f3691d7}">
           <p14:sldIdLst>
             <p14:sldId id="259"/>
             <p14:sldId id="260"/>
@@ -142,7 +142,7 @@
             <p14:sldId id="266"/>
           </p14:sldIdLst>
         </p14:section>
-        <p14:section name="Conclusion" id="{884b4574-6906-0da0-bab7-0e37e59b21eb}">
+        <p14:section name="Conclusion" id="{aad3ccac-18b6-7666-85fa-435c01aa2cbc}">
           <p14:sldIdLst>
             <p14:sldId id="267"/>
             <p14:sldId id="268"/>
@@ -1168,7 +1168,7 @@
           <a:p>
             <a:r>
               <a:rPr lang="en-US" dirty="0"/>
-              <a:t>Raw, Dynamic sites lose less to every wide edit. After matching on predicted accessibility, peak width and TSS distance, nothing survives. A classifier on the whole response profile is at chance, AUC 0.49.</a:t>
+              <a:t>Raw, Dynamic sites lose less to every wide edit. Matching now holds measured snATAC accessibility constant as well as the predicted value, peak width and TSS distance; that removes most of the gap but not all of it. What survives is confined to the 170 bp scale: the motif and the whole peak are worth the same to both classes.</a:t>
             </a:r>
             <a:endParaRPr lang="en-US" dirty="0"/>
           </a:p>
@@ -1256,7 +1256,7 @@
           <a:p>
             <a:r>
               <a:rPr lang="en-US" dirty="0"/>
-              <a:t>Importance is the loss from replacing a 10 bp tile over that factor's footprint, measured against the site's own footprint-free tiles, holding under five adjustments. The class comparison is at site level inside the 442 matched pairs; nothing survives BH correction. AP-1's own footprints are the one uncorrected p &lt; 0.05, and Dynamic sites lean slightly MORE on them.</a:t>
+              <a:t>2.49 million footprinted cardiomyocyte TFBS mapped onto the scan. Dynamic is split into its four directional classes because a gain and a loss could cancel in the pooled comparison. The one comparison that survives correction does so only before matching: Age Up sites lean more on KLF/SP neighbours, FDR 0.04 raw and 0.26 matched, so it is context rather than class.</a:t>
             </a:r>
             <a:endParaRPr lang="en-US" dirty="0"/>
           </a:p>
@@ -1344,7 +1344,7 @@
           <a:p>
             <a:r>
               <a:rPr lang="en-US" dirty="0"/>
-              <a:t>MEF2 is enriched 2.67x at 11-25 bp against 1.47x for KLF/SP, modal spacing 14 bp between centres. No 10-11 bp repeat survives correction, so no fixed protein-protein register.</a:t>
+              <a:t>Left panel counts every MEF2 footprint, important or not: it is occurrence, not importance. Middle panel is importance, measured against footprint-free tiles at the same distance, so the general fall-off with distance is removed. Right panel: 5.6% of Age Up sites carry a MEF2 footprint within 25 bp against 13.7% of their matched Stable controls (Fisher p 0.004, FDR 0.03); Exercise Down is similar but weaker. No 10-11 bp repeat survives correction, so no fixed protein-protein register.</a:t>
             </a:r>
             <a:endParaRPr lang="en-US" dirty="0"/>
           </a:p>
@@ -1432,7 +1432,7 @@
           <a:p>
             <a:r>
               <a:rPr lang="en-US" dirty="0"/>
-              <a:t>Top: a Stable site, 85% of its dependence on the AP-1 motif. Bottom: an age-gained site where the AP-1 motif is worth -0.18 and the strongest other window -1.48. Tnfaip8 rises with age, matching the AP-1 gain.</a:t>
+              <a:t>Both are promoters a few hundred bp from a TSS, matched on predicted accessibility (0.96 vs 1.12) and peak width (1359 vs 1329 bp). At the Sqstm1 promoter AP-1 is bound in all three conditions, the motif window is worth -1.00 and 81% of the loss sits within 85 bp. At the Psmd11 promoter AP-1 is absent in young and gained in both aged states, the motif is still the strongest window but only -0.58, and the loss is smeared over 114 bp against 83. Psmd11 rises with age, matching the AP-1 gain; the exercise direction does not match, so do not claim it.</a:t>
             </a:r>
             <a:endParaRPr lang="en-US" dirty="0"/>
           </a:p>
@@ -4202,7 +4202,7 @@
                   <a:schemeClr val="tx1"/>
                 </a:solidFill>
               </a:rPr>
-              <a:t>What we did to every site</a:t>
+              <a:t>What one site looks like</a:t>
             </a:r>
             <a:endParaRPr lang="en-US" sz="2800" dirty="0"/>
           </a:p>
@@ -4210,7 +4210,7 @@
       </p:sp>
       <p:pic>
         <p:nvPicPr>
-          <p:cNvPr id="3" name="Image 0" descr="/Users/z5162865/WongLab/AlphaGenome_Ap1/Analysis/slide_figures/s1_method_schematic.png">    </p:cNvPr>
+          <p:cNvPr id="3" name="Image 0" descr="/Users/z5162865/WongLab/AlphaGenome_Ap1/Analysis/slide_figures/s0_element.png">    </p:cNvPr>
           <p:cNvPicPr>
             <a:picLocks noChangeAspect="1"/>
           </p:cNvPicPr>
@@ -4224,8 +4224,8 @@
         </p:blipFill>
         <p:spPr>
           <a:xfrm>
-            <a:off x="623066" y="1097280"/>
-            <a:ext cx="10915388" cy="4663440"/>
+            <a:off x="897451" y="1143000"/>
+            <a:ext cx="10366617" cy="3520440"/>
           </a:xfrm>
           <a:prstGeom prst="rect">
             <a:avLst/>
@@ -4234,7 +4234,304 @@
       </p:pic>
       <p:sp>
         <p:nvSpPr>
-          <p:cNvPr id="4" name="Text 0"/>
+          <p:cNvPr id="4" name="stat-0"/>
+          <p:cNvSpPr/>
+          <p:nvPr/>
+        </p:nvSpPr>
+        <p:spPr>
+          <a:xfrm>
+            <a:off x="502920" y="4846320"/>
+            <a:ext cx="3535680" cy="868680"/>
+          </a:xfrm>
+          <a:prstGeom prst="roundRect">
+            <a:avLst>
+              <a:gd name="adj" fmla="val 6316"/>
+            </a:avLst>
+          </a:prstGeom>
+          <a:solidFill>
+            <a:srgbClr val="F2F2F2"/>
+          </a:solidFill>
+          <a:ln w="12700">
+            <a:solidFill>
+              <a:srgbClr val="E2E2E2"/>
+            </a:solidFill>
+            <a:prstDash val="solid"/>
+          </a:ln>
+        </p:spPr>
+      </p:sp>
+      <p:sp>
+        <p:nvSpPr>
+          <p:cNvPr id="5" name="Text 2"/>
+          <p:cNvSpPr txBox="1"/>
+          <p:nvPr/>
+        </p:nvSpPr>
+        <p:spPr>
+          <a:xfrm>
+            <a:off x="612648" y="4937760"/>
+            <a:ext cx="3316224" cy="548640"/>
+          </a:xfrm>
+          <a:prstGeom prst="rect">
+            <a:avLst/>
+          </a:prstGeom>
+          <a:noFill/>
+          <a:ln/>
+        </p:spPr>
+        <p:txBody>
+          <a:bodyPr wrap="square" lIns="0" tIns="0" rIns="0" bIns="0" rtlCol="0" anchor="ctr"/>
+          <a:lstStyle/>
+          <a:p>
+            <a:pPr algn="ctr" indent="0" marL="0">
+              <a:buNone/>
+            </a:pPr>
+            <a:r>
+              <a:rPr lang="en-US" sz="3000" b="1" dirty="0">
+                <a:solidFill>
+                  <a:srgbClr val="111111"/>
+                </a:solidFill>
+              </a:rPr>
+              <a:t>3,678</a:t>
+            </a:r>
+            <a:endParaRPr lang="en-US" sz="3000" dirty="0"/>
+          </a:p>
+        </p:txBody>
+      </p:sp>
+      <p:sp>
+        <p:nvSpPr>
+          <p:cNvPr id="6" name="Text 3"/>
+          <p:cNvSpPr txBox="1"/>
+          <p:nvPr/>
+        </p:nvSpPr>
+        <p:spPr>
+          <a:xfrm>
+            <a:off x="612648" y="5504688"/>
+            <a:ext cx="3316224" cy="137160"/>
+          </a:xfrm>
+          <a:prstGeom prst="rect">
+            <a:avLst/>
+          </a:prstGeom>
+          <a:noFill/>
+          <a:ln/>
+        </p:spPr>
+        <p:txBody>
+          <a:bodyPr wrap="square" lIns="0" tIns="0" rIns="0" bIns="0" rtlCol="0" anchor="ctr"/>
+          <a:lstStyle/>
+          <a:p>
+            <a:pPr algn="ctr" indent="0" marL="0">
+              <a:buNone/>
+            </a:pPr>
+            <a:r>
+              <a:rPr lang="en-US" sz="1200" dirty="0">
+                <a:solidFill>
+                  <a:srgbClr val="595959"/>
+                </a:solidFill>
+              </a:rPr>
+              <a:t>cardiomyocyte AP-1 sites</a:t>
+            </a:r>
+            <a:endParaRPr lang="en-US" sz="1200" dirty="0"/>
+          </a:p>
+        </p:txBody>
+      </p:sp>
+      <p:sp>
+        <p:nvSpPr>
+          <p:cNvPr id="7" name="stat-1"/>
+          <p:cNvSpPr/>
+          <p:nvPr/>
+        </p:nvSpPr>
+        <p:spPr>
+          <a:xfrm>
+            <a:off x="4312920" y="4846320"/>
+            <a:ext cx="3535680" cy="868680"/>
+          </a:xfrm>
+          <a:prstGeom prst="roundRect">
+            <a:avLst>
+              <a:gd name="adj" fmla="val 6316"/>
+            </a:avLst>
+          </a:prstGeom>
+          <a:solidFill>
+            <a:srgbClr val="F2F2F2"/>
+          </a:solidFill>
+          <a:ln w="12700">
+            <a:solidFill>
+              <a:srgbClr val="E2E2E2"/>
+            </a:solidFill>
+            <a:prstDash val="solid"/>
+          </a:ln>
+        </p:spPr>
+      </p:sp>
+      <p:sp>
+        <p:nvSpPr>
+          <p:cNvPr id="8" name="Text 5"/>
+          <p:cNvSpPr txBox="1"/>
+          <p:nvPr/>
+        </p:nvSpPr>
+        <p:spPr>
+          <a:xfrm>
+            <a:off x="4422648" y="4937760"/>
+            <a:ext cx="3316224" cy="548640"/>
+          </a:xfrm>
+          <a:prstGeom prst="rect">
+            <a:avLst/>
+          </a:prstGeom>
+          <a:noFill/>
+          <a:ln/>
+        </p:spPr>
+        <p:txBody>
+          <a:bodyPr wrap="square" lIns="0" tIns="0" rIns="0" bIns="0" rtlCol="0" anchor="ctr"/>
+          <a:lstStyle/>
+          <a:p>
+            <a:pPr algn="ctr" indent="0" marL="0">
+              <a:buNone/>
+            </a:pPr>
+            <a:r>
+              <a:rPr lang="en-US" sz="3000" b="1" dirty="0">
+                <a:solidFill>
+                  <a:srgbClr val="111111"/>
+                </a:solidFill>
+              </a:rPr>
+              <a:t>364</a:t>
+            </a:r>
+            <a:endParaRPr lang="en-US" sz="3000" dirty="0"/>
+          </a:p>
+        </p:txBody>
+      </p:sp>
+      <p:sp>
+        <p:nvSpPr>
+          <p:cNvPr id="9" name="Text 6"/>
+          <p:cNvSpPr txBox="1"/>
+          <p:nvPr/>
+        </p:nvSpPr>
+        <p:spPr>
+          <a:xfrm>
+            <a:off x="4422648" y="5504688"/>
+            <a:ext cx="3316224" cy="137160"/>
+          </a:xfrm>
+          <a:prstGeom prst="rect">
+            <a:avLst/>
+          </a:prstGeom>
+          <a:noFill/>
+          <a:ln/>
+        </p:spPr>
+        <p:txBody>
+          <a:bodyPr wrap="square" lIns="0" tIns="0" rIns="0" bIns="0" rtlCol="0" anchor="ctr"/>
+          <a:lstStyle/>
+          <a:p>
+            <a:pPr algn="ctr" indent="0" marL="0">
+              <a:buNone/>
+            </a:pPr>
+            <a:r>
+              <a:rPr lang="en-US" sz="1200" dirty="0">
+                <a:solidFill>
+                  <a:srgbClr val="595959"/>
+                </a:solidFill>
+              </a:rPr>
+              <a:t>edits of each one</a:t>
+            </a:r>
+            <a:endParaRPr lang="en-US" sz="1200" dirty="0"/>
+          </a:p>
+        </p:txBody>
+      </p:sp>
+      <p:sp>
+        <p:nvSpPr>
+          <p:cNvPr id="10" name="stat-2"/>
+          <p:cNvSpPr/>
+          <p:nvPr/>
+        </p:nvSpPr>
+        <p:spPr>
+          <a:xfrm>
+            <a:off x="8122920" y="4846320"/>
+            <a:ext cx="3535680" cy="868680"/>
+          </a:xfrm>
+          <a:prstGeom prst="roundRect">
+            <a:avLst>
+              <a:gd name="adj" fmla="val 6316"/>
+            </a:avLst>
+          </a:prstGeom>
+          <a:solidFill>
+            <a:srgbClr val="F2F2F2"/>
+          </a:solidFill>
+          <a:ln w="12700">
+            <a:solidFill>
+              <a:srgbClr val="E2E2E2"/>
+            </a:solidFill>
+            <a:prstDash val="solid"/>
+          </a:ln>
+        </p:spPr>
+      </p:sp>
+      <p:sp>
+        <p:nvSpPr>
+          <p:cNvPr id="11" name="Text 8"/>
+          <p:cNvSpPr txBox="1"/>
+          <p:nvPr/>
+        </p:nvSpPr>
+        <p:spPr>
+          <a:xfrm>
+            <a:off x="8232648" y="4937760"/>
+            <a:ext cx="3316224" cy="548640"/>
+          </a:xfrm>
+          <a:prstGeom prst="rect">
+            <a:avLst/>
+          </a:prstGeom>
+          <a:noFill/>
+          <a:ln/>
+        </p:spPr>
+        <p:txBody>
+          <a:bodyPr wrap="square" lIns="0" tIns="0" rIns="0" bIns="0" rtlCol="0" anchor="ctr"/>
+          <a:lstStyle/>
+          <a:p>
+            <a:pPr algn="ctr" indent="0" marL="0">
+              <a:buNone/>
+            </a:pPr>
+            <a:r>
+              <a:rPr lang="en-US" sz="3000" b="1" dirty="0">
+                <a:solidFill>
+                  <a:srgbClr val="C2551C"/>
+                </a:solidFill>
+              </a:rPr>
+              <a:t>170 bp</a:t>
+            </a:r>
+            <a:endParaRPr lang="en-US" sz="3000" dirty="0"/>
+          </a:p>
+        </p:txBody>
+      </p:sp>
+      <p:sp>
+        <p:nvSpPr>
+          <p:cNvPr id="12" name="Text 9"/>
+          <p:cNvSpPr txBox="1"/>
+          <p:nvPr/>
+        </p:nvSpPr>
+        <p:spPr>
+          <a:xfrm>
+            <a:off x="8232648" y="5504688"/>
+            <a:ext cx="3316224" cy="137160"/>
+          </a:xfrm>
+          <a:prstGeom prst="rect">
+            <a:avLst/>
+          </a:prstGeom>
+          <a:noFill/>
+          <a:ln/>
+        </p:spPr>
+        <p:txBody>
+          <a:bodyPr wrap="square" lIns="0" tIns="0" rIns="0" bIns="0" rtlCol="0" anchor="ctr"/>
+          <a:lstStyle/>
+          <a:p>
+            <a:pPr algn="ctr" indent="0" marL="0">
+              <a:buNone/>
+            </a:pPr>
+            <a:r>
+              <a:rPr lang="en-US" sz="1200" dirty="0">
+                <a:solidFill>
+                  <a:srgbClr val="595959"/>
+                </a:solidFill>
+              </a:rPr>
+              <a:t>the window every effect is read over</a:t>
+            </a:r>
+            <a:endParaRPr lang="en-US" sz="1200" dirty="0"/>
+          </a:p>
+        </p:txBody>
+      </p:sp>
+      <p:sp>
+        <p:nvSpPr>
+          <p:cNvPr id="13" name="Text 0"/>
           <p:cNvSpPr/>
           <p:nvPr>
             <p:ph idx="101" type="body" hasCustomPrompt="1"/>
@@ -4275,7 +4572,7 @@
                   <a:srgbClr val="111111"/>
                 </a:solidFill>
               </a:rPr>
-              <a:t>3,678 sites × 364 edits each, every edit read as the change in predicted accessibility over the surrounding 170 bp</a:t>
+              <a:t>each experiment that follows is introduced where its result appears</a:t>
             </a:r>
             <a:endParaRPr lang="en-US" sz="1500" dirty="0"/>
           </a:p>
@@ -4391,7 +4688,7 @@
       </p:sp>
       <p:pic>
         <p:nvPicPr>
-          <p:cNvPr id="3" name="Image 0" descr="/Users/z5162865/WongLab/AlphaGenome_Ap1/Analysis/slide_figures/s2_matched_null.png">    </p:cNvPr>
+          <p:cNvPr id="3" name="Image 0" descr="/Users/z5162865/WongLab/AlphaGenome_Ap1/Analysis/slide_figures/d_block.png">    </p:cNvPr>
           <p:cNvPicPr>
             <a:picLocks noChangeAspect="1"/>
           </p:cNvPicPr>
@@ -4405,17 +4702,41 @@
         </p:blipFill>
         <p:spPr>
           <a:xfrm>
-            <a:off x="663702" y="1097280"/>
-            <a:ext cx="10834117" cy="4663440"/>
+            <a:off x="565042" y="960120"/>
+            <a:ext cx="7099516" cy="1005840"/>
           </a:xfrm>
           <a:prstGeom prst="rect">
             <a:avLst/>
           </a:prstGeom>
         </p:spPr>
       </p:pic>
-      <p:sp>
-        <p:nvSpPr>
-          <p:cNvPr id="4" name="Text 0"/>
+      <p:pic>
+        <p:nvPicPr>
+          <p:cNvPr id="4" name="Image 1" descr="/Users/z5162865/WongLab/AlphaGenome_Ap1/Analysis/slide_figures/s2_matched_null.png">    </p:cNvPr>
+          <p:cNvPicPr>
+            <a:picLocks noChangeAspect="1"/>
+          </p:cNvPicPr>
+          <p:nvPr/>
+        </p:nvPicPr>
+        <p:blipFill>
+          <a:blip r:embed="rId2"/>
+          <a:stretch>
+            <a:fillRect/>
+          </a:stretch>
+        </p:blipFill>
+        <p:spPr>
+          <a:xfrm>
+            <a:off x="1832087" y="2029968"/>
+            <a:ext cx="8497347" cy="3657600"/>
+          </a:xfrm>
+          <a:prstGeom prst="rect">
+            <a:avLst/>
+          </a:prstGeom>
+        </p:spPr>
+      </p:pic>
+      <p:sp>
+        <p:nvSpPr>
+          <p:cNvPr id="5" name="Text 0"/>
           <p:cNvSpPr/>
           <p:nvPr>
             <p:ph idx="101" type="body" hasCustomPrompt="1"/>
@@ -4572,7 +4893,7 @@
       </p:sp>
       <p:pic>
         <p:nvPicPr>
-          <p:cNvPr id="3" name="Image 0" descr="/Users/z5162865/WongLab/AlphaGenome_Ap1/Analysis/slide_figures/s8_partners.png">    </p:cNvPr>
+          <p:cNvPr id="3" name="Image 0" descr="/Users/z5162865/WongLab/AlphaGenome_Ap1/Analysis/slide_figures/d_tile.png">    </p:cNvPr>
           <p:cNvPicPr>
             <a:picLocks noChangeAspect="1"/>
           </p:cNvPicPr>
@@ -4586,24 +4907,50 @@
         </p:blipFill>
         <p:spPr>
           <a:xfrm>
-            <a:off x="502920" y="1335951"/>
-            <a:ext cx="8229600" cy="4094658"/>
+            <a:off x="565042" y="960120"/>
+            <a:ext cx="7099516" cy="1005840"/>
           </a:xfrm>
           <a:prstGeom prst="rect">
             <a:avLst/>
           </a:prstGeom>
         </p:spPr>
       </p:pic>
-      <p:sp>
-        <p:nvSpPr>
-          <p:cNvPr id="4" name="Text 1"/>
-          <p:cNvSpPr txBox="1"/>
+      <p:pic>
+        <p:nvPicPr>
+          <p:cNvPr id="4" name="Image 1" descr="/Users/z5162865/WongLab/AlphaGenome_Ap1/Analysis/slide_figures/s8_partners.png">    </p:cNvPr>
+          <p:cNvPicPr>
+            <a:picLocks noChangeAspect="1"/>
+          </p:cNvPicPr>
           <p:nvPr/>
-        </p:nvSpPr>
-        <p:spPr>
-          <a:xfrm>
-            <a:off x="8915400" y="1371600"/>
-            <a:ext cx="2743200" cy="4023360"/>
+        </p:nvPicPr>
+        <p:blipFill>
+          <a:blip r:embed="rId2"/>
+          <a:stretch>
+            <a:fillRect/>
+          </a:stretch>
+        </p:blipFill>
+        <p:spPr>
+          <a:xfrm>
+            <a:off x="502920" y="2300013"/>
+            <a:ext cx="11155680" cy="3126653"/>
+          </a:xfrm>
+          <a:prstGeom prst="rect">
+            <a:avLst/>
+          </a:prstGeom>
+        </p:spPr>
+      </p:pic>
+      <p:sp>
+        <p:nvSpPr>
+          <p:cNvPr id="5" name="Text 0"/>
+          <p:cNvSpPr/>
+          <p:nvPr>
+            <p:ph idx="101" type="body" hasCustomPrompt="1"/>
+          </p:nvPr>
+        </p:nvSpPr>
+        <p:spPr>
+          <a:xfrm>
+            <a:off x="502920" y="5943600"/>
+            <a:ext cx="11155680" cy="658368"/>
           </a:xfrm>
           <a:prstGeom prst="rect">
             <a:avLst/>
@@ -4612,133 +4959,30 @@
           <a:ln/>
         </p:spPr>
         <p:txBody>
-          <a:bodyPr wrap="square" lIns="0" tIns="0" rIns="0" bIns="0" rtlCol="0" anchor="ctr"/>
-          <a:lstStyle/>
-          <a:p>
-            <a:pPr indent="0" marL="0">
-              <a:buNone/>
-            </a:pPr>
-            <a:r>
-              <a:rPr lang="en-US" sz="2200" b="1" dirty="0">
+          <a:bodyPr wrap="square" rtlCol="0" anchor="t"/>
+          <a:lstStyle/>
+          <a:p>
+            <a:pPr algn="l" indent="0" marL="0">
+              <a:buNone/>
+            </a:pPr>
+            <a:r>
+              <a:rPr lang="en-US" sz="1500" b="1" dirty="0">
                 <a:solidFill>
                   <a:srgbClr val="C2551C"/>
                 </a:solidFill>
               </a:rPr>
-              <a:t>2.49 million</a:t>
-            </a:r>
-            <a:endParaRPr lang="en-US" sz="2200" dirty="0"/>
-          </a:p>
-          <a:p>
-            <a:pPr indent="0" marL="0">
-              <a:spcAft>
-                <a:spcPts val="1400"/>
-              </a:spcAft>
-              <a:buNone/>
-            </a:pPr>
-            <a:r>
-              <a:rPr lang="en-US" sz="1400" dirty="0">
-                <a:solidFill>
-                  <a:srgbClr val="595959"/>
-                </a:solidFill>
-              </a:rPr>
-              <a:t>footprinted cardiomyocyte TFBS mapped onto the scan</a:t>
-            </a:r>
-            <a:endParaRPr lang="en-US" sz="2200" dirty="0"/>
-          </a:p>
-          <a:p>
-            <a:pPr indent="0" marL="0">
-              <a:spcAft>
-                <a:spcPts val="1200"/>
-              </a:spcAft>
-              <a:buNone/>
-            </a:pPr>
-            <a:r>
-              <a:rPr lang="en-US" sz="1450" dirty="0">
-                <a:solidFill>
-                  <a:srgbClr val="000000"/>
-                </a:solidFill>
-              </a:rPr>
-              <a:t>The ranking is the validation: MEF2, GATA, NFI and TEAD come out on top, and the model was never told any of them.</a:t>
-            </a:r>
-            <a:endParaRPr lang="en-US" sz="2200" dirty="0"/>
-          </a:p>
-          <a:p>
-            <a:pPr indent="0" marL="0">
-              <a:spcAft>
-                <a:spcPts val="1200"/>
-              </a:spcAft>
-              <a:buNone/>
-            </a:pPr>
-            <a:r>
-              <a:rPr lang="en-US" sz="1450" dirty="0">
-                <a:solidFill>
-                  <a:srgbClr val="000000"/>
-                </a:solidFill>
-              </a:rPr>
-              <a:t>The class split is the question, and the answer is no. Not one family matters more to a Dynamic site than to its matched Stable partner.</a:t>
-            </a:r>
-            <a:endParaRPr lang="en-US" sz="2200" dirty="0"/>
-          </a:p>
-          <a:p>
-            <a:pPr indent="0" marL="0">
-              <a:buNone/>
-            </a:pPr>
-            <a:r>
-              <a:rPr lang="en-US" sz="1450" i="1" dirty="0">
-                <a:solidFill>
-                  <a:srgbClr val="595959"/>
-                </a:solidFill>
-              </a:rPr>
-              <a:t>Whatever makes a site responsive, it is not a different cast of neighbours.</a:t>
-            </a:r>
-            <a:endParaRPr lang="en-US" sz="2200" dirty="0"/>
-          </a:p>
-        </p:txBody>
-      </p:sp>
-      <p:sp>
-        <p:nvSpPr>
-          <p:cNvPr id="5" name="Text 0"/>
-          <p:cNvSpPr/>
-          <p:nvPr>
-            <p:ph idx="101" type="body" hasCustomPrompt="1"/>
-          </p:nvPr>
-        </p:nvSpPr>
-        <p:spPr>
-          <a:xfrm>
-            <a:off x="502920" y="5943600"/>
-            <a:ext cx="11155680" cy="658368"/>
-          </a:xfrm>
-          <a:prstGeom prst="rect">
-            <a:avLst/>
-          </a:prstGeom>
-          <a:noFill/>
-          <a:ln/>
-        </p:spPr>
-        <p:txBody>
-          <a:bodyPr wrap="square" rtlCol="0" anchor="t"/>
-          <a:lstStyle/>
-          <a:p>
+              <a:t>Takeaway   </a:t>
+            </a:r>
             <a:pPr algn="l" indent="0" marL="0">
               <a:buNone/>
             </a:pPr>
             <a:r>
-              <a:rPr lang="en-US" sz="1500" b="1" dirty="0">
-                <a:solidFill>
-                  <a:srgbClr val="C2551C"/>
-                </a:solidFill>
-              </a:rPr>
-              <a:t>Takeaway   </a:t>
-            </a:r>
-            <a:pPr algn="l" indent="0" marL="0">
-              <a:buNone/>
-            </a:pPr>
-            <a:r>
               <a:rPr lang="en-US" sz="1500" dirty="0">
                 <a:solidFill>
                   <a:srgbClr val="111111"/>
                 </a:solidFill>
               </a:rPr>
-              <a:t>the cast of partners is identical in both classes — what differs is how the dependence is spread across them</a:t>
+              <a:t>the ranking is the validation — MEF2, GATA, NFI, TEAD, none of it told to the model; the class split is the question, and no class leans on a different partner</a:t>
             </a:r>
             <a:endParaRPr lang="en-US" sz="1500" dirty="0"/>
           </a:p>
@@ -4846,7 +5090,7 @@
                   <a:schemeClr val="tx1"/>
                 </a:solidFill>
               </a:rPr>
-              <a:t>The partner that matters is the one that sits closest</a:t>
+              <a:t>Age-gained sites are missing their closest MEF2</a:t>
             </a:r>
             <a:endParaRPr lang="en-US" sz="2800" dirty="0"/>
           </a:p>
@@ -4868,8 +5112,8 @@
         </p:blipFill>
         <p:spPr>
           <a:xfrm>
-            <a:off x="502920" y="1143849"/>
-            <a:ext cx="11155680" cy="4570302"/>
+            <a:off x="502920" y="1703295"/>
+            <a:ext cx="11155680" cy="3359970"/>
           </a:xfrm>
           <a:prstGeom prst="rect">
             <a:avLst/>
@@ -4919,7 +5163,7 @@
                   <a:srgbClr val="111111"/>
                 </a:solidFill>
               </a:rPr>
-              <a:t>MEF2 is 2.67× enriched immediately beside the motif (FDR 0.004); KLF/SP, the commonest factor, is not</a:t>
+              <a:t>MEF2 sits 2.67× more often right beside the motif than chance, and it is the age-gained sites that lack one (FDR 0.03)</a:t>
             </a:r>
             <a:endParaRPr lang="en-US" sz="1500" dirty="0"/>
           </a:p>
@@ -5027,7 +5271,7 @@
                   <a:schemeClr val="tx1"/>
                 </a:solidFill>
               </a:rPr>
-              <a:t>One locus, two architectures</a:t>
+              <a:t>Two promoters, one stable and one age-gained</a:t>
             </a:r>
             <a:endParaRPr lang="en-US" sz="2800" dirty="0"/>
           </a:p>
@@ -5100,7 +5344,7 @@
                   <a:srgbClr val="111111"/>
                 </a:solidFill>
               </a:rPr>
-              <a:t>at the age-gained site every cardiac cofactor is bound in all three conditions — only AP-1 switches</a:t>
+              <a:t>the same motif in the same kind of promoter is worth −1.00 where binding is stable and −0.58 where it is age-gained</a:t>
             </a:r>
             <a:endParaRPr lang="en-US" sz="1500" dirty="0"/>
           </a:p>
@@ -5216,7 +5460,7 @@
       </p:sp>
       <p:pic>
         <p:nvPicPr>
-          <p:cNvPr id="3" name="Image 0" descr="/Users/z5162865/WongLab/AlphaGenome_Ap1/Analysis/slide_figures/s3_dependence.png">    </p:cNvPr>
+          <p:cNvPr id="3" name="Image 0" descr="/Users/z5162865/WongLab/AlphaGenome_Ap1/Analysis/slide_figures/d_base.png">    </p:cNvPr>
           <p:cNvPicPr>
             <a:picLocks noChangeAspect="1"/>
           </p:cNvPicPr>
@@ -5230,17 +5474,41 @@
         </p:blipFill>
         <p:spPr>
           <a:xfrm>
-            <a:off x="502920" y="1449013"/>
-            <a:ext cx="11155680" cy="3959974"/>
+            <a:off x="502920" y="998536"/>
+            <a:ext cx="7223760" cy="929007"/>
           </a:xfrm>
           <a:prstGeom prst="rect">
             <a:avLst/>
           </a:prstGeom>
         </p:spPr>
       </p:pic>
-      <p:sp>
-        <p:nvSpPr>
-          <p:cNvPr id="4" name="Text 0"/>
+      <p:pic>
+        <p:nvPicPr>
+          <p:cNvPr id="4" name="Image 1" descr="/Users/z5162865/WongLab/AlphaGenome_Ap1/Analysis/slide_figures/s3_dependence.png">    </p:cNvPr>
+          <p:cNvPicPr>
+            <a:picLocks noChangeAspect="1"/>
+          </p:cNvPicPr>
+          <p:nvPr/>
+        </p:nvPicPr>
+        <p:blipFill>
+          <a:blip r:embed="rId2"/>
+          <a:stretch>
+            <a:fillRect/>
+          </a:stretch>
+        </p:blipFill>
+        <p:spPr>
+          <a:xfrm>
+            <a:off x="773919" y="2029968"/>
+            <a:ext cx="10613681" cy="3657600"/>
+          </a:xfrm>
+          <a:prstGeom prst="rect">
+            <a:avLst/>
+          </a:prstGeom>
+        </p:spPr>
+      </p:pic>
+      <p:sp>
+        <p:nvSpPr>
+          <p:cNvPr id="5" name="Text 0"/>
           <p:cNvSpPr/>
           <p:nvPr>
             <p:ph idx="101" type="body" hasCustomPrompt="1"/>
@@ -5397,7 +5665,7 @@
       </p:sp>
       <p:pic>
         <p:nvPicPr>
-          <p:cNvPr id="3" name="Image 0" descr="/Users/z5162865/WongLab/AlphaGenome_Ap1/Analysis/slide_figures/s4_titration.png">    </p:cNvPr>
+          <p:cNvPr id="3" name="Image 0" descr="/Users/z5162865/WongLab/AlphaGenome_Ap1/Analysis/slide_figures/d_titr.png">    </p:cNvPr>
           <p:cNvPicPr>
             <a:picLocks noChangeAspect="1"/>
           </p:cNvPicPr>
@@ -5411,51 +5679,50 @@
         </p:blipFill>
         <p:spPr>
           <a:xfrm>
-            <a:off x="2577695" y="1097280"/>
-            <a:ext cx="7006130" cy="3429000"/>
+            <a:off x="565042" y="960120"/>
+            <a:ext cx="7099516" cy="1005840"/>
           </a:xfrm>
           <a:prstGeom prst="rect">
             <a:avLst/>
           </a:prstGeom>
         </p:spPr>
       </p:pic>
-      <p:sp>
-        <p:nvSpPr>
-          <p:cNvPr id="4" name="stat-0"/>
+      <p:pic>
+        <p:nvPicPr>
+          <p:cNvPr id="4" name="Image 1" descr="/Users/z5162865/WongLab/AlphaGenome_Ap1/Analysis/slide_figures/s4_titration.png">    </p:cNvPr>
+          <p:cNvPicPr>
+            <a:picLocks noChangeAspect="1"/>
+          </p:cNvPicPr>
+          <p:nvPr/>
+        </p:nvPicPr>
+        <p:blipFill>
+          <a:blip r:embed="rId2"/>
+          <a:stretch>
+            <a:fillRect/>
+          </a:stretch>
+        </p:blipFill>
+        <p:spPr>
+          <a:xfrm>
+            <a:off x="502920" y="2095594"/>
+            <a:ext cx="11155680" cy="3535492"/>
+          </a:xfrm>
+          <a:prstGeom prst="rect">
+            <a:avLst/>
+          </a:prstGeom>
+        </p:spPr>
+      </p:pic>
+      <p:sp>
+        <p:nvSpPr>
+          <p:cNvPr id="5" name="Text 0"/>
           <p:cNvSpPr/>
-          <p:nvPr/>
-        </p:nvSpPr>
-        <p:spPr>
-          <a:xfrm>
-            <a:off x="502920" y="4709160"/>
-            <a:ext cx="2583180" cy="1051560"/>
-          </a:xfrm>
-          <a:prstGeom prst="roundRect">
-            <a:avLst>
-              <a:gd name="adj" fmla="val 5217"/>
-            </a:avLst>
-          </a:prstGeom>
-          <a:solidFill>
-            <a:srgbClr val="F2F2F2"/>
-          </a:solidFill>
-          <a:ln w="12700">
-            <a:solidFill>
-              <a:srgbClr val="E2E2E2"/>
-            </a:solidFill>
-            <a:prstDash val="solid"/>
-          </a:ln>
-        </p:spPr>
-      </p:sp>
-      <p:sp>
-        <p:nvSpPr>
-          <p:cNvPr id="5" name="Text 2"/>
-          <p:cNvSpPr txBox="1"/>
-          <p:nvPr/>
-        </p:nvSpPr>
-        <p:spPr>
-          <a:xfrm>
-            <a:off x="612648" y="4800600"/>
-            <a:ext cx="2363724" cy="548640"/>
+          <p:nvPr>
+            <p:ph idx="101" type="body" hasCustomPrompt="1"/>
+          </p:nvPr>
+        </p:nvSpPr>
+        <p:spPr>
+          <a:xfrm>
+            <a:off x="502920" y="5943600"/>
+            <a:ext cx="11155680" cy="658368"/>
           </a:xfrm>
           <a:prstGeom prst="rect">
             <a:avLst/>
@@ -5464,401 +5731,30 @@
           <a:ln/>
         </p:spPr>
         <p:txBody>
-          <a:bodyPr wrap="square" lIns="0" tIns="0" rIns="0" bIns="0" rtlCol="0" anchor="ctr"/>
-          <a:lstStyle/>
-          <a:p>
-            <a:pPr algn="ctr" indent="0" marL="0">
-              <a:buNone/>
-            </a:pPr>
-            <a:r>
-              <a:rPr lang="en-US" sz="3000" b="1" dirty="0">
+          <a:bodyPr wrap="square" rtlCol="0" anchor="t"/>
+          <a:lstStyle/>
+          <a:p>
+            <a:pPr algn="l" indent="0" marL="0">
+              <a:buNone/>
+            </a:pPr>
+            <a:r>
+              <a:rPr lang="en-US" sz="1500" b="1" dirty="0">
+                <a:solidFill>
+                  <a:srgbClr val="C2551C"/>
+                </a:solidFill>
+              </a:rPr>
+              <a:t>Takeaway   </a:t>
+            </a:r>
+            <a:pPr algn="l" indent="0" marL="0">
+              <a:buNone/>
+            </a:pPr>
+            <a:r>
+              <a:rPr lang="en-US" sz="1500" dirty="0">
                 <a:solidFill>
                   <a:srgbClr val="111111"/>
                 </a:solidFill>
               </a:rPr>
-              <a:t>−0.45</a:t>
-            </a:r>
-            <a:endParaRPr lang="en-US" sz="3000" dirty="0"/>
-          </a:p>
-        </p:txBody>
-      </p:sp>
-      <p:sp>
-        <p:nvSpPr>
-          <p:cNvPr id="6" name="Text 3"/>
-          <p:cNvSpPr txBox="1"/>
-          <p:nvPr/>
-        </p:nvSpPr>
-        <p:spPr>
-          <a:xfrm>
-            <a:off x="612648" y="5367528"/>
-            <a:ext cx="2363724" cy="320040"/>
-          </a:xfrm>
-          <a:prstGeom prst="rect">
-            <a:avLst/>
-          </a:prstGeom>
-          <a:noFill/>
-          <a:ln/>
-        </p:spPr>
-        <p:txBody>
-          <a:bodyPr wrap="square" lIns="0" tIns="0" rIns="0" bIns="0" rtlCol="0" anchor="ctr"/>
-          <a:lstStyle/>
-          <a:p>
-            <a:pPr algn="ctr" indent="0" marL="0">
-              <a:buNone/>
-            </a:pPr>
-            <a:r>
-              <a:rPr lang="en-US" sz="1200" dirty="0">
-                <a:solidFill>
-                  <a:srgbClr val="595959"/>
-                </a:solidFill>
-              </a:rPr>
-              <a:t>cost of changing one core base</a:t>
-            </a:r>
-            <a:endParaRPr lang="en-US" sz="1200" dirty="0"/>
-          </a:p>
-        </p:txBody>
-      </p:sp>
-      <p:sp>
-        <p:nvSpPr>
-          <p:cNvPr id="7" name="stat-1"/>
-          <p:cNvSpPr/>
-          <p:nvPr/>
-        </p:nvSpPr>
-        <p:spPr>
-          <a:xfrm>
-            <a:off x="3360420" y="4709160"/>
-            <a:ext cx="2583180" cy="1051560"/>
-          </a:xfrm>
-          <a:prstGeom prst="roundRect">
-            <a:avLst>
-              <a:gd name="adj" fmla="val 5217"/>
-            </a:avLst>
-          </a:prstGeom>
-          <a:solidFill>
-            <a:srgbClr val="F2F2F2"/>
-          </a:solidFill>
-          <a:ln w="12700">
-            <a:solidFill>
-              <a:srgbClr val="E2E2E2"/>
-            </a:solidFill>
-            <a:prstDash val="solid"/>
-          </a:ln>
-        </p:spPr>
-      </p:sp>
-      <p:sp>
-        <p:nvSpPr>
-          <p:cNvPr id="8" name="Text 5"/>
-          <p:cNvSpPr txBox="1"/>
-          <p:nvPr/>
-        </p:nvSpPr>
-        <p:spPr>
-          <a:xfrm>
-            <a:off x="3470148" y="4800600"/>
-            <a:ext cx="2363724" cy="548640"/>
-          </a:xfrm>
-          <a:prstGeom prst="rect">
-            <a:avLst/>
-          </a:prstGeom>
-          <a:noFill/>
-          <a:ln/>
-        </p:spPr>
-        <p:txBody>
-          <a:bodyPr wrap="square" lIns="0" tIns="0" rIns="0" bIns="0" rtlCol="0" anchor="ctr"/>
-          <a:lstStyle/>
-          <a:p>
-            <a:pPr algn="ctr" indent="0" marL="0">
-              <a:buNone/>
-            </a:pPr>
-            <a:r>
-              <a:rPr lang="en-US" sz="3000" b="1" dirty="0">
-                <a:solidFill>
-                  <a:srgbClr val="111111"/>
-                </a:solidFill>
-              </a:rPr>
-              <a:t>−0.56</a:t>
-            </a:r>
-            <a:endParaRPr lang="en-US" sz="3000" dirty="0"/>
-          </a:p>
-        </p:txBody>
-      </p:sp>
-      <p:sp>
-        <p:nvSpPr>
-          <p:cNvPr id="9" name="Text 6"/>
-          <p:cNvSpPr txBox="1"/>
-          <p:nvPr/>
-        </p:nvSpPr>
-        <p:spPr>
-          <a:xfrm>
-            <a:off x="3470148" y="5367528"/>
-            <a:ext cx="2363724" cy="320040"/>
-          </a:xfrm>
-          <a:prstGeom prst="rect">
-            <a:avLst/>
-          </a:prstGeom>
-          <a:noFill/>
-          <a:ln/>
-        </p:spPr>
-        <p:txBody>
-          <a:bodyPr wrap="square" lIns="0" tIns="0" rIns="0" bIns="0" rtlCol="0" anchor="ctr"/>
-          <a:lstStyle/>
-          <a:p>
-            <a:pPr algn="ctr" indent="0" marL="0">
-              <a:buNone/>
-            </a:pPr>
-            <a:r>
-              <a:rPr lang="en-US" sz="1200" dirty="0">
-                <a:solidFill>
-                  <a:srgbClr val="595959"/>
-                </a:solidFill>
-              </a:rPr>
-              <a:t>cost of changing all seven</a:t>
-            </a:r>
-            <a:endParaRPr lang="en-US" sz="1200" dirty="0"/>
-          </a:p>
-        </p:txBody>
-      </p:sp>
-      <p:sp>
-        <p:nvSpPr>
-          <p:cNvPr id="10" name="stat-2"/>
-          <p:cNvSpPr/>
-          <p:nvPr/>
-        </p:nvSpPr>
-        <p:spPr>
-          <a:xfrm>
-            <a:off x="6217920" y="4709160"/>
-            <a:ext cx="2583180" cy="1051560"/>
-          </a:xfrm>
-          <a:prstGeom prst="roundRect">
-            <a:avLst>
-              <a:gd name="adj" fmla="val 5217"/>
-            </a:avLst>
-          </a:prstGeom>
-          <a:solidFill>
-            <a:srgbClr val="F2F2F2"/>
-          </a:solidFill>
-          <a:ln w="12700">
-            <a:solidFill>
-              <a:srgbClr val="E2E2E2"/>
-            </a:solidFill>
-            <a:prstDash val="solid"/>
-          </a:ln>
-        </p:spPr>
-      </p:sp>
-      <p:sp>
-        <p:nvSpPr>
-          <p:cNvPr id="11" name="Text 8"/>
-          <p:cNvSpPr txBox="1"/>
-          <p:nvPr/>
-        </p:nvSpPr>
-        <p:spPr>
-          <a:xfrm>
-            <a:off x="6327648" y="4800600"/>
-            <a:ext cx="2363724" cy="548640"/>
-          </a:xfrm>
-          <a:prstGeom prst="rect">
-            <a:avLst/>
-          </a:prstGeom>
-          <a:noFill/>
-          <a:ln/>
-        </p:spPr>
-        <p:txBody>
-          <a:bodyPr wrap="square" lIns="0" tIns="0" rIns="0" bIns="0" rtlCol="0" anchor="ctr"/>
-          <a:lstStyle/>
-          <a:p>
-            <a:pPr algn="ctr" indent="0" marL="0">
-              <a:buNone/>
-            </a:pPr>
-            <a:r>
-              <a:rPr lang="en-US" sz="3000" b="1" dirty="0">
-                <a:solidFill>
-                  <a:srgbClr val="111111"/>
-                </a:solidFill>
-              </a:rPr>
-              <a:t>−0.29</a:t>
-            </a:r>
-            <a:endParaRPr lang="en-US" sz="3000" dirty="0"/>
-          </a:p>
-        </p:txBody>
-      </p:sp>
-      <p:sp>
-        <p:nvSpPr>
-          <p:cNvPr id="12" name="Text 9"/>
-          <p:cNvSpPr txBox="1"/>
-          <p:nvPr/>
-        </p:nvSpPr>
-        <p:spPr>
-          <a:xfrm>
-            <a:off x="6327648" y="5367528"/>
-            <a:ext cx="2363724" cy="320040"/>
-          </a:xfrm>
-          <a:prstGeom prst="rect">
-            <a:avLst/>
-          </a:prstGeom>
-          <a:noFill/>
-          <a:ln/>
-        </p:spPr>
-        <p:txBody>
-          <a:bodyPr wrap="square" lIns="0" tIns="0" rIns="0" bIns="0" rtlCol="0" anchor="ctr"/>
-          <a:lstStyle/>
-          <a:p>
-            <a:pPr algn="ctr" indent="0" marL="0">
-              <a:buNone/>
-            </a:pPr>
-            <a:r>
-              <a:rPr lang="en-US" sz="1200" dirty="0">
-                <a:solidFill>
-                  <a:srgbClr val="595959"/>
-                </a:solidFill>
-              </a:rPr>
-              <a:t>destroyed, re-inserted nearby</a:t>
-            </a:r>
-            <a:endParaRPr lang="en-US" sz="1200" dirty="0"/>
-          </a:p>
-        </p:txBody>
-      </p:sp>
-      <p:sp>
-        <p:nvSpPr>
-          <p:cNvPr id="13" name="stat-3"/>
-          <p:cNvSpPr/>
-          <p:nvPr/>
-        </p:nvSpPr>
-        <p:spPr>
-          <a:xfrm>
-            <a:off x="9075420" y="4709160"/>
-            <a:ext cx="2583180" cy="1051560"/>
-          </a:xfrm>
-          <a:prstGeom prst="roundRect">
-            <a:avLst>
-              <a:gd name="adj" fmla="val 5217"/>
-            </a:avLst>
-          </a:prstGeom>
-          <a:solidFill>
-            <a:srgbClr val="F2F2F2"/>
-          </a:solidFill>
-          <a:ln w="12700">
-            <a:solidFill>
-              <a:srgbClr val="E2E2E2"/>
-            </a:solidFill>
-            <a:prstDash val="solid"/>
-          </a:ln>
-        </p:spPr>
-      </p:sp>
-      <p:sp>
-        <p:nvSpPr>
-          <p:cNvPr id="14" name="Text 11"/>
-          <p:cNvSpPr txBox="1"/>
-          <p:nvPr/>
-        </p:nvSpPr>
-        <p:spPr>
-          <a:xfrm>
-            <a:off x="9185148" y="4800600"/>
-            <a:ext cx="2363724" cy="548640"/>
-          </a:xfrm>
-          <a:prstGeom prst="rect">
-            <a:avLst/>
-          </a:prstGeom>
-          <a:noFill/>
-          <a:ln/>
-        </p:spPr>
-        <p:txBody>
-          <a:bodyPr wrap="square" lIns="0" tIns="0" rIns="0" bIns="0" rtlCol="0" anchor="ctr"/>
-          <a:lstStyle/>
-          <a:p>
-            <a:pPr algn="ctr" indent="0" marL="0">
-              <a:buNone/>
-            </a:pPr>
-            <a:r>
-              <a:rPr lang="en-US" sz="3000" b="1" dirty="0">
-                <a:solidFill>
-                  <a:srgbClr val="C2551C"/>
-                </a:solidFill>
-              </a:rPr>
-              <a:t>±20–40 bp</a:t>
-            </a:r>
-            <a:endParaRPr lang="en-US" sz="3000" dirty="0"/>
-          </a:p>
-        </p:txBody>
-      </p:sp>
-      <p:sp>
-        <p:nvSpPr>
-          <p:cNvPr id="15" name="Text 12"/>
-          <p:cNvSpPr txBox="1"/>
-          <p:nvPr/>
-        </p:nvSpPr>
-        <p:spPr>
-          <a:xfrm>
-            <a:off x="9185148" y="5367528"/>
-            <a:ext cx="2363724" cy="320040"/>
-          </a:xfrm>
-          <a:prstGeom prst="rect">
-            <a:avLst/>
-          </a:prstGeom>
-          <a:noFill/>
-          <a:ln/>
-        </p:spPr>
-        <p:txBody>
-          <a:bodyPr wrap="square" lIns="0" tIns="0" rIns="0" bIns="0" rtlCol="0" anchor="ctr"/>
-          <a:lstStyle/>
-          <a:p>
-            <a:pPr algn="ctr" indent="0" marL="0">
-              <a:buNone/>
-            </a:pPr>
-            <a:r>
-              <a:rPr lang="en-US" sz="1200" dirty="0">
-                <a:solidFill>
-                  <a:srgbClr val="595959"/>
-                </a:solidFill>
-              </a:rPr>
-              <a:t>where a motif works best</a:t>
-            </a:r>
-            <a:endParaRPr lang="en-US" sz="1200" dirty="0"/>
-          </a:p>
-        </p:txBody>
-      </p:sp>
-      <p:sp>
-        <p:nvSpPr>
-          <p:cNvPr id="16" name="Text 0"/>
-          <p:cNvSpPr/>
-          <p:nvPr>
-            <p:ph idx="101" type="body" hasCustomPrompt="1"/>
-          </p:nvPr>
-        </p:nvSpPr>
-        <p:spPr>
-          <a:xfrm>
-            <a:off x="502920" y="5943600"/>
-            <a:ext cx="11155680" cy="658368"/>
-          </a:xfrm>
-          <a:prstGeom prst="rect">
-            <a:avLst/>
-          </a:prstGeom>
-          <a:noFill/>
-          <a:ln/>
-        </p:spPr>
-        <p:txBody>
-          <a:bodyPr wrap="square" rtlCol="0" anchor="t"/>
-          <a:lstStyle/>
-          <a:p>
-            <a:pPr algn="l" indent="0" marL="0">
-              <a:buNone/>
-            </a:pPr>
-            <a:r>
-              <a:rPr lang="en-US" sz="1500" b="1" dirty="0">
-                <a:solidFill>
-                  <a:srgbClr val="C2551C"/>
-                </a:solidFill>
-              </a:rPr>
-              <a:t>Takeaway   </a:t>
-            </a:r>
-            <a:pPr algn="l" indent="0" marL="0">
-              <a:buNone/>
-            </a:pPr>
-            <a:r>
-              <a:rPr lang="en-US" sz="1500" dirty="0">
-                <a:solidFill>
-                  <a:srgbClr val="111111"/>
-                </a:solidFill>
-              </a:rPr>
-              <a:t>a motif moved elsewhere recovers only a third of what destroying it cost — position matters, not just presence</a:t>
+              <a:t>one wrong base costs −0.45 of the −0.56 total and a moved motif recovers only a third — but every class titrates the same way</a:t>
             </a:r>
             <a:endParaRPr lang="en-US" sz="1500" dirty="0"/>
           </a:p>

--- a/Analysis/AP1_AlphaGenome_results.pptx
+++ b/Analysis/AP1_AlphaGenome_results.pptx
@@ -119,18 +119,18 @@
   <p:extLst>
     <p:ext uri="{521415D9-36F7-43E2-AB2F-B90AF26B5E84}">
       <p14:sectionLst xmlns:p14="http://schemas.microsoft.com/office/powerpoint/2010/main">
-        <p14:section name="Opening" id="{59c41bb3-2150-5909-bd5c-8c37af43eed1}">
+        <p14:section name="Opening" id="{601404cc-c828-e16c-01d6-3e59341f2104}">
           <p14:sldIdLst>
             <p14:sldId id="256"/>
           </p14:sldIdLst>
         </p14:section>
-        <p14:section name="Design" id="{fc44c119-ce92-d7c3-f082-531e9d85fde1}">
+        <p14:section name="Design" id="{aeaa8909-f91c-c833-ece7-019fab163991}">
           <p14:sldIdLst>
             <p14:sldId id="257"/>
             <p14:sldId id="258"/>
           </p14:sldIdLst>
         </p14:section>
-        <p14:section name="Findings" id="{131e7957-5d27-3996-71a0-83a81f3691d7}">
+        <p14:section name="Findings" id="{c4f17531-031a-7acf-ca7b-93e435df1572}">
           <p14:sldIdLst>
             <p14:sldId id="259"/>
             <p14:sldId id="260"/>
@@ -142,7 +142,7 @@
             <p14:sldId id="266"/>
           </p14:sldIdLst>
         </p14:section>
-        <p14:section name="Conclusion" id="{aad3ccac-18b6-7666-85fa-435c01aa2cbc}">
+        <p14:section name="Conclusion" id="{8f9b6703-81cc-7cc6-f3aa-e274f2ecd890}">
           <p14:sldIdLst>
             <p14:sldId id="267"/>
             <p14:sldId id="268"/>
@@ -816,7 +816,7 @@
           <a:p>
             <a:r>
               <a:rPr lang="en-US" dirty="0"/>
-              <a:t>The negative result is well controlled and is itself the point: responsiveness is not encoded in local sequence architecture.</a:t>
+              <a:t>The mutation-response profile is a null and a well-controlled one: given the same chromatin, the two classes lose the same amount to the same kind of edit. What is not null is the scale at which that is true and the one missing partner.</a:t>
             </a:r>
             <a:endParaRPr lang="en-US" dirty="0"/>
           </a:p>
@@ -3295,7 +3295,7 @@
           <a:p>
             <a:pPr algn="l" indent="0" marL="0">
               <a:spcAft>
-                <a:spcPts val="1600"/>
+                <a:spcPts val="1500"/>
               </a:spcAft>
               <a:buNone/>
             </a:pPr>
@@ -3305,7 +3305,7 @@
                   <a:schemeClr val="tx1"/>
                 </a:solidFill>
               </a:rPr>
-              <a:t>Weaker AP-1 motif, fewer AP-1 motifs around it, sparser and less MEF2-rich neighbourhood, dependence spread thinly across the element. Nothing about how it responds to mutation differs.</a:t>
+              <a:t>Weaker AP-1 motif, fewer AP-1 motifs around it, and its dependence spread thinly across the element instead of anchored on the motif. The same partners matter, in the same order, in every class.</a:t>
             </a:r>
             <a:endParaRPr lang="en-US" sz="1700" dirty="0"/>
           </a:p>
@@ -3319,14 +3319,14 @@
                   <a:schemeClr val="tx1"/>
                 </a:solidFill>
               </a:rPr>
-              <a:t>That is why it fluctuates</a:t>
+              <a:t>Two things survive matching, and only two</a:t>
             </a:r>
             <a:endParaRPr lang="en-US" sz="1700" dirty="0"/>
           </a:p>
           <a:p>
             <a:pPr algn="l" indent="0" marL="0">
               <a:spcAft>
-                <a:spcPts val="1600"/>
+                <a:spcPts val="1500"/>
               </a:spcAft>
               <a:buNone/>
             </a:pPr>
@@ -3336,7 +3336,7 @@
                   <a:schemeClr val="tx1"/>
                 </a:solidFill>
               </a:rPr>
-              <a:t>A weak motif in a poorly-supported enhancer sits near the occupancy threshold, so its binding tracks how much AP-1 protein is available — which is what ageing changes.</a:t>
+              <a:t>Scale: the 11 bp motif and the whole peak are worth the same to both classes, but replacing the 170 bp element costs a Dynamic site 0.24 less — what you expect when the dependence is spread wider. Partner: age-gained sites lack a MEF2 abutting the motif, 5.6% against 13.7% of matched controls.</a:t>
             </a:r>
             <a:endParaRPr lang="en-US" sz="1700" dirty="0"/>
           </a:p>
@@ -3350,6 +3350,37 @@
                   <a:schemeClr val="tx1"/>
                 </a:solidFill>
               </a:rPr>
+              <a:t>That is why it fluctuates</a:t>
+            </a:r>
+            <a:endParaRPr lang="en-US" sz="1700" dirty="0"/>
+          </a:p>
+          <a:p>
+            <a:pPr algn="l" indent="0" marL="0">
+              <a:spcAft>
+                <a:spcPts val="1500"/>
+              </a:spcAft>
+              <a:buNone/>
+            </a:pPr>
+            <a:r>
+              <a:rPr lang="en-US" sz="1700" dirty="0">
+                <a:solidFill>
+                  <a:schemeClr val="tx1"/>
+                </a:solidFill>
+              </a:rPr>
+              <a:t>A weak motif with no close MEF2 to hold it sits near the occupancy threshold, so its binding tracks how much AP-1 protein is available — which is what ageing changes.</a:t>
+            </a:r>
+            <a:endParaRPr lang="en-US" sz="1700" dirty="0"/>
+          </a:p>
+          <a:p>
+            <a:pPr algn="l" indent="0" marL="0">
+              <a:buNone/>
+            </a:pPr>
+            <a:r>
+              <a:rPr lang="en-US" sz="1900" b="1" dirty="0">
+                <a:solidFill>
+                  <a:schemeClr val="tx1"/>
+                </a:solidFill>
+              </a:rPr>
               <a:t>Gain and loss are different events</a:t>
             </a:r>
             <a:endParaRPr lang="en-US" sz="1700" dirty="0"/>
@@ -3364,7 +3395,7 @@
                   <a:schemeClr val="tx1"/>
                 </a:solidFill>
               </a:rPr>
-              <a:t>Age-gained sites have better cores and read dosage more sharply. Age-lost sites are MEF2-rich, high-scoring sites drifting down, with no sequence signature of their own.</a:t>
+              <a:t>Age-gained sites have better cores and read AP-1 dosage more sharply. Age-lost sites show no sequence signature of their own.</a:t>
             </a:r>
             <a:endParaRPr lang="en-US" sz="1700" dirty="0"/>
           </a:p>
@@ -3747,7 +3778,7 @@
                   <a:srgbClr val="111111"/>
                 </a:solidFill>
               </a:rPr>
-              <a:t>The TOBIAS footprint is absent in young and called in aged. 396 Age Up sites, 179 Age Down. Stable = called in all three conditions.</a:t>
+              <a:t>The TOBIAS footprint crosses the calling threshold between conditions. Age Up 396, Age Down 179, Exercise Up 186, Exercise Down 276. Stable = called in all three conditions, 2,907 sites.</a:t>
             </a:r>
             <a:endParaRPr lang="en-US" sz="1700" dirty="0"/>
           </a:p>
@@ -3855,7 +3886,7 @@
                   <a:srgbClr val="C2551C"/>
                 </a:solidFill>
               </a:rPr>
-              <a:t>0.57</a:t>
+              <a:t>ρ 0.57</a:t>
             </a:r>
             <a:endParaRPr lang="en-US" sz="3000" dirty="0"/>
           </a:p>
@@ -3891,7 +3922,7 @@
                   <a:srgbClr val="595959"/>
                 </a:solidFill>
               </a:rPr>
-              <a:t>Δscore vs measured snATAC change (age)</a:t>
+              <a:t>Δscore vs the measured snATAC change with age</a:t>
             </a:r>
             <a:endParaRPr lang="en-US" sz="1200" dirty="0"/>
           </a:p>
@@ -3954,7 +3985,7 @@
                   <a:srgbClr val="1F6FB2"/>
                 </a:solidFill>
               </a:rPr>
-              <a:t>0.31</a:t>
+              <a:t>ρ 0.31</a:t>
             </a:r>
             <a:endParaRPr lang="en-US" sz="3000" dirty="0"/>
           </a:p>
@@ -3990,7 +4021,7 @@
                   <a:srgbClr val="595959"/>
                 </a:solidFill>
               </a:rPr>
-              <a:t>threshold class vs measured change</a:t>
+              <a:t>threshold class vs the same measured change</a:t>
             </a:r>
             <a:endParaRPr lang="en-US" sz="1200" dirty="0"/>
           </a:p>
@@ -4043,7 +4074,7 @@
         <p:spPr>
           <a:xfrm>
             <a:off x="6492240" y="2971800"/>
-            <a:ext cx="5166360" cy="822960"/>
+            <a:ext cx="5166360" cy="1920240"/>
           </a:xfrm>
           <a:prstGeom prst="rect">
             <a:avLst/>
@@ -4059,14 +4090,28 @@
               <a:buNone/>
             </a:pPr>
             <a:r>
-              <a:rPr lang="en-US" sz="1500" i="1" dirty="0">
+              <a:rPr lang="en-US" sz="1700" b="1" dirty="0">
+                <a:solidFill>
+                  <a:srgbClr val="000000"/>
+                </a:solidFill>
+              </a:rPr>
+              <a:t>Which to believe?</a:t>
+            </a:r>
+            <a:endParaRPr lang="en-US" sz="1700" dirty="0"/>
+          </a:p>
+          <a:p>
+            <a:pPr indent="0" marL="0">
+              <a:buNone/>
+            </a:pPr>
+            <a:r>
+              <a:rPr lang="en-US" sz="1500" dirty="0">
                 <a:solidFill>
                   <a:srgbClr val="595959"/>
                 </a:solidFill>
               </a:rPr>
-              <a:t>The Δscore definition tracks the measured data about twice as well.</a:t>
-            </a:r>
-            <a:endParaRPr lang="en-US" sz="1500" dirty="0"/>
+              <a:t>Δscore tracks the measured snATAC change about twice as well, so it is the better description of what actually changed. The threshold call is what the field reports, so both are carried through and every result below is labelled with the one it comes from.</a:t>
+            </a:r>
+            <a:endParaRPr lang="en-US" sz="1700" dirty="0"/>
           </a:p>
         </p:txBody>
       </p:sp>
@@ -4487,7 +4532,7 @@
                   <a:srgbClr val="C2551C"/>
                 </a:solidFill>
               </a:rPr>
-              <a:t>170 bp</a:t>
+              <a:t>772 / 2,907</a:t>
             </a:r>
             <a:endParaRPr lang="en-US" sz="3000" dirty="0"/>
           </a:p>
@@ -4523,7 +4568,7 @@
                   <a:srgbClr val="595959"/>
                 </a:solidFill>
               </a:rPr>
-              <a:t>the window every effect is read over</a:t>
+              <a:t>Dynamic against Stable sites</a:t>
             </a:r>
             <a:endParaRPr lang="en-US" sz="1200" dirty="0"/>
           </a:p>
@@ -4572,7 +4617,7 @@
                   <a:srgbClr val="111111"/>
                 </a:solidFill>
               </a:rPr>
-              <a:t>each experiment that follows is introduced where its result appears</a:t>
+              <a:t>every edit is read as the change in predicted accessibility over the surrounding 170 bp</a:t>
             </a:r>
             <a:endParaRPr lang="en-US" sz="1500" dirty="0"/>
           </a:p>
@@ -5271,7 +5316,7 @@
                   <a:schemeClr val="tx1"/>
                 </a:solidFill>
               </a:rPr>
-              <a:t>Two promoters, one stable and one age-gained</a:t>
+              <a:t>The same contrast at one pair of promoters</a:t>
             </a:r>
             <a:endParaRPr lang="en-US" sz="2800" dirty="0"/>
           </a:p>
@@ -5344,7 +5389,7 @@
                   <a:srgbClr val="111111"/>
                 </a:solidFill>
               </a:rPr>
-              <a:t>the same motif in the same kind of promoter is worth −1.00 where binding is stable and −0.58 where it is age-gained</a:t>
+              <a:t>the stable site has MEF2 abutting its AP-1 motif at 19 bp; the age-gained site has no MEF2 anywhere in the element</a:t>
             </a:r>
             <a:endParaRPr lang="en-US" sz="1500" dirty="0"/>
           </a:p>

--- a/Analysis/AP1_AlphaGenome_results.pptx
+++ b/Analysis/AP1_AlphaGenome_results.pptx
@@ -119,18 +119,18 @@
   <p:extLst>
     <p:ext uri="{521415D9-36F7-43E2-AB2F-B90AF26B5E84}">
       <p14:sectionLst xmlns:p14="http://schemas.microsoft.com/office/powerpoint/2010/main">
-        <p14:section name="Opening" id="{601404cc-c828-e16c-01d6-3e59341f2104}">
+        <p14:section name="Opening" id="{7a4b8df9-e9dd-8971-0125-85c9b77acac5}">
           <p14:sldIdLst>
             <p14:sldId id="256"/>
           </p14:sldIdLst>
         </p14:section>
-        <p14:section name="Design" id="{aeaa8909-f91c-c833-ece7-019fab163991}">
+        <p14:section name="Design" id="{b91d1c51-930b-1b54-1c5a-baa0fbee1b16}">
           <p14:sldIdLst>
             <p14:sldId id="257"/>
             <p14:sldId id="258"/>
           </p14:sldIdLst>
         </p14:section>
-        <p14:section name="Findings" id="{c4f17531-031a-7acf-ca7b-93e435df1572}">
+        <p14:section name="Findings" id="{84946235-d32e-ee27-874a-da95fc886d38}">
           <p14:sldIdLst>
             <p14:sldId id="259"/>
             <p14:sldId id="260"/>
@@ -142,7 +142,7 @@
             <p14:sldId id="266"/>
           </p14:sldIdLst>
         </p14:section>
-        <p14:section name="Conclusion" id="{8f9b6703-81cc-7cc6-f3aa-e274f2ecd890}">
+        <p14:section name="Conclusion" id="{e59ede7a-5732-7841-7709-8e479c821e60}">
           <p14:sldIdLst>
             <p14:sldId id="267"/>
             <p14:sldId id="268"/>
@@ -1256,7 +1256,7 @@
           <a:p>
             <a:r>
               <a:rPr lang="en-US" dirty="0"/>
-              <a:t>2.49 million footprinted cardiomyocyte TFBS mapped onto the scan. Dynamic is split into its four directional classes because a gain and a loss could cancel in the pooled comparison. The one comparison that survives correction does so only before matching: Age Up sites lean more on KLF/SP neighbours, FDR 0.04 raw and 0.26 matched, so it is context rather than class.</a:t>
+              <a:t>2.49 million footprinted cardiomyocyte TFBS mapped onto the scan. Dynamic is split into its four directional classes because a gain and a loss could cancel in the pooled comparison. Tests run over all 88 matched class-by-family comparisons, not just the six families drawn. CTCF was reported as a lead earlier and is now retracted twice over: the original tile-level significance was pseudo-replication, and with the full scan and measured-accessibility matching the point estimate itself is zero (Dynamic -0.551 vs matched Stable -0.548, p = 0.98). The nearest thing to a real signal is MEF2 in Age Up, -0.53 against -0.84 in matched controls, p = 0.03 uncorrected, and in Exercise Down, p = 0.06 - the same two classes that are short of a close MEF2 on the previous slide. Neither survives correction on its own; they are worth quoting only because the proximity test points the same way.</a:t>
             </a:r>
             <a:endParaRPr lang="en-US" dirty="0"/>
           </a:p>
@@ -4976,8 +4976,8 @@
         </p:blipFill>
         <p:spPr>
           <a:xfrm>
-            <a:off x="502920" y="2300013"/>
-            <a:ext cx="11155680" cy="3126653"/>
+            <a:off x="502920" y="2177702"/>
+            <a:ext cx="11155680" cy="3371276"/>
           </a:xfrm>
           <a:prstGeom prst="rect">
             <a:avLst/>

--- a/Analysis/AP1_AlphaGenome_results.pptx
+++ b/Analysis/AP1_AlphaGenome_results.pptx
@@ -119,18 +119,18 @@
   <p:extLst>
     <p:ext uri="{521415D9-36F7-43E2-AB2F-B90AF26B5E84}">
       <p14:sectionLst xmlns:p14="http://schemas.microsoft.com/office/powerpoint/2010/main">
-        <p14:section name="Opening" id="{7a4b8df9-e9dd-8971-0125-85c9b77acac5}">
+        <p14:section name="Opening" id="{9054d2d5-d101-1685-8504-eccc43d877ca}">
           <p14:sldIdLst>
             <p14:sldId id="256"/>
           </p14:sldIdLst>
         </p14:section>
-        <p14:section name="Design" id="{b91d1c51-930b-1b54-1c5a-baa0fbee1b16}">
+        <p14:section name="Design" id="{1cb7cac6-6dfd-b7c3-d5c6-b6ef7824197f}">
           <p14:sldIdLst>
             <p14:sldId id="257"/>
             <p14:sldId id="258"/>
           </p14:sldIdLst>
         </p14:section>
-        <p14:section name="Findings" id="{84946235-d32e-ee27-874a-da95fc886d38}">
+        <p14:section name="Findings" id="{b8af33d2-655d-05bf-25b7-60b92d62a64c}">
           <p14:sldIdLst>
             <p14:sldId id="259"/>
             <p14:sldId id="260"/>
@@ -142,7 +142,7 @@
             <p14:sldId id="266"/>
           </p14:sldIdLst>
         </p14:section>
-        <p14:section name="Conclusion" id="{e59ede7a-5732-7841-7709-8e479c821e60}">
+        <p14:section name="Conclusion" id="{65807768-0ad7-7ad6-0afd-6a7d81795a0d}">
           <p14:sldIdLst>
             <p14:sldId id="267"/>
             <p14:sldId id="268"/>
@@ -1168,7 +1168,7 @@
           <a:p>
             <a:r>
               <a:rPr lang="en-US" dirty="0"/>
-              <a:t>Raw, Dynamic sites lose less to every wide edit. Matching now holds measured snATAC accessibility constant as well as the predicted value, peak width and TSS distance; that removes most of the gap but not all of it. What survives is confined to the 170 bp scale: the motif and the whole peak are worth the same to both classes.</a:t>
+              <a:t>Top row is the uncontrolled comparison: if the accessibility difference is itself biology, it lives there. Bottom row matches each class to its own Stable controls on predicted and measured accessibility, peak width and TSS distance. The 300 bp control is the thing to check: Age Up differs slightly even there (-0.152 vs -0.111 matched), but that offset is 0.04 against a 0.26 effect at 170 bp and runs the opposite way, so it does not explain the result.</a:t>
             </a:r>
             <a:endParaRPr lang="en-US" dirty="0"/>
           </a:p>
@@ -4733,7 +4733,7 @@
       </p:sp>
       <p:pic>
         <p:nvPicPr>
-          <p:cNvPr id="3" name="Image 0" descr="/Users/z5162865/WongLab/AlphaGenome_Ap1/Analysis/slide_figures/d_block.png">    </p:cNvPr>
+          <p:cNvPr id="3" name="Image 0" descr="/Users/z5162865/WongLab/AlphaGenome_Ap1/Analysis/slide_figures/s2_matched_null.png">    </p:cNvPr>
           <p:cNvPicPr>
             <a:picLocks noChangeAspect="1"/>
           </p:cNvPicPr>
@@ -4747,41 +4747,17 @@
         </p:blipFill>
         <p:spPr>
           <a:xfrm>
-            <a:off x="565042" y="960120"/>
-            <a:ext cx="7099516" cy="1005840"/>
+            <a:off x="882482" y="1051560"/>
+            <a:ext cx="10396556" cy="4617720"/>
           </a:xfrm>
           <a:prstGeom prst="rect">
             <a:avLst/>
           </a:prstGeom>
         </p:spPr>
       </p:pic>
-      <p:pic>
-        <p:nvPicPr>
-          <p:cNvPr id="4" name="Image 1" descr="/Users/z5162865/WongLab/AlphaGenome_Ap1/Analysis/slide_figures/s2_matched_null.png">    </p:cNvPr>
-          <p:cNvPicPr>
-            <a:picLocks noChangeAspect="1"/>
-          </p:cNvPicPr>
-          <p:nvPr/>
-        </p:nvPicPr>
-        <p:blipFill>
-          <a:blip r:embed="rId2"/>
-          <a:stretch>
-            <a:fillRect/>
-          </a:stretch>
-        </p:blipFill>
-        <p:spPr>
-          <a:xfrm>
-            <a:off x="1832087" y="2029968"/>
-            <a:ext cx="8497347" cy="3657600"/>
-          </a:xfrm>
-          <a:prstGeom prst="rect">
-            <a:avLst/>
-          </a:prstGeom>
-        </p:spPr>
-      </p:pic>
-      <p:sp>
-        <p:nvSpPr>
-          <p:cNvPr id="5" name="Text 0"/>
+      <p:sp>
+        <p:nvSpPr>
+          <p:cNvPr id="4" name="Text 0"/>
           <p:cNvSpPr/>
           <p:nvPr>
             <p:ph idx="101" type="body" hasCustomPrompt="1"/>
@@ -4822,7 +4798,7 @@
                   <a:srgbClr val="111111"/>
                 </a:solidFill>
               </a:rPr>
-              <a:t>the motif and the whole peak behave the same once context is matched; a residual 170 bp difference survives, and the next slide shows what it is</a:t>
+              <a:t>every class behaves the same way: the motif and the whole peak close up under matching, the 170 bp element does not — except Age Down, which closes up everywhere</a:t>
             </a:r>
             <a:endParaRPr lang="en-US" sz="1500" dirty="0"/>
           </a:p>
@@ -4976,8 +4952,8 @@
         </p:blipFill>
         <p:spPr>
           <a:xfrm>
-            <a:off x="502920" y="2177702"/>
-            <a:ext cx="11155680" cy="3371276"/>
+            <a:off x="502920" y="2146543"/>
+            <a:ext cx="11155680" cy="3433595"/>
           </a:xfrm>
           <a:prstGeom prst="rect">
             <a:avLst/>
@@ -5135,7 +5111,7 @@
                   <a:schemeClr val="tx1"/>
                 </a:solidFill>
               </a:rPr>
-              <a:t>Age-gained sites are missing their closest MEF2</a:t>
+              <a:t>Age-gained sites have less MEF2 beside them</a:t>
             </a:r>
             <a:endParaRPr lang="en-US" sz="2800" dirty="0"/>
           </a:p>
@@ -5157,8 +5133,8 @@
         </p:blipFill>
         <p:spPr>
           <a:xfrm>
-            <a:off x="502920" y="1703295"/>
-            <a:ext cx="11155680" cy="3359970"/>
+            <a:off x="502920" y="1951035"/>
+            <a:ext cx="11155680" cy="2864491"/>
           </a:xfrm>
           <a:prstGeom prst="rect">
             <a:avLst/>
@@ -5208,7 +5184,7 @@
                   <a:srgbClr val="111111"/>
                 </a:solidFill>
               </a:rPr>
-              <a:t>MEF2 sits 2.67× more often right beside the motif than chance, and it is the age-gained sites that lack one (FDR 0.03)</a:t>
+              <a:t>MEF2 sits 2.67× more often right beside the motif than chance — and age-gained sites carry one far less often, 5.6% against 13.7% of matched controls</a:t>
             </a:r>
             <a:endParaRPr lang="en-US" sz="1500" dirty="0"/>
           </a:p>
@@ -5505,7 +5481,7 @@
       </p:sp>
       <p:pic>
         <p:nvPicPr>
-          <p:cNvPr id="3" name="Image 0" descr="/Users/z5162865/WongLab/AlphaGenome_Ap1/Analysis/slide_figures/d_base.png">    </p:cNvPr>
+          <p:cNvPr id="3" name="Image 0" descr="/Users/z5162865/WongLab/AlphaGenome_Ap1/Analysis/slide_figures/s3_dependence.png">    </p:cNvPr>
           <p:cNvPicPr>
             <a:picLocks noChangeAspect="1"/>
           </p:cNvPicPr>
@@ -5519,41 +5495,17 @@
         </p:blipFill>
         <p:spPr>
           <a:xfrm>
-            <a:off x="502920" y="998536"/>
-            <a:ext cx="7223760" cy="929007"/>
+            <a:off x="896167" y="1051560"/>
+            <a:ext cx="10369185" cy="4617720"/>
           </a:xfrm>
           <a:prstGeom prst="rect">
             <a:avLst/>
           </a:prstGeom>
         </p:spPr>
       </p:pic>
-      <p:pic>
-        <p:nvPicPr>
-          <p:cNvPr id="4" name="Image 1" descr="/Users/z5162865/WongLab/AlphaGenome_Ap1/Analysis/slide_figures/s3_dependence.png">    </p:cNvPr>
-          <p:cNvPicPr>
-            <a:picLocks noChangeAspect="1"/>
-          </p:cNvPicPr>
-          <p:nvPr/>
-        </p:nvPicPr>
-        <p:blipFill>
-          <a:blip r:embed="rId2"/>
-          <a:stretch>
-            <a:fillRect/>
-          </a:stretch>
-        </p:blipFill>
-        <p:spPr>
-          <a:xfrm>
-            <a:off x="773919" y="2029968"/>
-            <a:ext cx="10613681" cy="3657600"/>
-          </a:xfrm>
-          <a:prstGeom prst="rect">
-            <a:avLst/>
-          </a:prstGeom>
-        </p:spPr>
-      </p:pic>
-      <p:sp>
-        <p:nvSpPr>
-          <p:cNvPr id="5" name="Text 0"/>
+      <p:sp>
+        <p:nvSpPr>
+          <p:cNvPr id="4" name="Text 0"/>
           <p:cNvSpPr/>
           <p:nvPr>
             <p:ph idx="101" type="body" hasCustomPrompt="1"/>
@@ -5594,7 +5546,7 @@
                   <a:srgbClr val="111111"/>
                 </a:solidFill>
               </a:rPr>
-              <a:t>this is the part that survives matching: a responsive site has no single anchor holding it open</a:t>
+              <a:t>the same shift in every class and on all three measures — strongest in Age Up and Exercise Down, absent only in Age Down</a:t>
             </a:r>
             <a:endParaRPr lang="en-US" sz="1500" dirty="0"/>
           </a:p>

--- a/Analysis/AP1_AlphaGenome_results.pptx
+++ b/Analysis/AP1_AlphaGenome_results.pptx
@@ -119,18 +119,18 @@
   <p:extLst>
     <p:ext uri="{521415D9-36F7-43E2-AB2F-B90AF26B5E84}">
       <p14:sectionLst xmlns:p14="http://schemas.microsoft.com/office/powerpoint/2010/main">
-        <p14:section name="Opening" id="{9054d2d5-d101-1685-8504-eccc43d877ca}">
+        <p14:section name="Opening" id="{2bda546c-cb59-4011-5de4-a77b9aaf8a87}">
           <p14:sldIdLst>
             <p14:sldId id="256"/>
           </p14:sldIdLst>
         </p14:section>
-        <p14:section name="Design" id="{1cb7cac6-6dfd-b7c3-d5c6-b6ef7824197f}">
+        <p14:section name="Design" id="{fe987b89-4c3d-90fa-a170-74b99a9e9aba}">
           <p14:sldIdLst>
             <p14:sldId id="257"/>
             <p14:sldId id="258"/>
           </p14:sldIdLst>
         </p14:section>
-        <p14:section name="Findings" id="{b8af33d2-655d-05bf-25b7-60b92d62a64c}">
+        <p14:section name="Findings" id="{0b16b728-5e9f-5f2d-1dcb-0ee85ff4c50f}">
           <p14:sldIdLst>
             <p14:sldId id="259"/>
             <p14:sldId id="260"/>
@@ -142,7 +142,7 @@
             <p14:sldId id="266"/>
           </p14:sldIdLst>
         </p14:section>
-        <p14:section name="Conclusion" id="{65807768-0ad7-7ad6-0afd-6a7d81795a0d}">
+        <p14:section name="Conclusion" id="{d67d867a-1178-dc02-8c44-4a3b086ecb0e}">
           <p14:sldIdLst>
             <p14:sldId id="267"/>
             <p14:sldId id="268"/>
@@ -4747,8 +4747,8 @@
         </p:blipFill>
         <p:spPr>
           <a:xfrm>
-            <a:off x="882482" y="1051560"/>
-            <a:ext cx="10396556" cy="4617720"/>
+            <a:off x="657675" y="1051560"/>
+            <a:ext cx="10846171" cy="4617720"/>
           </a:xfrm>
           <a:prstGeom prst="rect">
             <a:avLst/>
@@ -5495,8 +5495,8 @@
         </p:blipFill>
         <p:spPr>
           <a:xfrm>
-            <a:off x="896167" y="1051560"/>
-            <a:ext cx="10369185" cy="4617720"/>
+            <a:off x="735892" y="1051560"/>
+            <a:ext cx="10689736" cy="4617720"/>
           </a:xfrm>
           <a:prstGeom prst="rect">
             <a:avLst/>

--- a/Analysis/AP1_AlphaGenome_results.pptx
+++ b/Analysis/AP1_AlphaGenome_results.pptx
@@ -18,9 +18,10 @@
     <p:sldId id="266" r:id="rId12"/>
     <p:sldId id="267" r:id="rId13"/>
     <p:sldId id="268" r:id="rId14"/>
+    <p:sldId id="269" r:id="rId15"/>
   </p:sldIdLst>
   <p:notesMasterIdLst>
-    <p:notesMasterId r:id="rId15"/>
+    <p:notesMasterId r:id="rId16"/>
   </p:notesMasterIdLst>
   <p:sldSz cx="12192000" cy="6858000"/>
   <p:notesSz cx="6858000" cy="12192000"/>
@@ -119,18 +120,18 @@
   <p:extLst>
     <p:ext uri="{521415D9-36F7-43E2-AB2F-B90AF26B5E84}">
       <p14:sectionLst xmlns:p14="http://schemas.microsoft.com/office/powerpoint/2010/main">
-        <p14:section name="Opening" id="{2bda546c-cb59-4011-5de4-a77b9aaf8a87}">
+        <p14:section name="Opening" id="{94dd5554-4130-fc08-c4a5-5ee2c95ed81a}">
           <p14:sldIdLst>
             <p14:sldId id="256"/>
           </p14:sldIdLst>
         </p14:section>
-        <p14:section name="Design" id="{fe987b89-4c3d-90fa-a170-74b99a9e9aba}">
+        <p14:section name="Design" id="{cdc6e86f-f7ca-69bb-f872-186f85f7f638}">
           <p14:sldIdLst>
             <p14:sldId id="257"/>
             <p14:sldId id="258"/>
           </p14:sldIdLst>
         </p14:section>
-        <p14:section name="Findings" id="{0b16b728-5e9f-5f2d-1dcb-0ee85ff4c50f}">
+        <p14:section name="Findings" id="{6cf14f4c-6d9a-0e5c-db6e-46d0bc1bec20}">
           <p14:sldIdLst>
             <p14:sldId id="259"/>
             <p14:sldId id="260"/>
@@ -140,12 +141,13 @@
             <p14:sldId id="264"/>
             <p14:sldId id="265"/>
             <p14:sldId id="266"/>
+            <p14:sldId id="267"/>
           </p14:sldIdLst>
         </p14:section>
-        <p14:section name="Conclusion" id="{d67d867a-1178-dc02-8c44-4a3b086ecb0e}">
+        <p14:section name="Conclusion" id="{54e7a206-5c2b-ef3d-ae80-8713e839de66}">
           <p14:sldIdLst>
-            <p14:sldId id="267"/>
             <p14:sldId id="268"/>
+            <p14:sldId id="269"/>
           </p14:sldIdLst>
         </p14:section>
       </p14:sectionLst>
@@ -640,7 +642,7 @@
           <a:p>
             <a:r>
               <a:rPr lang="en-US" dirty="0"/>
-              <a:t>The titration experiment was designed before this hypothesis existed, so this is a prediction rather than a fit. Caveat: the motif-sensitivity result does not survive matching on measured accessibility; the core-quality result does.</a:t>
+              <a:t>The dose-response slope tracks core quality measured independently from the genome sequence, rho 0.30. Orientation is irrelevant, as expected for a near-palindrome.</a:t>
             </a:r>
             <a:endParaRPr lang="en-US" dirty="0"/>
           </a:p>
@@ -728,7 +730,7 @@
           <a:p>
             <a:r>
               <a:rPr lang="en-US" dirty="0"/>
-              <a:t>The comparable quantity is a ratio within each element, so assay scale cancels. The class direction disagrees: in the MPRA responsive elements depend MORE on their sequence, which separates intrinsic potential from what sets accessibility in the genome.</a:t>
+              <a:t>The titration experiment was designed before this hypothesis existed, so this is a prediction rather than a fit. Caveat: the motif-sensitivity result does not survive matching on measured accessibility; the core-quality result does.</a:t>
             </a:r>
             <a:endParaRPr lang="en-US" dirty="0"/>
           </a:p>
@@ -816,7 +818,7 @@
           <a:p>
             <a:r>
               <a:rPr lang="en-US" dirty="0"/>
-              <a:t>The mutation-response profile is a null and a well-controlled one: given the same chromatin, the two classes lose the same amount to the same kind of edit. What is not null is the scale at which that is true and the one missing partner.</a:t>
+              <a:t>The comparable quantity is a ratio within each element, so assay scale cancels. The class direction disagrees: in the MPRA responsive elements depend MORE on their sequence, which separates intrinsic potential from what sets accessibility in the genome.</a:t>
             </a:r>
             <a:endParaRPr lang="en-US" dirty="0"/>
           </a:p>
@@ -904,7 +906,7 @@
           <a:p>
             <a:r>
               <a:rPr lang="en-US" dirty="0"/>
-              <a:t>Also open: whether the MEF2 deficit at Dynamic sites is detection or genuine differential occupancy of equally-present motifs.</a:t>
+              <a:t>The mutation-response profile is a null and a well-controlled one: given the same chromatin, the two classes lose the same amount to the same kind of edit. What is not null is the scale at which that is true and the one missing partner.</a:t>
             </a:r>
             <a:endParaRPr lang="en-US" dirty="0"/>
           </a:p>
@@ -928,6 +930,94 @@
             <a:fld id="{F7021451-1387-4CA6-816F-3879F97B5CBC}" type="slidenum">
               <a:rPr lang="en-US"/>
               <a:t>13</a:t>
+            </a:fld>
+            <a:endParaRPr lang="en-US"/>
+          </a:p>
+        </p:txBody>
+      </p:sp>
+    </p:spTree>
+    <p:extLst>
+      <p:ext uri="{BB962C8B-B14F-4D97-AF65-F5344CB8AC3E}">
+        <p14:creationId xmlns:p14="http://schemas.microsoft.com/office/powerpoint/2010/main" val="1024086991"/>
+      </p:ext>
+    </p:extLst>
+  </p:cSld>
+  <p:clrMapOvr>
+    <a:masterClrMapping/>
+  </p:clrMapOvr>
+</p:notes>
+</file>
+
+<file path=ppt/notesSlides/notesSlide14.xml><?xml version="1.0" encoding="utf-8"?>
+<p:notes xmlns:a="http://schemas.openxmlformats.org/drawingml/2006/main" xmlns:r="http://schemas.openxmlformats.org/officeDocument/2006/relationships" xmlns:p="http://schemas.openxmlformats.org/presentationml/2006/main">
+  <p:cSld>
+    <p:spTree>
+      <p:nvGrpSpPr>
+        <p:cNvPr id="1" name=""/>
+        <p:cNvGrpSpPr/>
+        <p:nvPr/>
+      </p:nvGrpSpPr>
+      <p:grpSpPr>
+        <a:xfrm>
+          <a:off x="0" y="0"/>
+          <a:ext cx="0" cy="0"/>
+          <a:chOff x="0" y="0"/>
+          <a:chExt cx="0" cy="0"/>
+        </a:xfrm>
+      </p:grpSpPr>
+      <p:sp>
+        <p:nvSpPr>
+          <p:cNvPr id="2" name="Slide Image Placeholder 1"/>
+          <p:cNvSpPr>
+            <a:spLocks noGrp="1" noRot="1" noChangeAspect="1"/>
+          </p:cNvSpPr>
+          <p:nvPr>
+            <p:ph type="sldImg"/>
+          </p:nvPr>
+        </p:nvSpPr>
+        <p:spPr/>
+      </p:sp>
+      <p:sp>
+        <p:nvSpPr>
+          <p:cNvPr id="3" name="Notes Placeholder 2"/>
+          <p:cNvSpPr>
+            <a:spLocks noGrp="1"/>
+          </p:cNvSpPr>
+          <p:nvPr>
+            <p:ph type="body" idx="1"/>
+          </p:nvPr>
+        </p:nvSpPr>
+        <p:spPr/>
+        <p:txBody>
+          <a:bodyPr/>
+          <a:lstStyle/>
+          <a:p>
+            <a:r>
+              <a:rPr lang="en-US" dirty="0"/>
+              <a:t>Also open: whether the MEF2 deficit at Dynamic sites is detection or genuine differential occupancy of equally-present motifs.</a:t>
+            </a:r>
+            <a:endParaRPr lang="en-US" dirty="0"/>
+          </a:p>
+        </p:txBody>
+      </p:sp>
+      <p:sp>
+        <p:nvSpPr>
+          <p:cNvPr id="4" name="Slide Number Placeholder 3"/>
+          <p:cNvSpPr>
+            <a:spLocks noGrp="1"/>
+          </p:cNvSpPr>
+          <p:nvPr>
+            <p:ph type="sldNum" sz="quarter" idx="10"/>
+          </p:nvPr>
+        </p:nvSpPr>
+        <p:spPr/>
+        <p:txBody>
+          <a:bodyPr/>
+          <a:lstStyle/>
+          <a:p>
+            <a:fld id="{F7021451-1387-4CA6-816F-3879F97B5CBC}" type="slidenum">
+              <a:rPr lang="en-US"/>
+              <a:t>14</a:t>
             </a:fld>
             <a:endParaRPr lang="en-US"/>
           </a:p>
@@ -1432,7 +1522,7 @@
           <a:p>
             <a:r>
               <a:rPr lang="en-US" dirty="0"/>
-              <a:t>Both are promoters a few hundred bp from a TSS, matched on predicted accessibility (0.96 vs 1.12) and peak width (1359 vs 1329 bp). At the Sqstm1 promoter AP-1 is bound in all three conditions, the motif window is worth -1.00 and 81% of the loss sits within 85 bp. At the Psmd11 promoter AP-1 is absent in young and gained in both aged states, the motif is still the strongest window but only -0.58, and the loss is smeared over 114 bp against 83. Psmd11 rises with age, matching the AP-1 gain; the exercise direction does not match, so do not claim it.</a:t>
+              <a:t>Matched tests are exact McNemar on the paired sites, raw tests are Fisher, BH across all 20. Surviving: Age Up on both definitions (FDR 0.021 leaned-on, 0.045 footprint-present) and Exercise Down on the leaned-on definition (FDR 0.026); Exercise Down footprint-present does not (FDR 0.12). Age Down and Exercise Up show nothing either way. An earlier quote of p = 0.003 and p = 0.0005 for these came from Fisher applied to the matched groups as if unpaired; McNemar is the right test and gives p = 0.0021 and p = 0.0013.</a:t>
             </a:r>
             <a:endParaRPr lang="en-US" dirty="0"/>
           </a:p>
@@ -1520,7 +1610,7 @@
           <a:p>
             <a:r>
               <a:rPr lang="en-US" dirty="0"/>
-              <a:t>10 of 16 scan features separate Dynamic from matched Stable. Share of dependence within 85 bp 0.63 vs 0.74, spread 94 vs 86 bp, largest single-base effect 0.74 vs 0.90. Age Up is the most diffuse class of all.</a:t>
+              <a:t>Both are promoters a few hundred bp from a TSS, matched on predicted accessibility (0.96 vs 1.12) and peak width (1359 vs 1329 bp). At the Sqstm1 promoter AP-1 is bound in all three conditions, the motif window is worth -1.00 and 81% of the loss sits within 85 bp. At the Psmd11 promoter AP-1 is absent in young and gained in both aged states, the motif is still the strongest window but only -0.58, and the loss is smeared over 114 bp against 83. Psmd11 rises with age, matching the AP-1 gain; the exercise direction does not match, so do not claim it.</a:t>
             </a:r>
             <a:endParaRPr lang="en-US" dirty="0"/>
           </a:p>
@@ -1608,7 +1698,7 @@
           <a:p>
             <a:r>
               <a:rPr lang="en-US" dirty="0"/>
-              <a:t>The dose-response slope tracks core quality measured independently from the genome sequence, rho 0.30. Orientation is irrelevant, as expected for a near-palindrome.</a:t>
+              <a:t>10 of 16 scan features separate Dynamic from matched Stable. Share of dependence within 85 bp 0.63 vs 0.74, spread 94 vs 86 bp, largest single-base effect 0.74 vs 0.90. Age Up is the most diffuse class of all.</a:t>
             </a:r>
             <a:endParaRPr lang="en-US" dirty="0"/>
           </a:p>
@@ -2660,7 +2750,7 @@
                   <a:schemeClr val="tx1"/>
                 </a:solidFill>
               </a:rPr>
-              <a:t>Age-gained sites read AP-1 dosage more sharply</a:t>
+              <a:t>Motif strength is a switch; position is a dial</a:t>
             </a:r>
             <a:endParaRPr lang="en-US" sz="2800" dirty="0"/>
           </a:p>
@@ -2668,7 +2758,7 @@
       </p:sp>
       <p:pic>
         <p:nvPicPr>
-          <p:cNvPr id="3" name="Image 0" descr="/Users/z5162865/WongLab/AlphaGenome_Ap1/Analysis/slide_figures/s5_age_gained.png">    </p:cNvPr>
+          <p:cNvPr id="3" name="Image 0" descr="/Users/z5162865/WongLab/AlphaGenome_Ap1/Analysis/slide_figures/d_titr.png">    </p:cNvPr>
           <p:cNvPicPr>
             <a:picLocks noChangeAspect="1"/>
           </p:cNvPicPr>
@@ -2682,66 +2772,41 @@
         </p:blipFill>
         <p:spPr>
           <a:xfrm>
-            <a:off x="805222" y="1097280"/>
-            <a:ext cx="10551077" cy="3794760"/>
+            <a:off x="565042" y="960120"/>
+            <a:ext cx="7099516" cy="1005840"/>
           </a:xfrm>
           <a:prstGeom prst="rect">
             <a:avLst/>
           </a:prstGeom>
         </p:spPr>
       </p:pic>
-      <p:sp>
-        <p:nvSpPr>
-          <p:cNvPr id="4" name="massaction"/>
-          <p:cNvSpPr txBox="1"/>
+      <p:pic>
+        <p:nvPicPr>
+          <p:cNvPr id="4" name="Image 1" descr="/Users/z5162865/WongLab/AlphaGenome_Ap1/Analysis/slide_figures/s4_titration.png">    </p:cNvPr>
+          <p:cNvPicPr>
+            <a:picLocks noChangeAspect="1"/>
+          </p:cNvPicPr>
           <p:nvPr/>
-        </p:nvSpPr>
-        <p:spPr>
-          <a:xfrm>
-            <a:off x="502920" y="5029200"/>
-            <a:ext cx="11155680" cy="914400"/>
-          </a:xfrm>
-          <a:prstGeom prst="rect">
-            <a:avLst/>
-          </a:prstGeom>
-          <a:solidFill>
-            <a:srgbClr val="F2F2F2"/>
-          </a:solidFill>
-          <a:ln/>
-        </p:spPr>
-        <p:txBody>
-          <a:bodyPr wrap="square" lIns="152400" tIns="152400" rIns="152400" bIns="152400" rtlCol="0" anchor="ctr"/>
-          <a:lstStyle/>
-          <a:p>
-            <a:pPr indent="0" marL="0">
-              <a:buNone/>
-            </a:pPr>
-            <a:r>
-              <a:rPr lang="en-US" sz="1700" b="1" dirty="0">
-                <a:solidFill>
-                  <a:srgbClr val="C2551C"/>
-                </a:solidFill>
-              </a:rPr>
-              <a:t>Mass action   </a:t>
-            </a:r>
-            <a:pPr indent="0" marL="0">
-              <a:buNone/>
-            </a:pPr>
-            <a:r>
-              <a:rPr lang="en-US" sz="1500" dirty="0">
-                <a:solidFill>
-                  <a:srgbClr val="000000"/>
-                </a:solidFill>
-              </a:rPr>
-              <a:t>if ageing raises AP-1 activity, occupancy rises first at the highest-affinity motifs — exactly the sites that gain. Losing binding is not the reverse: age-lost sites show no sequence signature at all.</a:t>
-            </a:r>
-            <a:endParaRPr lang="en-US" sz="1700" dirty="0"/>
-          </a:p>
-        </p:txBody>
-      </p:sp>
-      <p:sp>
-        <p:nvSpPr>
-          <p:cNvPr id="6" name="Text 0"/>
+        </p:nvPicPr>
+        <p:blipFill>
+          <a:blip r:embed="rId2"/>
+          <a:stretch>
+            <a:fillRect/>
+          </a:stretch>
+        </p:blipFill>
+        <p:spPr>
+          <a:xfrm>
+            <a:off x="1254995" y="1965960"/>
+            <a:ext cx="9651530" cy="3794760"/>
+          </a:xfrm>
+          <a:prstGeom prst="rect">
+            <a:avLst/>
+          </a:prstGeom>
+        </p:spPr>
+      </p:pic>
+      <p:sp>
+        <p:nvSpPr>
+          <p:cNvPr id="5" name="Text 0"/>
           <p:cNvSpPr/>
           <p:nvPr>
             <p:ph idx="101" type="body" hasCustomPrompt="1"/>
@@ -2765,6 +2830,25 @@
             <a:pPr algn="l" indent="0" marL="0">
               <a:buNone/>
             </a:pPr>
+            <a:r>
+              <a:rPr lang="en-US" sz="1500" b="1" dirty="0">
+                <a:solidFill>
+                  <a:srgbClr val="C2551C"/>
+                </a:solidFill>
+              </a:rPr>
+              <a:t>Takeaway   </a:t>
+            </a:r>
+            <a:pPr algn="l" indent="0" marL="0">
+              <a:buNone/>
+            </a:pPr>
+            <a:r>
+              <a:rPr lang="en-US" sz="1500" dirty="0">
+                <a:solidFill>
+                  <a:srgbClr val="111111"/>
+                </a:solidFill>
+              </a:rPr>
+              <a:t>one wrong base costs −0.45 of the −0.56 total and a moved motif recovers only a third — but every class titrates the same way</a:t>
+            </a:r>
             <a:endParaRPr lang="en-US" sz="1500" dirty="0"/>
           </a:p>
         </p:txBody>
@@ -2871,7 +2955,7 @@
                   <a:schemeClr val="tx1"/>
                 </a:solidFill>
               </a:rPr>
-              <a:t>An independent reporter assay agrees</a:t>
+              <a:t>Age-gained sites read AP-1 dosage more sharply</a:t>
             </a:r>
             <a:endParaRPr lang="en-US" sz="2800" dirty="0"/>
           </a:p>
@@ -2879,7 +2963,7 @@
       </p:sp>
       <p:pic>
         <p:nvPicPr>
-          <p:cNvPr id="3" name="Image 0" descr="/Users/z5162865/WongLab/AlphaGenome_Ap1/Analysis/slide_figures/s6_mpra.png">    </p:cNvPr>
+          <p:cNvPr id="3" name="Image 0" descr="/Users/z5162865/WongLab/AlphaGenome_Ap1/Analysis/slide_figures/s5_age_gained.png">    </p:cNvPr>
           <p:cNvPicPr>
             <a:picLocks noChangeAspect="1"/>
           </p:cNvPicPr>
@@ -2893,8 +2977,8 @@
         </p:blipFill>
         <p:spPr>
           <a:xfrm>
-            <a:off x="1191113" y="2240280"/>
-            <a:ext cx="9779295" cy="3520440"/>
+            <a:off x="1466163" y="1097280"/>
+            <a:ext cx="9229194" cy="3794760"/>
           </a:xfrm>
           <a:prstGeom prst="rect">
             <a:avLst/>
@@ -2903,41 +2987,65 @@
       </p:pic>
       <p:sp>
         <p:nvSpPr>
-          <p:cNvPr id="4" name="stat-0"/>
-          <p:cNvSpPr/>
+          <p:cNvPr id="4" name="massaction"/>
+          <p:cNvSpPr txBox="1"/>
           <p:nvPr/>
         </p:nvSpPr>
         <p:spPr>
           <a:xfrm>
-            <a:off x="502920" y="1097280"/>
-            <a:ext cx="5440680" cy="1051560"/>
-          </a:xfrm>
-          <a:prstGeom prst="roundRect">
-            <a:avLst>
-              <a:gd name="adj" fmla="val 5217"/>
-            </a:avLst>
+            <a:off x="502920" y="5029200"/>
+            <a:ext cx="11155680" cy="914400"/>
+          </a:xfrm>
+          <a:prstGeom prst="rect">
+            <a:avLst/>
           </a:prstGeom>
           <a:solidFill>
             <a:srgbClr val="F2F2F2"/>
           </a:solidFill>
-          <a:ln w="12700">
-            <a:solidFill>
-              <a:srgbClr val="E2E2E2"/>
-            </a:solidFill>
-            <a:prstDash val="solid"/>
-          </a:ln>
-        </p:spPr>
-      </p:sp>
-      <p:sp>
-        <p:nvSpPr>
-          <p:cNvPr id="5" name="Text 2"/>
-          <p:cNvSpPr txBox="1"/>
-          <p:nvPr/>
-        </p:nvSpPr>
-        <p:spPr>
-          <a:xfrm>
-            <a:off x="612648" y="1188720"/>
-            <a:ext cx="5221224" cy="548640"/>
+          <a:ln/>
+        </p:spPr>
+        <p:txBody>
+          <a:bodyPr wrap="square" lIns="152400" tIns="152400" rIns="152400" bIns="152400" rtlCol="0" anchor="ctr"/>
+          <a:lstStyle/>
+          <a:p>
+            <a:pPr indent="0" marL="0">
+              <a:buNone/>
+            </a:pPr>
+            <a:r>
+              <a:rPr lang="en-US" sz="1700" b="1" dirty="0">
+                <a:solidFill>
+                  <a:srgbClr val="C2551C"/>
+                </a:solidFill>
+              </a:rPr>
+              <a:t>Mass action   </a:t>
+            </a:r>
+            <a:pPr indent="0" marL="0">
+              <a:buNone/>
+            </a:pPr>
+            <a:r>
+              <a:rPr lang="en-US" sz="1500" dirty="0">
+                <a:solidFill>
+                  <a:srgbClr val="000000"/>
+                </a:solidFill>
+              </a:rPr>
+              <a:t>if ageing raises AP-1 activity, occupancy rises first at the highest-affinity motifs — exactly the sites that gain. Losing binding is not the reverse: age-lost sites show no sequence signature at all.</a:t>
+            </a:r>
+            <a:endParaRPr lang="en-US" sz="1700" dirty="0"/>
+          </a:p>
+        </p:txBody>
+      </p:sp>
+      <p:sp>
+        <p:nvSpPr>
+          <p:cNvPr id="6" name="Text 0"/>
+          <p:cNvSpPr/>
+          <p:nvPr>
+            <p:ph idx="101" type="body" hasCustomPrompt="1"/>
+          </p:nvPr>
+        </p:nvSpPr>
+        <p:spPr>
+          <a:xfrm>
+            <a:off x="502920" y="5943600"/>
+            <a:ext cx="11155680" cy="658368"/>
           </a:xfrm>
           <a:prstGeom prst="rect">
             <a:avLst/>
@@ -2946,204 +3054,12 @@
           <a:ln/>
         </p:spPr>
         <p:txBody>
-          <a:bodyPr wrap="square" lIns="0" tIns="0" rIns="0" bIns="0" rtlCol="0" anchor="ctr"/>
-          <a:lstStyle/>
-          <a:p>
-            <a:pPr algn="ctr" indent="0" marL="0">
-              <a:buNone/>
-            </a:pPr>
-            <a:r>
-              <a:rPr lang="en-US" sz="3000" b="1" dirty="0">
-                <a:solidFill>
-                  <a:srgbClr val="1F6FB2"/>
-                </a:solidFill>
-              </a:rPr>
-              <a:t>7.5%</a:t>
-            </a:r>
-            <a:endParaRPr lang="en-US" sz="3000" dirty="0"/>
-          </a:p>
-        </p:txBody>
-      </p:sp>
-      <p:sp>
-        <p:nvSpPr>
-          <p:cNvPr id="6" name="Text 3"/>
-          <p:cNvSpPr txBox="1"/>
-          <p:nvPr/>
-        </p:nvSpPr>
-        <p:spPr>
-          <a:xfrm>
-            <a:off x="612648" y="1755648"/>
-            <a:ext cx="5221224" cy="320040"/>
-          </a:xfrm>
-          <a:prstGeom prst="rect">
-            <a:avLst/>
-          </a:prstGeom>
-          <a:noFill/>
-          <a:ln/>
-        </p:spPr>
-        <p:txBody>
-          <a:bodyPr wrap="square" lIns="0" tIns="0" rIns="0" bIns="0" rtlCol="0" anchor="ctr"/>
-          <a:lstStyle/>
-          <a:p>
-            <a:pPr algn="ctr" indent="0" marL="0">
-              <a:buNone/>
-            </a:pPr>
-            <a:r>
-              <a:rPr lang="en-US" sz="1200" dirty="0">
-                <a:solidFill>
-                  <a:srgbClr val="595959"/>
-                </a:solidFill>
-              </a:rPr>
-              <a:t>AlphaGenome: the motif's share of local dependence</a:t>
-            </a:r>
-            <a:endParaRPr lang="en-US" sz="1200" dirty="0"/>
-          </a:p>
-        </p:txBody>
-      </p:sp>
-      <p:sp>
-        <p:nvSpPr>
-          <p:cNvPr id="7" name="stat-1"/>
-          <p:cNvSpPr/>
-          <p:nvPr/>
-        </p:nvSpPr>
-        <p:spPr>
-          <a:xfrm>
-            <a:off x="6217920" y="1097280"/>
-            <a:ext cx="5440680" cy="1051560"/>
-          </a:xfrm>
-          <a:prstGeom prst="roundRect">
-            <a:avLst>
-              <a:gd name="adj" fmla="val 5217"/>
-            </a:avLst>
-          </a:prstGeom>
-          <a:solidFill>
-            <a:srgbClr val="F2F2F2"/>
-          </a:solidFill>
-          <a:ln w="12700">
-            <a:solidFill>
-              <a:srgbClr val="E2E2E2"/>
-            </a:solidFill>
-            <a:prstDash val="solid"/>
-          </a:ln>
-        </p:spPr>
-      </p:sp>
-      <p:sp>
-        <p:nvSpPr>
-          <p:cNvPr id="8" name="Text 5"/>
-          <p:cNvSpPr txBox="1"/>
-          <p:nvPr/>
-        </p:nvSpPr>
-        <p:spPr>
-          <a:xfrm>
-            <a:off x="6327648" y="1188720"/>
-            <a:ext cx="5221224" cy="548640"/>
-          </a:xfrm>
-          <a:prstGeom prst="rect">
-            <a:avLst/>
-          </a:prstGeom>
-          <a:noFill/>
-          <a:ln/>
-        </p:spPr>
-        <p:txBody>
-          <a:bodyPr wrap="square" lIns="0" tIns="0" rIns="0" bIns="0" rtlCol="0" anchor="ctr"/>
-          <a:lstStyle/>
-          <a:p>
-            <a:pPr algn="ctr" indent="0" marL="0">
-              <a:buNone/>
-            </a:pPr>
-            <a:r>
-              <a:rPr lang="en-US" sz="3000" b="1" dirty="0">
-                <a:solidFill>
-                  <a:srgbClr val="C2551C"/>
-                </a:solidFill>
-              </a:rPr>
-              <a:t>9.3%</a:t>
-            </a:r>
-            <a:endParaRPr lang="en-US" sz="3000" dirty="0"/>
-          </a:p>
-        </p:txBody>
-      </p:sp>
-      <p:sp>
-        <p:nvSpPr>
-          <p:cNvPr id="9" name="Text 6"/>
-          <p:cNvSpPr txBox="1"/>
-          <p:nvPr/>
-        </p:nvSpPr>
-        <p:spPr>
-          <a:xfrm>
-            <a:off x="6327648" y="1755648"/>
-            <a:ext cx="5221224" cy="320040"/>
-          </a:xfrm>
-          <a:prstGeom prst="rect">
-            <a:avLst/>
-          </a:prstGeom>
-          <a:noFill/>
-          <a:ln/>
-        </p:spPr>
-        <p:txBody>
-          <a:bodyPr wrap="square" lIns="0" tIns="0" rIns="0" bIns="0" rtlCol="0" anchor="ctr"/>
-          <a:lstStyle/>
-          <a:p>
-            <a:pPr algn="ctr" indent="0" marL="0">
-              <a:buNone/>
-            </a:pPr>
-            <a:r>
-              <a:rPr lang="en-US" sz="1200" dirty="0">
-                <a:solidFill>
-                  <a:srgbClr val="595959"/>
-                </a:solidFill>
-              </a:rPr>
-              <a:t>fibroblast MPRA: the same quantity, measured in the lab</a:t>
-            </a:r>
-            <a:endParaRPr lang="en-US" sz="1200" dirty="0"/>
-          </a:p>
-        </p:txBody>
-      </p:sp>
-      <p:sp>
-        <p:nvSpPr>
-          <p:cNvPr id="10" name="Text 0"/>
-          <p:cNvSpPr/>
-          <p:nvPr>
-            <p:ph idx="101" type="body" hasCustomPrompt="1"/>
-          </p:nvPr>
-        </p:nvSpPr>
-        <p:spPr>
-          <a:xfrm>
-            <a:off x="502920" y="5943600"/>
-            <a:ext cx="11155680" cy="658368"/>
-          </a:xfrm>
-          <a:prstGeom prst="rect">
-            <a:avLst/>
-          </a:prstGeom>
-          <a:noFill/>
-          <a:ln/>
-        </p:spPr>
-        <p:txBody>
           <a:bodyPr wrap="square" rtlCol="0" anchor="t"/>
           <a:lstStyle/>
           <a:p>
             <a:pPr algn="l" indent="0" marL="0">
               <a:buNone/>
             </a:pPr>
-            <a:r>
-              <a:rPr lang="en-US" sz="1500" b="1" dirty="0">
-                <a:solidFill>
-                  <a:srgbClr val="C2551C"/>
-                </a:solidFill>
-              </a:rPr>
-              <a:t>Takeaway   </a:t>
-            </a:r>
-            <a:pPr algn="l" indent="0" marL="0">
-              <a:buNone/>
-            </a:pPr>
-            <a:r>
-              <a:rPr lang="en-US" sz="1500" dirty="0">
-                <a:solidFill>
-                  <a:srgbClr val="111111"/>
-                </a:solidFill>
-              </a:rPr>
-              <a:t>two assays, different cell types and readouts, both put the AP-1 motif under a tenth of its 170 bp surroundings</a:t>
-            </a:r>
             <a:endParaRPr lang="en-US" sz="1500" dirty="0"/>
           </a:p>
         </p:txBody>
@@ -3250,24 +3166,73 @@
                   <a:schemeClr val="tx1"/>
                 </a:solidFill>
               </a:rPr>
-              <a:t>What this changes</a:t>
+              <a:t>An independent reporter assay agrees</a:t>
             </a:r>
             <a:endParaRPr lang="en-US" sz="2800" dirty="0"/>
           </a:p>
         </p:txBody>
       </p:sp>
-      <p:sp>
-        <p:nvSpPr>
-          <p:cNvPr id="3" name="Text 0"/>
+      <p:pic>
+        <p:nvPicPr>
+          <p:cNvPr id="3" name="Image 0" descr="/Users/z5162865/WongLab/AlphaGenome_Ap1/Analysis/slide_figures/s6_mpra.png">    </p:cNvPr>
+          <p:cNvPicPr>
+            <a:picLocks noChangeAspect="1"/>
+          </p:cNvPicPr>
+          <p:nvPr/>
+        </p:nvPicPr>
+        <p:blipFill>
+          <a:blip r:embed="rId1"/>
+          <a:stretch>
+            <a:fillRect/>
+          </a:stretch>
+        </p:blipFill>
+        <p:spPr>
+          <a:xfrm>
+            <a:off x="1191113" y="2240280"/>
+            <a:ext cx="9779295" cy="3520440"/>
+          </a:xfrm>
+          <a:prstGeom prst="rect">
+            <a:avLst/>
+          </a:prstGeom>
+        </p:spPr>
+      </p:pic>
+      <p:sp>
+        <p:nvSpPr>
+          <p:cNvPr id="4" name="stat-0"/>
           <p:cNvSpPr/>
-          <p:nvPr>
-            <p:ph idx="101" type="body" hasCustomPrompt="1"/>
-          </p:nvPr>
-        </p:nvSpPr>
-        <p:spPr>
-          <a:xfrm>
-            <a:off x="502920" y="1234440"/>
-            <a:ext cx="11155680" cy="5120640"/>
+          <p:nvPr/>
+        </p:nvSpPr>
+        <p:spPr>
+          <a:xfrm>
+            <a:off x="502920" y="1097280"/>
+            <a:ext cx="5440680" cy="1051560"/>
+          </a:xfrm>
+          <a:prstGeom prst="roundRect">
+            <a:avLst>
+              <a:gd name="adj" fmla="val 5217"/>
+            </a:avLst>
+          </a:prstGeom>
+          <a:solidFill>
+            <a:srgbClr val="F2F2F2"/>
+          </a:solidFill>
+          <a:ln w="12700">
+            <a:solidFill>
+              <a:srgbClr val="E2E2E2"/>
+            </a:solidFill>
+            <a:prstDash val="solid"/>
+          </a:ln>
+        </p:spPr>
+      </p:sp>
+      <p:sp>
+        <p:nvSpPr>
+          <p:cNvPr id="5" name="Text 2"/>
+          <p:cNvSpPr txBox="1"/>
+          <p:nvPr/>
+        </p:nvSpPr>
+        <p:spPr>
+          <a:xfrm>
+            <a:off x="612648" y="1188720"/>
+            <a:ext cx="5221224" cy="548640"/>
           </a:xfrm>
           <a:prstGeom prst="rect">
             <a:avLst/>
@@ -3276,6 +3241,179 @@
           <a:ln/>
         </p:spPr>
         <p:txBody>
+          <a:bodyPr wrap="square" lIns="0" tIns="0" rIns="0" bIns="0" rtlCol="0" anchor="ctr"/>
+          <a:lstStyle/>
+          <a:p>
+            <a:pPr algn="ctr" indent="0" marL="0">
+              <a:buNone/>
+            </a:pPr>
+            <a:r>
+              <a:rPr lang="en-US" sz="3000" b="1" dirty="0">
+                <a:solidFill>
+                  <a:srgbClr val="1F6FB2"/>
+                </a:solidFill>
+              </a:rPr>
+              <a:t>7.5%</a:t>
+            </a:r>
+            <a:endParaRPr lang="en-US" sz="3000" dirty="0"/>
+          </a:p>
+        </p:txBody>
+      </p:sp>
+      <p:sp>
+        <p:nvSpPr>
+          <p:cNvPr id="6" name="Text 3"/>
+          <p:cNvSpPr txBox="1"/>
+          <p:nvPr/>
+        </p:nvSpPr>
+        <p:spPr>
+          <a:xfrm>
+            <a:off x="612648" y="1755648"/>
+            <a:ext cx="5221224" cy="320040"/>
+          </a:xfrm>
+          <a:prstGeom prst="rect">
+            <a:avLst/>
+          </a:prstGeom>
+          <a:noFill/>
+          <a:ln/>
+        </p:spPr>
+        <p:txBody>
+          <a:bodyPr wrap="square" lIns="0" tIns="0" rIns="0" bIns="0" rtlCol="0" anchor="ctr"/>
+          <a:lstStyle/>
+          <a:p>
+            <a:pPr algn="ctr" indent="0" marL="0">
+              <a:buNone/>
+            </a:pPr>
+            <a:r>
+              <a:rPr lang="en-US" sz="1200" dirty="0">
+                <a:solidFill>
+                  <a:srgbClr val="595959"/>
+                </a:solidFill>
+              </a:rPr>
+              <a:t>AlphaGenome: the motif's share of local dependence</a:t>
+            </a:r>
+            <a:endParaRPr lang="en-US" sz="1200" dirty="0"/>
+          </a:p>
+        </p:txBody>
+      </p:sp>
+      <p:sp>
+        <p:nvSpPr>
+          <p:cNvPr id="7" name="stat-1"/>
+          <p:cNvSpPr/>
+          <p:nvPr/>
+        </p:nvSpPr>
+        <p:spPr>
+          <a:xfrm>
+            <a:off x="6217920" y="1097280"/>
+            <a:ext cx="5440680" cy="1051560"/>
+          </a:xfrm>
+          <a:prstGeom prst="roundRect">
+            <a:avLst>
+              <a:gd name="adj" fmla="val 5217"/>
+            </a:avLst>
+          </a:prstGeom>
+          <a:solidFill>
+            <a:srgbClr val="F2F2F2"/>
+          </a:solidFill>
+          <a:ln w="12700">
+            <a:solidFill>
+              <a:srgbClr val="E2E2E2"/>
+            </a:solidFill>
+            <a:prstDash val="solid"/>
+          </a:ln>
+        </p:spPr>
+      </p:sp>
+      <p:sp>
+        <p:nvSpPr>
+          <p:cNvPr id="8" name="Text 5"/>
+          <p:cNvSpPr txBox="1"/>
+          <p:nvPr/>
+        </p:nvSpPr>
+        <p:spPr>
+          <a:xfrm>
+            <a:off x="6327648" y="1188720"/>
+            <a:ext cx="5221224" cy="548640"/>
+          </a:xfrm>
+          <a:prstGeom prst="rect">
+            <a:avLst/>
+          </a:prstGeom>
+          <a:noFill/>
+          <a:ln/>
+        </p:spPr>
+        <p:txBody>
+          <a:bodyPr wrap="square" lIns="0" tIns="0" rIns="0" bIns="0" rtlCol="0" anchor="ctr"/>
+          <a:lstStyle/>
+          <a:p>
+            <a:pPr algn="ctr" indent="0" marL="0">
+              <a:buNone/>
+            </a:pPr>
+            <a:r>
+              <a:rPr lang="en-US" sz="3000" b="1" dirty="0">
+                <a:solidFill>
+                  <a:srgbClr val="C2551C"/>
+                </a:solidFill>
+              </a:rPr>
+              <a:t>9.3%</a:t>
+            </a:r>
+            <a:endParaRPr lang="en-US" sz="3000" dirty="0"/>
+          </a:p>
+        </p:txBody>
+      </p:sp>
+      <p:sp>
+        <p:nvSpPr>
+          <p:cNvPr id="9" name="Text 6"/>
+          <p:cNvSpPr txBox="1"/>
+          <p:nvPr/>
+        </p:nvSpPr>
+        <p:spPr>
+          <a:xfrm>
+            <a:off x="6327648" y="1755648"/>
+            <a:ext cx="5221224" cy="320040"/>
+          </a:xfrm>
+          <a:prstGeom prst="rect">
+            <a:avLst/>
+          </a:prstGeom>
+          <a:noFill/>
+          <a:ln/>
+        </p:spPr>
+        <p:txBody>
+          <a:bodyPr wrap="square" lIns="0" tIns="0" rIns="0" bIns="0" rtlCol="0" anchor="ctr"/>
+          <a:lstStyle/>
+          <a:p>
+            <a:pPr algn="ctr" indent="0" marL="0">
+              <a:buNone/>
+            </a:pPr>
+            <a:r>
+              <a:rPr lang="en-US" sz="1200" dirty="0">
+                <a:solidFill>
+                  <a:srgbClr val="595959"/>
+                </a:solidFill>
+              </a:rPr>
+              <a:t>fibroblast MPRA: the same quantity, measured in the lab</a:t>
+            </a:r>
+            <a:endParaRPr lang="en-US" sz="1200" dirty="0"/>
+          </a:p>
+        </p:txBody>
+      </p:sp>
+      <p:sp>
+        <p:nvSpPr>
+          <p:cNvPr id="10" name="Text 0"/>
+          <p:cNvSpPr/>
+          <p:nvPr>
+            <p:ph idx="101" type="body" hasCustomPrompt="1"/>
+          </p:nvPr>
+        </p:nvSpPr>
+        <p:spPr>
+          <a:xfrm>
+            <a:off x="502920" y="5943600"/>
+            <a:ext cx="11155680" cy="658368"/>
+          </a:xfrm>
+          <a:prstGeom prst="rect">
+            <a:avLst/>
+          </a:prstGeom>
+          <a:noFill/>
+          <a:ln/>
+        </p:spPr>
+        <p:txBody>
           <a:bodyPr wrap="square" rtlCol="0" anchor="t"/>
           <a:lstStyle/>
           <a:p>
@@ -3283,121 +3421,25 @@
               <a:buNone/>
             </a:pPr>
             <a:r>
-              <a:rPr lang="en-US" sz="1900" b="1" dirty="0">
-                <a:solidFill>
-                  <a:schemeClr val="tx1"/>
-                </a:solidFill>
-              </a:rPr>
-              <a:t>A responsive AP-1 site is a marginal one, not a differently-built one</a:t>
-            </a:r>
-            <a:endParaRPr lang="en-US" sz="1700" dirty="0"/>
-          </a:p>
-          <a:p>
+              <a:rPr lang="en-US" sz="1500" b="1" dirty="0">
+                <a:solidFill>
+                  <a:srgbClr val="C2551C"/>
+                </a:solidFill>
+              </a:rPr>
+              <a:t>Takeaway   </a:t>
+            </a:r>
             <a:pPr algn="l" indent="0" marL="0">
-              <a:spcAft>
-                <a:spcPts val="1500"/>
-              </a:spcAft>
-              <a:buNone/>
-            </a:pPr>
-            <a:r>
-              <a:rPr lang="en-US" sz="1700" dirty="0">
-                <a:solidFill>
-                  <a:schemeClr val="tx1"/>
-                </a:solidFill>
-              </a:rPr>
-              <a:t>Weaker AP-1 motif, fewer AP-1 motifs around it, and its dependence spread thinly across the element instead of anchored on the motif. The same partners matter, in the same order, in every class.</a:t>
-            </a:r>
-            <a:endParaRPr lang="en-US" sz="1700" dirty="0"/>
-          </a:p>
-          <a:p>
-            <a:pPr algn="l" indent="0" marL="0">
-              <a:buNone/>
-            </a:pPr>
-            <a:r>
-              <a:rPr lang="en-US" sz="1900" b="1" dirty="0">
-                <a:solidFill>
-                  <a:schemeClr val="tx1"/>
-                </a:solidFill>
-              </a:rPr>
-              <a:t>Two things survive matching, and only two</a:t>
-            </a:r>
-            <a:endParaRPr lang="en-US" sz="1700" dirty="0"/>
-          </a:p>
-          <a:p>
-            <a:pPr algn="l" indent="0" marL="0">
-              <a:spcAft>
-                <a:spcPts val="1500"/>
-              </a:spcAft>
-              <a:buNone/>
-            </a:pPr>
-            <a:r>
-              <a:rPr lang="en-US" sz="1700" dirty="0">
-                <a:solidFill>
-                  <a:schemeClr val="tx1"/>
-                </a:solidFill>
-              </a:rPr>
-              <a:t>Scale: the 11 bp motif and the whole peak are worth the same to both classes, but replacing the 170 bp element costs a Dynamic site 0.24 less — what you expect when the dependence is spread wider. Partner: age-gained sites lack a MEF2 abutting the motif, 5.6% against 13.7% of matched controls.</a:t>
-            </a:r>
-            <a:endParaRPr lang="en-US" sz="1700" dirty="0"/>
-          </a:p>
-          <a:p>
-            <a:pPr algn="l" indent="0" marL="0">
-              <a:buNone/>
-            </a:pPr>
-            <a:r>
-              <a:rPr lang="en-US" sz="1900" b="1" dirty="0">
-                <a:solidFill>
-                  <a:schemeClr val="tx1"/>
-                </a:solidFill>
-              </a:rPr>
-              <a:t>That is why it fluctuates</a:t>
-            </a:r>
-            <a:endParaRPr lang="en-US" sz="1700" dirty="0"/>
-          </a:p>
-          <a:p>
-            <a:pPr algn="l" indent="0" marL="0">
-              <a:spcAft>
-                <a:spcPts val="1500"/>
-              </a:spcAft>
-              <a:buNone/>
-            </a:pPr>
-            <a:r>
-              <a:rPr lang="en-US" sz="1700" dirty="0">
-                <a:solidFill>
-                  <a:schemeClr val="tx1"/>
-                </a:solidFill>
-              </a:rPr>
-              <a:t>A weak motif with no close MEF2 to hold it sits near the occupancy threshold, so its binding tracks how much AP-1 protein is available — which is what ageing changes.</a:t>
-            </a:r>
-            <a:endParaRPr lang="en-US" sz="1700" dirty="0"/>
-          </a:p>
-          <a:p>
-            <a:pPr algn="l" indent="0" marL="0">
-              <a:buNone/>
-            </a:pPr>
-            <a:r>
-              <a:rPr lang="en-US" sz="1900" b="1" dirty="0">
-                <a:solidFill>
-                  <a:schemeClr val="tx1"/>
-                </a:solidFill>
-              </a:rPr>
-              <a:t>Gain and loss are different events</a:t>
-            </a:r>
-            <a:endParaRPr lang="en-US" sz="1700" dirty="0"/>
-          </a:p>
-          <a:p>
-            <a:pPr algn="l" indent="0" marL="0">
-              <a:buNone/>
-            </a:pPr>
-            <a:r>
-              <a:rPr lang="en-US" sz="1700" dirty="0">
-                <a:solidFill>
-                  <a:schemeClr val="tx1"/>
-                </a:solidFill>
-              </a:rPr>
-              <a:t>Age-gained sites have better cores and read AP-1 dosage more sharply. Age-lost sites show no sequence signature of their own.</a:t>
-            </a:r>
-            <a:endParaRPr lang="en-US" sz="1700" dirty="0"/>
+              <a:buNone/>
+            </a:pPr>
+            <a:r>
+              <a:rPr lang="en-US" sz="1500" dirty="0">
+                <a:solidFill>
+                  <a:srgbClr val="111111"/>
+                </a:solidFill>
+              </a:rPr>
+              <a:t>two assays, different cell types and readouts, both put the AP-1 motif under a tenth of its 170 bp surroundings</a:t>
+            </a:r>
+            <a:endParaRPr lang="en-US" sz="1500" dirty="0"/>
           </a:p>
         </p:txBody>
       </p:sp>
@@ -3503,7 +3545,7 @@
                   <a:schemeClr val="tx1"/>
                 </a:solidFill>
               </a:rPr>
-              <a:t>Where this goes next</a:t>
+              <a:t>What this changes</a:t>
             </a:r>
             <a:endParaRPr lang="en-US" sz="2800" dirty="0"/>
           </a:p>
@@ -3541,14 +3583,14 @@
                   <a:schemeClr val="tx1"/>
                 </a:solidFill>
               </a:rPr>
-              <a:t>Fine-tuned condition-aware head</a:t>
+              <a:t>A responsive AP-1 site is a marginal one, not a differently-built one</a:t>
             </a:r>
             <a:endParaRPr lang="en-US" sz="1700" dirty="0"/>
           </a:p>
           <a:p>
             <a:pPr algn="l" indent="0" marL="0">
               <a:spcAft>
-                <a:spcPts val="1400"/>
+                <a:spcPts val="1500"/>
               </a:spcAft>
               <a:buNone/>
             </a:pPr>
@@ -3558,7 +3600,7 @@
                   <a:schemeClr val="tx1"/>
                 </a:solidFill>
               </a:rPr>
-              <a:t>A frozen-trunk probe on our own cardiomyocyte and fibroblast ATAC already reaches profile r = 0.65 against 0.59 for the built-in heart head, training 0.01% of the model. Next: 1 bp insertion targets, then LoRA.</a:t>
+              <a:t>Weaker AP-1 motif, fewer AP-1 motifs around it, and its dependence spread thinly across the element instead of anchored on the motif. The same partners matter, in the same order, in every class.</a:t>
             </a:r>
             <a:endParaRPr lang="en-US" sz="1700" dirty="0"/>
           </a:p>
@@ -3572,14 +3614,14 @@
                   <a:schemeClr val="tx1"/>
                 </a:solidFill>
               </a:rPr>
-              <a:t>Does AP-1 activity actually rise with age?</a:t>
+              <a:t>Two things survive matching, and only two</a:t>
             </a:r>
             <a:endParaRPr lang="en-US" sz="1700" dirty="0"/>
           </a:p>
           <a:p>
             <a:pPr algn="l" indent="0" marL="0">
               <a:spcAft>
-                <a:spcPts val="1400"/>
+                <a:spcPts val="1500"/>
               </a:spcAft>
               <a:buNone/>
             </a:pPr>
@@ -3589,7 +3631,7 @@
                   <a:schemeClr val="tx1"/>
                 </a:solidFill>
               </a:rPr>
-              <a:t>The mass-action reading rests on it. One check against the RNA.</a:t>
+              <a:t>Scale: the 11 bp motif and the whole peak are worth the same to both classes, but replacing the 170 bp element costs a Dynamic site 0.24 less — what you expect when the dependence is spread wider. Partner: age-gained sites lack a MEF2 abutting the motif, 5.6% against 13.7% of matched controls.</a:t>
             </a:r>
             <a:endParaRPr lang="en-US" sz="1700" dirty="0"/>
           </a:p>
@@ -3603,12 +3645,15 @@
                   <a:schemeClr val="tx1"/>
                 </a:solidFill>
               </a:rPr>
-              <a:t>Fibroblast scan</a:t>
+              <a:t>That is why it fluctuates</a:t>
             </a:r>
             <a:endParaRPr lang="en-US" sz="1700" dirty="0"/>
           </a:p>
           <a:p>
             <a:pPr algn="l" indent="0" marL="0">
+              <a:spcAft>
+                <a:spcPts val="1500"/>
+              </a:spcAft>
               <a:buNone/>
             </a:pPr>
             <a:r>
@@ -3617,7 +3662,35 @@
                   <a:schemeClr val="tx1"/>
                 </a:solidFill>
               </a:rPr>
-              <a:t>If MEF2 also tops the partner ranking in fibroblasts, the ranking is a model artefact rather than cardiac biology. This is the sharpest available control.</a:t>
+              <a:t>A weak motif with no close MEF2 to hold it sits near the occupancy threshold, so its binding tracks how much AP-1 protein is available — which is what ageing changes.</a:t>
+            </a:r>
+            <a:endParaRPr lang="en-US" sz="1700" dirty="0"/>
+          </a:p>
+          <a:p>
+            <a:pPr algn="l" indent="0" marL="0">
+              <a:buNone/>
+            </a:pPr>
+            <a:r>
+              <a:rPr lang="en-US" sz="1900" b="1" dirty="0">
+                <a:solidFill>
+                  <a:schemeClr val="tx1"/>
+                </a:solidFill>
+              </a:rPr>
+              <a:t>Gain and loss are different events</a:t>
+            </a:r>
+            <a:endParaRPr lang="en-US" sz="1700" dirty="0"/>
+          </a:p>
+          <a:p>
+            <a:pPr algn="l" indent="0" marL="0">
+              <a:buNone/>
+            </a:pPr>
+            <a:r>
+              <a:rPr lang="en-US" sz="1700" dirty="0">
+                <a:solidFill>
+                  <a:schemeClr val="tx1"/>
+                </a:solidFill>
+              </a:rPr>
+              <a:t>Age-gained sites have better cores and read AP-1 dosage more sharply. Age-lost sites show no sequence signature of their own.</a:t>
             </a:r>
             <a:endParaRPr lang="en-US" sz="1700" dirty="0"/>
           </a:p>
@@ -3663,6 +3736,228 @@
             <a:fld id="{F7021451-1387-4CA6-816F-3879F97B5CBC}" type="slidenum">
               <a:rPr b="0" lang="en-US"/>
               <a:t>13</a:t>
+            </a:fld>
+            <a:endParaRPr lang="en-US"/>
+          </a:p>
+        </p:txBody>
+      </p:sp>
+    </p:spTree>
+  </p:cSld>
+  <p:clrMapOvr>
+    <a:masterClrMapping/>
+  </p:clrMapOvr>
+</p:sld>
+</file>
+
+<file path=ppt/slides/slide14.xml><?xml version="1.0" encoding="utf-8"?>
+<p:sld xmlns:a="http://schemas.openxmlformats.org/drawingml/2006/main" xmlns:r="http://schemas.openxmlformats.org/officeDocument/2006/relationships" xmlns:p="http://schemas.openxmlformats.org/presentationml/2006/main">
+  <p:cSld name="Slide 14">
+    <p:spTree>
+      <p:nvGrpSpPr>
+        <p:cNvPr id="1" name=""/>
+        <p:cNvGrpSpPr/>
+        <p:nvPr/>
+      </p:nvGrpSpPr>
+      <p:grpSpPr>
+        <a:xfrm>
+          <a:off x="0" y="0"/>
+          <a:ext cx="0" cy="0"/>
+          <a:chOff x="0" y="0"/>
+          <a:chExt cx="0" cy="0"/>
+        </a:xfrm>
+      </p:grpSpPr>
+      <p:sp>
+        <p:nvSpPr>
+          <p:cNvPr id="2" name="Text 0"/>
+          <p:cNvSpPr/>
+          <p:nvPr>
+            <p:ph idx="100" type="title" hasCustomPrompt="1"/>
+          </p:nvPr>
+        </p:nvSpPr>
+        <p:spPr>
+          <a:xfrm>
+            <a:off x="502920" y="301752"/>
+            <a:ext cx="11155680" cy="685800"/>
+          </a:xfrm>
+          <a:prstGeom prst="rect">
+            <a:avLst/>
+          </a:prstGeom>
+          <a:noFill/>
+          <a:ln/>
+        </p:spPr>
+        <p:txBody>
+          <a:bodyPr wrap="square" rtlCol="0" anchor="ctr"/>
+          <a:lstStyle/>
+          <a:p>
+            <a:pPr algn="l" indent="0" marL="0">
+              <a:buNone/>
+            </a:pPr>
+            <a:r>
+              <a:rPr lang="en-US" sz="2800" b="1" dirty="0">
+                <a:solidFill>
+                  <a:schemeClr val="tx1"/>
+                </a:solidFill>
+              </a:rPr>
+              <a:t>Where this goes next</a:t>
+            </a:r>
+            <a:endParaRPr lang="en-US" sz="2800" dirty="0"/>
+          </a:p>
+        </p:txBody>
+      </p:sp>
+      <p:sp>
+        <p:nvSpPr>
+          <p:cNvPr id="3" name="Text 0"/>
+          <p:cNvSpPr/>
+          <p:nvPr>
+            <p:ph idx="101" type="body" hasCustomPrompt="1"/>
+          </p:nvPr>
+        </p:nvSpPr>
+        <p:spPr>
+          <a:xfrm>
+            <a:off x="502920" y="1234440"/>
+            <a:ext cx="11155680" cy="5120640"/>
+          </a:xfrm>
+          <a:prstGeom prst="rect">
+            <a:avLst/>
+          </a:prstGeom>
+          <a:noFill/>
+          <a:ln/>
+        </p:spPr>
+        <p:txBody>
+          <a:bodyPr wrap="square" rtlCol="0" anchor="t"/>
+          <a:lstStyle/>
+          <a:p>
+            <a:pPr algn="l" indent="0" marL="0">
+              <a:buNone/>
+            </a:pPr>
+            <a:r>
+              <a:rPr lang="en-US" sz="1900" b="1" dirty="0">
+                <a:solidFill>
+                  <a:schemeClr val="tx1"/>
+                </a:solidFill>
+              </a:rPr>
+              <a:t>Fine-tuned condition-aware head</a:t>
+            </a:r>
+            <a:endParaRPr lang="en-US" sz="1700" dirty="0"/>
+          </a:p>
+          <a:p>
+            <a:pPr algn="l" indent="0" marL="0">
+              <a:spcAft>
+                <a:spcPts val="1400"/>
+              </a:spcAft>
+              <a:buNone/>
+            </a:pPr>
+            <a:r>
+              <a:rPr lang="en-US" sz="1700" dirty="0">
+                <a:solidFill>
+                  <a:schemeClr val="tx1"/>
+                </a:solidFill>
+              </a:rPr>
+              <a:t>A frozen-trunk probe on our own cardiomyocyte and fibroblast ATAC already reaches profile r = 0.65 against 0.59 for the built-in heart head, training 0.01% of the model. Next: 1 bp insertion targets, then LoRA.</a:t>
+            </a:r>
+            <a:endParaRPr lang="en-US" sz="1700" dirty="0"/>
+          </a:p>
+          <a:p>
+            <a:pPr algn="l" indent="0" marL="0">
+              <a:buNone/>
+            </a:pPr>
+            <a:r>
+              <a:rPr lang="en-US" sz="1900" b="1" dirty="0">
+                <a:solidFill>
+                  <a:schemeClr val="tx1"/>
+                </a:solidFill>
+              </a:rPr>
+              <a:t>Does AP-1 activity actually rise with age?</a:t>
+            </a:r>
+            <a:endParaRPr lang="en-US" sz="1700" dirty="0"/>
+          </a:p>
+          <a:p>
+            <a:pPr algn="l" indent="0" marL="0">
+              <a:spcAft>
+                <a:spcPts val="1400"/>
+              </a:spcAft>
+              <a:buNone/>
+            </a:pPr>
+            <a:r>
+              <a:rPr lang="en-US" sz="1700" dirty="0">
+                <a:solidFill>
+                  <a:schemeClr val="tx1"/>
+                </a:solidFill>
+              </a:rPr>
+              <a:t>The mass-action reading rests on it. One check against the RNA.</a:t>
+            </a:r>
+            <a:endParaRPr lang="en-US" sz="1700" dirty="0"/>
+          </a:p>
+          <a:p>
+            <a:pPr algn="l" indent="0" marL="0">
+              <a:buNone/>
+            </a:pPr>
+            <a:r>
+              <a:rPr lang="en-US" sz="1900" b="1" dirty="0">
+                <a:solidFill>
+                  <a:schemeClr val="tx1"/>
+                </a:solidFill>
+              </a:rPr>
+              <a:t>Fibroblast scan</a:t>
+            </a:r>
+            <a:endParaRPr lang="en-US" sz="1700" dirty="0"/>
+          </a:p>
+          <a:p>
+            <a:pPr algn="l" indent="0" marL="0">
+              <a:buNone/>
+            </a:pPr>
+            <a:r>
+              <a:rPr lang="en-US" sz="1700" dirty="0">
+                <a:solidFill>
+                  <a:schemeClr val="tx1"/>
+                </a:solidFill>
+              </a:rPr>
+              <a:t>If MEF2 also tops the partner ranking in fibroblasts, the ranking is a model artefact rather than cardiac biology. This is the sharpest available control.</a:t>
+            </a:r>
+            <a:endParaRPr lang="en-US" sz="1700" dirty="0"/>
+          </a:p>
+        </p:txBody>
+      </p:sp>
+      <p:sp>
+        <p:nvSpPr>
+          <p:cNvPr id="25" name="Slide Number Placeholder 0"/>
+          <p:cNvSpPr>
+            <a:spLocks noGrp="1"/>
+          </p:cNvSpPr>
+          <p:nvPr>
+            <p:ph type="sldNum" sz="quarter" idx="4294967295"/>
+          </p:nvPr>
+        </p:nvSpPr>
+        <p:spPr>
+          <a:xfrm>
+            <a:off x="11658600" y="6446520"/>
+            <a:ext cx="800000" cy="300000"/>
+          </a:xfrm>
+          <a:prstGeom prst="rect">
+            <a:avLst/>
+          </a:prstGeom>
+          <a:extLst>
+            <a:ext uri="{C572A759-6A51-4108-AA02-DFA0A04FC94B}">
+              <ma14:wrappingTextBoxFlag xmlns:ma14="http://schemas.microsoft.com/office/mac/drawingml/2011/main" val="0"/>
+            </a:ext>
+          </a:extLst>
+        </p:spPr>
+        <p:txBody>
+          <a:bodyPr/>
+          <a:lstStyle>
+            <a:lvl1pPr>
+              <a:defRPr sz="1000">
+                <a:solidFill>
+                  <a:srgbClr val="A6A6A6"/>
+                </a:solidFill>
+              </a:defRPr>
+            </a:lvl1pPr>
+          </a:lstStyle>
+          <a:p>
+            <a:pPr algn="l"/>
+            <a:fld id="{F7021451-1387-4CA6-816F-3879F97B5CBC}" type="slidenum">
+              <a:rPr b="0" lang="en-US"/>
+              <a:t>14</a:t>
             </a:fld>
             <a:endParaRPr lang="en-US"/>
           </a:p>
@@ -4952,8 +5247,8 @@
         </p:blipFill>
         <p:spPr>
           <a:xfrm>
-            <a:off x="502920" y="2146543"/>
-            <a:ext cx="11155680" cy="3433595"/>
+            <a:off x="502920" y="2177702"/>
+            <a:ext cx="11155680" cy="3371276"/>
           </a:xfrm>
           <a:prstGeom prst="rect">
             <a:avLst/>
@@ -5111,7 +5406,7 @@
                   <a:schemeClr val="tx1"/>
                 </a:solidFill>
               </a:rPr>
-              <a:t>Age-gained sites have less MEF2 beside them</a:t>
+              <a:t>MEF2 sits right beside the AP-1 motif, and it matters</a:t>
             </a:r>
             <a:endParaRPr lang="en-US" sz="2800" dirty="0"/>
           </a:p>
@@ -5133,8 +5428,8 @@
         </p:blipFill>
         <p:spPr>
           <a:xfrm>
-            <a:off x="502920" y="1951035"/>
-            <a:ext cx="11155680" cy="2864491"/>
+            <a:off x="502920" y="1225857"/>
+            <a:ext cx="11155680" cy="4314846"/>
           </a:xfrm>
           <a:prstGeom prst="rect">
             <a:avLst/>
@@ -5184,7 +5479,7 @@
                   <a:srgbClr val="111111"/>
                 </a:solidFill>
               </a:rPr>
-              <a:t>MEF2 sits 2.67× more often right beside the motif than chance — and age-gained sites carry one far less often, 5.6% against 13.7% of matched controls</a:t>
+              <a:t>MEF2 is 2.67× enriched at 11–25 bp and is worth −0.9 log2 there; KLF/SP is the commonest neighbour and is worth nothing anywhere</a:t>
             </a:r>
             <a:endParaRPr lang="en-US" sz="1500" dirty="0"/>
           </a:p>
@@ -5292,7 +5587,7 @@
                   <a:schemeClr val="tx1"/>
                 </a:solidFill>
               </a:rPr>
-              <a:t>The same contrast at one pair of promoters</a:t>
+              <a:t>Age-gained sites are short of that MEF2</a:t>
             </a:r>
             <a:endParaRPr lang="en-US" sz="2800" dirty="0"/>
           </a:p>
@@ -5300,7 +5595,7 @@
       </p:sp>
       <p:pic>
         <p:nvPicPr>
-          <p:cNvPr id="3" name="Image 0" descr="/Users/z5162865/WongLab/AlphaGenome_Ap1/Analysis/example_track/example_scan_track.png">    </p:cNvPr>
+          <p:cNvPr id="3" name="Image 0" descr="/Users/z5162865/WongLab/AlphaGenome_Ap1/Analysis/slide_figures/s9_mef2_by_class.png">    </p:cNvPr>
           <p:cNvPicPr>
             <a:picLocks noChangeAspect="1"/>
           </p:cNvPicPr>
@@ -5314,8 +5609,8 @@
         </p:blipFill>
         <p:spPr>
           <a:xfrm>
-            <a:off x="1202961" y="1051560"/>
-            <a:ext cx="9755599" cy="4754880"/>
+            <a:off x="2638189" y="1051560"/>
+            <a:ext cx="6885142" cy="4617720"/>
           </a:xfrm>
           <a:prstGeom prst="rect">
             <a:avLst/>
@@ -5365,7 +5660,7 @@
                   <a:srgbClr val="111111"/>
                 </a:solidFill>
               </a:rPr>
-              <a:t>the stable site has MEF2 abutting its AP-1 motif at 19 bp; the age-gained site has no MEF2 anywhere in the element</a:t>
+              <a:t>Age Up 3.2% against 10.5% of its matched controls, Exercise Down 1.2% against 9.8% — and the deficit is sharper when only the MEF2 the model uses is counted</a:t>
             </a:r>
             <a:endParaRPr lang="en-US" sz="1500" dirty="0"/>
           </a:p>
@@ -5473,7 +5768,7 @@
                   <a:schemeClr val="tx1"/>
                 </a:solidFill>
               </a:rPr>
-              <a:t>Responsive sites spread their dependence out</a:t>
+              <a:t>The same contrast at one pair of promoters</a:t>
             </a:r>
             <a:endParaRPr lang="en-US" sz="2800" dirty="0"/>
           </a:p>
@@ -5481,7 +5776,7 @@
       </p:sp>
       <p:pic>
         <p:nvPicPr>
-          <p:cNvPr id="3" name="Image 0" descr="/Users/z5162865/WongLab/AlphaGenome_Ap1/Analysis/slide_figures/s3_dependence.png">    </p:cNvPr>
+          <p:cNvPr id="3" name="Image 0" descr="/Users/z5162865/WongLab/AlphaGenome_Ap1/Analysis/example_track/example_scan_track.png">    </p:cNvPr>
           <p:cNvPicPr>
             <a:picLocks noChangeAspect="1"/>
           </p:cNvPicPr>
@@ -5495,8 +5790,8 @@
         </p:blipFill>
         <p:spPr>
           <a:xfrm>
-            <a:off x="735892" y="1051560"/>
-            <a:ext cx="10689736" cy="4617720"/>
+            <a:off x="1202961" y="1051560"/>
+            <a:ext cx="9755599" cy="4754880"/>
           </a:xfrm>
           <a:prstGeom prst="rect">
             <a:avLst/>
@@ -5546,7 +5841,7 @@
                   <a:srgbClr val="111111"/>
                 </a:solidFill>
               </a:rPr>
-              <a:t>the same shift in every class and on all three measures — strongest in Age Up and Exercise Down, absent only in Age Down</a:t>
+              <a:t>the stable site has MEF2 abutting its AP-1 motif at 19 bp; the age-gained site has no MEF2 anywhere in the element</a:t>
             </a:r>
             <a:endParaRPr lang="en-US" sz="1500" dirty="0"/>
           </a:p>
@@ -5654,7 +5949,7 @@
                   <a:schemeClr val="tx1"/>
                 </a:solidFill>
               </a:rPr>
-              <a:t>Motif strength is a switch; position is a dial</a:t>
+              <a:t>Responsive sites spread their dependence out</a:t>
             </a:r>
             <a:endParaRPr lang="en-US" sz="2800" dirty="0"/>
           </a:p>
@@ -5662,7 +5957,7 @@
       </p:sp>
       <p:pic>
         <p:nvPicPr>
-          <p:cNvPr id="3" name="Image 0" descr="/Users/z5162865/WongLab/AlphaGenome_Ap1/Analysis/slide_figures/d_titr.png">    </p:cNvPr>
+          <p:cNvPr id="3" name="Image 0" descr="/Users/z5162865/WongLab/AlphaGenome_Ap1/Analysis/slide_figures/s3_dependence.png">    </p:cNvPr>
           <p:cNvPicPr>
             <a:picLocks noChangeAspect="1"/>
           </p:cNvPicPr>
@@ -5676,41 +5971,17 @@
         </p:blipFill>
         <p:spPr>
           <a:xfrm>
-            <a:off x="565042" y="960120"/>
-            <a:ext cx="7099516" cy="1005840"/>
+            <a:off x="502920" y="1177741"/>
+            <a:ext cx="11155680" cy="4365358"/>
           </a:xfrm>
           <a:prstGeom prst="rect">
             <a:avLst/>
           </a:prstGeom>
         </p:spPr>
       </p:pic>
-      <p:pic>
-        <p:nvPicPr>
-          <p:cNvPr id="4" name="Image 1" descr="/Users/z5162865/WongLab/AlphaGenome_Ap1/Analysis/slide_figures/s4_titration.png">    </p:cNvPr>
-          <p:cNvPicPr>
-            <a:picLocks noChangeAspect="1"/>
-          </p:cNvPicPr>
-          <p:nvPr/>
-        </p:nvPicPr>
-        <p:blipFill>
-          <a:blip r:embed="rId2"/>
-          <a:stretch>
-            <a:fillRect/>
-          </a:stretch>
-        </p:blipFill>
-        <p:spPr>
-          <a:xfrm>
-            <a:off x="502920" y="2095594"/>
-            <a:ext cx="11155680" cy="3535492"/>
-          </a:xfrm>
-          <a:prstGeom prst="rect">
-            <a:avLst/>
-          </a:prstGeom>
-        </p:spPr>
-      </p:pic>
-      <p:sp>
-        <p:nvSpPr>
-          <p:cNvPr id="5" name="Text 0"/>
+      <p:sp>
+        <p:nvSpPr>
+          <p:cNvPr id="4" name="Text 0"/>
           <p:cNvSpPr/>
           <p:nvPr>
             <p:ph idx="101" type="body" hasCustomPrompt="1"/>
@@ -5751,7 +6022,7 @@
                   <a:srgbClr val="111111"/>
                 </a:solidFill>
               </a:rPr>
-              <a:t>one wrong base costs −0.45 of the −0.56 total and a moved motif recovers only a third — but every class titrates the same way</a:t>
+              <a:t>the same shift in every class and on all three measures — strongest in Age Up and Exercise Down, absent only in Age Down</a:t>
             </a:r>
             <a:endParaRPr lang="en-US" sz="1500" dirty="0"/>
           </a:p>

--- a/Analysis/AP1_AlphaGenome_results.pptx
+++ b/Analysis/AP1_AlphaGenome_results.pptx
@@ -120,18 +120,18 @@
   <p:extLst>
     <p:ext uri="{521415D9-36F7-43E2-AB2F-B90AF26B5E84}">
       <p14:sectionLst xmlns:p14="http://schemas.microsoft.com/office/powerpoint/2010/main">
-        <p14:section name="Opening" id="{94dd5554-4130-fc08-c4a5-5ee2c95ed81a}">
+        <p14:section name="Opening" id="{9828b441-2f2f-c7b3-610c-50ceb5423075}">
           <p14:sldIdLst>
             <p14:sldId id="256"/>
           </p14:sldIdLst>
         </p14:section>
-        <p14:section name="Design" id="{cdc6e86f-f7ca-69bb-f872-186f85f7f638}">
+        <p14:section name="Design" id="{c3967755-fcb0-39e5-aa69-e82e2ba3e3a1}">
           <p14:sldIdLst>
             <p14:sldId id="257"/>
             <p14:sldId id="258"/>
           </p14:sldIdLst>
         </p14:section>
-        <p14:section name="Findings" id="{6cf14f4c-6d9a-0e5c-db6e-46d0bc1bec20}">
+        <p14:section name="Findings" id="{c49a37c9-7616-8758-b3dd-5c3c18301831}">
           <p14:sldIdLst>
             <p14:sldId id="259"/>
             <p14:sldId id="260"/>
@@ -144,7 +144,7 @@
             <p14:sldId id="267"/>
           </p14:sldIdLst>
         </p14:section>
-        <p14:section name="Conclusion" id="{54e7a206-5c2b-ef3d-ae80-8713e839de66}">
+        <p14:section name="Conclusion" id="{199aa5b4-fc81-7375-4d65-010333400a35}">
           <p14:sldIdLst>
             <p14:sldId id="268"/>
             <p14:sldId id="269"/>
@@ -2756,9 +2756,45 @@
           </a:p>
         </p:txBody>
       </p:sp>
+      <p:sp>
+        <p:nvSpPr>
+          <p:cNvPr id="3" name="dose-title"/>
+          <p:cNvSpPr txBox="1"/>
+          <p:nvPr/>
+        </p:nvSpPr>
+        <p:spPr>
+          <a:xfrm>
+            <a:off x="502920" y="1024128"/>
+            <a:ext cx="2377440" cy="274320"/>
+          </a:xfrm>
+          <a:prstGeom prst="rect">
+            <a:avLst/>
+          </a:prstGeom>
+          <a:noFill/>
+          <a:ln/>
+        </p:spPr>
+        <p:txBody>
+          <a:bodyPr wrap="square" lIns="0" tIns="0" rIns="0" bIns="0" rtlCol="0" anchor="ctr"/>
+          <a:lstStyle/>
+          <a:p>
+            <a:pPr indent="0" marL="0">
+              <a:buNone/>
+            </a:pPr>
+            <a:r>
+              <a:rPr lang="en-US" sz="1250" b="1" dirty="0">
+                <a:solidFill>
+                  <a:srgbClr val="111111"/>
+                </a:solidFill>
+              </a:rPr>
+              <a:t>The dose curve, class by class</a:t>
+            </a:r>
+            <a:endParaRPr lang="en-US" sz="1250" dirty="0"/>
+          </a:p>
+        </p:txBody>
+      </p:sp>
       <p:pic>
         <p:nvPicPr>
-          <p:cNvPr id="3" name="Image 0" descr="/Users/z5162865/WongLab/AlphaGenome_Ap1/Analysis/slide_figures/d_titr.png">    </p:cNvPr>
+          <p:cNvPr id="4" name="Image 0" descr="/Users/z5162865/WongLab/AlphaGenome_Ap1/Analysis/slide_figures/panels/d_dose.png">    </p:cNvPr>
           <p:cNvPicPr>
             <a:picLocks noChangeAspect="1"/>
           </p:cNvPicPr>
@@ -2772,17 +2808,53 @@
         </p:blipFill>
         <p:spPr>
           <a:xfrm>
-            <a:off x="565042" y="960120"/>
-            <a:ext cx="7099516" cy="1005840"/>
+            <a:off x="502920" y="1330936"/>
+            <a:ext cx="2286000" cy="1681529"/>
           </a:xfrm>
           <a:prstGeom prst="rect">
             <a:avLst/>
           </a:prstGeom>
         </p:spPr>
       </p:pic>
+      <p:sp>
+        <p:nvSpPr>
+          <p:cNvPr id="5" name="copy-title"/>
+          <p:cNvSpPr txBox="1"/>
+          <p:nvPr/>
+        </p:nvSpPr>
+        <p:spPr>
+          <a:xfrm>
+            <a:off x="502920" y="3127248"/>
+            <a:ext cx="2377440" cy="274320"/>
+          </a:xfrm>
+          <a:prstGeom prst="rect">
+            <a:avLst/>
+          </a:prstGeom>
+          <a:noFill/>
+          <a:ln/>
+        </p:spPr>
+        <p:txBody>
+          <a:bodyPr wrap="square" lIns="0" tIns="0" rIns="0" bIns="0" rtlCol="0" anchor="ctr"/>
+          <a:lstStyle/>
+          <a:p>
+            <a:pPr indent="0" marL="0">
+              <a:buNone/>
+            </a:pPr>
+            <a:r>
+              <a:rPr lang="en-US" sz="1250" b="1" dirty="0">
+                <a:solidFill>
+                  <a:srgbClr val="111111"/>
+                </a:solidFill>
+              </a:rPr>
+              <a:t>Where a second copy helps</a:t>
+            </a:r>
+            <a:endParaRPr lang="en-US" sz="1250" dirty="0"/>
+          </a:p>
+        </p:txBody>
+      </p:sp>
       <p:pic>
         <p:nvPicPr>
-          <p:cNvPr id="4" name="Image 1" descr="/Users/z5162865/WongLab/AlphaGenome_Ap1/Analysis/slide_figures/s4_titration.png">    </p:cNvPr>
+          <p:cNvPr id="6" name="Image 1" descr="/Users/z5162865/WongLab/AlphaGenome_Ap1/Analysis/slide_figures/panels/d_addcopy.png">    </p:cNvPr>
           <p:cNvPicPr>
             <a:picLocks noChangeAspect="1"/>
           </p:cNvPicPr>
@@ -2796,8 +2868,8 @@
         </p:blipFill>
         <p:spPr>
           <a:xfrm>
-            <a:off x="1254995" y="1965960"/>
-            <a:ext cx="9651530" cy="3794760"/>
+            <a:off x="544696" y="3429000"/>
+            <a:ext cx="2202449" cy="1691640"/>
           </a:xfrm>
           <a:prstGeom prst="rect">
             <a:avLst/>
@@ -2806,7 +2878,997 @@
       </p:pic>
       <p:sp>
         <p:nvSpPr>
-          <p:cNvPr id="5" name="Text 0"/>
+          <p:cNvPr id="7" name="curve-caption"/>
+          <p:cNvSpPr txBox="1"/>
+          <p:nvPr/>
+        </p:nvSpPr>
+        <p:spPr>
+          <a:xfrm>
+            <a:off x="502920" y="5166360"/>
+            <a:ext cx="2468880" cy="457200"/>
+          </a:xfrm>
+          <a:prstGeom prst="rect">
+            <a:avLst/>
+          </a:prstGeom>
+          <a:noFill/>
+          <a:ln/>
+        </p:spPr>
+        <p:txBody>
+          <a:bodyPr wrap="square" lIns="0" tIns="0" rIns="0" bIns="0" rtlCol="0" anchor="ctr"/>
+          <a:lstStyle/>
+          <a:p>
+            <a:pPr indent="0" marL="0">
+              <a:buNone/>
+            </a:pPr>
+            <a:r>
+              <a:rPr lang="en-US" sz="950" dirty="0">
+                <a:solidFill>
+                  <a:srgbClr val="595959"/>
+                </a:solidFill>
+              </a:rPr>
+              <a:t>both curves drawn once per class; colours as in the legend</a:t>
+            </a:r>
+            <a:endParaRPr lang="en-US" sz="950" dirty="0"/>
+          </a:p>
+        </p:txBody>
+      </p:sp>
+      <p:sp>
+        <p:nvSpPr>
+          <p:cNvPr id="8" name="s4_titration-title-0"/>
+          <p:cNvSpPr txBox="1"/>
+          <p:nvPr/>
+        </p:nvSpPr>
+        <p:spPr>
+          <a:xfrm>
+            <a:off x="3995928" y="1005840"/>
+            <a:ext cx="1842516" cy="438912"/>
+          </a:xfrm>
+          <a:prstGeom prst="rect">
+            <a:avLst/>
+          </a:prstGeom>
+          <a:noFill/>
+          <a:ln/>
+        </p:spPr>
+        <p:txBody>
+          <a:bodyPr wrap="square" lIns="0" tIns="0" rIns="0" bIns="0" rtlCol="0" anchor="t"/>
+          <a:lstStyle/>
+          <a:p>
+            <a:pPr indent="0" marL="0">
+              <a:buNone/>
+            </a:pPr>
+            <a:r>
+              <a:rPr lang="en-US" sz="1250" b="1" dirty="0">
+                <a:solidFill>
+                  <a:srgbClr val="111111"/>
+                </a:solidFill>
+              </a:rPr>
+              <a:t>One damaged core base</a:t>
+            </a:r>
+            <a:endParaRPr lang="en-US" sz="1250" dirty="0"/>
+          </a:p>
+        </p:txBody>
+      </p:sp>
+      <p:sp>
+        <p:nvSpPr>
+          <p:cNvPr id="9" name="s4_titration-sub-0"/>
+          <p:cNvSpPr txBox="1"/>
+          <p:nvPr/>
+        </p:nvSpPr>
+        <p:spPr>
+          <a:xfrm>
+            <a:off x="3995928" y="1435608"/>
+            <a:ext cx="1842516" cy="310896"/>
+          </a:xfrm>
+          <a:prstGeom prst="rect">
+            <a:avLst/>
+          </a:prstGeom>
+          <a:noFill/>
+          <a:ln/>
+        </p:spPr>
+        <p:txBody>
+          <a:bodyPr wrap="square" lIns="0" tIns="0" rIns="0" bIns="0" rtlCol="0" anchor="t"/>
+          <a:lstStyle/>
+          <a:p>
+            <a:pPr indent="0" marL="0">
+              <a:buNone/>
+            </a:pPr>
+            <a:r>
+              <a:rPr lang="en-US" sz="950" dirty="0">
+                <a:solidFill>
+                  <a:srgbClr val="595959"/>
+                </a:solidFill>
+              </a:rPr>
+              <a:t>TGACTCA with a single base changed</a:t>
+            </a:r>
+            <a:endParaRPr lang="en-US" sz="950" dirty="0"/>
+          </a:p>
+        </p:txBody>
+      </p:sp>
+      <p:pic>
+        <p:nvPicPr>
+          <p:cNvPr id="10" name="Image 2" descr="/Users/z5162865/WongLab/AlphaGenome_Ap1/Analysis/slide_figures/panels/s4_titration_c0_r0.png">    </p:cNvPr>
+          <p:cNvPicPr>
+            <a:picLocks noChangeAspect="1"/>
+          </p:cNvPicPr>
+          <p:nvPr/>
+        </p:nvPicPr>
+        <p:blipFill>
+          <a:blip r:embed="rId3"/>
+          <a:stretch>
+            <a:fillRect/>
+          </a:stretch>
+        </p:blipFill>
+        <p:spPr>
+          <a:xfrm>
+            <a:off x="3995928" y="1902045"/>
+            <a:ext cx="1842516" cy="1170247"/>
+          </a:xfrm>
+          <a:prstGeom prst="rect">
+            <a:avLst/>
+          </a:prstGeom>
+        </p:spPr>
+      </p:pic>
+      <p:pic>
+        <p:nvPicPr>
+          <p:cNvPr id="11" name="Image 3" descr="/Users/z5162865/WongLab/AlphaGenome_Ap1/Analysis/slide_figures/panels/s4_titration_c0_r1.png">    </p:cNvPr>
+          <p:cNvPicPr>
+            <a:picLocks noChangeAspect="1"/>
+          </p:cNvPicPr>
+          <p:nvPr/>
+        </p:nvPicPr>
+        <p:blipFill>
+          <a:blip r:embed="rId4"/>
+          <a:stretch>
+            <a:fillRect/>
+          </a:stretch>
+        </p:blipFill>
+        <p:spPr>
+          <a:xfrm>
+            <a:off x="3995928" y="3438237"/>
+            <a:ext cx="1842516" cy="1170247"/>
+          </a:xfrm>
+          <a:prstGeom prst="rect">
+            <a:avLst/>
+          </a:prstGeom>
+        </p:spPr>
+      </p:pic>
+      <p:sp>
+        <p:nvSpPr>
+          <p:cNvPr id="12" name="s4_titration-title-1"/>
+          <p:cNvSpPr txBox="1"/>
+          <p:nvPr/>
+        </p:nvSpPr>
+        <p:spPr>
+          <a:xfrm>
+            <a:off x="5911596" y="1005840"/>
+            <a:ext cx="1842516" cy="438912"/>
+          </a:xfrm>
+          <a:prstGeom prst="rect">
+            <a:avLst/>
+          </a:prstGeom>
+          <a:noFill/>
+          <a:ln/>
+        </p:spPr>
+        <p:txBody>
+          <a:bodyPr wrap="square" lIns="0" tIns="0" rIns="0" bIns="0" rtlCol="0" anchor="t"/>
+          <a:lstStyle/>
+          <a:p>
+            <a:pPr indent="0" marL="0">
+              <a:buNone/>
+            </a:pPr>
+            <a:r>
+              <a:rPr lang="en-US" sz="1250" b="1" dirty="0">
+                <a:solidFill>
+                  <a:srgbClr val="111111"/>
+                </a:solidFill>
+              </a:rPr>
+              <a:t>All seven core bases</a:t>
+            </a:r>
+            <a:endParaRPr lang="en-US" sz="1250" dirty="0"/>
+          </a:p>
+        </p:txBody>
+      </p:sp>
+      <p:sp>
+        <p:nvSpPr>
+          <p:cNvPr id="13" name="s4_titration-sub-1"/>
+          <p:cNvSpPr txBox="1"/>
+          <p:nvPr/>
+        </p:nvSpPr>
+        <p:spPr>
+          <a:xfrm>
+            <a:off x="5911596" y="1435608"/>
+            <a:ext cx="1842516" cy="310896"/>
+          </a:xfrm>
+          <a:prstGeom prst="rect">
+            <a:avLst/>
+          </a:prstGeom>
+          <a:noFill/>
+          <a:ln/>
+        </p:spPr>
+        <p:txBody>
+          <a:bodyPr wrap="square" lIns="0" tIns="0" rIns="0" bIns="0" rtlCol="0" anchor="t"/>
+          <a:lstStyle/>
+          <a:p>
+            <a:pPr indent="0" marL="0">
+              <a:buNone/>
+            </a:pPr>
+            <a:r>
+              <a:rPr lang="en-US" sz="950" dirty="0">
+                <a:solidFill>
+                  <a:srgbClr val="595959"/>
+                </a:solidFill>
+              </a:rPr>
+              <a:t>the motif destroyed outright</a:t>
+            </a:r>
+            <a:endParaRPr lang="en-US" sz="950" dirty="0"/>
+          </a:p>
+        </p:txBody>
+      </p:sp>
+      <p:pic>
+        <p:nvPicPr>
+          <p:cNvPr id="14" name="Image 4" descr="/Users/z5162865/WongLab/AlphaGenome_Ap1/Analysis/slide_figures/panels/s4_titration_c1_r0.png">    </p:cNvPr>
+          <p:cNvPicPr>
+            <a:picLocks noChangeAspect="1"/>
+          </p:cNvPicPr>
+          <p:nvPr/>
+        </p:nvPicPr>
+        <p:blipFill>
+          <a:blip r:embed="rId5"/>
+          <a:stretch>
+            <a:fillRect/>
+          </a:stretch>
+        </p:blipFill>
+        <p:spPr>
+          <a:xfrm>
+            <a:off x="5911596" y="1902045"/>
+            <a:ext cx="1842516" cy="1170247"/>
+          </a:xfrm>
+          <a:prstGeom prst="rect">
+            <a:avLst/>
+          </a:prstGeom>
+        </p:spPr>
+      </p:pic>
+      <p:pic>
+        <p:nvPicPr>
+          <p:cNvPr id="15" name="Image 5" descr="/Users/z5162865/WongLab/AlphaGenome_Ap1/Analysis/slide_figures/panels/s4_titration_c1_r1.png">    </p:cNvPr>
+          <p:cNvPicPr>
+            <a:picLocks noChangeAspect="1"/>
+          </p:cNvPicPr>
+          <p:nvPr/>
+        </p:nvPicPr>
+        <p:blipFill>
+          <a:blip r:embed="rId6"/>
+          <a:stretch>
+            <a:fillRect/>
+          </a:stretch>
+        </p:blipFill>
+        <p:spPr>
+          <a:xfrm>
+            <a:off x="5911596" y="3438237"/>
+            <a:ext cx="1842516" cy="1170247"/>
+          </a:xfrm>
+          <a:prstGeom prst="rect">
+            <a:avLst/>
+          </a:prstGeom>
+        </p:spPr>
+      </p:pic>
+      <p:sp>
+        <p:nvSpPr>
+          <p:cNvPr id="16" name="s4_titration-title-2"/>
+          <p:cNvSpPr txBox="1"/>
+          <p:nvPr/>
+        </p:nvSpPr>
+        <p:spPr>
+          <a:xfrm>
+            <a:off x="7827264" y="1005840"/>
+            <a:ext cx="1842516" cy="438912"/>
+          </a:xfrm>
+          <a:prstGeom prst="rect">
+            <a:avLst/>
+          </a:prstGeom>
+          <a:noFill/>
+          <a:ln/>
+        </p:spPr>
+        <p:txBody>
+          <a:bodyPr wrap="square" lIns="0" tIns="0" rIns="0" bIns="0" rtlCol="0" anchor="t"/>
+          <a:lstStyle/>
+          <a:p>
+            <a:pPr indent="0" marL="0">
+              <a:buNone/>
+            </a:pPr>
+            <a:r>
+              <a:rPr lang="en-US" sz="1250" b="1" dirty="0">
+                <a:solidFill>
+                  <a:srgbClr val="111111"/>
+                </a:solidFill>
+              </a:rPr>
+              <a:t>A second copy added</a:t>
+            </a:r>
+            <a:endParaRPr lang="en-US" sz="1250" dirty="0"/>
+          </a:p>
+        </p:txBody>
+      </p:sp>
+      <p:sp>
+        <p:nvSpPr>
+          <p:cNvPr id="17" name="s4_titration-sub-2"/>
+          <p:cNvSpPr txBox="1"/>
+          <p:nvPr/>
+        </p:nvSpPr>
+        <p:spPr>
+          <a:xfrm>
+            <a:off x="7827264" y="1435608"/>
+            <a:ext cx="1842516" cy="310896"/>
+          </a:xfrm>
+          <a:prstGeom prst="rect">
+            <a:avLst/>
+          </a:prstGeom>
+          <a:noFill/>
+          <a:ln/>
+        </p:spPr>
+        <p:txBody>
+          <a:bodyPr wrap="square" lIns="0" tIns="0" rIns="0" bIns="0" rtlCol="0" anchor="t"/>
+          <a:lstStyle/>
+          <a:p>
+            <a:pPr indent="0" marL="0">
+              <a:buNone/>
+            </a:pPr>
+            <a:r>
+              <a:rPr lang="en-US" sz="950" dirty="0">
+                <a:solidFill>
+                  <a:srgbClr val="595959"/>
+                </a:solidFill>
+              </a:rPr>
+              <a:t>net of a shuffled-sequence control</a:t>
+            </a:r>
+            <a:endParaRPr lang="en-US" sz="950" dirty="0"/>
+          </a:p>
+        </p:txBody>
+      </p:sp>
+      <p:pic>
+        <p:nvPicPr>
+          <p:cNvPr id="18" name="Image 6" descr="/Users/z5162865/WongLab/AlphaGenome_Ap1/Analysis/slide_figures/panels/s4_titration_c2_r0.png">    </p:cNvPr>
+          <p:cNvPicPr>
+            <a:picLocks noChangeAspect="1"/>
+          </p:cNvPicPr>
+          <p:nvPr/>
+        </p:nvPicPr>
+        <p:blipFill>
+          <a:blip r:embed="rId7"/>
+          <a:stretch>
+            <a:fillRect/>
+          </a:stretch>
+        </p:blipFill>
+        <p:spPr>
+          <a:xfrm>
+            <a:off x="7827264" y="1902045"/>
+            <a:ext cx="1842516" cy="1170247"/>
+          </a:xfrm>
+          <a:prstGeom prst="rect">
+            <a:avLst/>
+          </a:prstGeom>
+        </p:spPr>
+      </p:pic>
+      <p:pic>
+        <p:nvPicPr>
+          <p:cNvPr id="19" name="Image 7" descr="/Users/z5162865/WongLab/AlphaGenome_Ap1/Analysis/slide_figures/panels/s4_titration_c2_r1.png">    </p:cNvPr>
+          <p:cNvPicPr>
+            <a:picLocks noChangeAspect="1"/>
+          </p:cNvPicPr>
+          <p:nvPr/>
+        </p:nvPicPr>
+        <p:blipFill>
+          <a:blip r:embed="rId8"/>
+          <a:stretch>
+            <a:fillRect/>
+          </a:stretch>
+        </p:blipFill>
+        <p:spPr>
+          <a:xfrm>
+            <a:off x="7827264" y="3438237"/>
+            <a:ext cx="1842516" cy="1170247"/>
+          </a:xfrm>
+          <a:prstGeom prst="rect">
+            <a:avLst/>
+          </a:prstGeom>
+        </p:spPr>
+      </p:pic>
+      <p:sp>
+        <p:nvSpPr>
+          <p:cNvPr id="20" name="s4_titration-title-3"/>
+          <p:cNvSpPr txBox="1"/>
+          <p:nvPr/>
+        </p:nvSpPr>
+        <p:spPr>
+          <a:xfrm>
+            <a:off x="9742932" y="1005840"/>
+            <a:ext cx="1842516" cy="438912"/>
+          </a:xfrm>
+          <a:prstGeom prst="rect">
+            <a:avLst/>
+          </a:prstGeom>
+          <a:noFill/>
+          <a:ln/>
+        </p:spPr>
+        <p:txBody>
+          <a:bodyPr wrap="square" lIns="0" tIns="0" rIns="0" bIns="0" rtlCol="0" anchor="t"/>
+          <a:lstStyle/>
+          <a:p>
+            <a:pPr indent="0" marL="0">
+              <a:buNone/>
+            </a:pPr>
+            <a:r>
+              <a:rPr lang="en-US" sz="1250" b="1" dirty="0">
+                <a:solidFill>
+                  <a:srgbClr val="111111"/>
+                </a:solidFill>
+              </a:rPr>
+              <a:t>The motif moved elsewhere</a:t>
+            </a:r>
+            <a:endParaRPr lang="en-US" sz="1250" dirty="0"/>
+          </a:p>
+        </p:txBody>
+      </p:sp>
+      <p:sp>
+        <p:nvSpPr>
+          <p:cNvPr id="21" name="s4_titration-sub-3"/>
+          <p:cNvSpPr txBox="1"/>
+          <p:nvPr/>
+        </p:nvSpPr>
+        <p:spPr>
+          <a:xfrm>
+            <a:off x="9742932" y="1435608"/>
+            <a:ext cx="1842516" cy="310896"/>
+          </a:xfrm>
+          <a:prstGeom prst="rect">
+            <a:avLst/>
+          </a:prstGeom>
+          <a:noFill/>
+          <a:ln/>
+        </p:spPr>
+        <p:txBody>
+          <a:bodyPr wrap="square" lIns="0" tIns="0" rIns="0" bIns="0" rtlCol="0" anchor="t"/>
+          <a:lstStyle/>
+          <a:p>
+            <a:pPr indent="0" marL="0">
+              <a:buNone/>
+            </a:pPr>
+            <a:r>
+              <a:rPr lang="en-US" sz="950" dirty="0">
+                <a:solidFill>
+                  <a:srgbClr val="595959"/>
+                </a:solidFill>
+              </a:rPr>
+              <a:t>net of the same control</a:t>
+            </a:r>
+            <a:endParaRPr lang="en-US" sz="950" dirty="0"/>
+          </a:p>
+        </p:txBody>
+      </p:sp>
+      <p:pic>
+        <p:nvPicPr>
+          <p:cNvPr id="22" name="Image 8" descr="/Users/z5162865/WongLab/AlphaGenome_Ap1/Analysis/slide_figures/panels/s4_titration_c3_r0.png">    </p:cNvPr>
+          <p:cNvPicPr>
+            <a:picLocks noChangeAspect="1"/>
+          </p:cNvPicPr>
+          <p:nvPr/>
+        </p:nvPicPr>
+        <p:blipFill>
+          <a:blip r:embed="rId9"/>
+          <a:stretch>
+            <a:fillRect/>
+          </a:stretch>
+        </p:blipFill>
+        <p:spPr>
+          <a:xfrm>
+            <a:off x="9742932" y="1902045"/>
+            <a:ext cx="1842516" cy="1170247"/>
+          </a:xfrm>
+          <a:prstGeom prst="rect">
+            <a:avLst/>
+          </a:prstGeom>
+        </p:spPr>
+      </p:pic>
+      <p:pic>
+        <p:nvPicPr>
+          <p:cNvPr id="23" name="Image 9" descr="/Users/z5162865/WongLab/AlphaGenome_Ap1/Analysis/slide_figures/panels/s4_titration_c3_r1.png">    </p:cNvPr>
+          <p:cNvPicPr>
+            <a:picLocks noChangeAspect="1"/>
+          </p:cNvPicPr>
+          <p:nvPr/>
+        </p:nvPicPr>
+        <p:blipFill>
+          <a:blip r:embed="rId10"/>
+          <a:stretch>
+            <a:fillRect/>
+          </a:stretch>
+        </p:blipFill>
+        <p:spPr>
+          <a:xfrm>
+            <a:off x="9742932" y="3438237"/>
+            <a:ext cx="1842516" cy="1170247"/>
+          </a:xfrm>
+          <a:prstGeom prst="rect">
+            <a:avLst/>
+          </a:prstGeom>
+        </p:spPr>
+      </p:pic>
+      <p:sp>
+        <p:nvSpPr>
+          <p:cNvPr id="24" name="s4_titration-row-0"/>
+          <p:cNvSpPr txBox="1"/>
+          <p:nvPr/>
+        </p:nvSpPr>
+        <p:spPr>
+          <a:xfrm rot="16200000">
+            <a:off x="2953512" y="1837944"/>
+            <a:ext cx="1371600" cy="1371600"/>
+          </a:xfrm>
+          <a:prstGeom prst="rect">
+            <a:avLst/>
+          </a:prstGeom>
+          <a:noFill/>
+          <a:ln/>
+        </p:spPr>
+        <p:txBody>
+          <a:bodyPr wrap="square" lIns="0" tIns="0" rIns="0" bIns="0" rtlCol="0" anchor="ctr"/>
+          <a:lstStyle/>
+          <a:p>
+            <a:pPr algn="ctr" indent="0" marL="0">
+              <a:buNone/>
+            </a:pPr>
+            <a:r>
+              <a:rPr lang="en-US" sz="1000" dirty="0">
+                <a:solidFill>
+                  <a:srgbClr val="111111"/>
+                </a:solidFill>
+              </a:rPr>
+              <a:t>all sites, nothing controlled</a:t>
+            </a:r>
+            <a:endParaRPr lang="en-US" sz="1000" dirty="0"/>
+          </a:p>
+        </p:txBody>
+      </p:sp>
+      <p:sp>
+        <p:nvSpPr>
+          <p:cNvPr id="25" name="s4_titration-row-1"/>
+          <p:cNvSpPr txBox="1"/>
+          <p:nvPr/>
+        </p:nvSpPr>
+        <p:spPr>
+          <a:xfrm rot="16200000">
+            <a:off x="2953512" y="3374136"/>
+            <a:ext cx="1371600" cy="1371600"/>
+          </a:xfrm>
+          <a:prstGeom prst="rect">
+            <a:avLst/>
+          </a:prstGeom>
+          <a:noFill/>
+          <a:ln/>
+        </p:spPr>
+        <p:txBody>
+          <a:bodyPr wrap="square" lIns="0" tIns="0" rIns="0" bIns="0" rtlCol="0" anchor="ctr"/>
+          <a:lstStyle/>
+          <a:p>
+            <a:pPr algn="ctr" indent="0" marL="0">
+              <a:buNone/>
+            </a:pPr>
+            <a:r>
+              <a:rPr lang="en-US" sz="1000" dirty="0">
+                <a:solidFill>
+                  <a:srgbClr val="111111"/>
+                </a:solidFill>
+              </a:rPr>
+              <a:t>each class against its own matched Stable controls</a:t>
+            </a:r>
+            <a:endParaRPr lang="en-US" sz="1000" dirty="0"/>
+          </a:p>
+        </p:txBody>
+      </p:sp>
+      <p:sp>
+        <p:nvSpPr>
+          <p:cNvPr id="26" name="s4_titration-dot-0"/>
+          <p:cNvSpPr/>
+          <p:nvPr/>
+        </p:nvSpPr>
+        <p:spPr>
+          <a:xfrm>
+            <a:off x="3995928" y="4960620"/>
+            <a:ext cx="109728" cy="109728"/>
+          </a:xfrm>
+          <a:prstGeom prst="ellipse">
+            <a:avLst/>
+          </a:prstGeom>
+          <a:solidFill>
+            <a:srgbClr val="4F4F4F"/>
+          </a:solidFill>
+          <a:ln w="12700">
+            <a:solidFill>
+              <a:srgbClr val="4F4F4F"/>
+            </a:solidFill>
+            <a:prstDash val="solid"/>
+          </a:ln>
+        </p:spPr>
+      </p:sp>
+      <p:sp>
+        <p:nvSpPr>
+          <p:cNvPr id="27" name="s4_titration-leg-0"/>
+          <p:cNvSpPr txBox="1"/>
+          <p:nvPr/>
+        </p:nvSpPr>
+        <p:spPr>
+          <a:xfrm>
+            <a:off x="4151376" y="4919472"/>
+            <a:ext cx="1057046" cy="201168"/>
+          </a:xfrm>
+          <a:prstGeom prst="rect">
+            <a:avLst/>
+          </a:prstGeom>
+          <a:noFill/>
+          <a:ln/>
+        </p:spPr>
+        <p:txBody>
+          <a:bodyPr wrap="square" lIns="0" tIns="0" rIns="0" bIns="0" rtlCol="0" anchor="ctr"/>
+          <a:lstStyle/>
+          <a:p>
+            <a:pPr indent="0" marL="0">
+              <a:buNone/>
+            </a:pPr>
+            <a:r>
+              <a:rPr lang="en-US" sz="1050" dirty="0">
+                <a:solidFill>
+                  <a:srgbClr val="111111"/>
+                </a:solidFill>
+              </a:rPr>
+              <a:t>Dynamic (all)</a:t>
+            </a:r>
+            <a:endParaRPr lang="en-US" sz="1050" dirty="0"/>
+          </a:p>
+        </p:txBody>
+      </p:sp>
+      <p:sp>
+        <p:nvSpPr>
+          <p:cNvPr id="28" name="s4_titration-dot-1"/>
+          <p:cNvSpPr/>
+          <p:nvPr/>
+        </p:nvSpPr>
+        <p:spPr>
+          <a:xfrm>
+            <a:off x="5318150" y="4960620"/>
+            <a:ext cx="109728" cy="109728"/>
+          </a:xfrm>
+          <a:prstGeom prst="ellipse">
+            <a:avLst/>
+          </a:prstGeom>
+          <a:solidFill>
+            <a:srgbClr val="C2551C"/>
+          </a:solidFill>
+          <a:ln w="12700">
+            <a:solidFill>
+              <a:srgbClr val="C2551C"/>
+            </a:solidFill>
+            <a:prstDash val="solid"/>
+          </a:ln>
+        </p:spPr>
+      </p:sp>
+      <p:sp>
+        <p:nvSpPr>
+          <p:cNvPr id="29" name="s4_titration-leg-1"/>
+          <p:cNvSpPr txBox="1"/>
+          <p:nvPr/>
+        </p:nvSpPr>
+        <p:spPr>
+          <a:xfrm>
+            <a:off x="5473598" y="4919472"/>
+            <a:ext cx="596189" cy="201168"/>
+          </a:xfrm>
+          <a:prstGeom prst="rect">
+            <a:avLst/>
+          </a:prstGeom>
+          <a:noFill/>
+          <a:ln/>
+        </p:spPr>
+        <p:txBody>
+          <a:bodyPr wrap="square" lIns="0" tIns="0" rIns="0" bIns="0" rtlCol="0" anchor="ctr"/>
+          <a:lstStyle/>
+          <a:p>
+            <a:pPr indent="0" marL="0">
+              <a:buNone/>
+            </a:pPr>
+            <a:r>
+              <a:rPr lang="en-US" sz="1050" dirty="0">
+                <a:solidFill>
+                  <a:srgbClr val="111111"/>
+                </a:solidFill>
+              </a:rPr>
+              <a:t>Age Up</a:t>
+            </a:r>
+            <a:endParaRPr lang="en-US" sz="1050" dirty="0"/>
+          </a:p>
+        </p:txBody>
+      </p:sp>
+      <p:sp>
+        <p:nvSpPr>
+          <p:cNvPr id="30" name="s4_titration-dot-2"/>
+          <p:cNvSpPr/>
+          <p:nvPr/>
+        </p:nvSpPr>
+        <p:spPr>
+          <a:xfrm>
+            <a:off x="6179515" y="4960620"/>
+            <a:ext cx="109728" cy="109728"/>
+          </a:xfrm>
+          <a:prstGeom prst="ellipse">
+            <a:avLst/>
+          </a:prstGeom>
+          <a:solidFill>
+            <a:srgbClr val="1F6FB2"/>
+          </a:solidFill>
+          <a:ln w="12700">
+            <a:solidFill>
+              <a:srgbClr val="1F6FB2"/>
+            </a:solidFill>
+            <a:prstDash val="solid"/>
+          </a:ln>
+        </p:spPr>
+      </p:sp>
+      <p:sp>
+        <p:nvSpPr>
+          <p:cNvPr id="31" name="s4_titration-leg-2"/>
+          <p:cNvSpPr txBox="1"/>
+          <p:nvPr/>
+        </p:nvSpPr>
+        <p:spPr>
+          <a:xfrm>
+            <a:off x="6334963" y="4919472"/>
+            <a:ext cx="727862" cy="201168"/>
+          </a:xfrm>
+          <a:prstGeom prst="rect">
+            <a:avLst/>
+          </a:prstGeom>
+          <a:noFill/>
+          <a:ln/>
+        </p:spPr>
+        <p:txBody>
+          <a:bodyPr wrap="square" lIns="0" tIns="0" rIns="0" bIns="0" rtlCol="0" anchor="ctr"/>
+          <a:lstStyle/>
+          <a:p>
+            <a:pPr indent="0" marL="0">
+              <a:buNone/>
+            </a:pPr>
+            <a:r>
+              <a:rPr lang="en-US" sz="1050" dirty="0">
+                <a:solidFill>
+                  <a:srgbClr val="111111"/>
+                </a:solidFill>
+              </a:rPr>
+              <a:t>Age Down</a:t>
+            </a:r>
+            <a:endParaRPr lang="en-US" sz="1050" dirty="0"/>
+          </a:p>
+        </p:txBody>
+      </p:sp>
+      <p:sp>
+        <p:nvSpPr>
+          <p:cNvPr id="32" name="s4_titration-dot-3"/>
+          <p:cNvSpPr/>
+          <p:nvPr/>
+        </p:nvSpPr>
+        <p:spPr>
+          <a:xfrm>
+            <a:off x="7172554" y="4960620"/>
+            <a:ext cx="109728" cy="109728"/>
+          </a:xfrm>
+          <a:prstGeom prst="ellipse">
+            <a:avLst/>
+          </a:prstGeom>
+          <a:solidFill>
+            <a:srgbClr val="2E7D32"/>
+          </a:solidFill>
+          <a:ln w="12700">
+            <a:solidFill>
+              <a:srgbClr val="2E7D32"/>
+            </a:solidFill>
+            <a:prstDash val="solid"/>
+          </a:ln>
+        </p:spPr>
+      </p:sp>
+      <p:sp>
+        <p:nvSpPr>
+          <p:cNvPr id="33" name="s4_titration-leg-3"/>
+          <p:cNvSpPr txBox="1"/>
+          <p:nvPr/>
+        </p:nvSpPr>
+        <p:spPr>
+          <a:xfrm>
+            <a:off x="7328002" y="4919472"/>
+            <a:ext cx="925373" cy="201168"/>
+          </a:xfrm>
+          <a:prstGeom prst="rect">
+            <a:avLst/>
+          </a:prstGeom>
+          <a:noFill/>
+          <a:ln/>
+        </p:spPr>
+        <p:txBody>
+          <a:bodyPr wrap="square" lIns="0" tIns="0" rIns="0" bIns="0" rtlCol="0" anchor="ctr"/>
+          <a:lstStyle/>
+          <a:p>
+            <a:pPr indent="0" marL="0">
+              <a:buNone/>
+            </a:pPr>
+            <a:r>
+              <a:rPr lang="en-US" sz="1050" dirty="0">
+                <a:solidFill>
+                  <a:srgbClr val="111111"/>
+                </a:solidFill>
+              </a:rPr>
+              <a:t>Exercise Up</a:t>
+            </a:r>
+            <a:endParaRPr lang="en-US" sz="1050" dirty="0"/>
+          </a:p>
+        </p:txBody>
+      </p:sp>
+      <p:sp>
+        <p:nvSpPr>
+          <p:cNvPr id="34" name="s4_titration-dot-4"/>
+          <p:cNvSpPr/>
+          <p:nvPr/>
+        </p:nvSpPr>
+        <p:spPr>
+          <a:xfrm>
+            <a:off x="8363102" y="4960620"/>
+            <a:ext cx="109728" cy="109728"/>
+          </a:xfrm>
+          <a:prstGeom prst="ellipse">
+            <a:avLst/>
+          </a:prstGeom>
+          <a:solidFill>
+            <a:srgbClr val="7B3FA0"/>
+          </a:solidFill>
+          <a:ln w="12700">
+            <a:solidFill>
+              <a:srgbClr val="7B3FA0"/>
+            </a:solidFill>
+            <a:prstDash val="solid"/>
+          </a:ln>
+        </p:spPr>
+      </p:sp>
+      <p:sp>
+        <p:nvSpPr>
+          <p:cNvPr id="35" name="s4_titration-leg-4"/>
+          <p:cNvSpPr txBox="1"/>
+          <p:nvPr/>
+        </p:nvSpPr>
+        <p:spPr>
+          <a:xfrm>
+            <a:off x="8518550" y="4919472"/>
+            <a:ext cx="1057046" cy="201168"/>
+          </a:xfrm>
+          <a:prstGeom prst="rect">
+            <a:avLst/>
+          </a:prstGeom>
+          <a:noFill/>
+          <a:ln/>
+        </p:spPr>
+        <p:txBody>
+          <a:bodyPr wrap="square" lIns="0" tIns="0" rIns="0" bIns="0" rtlCol="0" anchor="ctr"/>
+          <a:lstStyle/>
+          <a:p>
+            <a:pPr indent="0" marL="0">
+              <a:buNone/>
+            </a:pPr>
+            <a:r>
+              <a:rPr lang="en-US" sz="1050" dirty="0">
+                <a:solidFill>
+                  <a:srgbClr val="111111"/>
+                </a:solidFill>
+              </a:rPr>
+              <a:t>Exercise Down</a:t>
+            </a:r>
+            <a:endParaRPr lang="en-US" sz="1050" dirty="0"/>
+          </a:p>
+        </p:txBody>
+      </p:sp>
+      <p:sp>
+        <p:nvSpPr>
+          <p:cNvPr id="36" name="s4_titration-dot-5"/>
+          <p:cNvSpPr/>
+          <p:nvPr/>
+        </p:nvSpPr>
+        <p:spPr>
+          <a:xfrm>
+            <a:off x="9685325" y="4960620"/>
+            <a:ext cx="109728" cy="109728"/>
+          </a:xfrm>
+          <a:prstGeom prst="ellipse">
+            <a:avLst/>
+          </a:prstGeom>
+          <a:solidFill>
+            <a:srgbClr val="B3B2AE"/>
+          </a:solidFill>
+          <a:ln w="12700">
+            <a:solidFill>
+              <a:srgbClr val="B3B2AE"/>
+            </a:solidFill>
+            <a:prstDash val="solid"/>
+          </a:ln>
+        </p:spPr>
+      </p:sp>
+      <p:sp>
+        <p:nvSpPr>
+          <p:cNvPr id="37" name="s4_titration-leg-5"/>
+          <p:cNvSpPr txBox="1"/>
+          <p:nvPr/>
+        </p:nvSpPr>
+        <p:spPr>
+          <a:xfrm>
+            <a:off x="9840773" y="4919472"/>
+            <a:ext cx="2373782" cy="201168"/>
+          </a:xfrm>
+          <a:prstGeom prst="rect">
+            <a:avLst/>
+          </a:prstGeom>
+          <a:noFill/>
+          <a:ln/>
+        </p:spPr>
+        <p:txBody>
+          <a:bodyPr wrap="square" lIns="0" tIns="0" rIns="0" bIns="0" rtlCol="0" anchor="ctr"/>
+          <a:lstStyle/>
+          <a:p>
+            <a:pPr indent="0" marL="0">
+              <a:buNone/>
+            </a:pPr>
+            <a:r>
+              <a:rPr lang="en-US" sz="1050" dirty="0">
+                <a:solidFill>
+                  <a:srgbClr val="111111"/>
+                </a:solidFill>
+              </a:rPr>
+              <a:t>Stable (all, or matched controls)</a:t>
+            </a:r>
+            <a:endParaRPr lang="en-US" sz="1050" dirty="0"/>
+          </a:p>
+        </p:txBody>
+      </p:sp>
+      <p:sp>
+        <p:nvSpPr>
+          <p:cNvPr id="38" name="s4_titration-key"/>
+          <p:cNvSpPr txBox="1"/>
+          <p:nvPr/>
+        </p:nvSpPr>
+        <p:spPr>
+          <a:xfrm>
+            <a:off x="3429000" y="5193792"/>
+            <a:ext cx="8229600" cy="502920"/>
+          </a:xfrm>
+          <a:prstGeom prst="rect">
+            <a:avLst/>
+          </a:prstGeom>
+          <a:noFill/>
+          <a:ln/>
+        </p:spPr>
+        <p:txBody>
+          <a:bodyPr wrap="square" lIns="0" tIns="0" rIns="0" bIns="0" rtlCol="0" anchor="ctr"/>
+          <a:lstStyle/>
+          <a:p>
+            <a:pPr indent="0" marL="0">
+              <a:buNone/>
+            </a:pPr>
+            <a:r>
+              <a:rPr lang="en-US" sz="900" dirty="0">
+                <a:solidFill>
+                  <a:srgbClr val="595959"/>
+                </a:solidFill>
+              </a:rPr>
+              <a:t>grey line and band (top row): all Stable sites, median with 95% bootstrap CI.   grey dots (bottom row): that class's own matched Stable controls.   Stars test the class against that reference — Mann–Whitney on all sites, paired Wilcoxon on matched pairs — BH across all 40 tests.   *** p&lt;0.001   ** p&lt;0.01   * p&lt;0.05   ns ≥ 0.05</a:t>
+            </a:r>
+            <a:endParaRPr lang="en-US" sz="900" dirty="0"/>
+          </a:p>
+        </p:txBody>
+      </p:sp>
+      <p:sp>
+        <p:nvSpPr>
+          <p:cNvPr id="39" name="Text 0"/>
           <p:cNvSpPr/>
           <p:nvPr>
             <p:ph idx="101" type="body" hasCustomPrompt="1"/>
@@ -2961,9 +4023,81 @@
           </a:p>
         </p:txBody>
       </p:sp>
+      <p:sp>
+        <p:nvSpPr>
+          <p:cNvPr id="3" name="ag-t1"/>
+          <p:cNvSpPr txBox="1"/>
+          <p:nvPr/>
+        </p:nvSpPr>
+        <p:spPr>
+          <a:xfrm>
+            <a:off x="731520" y="1051560"/>
+            <a:ext cx="7315200" cy="292608"/>
+          </a:xfrm>
+          <a:prstGeom prst="rect">
+            <a:avLst/>
+          </a:prstGeom>
+          <a:noFill/>
+          <a:ln/>
+        </p:spPr>
+        <p:txBody>
+          <a:bodyPr wrap="square" lIns="0" tIns="0" rIns="0" bIns="0" rtlCol="0" anchor="ctr"/>
+          <a:lstStyle/>
+          <a:p>
+            <a:pPr indent="0" marL="0">
+              <a:buNone/>
+            </a:pPr>
+            <a:r>
+              <a:rPr lang="en-US" sz="1350" b="1" dirty="0">
+                <a:solidFill>
+                  <a:srgbClr val="111111"/>
+                </a:solidFill>
+              </a:rPr>
+              <a:t>Age-gained sites respond more to AP-1 dosage, both ways</a:t>
+            </a:r>
+            <a:endParaRPr lang="en-US" sz="1350" dirty="0"/>
+          </a:p>
+        </p:txBody>
+      </p:sp>
+      <p:sp>
+        <p:nvSpPr>
+          <p:cNvPr id="4" name="ag-s1"/>
+          <p:cNvSpPr txBox="1"/>
+          <p:nvPr/>
+        </p:nvSpPr>
+        <p:spPr>
+          <a:xfrm>
+            <a:off x="731520" y="1344168"/>
+            <a:ext cx="7315200" cy="292608"/>
+          </a:xfrm>
+          <a:prstGeom prst="rect">
+            <a:avLst/>
+          </a:prstGeom>
+          <a:noFill/>
+          <a:ln/>
+        </p:spPr>
+        <p:txBody>
+          <a:bodyPr wrap="square" lIns="0" tIns="0" rIns="0" bIns="0" rtlCol="0" anchor="ctr"/>
+          <a:lstStyle/>
+          <a:p>
+            <a:pPr indent="0" marL="0">
+              <a:buNone/>
+            </a:pPr>
+            <a:r>
+              <a:rPr lang="en-US" sz="1050" dirty="0">
+                <a:solidFill>
+                  <a:srgbClr val="595959"/>
+                </a:solidFill>
+              </a:rPr>
+              <a:t>Δscore definition: the top fifth of the change in TOBIAS binding score with age, against matched Unchanged sites</a:t>
+            </a:r>
+            <a:endParaRPr lang="en-US" sz="1050" dirty="0"/>
+          </a:p>
+        </p:txBody>
+      </p:sp>
       <p:pic>
         <p:nvPicPr>
-          <p:cNvPr id="3" name="Image 0" descr="/Users/z5162865/WongLab/AlphaGenome_Ap1/Analysis/slide_figures/s5_age_gained.png">    </p:cNvPr>
+          <p:cNvPr id="5" name="Image 0" descr="/Users/z5162865/WongLab/AlphaGenome_Ap1/Analysis/slide_figures/panels/s5_age_gained.png">    </p:cNvPr>
           <p:cNvPicPr>
             <a:picLocks noChangeAspect="1"/>
           </p:cNvPicPr>
@@ -2977,8 +4111,8 @@
         </p:blipFill>
         <p:spPr>
           <a:xfrm>
-            <a:off x="1466163" y="1097280"/>
-            <a:ext cx="9229194" cy="3794760"/>
+            <a:off x="1429175" y="1737360"/>
+            <a:ext cx="5919890" cy="3017520"/>
           </a:xfrm>
           <a:prstGeom prst="rect">
             <a:avLst/>
@@ -2987,7 +4121,129 @@
       </p:pic>
       <p:sp>
         <p:nvSpPr>
-          <p:cNvPr id="4" name="massaction"/>
+          <p:cNvPr id="6" name="lg-dot-5.3-0"/>
+          <p:cNvSpPr/>
+          <p:nvPr/>
+        </p:nvSpPr>
+        <p:spPr>
+          <a:xfrm>
+            <a:off x="731520" y="4887468"/>
+            <a:ext cx="109728" cy="109728"/>
+          </a:xfrm>
+          <a:prstGeom prst="ellipse">
+            <a:avLst/>
+          </a:prstGeom>
+          <a:solidFill>
+            <a:srgbClr val="B3B2AE"/>
+          </a:solidFill>
+          <a:ln w="12700">
+            <a:solidFill>
+              <a:srgbClr val="B3B2AE"/>
+            </a:solidFill>
+            <a:prstDash val="solid"/>
+          </a:ln>
+        </p:spPr>
+      </p:sp>
+      <p:sp>
+        <p:nvSpPr>
+          <p:cNvPr id="7" name="lg-txt-5.3-0"/>
+          <p:cNvSpPr txBox="1"/>
+          <p:nvPr/>
+        </p:nvSpPr>
+        <p:spPr>
+          <a:xfrm>
+            <a:off x="886968" y="4846320"/>
+            <a:ext cx="1320394" cy="201168"/>
+          </a:xfrm>
+          <a:prstGeom prst="rect">
+            <a:avLst/>
+          </a:prstGeom>
+          <a:noFill/>
+          <a:ln/>
+        </p:spPr>
+        <p:txBody>
+          <a:bodyPr wrap="square" lIns="0" tIns="0" rIns="0" bIns="0" rtlCol="0" anchor="ctr"/>
+          <a:lstStyle/>
+          <a:p>
+            <a:pPr indent="0" marL="0">
+              <a:buNone/>
+            </a:pPr>
+            <a:r>
+              <a:rPr lang="en-US" sz="1050" dirty="0">
+                <a:solidFill>
+                  <a:srgbClr val="111111"/>
+                </a:solidFill>
+              </a:rPr>
+              <a:t>Matched Unchanged</a:t>
+            </a:r>
+            <a:endParaRPr lang="en-US" sz="1050" dirty="0"/>
+          </a:p>
+        </p:txBody>
+      </p:sp>
+      <p:sp>
+        <p:nvSpPr>
+          <p:cNvPr id="8" name="lg-dot-5.3-1"/>
+          <p:cNvSpPr/>
+          <p:nvPr/>
+        </p:nvSpPr>
+        <p:spPr>
+          <a:xfrm>
+            <a:off x="2317090" y="4887468"/>
+            <a:ext cx="109728" cy="109728"/>
+          </a:xfrm>
+          <a:prstGeom prst="ellipse">
+            <a:avLst/>
+          </a:prstGeom>
+          <a:solidFill>
+            <a:srgbClr val="C2551C"/>
+          </a:solidFill>
+          <a:ln w="12700">
+            <a:solidFill>
+              <a:srgbClr val="C2551C"/>
+            </a:solidFill>
+            <a:prstDash val="solid"/>
+          </a:ln>
+        </p:spPr>
+      </p:sp>
+      <p:sp>
+        <p:nvSpPr>
+          <p:cNvPr id="9" name="lg-txt-5.3-1"/>
+          <p:cNvSpPr txBox="1"/>
+          <p:nvPr/>
+        </p:nvSpPr>
+        <p:spPr>
+          <a:xfrm>
+            <a:off x="2472538" y="4846320"/>
+            <a:ext cx="1452067" cy="201168"/>
+          </a:xfrm>
+          <a:prstGeom prst="rect">
+            <a:avLst/>
+          </a:prstGeom>
+          <a:noFill/>
+          <a:ln/>
+        </p:spPr>
+        <p:txBody>
+          <a:bodyPr wrap="square" lIns="0" tIns="0" rIns="0" bIns="0" rtlCol="0" anchor="ctr"/>
+          <a:lstStyle/>
+          <a:p>
+            <a:pPr indent="0" marL="0">
+              <a:buNone/>
+            </a:pPr>
+            <a:r>
+              <a:rPr lang="en-US" sz="1050" dirty="0">
+                <a:solidFill>
+                  <a:srgbClr val="111111"/>
+                </a:solidFill>
+              </a:rPr>
+              <a:t>Age-gained (Δscore)</a:t>
+            </a:r>
+            <a:endParaRPr lang="en-US" sz="1050" dirty="0"/>
+          </a:p>
+        </p:txBody>
+      </p:sp>
+      <p:sp>
+        <p:nvSpPr>
+          <p:cNvPr id="10" name="massaction"/>
           <p:cNvSpPr txBox="1"/>
           <p:nvPr/>
         </p:nvSpPr>
@@ -3036,7 +4292,7 @@
       </p:sp>
       <p:sp>
         <p:nvSpPr>
-          <p:cNvPr id="6" name="Text 0"/>
+          <p:cNvPr id="12" name="Text 0"/>
           <p:cNvSpPr/>
           <p:nvPr>
             <p:ph idx="101" type="body" hasCustomPrompt="1"/>
@@ -3172,9 +4428,45 @@
           </a:p>
         </p:txBody>
       </p:sp>
+      <p:sp>
+        <p:nvSpPr>
+          <p:cNvPr id="3" name="mp-t1"/>
+          <p:cNvSpPr txBox="1"/>
+          <p:nvPr/>
+        </p:nvSpPr>
+        <p:spPr>
+          <a:xfrm>
+            <a:off x="731520" y="2331720"/>
+            <a:ext cx="4937760" cy="274320"/>
+          </a:xfrm>
+          <a:prstGeom prst="rect">
+            <a:avLst/>
+          </a:prstGeom>
+          <a:noFill/>
+          <a:ln/>
+        </p:spPr>
+        <p:txBody>
+          <a:bodyPr wrap="square" lIns="0" tIns="0" rIns="0" bIns="0" rtlCol="0" anchor="ctr"/>
+          <a:lstStyle/>
+          <a:p>
+            <a:pPr indent="0" marL="0">
+              <a:buNone/>
+            </a:pPr>
+            <a:r>
+              <a:rPr lang="en-US" sz="1300" b="1" dirty="0">
+                <a:solidFill>
+                  <a:srgbClr val="111111"/>
+                </a:solidFill>
+              </a:rPr>
+              <a:t>Same answer: the motif is a small part</a:t>
+            </a:r>
+            <a:endParaRPr lang="en-US" sz="1300" dirty="0"/>
+          </a:p>
+        </p:txBody>
+      </p:sp>
       <p:pic>
         <p:nvPicPr>
-          <p:cNvPr id="3" name="Image 0" descr="/Users/z5162865/WongLab/AlphaGenome_Ap1/Analysis/slide_figures/s6_mpra.png">    </p:cNvPr>
+          <p:cNvPr id="4" name="Image 0" descr="/Users/z5162865/WongLab/AlphaGenome_Ap1/Analysis/slide_figures/panels/s6_share.png">    </p:cNvPr>
           <p:cNvPicPr>
             <a:picLocks noChangeAspect="1"/>
           </p:cNvPicPr>
@@ -3188,8 +4480,8 @@
         </p:blipFill>
         <p:spPr>
           <a:xfrm>
-            <a:off x="1191113" y="2240280"/>
-            <a:ext cx="9779295" cy="3520440"/>
+            <a:off x="1352676" y="2651760"/>
+            <a:ext cx="3695447" cy="2651760"/>
           </a:xfrm>
           <a:prstGeom prst="rect">
             <a:avLst/>
@@ -3198,7 +4490,103 @@
       </p:pic>
       <p:sp>
         <p:nvSpPr>
-          <p:cNvPr id="4" name="stat-0"/>
+          <p:cNvPr id="5" name="mp-t2"/>
+          <p:cNvSpPr txBox="1"/>
+          <p:nvPr/>
+        </p:nvSpPr>
+        <p:spPr>
+          <a:xfrm>
+            <a:off x="6309360" y="2331720"/>
+            <a:ext cx="5120640" cy="274320"/>
+          </a:xfrm>
+          <a:prstGeom prst="rect">
+            <a:avLst/>
+          </a:prstGeom>
+          <a:noFill/>
+          <a:ln/>
+        </p:spPr>
+        <p:txBody>
+          <a:bodyPr wrap="square" lIns="0" tIns="0" rIns="0" bIns="0" rtlCol="0" anchor="ctr"/>
+          <a:lstStyle/>
+          <a:p>
+            <a:pPr indent="0" marL="0">
+              <a:buNone/>
+            </a:pPr>
+            <a:r>
+              <a:rPr lang="en-US" sz="1300" b="1" dirty="0">
+                <a:solidFill>
+                  <a:srgbClr val="111111"/>
+                </a:solidFill>
+              </a:rPr>
+              <a:t>But they disagree on which elements depend more</a:t>
+            </a:r>
+            <a:endParaRPr lang="en-US" sz="1300" dirty="0"/>
+          </a:p>
+        </p:txBody>
+      </p:sp>
+      <p:pic>
+        <p:nvPicPr>
+          <p:cNvPr id="6" name="Image 1" descr="/Users/z5162865/WongLab/AlphaGenome_Ap1/Analysis/slide_figures/panels/s6_direction.png">    </p:cNvPr>
+          <p:cNvPicPr>
+            <a:picLocks noChangeAspect="1"/>
+          </p:cNvPicPr>
+          <p:nvPr/>
+        </p:nvPicPr>
+        <p:blipFill>
+          <a:blip r:embed="rId2"/>
+          <a:stretch>
+            <a:fillRect/>
+          </a:stretch>
+        </p:blipFill>
+        <p:spPr>
+          <a:xfrm>
+            <a:off x="7044645" y="2651760"/>
+            <a:ext cx="3650070" cy="2651760"/>
+          </a:xfrm>
+          <a:prstGeom prst="rect">
+            <a:avLst/>
+          </a:prstGeom>
+        </p:spPr>
+      </p:pic>
+      <p:sp>
+        <p:nvSpPr>
+          <p:cNvPr id="7" name="mp-key"/>
+          <p:cNvSpPr txBox="1"/>
+          <p:nvPr/>
+        </p:nvSpPr>
+        <p:spPr>
+          <a:xfrm>
+            <a:off x="731520" y="5349240"/>
+            <a:ext cx="10698480" cy="274320"/>
+          </a:xfrm>
+          <a:prstGeom prst="rect">
+            <a:avLst/>
+          </a:prstGeom>
+          <a:noFill/>
+          <a:ln/>
+        </p:spPr>
+        <p:txBody>
+          <a:bodyPr wrap="square" lIns="0" tIns="0" rIns="0" bIns="0" rtlCol="0" anchor="ctr"/>
+          <a:lstStyle/>
+          <a:p>
+            <a:pPr indent="0" marL="0">
+              <a:buNone/>
+            </a:pPr>
+            <a:r>
+              <a:rPr lang="en-US" sz="950" dirty="0">
+                <a:solidFill>
+                  <a:srgbClr val="595959"/>
+                </a:solidFill>
+              </a:rPr>
+              <a:t>below 1×: responsive elements lose less than Stable ones   ·   above 1×: they lose more   ·   both p &lt; 0.001</a:t>
+            </a:r>
+            <a:endParaRPr lang="en-US" sz="950" dirty="0"/>
+          </a:p>
+        </p:txBody>
+      </p:sp>
+      <p:sp>
+        <p:nvSpPr>
+          <p:cNvPr id="8" name="stat-0"/>
           <p:cNvSpPr/>
           <p:nvPr/>
         </p:nvSpPr>
@@ -3225,7 +4613,7 @@
       </p:sp>
       <p:sp>
         <p:nvSpPr>
-          <p:cNvPr id="5" name="Text 2"/>
+          <p:cNvPr id="9" name="Text 5"/>
           <p:cNvSpPr txBox="1"/>
           <p:nvPr/>
         </p:nvSpPr>
@@ -3261,7 +4649,7 @@
       </p:sp>
       <p:sp>
         <p:nvSpPr>
-          <p:cNvPr id="6" name="Text 3"/>
+          <p:cNvPr id="10" name="Text 6"/>
           <p:cNvSpPr txBox="1"/>
           <p:nvPr/>
         </p:nvSpPr>
@@ -3297,7 +4685,7 @@
       </p:sp>
       <p:sp>
         <p:nvSpPr>
-          <p:cNvPr id="7" name="stat-1"/>
+          <p:cNvPr id="11" name="stat-1"/>
           <p:cNvSpPr/>
           <p:nvPr/>
         </p:nvSpPr>
@@ -3324,7 +4712,7 @@
       </p:sp>
       <p:sp>
         <p:nvSpPr>
-          <p:cNvPr id="8" name="Text 5"/>
+          <p:cNvPr id="12" name="Text 8"/>
           <p:cNvSpPr txBox="1"/>
           <p:nvPr/>
         </p:nvSpPr>
@@ -3360,7 +4748,7 @@
       </p:sp>
       <p:sp>
         <p:nvSpPr>
-          <p:cNvPr id="9" name="Text 6"/>
+          <p:cNvPr id="13" name="Text 9"/>
           <p:cNvSpPr txBox="1"/>
           <p:nvPr/>
         </p:nvSpPr>
@@ -3396,7 +4784,7 @@
       </p:sp>
       <p:sp>
         <p:nvSpPr>
-          <p:cNvPr id="10" name="Text 0"/>
+          <p:cNvPr id="14" name="Text 0"/>
           <p:cNvSpPr/>
           <p:nvPr>
             <p:ph idx="101" type="body" hasCustomPrompt="1"/>
@@ -5026,9 +6414,81 @@
           </a:p>
         </p:txBody>
       </p:sp>
+      <p:sp>
+        <p:nvSpPr>
+          <p:cNvPr id="3" name="s2_matched_null-title-0"/>
+          <p:cNvSpPr txBox="1"/>
+          <p:nvPr/>
+        </p:nvSpPr>
+        <p:spPr>
+          <a:xfrm>
+            <a:off x="1618488" y="1005840"/>
+            <a:ext cx="2436876" cy="438912"/>
+          </a:xfrm>
+          <a:prstGeom prst="rect">
+            <a:avLst/>
+          </a:prstGeom>
+          <a:noFill/>
+          <a:ln/>
+        </p:spPr>
+        <p:txBody>
+          <a:bodyPr wrap="square" lIns="0" tIns="0" rIns="0" bIns="0" rtlCol="0" anchor="t"/>
+          <a:lstStyle/>
+          <a:p>
+            <a:pPr indent="0" marL="0">
+              <a:buNone/>
+            </a:pPr>
+            <a:r>
+              <a:rPr lang="en-US" sz="1250" b="1" dirty="0">
+                <a:solidFill>
+                  <a:srgbClr val="111111"/>
+                </a:solidFill>
+              </a:rPr>
+              <a:t>Replace the 11 bp motif</a:t>
+            </a:r>
+            <a:endParaRPr lang="en-US" sz="1250" dirty="0"/>
+          </a:p>
+        </p:txBody>
+      </p:sp>
+      <p:sp>
+        <p:nvSpPr>
+          <p:cNvPr id="4" name="s2_matched_null-sub-0"/>
+          <p:cNvSpPr txBox="1"/>
+          <p:nvPr/>
+        </p:nvSpPr>
+        <p:spPr>
+          <a:xfrm>
+            <a:off x="1618488" y="1435608"/>
+            <a:ext cx="2436876" cy="310896"/>
+          </a:xfrm>
+          <a:prstGeom prst="rect">
+            <a:avLst/>
+          </a:prstGeom>
+          <a:noFill/>
+          <a:ln/>
+        </p:spPr>
+        <p:txBody>
+          <a:bodyPr wrap="square" lIns="0" tIns="0" rIns="0" bIns="0" rtlCol="0" anchor="t"/>
+          <a:lstStyle/>
+          <a:p>
+            <a:pPr indent="0" marL="0">
+              <a:buNone/>
+            </a:pPr>
+            <a:r>
+              <a:rPr lang="en-US" sz="950" dirty="0">
+                <a:solidFill>
+                  <a:srgbClr val="595959"/>
+                </a:solidFill>
+              </a:rPr>
+              <a:t>the motif alone</a:t>
+            </a:r>
+            <a:endParaRPr lang="en-US" sz="950" dirty="0"/>
+          </a:p>
+        </p:txBody>
+      </p:sp>
       <p:pic>
         <p:nvPicPr>
-          <p:cNvPr id="3" name="Image 0" descr="/Users/z5162865/WongLab/AlphaGenome_Ap1/Analysis/slide_figures/s2_matched_null.png">    </p:cNvPr>
+          <p:cNvPr id="5" name="Image 0" descr="/Users/z5162865/WongLab/AlphaGenome_Ap1/Analysis/slide_figures/panels/s2_matched_null_c0_r0.png">    </p:cNvPr>
           <p:cNvPicPr>
             <a:picLocks noChangeAspect="1"/>
           </p:cNvPicPr>
@@ -5042,17 +6502,875 @@
         </p:blipFill>
         <p:spPr>
           <a:xfrm>
-            <a:off x="657675" y="1051560"/>
-            <a:ext cx="10846171" cy="4617720"/>
+            <a:off x="1685171" y="1755648"/>
+            <a:ext cx="2303510" cy="1463040"/>
           </a:xfrm>
           <a:prstGeom prst="rect">
             <a:avLst/>
           </a:prstGeom>
         </p:spPr>
       </p:pic>
-      <p:sp>
-        <p:nvSpPr>
-          <p:cNvPr id="4" name="Text 0"/>
+      <p:pic>
+        <p:nvPicPr>
+          <p:cNvPr id="6" name="Image 1" descr="/Users/z5162865/WongLab/AlphaGenome_Ap1/Analysis/slide_figures/panels/s2_matched_null_c0_r1.png">    </p:cNvPr>
+          <p:cNvPicPr>
+            <a:picLocks noChangeAspect="1"/>
+          </p:cNvPicPr>
+          <p:nvPr/>
+        </p:nvPicPr>
+        <p:blipFill>
+          <a:blip r:embed="rId2"/>
+          <a:stretch>
+            <a:fillRect/>
+          </a:stretch>
+        </p:blipFill>
+        <p:spPr>
+          <a:xfrm>
+            <a:off x="1685171" y="3291840"/>
+            <a:ext cx="2303510" cy="1463040"/>
+          </a:xfrm>
+          <a:prstGeom prst="rect">
+            <a:avLst/>
+          </a:prstGeom>
+        </p:spPr>
+      </p:pic>
+      <p:sp>
+        <p:nvSpPr>
+          <p:cNvPr id="7" name="s2_matched_null-title-1"/>
+          <p:cNvSpPr txBox="1"/>
+          <p:nvPr/>
+        </p:nvSpPr>
+        <p:spPr>
+          <a:xfrm>
+            <a:off x="4128516" y="1005840"/>
+            <a:ext cx="2436876" cy="438912"/>
+          </a:xfrm>
+          <a:prstGeom prst="rect">
+            <a:avLst/>
+          </a:prstGeom>
+          <a:noFill/>
+          <a:ln/>
+        </p:spPr>
+        <p:txBody>
+          <a:bodyPr wrap="square" lIns="0" tIns="0" rIns="0" bIns="0" rtlCol="0" anchor="t"/>
+          <a:lstStyle/>
+          <a:p>
+            <a:pPr indent="0" marL="0">
+              <a:buNone/>
+            </a:pPr>
+            <a:r>
+              <a:rPr lang="en-US" sz="1250" b="1" dirty="0">
+                <a:solidFill>
+                  <a:srgbClr val="111111"/>
+                </a:solidFill>
+              </a:rPr>
+              <a:t>Replace the 170 bp element</a:t>
+            </a:r>
+            <a:endParaRPr lang="en-US" sz="1250" dirty="0"/>
+          </a:p>
+        </p:txBody>
+      </p:sp>
+      <p:sp>
+        <p:nvSpPr>
+          <p:cNvPr id="8" name="s2_matched_null-sub-1"/>
+          <p:cNvSpPr txBox="1"/>
+          <p:nvPr/>
+        </p:nvSpPr>
+        <p:spPr>
+          <a:xfrm>
+            <a:off x="4128516" y="1435608"/>
+            <a:ext cx="2436876" cy="310896"/>
+          </a:xfrm>
+          <a:prstGeom prst="rect">
+            <a:avLst/>
+          </a:prstGeom>
+          <a:noFill/>
+          <a:ln/>
+        </p:spPr>
+        <p:txBody>
+          <a:bodyPr wrap="square" lIns="0" tIns="0" rIns="0" bIns="0" rtlCol="0" anchor="t"/>
+          <a:lstStyle/>
+          <a:p>
+            <a:pPr indent="0" marL="0">
+              <a:buNone/>
+            </a:pPr>
+            <a:r>
+              <a:rPr lang="en-US" sz="950" dirty="0">
+                <a:solidFill>
+                  <a:srgbClr val="595959"/>
+                </a:solidFill>
+              </a:rPr>
+              <a:t>the element around it</a:t>
+            </a:r>
+            <a:endParaRPr lang="en-US" sz="950" dirty="0"/>
+          </a:p>
+        </p:txBody>
+      </p:sp>
+      <p:pic>
+        <p:nvPicPr>
+          <p:cNvPr id="9" name="Image 2" descr="/Users/z5162865/WongLab/AlphaGenome_Ap1/Analysis/slide_figures/panels/s2_matched_null_c1_r0.png">    </p:cNvPr>
+          <p:cNvPicPr>
+            <a:picLocks noChangeAspect="1"/>
+          </p:cNvPicPr>
+          <p:nvPr/>
+        </p:nvPicPr>
+        <p:blipFill>
+          <a:blip r:embed="rId3"/>
+          <a:stretch>
+            <a:fillRect/>
+          </a:stretch>
+        </p:blipFill>
+        <p:spPr>
+          <a:xfrm>
+            <a:off x="4195199" y="1755648"/>
+            <a:ext cx="2303510" cy="1463040"/>
+          </a:xfrm>
+          <a:prstGeom prst="rect">
+            <a:avLst/>
+          </a:prstGeom>
+        </p:spPr>
+      </p:pic>
+      <p:pic>
+        <p:nvPicPr>
+          <p:cNvPr id="10" name="Image 3" descr="/Users/z5162865/WongLab/AlphaGenome_Ap1/Analysis/slide_figures/panels/s2_matched_null_c1_r1.png">    </p:cNvPr>
+          <p:cNvPicPr>
+            <a:picLocks noChangeAspect="1"/>
+          </p:cNvPicPr>
+          <p:nvPr/>
+        </p:nvPicPr>
+        <p:blipFill>
+          <a:blip r:embed="rId4"/>
+          <a:stretch>
+            <a:fillRect/>
+          </a:stretch>
+        </p:blipFill>
+        <p:spPr>
+          <a:xfrm>
+            <a:off x="4195199" y="3291840"/>
+            <a:ext cx="2303510" cy="1463040"/>
+          </a:xfrm>
+          <a:prstGeom prst="rect">
+            <a:avLst/>
+          </a:prstGeom>
+        </p:spPr>
+      </p:pic>
+      <p:sp>
+        <p:nvSpPr>
+          <p:cNvPr id="11" name="s2_matched_null-title-2"/>
+          <p:cNvSpPr txBox="1"/>
+          <p:nvPr/>
+        </p:nvSpPr>
+        <p:spPr>
+          <a:xfrm>
+            <a:off x="6638544" y="1005840"/>
+            <a:ext cx="2436876" cy="438912"/>
+          </a:xfrm>
+          <a:prstGeom prst="rect">
+            <a:avLst/>
+          </a:prstGeom>
+          <a:noFill/>
+          <a:ln/>
+        </p:spPr>
+        <p:txBody>
+          <a:bodyPr wrap="square" lIns="0" tIns="0" rIns="0" bIns="0" rtlCol="0" anchor="t"/>
+          <a:lstStyle/>
+          <a:p>
+            <a:pPr indent="0" marL="0">
+              <a:buNone/>
+            </a:pPr>
+            <a:r>
+              <a:rPr lang="en-US" sz="1250" b="1" dirty="0">
+                <a:solidFill>
+                  <a:srgbClr val="111111"/>
+                </a:solidFill>
+              </a:rPr>
+              <a:t>Replace the whole peak</a:t>
+            </a:r>
+            <a:endParaRPr lang="en-US" sz="1250" dirty="0"/>
+          </a:p>
+        </p:txBody>
+      </p:sp>
+      <p:sp>
+        <p:nvSpPr>
+          <p:cNvPr id="12" name="s2_matched_null-sub-2"/>
+          <p:cNvSpPr txBox="1"/>
+          <p:nvPr/>
+        </p:nvSpPr>
+        <p:spPr>
+          <a:xfrm>
+            <a:off x="6638544" y="1435608"/>
+            <a:ext cx="2436876" cy="310896"/>
+          </a:xfrm>
+          <a:prstGeom prst="rect">
+            <a:avLst/>
+          </a:prstGeom>
+          <a:noFill/>
+          <a:ln/>
+        </p:spPr>
+        <p:txBody>
+          <a:bodyPr wrap="square" lIns="0" tIns="0" rIns="0" bIns="0" rtlCol="0" anchor="t"/>
+          <a:lstStyle/>
+          <a:p>
+            <a:pPr indent="0" marL="0">
+              <a:buNone/>
+            </a:pPr>
+            <a:r>
+              <a:rPr lang="en-US" sz="950" dirty="0">
+                <a:solidFill>
+                  <a:srgbClr val="595959"/>
+                </a:solidFill>
+              </a:rPr>
+              <a:t>everything, read over the peak</a:t>
+            </a:r>
+            <a:endParaRPr lang="en-US" sz="950" dirty="0"/>
+          </a:p>
+        </p:txBody>
+      </p:sp>
+      <p:pic>
+        <p:nvPicPr>
+          <p:cNvPr id="13" name="Image 4" descr="/Users/z5162865/WongLab/AlphaGenome_Ap1/Analysis/slide_figures/panels/s2_matched_null_c2_r0.png">    </p:cNvPr>
+          <p:cNvPicPr>
+            <a:picLocks noChangeAspect="1"/>
+          </p:cNvPicPr>
+          <p:nvPr/>
+        </p:nvPicPr>
+        <p:blipFill>
+          <a:blip r:embed="rId5"/>
+          <a:stretch>
+            <a:fillRect/>
+          </a:stretch>
+        </p:blipFill>
+        <p:spPr>
+          <a:xfrm>
+            <a:off x="6705227" y="1755648"/>
+            <a:ext cx="2303510" cy="1463040"/>
+          </a:xfrm>
+          <a:prstGeom prst="rect">
+            <a:avLst/>
+          </a:prstGeom>
+        </p:spPr>
+      </p:pic>
+      <p:pic>
+        <p:nvPicPr>
+          <p:cNvPr id="14" name="Image 5" descr="/Users/z5162865/WongLab/AlphaGenome_Ap1/Analysis/slide_figures/panels/s2_matched_null_c2_r1.png">    </p:cNvPr>
+          <p:cNvPicPr>
+            <a:picLocks noChangeAspect="1"/>
+          </p:cNvPicPr>
+          <p:nvPr/>
+        </p:nvPicPr>
+        <p:blipFill>
+          <a:blip r:embed="rId6"/>
+          <a:stretch>
+            <a:fillRect/>
+          </a:stretch>
+        </p:blipFill>
+        <p:spPr>
+          <a:xfrm>
+            <a:off x="6705227" y="3291840"/>
+            <a:ext cx="2303510" cy="1463040"/>
+          </a:xfrm>
+          <a:prstGeom prst="rect">
+            <a:avLst/>
+          </a:prstGeom>
+        </p:spPr>
+      </p:pic>
+      <p:sp>
+        <p:nvSpPr>
+          <p:cNvPr id="15" name="s2_matched_null-title-3"/>
+          <p:cNvSpPr txBox="1"/>
+          <p:nvPr/>
+        </p:nvSpPr>
+        <p:spPr>
+          <a:xfrm>
+            <a:off x="9148572" y="1005840"/>
+            <a:ext cx="2436876" cy="438912"/>
+          </a:xfrm>
+          <a:prstGeom prst="rect">
+            <a:avLst/>
+          </a:prstGeom>
+          <a:noFill/>
+          <a:ln/>
+        </p:spPr>
+        <p:txBody>
+          <a:bodyPr wrap="square" lIns="0" tIns="0" rIns="0" bIns="0" rtlCol="0" anchor="t"/>
+          <a:lstStyle/>
+          <a:p>
+            <a:pPr indent="0" marL="0">
+              <a:buNone/>
+            </a:pPr>
+            <a:r>
+              <a:rPr lang="en-US" sz="1250" b="1" dirty="0">
+                <a:solidFill>
+                  <a:srgbClr val="111111"/>
+                </a:solidFill>
+              </a:rPr>
+              <a:t>Edit 300 bp away</a:t>
+            </a:r>
+            <a:endParaRPr lang="en-US" sz="1250" dirty="0"/>
+          </a:p>
+        </p:txBody>
+      </p:sp>
+      <p:sp>
+        <p:nvSpPr>
+          <p:cNvPr id="16" name="s2_matched_null-sub-3"/>
+          <p:cNvSpPr txBox="1"/>
+          <p:nvPr/>
+        </p:nvSpPr>
+        <p:spPr>
+          <a:xfrm>
+            <a:off x="9148572" y="1435608"/>
+            <a:ext cx="2436876" cy="310896"/>
+          </a:xfrm>
+          <a:prstGeom prst="rect">
+            <a:avLst/>
+          </a:prstGeom>
+          <a:noFill/>
+          <a:ln/>
+        </p:spPr>
+        <p:txBody>
+          <a:bodyPr wrap="square" lIns="0" tIns="0" rIns="0" bIns="0" rtlCol="0" anchor="t"/>
+          <a:lstStyle/>
+          <a:p>
+            <a:pPr indent="0" marL="0">
+              <a:buNone/>
+            </a:pPr>
+            <a:r>
+              <a:rPr lang="en-US" sz="950" dirty="0">
+                <a:solidFill>
+                  <a:srgbClr val="595959"/>
+                </a:solidFill>
+              </a:rPr>
+              <a:t>the control: nothing at stake</a:t>
+            </a:r>
+            <a:endParaRPr lang="en-US" sz="950" dirty="0"/>
+          </a:p>
+        </p:txBody>
+      </p:sp>
+      <p:pic>
+        <p:nvPicPr>
+          <p:cNvPr id="17" name="Image 6" descr="/Users/z5162865/WongLab/AlphaGenome_Ap1/Analysis/slide_figures/panels/s2_matched_null_c3_r0.png">    </p:cNvPr>
+          <p:cNvPicPr>
+            <a:picLocks noChangeAspect="1"/>
+          </p:cNvPicPr>
+          <p:nvPr/>
+        </p:nvPicPr>
+        <p:blipFill>
+          <a:blip r:embed="rId7"/>
+          <a:stretch>
+            <a:fillRect/>
+          </a:stretch>
+        </p:blipFill>
+        <p:spPr>
+          <a:xfrm>
+            <a:off x="9215255" y="1755648"/>
+            <a:ext cx="2303510" cy="1463040"/>
+          </a:xfrm>
+          <a:prstGeom prst="rect">
+            <a:avLst/>
+          </a:prstGeom>
+        </p:spPr>
+      </p:pic>
+      <p:pic>
+        <p:nvPicPr>
+          <p:cNvPr id="18" name="Image 7" descr="/Users/z5162865/WongLab/AlphaGenome_Ap1/Analysis/slide_figures/panels/s2_matched_null_c3_r1.png">    </p:cNvPr>
+          <p:cNvPicPr>
+            <a:picLocks noChangeAspect="1"/>
+          </p:cNvPicPr>
+          <p:nvPr/>
+        </p:nvPicPr>
+        <p:blipFill>
+          <a:blip r:embed="rId8"/>
+          <a:stretch>
+            <a:fillRect/>
+          </a:stretch>
+        </p:blipFill>
+        <p:spPr>
+          <a:xfrm>
+            <a:off x="9215255" y="3291840"/>
+            <a:ext cx="2303510" cy="1463040"/>
+          </a:xfrm>
+          <a:prstGeom prst="rect">
+            <a:avLst/>
+          </a:prstGeom>
+        </p:spPr>
+      </p:pic>
+      <p:sp>
+        <p:nvSpPr>
+          <p:cNvPr id="19" name="s2_matched_null-row-0"/>
+          <p:cNvSpPr txBox="1"/>
+          <p:nvPr/>
+        </p:nvSpPr>
+        <p:spPr>
+          <a:xfrm rot="16200000">
+            <a:off x="484632" y="1837944"/>
+            <a:ext cx="1371600" cy="1371600"/>
+          </a:xfrm>
+          <a:prstGeom prst="rect">
+            <a:avLst/>
+          </a:prstGeom>
+          <a:noFill/>
+          <a:ln/>
+        </p:spPr>
+        <p:txBody>
+          <a:bodyPr wrap="square" lIns="0" tIns="0" rIns="0" bIns="0" rtlCol="0" anchor="ctr"/>
+          <a:lstStyle/>
+          <a:p>
+            <a:pPr algn="ctr" indent="0" marL="0">
+              <a:buNone/>
+            </a:pPr>
+            <a:r>
+              <a:rPr lang="en-US" sz="1000" dirty="0">
+                <a:solidFill>
+                  <a:srgbClr val="111111"/>
+                </a:solidFill>
+              </a:rPr>
+              <a:t>all sites, nothing controlled</a:t>
+            </a:r>
+            <a:endParaRPr lang="en-US" sz="1000" dirty="0"/>
+          </a:p>
+        </p:txBody>
+      </p:sp>
+      <p:sp>
+        <p:nvSpPr>
+          <p:cNvPr id="20" name="s2_matched_null-row-1"/>
+          <p:cNvSpPr txBox="1"/>
+          <p:nvPr/>
+        </p:nvSpPr>
+        <p:spPr>
+          <a:xfrm rot="16200000">
+            <a:off x="484632" y="3374136"/>
+            <a:ext cx="1371600" cy="1371600"/>
+          </a:xfrm>
+          <a:prstGeom prst="rect">
+            <a:avLst/>
+          </a:prstGeom>
+          <a:noFill/>
+          <a:ln/>
+        </p:spPr>
+        <p:txBody>
+          <a:bodyPr wrap="square" lIns="0" tIns="0" rIns="0" bIns="0" rtlCol="0" anchor="ctr"/>
+          <a:lstStyle/>
+          <a:p>
+            <a:pPr algn="ctr" indent="0" marL="0">
+              <a:buNone/>
+            </a:pPr>
+            <a:r>
+              <a:rPr lang="en-US" sz="1000" dirty="0">
+                <a:solidFill>
+                  <a:srgbClr val="111111"/>
+                </a:solidFill>
+              </a:rPr>
+              <a:t>each class against its own matched Stable controls</a:t>
+            </a:r>
+            <a:endParaRPr lang="en-US" sz="1000" dirty="0"/>
+          </a:p>
+        </p:txBody>
+      </p:sp>
+      <p:sp>
+        <p:nvSpPr>
+          <p:cNvPr id="21" name="s2_matched_null-dot-0"/>
+          <p:cNvSpPr/>
+          <p:nvPr/>
+        </p:nvSpPr>
+        <p:spPr>
+          <a:xfrm>
+            <a:off x="1618488" y="4960620"/>
+            <a:ext cx="109728" cy="109728"/>
+          </a:xfrm>
+          <a:prstGeom prst="ellipse">
+            <a:avLst/>
+          </a:prstGeom>
+          <a:solidFill>
+            <a:srgbClr val="4F4F4F"/>
+          </a:solidFill>
+          <a:ln w="12700">
+            <a:solidFill>
+              <a:srgbClr val="4F4F4F"/>
+            </a:solidFill>
+            <a:prstDash val="solid"/>
+          </a:ln>
+        </p:spPr>
+      </p:sp>
+      <p:sp>
+        <p:nvSpPr>
+          <p:cNvPr id="22" name="s2_matched_null-leg-0"/>
+          <p:cNvSpPr txBox="1"/>
+          <p:nvPr/>
+        </p:nvSpPr>
+        <p:spPr>
+          <a:xfrm>
+            <a:off x="1773936" y="4919472"/>
+            <a:ext cx="1057046" cy="201168"/>
+          </a:xfrm>
+          <a:prstGeom prst="rect">
+            <a:avLst/>
+          </a:prstGeom>
+          <a:noFill/>
+          <a:ln/>
+        </p:spPr>
+        <p:txBody>
+          <a:bodyPr wrap="square" lIns="0" tIns="0" rIns="0" bIns="0" rtlCol="0" anchor="ctr"/>
+          <a:lstStyle/>
+          <a:p>
+            <a:pPr indent="0" marL="0">
+              <a:buNone/>
+            </a:pPr>
+            <a:r>
+              <a:rPr lang="en-US" sz="1050" dirty="0">
+                <a:solidFill>
+                  <a:srgbClr val="111111"/>
+                </a:solidFill>
+              </a:rPr>
+              <a:t>Dynamic (all)</a:t>
+            </a:r>
+            <a:endParaRPr lang="en-US" sz="1050" dirty="0"/>
+          </a:p>
+        </p:txBody>
+      </p:sp>
+      <p:sp>
+        <p:nvSpPr>
+          <p:cNvPr id="23" name="s2_matched_null-dot-1"/>
+          <p:cNvSpPr/>
+          <p:nvPr/>
+        </p:nvSpPr>
+        <p:spPr>
+          <a:xfrm>
+            <a:off x="2940710" y="4960620"/>
+            <a:ext cx="109728" cy="109728"/>
+          </a:xfrm>
+          <a:prstGeom prst="ellipse">
+            <a:avLst/>
+          </a:prstGeom>
+          <a:solidFill>
+            <a:srgbClr val="C2551C"/>
+          </a:solidFill>
+          <a:ln w="12700">
+            <a:solidFill>
+              <a:srgbClr val="C2551C"/>
+            </a:solidFill>
+            <a:prstDash val="solid"/>
+          </a:ln>
+        </p:spPr>
+      </p:sp>
+      <p:sp>
+        <p:nvSpPr>
+          <p:cNvPr id="24" name="s2_matched_null-leg-1"/>
+          <p:cNvSpPr txBox="1"/>
+          <p:nvPr/>
+        </p:nvSpPr>
+        <p:spPr>
+          <a:xfrm>
+            <a:off x="3096158" y="4919472"/>
+            <a:ext cx="596189" cy="201168"/>
+          </a:xfrm>
+          <a:prstGeom prst="rect">
+            <a:avLst/>
+          </a:prstGeom>
+          <a:noFill/>
+          <a:ln/>
+        </p:spPr>
+        <p:txBody>
+          <a:bodyPr wrap="square" lIns="0" tIns="0" rIns="0" bIns="0" rtlCol="0" anchor="ctr"/>
+          <a:lstStyle/>
+          <a:p>
+            <a:pPr indent="0" marL="0">
+              <a:buNone/>
+            </a:pPr>
+            <a:r>
+              <a:rPr lang="en-US" sz="1050" dirty="0">
+                <a:solidFill>
+                  <a:srgbClr val="111111"/>
+                </a:solidFill>
+              </a:rPr>
+              <a:t>Age Up</a:t>
+            </a:r>
+            <a:endParaRPr lang="en-US" sz="1050" dirty="0"/>
+          </a:p>
+        </p:txBody>
+      </p:sp>
+      <p:sp>
+        <p:nvSpPr>
+          <p:cNvPr id="25" name="s2_matched_null-dot-2"/>
+          <p:cNvSpPr/>
+          <p:nvPr/>
+        </p:nvSpPr>
+        <p:spPr>
+          <a:xfrm>
+            <a:off x="3802075" y="4960620"/>
+            <a:ext cx="109728" cy="109728"/>
+          </a:xfrm>
+          <a:prstGeom prst="ellipse">
+            <a:avLst/>
+          </a:prstGeom>
+          <a:solidFill>
+            <a:srgbClr val="1F6FB2"/>
+          </a:solidFill>
+          <a:ln w="12700">
+            <a:solidFill>
+              <a:srgbClr val="1F6FB2"/>
+            </a:solidFill>
+            <a:prstDash val="solid"/>
+          </a:ln>
+        </p:spPr>
+      </p:sp>
+      <p:sp>
+        <p:nvSpPr>
+          <p:cNvPr id="26" name="s2_matched_null-leg-2"/>
+          <p:cNvSpPr txBox="1"/>
+          <p:nvPr/>
+        </p:nvSpPr>
+        <p:spPr>
+          <a:xfrm>
+            <a:off x="3957523" y="4919472"/>
+            <a:ext cx="727862" cy="201168"/>
+          </a:xfrm>
+          <a:prstGeom prst="rect">
+            <a:avLst/>
+          </a:prstGeom>
+          <a:noFill/>
+          <a:ln/>
+        </p:spPr>
+        <p:txBody>
+          <a:bodyPr wrap="square" lIns="0" tIns="0" rIns="0" bIns="0" rtlCol="0" anchor="ctr"/>
+          <a:lstStyle/>
+          <a:p>
+            <a:pPr indent="0" marL="0">
+              <a:buNone/>
+            </a:pPr>
+            <a:r>
+              <a:rPr lang="en-US" sz="1050" dirty="0">
+                <a:solidFill>
+                  <a:srgbClr val="111111"/>
+                </a:solidFill>
+              </a:rPr>
+              <a:t>Age Down</a:t>
+            </a:r>
+            <a:endParaRPr lang="en-US" sz="1050" dirty="0"/>
+          </a:p>
+        </p:txBody>
+      </p:sp>
+      <p:sp>
+        <p:nvSpPr>
+          <p:cNvPr id="27" name="s2_matched_null-dot-3"/>
+          <p:cNvSpPr/>
+          <p:nvPr/>
+        </p:nvSpPr>
+        <p:spPr>
+          <a:xfrm>
+            <a:off x="4795114" y="4960620"/>
+            <a:ext cx="109728" cy="109728"/>
+          </a:xfrm>
+          <a:prstGeom prst="ellipse">
+            <a:avLst/>
+          </a:prstGeom>
+          <a:solidFill>
+            <a:srgbClr val="2E7D32"/>
+          </a:solidFill>
+          <a:ln w="12700">
+            <a:solidFill>
+              <a:srgbClr val="2E7D32"/>
+            </a:solidFill>
+            <a:prstDash val="solid"/>
+          </a:ln>
+        </p:spPr>
+      </p:sp>
+      <p:sp>
+        <p:nvSpPr>
+          <p:cNvPr id="28" name="s2_matched_null-leg-3"/>
+          <p:cNvSpPr txBox="1"/>
+          <p:nvPr/>
+        </p:nvSpPr>
+        <p:spPr>
+          <a:xfrm>
+            <a:off x="4950562" y="4919472"/>
+            <a:ext cx="925373" cy="201168"/>
+          </a:xfrm>
+          <a:prstGeom prst="rect">
+            <a:avLst/>
+          </a:prstGeom>
+          <a:noFill/>
+          <a:ln/>
+        </p:spPr>
+        <p:txBody>
+          <a:bodyPr wrap="square" lIns="0" tIns="0" rIns="0" bIns="0" rtlCol="0" anchor="ctr"/>
+          <a:lstStyle/>
+          <a:p>
+            <a:pPr indent="0" marL="0">
+              <a:buNone/>
+            </a:pPr>
+            <a:r>
+              <a:rPr lang="en-US" sz="1050" dirty="0">
+                <a:solidFill>
+                  <a:srgbClr val="111111"/>
+                </a:solidFill>
+              </a:rPr>
+              <a:t>Exercise Up</a:t>
+            </a:r>
+            <a:endParaRPr lang="en-US" sz="1050" dirty="0"/>
+          </a:p>
+        </p:txBody>
+      </p:sp>
+      <p:sp>
+        <p:nvSpPr>
+          <p:cNvPr id="29" name="s2_matched_null-dot-4"/>
+          <p:cNvSpPr/>
+          <p:nvPr/>
+        </p:nvSpPr>
+        <p:spPr>
+          <a:xfrm>
+            <a:off x="5985662" y="4960620"/>
+            <a:ext cx="109728" cy="109728"/>
+          </a:xfrm>
+          <a:prstGeom prst="ellipse">
+            <a:avLst/>
+          </a:prstGeom>
+          <a:solidFill>
+            <a:srgbClr val="7B3FA0"/>
+          </a:solidFill>
+          <a:ln w="12700">
+            <a:solidFill>
+              <a:srgbClr val="7B3FA0"/>
+            </a:solidFill>
+            <a:prstDash val="solid"/>
+          </a:ln>
+        </p:spPr>
+      </p:sp>
+      <p:sp>
+        <p:nvSpPr>
+          <p:cNvPr id="30" name="s2_matched_null-leg-4"/>
+          <p:cNvSpPr txBox="1"/>
+          <p:nvPr/>
+        </p:nvSpPr>
+        <p:spPr>
+          <a:xfrm>
+            <a:off x="6141110" y="4919472"/>
+            <a:ext cx="1057046" cy="201168"/>
+          </a:xfrm>
+          <a:prstGeom prst="rect">
+            <a:avLst/>
+          </a:prstGeom>
+          <a:noFill/>
+          <a:ln/>
+        </p:spPr>
+        <p:txBody>
+          <a:bodyPr wrap="square" lIns="0" tIns="0" rIns="0" bIns="0" rtlCol="0" anchor="ctr"/>
+          <a:lstStyle/>
+          <a:p>
+            <a:pPr indent="0" marL="0">
+              <a:buNone/>
+            </a:pPr>
+            <a:r>
+              <a:rPr lang="en-US" sz="1050" dirty="0">
+                <a:solidFill>
+                  <a:srgbClr val="111111"/>
+                </a:solidFill>
+              </a:rPr>
+              <a:t>Exercise Down</a:t>
+            </a:r>
+            <a:endParaRPr lang="en-US" sz="1050" dirty="0"/>
+          </a:p>
+        </p:txBody>
+      </p:sp>
+      <p:sp>
+        <p:nvSpPr>
+          <p:cNvPr id="31" name="s2_matched_null-dot-5"/>
+          <p:cNvSpPr/>
+          <p:nvPr/>
+        </p:nvSpPr>
+        <p:spPr>
+          <a:xfrm>
+            <a:off x="7307885" y="4960620"/>
+            <a:ext cx="109728" cy="109728"/>
+          </a:xfrm>
+          <a:prstGeom prst="ellipse">
+            <a:avLst/>
+          </a:prstGeom>
+          <a:solidFill>
+            <a:srgbClr val="B3B2AE"/>
+          </a:solidFill>
+          <a:ln w="12700">
+            <a:solidFill>
+              <a:srgbClr val="B3B2AE"/>
+            </a:solidFill>
+            <a:prstDash val="solid"/>
+          </a:ln>
+        </p:spPr>
+      </p:sp>
+      <p:sp>
+        <p:nvSpPr>
+          <p:cNvPr id="32" name="s2_matched_null-leg-5"/>
+          <p:cNvSpPr txBox="1"/>
+          <p:nvPr/>
+        </p:nvSpPr>
+        <p:spPr>
+          <a:xfrm>
+            <a:off x="7463333" y="4919472"/>
+            <a:ext cx="2373782" cy="201168"/>
+          </a:xfrm>
+          <a:prstGeom prst="rect">
+            <a:avLst/>
+          </a:prstGeom>
+          <a:noFill/>
+          <a:ln/>
+        </p:spPr>
+        <p:txBody>
+          <a:bodyPr wrap="square" lIns="0" tIns="0" rIns="0" bIns="0" rtlCol="0" anchor="ctr"/>
+          <a:lstStyle/>
+          <a:p>
+            <a:pPr indent="0" marL="0">
+              <a:buNone/>
+            </a:pPr>
+            <a:r>
+              <a:rPr lang="en-US" sz="1050" dirty="0">
+                <a:solidFill>
+                  <a:srgbClr val="111111"/>
+                </a:solidFill>
+              </a:rPr>
+              <a:t>Stable (all, or matched controls)</a:t>
+            </a:r>
+            <a:endParaRPr lang="en-US" sz="1050" dirty="0"/>
+          </a:p>
+        </p:txBody>
+      </p:sp>
+      <p:sp>
+        <p:nvSpPr>
+          <p:cNvPr id="33" name="s2_matched_null-key"/>
+          <p:cNvSpPr txBox="1"/>
+          <p:nvPr/>
+        </p:nvSpPr>
+        <p:spPr>
+          <a:xfrm>
+            <a:off x="960120" y="5193792"/>
+            <a:ext cx="10698480" cy="502920"/>
+          </a:xfrm>
+          <a:prstGeom prst="rect">
+            <a:avLst/>
+          </a:prstGeom>
+          <a:noFill/>
+          <a:ln/>
+        </p:spPr>
+        <p:txBody>
+          <a:bodyPr wrap="square" lIns="0" tIns="0" rIns="0" bIns="0" rtlCol="0" anchor="ctr"/>
+          <a:lstStyle/>
+          <a:p>
+            <a:pPr indent="0" marL="0">
+              <a:buNone/>
+            </a:pPr>
+            <a:r>
+              <a:rPr lang="en-US" sz="900" dirty="0">
+                <a:solidFill>
+                  <a:srgbClr val="595959"/>
+                </a:solidFill>
+              </a:rPr>
+              <a:t>grey line and band (top row): all Stable sites, median with 95% bootstrap CI.   grey dots (bottom row): that class's own matched Stable controls.   Stars test the class against that reference — Mann–Whitney on all sites, paired Wilcoxon on matched pairs — BH across all 40 tests.   *** p&lt;0.001   ** p&lt;0.01   * p&lt;0.05   ns ≥ 0.05</a:t>
+            </a:r>
+            <a:endParaRPr lang="en-US" sz="900" dirty="0"/>
+          </a:p>
+        </p:txBody>
+      </p:sp>
+      <p:sp>
+        <p:nvSpPr>
+          <p:cNvPr id="34" name="Text 0"/>
           <p:cNvSpPr/>
           <p:nvPr>
             <p:ph idx="101" type="body" hasCustomPrompt="1"/>
@@ -5231,9 +7549,45 @@
           </a:prstGeom>
         </p:spPr>
       </p:pic>
+      <p:sp>
+        <p:nvSpPr>
+          <p:cNvPr id="4" name="pa-t1"/>
+          <p:cNvSpPr txBox="1"/>
+          <p:nvPr/>
+        </p:nvSpPr>
+        <p:spPr>
+          <a:xfrm>
+            <a:off x="731520" y="2057400"/>
+            <a:ext cx="4937760" cy="274320"/>
+          </a:xfrm>
+          <a:prstGeom prst="rect">
+            <a:avLst/>
+          </a:prstGeom>
+          <a:noFill/>
+          <a:ln/>
+        </p:spPr>
+        <p:txBody>
+          <a:bodyPr wrap="square" lIns="0" tIns="0" rIns="0" bIns="0" rtlCol="0" anchor="ctr"/>
+          <a:lstStyle/>
+          <a:p>
+            <a:pPr indent="0" marL="0">
+              <a:buNone/>
+            </a:pPr>
+            <a:r>
+              <a:rPr lang="en-US" sz="1300" b="1" dirty="0">
+                <a:solidFill>
+                  <a:srgbClr val="111111"/>
+                </a:solidFill>
+              </a:rPr>
+              <a:t>All sites, nothing controlled</a:t>
+            </a:r>
+            <a:endParaRPr lang="en-US" sz="1300" dirty="0"/>
+          </a:p>
+        </p:txBody>
+      </p:sp>
       <p:pic>
         <p:nvPicPr>
-          <p:cNvPr id="4" name="Image 1" descr="/Users/z5162865/WongLab/AlphaGenome_Ap1/Analysis/slide_figures/s8_partners.png">    </p:cNvPr>
+          <p:cNvPr id="5" name="Image 1" descr="/Users/z5162865/WongLab/AlphaGenome_Ap1/Analysis/slide_figures/panels/s8_partners_all.png">    </p:cNvPr>
           <p:cNvPicPr>
             <a:picLocks noChangeAspect="1"/>
           </p:cNvPicPr>
@@ -5247,8 +7601,8 @@
         </p:blipFill>
         <p:spPr>
           <a:xfrm>
-            <a:off x="502920" y="2177702"/>
-            <a:ext cx="11155680" cy="3371276"/>
+            <a:off x="1295400" y="2377440"/>
+            <a:ext cx="3810000" cy="2743200"/>
           </a:xfrm>
           <a:prstGeom prst="rect">
             <a:avLst/>
@@ -5257,7 +7611,408 @@
       </p:pic>
       <p:sp>
         <p:nvSpPr>
-          <p:cNvPr id="5" name="Text 0"/>
+          <p:cNvPr id="6" name="pa-t2"/>
+          <p:cNvSpPr txBox="1"/>
+          <p:nvPr/>
+        </p:nvSpPr>
+        <p:spPr>
+          <a:xfrm>
+            <a:off x="6309360" y="2057400"/>
+            <a:ext cx="5120640" cy="274320"/>
+          </a:xfrm>
+          <a:prstGeom prst="rect">
+            <a:avLst/>
+          </a:prstGeom>
+          <a:noFill/>
+          <a:ln/>
+        </p:spPr>
+        <p:txBody>
+          <a:bodyPr wrap="square" lIns="0" tIns="0" rIns="0" bIns="0" rtlCol="0" anchor="ctr"/>
+          <a:lstStyle/>
+          <a:p>
+            <a:pPr indent="0" marL="0">
+              <a:buNone/>
+            </a:pPr>
+            <a:r>
+              <a:rPr lang="en-US" sz="1300" b="1" dirty="0">
+                <a:solidFill>
+                  <a:srgbClr val="111111"/>
+                </a:solidFill>
+              </a:rPr>
+              <a:t>Each class against its own matched Stable controls</a:t>
+            </a:r>
+            <a:endParaRPr lang="en-US" sz="1300" dirty="0"/>
+          </a:p>
+        </p:txBody>
+      </p:sp>
+      <p:pic>
+        <p:nvPicPr>
+          <p:cNvPr id="7" name="Image 2" descr="/Users/z5162865/WongLab/AlphaGenome_Ap1/Analysis/slide_figures/panels/s8_partners_matched.png">    </p:cNvPr>
+          <p:cNvPicPr>
+            <a:picLocks noChangeAspect="1"/>
+          </p:cNvPicPr>
+          <p:nvPr/>
+        </p:nvPicPr>
+        <p:blipFill>
+          <a:blip r:embed="rId3"/>
+          <a:stretch>
+            <a:fillRect/>
+          </a:stretch>
+        </p:blipFill>
+        <p:spPr>
+          <a:xfrm>
+            <a:off x="6964680" y="2377440"/>
+            <a:ext cx="3810000" cy="2743200"/>
+          </a:xfrm>
+          <a:prstGeom prst="rect">
+            <a:avLst/>
+          </a:prstGeom>
+        </p:spPr>
+      </p:pic>
+      <p:sp>
+        <p:nvSpPr>
+          <p:cNvPr id="8" name="lg-dot-5.68-0"/>
+          <p:cNvSpPr/>
+          <p:nvPr/>
+        </p:nvSpPr>
+        <p:spPr>
+          <a:xfrm>
+            <a:off x="731520" y="5234940"/>
+            <a:ext cx="109728" cy="109728"/>
+          </a:xfrm>
+          <a:prstGeom prst="ellipse">
+            <a:avLst/>
+          </a:prstGeom>
+          <a:solidFill>
+            <a:srgbClr val="B3B2AE"/>
+          </a:solidFill>
+          <a:ln w="12700">
+            <a:solidFill>
+              <a:srgbClr val="B3B2AE"/>
+            </a:solidFill>
+            <a:prstDash val="solid"/>
+          </a:ln>
+        </p:spPr>
+      </p:sp>
+      <p:sp>
+        <p:nvSpPr>
+          <p:cNvPr id="9" name="lg-txt-5.68-0"/>
+          <p:cNvSpPr txBox="1"/>
+          <p:nvPr/>
+        </p:nvSpPr>
+        <p:spPr>
+          <a:xfrm>
+            <a:off x="886968" y="5193792"/>
+            <a:ext cx="596189" cy="201168"/>
+          </a:xfrm>
+          <a:prstGeom prst="rect">
+            <a:avLst/>
+          </a:prstGeom>
+          <a:noFill/>
+          <a:ln/>
+        </p:spPr>
+        <p:txBody>
+          <a:bodyPr wrap="square" lIns="0" tIns="0" rIns="0" bIns="0" rtlCol="0" anchor="ctr"/>
+          <a:lstStyle/>
+          <a:p>
+            <a:pPr indent="0" marL="0">
+              <a:buNone/>
+            </a:pPr>
+            <a:r>
+              <a:rPr lang="en-US" sz="1050" dirty="0">
+                <a:solidFill>
+                  <a:srgbClr val="111111"/>
+                </a:solidFill>
+              </a:rPr>
+              <a:t>Stable</a:t>
+            </a:r>
+            <a:endParaRPr lang="en-US" sz="1050" dirty="0"/>
+          </a:p>
+        </p:txBody>
+      </p:sp>
+      <p:sp>
+        <p:nvSpPr>
+          <p:cNvPr id="10" name="lg-dot-5.68-1"/>
+          <p:cNvSpPr/>
+          <p:nvPr/>
+        </p:nvSpPr>
+        <p:spPr>
+          <a:xfrm>
+            <a:off x="1592885" y="5234940"/>
+            <a:ext cx="109728" cy="109728"/>
+          </a:xfrm>
+          <a:prstGeom prst="ellipse">
+            <a:avLst/>
+          </a:prstGeom>
+          <a:solidFill>
+            <a:srgbClr val="C2551C"/>
+          </a:solidFill>
+          <a:ln w="12700">
+            <a:solidFill>
+              <a:srgbClr val="C2551C"/>
+            </a:solidFill>
+            <a:prstDash val="solid"/>
+          </a:ln>
+        </p:spPr>
+      </p:sp>
+      <p:sp>
+        <p:nvSpPr>
+          <p:cNvPr id="11" name="lg-txt-5.68-1"/>
+          <p:cNvSpPr txBox="1"/>
+          <p:nvPr/>
+        </p:nvSpPr>
+        <p:spPr>
+          <a:xfrm>
+            <a:off x="1748333" y="5193792"/>
+            <a:ext cx="596189" cy="201168"/>
+          </a:xfrm>
+          <a:prstGeom prst="rect">
+            <a:avLst/>
+          </a:prstGeom>
+          <a:noFill/>
+          <a:ln/>
+        </p:spPr>
+        <p:txBody>
+          <a:bodyPr wrap="square" lIns="0" tIns="0" rIns="0" bIns="0" rtlCol="0" anchor="ctr"/>
+          <a:lstStyle/>
+          <a:p>
+            <a:pPr indent="0" marL="0">
+              <a:buNone/>
+            </a:pPr>
+            <a:r>
+              <a:rPr lang="en-US" sz="1050" dirty="0">
+                <a:solidFill>
+                  <a:srgbClr val="111111"/>
+                </a:solidFill>
+              </a:rPr>
+              <a:t>Age Up</a:t>
+            </a:r>
+            <a:endParaRPr lang="en-US" sz="1050" dirty="0"/>
+          </a:p>
+        </p:txBody>
+      </p:sp>
+      <p:sp>
+        <p:nvSpPr>
+          <p:cNvPr id="12" name="lg-dot-5.68-2"/>
+          <p:cNvSpPr/>
+          <p:nvPr/>
+        </p:nvSpPr>
+        <p:spPr>
+          <a:xfrm>
+            <a:off x="2454250" y="5234940"/>
+            <a:ext cx="109728" cy="109728"/>
+          </a:xfrm>
+          <a:prstGeom prst="ellipse">
+            <a:avLst/>
+          </a:prstGeom>
+          <a:solidFill>
+            <a:srgbClr val="1F6FB2"/>
+          </a:solidFill>
+          <a:ln w="12700">
+            <a:solidFill>
+              <a:srgbClr val="1F6FB2"/>
+            </a:solidFill>
+            <a:prstDash val="solid"/>
+          </a:ln>
+        </p:spPr>
+      </p:sp>
+      <p:sp>
+        <p:nvSpPr>
+          <p:cNvPr id="13" name="lg-txt-5.68-2"/>
+          <p:cNvSpPr txBox="1"/>
+          <p:nvPr/>
+        </p:nvSpPr>
+        <p:spPr>
+          <a:xfrm>
+            <a:off x="2609698" y="5193792"/>
+            <a:ext cx="727862" cy="201168"/>
+          </a:xfrm>
+          <a:prstGeom prst="rect">
+            <a:avLst/>
+          </a:prstGeom>
+          <a:noFill/>
+          <a:ln/>
+        </p:spPr>
+        <p:txBody>
+          <a:bodyPr wrap="square" lIns="0" tIns="0" rIns="0" bIns="0" rtlCol="0" anchor="ctr"/>
+          <a:lstStyle/>
+          <a:p>
+            <a:pPr indent="0" marL="0">
+              <a:buNone/>
+            </a:pPr>
+            <a:r>
+              <a:rPr lang="en-US" sz="1050" dirty="0">
+                <a:solidFill>
+                  <a:srgbClr val="111111"/>
+                </a:solidFill>
+              </a:rPr>
+              <a:t>Age Down</a:t>
+            </a:r>
+            <a:endParaRPr lang="en-US" sz="1050" dirty="0"/>
+          </a:p>
+        </p:txBody>
+      </p:sp>
+      <p:sp>
+        <p:nvSpPr>
+          <p:cNvPr id="14" name="lg-dot-5.68-3"/>
+          <p:cNvSpPr/>
+          <p:nvPr/>
+        </p:nvSpPr>
+        <p:spPr>
+          <a:xfrm>
+            <a:off x="3447288" y="5234940"/>
+            <a:ext cx="109728" cy="109728"/>
+          </a:xfrm>
+          <a:prstGeom prst="ellipse">
+            <a:avLst/>
+          </a:prstGeom>
+          <a:solidFill>
+            <a:srgbClr val="2E7D32"/>
+          </a:solidFill>
+          <a:ln w="12700">
+            <a:solidFill>
+              <a:srgbClr val="2E7D32"/>
+            </a:solidFill>
+            <a:prstDash val="solid"/>
+          </a:ln>
+        </p:spPr>
+      </p:sp>
+      <p:sp>
+        <p:nvSpPr>
+          <p:cNvPr id="15" name="lg-txt-5.68-3"/>
+          <p:cNvSpPr txBox="1"/>
+          <p:nvPr/>
+        </p:nvSpPr>
+        <p:spPr>
+          <a:xfrm>
+            <a:off x="3602736" y="5193792"/>
+            <a:ext cx="925373" cy="201168"/>
+          </a:xfrm>
+          <a:prstGeom prst="rect">
+            <a:avLst/>
+          </a:prstGeom>
+          <a:noFill/>
+          <a:ln/>
+        </p:spPr>
+        <p:txBody>
+          <a:bodyPr wrap="square" lIns="0" tIns="0" rIns="0" bIns="0" rtlCol="0" anchor="ctr"/>
+          <a:lstStyle/>
+          <a:p>
+            <a:pPr indent="0" marL="0">
+              <a:buNone/>
+            </a:pPr>
+            <a:r>
+              <a:rPr lang="en-US" sz="1050" dirty="0">
+                <a:solidFill>
+                  <a:srgbClr val="111111"/>
+                </a:solidFill>
+              </a:rPr>
+              <a:t>Exercise Up</a:t>
+            </a:r>
+            <a:endParaRPr lang="en-US" sz="1050" dirty="0"/>
+          </a:p>
+        </p:txBody>
+      </p:sp>
+      <p:sp>
+        <p:nvSpPr>
+          <p:cNvPr id="16" name="lg-dot-5.68-4"/>
+          <p:cNvSpPr/>
+          <p:nvPr/>
+        </p:nvSpPr>
+        <p:spPr>
+          <a:xfrm>
+            <a:off x="4637837" y="5234940"/>
+            <a:ext cx="109728" cy="109728"/>
+          </a:xfrm>
+          <a:prstGeom prst="ellipse">
+            <a:avLst/>
+          </a:prstGeom>
+          <a:solidFill>
+            <a:srgbClr val="7B3FA0"/>
+          </a:solidFill>
+          <a:ln w="12700">
+            <a:solidFill>
+              <a:srgbClr val="7B3FA0"/>
+            </a:solidFill>
+            <a:prstDash val="solid"/>
+          </a:ln>
+        </p:spPr>
+      </p:sp>
+      <p:sp>
+        <p:nvSpPr>
+          <p:cNvPr id="17" name="lg-txt-5.68-4"/>
+          <p:cNvSpPr txBox="1"/>
+          <p:nvPr/>
+        </p:nvSpPr>
+        <p:spPr>
+          <a:xfrm>
+            <a:off x="4793285" y="5193792"/>
+            <a:ext cx="1057046" cy="201168"/>
+          </a:xfrm>
+          <a:prstGeom prst="rect">
+            <a:avLst/>
+          </a:prstGeom>
+          <a:noFill/>
+          <a:ln/>
+        </p:spPr>
+        <p:txBody>
+          <a:bodyPr wrap="square" lIns="0" tIns="0" rIns="0" bIns="0" rtlCol="0" anchor="ctr"/>
+          <a:lstStyle/>
+          <a:p>
+            <a:pPr indent="0" marL="0">
+              <a:buNone/>
+            </a:pPr>
+            <a:r>
+              <a:rPr lang="en-US" sz="1050" dirty="0">
+                <a:solidFill>
+                  <a:srgbClr val="111111"/>
+                </a:solidFill>
+              </a:rPr>
+              <a:t>Exercise Down</a:t>
+            </a:r>
+            <a:endParaRPr lang="en-US" sz="1050" dirty="0"/>
+          </a:p>
+        </p:txBody>
+      </p:sp>
+      <p:sp>
+        <p:nvSpPr>
+          <p:cNvPr id="18" name="pa-key"/>
+          <p:cNvSpPr txBox="1"/>
+          <p:nvPr/>
+        </p:nvSpPr>
+        <p:spPr>
+          <a:xfrm>
+            <a:off x="731520" y="5468112"/>
+            <a:ext cx="10698480" cy="274320"/>
+          </a:xfrm>
+          <a:prstGeom prst="rect">
+            <a:avLst/>
+          </a:prstGeom>
+          <a:noFill/>
+          <a:ln/>
+        </p:spPr>
+        <p:txBody>
+          <a:bodyPr wrap="square" lIns="0" tIns="0" rIns="0" bIns="0" rtlCol="0" anchor="ctr"/>
+          <a:lstStyle/>
+          <a:p>
+            <a:pPr indent="0" marL="0">
+              <a:buNone/>
+            </a:pPr>
+            <a:r>
+              <a:rPr lang="en-US" sz="950" dirty="0">
+                <a:solidFill>
+                  <a:srgbClr val="595959"/>
+                </a:solidFill>
+              </a:rPr>
+              <a:t>six families shown, tests run over all 40 class-by-family comparisons; smallest FDR 0.04, and only before matching</a:t>
+            </a:r>
+            <a:endParaRPr lang="en-US" sz="950" dirty="0"/>
+          </a:p>
+        </p:txBody>
+      </p:sp>
+      <p:sp>
+        <p:nvSpPr>
+          <p:cNvPr id="19" name="Text 0"/>
           <p:cNvSpPr/>
           <p:nvPr>
             <p:ph idx="101" type="body" hasCustomPrompt="1"/>
@@ -5412,9 +8167,81 @@
           </a:p>
         </p:txBody>
       </p:sp>
+      <p:sp>
+        <p:nvSpPr>
+          <p:cNvPr id="3" name="sp-t1"/>
+          <p:cNvSpPr txBox="1"/>
+          <p:nvPr/>
+        </p:nvSpPr>
+        <p:spPr>
+          <a:xfrm>
+            <a:off x="731520" y="1051560"/>
+            <a:ext cx="4937760" cy="274320"/>
+          </a:xfrm>
+          <a:prstGeom prst="rect">
+            <a:avLst/>
+          </a:prstGeom>
+          <a:noFill/>
+          <a:ln/>
+        </p:spPr>
+        <p:txBody>
+          <a:bodyPr wrap="square" lIns="0" tIns="0" rIns="0" bIns="0" rtlCol="0" anchor="ctr"/>
+          <a:lstStyle/>
+          <a:p>
+            <a:pPr indent="0" marL="0">
+              <a:buNone/>
+            </a:pPr>
+            <a:r>
+              <a:rPr lang="en-US" sz="1350" b="1" dirty="0">
+                <a:solidFill>
+                  <a:srgbClr val="111111"/>
+                </a:solidFill>
+              </a:rPr>
+              <a:t>How often a partner sits there</a:t>
+            </a:r>
+            <a:endParaRPr lang="en-US" sz="1350" dirty="0"/>
+          </a:p>
+        </p:txBody>
+      </p:sp>
+      <p:sp>
+        <p:nvSpPr>
+          <p:cNvPr id="4" name="sp-s1"/>
+          <p:cNvSpPr txBox="1"/>
+          <p:nvPr/>
+        </p:nvSpPr>
+        <p:spPr>
+          <a:xfrm>
+            <a:off x="731520" y="1335024"/>
+            <a:ext cx="4937760" cy="274320"/>
+          </a:xfrm>
+          <a:prstGeom prst="rect">
+            <a:avLst/>
+          </a:prstGeom>
+          <a:noFill/>
+          <a:ln/>
+        </p:spPr>
+        <p:txBody>
+          <a:bodyPr wrap="square" lIns="0" tIns="0" rIns="0" bIns="0" rtlCol="0" anchor="ctr"/>
+          <a:lstStyle/>
+          <a:p>
+            <a:pPr indent="0" marL="0">
+              <a:buNone/>
+            </a:pPr>
+            <a:r>
+              <a:rPr lang="en-US" sz="1050" dirty="0">
+                <a:solidFill>
+                  <a:srgbClr val="595959"/>
+                </a:solidFill>
+              </a:rPr>
+              <a:t>every footprint of that family, important or not</a:t>
+            </a:r>
+            <a:endParaRPr lang="en-US" sz="1050" dirty="0"/>
+          </a:p>
+        </p:txBody>
+      </p:sp>
       <p:pic>
         <p:nvPicPr>
-          <p:cNvPr id="3" name="Image 0" descr="/Users/z5162865/WongLab/AlphaGenome_Ap1/Analysis/slide_figures/s7_spacing.png">    </p:cNvPr>
+          <p:cNvPr id="5" name="Image 0" descr="/Users/z5162865/WongLab/AlphaGenome_Ap1/Analysis/slide_figures/panels/s7_occurrence.png">    </p:cNvPr>
           <p:cNvPicPr>
             <a:picLocks noChangeAspect="1"/>
           </p:cNvPicPr>
@@ -5428,8 +8255,8 @@
         </p:blipFill>
         <p:spPr>
           <a:xfrm>
-            <a:off x="502920" y="1225857"/>
-            <a:ext cx="11155680" cy="4314846"/>
+            <a:off x="757624" y="1691640"/>
+            <a:ext cx="4885551" cy="3200400"/>
           </a:xfrm>
           <a:prstGeom prst="rect">
             <a:avLst/>
@@ -5438,7 +8265,261 @@
       </p:pic>
       <p:sp>
         <p:nvSpPr>
-          <p:cNvPr id="4" name="Text 0"/>
+          <p:cNvPr id="6" name="sp-t2"/>
+          <p:cNvSpPr txBox="1"/>
+          <p:nvPr/>
+        </p:nvSpPr>
+        <p:spPr>
+          <a:xfrm>
+            <a:off x="6309360" y="1051560"/>
+            <a:ext cx="5120640" cy="274320"/>
+          </a:xfrm>
+          <a:prstGeom prst="rect">
+            <a:avLst/>
+          </a:prstGeom>
+          <a:noFill/>
+          <a:ln/>
+        </p:spPr>
+        <p:txBody>
+          <a:bodyPr wrap="square" lIns="0" tIns="0" rIns="0" bIns="0" rtlCol="0" anchor="ctr"/>
+          <a:lstStyle/>
+          <a:p>
+            <a:pPr indent="0" marL="0">
+              <a:buNone/>
+            </a:pPr>
+            <a:r>
+              <a:rPr lang="en-US" sz="1350" b="1" dirty="0">
+                <a:solidFill>
+                  <a:srgbClr val="111111"/>
+                </a:solidFill>
+              </a:rPr>
+              <a:t>How much it matters there</a:t>
+            </a:r>
+            <a:endParaRPr lang="en-US" sz="1350" dirty="0"/>
+          </a:p>
+        </p:txBody>
+      </p:sp>
+      <p:sp>
+        <p:nvSpPr>
+          <p:cNvPr id="7" name="sp-s2"/>
+          <p:cNvSpPr txBox="1"/>
+          <p:nvPr/>
+        </p:nvSpPr>
+        <p:spPr>
+          <a:xfrm>
+            <a:off x="6309360" y="1335024"/>
+            <a:ext cx="5120640" cy="274320"/>
+          </a:xfrm>
+          <a:prstGeom prst="rect">
+            <a:avLst/>
+          </a:prstGeom>
+          <a:noFill/>
+          <a:ln/>
+        </p:spPr>
+        <p:txBody>
+          <a:bodyPr wrap="square" lIns="0" tIns="0" rIns="0" bIns="0" rtlCol="0" anchor="ctr"/>
+          <a:lstStyle/>
+          <a:p>
+            <a:pPr indent="0" marL="0">
+              <a:buNone/>
+            </a:pPr>
+            <a:r>
+              <a:rPr lang="en-US" sz="1050" dirty="0">
+                <a:solidFill>
+                  <a:srgbClr val="595959"/>
+                </a:solidFill>
+              </a:rPr>
+              <a:t>against footprint-free tiles the same distance away</a:t>
+            </a:r>
+            <a:endParaRPr lang="en-US" sz="1050" dirty="0"/>
+          </a:p>
+        </p:txBody>
+      </p:sp>
+      <p:pic>
+        <p:nvPicPr>
+          <p:cNvPr id="8" name="Image 1" descr="/Users/z5162865/WongLab/AlphaGenome_Ap1/Analysis/slide_figures/panels/s7_importance.png">    </p:cNvPr>
+          <p:cNvPicPr>
+            <a:picLocks noChangeAspect="1"/>
+          </p:cNvPicPr>
+          <p:nvPr/>
+        </p:nvPicPr>
+        <p:blipFill>
+          <a:blip r:embed="rId2"/>
+          <a:stretch>
+            <a:fillRect/>
+          </a:stretch>
+        </p:blipFill>
+        <p:spPr>
+          <a:xfrm>
+            <a:off x="6409568" y="1691640"/>
+            <a:ext cx="4920225" cy="3200400"/>
+          </a:xfrm>
+          <a:prstGeom prst="rect">
+            <a:avLst/>
+          </a:prstGeom>
+        </p:spPr>
+      </p:pic>
+      <p:sp>
+        <p:nvSpPr>
+          <p:cNvPr id="9" name="lg-dot-5.45-0"/>
+          <p:cNvSpPr/>
+          <p:nvPr/>
+        </p:nvSpPr>
+        <p:spPr>
+          <a:xfrm>
+            <a:off x="731520" y="5024628"/>
+            <a:ext cx="109728" cy="109728"/>
+          </a:xfrm>
+          <a:prstGeom prst="ellipse">
+            <a:avLst/>
+          </a:prstGeom>
+          <a:solidFill>
+            <a:srgbClr val="C2551C"/>
+          </a:solidFill>
+          <a:ln w="12700">
+            <a:solidFill>
+              <a:srgbClr val="C2551C"/>
+            </a:solidFill>
+            <a:prstDash val="solid"/>
+          </a:ln>
+        </p:spPr>
+      </p:sp>
+      <p:sp>
+        <p:nvSpPr>
+          <p:cNvPr id="10" name="lg-txt-5.45-0"/>
+          <p:cNvSpPr txBox="1"/>
+          <p:nvPr/>
+        </p:nvSpPr>
+        <p:spPr>
+          <a:xfrm>
+            <a:off x="886968" y="4983480"/>
+            <a:ext cx="464515" cy="201168"/>
+          </a:xfrm>
+          <a:prstGeom prst="rect">
+            <a:avLst/>
+          </a:prstGeom>
+          <a:noFill/>
+          <a:ln/>
+        </p:spPr>
+        <p:txBody>
+          <a:bodyPr wrap="square" lIns="0" tIns="0" rIns="0" bIns="0" rtlCol="0" anchor="ctr"/>
+          <a:lstStyle/>
+          <a:p>
+            <a:pPr indent="0" marL="0">
+              <a:buNone/>
+            </a:pPr>
+            <a:r>
+              <a:rPr lang="en-US" sz="1050" dirty="0">
+                <a:solidFill>
+                  <a:srgbClr val="111111"/>
+                </a:solidFill>
+              </a:rPr>
+              <a:t>MEF2</a:t>
+            </a:r>
+            <a:endParaRPr lang="en-US" sz="1050" dirty="0"/>
+          </a:p>
+        </p:txBody>
+      </p:sp>
+      <p:sp>
+        <p:nvSpPr>
+          <p:cNvPr id="11" name="lg-dot-5.45-1"/>
+          <p:cNvSpPr/>
+          <p:nvPr/>
+        </p:nvSpPr>
+        <p:spPr>
+          <a:xfrm>
+            <a:off x="1461211" y="5024628"/>
+            <a:ext cx="109728" cy="109728"/>
+          </a:xfrm>
+          <a:prstGeom prst="ellipse">
+            <a:avLst/>
+          </a:prstGeom>
+          <a:solidFill>
+            <a:srgbClr val="9A9993"/>
+          </a:solidFill>
+          <a:ln w="12700">
+            <a:solidFill>
+              <a:srgbClr val="9A9993"/>
+            </a:solidFill>
+            <a:prstDash val="solid"/>
+          </a:ln>
+        </p:spPr>
+      </p:sp>
+      <p:sp>
+        <p:nvSpPr>
+          <p:cNvPr id="12" name="lg-txt-5.45-1"/>
+          <p:cNvSpPr txBox="1"/>
+          <p:nvPr/>
+        </p:nvSpPr>
+        <p:spPr>
+          <a:xfrm>
+            <a:off x="1616659" y="4983480"/>
+            <a:ext cx="727862" cy="201168"/>
+          </a:xfrm>
+          <a:prstGeom prst="rect">
+            <a:avLst/>
+          </a:prstGeom>
+          <a:noFill/>
+          <a:ln/>
+        </p:spPr>
+        <p:txBody>
+          <a:bodyPr wrap="square" lIns="0" tIns="0" rIns="0" bIns="0" rtlCol="0" anchor="ctr"/>
+          <a:lstStyle/>
+          <a:p>
+            <a:pPr indent="0" marL="0">
+              <a:buNone/>
+            </a:pPr>
+            <a:r>
+              <a:rPr lang="en-US" sz="1050" dirty="0">
+                <a:solidFill>
+                  <a:srgbClr val="111111"/>
+                </a:solidFill>
+              </a:rPr>
+              <a:t>KLF / SP</a:t>
+            </a:r>
+            <a:endParaRPr lang="en-US" sz="1050" dirty="0"/>
+          </a:p>
+        </p:txBody>
+      </p:sp>
+      <p:sp>
+        <p:nvSpPr>
+          <p:cNvPr id="13" name="sp-key"/>
+          <p:cNvSpPr txBox="1"/>
+          <p:nvPr/>
+        </p:nvSpPr>
+        <p:spPr>
+          <a:xfrm>
+            <a:off x="731520" y="5285232"/>
+            <a:ext cx="10698480" cy="365760"/>
+          </a:xfrm>
+          <a:prstGeom prst="rect">
+            <a:avLst/>
+          </a:prstGeom>
+          <a:noFill/>
+          <a:ln/>
+        </p:spPr>
+        <p:txBody>
+          <a:bodyPr wrap="square" lIns="0" tIns="0" rIns="0" bIns="0" rtlCol="0" anchor="ctr"/>
+          <a:lstStyle/>
+          <a:p>
+            <a:pPr indent="0" marL="0">
+              <a:buNone/>
+            </a:pPr>
+            <a:r>
+              <a:rPr lang="en-US" sz="950" dirty="0">
+                <a:solidFill>
+                  <a:srgbClr val="595959"/>
+                </a:solidFill>
+              </a:rPr>
+              <a:t>shaded band on the left: 11–25 bp, where a neighbour abuts the motif.   MEF2 is 2.67× enriched there against 1.47× for KLF/SP (FDR 0.004).</a:t>
+            </a:r>
+            <a:endParaRPr lang="en-US" sz="950" dirty="0"/>
+          </a:p>
+        </p:txBody>
+      </p:sp>
+      <p:sp>
+        <p:nvSpPr>
+          <p:cNvPr id="14" name="Text 0"/>
           <p:cNvSpPr/>
           <p:nvPr>
             <p:ph idx="101" type="body" hasCustomPrompt="1"/>
@@ -5593,9 +8674,81 @@
           </a:p>
         </p:txBody>
       </p:sp>
+      <p:sp>
+        <p:nvSpPr>
+          <p:cNvPr id="3" name="s9_mef2_by_class-title-0"/>
+          <p:cNvSpPr txBox="1"/>
+          <p:nvPr/>
+        </p:nvSpPr>
+        <p:spPr>
+          <a:xfrm>
+            <a:off x="2670048" y="1005840"/>
+            <a:ext cx="3895344" cy="438912"/>
+          </a:xfrm>
+          <a:prstGeom prst="rect">
+            <a:avLst/>
+          </a:prstGeom>
+          <a:noFill/>
+          <a:ln/>
+        </p:spPr>
+        <p:txBody>
+          <a:bodyPr wrap="square" lIns="0" tIns="0" rIns="0" bIns="0" rtlCol="0" anchor="t"/>
+          <a:lstStyle/>
+          <a:p>
+            <a:pPr indent="0" marL="0">
+              <a:buNone/>
+            </a:pPr>
+            <a:r>
+              <a:rPr lang="en-US" sz="1250" b="1" dirty="0">
+                <a:solidFill>
+                  <a:srgbClr val="111111"/>
+                </a:solidFill>
+              </a:rPr>
+              <a:t>A MEF2 footprint within 25 bp</a:t>
+            </a:r>
+            <a:endParaRPr lang="en-US" sz="1250" dirty="0"/>
+          </a:p>
+        </p:txBody>
+      </p:sp>
+      <p:sp>
+        <p:nvSpPr>
+          <p:cNvPr id="4" name="s9_mef2_by_class-sub-0"/>
+          <p:cNvSpPr txBox="1"/>
+          <p:nvPr/>
+        </p:nvSpPr>
+        <p:spPr>
+          <a:xfrm>
+            <a:off x="2670048" y="1435608"/>
+            <a:ext cx="3895344" cy="310896"/>
+          </a:xfrm>
+          <a:prstGeom prst="rect">
+            <a:avLst/>
+          </a:prstGeom>
+          <a:noFill/>
+          <a:ln/>
+        </p:spPr>
+        <p:txBody>
+          <a:bodyPr wrap="square" lIns="0" tIns="0" rIns="0" bIns="0" rtlCol="0" anchor="t"/>
+          <a:lstStyle/>
+          <a:p>
+            <a:pPr indent="0" marL="0">
+              <a:buNone/>
+            </a:pPr>
+            <a:r>
+              <a:rPr lang="en-US" sz="950" dirty="0">
+                <a:solidFill>
+                  <a:srgbClr val="595959"/>
+                </a:solidFill>
+              </a:rPr>
+              <a:t>counting footprints, used by the model or not</a:t>
+            </a:r>
+            <a:endParaRPr lang="en-US" sz="950" dirty="0"/>
+          </a:p>
+        </p:txBody>
+      </p:sp>
       <p:pic>
         <p:nvPicPr>
-          <p:cNvPr id="3" name="Image 0" descr="/Users/z5162865/WongLab/AlphaGenome_Ap1/Analysis/slide_figures/s9_mef2_by_class.png">    </p:cNvPr>
+          <p:cNvPr id="5" name="Image 0" descr="/Users/z5162865/WongLab/AlphaGenome_Ap1/Analysis/slide_figures/panels/s9_mef2_by_class_c0_r0.png">    </p:cNvPr>
           <p:cNvPicPr>
             <a:picLocks noChangeAspect="1"/>
           </p:cNvPicPr>
@@ -5609,17 +8762,635 @@
         </p:blipFill>
         <p:spPr>
           <a:xfrm>
-            <a:off x="2638189" y="1051560"/>
-            <a:ext cx="6885142" cy="4617720"/>
+            <a:off x="3465965" y="1755648"/>
+            <a:ext cx="2303510" cy="1463040"/>
           </a:xfrm>
           <a:prstGeom prst="rect">
             <a:avLst/>
           </a:prstGeom>
         </p:spPr>
       </p:pic>
-      <p:sp>
-        <p:nvSpPr>
-          <p:cNvPr id="4" name="Text 0"/>
+      <p:pic>
+        <p:nvPicPr>
+          <p:cNvPr id="6" name="Image 1" descr="/Users/z5162865/WongLab/AlphaGenome_Ap1/Analysis/slide_figures/panels/s9_mef2_by_class_c0_r1.png">    </p:cNvPr>
+          <p:cNvPicPr>
+            <a:picLocks noChangeAspect="1"/>
+          </p:cNvPicPr>
+          <p:nvPr/>
+        </p:nvPicPr>
+        <p:blipFill>
+          <a:blip r:embed="rId2"/>
+          <a:stretch>
+            <a:fillRect/>
+          </a:stretch>
+        </p:blipFill>
+        <p:spPr>
+          <a:xfrm>
+            <a:off x="3465965" y="3291840"/>
+            <a:ext cx="2303510" cy="1463040"/>
+          </a:xfrm>
+          <a:prstGeom prst="rect">
+            <a:avLst/>
+          </a:prstGeom>
+        </p:spPr>
+      </p:pic>
+      <p:sp>
+        <p:nvSpPr>
+          <p:cNvPr id="7" name="s9_mef2_by_class-title-1"/>
+          <p:cNvSpPr txBox="1"/>
+          <p:nvPr/>
+        </p:nvSpPr>
+        <p:spPr>
+          <a:xfrm>
+            <a:off x="6638544" y="1005840"/>
+            <a:ext cx="3895344" cy="438912"/>
+          </a:xfrm>
+          <a:prstGeom prst="rect">
+            <a:avLst/>
+          </a:prstGeom>
+          <a:noFill/>
+          <a:ln/>
+        </p:spPr>
+        <p:txBody>
+          <a:bodyPr wrap="square" lIns="0" tIns="0" rIns="0" bIns="0" rtlCol="0" anchor="t"/>
+          <a:lstStyle/>
+          <a:p>
+            <a:pPr indent="0" marL="0">
+              <a:buNone/>
+            </a:pPr>
+            <a:r>
+              <a:rPr lang="en-US" sz="1250" b="1" dirty="0">
+                <a:solidFill>
+                  <a:srgbClr val="111111"/>
+                </a:solidFill>
+              </a:rPr>
+              <a:t>...one the model actually leans on</a:t>
+            </a:r>
+            <a:endParaRPr lang="en-US" sz="1250" dirty="0"/>
+          </a:p>
+        </p:txBody>
+      </p:sp>
+      <p:sp>
+        <p:nvSpPr>
+          <p:cNvPr id="8" name="s9_mef2_by_class-sub-1"/>
+          <p:cNvSpPr txBox="1"/>
+          <p:nvPr/>
+        </p:nvSpPr>
+        <p:spPr>
+          <a:xfrm>
+            <a:off x="6638544" y="1435608"/>
+            <a:ext cx="3895344" cy="310896"/>
+          </a:xfrm>
+          <a:prstGeom prst="rect">
+            <a:avLst/>
+          </a:prstGeom>
+          <a:noFill/>
+          <a:ln/>
+        </p:spPr>
+        <p:txBody>
+          <a:bodyPr wrap="square" lIns="0" tIns="0" rIns="0" bIns="0" rtlCol="0" anchor="t"/>
+          <a:lstStyle/>
+          <a:p>
+            <a:pPr indent="0" marL="0">
+              <a:buNone/>
+            </a:pPr>
+            <a:r>
+              <a:rPr lang="en-US" sz="950" dirty="0">
+                <a:solidFill>
+                  <a:srgbClr val="595959"/>
+                </a:solidFill>
+              </a:rPr>
+              <a:t>restricted to tiles worth more than 0.2 log2</a:t>
+            </a:r>
+            <a:endParaRPr lang="en-US" sz="950" dirty="0"/>
+          </a:p>
+        </p:txBody>
+      </p:sp>
+      <p:pic>
+        <p:nvPicPr>
+          <p:cNvPr id="9" name="Image 2" descr="/Users/z5162865/WongLab/AlphaGenome_Ap1/Analysis/slide_figures/panels/s9_mef2_by_class_c1_r0.png">    </p:cNvPr>
+          <p:cNvPicPr>
+            <a:picLocks noChangeAspect="1"/>
+          </p:cNvPicPr>
+          <p:nvPr/>
+        </p:nvPicPr>
+        <p:blipFill>
+          <a:blip r:embed="rId3"/>
+          <a:stretch>
+            <a:fillRect/>
+          </a:stretch>
+        </p:blipFill>
+        <p:spPr>
+          <a:xfrm>
+            <a:off x="7434461" y="1755648"/>
+            <a:ext cx="2303510" cy="1463040"/>
+          </a:xfrm>
+          <a:prstGeom prst="rect">
+            <a:avLst/>
+          </a:prstGeom>
+        </p:spPr>
+      </p:pic>
+      <p:pic>
+        <p:nvPicPr>
+          <p:cNvPr id="10" name="Image 3" descr="/Users/z5162865/WongLab/AlphaGenome_Ap1/Analysis/slide_figures/panels/s9_mef2_by_class_c1_r1.png">    </p:cNvPr>
+          <p:cNvPicPr>
+            <a:picLocks noChangeAspect="1"/>
+          </p:cNvPicPr>
+          <p:nvPr/>
+        </p:nvPicPr>
+        <p:blipFill>
+          <a:blip r:embed="rId4"/>
+          <a:stretch>
+            <a:fillRect/>
+          </a:stretch>
+        </p:blipFill>
+        <p:spPr>
+          <a:xfrm>
+            <a:off x="7434461" y="3291840"/>
+            <a:ext cx="2303510" cy="1463040"/>
+          </a:xfrm>
+          <a:prstGeom prst="rect">
+            <a:avLst/>
+          </a:prstGeom>
+        </p:spPr>
+      </p:pic>
+      <p:sp>
+        <p:nvSpPr>
+          <p:cNvPr id="11" name="s9_mef2_by_class-row-0"/>
+          <p:cNvSpPr txBox="1"/>
+          <p:nvPr/>
+        </p:nvSpPr>
+        <p:spPr>
+          <a:xfrm rot="16200000">
+            <a:off x="1536192" y="1837944"/>
+            <a:ext cx="1371600" cy="1371600"/>
+          </a:xfrm>
+          <a:prstGeom prst="rect">
+            <a:avLst/>
+          </a:prstGeom>
+          <a:noFill/>
+          <a:ln/>
+        </p:spPr>
+        <p:txBody>
+          <a:bodyPr wrap="square" lIns="0" tIns="0" rIns="0" bIns="0" rtlCol="0" anchor="ctr"/>
+          <a:lstStyle/>
+          <a:p>
+            <a:pPr algn="ctr" indent="0" marL="0">
+              <a:buNone/>
+            </a:pPr>
+            <a:r>
+              <a:rPr lang="en-US" sz="1000" dirty="0">
+                <a:solidFill>
+                  <a:srgbClr val="111111"/>
+                </a:solidFill>
+              </a:rPr>
+              <a:t>all sites, nothing controlled</a:t>
+            </a:r>
+            <a:endParaRPr lang="en-US" sz="1000" dirty="0"/>
+          </a:p>
+        </p:txBody>
+      </p:sp>
+      <p:sp>
+        <p:nvSpPr>
+          <p:cNvPr id="12" name="s9_mef2_by_class-row-1"/>
+          <p:cNvSpPr txBox="1"/>
+          <p:nvPr/>
+        </p:nvSpPr>
+        <p:spPr>
+          <a:xfrm rot="16200000">
+            <a:off x="1536192" y="3374136"/>
+            <a:ext cx="1371600" cy="1371600"/>
+          </a:xfrm>
+          <a:prstGeom prst="rect">
+            <a:avLst/>
+          </a:prstGeom>
+          <a:noFill/>
+          <a:ln/>
+        </p:spPr>
+        <p:txBody>
+          <a:bodyPr wrap="square" lIns="0" tIns="0" rIns="0" bIns="0" rtlCol="0" anchor="ctr"/>
+          <a:lstStyle/>
+          <a:p>
+            <a:pPr algn="ctr" indent="0" marL="0">
+              <a:buNone/>
+            </a:pPr>
+            <a:r>
+              <a:rPr lang="en-US" sz="1000" dirty="0">
+                <a:solidFill>
+                  <a:srgbClr val="111111"/>
+                </a:solidFill>
+              </a:rPr>
+              <a:t>each class against its own matched Stable controls</a:t>
+            </a:r>
+            <a:endParaRPr lang="en-US" sz="1000" dirty="0"/>
+          </a:p>
+        </p:txBody>
+      </p:sp>
+      <p:sp>
+        <p:nvSpPr>
+          <p:cNvPr id="13" name="s9_mef2_by_class-dot-0"/>
+          <p:cNvSpPr/>
+          <p:nvPr/>
+        </p:nvSpPr>
+        <p:spPr>
+          <a:xfrm>
+            <a:off x="2670048" y="4960620"/>
+            <a:ext cx="109728" cy="109728"/>
+          </a:xfrm>
+          <a:prstGeom prst="ellipse">
+            <a:avLst/>
+          </a:prstGeom>
+          <a:solidFill>
+            <a:srgbClr val="4F4F4F"/>
+          </a:solidFill>
+          <a:ln w="12700">
+            <a:solidFill>
+              <a:srgbClr val="4F4F4F"/>
+            </a:solidFill>
+            <a:prstDash val="solid"/>
+          </a:ln>
+        </p:spPr>
+      </p:sp>
+      <p:sp>
+        <p:nvSpPr>
+          <p:cNvPr id="14" name="s9_mef2_by_class-leg-0"/>
+          <p:cNvSpPr txBox="1"/>
+          <p:nvPr/>
+        </p:nvSpPr>
+        <p:spPr>
+          <a:xfrm>
+            <a:off x="2825496" y="4919472"/>
+            <a:ext cx="1057046" cy="201168"/>
+          </a:xfrm>
+          <a:prstGeom prst="rect">
+            <a:avLst/>
+          </a:prstGeom>
+          <a:noFill/>
+          <a:ln/>
+        </p:spPr>
+        <p:txBody>
+          <a:bodyPr wrap="square" lIns="0" tIns="0" rIns="0" bIns="0" rtlCol="0" anchor="ctr"/>
+          <a:lstStyle/>
+          <a:p>
+            <a:pPr indent="0" marL="0">
+              <a:buNone/>
+            </a:pPr>
+            <a:r>
+              <a:rPr lang="en-US" sz="1050" dirty="0">
+                <a:solidFill>
+                  <a:srgbClr val="111111"/>
+                </a:solidFill>
+              </a:rPr>
+              <a:t>Dynamic (all)</a:t>
+            </a:r>
+            <a:endParaRPr lang="en-US" sz="1050" dirty="0"/>
+          </a:p>
+        </p:txBody>
+      </p:sp>
+      <p:sp>
+        <p:nvSpPr>
+          <p:cNvPr id="15" name="s9_mef2_by_class-dot-1"/>
+          <p:cNvSpPr/>
+          <p:nvPr/>
+        </p:nvSpPr>
+        <p:spPr>
+          <a:xfrm>
+            <a:off x="3992270" y="4960620"/>
+            <a:ext cx="109728" cy="109728"/>
+          </a:xfrm>
+          <a:prstGeom prst="ellipse">
+            <a:avLst/>
+          </a:prstGeom>
+          <a:solidFill>
+            <a:srgbClr val="C2551C"/>
+          </a:solidFill>
+          <a:ln w="12700">
+            <a:solidFill>
+              <a:srgbClr val="C2551C"/>
+            </a:solidFill>
+            <a:prstDash val="solid"/>
+          </a:ln>
+        </p:spPr>
+      </p:sp>
+      <p:sp>
+        <p:nvSpPr>
+          <p:cNvPr id="16" name="s9_mef2_by_class-leg-1"/>
+          <p:cNvSpPr txBox="1"/>
+          <p:nvPr/>
+        </p:nvSpPr>
+        <p:spPr>
+          <a:xfrm>
+            <a:off x="4147718" y="4919472"/>
+            <a:ext cx="596189" cy="201168"/>
+          </a:xfrm>
+          <a:prstGeom prst="rect">
+            <a:avLst/>
+          </a:prstGeom>
+          <a:noFill/>
+          <a:ln/>
+        </p:spPr>
+        <p:txBody>
+          <a:bodyPr wrap="square" lIns="0" tIns="0" rIns="0" bIns="0" rtlCol="0" anchor="ctr"/>
+          <a:lstStyle/>
+          <a:p>
+            <a:pPr indent="0" marL="0">
+              <a:buNone/>
+            </a:pPr>
+            <a:r>
+              <a:rPr lang="en-US" sz="1050" dirty="0">
+                <a:solidFill>
+                  <a:srgbClr val="111111"/>
+                </a:solidFill>
+              </a:rPr>
+              <a:t>Age Up</a:t>
+            </a:r>
+            <a:endParaRPr lang="en-US" sz="1050" dirty="0"/>
+          </a:p>
+        </p:txBody>
+      </p:sp>
+      <p:sp>
+        <p:nvSpPr>
+          <p:cNvPr id="17" name="s9_mef2_by_class-dot-2"/>
+          <p:cNvSpPr/>
+          <p:nvPr/>
+        </p:nvSpPr>
+        <p:spPr>
+          <a:xfrm>
+            <a:off x="4853635" y="4960620"/>
+            <a:ext cx="109728" cy="109728"/>
+          </a:xfrm>
+          <a:prstGeom prst="ellipse">
+            <a:avLst/>
+          </a:prstGeom>
+          <a:solidFill>
+            <a:srgbClr val="1F6FB2"/>
+          </a:solidFill>
+          <a:ln w="12700">
+            <a:solidFill>
+              <a:srgbClr val="1F6FB2"/>
+            </a:solidFill>
+            <a:prstDash val="solid"/>
+          </a:ln>
+        </p:spPr>
+      </p:sp>
+      <p:sp>
+        <p:nvSpPr>
+          <p:cNvPr id="18" name="s9_mef2_by_class-leg-2"/>
+          <p:cNvSpPr txBox="1"/>
+          <p:nvPr/>
+        </p:nvSpPr>
+        <p:spPr>
+          <a:xfrm>
+            <a:off x="5009083" y="4919472"/>
+            <a:ext cx="727862" cy="201168"/>
+          </a:xfrm>
+          <a:prstGeom prst="rect">
+            <a:avLst/>
+          </a:prstGeom>
+          <a:noFill/>
+          <a:ln/>
+        </p:spPr>
+        <p:txBody>
+          <a:bodyPr wrap="square" lIns="0" tIns="0" rIns="0" bIns="0" rtlCol="0" anchor="ctr"/>
+          <a:lstStyle/>
+          <a:p>
+            <a:pPr indent="0" marL="0">
+              <a:buNone/>
+            </a:pPr>
+            <a:r>
+              <a:rPr lang="en-US" sz="1050" dirty="0">
+                <a:solidFill>
+                  <a:srgbClr val="111111"/>
+                </a:solidFill>
+              </a:rPr>
+              <a:t>Age Down</a:t>
+            </a:r>
+            <a:endParaRPr lang="en-US" sz="1050" dirty="0"/>
+          </a:p>
+        </p:txBody>
+      </p:sp>
+      <p:sp>
+        <p:nvSpPr>
+          <p:cNvPr id="19" name="s9_mef2_by_class-dot-3"/>
+          <p:cNvSpPr/>
+          <p:nvPr/>
+        </p:nvSpPr>
+        <p:spPr>
+          <a:xfrm>
+            <a:off x="5846674" y="4960620"/>
+            <a:ext cx="109728" cy="109728"/>
+          </a:xfrm>
+          <a:prstGeom prst="ellipse">
+            <a:avLst/>
+          </a:prstGeom>
+          <a:solidFill>
+            <a:srgbClr val="2E7D32"/>
+          </a:solidFill>
+          <a:ln w="12700">
+            <a:solidFill>
+              <a:srgbClr val="2E7D32"/>
+            </a:solidFill>
+            <a:prstDash val="solid"/>
+          </a:ln>
+        </p:spPr>
+      </p:sp>
+      <p:sp>
+        <p:nvSpPr>
+          <p:cNvPr id="20" name="s9_mef2_by_class-leg-3"/>
+          <p:cNvSpPr txBox="1"/>
+          <p:nvPr/>
+        </p:nvSpPr>
+        <p:spPr>
+          <a:xfrm>
+            <a:off x="6002122" y="4919472"/>
+            <a:ext cx="925373" cy="201168"/>
+          </a:xfrm>
+          <a:prstGeom prst="rect">
+            <a:avLst/>
+          </a:prstGeom>
+          <a:noFill/>
+          <a:ln/>
+        </p:spPr>
+        <p:txBody>
+          <a:bodyPr wrap="square" lIns="0" tIns="0" rIns="0" bIns="0" rtlCol="0" anchor="ctr"/>
+          <a:lstStyle/>
+          <a:p>
+            <a:pPr indent="0" marL="0">
+              <a:buNone/>
+            </a:pPr>
+            <a:r>
+              <a:rPr lang="en-US" sz="1050" dirty="0">
+                <a:solidFill>
+                  <a:srgbClr val="111111"/>
+                </a:solidFill>
+              </a:rPr>
+              <a:t>Exercise Up</a:t>
+            </a:r>
+            <a:endParaRPr lang="en-US" sz="1050" dirty="0"/>
+          </a:p>
+        </p:txBody>
+      </p:sp>
+      <p:sp>
+        <p:nvSpPr>
+          <p:cNvPr id="21" name="s9_mef2_by_class-dot-4"/>
+          <p:cNvSpPr/>
+          <p:nvPr/>
+        </p:nvSpPr>
+        <p:spPr>
+          <a:xfrm>
+            <a:off x="7037222" y="4960620"/>
+            <a:ext cx="109728" cy="109728"/>
+          </a:xfrm>
+          <a:prstGeom prst="ellipse">
+            <a:avLst/>
+          </a:prstGeom>
+          <a:solidFill>
+            <a:srgbClr val="7B3FA0"/>
+          </a:solidFill>
+          <a:ln w="12700">
+            <a:solidFill>
+              <a:srgbClr val="7B3FA0"/>
+            </a:solidFill>
+            <a:prstDash val="solid"/>
+          </a:ln>
+        </p:spPr>
+      </p:sp>
+      <p:sp>
+        <p:nvSpPr>
+          <p:cNvPr id="22" name="s9_mef2_by_class-leg-4"/>
+          <p:cNvSpPr txBox="1"/>
+          <p:nvPr/>
+        </p:nvSpPr>
+        <p:spPr>
+          <a:xfrm>
+            <a:off x="7192670" y="4919472"/>
+            <a:ext cx="1057046" cy="201168"/>
+          </a:xfrm>
+          <a:prstGeom prst="rect">
+            <a:avLst/>
+          </a:prstGeom>
+          <a:noFill/>
+          <a:ln/>
+        </p:spPr>
+        <p:txBody>
+          <a:bodyPr wrap="square" lIns="0" tIns="0" rIns="0" bIns="0" rtlCol="0" anchor="ctr"/>
+          <a:lstStyle/>
+          <a:p>
+            <a:pPr indent="0" marL="0">
+              <a:buNone/>
+            </a:pPr>
+            <a:r>
+              <a:rPr lang="en-US" sz="1050" dirty="0">
+                <a:solidFill>
+                  <a:srgbClr val="111111"/>
+                </a:solidFill>
+              </a:rPr>
+              <a:t>Exercise Down</a:t>
+            </a:r>
+            <a:endParaRPr lang="en-US" sz="1050" dirty="0"/>
+          </a:p>
+        </p:txBody>
+      </p:sp>
+      <p:sp>
+        <p:nvSpPr>
+          <p:cNvPr id="23" name="s9_mef2_by_class-dot-5"/>
+          <p:cNvSpPr/>
+          <p:nvPr/>
+        </p:nvSpPr>
+        <p:spPr>
+          <a:xfrm>
+            <a:off x="8359445" y="4960620"/>
+            <a:ext cx="109728" cy="109728"/>
+          </a:xfrm>
+          <a:prstGeom prst="ellipse">
+            <a:avLst/>
+          </a:prstGeom>
+          <a:solidFill>
+            <a:srgbClr val="B3B2AE"/>
+          </a:solidFill>
+          <a:ln w="12700">
+            <a:solidFill>
+              <a:srgbClr val="B3B2AE"/>
+            </a:solidFill>
+            <a:prstDash val="solid"/>
+          </a:ln>
+        </p:spPr>
+      </p:sp>
+      <p:sp>
+        <p:nvSpPr>
+          <p:cNvPr id="24" name="s9_mef2_by_class-leg-5"/>
+          <p:cNvSpPr txBox="1"/>
+          <p:nvPr/>
+        </p:nvSpPr>
+        <p:spPr>
+          <a:xfrm>
+            <a:off x="8514893" y="4919472"/>
+            <a:ext cx="2373782" cy="201168"/>
+          </a:xfrm>
+          <a:prstGeom prst="rect">
+            <a:avLst/>
+          </a:prstGeom>
+          <a:noFill/>
+          <a:ln/>
+        </p:spPr>
+        <p:txBody>
+          <a:bodyPr wrap="square" lIns="0" tIns="0" rIns="0" bIns="0" rtlCol="0" anchor="ctr"/>
+          <a:lstStyle/>
+          <a:p>
+            <a:pPr indent="0" marL="0">
+              <a:buNone/>
+            </a:pPr>
+            <a:r>
+              <a:rPr lang="en-US" sz="1050" dirty="0">
+                <a:solidFill>
+                  <a:srgbClr val="111111"/>
+                </a:solidFill>
+              </a:rPr>
+              <a:t>Stable (all, or matched controls)</a:t>
+            </a:r>
+            <a:endParaRPr lang="en-US" sz="1050" dirty="0"/>
+          </a:p>
+        </p:txBody>
+      </p:sp>
+      <p:sp>
+        <p:nvSpPr>
+          <p:cNvPr id="25" name="s9_mef2_by_class-key"/>
+          <p:cNvSpPr txBox="1"/>
+          <p:nvPr/>
+        </p:nvSpPr>
+        <p:spPr>
+          <a:xfrm>
+            <a:off x="2011680" y="5193792"/>
+            <a:ext cx="8595360" cy="502920"/>
+          </a:xfrm>
+          <a:prstGeom prst="rect">
+            <a:avLst/>
+          </a:prstGeom>
+          <a:noFill/>
+          <a:ln/>
+        </p:spPr>
+        <p:txBody>
+          <a:bodyPr wrap="square" lIns="0" tIns="0" rIns="0" bIns="0" rtlCol="0" anchor="ctr"/>
+          <a:lstStyle/>
+          <a:p>
+            <a:pPr indent="0" marL="0">
+              <a:buNone/>
+            </a:pPr>
+            <a:r>
+              <a:rPr lang="en-US" sz="900" dirty="0">
+                <a:solidFill>
+                  <a:srgbClr val="595959"/>
+                </a:solidFill>
+              </a:rPr>
+              <a:t>grey line and band (top row): all Stable sites with a 95% bootstrap CI.   grey dots (bottom row): that class's own matched controls.   Fisher on all sites, exact McNemar on matched pairs, BH across all 20 tests.   *** p&lt;0.001   ** p&lt;0.01   * p&lt;0.05   ns ≥ 0.05</a:t>
+            </a:r>
+            <a:endParaRPr lang="en-US" sz="900" dirty="0"/>
+          </a:p>
+        </p:txBody>
+      </p:sp>
+      <p:sp>
+        <p:nvSpPr>
+          <p:cNvPr id="26" name="Text 0"/>
           <p:cNvSpPr/>
           <p:nvPr>
             <p:ph idx="101" type="body" hasCustomPrompt="1"/>
@@ -5957,7 +9728,7 @@
       </p:sp>
       <p:pic>
         <p:nvPicPr>
-          <p:cNvPr id="3" name="Image 0" descr="/Users/z5162865/WongLab/AlphaGenome_Ap1/Analysis/slide_figures/s3_dependence.png">    </p:cNvPr>
+          <p:cNvPr id="3" name="Image 0" descr="/Users/z5162865/WongLab/AlphaGenome_Ap1/Analysis/slide_figures/panels/d_profile.png">    </p:cNvPr>
           <p:cNvPicPr>
             <a:picLocks noChangeAspect="1"/>
           </p:cNvPicPr>
@@ -5971,8 +9742,8 @@
         </p:blipFill>
         <p:spPr>
           <a:xfrm>
-            <a:off x="502920" y="1177741"/>
-            <a:ext cx="11155680" cy="4365358"/>
+            <a:off x="502920" y="1373869"/>
+            <a:ext cx="2286000" cy="1915702"/>
           </a:xfrm>
           <a:prstGeom prst="rect">
             <a:avLst/>
@@ -5981,7 +9752,997 @@
       </p:pic>
       <p:sp>
         <p:nvSpPr>
-          <p:cNvPr id="4" name="Text 0"/>
+          <p:cNvPr id="4" name="profile-caption"/>
+          <p:cNvSpPr txBox="1"/>
+          <p:nvPr/>
+        </p:nvSpPr>
+        <p:spPr>
+          <a:xfrm>
+            <a:off x="502920" y="3337560"/>
+            <a:ext cx="2286000" cy="822960"/>
+          </a:xfrm>
+          <a:prstGeom prst="rect">
+            <a:avLst/>
+          </a:prstGeom>
+          <a:noFill/>
+          <a:ln/>
+        </p:spPr>
+        <p:txBody>
+          <a:bodyPr wrap="square" lIns="0" tIns="0" rIns="0" bIns="0" rtlCol="0" anchor="ctr"/>
+          <a:lstStyle/>
+          <a:p>
+            <a:pPr indent="0" marL="0">
+              <a:buNone/>
+            </a:pPr>
+            <a:r>
+              <a:rPr lang="en-US" sz="950" dirty="0">
+                <a:solidFill>
+                  <a:srgbClr val="595959"/>
+                </a:solidFill>
+              </a:rPr>
+              <a:t>one site’s sliding-window profile: each bar is a 10 bp window replaced, shaded band = within ±85 bp of the motif</a:t>
+            </a:r>
+            <a:endParaRPr lang="en-US" sz="950" dirty="0"/>
+          </a:p>
+        </p:txBody>
+      </p:sp>
+      <p:sp>
+        <p:nvSpPr>
+          <p:cNvPr id="5" name="s3_dependence-title-0"/>
+          <p:cNvSpPr txBox="1"/>
+          <p:nvPr/>
+        </p:nvSpPr>
+        <p:spPr>
+          <a:xfrm>
+            <a:off x="3995928" y="1005840"/>
+            <a:ext cx="1842516" cy="438912"/>
+          </a:xfrm>
+          <a:prstGeom prst="rect">
+            <a:avLst/>
+          </a:prstGeom>
+          <a:noFill/>
+          <a:ln/>
+        </p:spPr>
+        <p:txBody>
+          <a:bodyPr wrap="square" lIns="0" tIns="0" rIns="0" bIns="0" rtlCol="0" anchor="t"/>
+          <a:lstStyle/>
+          <a:p>
+            <a:pPr indent="0" marL="0">
+              <a:buNone/>
+            </a:pPr>
+            <a:r>
+              <a:rPr lang="en-US" sz="1250" b="1" dirty="0">
+                <a:solidFill>
+                  <a:srgbClr val="111111"/>
+                </a:solidFill>
+              </a:rPr>
+              <a:t>Dependence near the motif</a:t>
+            </a:r>
+            <a:endParaRPr lang="en-US" sz="1250" dirty="0"/>
+          </a:p>
+        </p:txBody>
+      </p:sp>
+      <p:sp>
+        <p:nvSpPr>
+          <p:cNvPr id="6" name="s3_dependence-sub-0"/>
+          <p:cNvSpPr txBox="1"/>
+          <p:nvPr/>
+        </p:nvSpPr>
+        <p:spPr>
+          <a:xfrm>
+            <a:off x="3995928" y="1435608"/>
+            <a:ext cx="1842516" cy="310896"/>
+          </a:xfrm>
+          <a:prstGeom prst="rect">
+            <a:avLst/>
+          </a:prstGeom>
+          <a:noFill/>
+          <a:ln/>
+        </p:spPr>
+        <p:txBody>
+          <a:bodyPr wrap="square" lIns="0" tIns="0" rIns="0" bIns="0" rtlCol="0" anchor="t"/>
+          <a:lstStyle/>
+          <a:p>
+            <a:pPr indent="0" marL="0">
+              <a:buNone/>
+            </a:pPr>
+            <a:r>
+              <a:rPr lang="en-US" sz="950" dirty="0">
+                <a:solidFill>
+                  <a:srgbClr val="595959"/>
+                </a:solidFill>
+              </a:rPr>
+              <a:t>loss summed over windows within ±85 bp</a:t>
+            </a:r>
+            <a:endParaRPr lang="en-US" sz="950" dirty="0"/>
+          </a:p>
+        </p:txBody>
+      </p:sp>
+      <p:pic>
+        <p:nvPicPr>
+          <p:cNvPr id="7" name="Image 1" descr="/Users/z5162865/WongLab/AlphaGenome_Ap1/Analysis/slide_figures/panels/s3_dependence_c0_r0.png">    </p:cNvPr>
+          <p:cNvPicPr>
+            <a:picLocks noChangeAspect="1"/>
+          </p:cNvPicPr>
+          <p:nvPr/>
+        </p:nvPicPr>
+        <p:blipFill>
+          <a:blip r:embed="rId2"/>
+          <a:stretch>
+            <a:fillRect/>
+          </a:stretch>
+        </p:blipFill>
+        <p:spPr>
+          <a:xfrm>
+            <a:off x="3995928" y="1902045"/>
+            <a:ext cx="1842516" cy="1170247"/>
+          </a:xfrm>
+          <a:prstGeom prst="rect">
+            <a:avLst/>
+          </a:prstGeom>
+        </p:spPr>
+      </p:pic>
+      <p:pic>
+        <p:nvPicPr>
+          <p:cNvPr id="8" name="Image 2" descr="/Users/z5162865/WongLab/AlphaGenome_Ap1/Analysis/slide_figures/panels/s3_dependence_c0_r1.png">    </p:cNvPr>
+          <p:cNvPicPr>
+            <a:picLocks noChangeAspect="1"/>
+          </p:cNvPicPr>
+          <p:nvPr/>
+        </p:nvPicPr>
+        <p:blipFill>
+          <a:blip r:embed="rId3"/>
+          <a:stretch>
+            <a:fillRect/>
+          </a:stretch>
+        </p:blipFill>
+        <p:spPr>
+          <a:xfrm>
+            <a:off x="3995928" y="3438237"/>
+            <a:ext cx="1842516" cy="1170247"/>
+          </a:xfrm>
+          <a:prstGeom prst="rect">
+            <a:avLst/>
+          </a:prstGeom>
+        </p:spPr>
+      </p:pic>
+      <p:sp>
+        <p:nvSpPr>
+          <p:cNvPr id="9" name="s3_dependence-title-1"/>
+          <p:cNvSpPr txBox="1"/>
+          <p:nvPr/>
+        </p:nvSpPr>
+        <p:spPr>
+          <a:xfrm>
+            <a:off x="5911596" y="1005840"/>
+            <a:ext cx="1842516" cy="438912"/>
+          </a:xfrm>
+          <a:prstGeom prst="rect">
+            <a:avLst/>
+          </a:prstGeom>
+          <a:noFill/>
+          <a:ln/>
+        </p:spPr>
+        <p:txBody>
+          <a:bodyPr wrap="square" lIns="0" tIns="0" rIns="0" bIns="0" rtlCol="0" anchor="t"/>
+          <a:lstStyle/>
+          <a:p>
+            <a:pPr indent="0" marL="0">
+              <a:buNone/>
+            </a:pPr>
+            <a:r>
+              <a:rPr lang="en-US" sz="1250" b="1" dirty="0">
+                <a:solidFill>
+                  <a:srgbClr val="111111"/>
+                </a:solidFill>
+              </a:rPr>
+              <a:t>Dependence out in the context</a:t>
+            </a:r>
+            <a:endParaRPr lang="en-US" sz="1250" dirty="0"/>
+          </a:p>
+        </p:txBody>
+      </p:sp>
+      <p:sp>
+        <p:nvSpPr>
+          <p:cNvPr id="10" name="s3_dependence-sub-1"/>
+          <p:cNvSpPr txBox="1"/>
+          <p:nvPr/>
+        </p:nvSpPr>
+        <p:spPr>
+          <a:xfrm>
+            <a:off x="5911596" y="1435608"/>
+            <a:ext cx="1842516" cy="310896"/>
+          </a:xfrm>
+          <a:prstGeom prst="rect">
+            <a:avLst/>
+          </a:prstGeom>
+          <a:noFill/>
+          <a:ln/>
+        </p:spPr>
+        <p:txBody>
+          <a:bodyPr wrap="square" lIns="0" tIns="0" rIns="0" bIns="0" rtlCol="0" anchor="t"/>
+          <a:lstStyle/>
+          <a:p>
+            <a:pPr indent="0" marL="0">
+              <a:buNone/>
+            </a:pPr>
+            <a:r>
+              <a:rPr lang="en-US" sz="950" dirty="0">
+                <a:solidFill>
+                  <a:srgbClr val="595959"/>
+                </a:solidFill>
+              </a:rPr>
+              <a:t>loss summed over windows beyond that</a:t>
+            </a:r>
+            <a:endParaRPr lang="en-US" sz="950" dirty="0"/>
+          </a:p>
+        </p:txBody>
+      </p:sp>
+      <p:pic>
+        <p:nvPicPr>
+          <p:cNvPr id="11" name="Image 3" descr="/Users/z5162865/WongLab/AlphaGenome_Ap1/Analysis/slide_figures/panels/s3_dependence_c1_r0.png">    </p:cNvPr>
+          <p:cNvPicPr>
+            <a:picLocks noChangeAspect="1"/>
+          </p:cNvPicPr>
+          <p:nvPr/>
+        </p:nvPicPr>
+        <p:blipFill>
+          <a:blip r:embed="rId4"/>
+          <a:stretch>
+            <a:fillRect/>
+          </a:stretch>
+        </p:blipFill>
+        <p:spPr>
+          <a:xfrm>
+            <a:off x="5911596" y="1902045"/>
+            <a:ext cx="1842516" cy="1170247"/>
+          </a:xfrm>
+          <a:prstGeom prst="rect">
+            <a:avLst/>
+          </a:prstGeom>
+        </p:spPr>
+      </p:pic>
+      <p:pic>
+        <p:nvPicPr>
+          <p:cNvPr id="12" name="Image 4" descr="/Users/z5162865/WongLab/AlphaGenome_Ap1/Analysis/slide_figures/panels/s3_dependence_c1_r1.png">    </p:cNvPr>
+          <p:cNvPicPr>
+            <a:picLocks noChangeAspect="1"/>
+          </p:cNvPicPr>
+          <p:nvPr/>
+        </p:nvPicPr>
+        <p:blipFill>
+          <a:blip r:embed="rId5"/>
+          <a:stretch>
+            <a:fillRect/>
+          </a:stretch>
+        </p:blipFill>
+        <p:spPr>
+          <a:xfrm>
+            <a:off x="5911596" y="3438237"/>
+            <a:ext cx="1842516" cy="1170247"/>
+          </a:xfrm>
+          <a:prstGeom prst="rect">
+            <a:avLst/>
+          </a:prstGeom>
+        </p:spPr>
+      </p:pic>
+      <p:sp>
+        <p:nvSpPr>
+          <p:cNvPr id="13" name="s3_dependence-title-2"/>
+          <p:cNvSpPr txBox="1"/>
+          <p:nvPr/>
+        </p:nvSpPr>
+        <p:spPr>
+          <a:xfrm>
+            <a:off x="7827264" y="1005840"/>
+            <a:ext cx="1842516" cy="438912"/>
+          </a:xfrm>
+          <a:prstGeom prst="rect">
+            <a:avLst/>
+          </a:prstGeom>
+          <a:noFill/>
+          <a:ln/>
+        </p:spPr>
+        <p:txBody>
+          <a:bodyPr wrap="square" lIns="0" tIns="0" rIns="0" bIns="0" rtlCol="0" anchor="t"/>
+          <a:lstStyle/>
+          <a:p>
+            <a:pPr indent="0" marL="0">
+              <a:buNone/>
+            </a:pPr>
+            <a:r>
+              <a:rPr lang="en-US" sz="1250" b="1" dirty="0">
+                <a:solidFill>
+                  <a:srgbClr val="111111"/>
+                </a:solidFill>
+              </a:rPr>
+              <a:t>Spread along the element</a:t>
+            </a:r>
+            <a:endParaRPr lang="en-US" sz="1250" dirty="0"/>
+          </a:p>
+        </p:txBody>
+      </p:sp>
+      <p:sp>
+        <p:nvSpPr>
+          <p:cNvPr id="14" name="s3_dependence-sub-2"/>
+          <p:cNvSpPr txBox="1"/>
+          <p:nvPr/>
+        </p:nvSpPr>
+        <p:spPr>
+          <a:xfrm>
+            <a:off x="7827264" y="1435608"/>
+            <a:ext cx="1842516" cy="310896"/>
+          </a:xfrm>
+          <a:prstGeom prst="rect">
+            <a:avLst/>
+          </a:prstGeom>
+          <a:noFill/>
+          <a:ln/>
+        </p:spPr>
+        <p:txBody>
+          <a:bodyPr wrap="square" lIns="0" tIns="0" rIns="0" bIns="0" rtlCol="0" anchor="t"/>
+          <a:lstStyle/>
+          <a:p>
+            <a:pPr indent="0" marL="0">
+              <a:buNone/>
+            </a:pPr>
+            <a:r>
+              <a:rPr lang="en-US" sz="950" dirty="0">
+                <a:solidFill>
+                  <a:srgbClr val="595959"/>
+                </a:solidFill>
+              </a:rPr>
+              <a:t>SD of window position, weighted by loss</a:t>
+            </a:r>
+            <a:endParaRPr lang="en-US" sz="950" dirty="0"/>
+          </a:p>
+        </p:txBody>
+      </p:sp>
+      <p:pic>
+        <p:nvPicPr>
+          <p:cNvPr id="15" name="Image 5" descr="/Users/z5162865/WongLab/AlphaGenome_Ap1/Analysis/slide_figures/panels/s3_dependence_c2_r0.png">    </p:cNvPr>
+          <p:cNvPicPr>
+            <a:picLocks noChangeAspect="1"/>
+          </p:cNvPicPr>
+          <p:nvPr/>
+        </p:nvPicPr>
+        <p:blipFill>
+          <a:blip r:embed="rId6"/>
+          <a:stretch>
+            <a:fillRect/>
+          </a:stretch>
+        </p:blipFill>
+        <p:spPr>
+          <a:xfrm>
+            <a:off x="7827264" y="1902045"/>
+            <a:ext cx="1842516" cy="1170247"/>
+          </a:xfrm>
+          <a:prstGeom prst="rect">
+            <a:avLst/>
+          </a:prstGeom>
+        </p:spPr>
+      </p:pic>
+      <p:pic>
+        <p:nvPicPr>
+          <p:cNvPr id="16" name="Image 6" descr="/Users/z5162865/WongLab/AlphaGenome_Ap1/Analysis/slide_figures/panels/s3_dependence_c2_r1.png">    </p:cNvPr>
+          <p:cNvPicPr>
+            <a:picLocks noChangeAspect="1"/>
+          </p:cNvPicPr>
+          <p:nvPr/>
+        </p:nvPicPr>
+        <p:blipFill>
+          <a:blip r:embed="rId7"/>
+          <a:stretch>
+            <a:fillRect/>
+          </a:stretch>
+        </p:blipFill>
+        <p:spPr>
+          <a:xfrm>
+            <a:off x="7827264" y="3438237"/>
+            <a:ext cx="1842516" cy="1170247"/>
+          </a:xfrm>
+          <a:prstGeom prst="rect">
+            <a:avLst/>
+          </a:prstGeom>
+        </p:spPr>
+      </p:pic>
+      <p:sp>
+        <p:nvSpPr>
+          <p:cNvPr id="17" name="s3_dependence-title-3"/>
+          <p:cNvSpPr txBox="1"/>
+          <p:nvPr/>
+        </p:nvSpPr>
+        <p:spPr>
+          <a:xfrm>
+            <a:off x="9742932" y="1005840"/>
+            <a:ext cx="1842516" cy="438912"/>
+          </a:xfrm>
+          <a:prstGeom prst="rect">
+            <a:avLst/>
+          </a:prstGeom>
+          <a:noFill/>
+          <a:ln/>
+        </p:spPr>
+        <p:txBody>
+          <a:bodyPr wrap="square" lIns="0" tIns="0" rIns="0" bIns="0" rtlCol="0" anchor="t"/>
+          <a:lstStyle/>
+          <a:p>
+            <a:pPr indent="0" marL="0">
+              <a:buNone/>
+            </a:pPr>
+            <a:r>
+              <a:rPr lang="en-US" sz="1250" b="1" dirty="0">
+                <a:solidFill>
+                  <a:srgbClr val="111111"/>
+                </a:solidFill>
+              </a:rPr>
+              <a:t>Depth of the single best base</a:t>
+            </a:r>
+            <a:endParaRPr lang="en-US" sz="1250" dirty="0"/>
+          </a:p>
+        </p:txBody>
+      </p:sp>
+      <p:sp>
+        <p:nvSpPr>
+          <p:cNvPr id="18" name="s3_dependence-sub-3"/>
+          <p:cNvSpPr txBox="1"/>
+          <p:nvPr/>
+        </p:nvSpPr>
+        <p:spPr>
+          <a:xfrm>
+            <a:off x="9742932" y="1435608"/>
+            <a:ext cx="1842516" cy="310896"/>
+          </a:xfrm>
+          <a:prstGeom prst="rect">
+            <a:avLst/>
+          </a:prstGeom>
+          <a:noFill/>
+          <a:ln/>
+        </p:spPr>
+        <p:txBody>
+          <a:bodyPr wrap="square" lIns="0" tIns="0" rIns="0" bIns="0" rtlCol="0" anchor="t"/>
+          <a:lstStyle/>
+          <a:p>
+            <a:pPr indent="0" marL="0">
+              <a:buNone/>
+            </a:pPr>
+            <a:r>
+              <a:rPr lang="en-US" sz="950" dirty="0">
+                <a:solidFill>
+                  <a:srgbClr val="595959"/>
+                </a:solidFill>
+              </a:rPr>
+              <a:t>largest effect of any one base change, ±30 bp</a:t>
+            </a:r>
+            <a:endParaRPr lang="en-US" sz="950" dirty="0"/>
+          </a:p>
+        </p:txBody>
+      </p:sp>
+      <p:pic>
+        <p:nvPicPr>
+          <p:cNvPr id="19" name="Image 7" descr="/Users/z5162865/WongLab/AlphaGenome_Ap1/Analysis/slide_figures/panels/s3_dependence_c3_r0.png">    </p:cNvPr>
+          <p:cNvPicPr>
+            <a:picLocks noChangeAspect="1"/>
+          </p:cNvPicPr>
+          <p:nvPr/>
+        </p:nvPicPr>
+        <p:blipFill>
+          <a:blip r:embed="rId8"/>
+          <a:stretch>
+            <a:fillRect/>
+          </a:stretch>
+        </p:blipFill>
+        <p:spPr>
+          <a:xfrm>
+            <a:off x="9742932" y="1902045"/>
+            <a:ext cx="1842516" cy="1170247"/>
+          </a:xfrm>
+          <a:prstGeom prst="rect">
+            <a:avLst/>
+          </a:prstGeom>
+        </p:spPr>
+      </p:pic>
+      <p:pic>
+        <p:nvPicPr>
+          <p:cNvPr id="20" name="Image 8" descr="/Users/z5162865/WongLab/AlphaGenome_Ap1/Analysis/slide_figures/panels/s3_dependence_c3_r1.png">    </p:cNvPr>
+          <p:cNvPicPr>
+            <a:picLocks noChangeAspect="1"/>
+          </p:cNvPicPr>
+          <p:nvPr/>
+        </p:nvPicPr>
+        <p:blipFill>
+          <a:blip r:embed="rId9"/>
+          <a:stretch>
+            <a:fillRect/>
+          </a:stretch>
+        </p:blipFill>
+        <p:spPr>
+          <a:xfrm>
+            <a:off x="9742932" y="3438237"/>
+            <a:ext cx="1842516" cy="1170247"/>
+          </a:xfrm>
+          <a:prstGeom prst="rect">
+            <a:avLst/>
+          </a:prstGeom>
+        </p:spPr>
+      </p:pic>
+      <p:sp>
+        <p:nvSpPr>
+          <p:cNvPr id="21" name="s3_dependence-row-0"/>
+          <p:cNvSpPr txBox="1"/>
+          <p:nvPr/>
+        </p:nvSpPr>
+        <p:spPr>
+          <a:xfrm rot="16200000">
+            <a:off x="2953512" y="1837944"/>
+            <a:ext cx="1371600" cy="1371600"/>
+          </a:xfrm>
+          <a:prstGeom prst="rect">
+            <a:avLst/>
+          </a:prstGeom>
+          <a:noFill/>
+          <a:ln/>
+        </p:spPr>
+        <p:txBody>
+          <a:bodyPr wrap="square" lIns="0" tIns="0" rIns="0" bIns="0" rtlCol="0" anchor="ctr"/>
+          <a:lstStyle/>
+          <a:p>
+            <a:pPr algn="ctr" indent="0" marL="0">
+              <a:buNone/>
+            </a:pPr>
+            <a:r>
+              <a:rPr lang="en-US" sz="1000" dirty="0">
+                <a:solidFill>
+                  <a:srgbClr val="111111"/>
+                </a:solidFill>
+              </a:rPr>
+              <a:t>all sites, nothing controlled</a:t>
+            </a:r>
+            <a:endParaRPr lang="en-US" sz="1000" dirty="0"/>
+          </a:p>
+        </p:txBody>
+      </p:sp>
+      <p:sp>
+        <p:nvSpPr>
+          <p:cNvPr id="22" name="s3_dependence-row-1"/>
+          <p:cNvSpPr txBox="1"/>
+          <p:nvPr/>
+        </p:nvSpPr>
+        <p:spPr>
+          <a:xfrm rot="16200000">
+            <a:off x="2953512" y="3374136"/>
+            <a:ext cx="1371600" cy="1371600"/>
+          </a:xfrm>
+          <a:prstGeom prst="rect">
+            <a:avLst/>
+          </a:prstGeom>
+          <a:noFill/>
+          <a:ln/>
+        </p:spPr>
+        <p:txBody>
+          <a:bodyPr wrap="square" lIns="0" tIns="0" rIns="0" bIns="0" rtlCol="0" anchor="ctr"/>
+          <a:lstStyle/>
+          <a:p>
+            <a:pPr algn="ctr" indent="0" marL="0">
+              <a:buNone/>
+            </a:pPr>
+            <a:r>
+              <a:rPr lang="en-US" sz="1000" dirty="0">
+                <a:solidFill>
+                  <a:srgbClr val="111111"/>
+                </a:solidFill>
+              </a:rPr>
+              <a:t>each class against its own matched Stable controls</a:t>
+            </a:r>
+            <a:endParaRPr lang="en-US" sz="1000" dirty="0"/>
+          </a:p>
+        </p:txBody>
+      </p:sp>
+      <p:sp>
+        <p:nvSpPr>
+          <p:cNvPr id="23" name="s3_dependence-dot-0"/>
+          <p:cNvSpPr/>
+          <p:nvPr/>
+        </p:nvSpPr>
+        <p:spPr>
+          <a:xfrm>
+            <a:off x="3995928" y="4960620"/>
+            <a:ext cx="109728" cy="109728"/>
+          </a:xfrm>
+          <a:prstGeom prst="ellipse">
+            <a:avLst/>
+          </a:prstGeom>
+          <a:solidFill>
+            <a:srgbClr val="4F4F4F"/>
+          </a:solidFill>
+          <a:ln w="12700">
+            <a:solidFill>
+              <a:srgbClr val="4F4F4F"/>
+            </a:solidFill>
+            <a:prstDash val="solid"/>
+          </a:ln>
+        </p:spPr>
+      </p:sp>
+      <p:sp>
+        <p:nvSpPr>
+          <p:cNvPr id="24" name="s3_dependence-leg-0"/>
+          <p:cNvSpPr txBox="1"/>
+          <p:nvPr/>
+        </p:nvSpPr>
+        <p:spPr>
+          <a:xfrm>
+            <a:off x="4151376" y="4919472"/>
+            <a:ext cx="1057046" cy="201168"/>
+          </a:xfrm>
+          <a:prstGeom prst="rect">
+            <a:avLst/>
+          </a:prstGeom>
+          <a:noFill/>
+          <a:ln/>
+        </p:spPr>
+        <p:txBody>
+          <a:bodyPr wrap="square" lIns="0" tIns="0" rIns="0" bIns="0" rtlCol="0" anchor="ctr"/>
+          <a:lstStyle/>
+          <a:p>
+            <a:pPr indent="0" marL="0">
+              <a:buNone/>
+            </a:pPr>
+            <a:r>
+              <a:rPr lang="en-US" sz="1050" dirty="0">
+                <a:solidFill>
+                  <a:srgbClr val="111111"/>
+                </a:solidFill>
+              </a:rPr>
+              <a:t>Dynamic (all)</a:t>
+            </a:r>
+            <a:endParaRPr lang="en-US" sz="1050" dirty="0"/>
+          </a:p>
+        </p:txBody>
+      </p:sp>
+      <p:sp>
+        <p:nvSpPr>
+          <p:cNvPr id="25" name="s3_dependence-dot-1"/>
+          <p:cNvSpPr/>
+          <p:nvPr/>
+        </p:nvSpPr>
+        <p:spPr>
+          <a:xfrm>
+            <a:off x="5318150" y="4960620"/>
+            <a:ext cx="109728" cy="109728"/>
+          </a:xfrm>
+          <a:prstGeom prst="ellipse">
+            <a:avLst/>
+          </a:prstGeom>
+          <a:solidFill>
+            <a:srgbClr val="C2551C"/>
+          </a:solidFill>
+          <a:ln w="12700">
+            <a:solidFill>
+              <a:srgbClr val="C2551C"/>
+            </a:solidFill>
+            <a:prstDash val="solid"/>
+          </a:ln>
+        </p:spPr>
+      </p:sp>
+      <p:sp>
+        <p:nvSpPr>
+          <p:cNvPr id="26" name="s3_dependence-leg-1"/>
+          <p:cNvSpPr txBox="1"/>
+          <p:nvPr/>
+        </p:nvSpPr>
+        <p:spPr>
+          <a:xfrm>
+            <a:off x="5473598" y="4919472"/>
+            <a:ext cx="596189" cy="201168"/>
+          </a:xfrm>
+          <a:prstGeom prst="rect">
+            <a:avLst/>
+          </a:prstGeom>
+          <a:noFill/>
+          <a:ln/>
+        </p:spPr>
+        <p:txBody>
+          <a:bodyPr wrap="square" lIns="0" tIns="0" rIns="0" bIns="0" rtlCol="0" anchor="ctr"/>
+          <a:lstStyle/>
+          <a:p>
+            <a:pPr indent="0" marL="0">
+              <a:buNone/>
+            </a:pPr>
+            <a:r>
+              <a:rPr lang="en-US" sz="1050" dirty="0">
+                <a:solidFill>
+                  <a:srgbClr val="111111"/>
+                </a:solidFill>
+              </a:rPr>
+              <a:t>Age Up</a:t>
+            </a:r>
+            <a:endParaRPr lang="en-US" sz="1050" dirty="0"/>
+          </a:p>
+        </p:txBody>
+      </p:sp>
+      <p:sp>
+        <p:nvSpPr>
+          <p:cNvPr id="27" name="s3_dependence-dot-2"/>
+          <p:cNvSpPr/>
+          <p:nvPr/>
+        </p:nvSpPr>
+        <p:spPr>
+          <a:xfrm>
+            <a:off x="6179515" y="4960620"/>
+            <a:ext cx="109728" cy="109728"/>
+          </a:xfrm>
+          <a:prstGeom prst="ellipse">
+            <a:avLst/>
+          </a:prstGeom>
+          <a:solidFill>
+            <a:srgbClr val="1F6FB2"/>
+          </a:solidFill>
+          <a:ln w="12700">
+            <a:solidFill>
+              <a:srgbClr val="1F6FB2"/>
+            </a:solidFill>
+            <a:prstDash val="solid"/>
+          </a:ln>
+        </p:spPr>
+      </p:sp>
+      <p:sp>
+        <p:nvSpPr>
+          <p:cNvPr id="28" name="s3_dependence-leg-2"/>
+          <p:cNvSpPr txBox="1"/>
+          <p:nvPr/>
+        </p:nvSpPr>
+        <p:spPr>
+          <a:xfrm>
+            <a:off x="6334963" y="4919472"/>
+            <a:ext cx="727862" cy="201168"/>
+          </a:xfrm>
+          <a:prstGeom prst="rect">
+            <a:avLst/>
+          </a:prstGeom>
+          <a:noFill/>
+          <a:ln/>
+        </p:spPr>
+        <p:txBody>
+          <a:bodyPr wrap="square" lIns="0" tIns="0" rIns="0" bIns="0" rtlCol="0" anchor="ctr"/>
+          <a:lstStyle/>
+          <a:p>
+            <a:pPr indent="0" marL="0">
+              <a:buNone/>
+            </a:pPr>
+            <a:r>
+              <a:rPr lang="en-US" sz="1050" dirty="0">
+                <a:solidFill>
+                  <a:srgbClr val="111111"/>
+                </a:solidFill>
+              </a:rPr>
+              <a:t>Age Down</a:t>
+            </a:r>
+            <a:endParaRPr lang="en-US" sz="1050" dirty="0"/>
+          </a:p>
+        </p:txBody>
+      </p:sp>
+      <p:sp>
+        <p:nvSpPr>
+          <p:cNvPr id="29" name="s3_dependence-dot-3"/>
+          <p:cNvSpPr/>
+          <p:nvPr/>
+        </p:nvSpPr>
+        <p:spPr>
+          <a:xfrm>
+            <a:off x="7172554" y="4960620"/>
+            <a:ext cx="109728" cy="109728"/>
+          </a:xfrm>
+          <a:prstGeom prst="ellipse">
+            <a:avLst/>
+          </a:prstGeom>
+          <a:solidFill>
+            <a:srgbClr val="2E7D32"/>
+          </a:solidFill>
+          <a:ln w="12700">
+            <a:solidFill>
+              <a:srgbClr val="2E7D32"/>
+            </a:solidFill>
+            <a:prstDash val="solid"/>
+          </a:ln>
+        </p:spPr>
+      </p:sp>
+      <p:sp>
+        <p:nvSpPr>
+          <p:cNvPr id="30" name="s3_dependence-leg-3"/>
+          <p:cNvSpPr txBox="1"/>
+          <p:nvPr/>
+        </p:nvSpPr>
+        <p:spPr>
+          <a:xfrm>
+            <a:off x="7328002" y="4919472"/>
+            <a:ext cx="925373" cy="201168"/>
+          </a:xfrm>
+          <a:prstGeom prst="rect">
+            <a:avLst/>
+          </a:prstGeom>
+          <a:noFill/>
+          <a:ln/>
+        </p:spPr>
+        <p:txBody>
+          <a:bodyPr wrap="square" lIns="0" tIns="0" rIns="0" bIns="0" rtlCol="0" anchor="ctr"/>
+          <a:lstStyle/>
+          <a:p>
+            <a:pPr indent="0" marL="0">
+              <a:buNone/>
+            </a:pPr>
+            <a:r>
+              <a:rPr lang="en-US" sz="1050" dirty="0">
+                <a:solidFill>
+                  <a:srgbClr val="111111"/>
+                </a:solidFill>
+              </a:rPr>
+              <a:t>Exercise Up</a:t>
+            </a:r>
+            <a:endParaRPr lang="en-US" sz="1050" dirty="0"/>
+          </a:p>
+        </p:txBody>
+      </p:sp>
+      <p:sp>
+        <p:nvSpPr>
+          <p:cNvPr id="31" name="s3_dependence-dot-4"/>
+          <p:cNvSpPr/>
+          <p:nvPr/>
+        </p:nvSpPr>
+        <p:spPr>
+          <a:xfrm>
+            <a:off x="8363102" y="4960620"/>
+            <a:ext cx="109728" cy="109728"/>
+          </a:xfrm>
+          <a:prstGeom prst="ellipse">
+            <a:avLst/>
+          </a:prstGeom>
+          <a:solidFill>
+            <a:srgbClr val="7B3FA0"/>
+          </a:solidFill>
+          <a:ln w="12700">
+            <a:solidFill>
+              <a:srgbClr val="7B3FA0"/>
+            </a:solidFill>
+            <a:prstDash val="solid"/>
+          </a:ln>
+        </p:spPr>
+      </p:sp>
+      <p:sp>
+        <p:nvSpPr>
+          <p:cNvPr id="32" name="s3_dependence-leg-4"/>
+          <p:cNvSpPr txBox="1"/>
+          <p:nvPr/>
+        </p:nvSpPr>
+        <p:spPr>
+          <a:xfrm>
+            <a:off x="8518550" y="4919472"/>
+            <a:ext cx="1057046" cy="201168"/>
+          </a:xfrm>
+          <a:prstGeom prst="rect">
+            <a:avLst/>
+          </a:prstGeom>
+          <a:noFill/>
+          <a:ln/>
+        </p:spPr>
+        <p:txBody>
+          <a:bodyPr wrap="square" lIns="0" tIns="0" rIns="0" bIns="0" rtlCol="0" anchor="ctr"/>
+          <a:lstStyle/>
+          <a:p>
+            <a:pPr indent="0" marL="0">
+              <a:buNone/>
+            </a:pPr>
+            <a:r>
+              <a:rPr lang="en-US" sz="1050" dirty="0">
+                <a:solidFill>
+                  <a:srgbClr val="111111"/>
+                </a:solidFill>
+              </a:rPr>
+              <a:t>Exercise Down</a:t>
+            </a:r>
+            <a:endParaRPr lang="en-US" sz="1050" dirty="0"/>
+          </a:p>
+        </p:txBody>
+      </p:sp>
+      <p:sp>
+        <p:nvSpPr>
+          <p:cNvPr id="33" name="s3_dependence-dot-5"/>
+          <p:cNvSpPr/>
+          <p:nvPr/>
+        </p:nvSpPr>
+        <p:spPr>
+          <a:xfrm>
+            <a:off x="9685325" y="4960620"/>
+            <a:ext cx="109728" cy="109728"/>
+          </a:xfrm>
+          <a:prstGeom prst="ellipse">
+            <a:avLst/>
+          </a:prstGeom>
+          <a:solidFill>
+            <a:srgbClr val="B3B2AE"/>
+          </a:solidFill>
+          <a:ln w="12700">
+            <a:solidFill>
+              <a:srgbClr val="B3B2AE"/>
+            </a:solidFill>
+            <a:prstDash val="solid"/>
+          </a:ln>
+        </p:spPr>
+      </p:sp>
+      <p:sp>
+        <p:nvSpPr>
+          <p:cNvPr id="34" name="s3_dependence-leg-5"/>
+          <p:cNvSpPr txBox="1"/>
+          <p:nvPr/>
+        </p:nvSpPr>
+        <p:spPr>
+          <a:xfrm>
+            <a:off x="9840773" y="4919472"/>
+            <a:ext cx="2373782" cy="201168"/>
+          </a:xfrm>
+          <a:prstGeom prst="rect">
+            <a:avLst/>
+          </a:prstGeom>
+          <a:noFill/>
+          <a:ln/>
+        </p:spPr>
+        <p:txBody>
+          <a:bodyPr wrap="square" lIns="0" tIns="0" rIns="0" bIns="0" rtlCol="0" anchor="ctr"/>
+          <a:lstStyle/>
+          <a:p>
+            <a:pPr indent="0" marL="0">
+              <a:buNone/>
+            </a:pPr>
+            <a:r>
+              <a:rPr lang="en-US" sz="1050" dirty="0">
+                <a:solidFill>
+                  <a:srgbClr val="111111"/>
+                </a:solidFill>
+              </a:rPr>
+              <a:t>Stable (all, or matched controls)</a:t>
+            </a:r>
+            <a:endParaRPr lang="en-US" sz="1050" dirty="0"/>
+          </a:p>
+        </p:txBody>
+      </p:sp>
+      <p:sp>
+        <p:nvSpPr>
+          <p:cNvPr id="35" name="s3_dependence-key"/>
+          <p:cNvSpPr txBox="1"/>
+          <p:nvPr/>
+        </p:nvSpPr>
+        <p:spPr>
+          <a:xfrm>
+            <a:off x="3429000" y="5193792"/>
+            <a:ext cx="8229600" cy="502920"/>
+          </a:xfrm>
+          <a:prstGeom prst="rect">
+            <a:avLst/>
+          </a:prstGeom>
+          <a:noFill/>
+          <a:ln/>
+        </p:spPr>
+        <p:txBody>
+          <a:bodyPr wrap="square" lIns="0" tIns="0" rIns="0" bIns="0" rtlCol="0" anchor="ctr"/>
+          <a:lstStyle/>
+          <a:p>
+            <a:pPr indent="0" marL="0">
+              <a:buNone/>
+            </a:pPr>
+            <a:r>
+              <a:rPr lang="en-US" sz="900" dirty="0">
+                <a:solidFill>
+                  <a:srgbClr val="595959"/>
+                </a:solidFill>
+              </a:rPr>
+              <a:t>grey line and band (top row): all Stable sites, median with 95% bootstrap CI.   grey dots (bottom row): that class's own matched Stable controls.   Stars test the class against that reference — Mann–Whitney on all sites, paired Wilcoxon on matched pairs — BH across all 40 tests.   *** p&lt;0.001   ** p&lt;0.01   * p&lt;0.05   ns ≥ 0.05</a:t>
+            </a:r>
+            <a:endParaRPr lang="en-US" sz="900" dirty="0"/>
+          </a:p>
+        </p:txBody>
+      </p:sp>
+      <p:sp>
+        <p:nvSpPr>
+          <p:cNvPr id="36" name="Text 0"/>
           <p:cNvSpPr/>
           <p:nvPr>
             <p:ph idx="101" type="body" hasCustomPrompt="1"/>

--- a/Analysis/AP1_AlphaGenome_results.pptx
+++ b/Analysis/AP1_AlphaGenome_results.pptx
@@ -120,18 +120,18 @@
   <p:extLst>
     <p:ext uri="{521415D9-36F7-43E2-AB2F-B90AF26B5E84}">
       <p14:sectionLst xmlns:p14="http://schemas.microsoft.com/office/powerpoint/2010/main">
-        <p14:section name="Opening" id="{9828b441-2f2f-c7b3-610c-50ceb5423075}">
+        <p14:section name="Opening" id="{92abd594-245a-463d-cd41-341592016d74}">
           <p14:sldIdLst>
             <p14:sldId id="256"/>
           </p14:sldIdLst>
         </p14:section>
-        <p14:section name="Design" id="{c3967755-fcb0-39e5-aa69-e82e2ba3e3a1}">
+        <p14:section name="Design" id="{5c2093be-d6b4-0c66-b714-fbd22f3e45ff}">
           <p14:sldIdLst>
             <p14:sldId id="257"/>
             <p14:sldId id="258"/>
           </p14:sldIdLst>
         </p14:section>
-        <p14:section name="Findings" id="{c49a37c9-7616-8758-b3dd-5c3c18301831}">
+        <p14:section name="Findings" id="{e636c28f-c5a8-6903-8fd0-0c68ed002e0a}">
           <p14:sldIdLst>
             <p14:sldId id="259"/>
             <p14:sldId id="260"/>
@@ -144,7 +144,7 @@
             <p14:sldId id="267"/>
           </p14:sldIdLst>
         </p14:section>
-        <p14:section name="Conclusion" id="{199aa5b4-fc81-7375-4d65-010333400a35}">
+        <p14:section name="Conclusion" id="{74930897-9547-5649-6038-27796074696c}">
           <p14:sldIdLst>
             <p14:sldId id="268"/>
             <p14:sldId id="269"/>
@@ -642,7 +642,7 @@
           <a:p>
             <a:r>
               <a:rPr lang="en-US" dirty="0"/>
-              <a:t>The dose-response slope tracks core quality measured independently from the genome sequence, rho 0.30. Orientation is irrelevant, as expected for a near-palindrome.</a:t>
+              <a:t>The 1-base and 7-base core results are not repeated here: they say the same thing as the motif shuffle on the earlier slide. One wrong base costs -0.45 of the -0.56 total, the dose slope tracks core quality read from the genome at rho 0.30, and orientation is irrelevant as expected for a near-palindrome.</a:t>
             </a:r>
             <a:endParaRPr lang="en-US" dirty="0"/>
           </a:p>
@@ -2750,7 +2750,7 @@
                   <a:schemeClr val="tx1"/>
                 </a:solidFill>
               </a:rPr>
-              <a:t>Motif strength is a switch; position is a dial</a:t>
+              <a:t>Position is a dial, and a moved motif never replaces the original</a:t>
             </a:r>
             <a:endParaRPr lang="en-US" sz="2800" dirty="0"/>
           </a:p>
@@ -2758,14 +2758,14 @@
       </p:sp>
       <p:sp>
         <p:nvSpPr>
-          <p:cNvPr id="3" name="dose-title"/>
+          <p:cNvPr id="3" name="copy-title"/>
           <p:cNvSpPr txBox="1"/>
           <p:nvPr/>
         </p:nvSpPr>
         <p:spPr>
           <a:xfrm>
             <a:off x="502920" y="1024128"/>
-            <a:ext cx="2377440" cy="274320"/>
+            <a:ext cx="2834640" cy="274320"/>
           </a:xfrm>
           <a:prstGeom prst="rect">
             <a:avLst/>
@@ -2786,7 +2786,7 @@
                   <a:srgbClr val="111111"/>
                 </a:solidFill>
               </a:rPr>
-              <a:t>The dose curve, class by class</a:t>
+              <a:t>Where the added copy works best</a:t>
             </a:r>
             <a:endParaRPr lang="en-US" sz="1250" dirty="0"/>
           </a:p>
@@ -2794,7 +2794,7 @@
       </p:sp>
       <p:pic>
         <p:nvPicPr>
-          <p:cNvPr id="4" name="Image 0" descr="/Users/z5162865/WongLab/AlphaGenome_Ap1/Analysis/slide_figures/panels/d_dose.png">    </p:cNvPr>
+          <p:cNvPr id="4" name="Image 0" descr="/Users/z5162865/WongLab/AlphaGenome_Ap1/Analysis/slide_figures/panels/d_addcopy.png">    </p:cNvPr>
           <p:cNvPicPr>
             <a:picLocks noChangeAspect="1"/>
           </p:cNvPicPr>
@@ -2808,8 +2808,8 @@
         </p:blipFill>
         <p:spPr>
           <a:xfrm>
-            <a:off x="502920" y="1330936"/>
-            <a:ext cx="2286000" cy="1681529"/>
+            <a:off x="709758" y="1325880"/>
+            <a:ext cx="2420965" cy="1783080"/>
           </a:xfrm>
           <a:prstGeom prst="rect">
             <a:avLst/>
@@ -2818,14 +2818,14 @@
       </p:pic>
       <p:sp>
         <p:nvSpPr>
-          <p:cNvPr id="5" name="copy-title"/>
+          <p:cNvPr id="5" name="move-title"/>
           <p:cNvSpPr txBox="1"/>
           <p:nvPr/>
         </p:nvSpPr>
         <p:spPr>
           <a:xfrm>
-            <a:off x="502920" y="3127248"/>
-            <a:ext cx="2377440" cy="274320"/>
+            <a:off x="502920" y="3218688"/>
+            <a:ext cx="2834640" cy="274320"/>
           </a:xfrm>
           <a:prstGeom prst="rect">
             <a:avLst/>
@@ -2846,7 +2846,7 @@
                   <a:srgbClr val="111111"/>
                 </a:solidFill>
               </a:rPr>
-              <a:t>Where a second copy helps</a:t>
+              <a:t>...and where it lands when moved</a:t>
             </a:r>
             <a:endParaRPr lang="en-US" sz="1250" dirty="0"/>
           </a:p>
@@ -2854,7 +2854,7 @@
       </p:sp>
       <p:pic>
         <p:nvPicPr>
-          <p:cNvPr id="6" name="Image 1" descr="/Users/z5162865/WongLab/AlphaGenome_Ap1/Analysis/slide_figures/panels/d_addcopy.png">    </p:cNvPr>
+          <p:cNvPr id="6" name="Image 1" descr="/Users/z5162865/WongLab/AlphaGenome_Ap1/Analysis/slide_figures/panels/d_relocate.png">    </p:cNvPr>
           <p:cNvPicPr>
             <a:picLocks noChangeAspect="1"/>
           </p:cNvPicPr>
@@ -2868,8 +2868,8 @@
         </p:blipFill>
         <p:spPr>
           <a:xfrm>
-            <a:off x="544696" y="3429000"/>
-            <a:ext cx="2202449" cy="1691640"/>
+            <a:off x="662666" y="3520440"/>
+            <a:ext cx="2515149" cy="1783080"/>
           </a:xfrm>
           <a:prstGeom prst="rect">
             <a:avLst/>
@@ -2884,8 +2884,8 @@
         </p:nvSpPr>
         <p:spPr>
           <a:xfrm>
-            <a:off x="502920" y="5166360"/>
-            <a:ext cx="2468880" cy="457200"/>
+            <a:off x="502920" y="5349240"/>
+            <a:ext cx="2926080" cy="457200"/>
           </a:xfrm>
           <a:prstGeom prst="rect">
             <a:avLst/>
@@ -2920,8 +2920,8 @@
         </p:nvSpPr>
         <p:spPr>
           <a:xfrm>
-            <a:off x="3995928" y="1005840"/>
-            <a:ext cx="1842516" cy="438912"/>
+            <a:off x="4681728" y="1005840"/>
+            <a:ext cx="3438144" cy="438912"/>
           </a:xfrm>
           <a:prstGeom prst="rect">
             <a:avLst/>
@@ -2942,7 +2942,7 @@
                   <a:srgbClr val="111111"/>
                 </a:solidFill>
               </a:rPr>
-              <a:t>One damaged core base</a:t>
+              <a:t>A second copy added</a:t>
             </a:r>
             <a:endParaRPr lang="en-US" sz="1250" dirty="0"/>
           </a:p>
@@ -2956,8 +2956,8 @@
         </p:nvSpPr>
         <p:spPr>
           <a:xfrm>
-            <a:off x="3995928" y="1435608"/>
-            <a:ext cx="1842516" cy="310896"/>
+            <a:off x="4681728" y="1435608"/>
+            <a:ext cx="3438144" cy="310896"/>
           </a:xfrm>
           <a:prstGeom prst="rect">
             <a:avLst/>
@@ -2978,7 +2978,7 @@
                   <a:srgbClr val="595959"/>
                 </a:solidFill>
               </a:rPr>
-              <a:t>TGACTCA with a single base changed</a:t>
+              <a:t>net of a shuffled-sequence control</a:t>
             </a:r>
             <a:endParaRPr lang="en-US" sz="950" dirty="0"/>
           </a:p>
@@ -3000,8 +3000,8 @@
         </p:blipFill>
         <p:spPr>
           <a:xfrm>
-            <a:off x="3995928" y="1902045"/>
-            <a:ext cx="1842516" cy="1170247"/>
+            <a:off x="5249045" y="1755648"/>
+            <a:ext cx="2303510" cy="1463040"/>
           </a:xfrm>
           <a:prstGeom prst="rect">
             <a:avLst/>
@@ -3024,8 +3024,8 @@
         </p:blipFill>
         <p:spPr>
           <a:xfrm>
-            <a:off x="3995928" y="3438237"/>
-            <a:ext cx="1842516" cy="1170247"/>
+            <a:off x="5249045" y="3291840"/>
+            <a:ext cx="2303510" cy="1463040"/>
           </a:xfrm>
           <a:prstGeom prst="rect">
             <a:avLst/>
@@ -3040,8 +3040,8 @@
         </p:nvSpPr>
         <p:spPr>
           <a:xfrm>
-            <a:off x="5911596" y="1005840"/>
-            <a:ext cx="1842516" cy="438912"/>
+            <a:off x="8193024" y="1005840"/>
+            <a:ext cx="3438144" cy="438912"/>
           </a:xfrm>
           <a:prstGeom prst="rect">
             <a:avLst/>
@@ -3062,7 +3062,7 @@
                   <a:srgbClr val="111111"/>
                 </a:solidFill>
               </a:rPr>
-              <a:t>All seven core bases</a:t>
+              <a:t>The motif moved elsewhere</a:t>
             </a:r>
             <a:endParaRPr lang="en-US" sz="1250" dirty="0"/>
           </a:p>
@@ -3076,8 +3076,8 @@
         </p:nvSpPr>
         <p:spPr>
           <a:xfrm>
-            <a:off x="5911596" y="1435608"/>
-            <a:ext cx="1842516" cy="310896"/>
+            <a:off x="8193024" y="1435608"/>
+            <a:ext cx="3438144" cy="310896"/>
           </a:xfrm>
           <a:prstGeom prst="rect">
             <a:avLst/>
@@ -3098,7 +3098,7 @@
                   <a:srgbClr val="595959"/>
                 </a:solidFill>
               </a:rPr>
-              <a:t>the motif destroyed outright</a:t>
+              <a:t>the motif destroyed and re-inserted, net of the same control</a:t>
             </a:r>
             <a:endParaRPr lang="en-US" sz="950" dirty="0"/>
           </a:p>
@@ -3120,8 +3120,8 @@
         </p:blipFill>
         <p:spPr>
           <a:xfrm>
-            <a:off x="5911596" y="1902045"/>
-            <a:ext cx="1842516" cy="1170247"/>
+            <a:off x="8760341" y="1755648"/>
+            <a:ext cx="2303510" cy="1463040"/>
           </a:xfrm>
           <a:prstGeom prst="rect">
             <a:avLst/>
@@ -3144,8 +3144,8 @@
         </p:blipFill>
         <p:spPr>
           <a:xfrm>
-            <a:off x="5911596" y="3438237"/>
-            <a:ext cx="1842516" cy="1170247"/>
+            <a:off x="8760341" y="3291840"/>
+            <a:ext cx="2303510" cy="1463040"/>
           </a:xfrm>
           <a:prstGeom prst="rect">
             <a:avLst/>
@@ -3154,275 +3154,71 @@
       </p:pic>
       <p:sp>
         <p:nvSpPr>
-          <p:cNvPr id="16" name="s4_titration-title-2"/>
+          <p:cNvPr id="16" name="s4_titration-row-0"/>
           <p:cNvSpPr txBox="1"/>
           <p:nvPr/>
         </p:nvSpPr>
         <p:spPr>
-          <a:xfrm>
-            <a:off x="7827264" y="1005840"/>
-            <a:ext cx="1842516" cy="438912"/>
-          </a:xfrm>
-          <a:prstGeom prst="rect">
-            <a:avLst/>
-          </a:prstGeom>
-          <a:noFill/>
-          <a:ln/>
-        </p:spPr>
-        <p:txBody>
-          <a:bodyPr wrap="square" lIns="0" tIns="0" rIns="0" bIns="0" rtlCol="0" anchor="t"/>
-          <a:lstStyle/>
-          <a:p>
-            <a:pPr indent="0" marL="0">
-              <a:buNone/>
-            </a:pPr>
-            <a:r>
-              <a:rPr lang="en-US" sz="1250" b="1" dirty="0">
+          <a:xfrm rot="16200000">
+            <a:off x="3639312" y="1837944"/>
+            <a:ext cx="1371600" cy="1371600"/>
+          </a:xfrm>
+          <a:prstGeom prst="rect">
+            <a:avLst/>
+          </a:prstGeom>
+          <a:noFill/>
+          <a:ln/>
+        </p:spPr>
+        <p:txBody>
+          <a:bodyPr wrap="square" lIns="0" tIns="0" rIns="0" bIns="0" rtlCol="0" anchor="ctr"/>
+          <a:lstStyle/>
+          <a:p>
+            <a:pPr algn="ctr" indent="0" marL="0">
+              <a:buNone/>
+            </a:pPr>
+            <a:r>
+              <a:rPr lang="en-US" sz="1000" dirty="0">
                 <a:solidFill>
                   <a:srgbClr val="111111"/>
                 </a:solidFill>
               </a:rPr>
-              <a:t>A second copy added</a:t>
-            </a:r>
-            <a:endParaRPr lang="en-US" sz="1250" dirty="0"/>
-          </a:p>
-        </p:txBody>
-      </p:sp>
-      <p:sp>
-        <p:nvSpPr>
-          <p:cNvPr id="17" name="s4_titration-sub-2"/>
+              <a:t>all sites, nothing controlled</a:t>
+            </a:r>
+            <a:endParaRPr lang="en-US" sz="1000" dirty="0"/>
+          </a:p>
+        </p:txBody>
+      </p:sp>
+      <p:sp>
+        <p:nvSpPr>
+          <p:cNvPr id="17" name="s4_titration-row-1"/>
           <p:cNvSpPr txBox="1"/>
           <p:nvPr/>
         </p:nvSpPr>
         <p:spPr>
-          <a:xfrm>
-            <a:off x="7827264" y="1435608"/>
-            <a:ext cx="1842516" cy="310896"/>
-          </a:xfrm>
-          <a:prstGeom prst="rect">
-            <a:avLst/>
-          </a:prstGeom>
-          <a:noFill/>
-          <a:ln/>
-        </p:spPr>
-        <p:txBody>
-          <a:bodyPr wrap="square" lIns="0" tIns="0" rIns="0" bIns="0" rtlCol="0" anchor="t"/>
-          <a:lstStyle/>
-          <a:p>
-            <a:pPr indent="0" marL="0">
-              <a:buNone/>
-            </a:pPr>
-            <a:r>
-              <a:rPr lang="en-US" sz="950" dirty="0">
-                <a:solidFill>
-                  <a:srgbClr val="595959"/>
-                </a:solidFill>
-              </a:rPr>
-              <a:t>net of a shuffled-sequence control</a:t>
-            </a:r>
-            <a:endParaRPr lang="en-US" sz="950" dirty="0"/>
-          </a:p>
-        </p:txBody>
-      </p:sp>
-      <p:pic>
-        <p:nvPicPr>
-          <p:cNvPr id="18" name="Image 6" descr="/Users/z5162865/WongLab/AlphaGenome_Ap1/Analysis/slide_figures/panels/s4_titration_c2_r0.png">    </p:cNvPr>
-          <p:cNvPicPr>
-            <a:picLocks noChangeAspect="1"/>
-          </p:cNvPicPr>
-          <p:nvPr/>
-        </p:nvPicPr>
-        <p:blipFill>
-          <a:blip r:embed="rId7"/>
-          <a:stretch>
-            <a:fillRect/>
-          </a:stretch>
-        </p:blipFill>
-        <p:spPr>
-          <a:xfrm>
-            <a:off x="7827264" y="1902045"/>
-            <a:ext cx="1842516" cy="1170247"/>
-          </a:xfrm>
-          <a:prstGeom prst="rect">
-            <a:avLst/>
-          </a:prstGeom>
-        </p:spPr>
-      </p:pic>
-      <p:pic>
-        <p:nvPicPr>
-          <p:cNvPr id="19" name="Image 7" descr="/Users/z5162865/WongLab/AlphaGenome_Ap1/Analysis/slide_figures/panels/s4_titration_c2_r1.png">    </p:cNvPr>
-          <p:cNvPicPr>
-            <a:picLocks noChangeAspect="1"/>
-          </p:cNvPicPr>
-          <p:nvPr/>
-        </p:nvPicPr>
-        <p:blipFill>
-          <a:blip r:embed="rId8"/>
-          <a:stretch>
-            <a:fillRect/>
-          </a:stretch>
-        </p:blipFill>
-        <p:spPr>
-          <a:xfrm>
-            <a:off x="7827264" y="3438237"/>
-            <a:ext cx="1842516" cy="1170247"/>
-          </a:xfrm>
-          <a:prstGeom prst="rect">
-            <a:avLst/>
-          </a:prstGeom>
-        </p:spPr>
-      </p:pic>
-      <p:sp>
-        <p:nvSpPr>
-          <p:cNvPr id="20" name="s4_titration-title-3"/>
-          <p:cNvSpPr txBox="1"/>
-          <p:nvPr/>
-        </p:nvSpPr>
-        <p:spPr>
-          <a:xfrm>
-            <a:off x="9742932" y="1005840"/>
-            <a:ext cx="1842516" cy="438912"/>
-          </a:xfrm>
-          <a:prstGeom prst="rect">
-            <a:avLst/>
-          </a:prstGeom>
-          <a:noFill/>
-          <a:ln/>
-        </p:spPr>
-        <p:txBody>
-          <a:bodyPr wrap="square" lIns="0" tIns="0" rIns="0" bIns="0" rtlCol="0" anchor="t"/>
-          <a:lstStyle/>
-          <a:p>
-            <a:pPr indent="0" marL="0">
-              <a:buNone/>
-            </a:pPr>
-            <a:r>
-              <a:rPr lang="en-US" sz="1250" b="1" dirty="0">
+          <a:xfrm rot="16200000">
+            <a:off x="3639312" y="3374136"/>
+            <a:ext cx="1371600" cy="1371600"/>
+          </a:xfrm>
+          <a:prstGeom prst="rect">
+            <a:avLst/>
+          </a:prstGeom>
+          <a:noFill/>
+          <a:ln/>
+        </p:spPr>
+        <p:txBody>
+          <a:bodyPr wrap="square" lIns="0" tIns="0" rIns="0" bIns="0" rtlCol="0" anchor="ctr"/>
+          <a:lstStyle/>
+          <a:p>
+            <a:pPr algn="ctr" indent="0" marL="0">
+              <a:buNone/>
+            </a:pPr>
+            <a:r>
+              <a:rPr lang="en-US" sz="1000" dirty="0">
                 <a:solidFill>
                   <a:srgbClr val="111111"/>
                 </a:solidFill>
               </a:rPr>
-              <a:t>The motif moved elsewhere</a:t>
-            </a:r>
-            <a:endParaRPr lang="en-US" sz="1250" dirty="0"/>
-          </a:p>
-        </p:txBody>
-      </p:sp>
-      <p:sp>
-        <p:nvSpPr>
-          <p:cNvPr id="21" name="s4_titration-sub-3"/>
-          <p:cNvSpPr txBox="1"/>
-          <p:nvPr/>
-        </p:nvSpPr>
-        <p:spPr>
-          <a:xfrm>
-            <a:off x="9742932" y="1435608"/>
-            <a:ext cx="1842516" cy="310896"/>
-          </a:xfrm>
-          <a:prstGeom prst="rect">
-            <a:avLst/>
-          </a:prstGeom>
-          <a:noFill/>
-          <a:ln/>
-        </p:spPr>
-        <p:txBody>
-          <a:bodyPr wrap="square" lIns="0" tIns="0" rIns="0" bIns="0" rtlCol="0" anchor="t"/>
-          <a:lstStyle/>
-          <a:p>
-            <a:pPr indent="0" marL="0">
-              <a:buNone/>
-            </a:pPr>
-            <a:r>
-              <a:rPr lang="en-US" sz="950" dirty="0">
-                <a:solidFill>
-                  <a:srgbClr val="595959"/>
-                </a:solidFill>
-              </a:rPr>
-              <a:t>net of the same control</a:t>
-            </a:r>
-            <a:endParaRPr lang="en-US" sz="950" dirty="0"/>
-          </a:p>
-        </p:txBody>
-      </p:sp>
-      <p:pic>
-        <p:nvPicPr>
-          <p:cNvPr id="22" name="Image 8" descr="/Users/z5162865/WongLab/AlphaGenome_Ap1/Analysis/slide_figures/panels/s4_titration_c3_r0.png">    </p:cNvPr>
-          <p:cNvPicPr>
-            <a:picLocks noChangeAspect="1"/>
-          </p:cNvPicPr>
-          <p:nvPr/>
-        </p:nvPicPr>
-        <p:blipFill>
-          <a:blip r:embed="rId9"/>
-          <a:stretch>
-            <a:fillRect/>
-          </a:stretch>
-        </p:blipFill>
-        <p:spPr>
-          <a:xfrm>
-            <a:off x="9742932" y="1902045"/>
-            <a:ext cx="1842516" cy="1170247"/>
-          </a:xfrm>
-          <a:prstGeom prst="rect">
-            <a:avLst/>
-          </a:prstGeom>
-        </p:spPr>
-      </p:pic>
-      <p:pic>
-        <p:nvPicPr>
-          <p:cNvPr id="23" name="Image 9" descr="/Users/z5162865/WongLab/AlphaGenome_Ap1/Analysis/slide_figures/panels/s4_titration_c3_r1.png">    </p:cNvPr>
-          <p:cNvPicPr>
-            <a:picLocks noChangeAspect="1"/>
-          </p:cNvPicPr>
-          <p:nvPr/>
-        </p:nvPicPr>
-        <p:blipFill>
-          <a:blip r:embed="rId10"/>
-          <a:stretch>
-            <a:fillRect/>
-          </a:stretch>
-        </p:blipFill>
-        <p:spPr>
-          <a:xfrm>
-            <a:off x="9742932" y="3438237"/>
-            <a:ext cx="1842516" cy="1170247"/>
-          </a:xfrm>
-          <a:prstGeom prst="rect">
-            <a:avLst/>
-          </a:prstGeom>
-        </p:spPr>
-      </p:pic>
-      <p:sp>
-        <p:nvSpPr>
-          <p:cNvPr id="24" name="s4_titration-row-0"/>
-          <p:cNvSpPr txBox="1"/>
-          <p:nvPr/>
-        </p:nvSpPr>
-        <p:spPr>
-          <a:xfrm rot="16200000">
-            <a:off x="2953512" y="1837944"/>
-            <a:ext cx="1371600" cy="1371600"/>
-          </a:xfrm>
-          <a:prstGeom prst="rect">
-            <a:avLst/>
-          </a:prstGeom>
-          <a:noFill/>
-          <a:ln/>
-        </p:spPr>
-        <p:txBody>
-          <a:bodyPr wrap="square" lIns="0" tIns="0" rIns="0" bIns="0" rtlCol="0" anchor="ctr"/>
-          <a:lstStyle/>
-          <a:p>
-            <a:pPr algn="ctr" indent="0" marL="0">
-              <a:buNone/>
-            </a:pPr>
-            <a:r>
-              <a:rPr lang="en-US" sz="1000" dirty="0">
-                <a:solidFill>
-                  <a:srgbClr val="111111"/>
-                </a:solidFill>
-              </a:rPr>
-              <a:t>all sites, nothing controlled</a:t>
+              <a:t>each class against its own matched Stable controls</a:t>
             </a:r>
             <a:endParaRPr lang="en-US" sz="1000" dirty="0"/>
           </a:p>
@@ -3430,49 +3226,13 @@
       </p:sp>
       <p:sp>
         <p:nvSpPr>
-          <p:cNvPr id="25" name="s4_titration-row-1"/>
-          <p:cNvSpPr txBox="1"/>
-          <p:nvPr/>
-        </p:nvSpPr>
-        <p:spPr>
-          <a:xfrm rot="16200000">
-            <a:off x="2953512" y="3374136"/>
-            <a:ext cx="1371600" cy="1371600"/>
-          </a:xfrm>
-          <a:prstGeom prst="rect">
-            <a:avLst/>
-          </a:prstGeom>
-          <a:noFill/>
-          <a:ln/>
-        </p:spPr>
-        <p:txBody>
-          <a:bodyPr wrap="square" lIns="0" tIns="0" rIns="0" bIns="0" rtlCol="0" anchor="ctr"/>
-          <a:lstStyle/>
-          <a:p>
-            <a:pPr algn="ctr" indent="0" marL="0">
-              <a:buNone/>
-            </a:pPr>
-            <a:r>
-              <a:rPr lang="en-US" sz="1000" dirty="0">
-                <a:solidFill>
-                  <a:srgbClr val="111111"/>
-                </a:solidFill>
-              </a:rPr>
-              <a:t>each class against its own matched Stable controls</a:t>
-            </a:r>
-            <a:endParaRPr lang="en-US" sz="1000" dirty="0"/>
-          </a:p>
-        </p:txBody>
-      </p:sp>
-      <p:sp>
-        <p:nvSpPr>
-          <p:cNvPr id="26" name="s4_titration-dot-0"/>
+          <p:cNvPr id="18" name="s4_titration-dot-0"/>
           <p:cNvSpPr/>
           <p:nvPr/>
         </p:nvSpPr>
         <p:spPr>
           <a:xfrm>
-            <a:off x="3995928" y="4960620"/>
+            <a:off x="4114800" y="4960620"/>
             <a:ext cx="109728" cy="109728"/>
           </a:xfrm>
           <a:prstGeom prst="ellipse">
@@ -3491,13 +3251,13 @@
       </p:sp>
       <p:sp>
         <p:nvSpPr>
-          <p:cNvPr id="27" name="s4_titration-leg-0"/>
+          <p:cNvPr id="19" name="s4_titration-leg-0"/>
           <p:cNvSpPr txBox="1"/>
           <p:nvPr/>
         </p:nvSpPr>
         <p:spPr>
           <a:xfrm>
-            <a:off x="4151376" y="4919472"/>
+            <a:off x="4270248" y="4919472"/>
             <a:ext cx="1057046" cy="201168"/>
           </a:xfrm>
           <a:prstGeom prst="rect">
@@ -3527,13 +3287,13 @@
       </p:sp>
       <p:sp>
         <p:nvSpPr>
-          <p:cNvPr id="28" name="s4_titration-dot-1"/>
+          <p:cNvPr id="20" name="s4_titration-dot-1"/>
           <p:cNvSpPr/>
           <p:nvPr/>
         </p:nvSpPr>
         <p:spPr>
           <a:xfrm>
-            <a:off x="5318150" y="4960620"/>
+            <a:off x="5437022" y="4960620"/>
             <a:ext cx="109728" cy="109728"/>
           </a:xfrm>
           <a:prstGeom prst="ellipse">
@@ -3552,13 +3312,13 @@
       </p:sp>
       <p:sp>
         <p:nvSpPr>
-          <p:cNvPr id="29" name="s4_titration-leg-1"/>
+          <p:cNvPr id="21" name="s4_titration-leg-1"/>
           <p:cNvSpPr txBox="1"/>
           <p:nvPr/>
         </p:nvSpPr>
         <p:spPr>
           <a:xfrm>
-            <a:off x="5473598" y="4919472"/>
+            <a:off x="5592470" y="4919472"/>
             <a:ext cx="596189" cy="201168"/>
           </a:xfrm>
           <a:prstGeom prst="rect">
@@ -3588,13 +3348,13 @@
       </p:sp>
       <p:sp>
         <p:nvSpPr>
-          <p:cNvPr id="30" name="s4_titration-dot-2"/>
+          <p:cNvPr id="22" name="s4_titration-dot-2"/>
           <p:cNvSpPr/>
           <p:nvPr/>
         </p:nvSpPr>
         <p:spPr>
           <a:xfrm>
-            <a:off x="6179515" y="4960620"/>
+            <a:off x="6298387" y="4960620"/>
             <a:ext cx="109728" cy="109728"/>
           </a:xfrm>
           <a:prstGeom prst="ellipse">
@@ -3613,13 +3373,13 @@
       </p:sp>
       <p:sp>
         <p:nvSpPr>
-          <p:cNvPr id="31" name="s4_titration-leg-2"/>
+          <p:cNvPr id="23" name="s4_titration-leg-2"/>
           <p:cNvSpPr txBox="1"/>
           <p:nvPr/>
         </p:nvSpPr>
         <p:spPr>
           <a:xfrm>
-            <a:off x="6334963" y="4919472"/>
+            <a:off x="6453835" y="4919472"/>
             <a:ext cx="727862" cy="201168"/>
           </a:xfrm>
           <a:prstGeom prst="rect">
@@ -3649,13 +3409,13 @@
       </p:sp>
       <p:sp>
         <p:nvSpPr>
-          <p:cNvPr id="32" name="s4_titration-dot-3"/>
+          <p:cNvPr id="24" name="s4_titration-dot-3"/>
           <p:cNvSpPr/>
           <p:nvPr/>
         </p:nvSpPr>
         <p:spPr>
           <a:xfrm>
-            <a:off x="7172554" y="4960620"/>
+            <a:off x="7291426" y="4960620"/>
             <a:ext cx="109728" cy="109728"/>
           </a:xfrm>
           <a:prstGeom prst="ellipse">
@@ -3674,13 +3434,13 @@
       </p:sp>
       <p:sp>
         <p:nvSpPr>
-          <p:cNvPr id="33" name="s4_titration-leg-3"/>
+          <p:cNvPr id="25" name="s4_titration-leg-3"/>
           <p:cNvSpPr txBox="1"/>
           <p:nvPr/>
         </p:nvSpPr>
         <p:spPr>
           <a:xfrm>
-            <a:off x="7328002" y="4919472"/>
+            <a:off x="7446874" y="4919472"/>
             <a:ext cx="925373" cy="201168"/>
           </a:xfrm>
           <a:prstGeom prst="rect">
@@ -3710,13 +3470,13 @@
       </p:sp>
       <p:sp>
         <p:nvSpPr>
-          <p:cNvPr id="34" name="s4_titration-dot-4"/>
+          <p:cNvPr id="26" name="s4_titration-dot-4"/>
           <p:cNvSpPr/>
           <p:nvPr/>
         </p:nvSpPr>
         <p:spPr>
           <a:xfrm>
-            <a:off x="8363102" y="4960620"/>
+            <a:off x="8481974" y="4960620"/>
             <a:ext cx="109728" cy="109728"/>
           </a:xfrm>
           <a:prstGeom prst="ellipse">
@@ -3735,13 +3495,13 @@
       </p:sp>
       <p:sp>
         <p:nvSpPr>
-          <p:cNvPr id="35" name="s4_titration-leg-4"/>
+          <p:cNvPr id="27" name="s4_titration-leg-4"/>
           <p:cNvSpPr txBox="1"/>
           <p:nvPr/>
         </p:nvSpPr>
         <p:spPr>
           <a:xfrm>
-            <a:off x="8518550" y="4919472"/>
+            <a:off x="8637422" y="4919472"/>
             <a:ext cx="1057046" cy="201168"/>
           </a:xfrm>
           <a:prstGeom prst="rect">
@@ -3771,13 +3531,13 @@
       </p:sp>
       <p:sp>
         <p:nvSpPr>
-          <p:cNvPr id="36" name="s4_titration-dot-5"/>
+          <p:cNvPr id="28" name="s4_titration-dot-5"/>
           <p:cNvSpPr/>
           <p:nvPr/>
         </p:nvSpPr>
         <p:spPr>
           <a:xfrm>
-            <a:off x="9685325" y="4960620"/>
+            <a:off x="9804197" y="4960620"/>
             <a:ext cx="109728" cy="109728"/>
           </a:xfrm>
           <a:prstGeom prst="ellipse">
@@ -3796,13 +3556,13 @@
       </p:sp>
       <p:sp>
         <p:nvSpPr>
-          <p:cNvPr id="37" name="s4_titration-leg-5"/>
+          <p:cNvPr id="29" name="s4_titration-leg-5"/>
           <p:cNvSpPr txBox="1"/>
           <p:nvPr/>
         </p:nvSpPr>
         <p:spPr>
           <a:xfrm>
-            <a:off x="9840773" y="4919472"/>
+            <a:off x="9959645" y="4919472"/>
             <a:ext cx="2373782" cy="201168"/>
           </a:xfrm>
           <a:prstGeom prst="rect">
@@ -3832,14 +3592,14 @@
       </p:sp>
       <p:sp>
         <p:nvSpPr>
-          <p:cNvPr id="38" name="s4_titration-key"/>
+          <p:cNvPr id="30" name="s4_titration-key"/>
           <p:cNvSpPr txBox="1"/>
           <p:nvPr/>
         </p:nvSpPr>
         <p:spPr>
           <a:xfrm>
-            <a:off x="3429000" y="5193792"/>
-            <a:ext cx="8229600" cy="502920"/>
+            <a:off x="4114800" y="5193792"/>
+            <a:ext cx="7589520" cy="502920"/>
           </a:xfrm>
           <a:prstGeom prst="rect">
             <a:avLst/>
@@ -3860,7 +3620,7 @@
                   <a:srgbClr val="595959"/>
                 </a:solidFill>
               </a:rPr>
-              <a:t>grey line and band (top row): all Stable sites, median with 95% bootstrap CI.   grey dots (bottom row): that class's own matched Stable controls.   Stars test the class against that reference — Mann–Whitney on all sites, paired Wilcoxon on matched pairs — BH across all 40 tests.   *** p&lt;0.001   ** p&lt;0.01   * p&lt;0.05   ns ≥ 0.05</a:t>
+              <a:t>grey line and band (top row): all Stable sites, median with 95% bootstrap CI.   grey dots (bottom row): that class's own matched Stable controls.   Stars test the class against that reference — Mann–Whitney on all sites, paired Wilcoxon on matched pairs — BH across all 20 tests.   *** p&lt;0.001   ** p&lt;0.01   * p&lt;0.05   ns ≥ 0.05</a:t>
             </a:r>
             <a:endParaRPr lang="en-US" sz="900" dirty="0"/>
           </a:p>
@@ -3868,7 +3628,7 @@
       </p:sp>
       <p:sp>
         <p:nvSpPr>
-          <p:cNvPr id="39" name="Text 0"/>
+          <p:cNvPr id="31" name="Text 0"/>
           <p:cNvSpPr/>
           <p:nvPr>
             <p:ph idx="101" type="body" hasCustomPrompt="1"/>
@@ -3909,7 +3669,7 @@
                   <a:srgbClr val="111111"/>
                 </a:solidFill>
               </a:rPr>
-              <a:t>one wrong base costs −0.45 of the −0.56 total and a moved motif recovers only a third — but every class titrates the same way</a:t>
+              <a:t>a second copy is worth most at ±20–40 bp and a moved motif recovers only a third of what destroying it cost — and no class differs once context is matched</a:t>
             </a:r>
             <a:endParaRPr lang="en-US" sz="1500" dirty="0"/>
           </a:p>
@@ -6974,7 +6734,7 @@
         </p:nvSpPr>
         <p:spPr>
           <a:xfrm>
-            <a:off x="1618488" y="4960620"/>
+            <a:off x="960120" y="4960620"/>
             <a:ext cx="109728" cy="109728"/>
           </a:xfrm>
           <a:prstGeom prst="ellipse">
@@ -6999,7 +6759,7 @@
         </p:nvSpPr>
         <p:spPr>
           <a:xfrm>
-            <a:off x="1773936" y="4919472"/>
+            <a:off x="1115568" y="4919472"/>
             <a:ext cx="1057046" cy="201168"/>
           </a:xfrm>
           <a:prstGeom prst="rect">
@@ -7035,7 +6795,7 @@
         </p:nvSpPr>
         <p:spPr>
           <a:xfrm>
-            <a:off x="2940710" y="4960620"/>
+            <a:off x="2282342" y="4960620"/>
             <a:ext cx="109728" cy="109728"/>
           </a:xfrm>
           <a:prstGeom prst="ellipse">
@@ -7060,7 +6820,7 @@
         </p:nvSpPr>
         <p:spPr>
           <a:xfrm>
-            <a:off x="3096158" y="4919472"/>
+            <a:off x="2437790" y="4919472"/>
             <a:ext cx="596189" cy="201168"/>
           </a:xfrm>
           <a:prstGeom prst="rect">
@@ -7096,7 +6856,7 @@
         </p:nvSpPr>
         <p:spPr>
           <a:xfrm>
-            <a:off x="3802075" y="4960620"/>
+            <a:off x="3143707" y="4960620"/>
             <a:ext cx="109728" cy="109728"/>
           </a:xfrm>
           <a:prstGeom prst="ellipse">
@@ -7121,7 +6881,7 @@
         </p:nvSpPr>
         <p:spPr>
           <a:xfrm>
-            <a:off x="3957523" y="4919472"/>
+            <a:off x="3299155" y="4919472"/>
             <a:ext cx="727862" cy="201168"/>
           </a:xfrm>
           <a:prstGeom prst="rect">
@@ -7157,7 +6917,7 @@
         </p:nvSpPr>
         <p:spPr>
           <a:xfrm>
-            <a:off x="4795114" y="4960620"/>
+            <a:off x="4136746" y="4960620"/>
             <a:ext cx="109728" cy="109728"/>
           </a:xfrm>
           <a:prstGeom prst="ellipse">
@@ -7182,7 +6942,7 @@
         </p:nvSpPr>
         <p:spPr>
           <a:xfrm>
-            <a:off x="4950562" y="4919472"/>
+            <a:off x="4292194" y="4919472"/>
             <a:ext cx="925373" cy="201168"/>
           </a:xfrm>
           <a:prstGeom prst="rect">
@@ -7218,7 +6978,7 @@
         </p:nvSpPr>
         <p:spPr>
           <a:xfrm>
-            <a:off x="5985662" y="4960620"/>
+            <a:off x="5327294" y="4960620"/>
             <a:ext cx="109728" cy="109728"/>
           </a:xfrm>
           <a:prstGeom prst="ellipse">
@@ -7243,7 +7003,7 @@
         </p:nvSpPr>
         <p:spPr>
           <a:xfrm>
-            <a:off x="6141110" y="4919472"/>
+            <a:off x="5482742" y="4919472"/>
             <a:ext cx="1057046" cy="201168"/>
           </a:xfrm>
           <a:prstGeom prst="rect">
@@ -7279,7 +7039,7 @@
         </p:nvSpPr>
         <p:spPr>
           <a:xfrm>
-            <a:off x="7307885" y="4960620"/>
+            <a:off x="6649517" y="4960620"/>
             <a:ext cx="109728" cy="109728"/>
           </a:xfrm>
           <a:prstGeom prst="ellipse">
@@ -7304,7 +7064,7 @@
         </p:nvSpPr>
         <p:spPr>
           <a:xfrm>
-            <a:off x="7463333" y="4919472"/>
+            <a:off x="6804965" y="4919472"/>
             <a:ext cx="2373782" cy="201168"/>
           </a:xfrm>
           <a:prstGeom prst="rect">
@@ -8994,7 +8754,7 @@
         </p:nvSpPr>
         <p:spPr>
           <a:xfrm>
-            <a:off x="2670048" y="4960620"/>
+            <a:off x="2011680" y="4960620"/>
             <a:ext cx="109728" cy="109728"/>
           </a:xfrm>
           <a:prstGeom prst="ellipse">
@@ -9019,7 +8779,7 @@
         </p:nvSpPr>
         <p:spPr>
           <a:xfrm>
-            <a:off x="2825496" y="4919472"/>
+            <a:off x="2167128" y="4919472"/>
             <a:ext cx="1057046" cy="201168"/>
           </a:xfrm>
           <a:prstGeom prst="rect">
@@ -9055,7 +8815,7 @@
         </p:nvSpPr>
         <p:spPr>
           <a:xfrm>
-            <a:off x="3992270" y="4960620"/>
+            <a:off x="3333902" y="4960620"/>
             <a:ext cx="109728" cy="109728"/>
           </a:xfrm>
           <a:prstGeom prst="ellipse">
@@ -9080,7 +8840,7 @@
         </p:nvSpPr>
         <p:spPr>
           <a:xfrm>
-            <a:off x="4147718" y="4919472"/>
+            <a:off x="3489350" y="4919472"/>
             <a:ext cx="596189" cy="201168"/>
           </a:xfrm>
           <a:prstGeom prst="rect">
@@ -9116,7 +8876,7 @@
         </p:nvSpPr>
         <p:spPr>
           <a:xfrm>
-            <a:off x="4853635" y="4960620"/>
+            <a:off x="4195267" y="4960620"/>
             <a:ext cx="109728" cy="109728"/>
           </a:xfrm>
           <a:prstGeom prst="ellipse">
@@ -9141,7 +8901,7 @@
         </p:nvSpPr>
         <p:spPr>
           <a:xfrm>
-            <a:off x="5009083" y="4919472"/>
+            <a:off x="4350715" y="4919472"/>
             <a:ext cx="727862" cy="201168"/>
           </a:xfrm>
           <a:prstGeom prst="rect">
@@ -9177,7 +8937,7 @@
         </p:nvSpPr>
         <p:spPr>
           <a:xfrm>
-            <a:off x="5846674" y="4960620"/>
+            <a:off x="5188306" y="4960620"/>
             <a:ext cx="109728" cy="109728"/>
           </a:xfrm>
           <a:prstGeom prst="ellipse">
@@ -9202,7 +8962,7 @@
         </p:nvSpPr>
         <p:spPr>
           <a:xfrm>
-            <a:off x="6002122" y="4919472"/>
+            <a:off x="5343754" y="4919472"/>
             <a:ext cx="925373" cy="201168"/>
           </a:xfrm>
           <a:prstGeom prst="rect">
@@ -9238,7 +8998,7 @@
         </p:nvSpPr>
         <p:spPr>
           <a:xfrm>
-            <a:off x="7037222" y="4960620"/>
+            <a:off x="6378854" y="4960620"/>
             <a:ext cx="109728" cy="109728"/>
           </a:xfrm>
           <a:prstGeom prst="ellipse">
@@ -9263,7 +9023,7 @@
         </p:nvSpPr>
         <p:spPr>
           <a:xfrm>
-            <a:off x="7192670" y="4919472"/>
+            <a:off x="6534302" y="4919472"/>
             <a:ext cx="1057046" cy="201168"/>
           </a:xfrm>
           <a:prstGeom prst="rect">
@@ -9299,7 +9059,7 @@
         </p:nvSpPr>
         <p:spPr>
           <a:xfrm>
-            <a:off x="8359445" y="4960620"/>
+            <a:off x="7701077" y="4960620"/>
             <a:ext cx="109728" cy="109728"/>
           </a:xfrm>
           <a:prstGeom prst="ellipse">
@@ -9324,7 +9084,7 @@
         </p:nvSpPr>
         <p:spPr>
           <a:xfrm>
-            <a:off x="8514893" y="4919472"/>
+            <a:off x="7856525" y="4919472"/>
             <a:ext cx="2373782" cy="201168"/>
           </a:xfrm>
           <a:prstGeom prst="rect">
@@ -10346,7 +10106,7 @@
         </p:nvSpPr>
         <p:spPr>
           <a:xfrm>
-            <a:off x="3995928" y="4960620"/>
+            <a:off x="3429000" y="4960620"/>
             <a:ext cx="109728" cy="109728"/>
           </a:xfrm>
           <a:prstGeom prst="ellipse">
@@ -10371,7 +10131,7 @@
         </p:nvSpPr>
         <p:spPr>
           <a:xfrm>
-            <a:off x="4151376" y="4919472"/>
+            <a:off x="3584448" y="4919472"/>
             <a:ext cx="1057046" cy="201168"/>
           </a:xfrm>
           <a:prstGeom prst="rect">
@@ -10407,7 +10167,7 @@
         </p:nvSpPr>
         <p:spPr>
           <a:xfrm>
-            <a:off x="5318150" y="4960620"/>
+            <a:off x="4751222" y="4960620"/>
             <a:ext cx="109728" cy="109728"/>
           </a:xfrm>
           <a:prstGeom prst="ellipse">
@@ -10432,7 +10192,7 @@
         </p:nvSpPr>
         <p:spPr>
           <a:xfrm>
-            <a:off x="5473598" y="4919472"/>
+            <a:off x="4906670" y="4919472"/>
             <a:ext cx="596189" cy="201168"/>
           </a:xfrm>
           <a:prstGeom prst="rect">
@@ -10468,7 +10228,7 @@
         </p:nvSpPr>
         <p:spPr>
           <a:xfrm>
-            <a:off x="6179515" y="4960620"/>
+            <a:off x="5612587" y="4960620"/>
             <a:ext cx="109728" cy="109728"/>
           </a:xfrm>
           <a:prstGeom prst="ellipse">
@@ -10493,7 +10253,7 @@
         </p:nvSpPr>
         <p:spPr>
           <a:xfrm>
-            <a:off x="6334963" y="4919472"/>
+            <a:off x="5768035" y="4919472"/>
             <a:ext cx="727862" cy="201168"/>
           </a:xfrm>
           <a:prstGeom prst="rect">
@@ -10529,7 +10289,7 @@
         </p:nvSpPr>
         <p:spPr>
           <a:xfrm>
-            <a:off x="7172554" y="4960620"/>
+            <a:off x="6605626" y="4960620"/>
             <a:ext cx="109728" cy="109728"/>
           </a:xfrm>
           <a:prstGeom prst="ellipse">
@@ -10554,7 +10314,7 @@
         </p:nvSpPr>
         <p:spPr>
           <a:xfrm>
-            <a:off x="7328002" y="4919472"/>
+            <a:off x="6761074" y="4919472"/>
             <a:ext cx="925373" cy="201168"/>
           </a:xfrm>
           <a:prstGeom prst="rect">
@@ -10590,7 +10350,7 @@
         </p:nvSpPr>
         <p:spPr>
           <a:xfrm>
-            <a:off x="8363102" y="4960620"/>
+            <a:off x="7796174" y="4960620"/>
             <a:ext cx="109728" cy="109728"/>
           </a:xfrm>
           <a:prstGeom prst="ellipse">
@@ -10615,7 +10375,7 @@
         </p:nvSpPr>
         <p:spPr>
           <a:xfrm>
-            <a:off x="8518550" y="4919472"/>
+            <a:off x="7951622" y="4919472"/>
             <a:ext cx="1057046" cy="201168"/>
           </a:xfrm>
           <a:prstGeom prst="rect">
@@ -10651,7 +10411,7 @@
         </p:nvSpPr>
         <p:spPr>
           <a:xfrm>
-            <a:off x="9685325" y="4960620"/>
+            <a:off x="9118397" y="4960620"/>
             <a:ext cx="109728" cy="109728"/>
           </a:xfrm>
           <a:prstGeom prst="ellipse">
@@ -10676,7 +10436,7 @@
         </p:nvSpPr>
         <p:spPr>
           <a:xfrm>
-            <a:off x="9840773" y="4919472"/>
+            <a:off x="9273845" y="4919472"/>
             <a:ext cx="2373782" cy="201168"/>
           </a:xfrm>
           <a:prstGeom prst="rect">

--- a/Analysis/AP1_AlphaGenome_results.pptx
+++ b/Analysis/AP1_AlphaGenome_results.pptx
@@ -19,9 +19,10 @@
     <p:sldId id="267" r:id="rId13"/>
     <p:sldId id="268" r:id="rId14"/>
     <p:sldId id="269" r:id="rId15"/>
+    <p:sldId id="270" r:id="rId16"/>
   </p:sldIdLst>
   <p:notesMasterIdLst>
-    <p:notesMasterId r:id="rId16"/>
+    <p:notesMasterId r:id="rId17"/>
   </p:notesMasterIdLst>
   <p:sldSz cx="12192000" cy="6858000"/>
   <p:notesSz cx="6858000" cy="12192000"/>
@@ -120,18 +121,18 @@
   <p:extLst>
     <p:ext uri="{521415D9-36F7-43E2-AB2F-B90AF26B5E84}">
       <p14:sectionLst xmlns:p14="http://schemas.microsoft.com/office/powerpoint/2010/main">
-        <p14:section name="Opening" id="{92abd594-245a-463d-cd41-341592016d74}">
+        <p14:section name="Opening" id="{2828df0b-e917-621c-76f2-5823714ab8e8}">
           <p14:sldIdLst>
             <p14:sldId id="256"/>
           </p14:sldIdLst>
         </p14:section>
-        <p14:section name="Design" id="{5c2093be-d6b4-0c66-b714-fbd22f3e45ff}">
+        <p14:section name="Design" id="{77032ca4-f691-0c7d-274a-832605b09e8d}">
           <p14:sldIdLst>
             <p14:sldId id="257"/>
             <p14:sldId id="258"/>
           </p14:sldIdLst>
         </p14:section>
-        <p14:section name="Findings" id="{e636c28f-c5a8-6903-8fd0-0c68ed002e0a}">
+        <p14:section name="Findings" id="{da921934-714d-13f3-44b2-82ccaebf2b49}">
           <p14:sldIdLst>
             <p14:sldId id="259"/>
             <p14:sldId id="260"/>
@@ -142,12 +143,13 @@
             <p14:sldId id="265"/>
             <p14:sldId id="266"/>
             <p14:sldId id="267"/>
+            <p14:sldId id="268"/>
           </p14:sldIdLst>
         </p14:section>
-        <p14:section name="Conclusion" id="{74930897-9547-5649-6038-27796074696c}">
+        <p14:section name="Conclusion" id="{ee1c481d-10cd-f30e-31d7-2fe2ffb12617}">
           <p14:sldIdLst>
-            <p14:sldId id="268"/>
             <p14:sldId id="269"/>
+            <p14:sldId id="270"/>
           </p14:sldIdLst>
         </p14:section>
       </p14:sectionLst>
@@ -642,7 +644,7 @@
           <a:p>
             <a:r>
               <a:rPr lang="en-US" dirty="0"/>
-              <a:t>The 1-base and 7-base core results are not repeated here: they say the same thing as the motif shuffle on the earlier slide. One wrong base costs -0.45 of the -0.56 total, the dose slope tracks core quality read from the genome at rho 0.30, and orientation is irrelevant as expected for a near-palindrome.</a:t>
+              <a:t>10 of 16 scan features separate Dynamic from matched Stable. Share of dependence within 85 bp 0.63 vs 0.74, spread 94 vs 86 bp, largest single-base effect 0.74 vs 0.90. Age Up is the most diffuse class of all.</a:t>
             </a:r>
             <a:endParaRPr lang="en-US" dirty="0"/>
           </a:p>
@@ -730,7 +732,7 @@
           <a:p>
             <a:r>
               <a:rPr lang="en-US" dirty="0"/>
-              <a:t>The titration experiment was designed before this hypothesis existed, so this is a prediction rather than a fit. Caveat: the motif-sensitivity result does not survive matching on measured accessibility; the core-quality result does.</a:t>
+              <a:t>The 1-base and 7-base core results are not repeated here: they say the same thing as the motif shuffle on the earlier slide. One wrong base costs -0.45 of the -0.56 total, the dose slope tracks core quality read from the genome at rho 0.30, and orientation is irrelevant as expected for a near-palindrome.</a:t>
             </a:r>
             <a:endParaRPr lang="en-US" dirty="0"/>
           </a:p>
@@ -818,7 +820,7 @@
           <a:p>
             <a:r>
               <a:rPr lang="en-US" dirty="0"/>
-              <a:t>The comparable quantity is a ratio within each element, so assay scale cancels. The class direction disagrees: in the MPRA responsive elements depend MORE on their sequence, which separates intrinsic potential from what sets accessibility in the genome.</a:t>
+              <a:t>The titration experiment was designed before this hypothesis existed, so this is a prediction rather than a fit. Caveat: the motif-sensitivity result does not survive matching on measured accessibility; the core-quality result does.</a:t>
             </a:r>
             <a:endParaRPr lang="en-US" dirty="0"/>
           </a:p>
@@ -906,7 +908,7 @@
           <a:p>
             <a:r>
               <a:rPr lang="en-US" dirty="0"/>
-              <a:t>The mutation-response profile is a null and a well-controlled one: given the same chromatin, the two classes lose the same amount to the same kind of edit. What is not null is the scale at which that is true and the one missing partner.</a:t>
+              <a:t>The comparable quantity is a ratio within each element, so assay scale cancels. The class direction disagrees: in the MPRA responsive elements depend MORE on their sequence, which separates intrinsic potential from what sets accessibility in the genome.</a:t>
             </a:r>
             <a:endParaRPr lang="en-US" dirty="0"/>
           </a:p>
@@ -994,7 +996,7 @@
           <a:p>
             <a:r>
               <a:rPr lang="en-US" dirty="0"/>
-              <a:t>Also open: whether the MEF2 deficit at Dynamic sites is detection or genuine differential occupancy of equally-present motifs.</a:t>
+              <a:t>The mutation-response profile is a null and a well-controlled one: given the same chromatin, the two classes lose the same amount to the same kind of edit. What is not null is the scale at which that is true and the one missing partner.</a:t>
             </a:r>
             <a:endParaRPr lang="en-US" dirty="0"/>
           </a:p>
@@ -1018,6 +1020,94 @@
             <a:fld id="{F7021451-1387-4CA6-816F-3879F97B5CBC}" type="slidenum">
               <a:rPr lang="en-US"/>
               <a:t>14</a:t>
+            </a:fld>
+            <a:endParaRPr lang="en-US"/>
+          </a:p>
+        </p:txBody>
+      </p:sp>
+    </p:spTree>
+    <p:extLst>
+      <p:ext uri="{BB962C8B-B14F-4D97-AF65-F5344CB8AC3E}">
+        <p14:creationId xmlns:p14="http://schemas.microsoft.com/office/powerpoint/2010/main" val="1024086991"/>
+      </p:ext>
+    </p:extLst>
+  </p:cSld>
+  <p:clrMapOvr>
+    <a:masterClrMapping/>
+  </p:clrMapOvr>
+</p:notes>
+</file>
+
+<file path=ppt/notesSlides/notesSlide15.xml><?xml version="1.0" encoding="utf-8"?>
+<p:notes xmlns:a="http://schemas.openxmlformats.org/drawingml/2006/main" xmlns:r="http://schemas.openxmlformats.org/officeDocument/2006/relationships" xmlns:p="http://schemas.openxmlformats.org/presentationml/2006/main">
+  <p:cSld>
+    <p:spTree>
+      <p:nvGrpSpPr>
+        <p:cNvPr id="1" name=""/>
+        <p:cNvGrpSpPr/>
+        <p:nvPr/>
+      </p:nvGrpSpPr>
+      <p:grpSpPr>
+        <a:xfrm>
+          <a:off x="0" y="0"/>
+          <a:ext cx="0" cy="0"/>
+          <a:chOff x="0" y="0"/>
+          <a:chExt cx="0" cy="0"/>
+        </a:xfrm>
+      </p:grpSpPr>
+      <p:sp>
+        <p:nvSpPr>
+          <p:cNvPr id="2" name="Slide Image Placeholder 1"/>
+          <p:cNvSpPr>
+            <a:spLocks noGrp="1" noRot="1" noChangeAspect="1"/>
+          </p:cNvSpPr>
+          <p:nvPr>
+            <p:ph type="sldImg"/>
+          </p:nvPr>
+        </p:nvSpPr>
+        <p:spPr/>
+      </p:sp>
+      <p:sp>
+        <p:nvSpPr>
+          <p:cNvPr id="3" name="Notes Placeholder 2"/>
+          <p:cNvSpPr>
+            <a:spLocks noGrp="1"/>
+          </p:cNvSpPr>
+          <p:nvPr>
+            <p:ph type="body" idx="1"/>
+          </p:nvPr>
+        </p:nvSpPr>
+        <p:spPr/>
+        <p:txBody>
+          <a:bodyPr/>
+          <a:lstStyle/>
+          <a:p>
+            <a:r>
+              <a:rPr lang="en-US" dirty="0"/>
+              <a:t>Also open: whether the MEF2 deficit at Dynamic sites is detection or genuine differential occupancy of equally-present motifs.</a:t>
+            </a:r>
+            <a:endParaRPr lang="en-US" dirty="0"/>
+          </a:p>
+        </p:txBody>
+      </p:sp>
+      <p:sp>
+        <p:nvSpPr>
+          <p:cNvPr id="4" name="Slide Number Placeholder 3"/>
+          <p:cNvSpPr>
+            <a:spLocks noGrp="1"/>
+          </p:cNvSpPr>
+          <p:nvPr>
+            <p:ph type="sldNum" sz="quarter" idx="10"/>
+          </p:nvPr>
+        </p:nvSpPr>
+        <p:spPr/>
+        <p:txBody>
+          <a:bodyPr/>
+          <a:lstStyle/>
+          <a:p>
+            <a:fld id="{F7021451-1387-4CA6-816F-3879F97B5CBC}" type="slidenum">
+              <a:rPr lang="en-US"/>
+              <a:t>15</a:t>
             </a:fld>
             <a:endParaRPr lang="en-US"/>
           </a:p>
@@ -1610,7 +1700,7 @@
           <a:p>
             <a:r>
               <a:rPr lang="en-US" dirty="0"/>
-              <a:t>Both are promoters a few hundred bp from a TSS, matched on predicted accessibility (0.96 vs 1.12) and peak width (1359 vs 1329 bp). At the Sqstm1 promoter AP-1 is bound in all three conditions, the motif window is worth -1.00 and 81% of the loss sits within 85 bp. At the Psmd11 promoter AP-1 is absent in young and gained in both aged states, the motif is still the strongest window but only -0.58, and the loss is smeared over 114 bp against 83. Psmd11 rises with age, matching the AP-1 gain; the exercise direction does not match, so do not claim it.</a:t>
+              <a:t>Presence vs rank is the point. MEF2 unconditional on all sites: Dynamic OR 0.58, Age Up 0.45, Exercise Down 0.56, all surviving BH; given a MEF2 is present, every class ranks it in the top three about equally often (OR 0.87-2.03, nothing significant). The same split holds under matching but with much less power (0.54 and 0.53 unconditional, p 0.008 and 0.026; 0.82 and 0.62 given present). The AP-1 panel is the one new finding: given a second AP-1 footprint is present, Dynamic elements rank it top 1.45x more often than Stable, FDR 0.036 on all sites, and the direction repeats in all four directional classes (1.43-1.62) though only the pooled comparison survives correction. Under matching it is 1.54-2.54 and nothing survives. CTCF is the design control: OR 3.0-6.5 with FDR &lt; 0.001 on all sites, 1.03-1.07 and p = 1.0 matched.</a:t>
             </a:r>
             <a:endParaRPr lang="en-US" dirty="0"/>
           </a:p>
@@ -1698,7 +1788,7 @@
           <a:p>
             <a:r>
               <a:rPr lang="en-US" dirty="0"/>
-              <a:t>10 of 16 scan features separate Dynamic from matched Stable. Share of dependence within 85 bp 0.63 vs 0.74, spread 94 vs 86 bp, largest single-base effect 0.74 vs 0.90. Age Up is the most diffuse class of all.</a:t>
+              <a:t>Both are promoters a few hundred bp from a TSS, matched on predicted accessibility (0.96 vs 1.12) and peak width (1359 vs 1329 bp). At the Sqstm1 promoter AP-1 is bound in all three conditions, the motif window is worth -1.00 and 81% of the loss sits within 85 bp. At the Psmd11 promoter AP-1 is absent in young and gained in both aged states, the motif is still the strongest window but only -0.58, and the loss is smeared over 114 bp against 83. Psmd11 rises with age, matching the AP-1 gain; the exercise direction does not match, so do not claim it.</a:t>
             </a:r>
             <a:endParaRPr lang="en-US" dirty="0"/>
           </a:p>
@@ -2750,51 +2840,15 @@
                   <a:schemeClr val="tx1"/>
                 </a:solidFill>
               </a:rPr>
-              <a:t>Position is a dial, and a moved motif never replaces the original</a:t>
+              <a:t>Responsive sites spread their dependence out</a:t>
             </a:r>
             <a:endParaRPr lang="en-US" sz="2800" dirty="0"/>
-          </a:p>
-        </p:txBody>
-      </p:sp>
-      <p:sp>
-        <p:nvSpPr>
-          <p:cNvPr id="3" name="copy-title"/>
-          <p:cNvSpPr txBox="1"/>
-          <p:nvPr/>
-        </p:nvSpPr>
-        <p:spPr>
-          <a:xfrm>
-            <a:off x="502920" y="1024128"/>
-            <a:ext cx="2834640" cy="274320"/>
-          </a:xfrm>
-          <a:prstGeom prst="rect">
-            <a:avLst/>
-          </a:prstGeom>
-          <a:noFill/>
-          <a:ln/>
-        </p:spPr>
-        <p:txBody>
-          <a:bodyPr wrap="square" lIns="0" tIns="0" rIns="0" bIns="0" rtlCol="0" anchor="ctr"/>
-          <a:lstStyle/>
-          <a:p>
-            <a:pPr indent="0" marL="0">
-              <a:buNone/>
-            </a:pPr>
-            <a:r>
-              <a:rPr lang="en-US" sz="1250" b="1" dirty="0">
-                <a:solidFill>
-                  <a:srgbClr val="111111"/>
-                </a:solidFill>
-              </a:rPr>
-              <a:t>Where the added copy works best</a:t>
-            </a:r>
-            <a:endParaRPr lang="en-US" sz="1250" dirty="0"/>
           </a:p>
         </p:txBody>
       </p:sp>
       <p:pic>
         <p:nvPicPr>
-          <p:cNvPr id="4" name="Image 0" descr="/Users/z5162865/WongLab/AlphaGenome_Ap1/Analysis/slide_figures/panels/d_addcopy.png">    </p:cNvPr>
+          <p:cNvPr id="3" name="Image 0" descr="/Users/z5162865/WongLab/AlphaGenome_Ap1/Analysis/slide_figures/panels/d_profile.png">    </p:cNvPr>
           <p:cNvPicPr>
             <a:picLocks noChangeAspect="1"/>
           </p:cNvPicPr>
@@ -2808,8 +2862,8 @@
         </p:blipFill>
         <p:spPr>
           <a:xfrm>
-            <a:off x="709758" y="1325880"/>
-            <a:ext cx="2420965" cy="1783080"/>
+            <a:off x="502920" y="1373869"/>
+            <a:ext cx="2286000" cy="1915702"/>
           </a:xfrm>
           <a:prstGeom prst="rect">
             <a:avLst/>
@@ -2818,14 +2872,14 @@
       </p:pic>
       <p:sp>
         <p:nvSpPr>
-          <p:cNvPr id="5" name="move-title"/>
+          <p:cNvPr id="4" name="profile-caption"/>
           <p:cNvSpPr txBox="1"/>
           <p:nvPr/>
         </p:nvSpPr>
         <p:spPr>
           <a:xfrm>
-            <a:off x="502920" y="3218688"/>
-            <a:ext cx="2834640" cy="274320"/>
+            <a:off x="502920" y="3337560"/>
+            <a:ext cx="2286000" cy="822960"/>
           </a:xfrm>
           <a:prstGeom prst="rect">
             <a:avLst/>
@@ -2841,20 +2895,92 @@
               <a:buNone/>
             </a:pPr>
             <a:r>
+              <a:rPr lang="en-US" sz="950" dirty="0">
+                <a:solidFill>
+                  <a:srgbClr val="595959"/>
+                </a:solidFill>
+              </a:rPr>
+              <a:t>one site’s sliding-window profile: each bar is a 10 bp window replaced, shaded band = within ±85 bp of the motif</a:t>
+            </a:r>
+            <a:endParaRPr lang="en-US" sz="950" dirty="0"/>
+          </a:p>
+        </p:txBody>
+      </p:sp>
+      <p:sp>
+        <p:nvSpPr>
+          <p:cNvPr id="5" name="s3_dependence-title-0"/>
+          <p:cNvSpPr txBox="1"/>
+          <p:nvPr/>
+        </p:nvSpPr>
+        <p:spPr>
+          <a:xfrm>
+            <a:off x="3995928" y="1005840"/>
+            <a:ext cx="1842516" cy="438912"/>
+          </a:xfrm>
+          <a:prstGeom prst="rect">
+            <a:avLst/>
+          </a:prstGeom>
+          <a:noFill/>
+          <a:ln/>
+        </p:spPr>
+        <p:txBody>
+          <a:bodyPr wrap="square" lIns="0" tIns="0" rIns="0" bIns="0" rtlCol="0" anchor="t"/>
+          <a:lstStyle/>
+          <a:p>
+            <a:pPr indent="0" marL="0">
+              <a:buNone/>
+            </a:pPr>
+            <a:r>
               <a:rPr lang="en-US" sz="1250" b="1" dirty="0">
                 <a:solidFill>
                   <a:srgbClr val="111111"/>
                 </a:solidFill>
               </a:rPr>
-              <a:t>...and where it lands when moved</a:t>
+              <a:t>Dependence near the motif</a:t>
             </a:r>
             <a:endParaRPr lang="en-US" sz="1250" dirty="0"/>
+          </a:p>
+        </p:txBody>
+      </p:sp>
+      <p:sp>
+        <p:nvSpPr>
+          <p:cNvPr id="6" name="s3_dependence-sub-0"/>
+          <p:cNvSpPr txBox="1"/>
+          <p:nvPr/>
+        </p:nvSpPr>
+        <p:spPr>
+          <a:xfrm>
+            <a:off x="3995928" y="1435608"/>
+            <a:ext cx="1842516" cy="310896"/>
+          </a:xfrm>
+          <a:prstGeom prst="rect">
+            <a:avLst/>
+          </a:prstGeom>
+          <a:noFill/>
+          <a:ln/>
+        </p:spPr>
+        <p:txBody>
+          <a:bodyPr wrap="square" lIns="0" tIns="0" rIns="0" bIns="0" rtlCol="0" anchor="t"/>
+          <a:lstStyle/>
+          <a:p>
+            <a:pPr indent="0" marL="0">
+              <a:buNone/>
+            </a:pPr>
+            <a:r>
+              <a:rPr lang="en-US" sz="950" dirty="0">
+                <a:solidFill>
+                  <a:srgbClr val="595959"/>
+                </a:solidFill>
+              </a:rPr>
+              <a:t>loss summed over windows within ±85 bp</a:t>
+            </a:r>
+            <a:endParaRPr lang="en-US" sz="950" dirty="0"/>
           </a:p>
         </p:txBody>
       </p:sp>
       <p:pic>
         <p:nvPicPr>
-          <p:cNvPr id="6" name="Image 1" descr="/Users/z5162865/WongLab/AlphaGenome_Ap1/Analysis/slide_figures/panels/d_relocate.png">    </p:cNvPr>
+          <p:cNvPr id="7" name="Image 1" descr="/Users/z5162865/WongLab/AlphaGenome_Ap1/Analysis/slide_figures/panels/s3_dependence_c0_r0.png">    </p:cNvPr>
           <p:cNvPicPr>
             <a:picLocks noChangeAspect="1"/>
           </p:cNvPicPr>
@@ -2868,125 +2994,17 @@
         </p:blipFill>
         <p:spPr>
           <a:xfrm>
-            <a:off x="662666" y="3520440"/>
-            <a:ext cx="2515149" cy="1783080"/>
+            <a:off x="3995928" y="1902045"/>
+            <a:ext cx="1842516" cy="1170247"/>
           </a:xfrm>
           <a:prstGeom prst="rect">
             <a:avLst/>
           </a:prstGeom>
         </p:spPr>
       </p:pic>
-      <p:sp>
-        <p:nvSpPr>
-          <p:cNvPr id="7" name="curve-caption"/>
-          <p:cNvSpPr txBox="1"/>
-          <p:nvPr/>
-        </p:nvSpPr>
-        <p:spPr>
-          <a:xfrm>
-            <a:off x="502920" y="5349240"/>
-            <a:ext cx="2926080" cy="457200"/>
-          </a:xfrm>
-          <a:prstGeom prst="rect">
-            <a:avLst/>
-          </a:prstGeom>
-          <a:noFill/>
-          <a:ln/>
-        </p:spPr>
-        <p:txBody>
-          <a:bodyPr wrap="square" lIns="0" tIns="0" rIns="0" bIns="0" rtlCol="0" anchor="ctr"/>
-          <a:lstStyle/>
-          <a:p>
-            <a:pPr indent="0" marL="0">
-              <a:buNone/>
-            </a:pPr>
-            <a:r>
-              <a:rPr lang="en-US" sz="950" dirty="0">
-                <a:solidFill>
-                  <a:srgbClr val="595959"/>
-                </a:solidFill>
-              </a:rPr>
-              <a:t>both curves drawn once per class; colours as in the legend</a:t>
-            </a:r>
-            <a:endParaRPr lang="en-US" sz="950" dirty="0"/>
-          </a:p>
-        </p:txBody>
-      </p:sp>
-      <p:sp>
-        <p:nvSpPr>
-          <p:cNvPr id="8" name="s4_titration-title-0"/>
-          <p:cNvSpPr txBox="1"/>
-          <p:nvPr/>
-        </p:nvSpPr>
-        <p:spPr>
-          <a:xfrm>
-            <a:off x="4681728" y="1005840"/>
-            <a:ext cx="3438144" cy="438912"/>
-          </a:xfrm>
-          <a:prstGeom prst="rect">
-            <a:avLst/>
-          </a:prstGeom>
-          <a:noFill/>
-          <a:ln/>
-        </p:spPr>
-        <p:txBody>
-          <a:bodyPr wrap="square" lIns="0" tIns="0" rIns="0" bIns="0" rtlCol="0" anchor="t"/>
-          <a:lstStyle/>
-          <a:p>
-            <a:pPr indent="0" marL="0">
-              <a:buNone/>
-            </a:pPr>
-            <a:r>
-              <a:rPr lang="en-US" sz="1250" b="1" dirty="0">
-                <a:solidFill>
-                  <a:srgbClr val="111111"/>
-                </a:solidFill>
-              </a:rPr>
-              <a:t>A second copy added</a:t>
-            </a:r>
-            <a:endParaRPr lang="en-US" sz="1250" dirty="0"/>
-          </a:p>
-        </p:txBody>
-      </p:sp>
-      <p:sp>
-        <p:nvSpPr>
-          <p:cNvPr id="9" name="s4_titration-sub-0"/>
-          <p:cNvSpPr txBox="1"/>
-          <p:nvPr/>
-        </p:nvSpPr>
-        <p:spPr>
-          <a:xfrm>
-            <a:off x="4681728" y="1435608"/>
-            <a:ext cx="3438144" cy="310896"/>
-          </a:xfrm>
-          <a:prstGeom prst="rect">
-            <a:avLst/>
-          </a:prstGeom>
-          <a:noFill/>
-          <a:ln/>
-        </p:spPr>
-        <p:txBody>
-          <a:bodyPr wrap="square" lIns="0" tIns="0" rIns="0" bIns="0" rtlCol="0" anchor="t"/>
-          <a:lstStyle/>
-          <a:p>
-            <a:pPr indent="0" marL="0">
-              <a:buNone/>
-            </a:pPr>
-            <a:r>
-              <a:rPr lang="en-US" sz="950" dirty="0">
-                <a:solidFill>
-                  <a:srgbClr val="595959"/>
-                </a:solidFill>
-              </a:rPr>
-              <a:t>net of a shuffled-sequence control</a:t>
-            </a:r>
-            <a:endParaRPr lang="en-US" sz="950" dirty="0"/>
-          </a:p>
-        </p:txBody>
-      </p:sp>
       <p:pic>
         <p:nvPicPr>
-          <p:cNvPr id="10" name="Image 2" descr="/Users/z5162865/WongLab/AlphaGenome_Ap1/Analysis/slide_figures/panels/s4_titration_c0_r0.png">    </p:cNvPr>
+          <p:cNvPr id="8" name="Image 2" descr="/Users/z5162865/WongLab/AlphaGenome_Ap1/Analysis/slide_figures/panels/s3_dependence_c0_r1.png">    </p:cNvPr>
           <p:cNvPicPr>
             <a:picLocks noChangeAspect="1"/>
           </p:cNvPicPr>
@@ -3000,17 +3018,89 @@
         </p:blipFill>
         <p:spPr>
           <a:xfrm>
-            <a:off x="5249045" y="1755648"/>
-            <a:ext cx="2303510" cy="1463040"/>
+            <a:off x="3995928" y="3438237"/>
+            <a:ext cx="1842516" cy="1170247"/>
           </a:xfrm>
           <a:prstGeom prst="rect">
             <a:avLst/>
           </a:prstGeom>
         </p:spPr>
       </p:pic>
+      <p:sp>
+        <p:nvSpPr>
+          <p:cNvPr id="9" name="s3_dependence-title-1"/>
+          <p:cNvSpPr txBox="1"/>
+          <p:nvPr/>
+        </p:nvSpPr>
+        <p:spPr>
+          <a:xfrm>
+            <a:off x="5911596" y="1005840"/>
+            <a:ext cx="1842516" cy="438912"/>
+          </a:xfrm>
+          <a:prstGeom prst="rect">
+            <a:avLst/>
+          </a:prstGeom>
+          <a:noFill/>
+          <a:ln/>
+        </p:spPr>
+        <p:txBody>
+          <a:bodyPr wrap="square" lIns="0" tIns="0" rIns="0" bIns="0" rtlCol="0" anchor="t"/>
+          <a:lstStyle/>
+          <a:p>
+            <a:pPr indent="0" marL="0">
+              <a:buNone/>
+            </a:pPr>
+            <a:r>
+              <a:rPr lang="en-US" sz="1250" b="1" dirty="0">
+                <a:solidFill>
+                  <a:srgbClr val="111111"/>
+                </a:solidFill>
+              </a:rPr>
+              <a:t>Dependence out in the context</a:t>
+            </a:r>
+            <a:endParaRPr lang="en-US" sz="1250" dirty="0"/>
+          </a:p>
+        </p:txBody>
+      </p:sp>
+      <p:sp>
+        <p:nvSpPr>
+          <p:cNvPr id="10" name="s3_dependence-sub-1"/>
+          <p:cNvSpPr txBox="1"/>
+          <p:nvPr/>
+        </p:nvSpPr>
+        <p:spPr>
+          <a:xfrm>
+            <a:off x="5911596" y="1435608"/>
+            <a:ext cx="1842516" cy="310896"/>
+          </a:xfrm>
+          <a:prstGeom prst="rect">
+            <a:avLst/>
+          </a:prstGeom>
+          <a:noFill/>
+          <a:ln/>
+        </p:spPr>
+        <p:txBody>
+          <a:bodyPr wrap="square" lIns="0" tIns="0" rIns="0" bIns="0" rtlCol="0" anchor="t"/>
+          <a:lstStyle/>
+          <a:p>
+            <a:pPr indent="0" marL="0">
+              <a:buNone/>
+            </a:pPr>
+            <a:r>
+              <a:rPr lang="en-US" sz="950" dirty="0">
+                <a:solidFill>
+                  <a:srgbClr val="595959"/>
+                </a:solidFill>
+              </a:rPr>
+              <a:t>loss summed over windows beyond that</a:t>
+            </a:r>
+            <a:endParaRPr lang="en-US" sz="950" dirty="0"/>
+          </a:p>
+        </p:txBody>
+      </p:sp>
       <p:pic>
         <p:nvPicPr>
-          <p:cNvPr id="11" name="Image 3" descr="/Users/z5162865/WongLab/AlphaGenome_Ap1/Analysis/slide_figures/panels/s4_titration_c0_r1.png">    </p:cNvPr>
+          <p:cNvPr id="11" name="Image 3" descr="/Users/z5162865/WongLab/AlphaGenome_Ap1/Analysis/slide_figures/panels/s3_dependence_c1_r0.png">    </p:cNvPr>
           <p:cNvPicPr>
             <a:picLocks noChangeAspect="1"/>
           </p:cNvPicPr>
@@ -3024,89 +3114,17 @@
         </p:blipFill>
         <p:spPr>
           <a:xfrm>
-            <a:off x="5249045" y="3291840"/>
-            <a:ext cx="2303510" cy="1463040"/>
+            <a:off x="5911596" y="1902045"/>
+            <a:ext cx="1842516" cy="1170247"/>
           </a:xfrm>
           <a:prstGeom prst="rect">
             <a:avLst/>
           </a:prstGeom>
         </p:spPr>
       </p:pic>
-      <p:sp>
-        <p:nvSpPr>
-          <p:cNvPr id="12" name="s4_titration-title-1"/>
-          <p:cNvSpPr txBox="1"/>
-          <p:nvPr/>
-        </p:nvSpPr>
-        <p:spPr>
-          <a:xfrm>
-            <a:off x="8193024" y="1005840"/>
-            <a:ext cx="3438144" cy="438912"/>
-          </a:xfrm>
-          <a:prstGeom prst="rect">
-            <a:avLst/>
-          </a:prstGeom>
-          <a:noFill/>
-          <a:ln/>
-        </p:spPr>
-        <p:txBody>
-          <a:bodyPr wrap="square" lIns="0" tIns="0" rIns="0" bIns="0" rtlCol="0" anchor="t"/>
-          <a:lstStyle/>
-          <a:p>
-            <a:pPr indent="0" marL="0">
-              <a:buNone/>
-            </a:pPr>
-            <a:r>
-              <a:rPr lang="en-US" sz="1250" b="1" dirty="0">
-                <a:solidFill>
-                  <a:srgbClr val="111111"/>
-                </a:solidFill>
-              </a:rPr>
-              <a:t>The motif moved elsewhere</a:t>
-            </a:r>
-            <a:endParaRPr lang="en-US" sz="1250" dirty="0"/>
-          </a:p>
-        </p:txBody>
-      </p:sp>
-      <p:sp>
-        <p:nvSpPr>
-          <p:cNvPr id="13" name="s4_titration-sub-1"/>
-          <p:cNvSpPr txBox="1"/>
-          <p:nvPr/>
-        </p:nvSpPr>
-        <p:spPr>
-          <a:xfrm>
-            <a:off x="8193024" y="1435608"/>
-            <a:ext cx="3438144" cy="310896"/>
-          </a:xfrm>
-          <a:prstGeom prst="rect">
-            <a:avLst/>
-          </a:prstGeom>
-          <a:noFill/>
-          <a:ln/>
-        </p:spPr>
-        <p:txBody>
-          <a:bodyPr wrap="square" lIns="0" tIns="0" rIns="0" bIns="0" rtlCol="0" anchor="t"/>
-          <a:lstStyle/>
-          <a:p>
-            <a:pPr indent="0" marL="0">
-              <a:buNone/>
-            </a:pPr>
-            <a:r>
-              <a:rPr lang="en-US" sz="950" dirty="0">
-                <a:solidFill>
-                  <a:srgbClr val="595959"/>
-                </a:solidFill>
-              </a:rPr>
-              <a:t>the motif destroyed and re-inserted, net of the same control</a:t>
-            </a:r>
-            <a:endParaRPr lang="en-US" sz="950" dirty="0"/>
-          </a:p>
-        </p:txBody>
-      </p:sp>
       <p:pic>
         <p:nvPicPr>
-          <p:cNvPr id="14" name="Image 4" descr="/Users/z5162865/WongLab/AlphaGenome_Ap1/Analysis/slide_figures/panels/s4_titration_c1_r0.png">    </p:cNvPr>
+          <p:cNvPr id="12" name="Image 4" descr="/Users/z5162865/WongLab/AlphaGenome_Ap1/Analysis/slide_figures/panels/s3_dependence_c1_r1.png">    </p:cNvPr>
           <p:cNvPicPr>
             <a:picLocks noChangeAspect="1"/>
           </p:cNvPicPr>
@@ -3120,17 +3138,89 @@
         </p:blipFill>
         <p:spPr>
           <a:xfrm>
-            <a:off x="8760341" y="1755648"/>
-            <a:ext cx="2303510" cy="1463040"/>
+            <a:off x="5911596" y="3438237"/>
+            <a:ext cx="1842516" cy="1170247"/>
           </a:xfrm>
           <a:prstGeom prst="rect">
             <a:avLst/>
           </a:prstGeom>
         </p:spPr>
       </p:pic>
+      <p:sp>
+        <p:nvSpPr>
+          <p:cNvPr id="13" name="s3_dependence-title-2"/>
+          <p:cNvSpPr txBox="1"/>
+          <p:nvPr/>
+        </p:nvSpPr>
+        <p:spPr>
+          <a:xfrm>
+            <a:off x="7827264" y="1005840"/>
+            <a:ext cx="1842516" cy="438912"/>
+          </a:xfrm>
+          <a:prstGeom prst="rect">
+            <a:avLst/>
+          </a:prstGeom>
+          <a:noFill/>
+          <a:ln/>
+        </p:spPr>
+        <p:txBody>
+          <a:bodyPr wrap="square" lIns="0" tIns="0" rIns="0" bIns="0" rtlCol="0" anchor="t"/>
+          <a:lstStyle/>
+          <a:p>
+            <a:pPr indent="0" marL="0">
+              <a:buNone/>
+            </a:pPr>
+            <a:r>
+              <a:rPr lang="en-US" sz="1250" b="1" dirty="0">
+                <a:solidFill>
+                  <a:srgbClr val="111111"/>
+                </a:solidFill>
+              </a:rPr>
+              <a:t>Spread along the element</a:t>
+            </a:r>
+            <a:endParaRPr lang="en-US" sz="1250" dirty="0"/>
+          </a:p>
+        </p:txBody>
+      </p:sp>
+      <p:sp>
+        <p:nvSpPr>
+          <p:cNvPr id="14" name="s3_dependence-sub-2"/>
+          <p:cNvSpPr txBox="1"/>
+          <p:nvPr/>
+        </p:nvSpPr>
+        <p:spPr>
+          <a:xfrm>
+            <a:off x="7827264" y="1435608"/>
+            <a:ext cx="1842516" cy="310896"/>
+          </a:xfrm>
+          <a:prstGeom prst="rect">
+            <a:avLst/>
+          </a:prstGeom>
+          <a:noFill/>
+          <a:ln/>
+        </p:spPr>
+        <p:txBody>
+          <a:bodyPr wrap="square" lIns="0" tIns="0" rIns="0" bIns="0" rtlCol="0" anchor="t"/>
+          <a:lstStyle/>
+          <a:p>
+            <a:pPr indent="0" marL="0">
+              <a:buNone/>
+            </a:pPr>
+            <a:r>
+              <a:rPr lang="en-US" sz="950" dirty="0">
+                <a:solidFill>
+                  <a:srgbClr val="595959"/>
+                </a:solidFill>
+              </a:rPr>
+              <a:t>SD of window position, weighted by loss</a:t>
+            </a:r>
+            <a:endParaRPr lang="en-US" sz="950" dirty="0"/>
+          </a:p>
+        </p:txBody>
+      </p:sp>
       <p:pic>
         <p:nvPicPr>
-          <p:cNvPr id="15" name="Image 5" descr="/Users/z5162865/WongLab/AlphaGenome_Ap1/Analysis/slide_figures/panels/s4_titration_c1_r1.png">    </p:cNvPr>
+          <p:cNvPr id="15" name="Image 5" descr="/Users/z5162865/WongLab/AlphaGenome_Ap1/Analysis/slide_figures/panels/s3_dependence_c2_r0.png">    </p:cNvPr>
           <p:cNvPicPr>
             <a:picLocks noChangeAspect="1"/>
           </p:cNvPicPr>
@@ -3144,23 +3234,167 @@
         </p:blipFill>
         <p:spPr>
           <a:xfrm>
-            <a:off x="8760341" y="3291840"/>
-            <a:ext cx="2303510" cy="1463040"/>
+            <a:off x="7827264" y="1902045"/>
+            <a:ext cx="1842516" cy="1170247"/>
           </a:xfrm>
           <a:prstGeom prst="rect">
             <a:avLst/>
           </a:prstGeom>
         </p:spPr>
       </p:pic>
-      <p:sp>
-        <p:nvSpPr>
-          <p:cNvPr id="16" name="s4_titration-row-0"/>
+      <p:pic>
+        <p:nvPicPr>
+          <p:cNvPr id="16" name="Image 6" descr="/Users/z5162865/WongLab/AlphaGenome_Ap1/Analysis/slide_figures/panels/s3_dependence_c2_r1.png">    </p:cNvPr>
+          <p:cNvPicPr>
+            <a:picLocks noChangeAspect="1"/>
+          </p:cNvPicPr>
+          <p:nvPr/>
+        </p:nvPicPr>
+        <p:blipFill>
+          <a:blip r:embed="rId7"/>
+          <a:stretch>
+            <a:fillRect/>
+          </a:stretch>
+        </p:blipFill>
+        <p:spPr>
+          <a:xfrm>
+            <a:off x="7827264" y="3438237"/>
+            <a:ext cx="1842516" cy="1170247"/>
+          </a:xfrm>
+          <a:prstGeom prst="rect">
+            <a:avLst/>
+          </a:prstGeom>
+        </p:spPr>
+      </p:pic>
+      <p:sp>
+        <p:nvSpPr>
+          <p:cNvPr id="17" name="s3_dependence-title-3"/>
           <p:cNvSpPr txBox="1"/>
           <p:nvPr/>
         </p:nvSpPr>
         <p:spPr>
+          <a:xfrm>
+            <a:off x="9742932" y="1005840"/>
+            <a:ext cx="1842516" cy="438912"/>
+          </a:xfrm>
+          <a:prstGeom prst="rect">
+            <a:avLst/>
+          </a:prstGeom>
+          <a:noFill/>
+          <a:ln/>
+        </p:spPr>
+        <p:txBody>
+          <a:bodyPr wrap="square" lIns="0" tIns="0" rIns="0" bIns="0" rtlCol="0" anchor="t"/>
+          <a:lstStyle/>
+          <a:p>
+            <a:pPr indent="0" marL="0">
+              <a:buNone/>
+            </a:pPr>
+            <a:r>
+              <a:rPr lang="en-US" sz="1250" b="1" dirty="0">
+                <a:solidFill>
+                  <a:srgbClr val="111111"/>
+                </a:solidFill>
+              </a:rPr>
+              <a:t>Depth of the single best base</a:t>
+            </a:r>
+            <a:endParaRPr lang="en-US" sz="1250" dirty="0"/>
+          </a:p>
+        </p:txBody>
+      </p:sp>
+      <p:sp>
+        <p:nvSpPr>
+          <p:cNvPr id="18" name="s3_dependence-sub-3"/>
+          <p:cNvSpPr txBox="1"/>
+          <p:nvPr/>
+        </p:nvSpPr>
+        <p:spPr>
+          <a:xfrm>
+            <a:off x="9742932" y="1435608"/>
+            <a:ext cx="1842516" cy="310896"/>
+          </a:xfrm>
+          <a:prstGeom prst="rect">
+            <a:avLst/>
+          </a:prstGeom>
+          <a:noFill/>
+          <a:ln/>
+        </p:spPr>
+        <p:txBody>
+          <a:bodyPr wrap="square" lIns="0" tIns="0" rIns="0" bIns="0" rtlCol="0" anchor="t"/>
+          <a:lstStyle/>
+          <a:p>
+            <a:pPr indent="0" marL="0">
+              <a:buNone/>
+            </a:pPr>
+            <a:r>
+              <a:rPr lang="en-US" sz="950" dirty="0">
+                <a:solidFill>
+                  <a:srgbClr val="595959"/>
+                </a:solidFill>
+              </a:rPr>
+              <a:t>largest effect of any one base change, ±30 bp</a:t>
+            </a:r>
+            <a:endParaRPr lang="en-US" sz="950" dirty="0"/>
+          </a:p>
+        </p:txBody>
+      </p:sp>
+      <p:pic>
+        <p:nvPicPr>
+          <p:cNvPr id="19" name="Image 7" descr="/Users/z5162865/WongLab/AlphaGenome_Ap1/Analysis/slide_figures/panels/s3_dependence_c3_r0.png">    </p:cNvPr>
+          <p:cNvPicPr>
+            <a:picLocks noChangeAspect="1"/>
+          </p:cNvPicPr>
+          <p:nvPr/>
+        </p:nvPicPr>
+        <p:blipFill>
+          <a:blip r:embed="rId8"/>
+          <a:stretch>
+            <a:fillRect/>
+          </a:stretch>
+        </p:blipFill>
+        <p:spPr>
+          <a:xfrm>
+            <a:off x="9742932" y="1902045"/>
+            <a:ext cx="1842516" cy="1170247"/>
+          </a:xfrm>
+          <a:prstGeom prst="rect">
+            <a:avLst/>
+          </a:prstGeom>
+        </p:spPr>
+      </p:pic>
+      <p:pic>
+        <p:nvPicPr>
+          <p:cNvPr id="20" name="Image 8" descr="/Users/z5162865/WongLab/AlphaGenome_Ap1/Analysis/slide_figures/panels/s3_dependence_c3_r1.png">    </p:cNvPr>
+          <p:cNvPicPr>
+            <a:picLocks noChangeAspect="1"/>
+          </p:cNvPicPr>
+          <p:nvPr/>
+        </p:nvPicPr>
+        <p:blipFill>
+          <a:blip r:embed="rId9"/>
+          <a:stretch>
+            <a:fillRect/>
+          </a:stretch>
+        </p:blipFill>
+        <p:spPr>
+          <a:xfrm>
+            <a:off x="9742932" y="3438237"/>
+            <a:ext cx="1842516" cy="1170247"/>
+          </a:xfrm>
+          <a:prstGeom prst="rect">
+            <a:avLst/>
+          </a:prstGeom>
+        </p:spPr>
+      </p:pic>
+      <p:sp>
+        <p:nvSpPr>
+          <p:cNvPr id="21" name="s3_dependence-row-0"/>
+          <p:cNvSpPr txBox="1"/>
+          <p:nvPr/>
+        </p:nvSpPr>
+        <p:spPr>
           <a:xfrm rot="16200000">
-            <a:off x="3639312" y="1837944"/>
+            <a:off x="2953512" y="1837944"/>
             <a:ext cx="1371600" cy="1371600"/>
           </a:xfrm>
           <a:prstGeom prst="rect">
@@ -3190,13 +3424,13 @@
       </p:sp>
       <p:sp>
         <p:nvSpPr>
-          <p:cNvPr id="17" name="s4_titration-row-1"/>
+          <p:cNvPr id="22" name="s3_dependence-row-1"/>
           <p:cNvSpPr txBox="1"/>
           <p:nvPr/>
         </p:nvSpPr>
         <p:spPr>
           <a:xfrm rot="16200000">
-            <a:off x="3639312" y="3374136"/>
+            <a:off x="2953512" y="3374136"/>
             <a:ext cx="1371600" cy="1371600"/>
           </a:xfrm>
           <a:prstGeom prst="rect">
@@ -3226,13 +3460,13 @@
       </p:sp>
       <p:sp>
         <p:nvSpPr>
-          <p:cNvPr id="18" name="s4_titration-dot-0"/>
+          <p:cNvPr id="23" name="s3_dependence-dot-0"/>
           <p:cNvSpPr/>
           <p:nvPr/>
         </p:nvSpPr>
         <p:spPr>
           <a:xfrm>
-            <a:off x="4114800" y="4960620"/>
+            <a:off x="3429000" y="4960620"/>
             <a:ext cx="109728" cy="109728"/>
           </a:xfrm>
           <a:prstGeom prst="ellipse">
@@ -3251,13 +3485,13 @@
       </p:sp>
       <p:sp>
         <p:nvSpPr>
-          <p:cNvPr id="19" name="s4_titration-leg-0"/>
+          <p:cNvPr id="24" name="s3_dependence-leg-0"/>
           <p:cNvSpPr txBox="1"/>
           <p:nvPr/>
         </p:nvSpPr>
         <p:spPr>
           <a:xfrm>
-            <a:off x="4270248" y="4919472"/>
+            <a:off x="3584448" y="4919472"/>
             <a:ext cx="1057046" cy="201168"/>
           </a:xfrm>
           <a:prstGeom prst="rect">
@@ -3287,13 +3521,13 @@
       </p:sp>
       <p:sp>
         <p:nvSpPr>
-          <p:cNvPr id="20" name="s4_titration-dot-1"/>
+          <p:cNvPr id="25" name="s3_dependence-dot-1"/>
           <p:cNvSpPr/>
           <p:nvPr/>
         </p:nvSpPr>
         <p:spPr>
           <a:xfrm>
-            <a:off x="5437022" y="4960620"/>
+            <a:off x="4751222" y="4960620"/>
             <a:ext cx="109728" cy="109728"/>
           </a:xfrm>
           <a:prstGeom prst="ellipse">
@@ -3312,13 +3546,13 @@
       </p:sp>
       <p:sp>
         <p:nvSpPr>
-          <p:cNvPr id="21" name="s4_titration-leg-1"/>
+          <p:cNvPr id="26" name="s3_dependence-leg-1"/>
           <p:cNvSpPr txBox="1"/>
           <p:nvPr/>
         </p:nvSpPr>
         <p:spPr>
           <a:xfrm>
-            <a:off x="5592470" y="4919472"/>
+            <a:off x="4906670" y="4919472"/>
             <a:ext cx="596189" cy="201168"/>
           </a:xfrm>
           <a:prstGeom prst="rect">
@@ -3348,13 +3582,13 @@
       </p:sp>
       <p:sp>
         <p:nvSpPr>
-          <p:cNvPr id="22" name="s4_titration-dot-2"/>
+          <p:cNvPr id="27" name="s3_dependence-dot-2"/>
           <p:cNvSpPr/>
           <p:nvPr/>
         </p:nvSpPr>
         <p:spPr>
           <a:xfrm>
-            <a:off x="6298387" y="4960620"/>
+            <a:off x="5612587" y="4960620"/>
             <a:ext cx="109728" cy="109728"/>
           </a:xfrm>
           <a:prstGeom prst="ellipse">
@@ -3373,13 +3607,13 @@
       </p:sp>
       <p:sp>
         <p:nvSpPr>
-          <p:cNvPr id="23" name="s4_titration-leg-2"/>
+          <p:cNvPr id="28" name="s3_dependence-leg-2"/>
           <p:cNvSpPr txBox="1"/>
           <p:nvPr/>
         </p:nvSpPr>
         <p:spPr>
           <a:xfrm>
-            <a:off x="6453835" y="4919472"/>
+            <a:off x="5768035" y="4919472"/>
             <a:ext cx="727862" cy="201168"/>
           </a:xfrm>
           <a:prstGeom prst="rect">
@@ -3409,13 +3643,13 @@
       </p:sp>
       <p:sp>
         <p:nvSpPr>
-          <p:cNvPr id="24" name="s4_titration-dot-3"/>
+          <p:cNvPr id="29" name="s3_dependence-dot-3"/>
           <p:cNvSpPr/>
           <p:nvPr/>
         </p:nvSpPr>
         <p:spPr>
           <a:xfrm>
-            <a:off x="7291426" y="4960620"/>
+            <a:off x="6605626" y="4960620"/>
             <a:ext cx="109728" cy="109728"/>
           </a:xfrm>
           <a:prstGeom prst="ellipse">
@@ -3434,13 +3668,13 @@
       </p:sp>
       <p:sp>
         <p:nvSpPr>
-          <p:cNvPr id="25" name="s4_titration-leg-3"/>
+          <p:cNvPr id="30" name="s3_dependence-leg-3"/>
           <p:cNvSpPr txBox="1"/>
           <p:nvPr/>
         </p:nvSpPr>
         <p:spPr>
           <a:xfrm>
-            <a:off x="7446874" y="4919472"/>
+            <a:off x="6761074" y="4919472"/>
             <a:ext cx="925373" cy="201168"/>
           </a:xfrm>
           <a:prstGeom prst="rect">
@@ -3470,13 +3704,13 @@
       </p:sp>
       <p:sp>
         <p:nvSpPr>
-          <p:cNvPr id="26" name="s4_titration-dot-4"/>
+          <p:cNvPr id="31" name="s3_dependence-dot-4"/>
           <p:cNvSpPr/>
           <p:nvPr/>
         </p:nvSpPr>
         <p:spPr>
           <a:xfrm>
-            <a:off x="8481974" y="4960620"/>
+            <a:off x="7796174" y="4960620"/>
             <a:ext cx="109728" cy="109728"/>
           </a:xfrm>
           <a:prstGeom prst="ellipse">
@@ -3495,13 +3729,13 @@
       </p:sp>
       <p:sp>
         <p:nvSpPr>
-          <p:cNvPr id="27" name="s4_titration-leg-4"/>
+          <p:cNvPr id="32" name="s3_dependence-leg-4"/>
           <p:cNvSpPr txBox="1"/>
           <p:nvPr/>
         </p:nvSpPr>
         <p:spPr>
           <a:xfrm>
-            <a:off x="8637422" y="4919472"/>
+            <a:off x="7951622" y="4919472"/>
             <a:ext cx="1057046" cy="201168"/>
           </a:xfrm>
           <a:prstGeom prst="rect">
@@ -3531,13 +3765,13 @@
       </p:sp>
       <p:sp>
         <p:nvSpPr>
-          <p:cNvPr id="28" name="s4_titration-dot-5"/>
+          <p:cNvPr id="33" name="s3_dependence-dot-5"/>
           <p:cNvSpPr/>
           <p:nvPr/>
         </p:nvSpPr>
         <p:spPr>
           <a:xfrm>
-            <a:off x="9804197" y="4960620"/>
+            <a:off x="9118397" y="4960620"/>
             <a:ext cx="109728" cy="109728"/>
           </a:xfrm>
           <a:prstGeom prst="ellipse">
@@ -3556,13 +3790,13 @@
       </p:sp>
       <p:sp>
         <p:nvSpPr>
-          <p:cNvPr id="29" name="s4_titration-leg-5"/>
+          <p:cNvPr id="34" name="s3_dependence-leg-5"/>
           <p:cNvSpPr txBox="1"/>
           <p:nvPr/>
         </p:nvSpPr>
         <p:spPr>
           <a:xfrm>
-            <a:off x="9959645" y="4919472"/>
+            <a:off x="9273845" y="4919472"/>
             <a:ext cx="2373782" cy="201168"/>
           </a:xfrm>
           <a:prstGeom prst="rect">
@@ -3592,14 +3826,14 @@
       </p:sp>
       <p:sp>
         <p:nvSpPr>
-          <p:cNvPr id="30" name="s4_titration-key"/>
+          <p:cNvPr id="35" name="s3_dependence-key"/>
           <p:cNvSpPr txBox="1"/>
           <p:nvPr/>
         </p:nvSpPr>
         <p:spPr>
           <a:xfrm>
-            <a:off x="4114800" y="5193792"/>
-            <a:ext cx="7589520" cy="502920"/>
+            <a:off x="3429000" y="5193792"/>
+            <a:ext cx="8229600" cy="502920"/>
           </a:xfrm>
           <a:prstGeom prst="rect">
             <a:avLst/>
@@ -3620,7 +3854,7 @@
                   <a:srgbClr val="595959"/>
                 </a:solidFill>
               </a:rPr>
-              <a:t>grey line and band (top row): all Stable sites, median with 95% bootstrap CI.   grey dots (bottom row): that class's own matched Stable controls.   Stars test the class against that reference — Mann–Whitney on all sites, paired Wilcoxon on matched pairs — BH across all 20 tests.   *** p&lt;0.001   ** p&lt;0.01   * p&lt;0.05   ns ≥ 0.05</a:t>
+              <a:t>grey line and band (top row): all Stable sites, median with 95% bootstrap CI.   grey dots (bottom row): that class's own matched Stable controls.   Stars test the class against that reference — Mann–Whitney on all sites, paired Wilcoxon on matched pairs — BH across all 40 tests.   *** p&lt;0.001   ** p&lt;0.01   * p&lt;0.05   ns ≥ 0.05</a:t>
             </a:r>
             <a:endParaRPr lang="en-US" sz="900" dirty="0"/>
           </a:p>
@@ -3628,7 +3862,7 @@
       </p:sp>
       <p:sp>
         <p:nvSpPr>
-          <p:cNvPr id="31" name="Text 0"/>
+          <p:cNvPr id="36" name="Text 0"/>
           <p:cNvSpPr/>
           <p:nvPr>
             <p:ph idx="101" type="body" hasCustomPrompt="1"/>
@@ -3669,7 +3903,7 @@
                   <a:srgbClr val="111111"/>
                 </a:solidFill>
               </a:rPr>
-              <a:t>a second copy is worth most at ±20–40 bp and a moved motif recovers only a third of what destroying it cost — and no class differs once context is matched</a:t>
+              <a:t>the same shift in every class and on all three measures — strongest in Age Up and Exercise Down, absent only in Age Down</a:t>
             </a:r>
             <a:endParaRPr lang="en-US" sz="1500" dirty="0"/>
           </a:p>
@@ -3777,7 +4011,7 @@
                   <a:schemeClr val="tx1"/>
                 </a:solidFill>
               </a:rPr>
-              <a:t>Age-gained sites read AP-1 dosage more sharply</a:t>
+              <a:t>Position is a dial, and a moved motif never replaces the original</a:t>
             </a:r>
             <a:endParaRPr lang="en-US" sz="2800" dirty="0"/>
           </a:p>
@@ -3785,14 +4019,14 @@
       </p:sp>
       <p:sp>
         <p:nvSpPr>
-          <p:cNvPr id="3" name="ag-t1"/>
+          <p:cNvPr id="3" name="copy-title"/>
           <p:cNvSpPr txBox="1"/>
           <p:nvPr/>
         </p:nvSpPr>
         <p:spPr>
           <a:xfrm>
-            <a:off x="731520" y="1051560"/>
-            <a:ext cx="7315200" cy="292608"/>
+            <a:off x="502920" y="1024128"/>
+            <a:ext cx="2834640" cy="274320"/>
           </a:xfrm>
           <a:prstGeom prst="rect">
             <a:avLst/>
@@ -3808,56 +4042,20 @@
               <a:buNone/>
             </a:pPr>
             <a:r>
-              <a:rPr lang="en-US" sz="1350" b="1" dirty="0">
+              <a:rPr lang="en-US" sz="1250" b="1" dirty="0">
                 <a:solidFill>
                   <a:srgbClr val="111111"/>
                 </a:solidFill>
               </a:rPr>
-              <a:t>Age-gained sites respond more to AP-1 dosage, both ways</a:t>
-            </a:r>
-            <a:endParaRPr lang="en-US" sz="1350" dirty="0"/>
-          </a:p>
-        </p:txBody>
-      </p:sp>
-      <p:sp>
-        <p:nvSpPr>
-          <p:cNvPr id="4" name="ag-s1"/>
-          <p:cNvSpPr txBox="1"/>
-          <p:nvPr/>
-        </p:nvSpPr>
-        <p:spPr>
-          <a:xfrm>
-            <a:off x="731520" y="1344168"/>
-            <a:ext cx="7315200" cy="292608"/>
-          </a:xfrm>
-          <a:prstGeom prst="rect">
-            <a:avLst/>
-          </a:prstGeom>
-          <a:noFill/>
-          <a:ln/>
-        </p:spPr>
-        <p:txBody>
-          <a:bodyPr wrap="square" lIns="0" tIns="0" rIns="0" bIns="0" rtlCol="0" anchor="ctr"/>
-          <a:lstStyle/>
-          <a:p>
-            <a:pPr indent="0" marL="0">
-              <a:buNone/>
-            </a:pPr>
-            <a:r>
-              <a:rPr lang="en-US" sz="1050" dirty="0">
-                <a:solidFill>
-                  <a:srgbClr val="595959"/>
-                </a:solidFill>
-              </a:rPr>
-              <a:t>Δscore definition: the top fifth of the change in TOBIAS binding score with age, against matched Unchanged sites</a:t>
-            </a:r>
-            <a:endParaRPr lang="en-US" sz="1050" dirty="0"/>
+              <a:t>Where the added copy works best</a:t>
+            </a:r>
+            <a:endParaRPr lang="en-US" sz="1250" dirty="0"/>
           </a:p>
         </p:txBody>
       </p:sp>
       <p:pic>
         <p:nvPicPr>
-          <p:cNvPr id="5" name="Image 0" descr="/Users/z5162865/WongLab/AlphaGenome_Ap1/Analysis/slide_figures/panels/s5_age_gained.png">    </p:cNvPr>
+          <p:cNvPr id="4" name="Image 0" descr="/Users/z5162865/WongLab/AlphaGenome_Ap1/Analysis/slide_figures/panels/d_addcopy.png">    </p:cNvPr>
           <p:cNvPicPr>
             <a:picLocks noChangeAspect="1"/>
           </p:cNvPicPr>
@@ -3871,8 +4069,8 @@
         </p:blipFill>
         <p:spPr>
           <a:xfrm>
-            <a:off x="1429175" y="1737360"/>
-            <a:ext cx="5919890" cy="3017520"/>
+            <a:off x="709758" y="1325880"/>
+            <a:ext cx="2420965" cy="1783080"/>
           </a:xfrm>
           <a:prstGeom prst="rect">
             <a:avLst/>
@@ -3881,13 +4079,726 @@
       </p:pic>
       <p:sp>
         <p:nvSpPr>
-          <p:cNvPr id="6" name="lg-dot-5.3-0"/>
+          <p:cNvPr id="5" name="move-title"/>
+          <p:cNvSpPr txBox="1"/>
+          <p:nvPr/>
+        </p:nvSpPr>
+        <p:spPr>
+          <a:xfrm>
+            <a:off x="502920" y="3218688"/>
+            <a:ext cx="2834640" cy="274320"/>
+          </a:xfrm>
+          <a:prstGeom prst="rect">
+            <a:avLst/>
+          </a:prstGeom>
+          <a:noFill/>
+          <a:ln/>
+        </p:spPr>
+        <p:txBody>
+          <a:bodyPr wrap="square" lIns="0" tIns="0" rIns="0" bIns="0" rtlCol="0" anchor="ctr"/>
+          <a:lstStyle/>
+          <a:p>
+            <a:pPr indent="0" marL="0">
+              <a:buNone/>
+            </a:pPr>
+            <a:r>
+              <a:rPr lang="en-US" sz="1250" b="1" dirty="0">
+                <a:solidFill>
+                  <a:srgbClr val="111111"/>
+                </a:solidFill>
+              </a:rPr>
+              <a:t>...and where it lands when moved</a:t>
+            </a:r>
+            <a:endParaRPr lang="en-US" sz="1250" dirty="0"/>
+          </a:p>
+        </p:txBody>
+      </p:sp>
+      <p:pic>
+        <p:nvPicPr>
+          <p:cNvPr id="6" name="Image 1" descr="/Users/z5162865/WongLab/AlphaGenome_Ap1/Analysis/slide_figures/panels/d_relocate.png">    </p:cNvPr>
+          <p:cNvPicPr>
+            <a:picLocks noChangeAspect="1"/>
+          </p:cNvPicPr>
+          <p:nvPr/>
+        </p:nvPicPr>
+        <p:blipFill>
+          <a:blip r:embed="rId2"/>
+          <a:stretch>
+            <a:fillRect/>
+          </a:stretch>
+        </p:blipFill>
+        <p:spPr>
+          <a:xfrm>
+            <a:off x="662666" y="3520440"/>
+            <a:ext cx="2515149" cy="1783080"/>
+          </a:xfrm>
+          <a:prstGeom prst="rect">
+            <a:avLst/>
+          </a:prstGeom>
+        </p:spPr>
+      </p:pic>
+      <p:sp>
+        <p:nvSpPr>
+          <p:cNvPr id="7" name="curve-caption"/>
+          <p:cNvSpPr txBox="1"/>
+          <p:nvPr/>
+        </p:nvSpPr>
+        <p:spPr>
+          <a:xfrm>
+            <a:off x="502920" y="5349240"/>
+            <a:ext cx="2926080" cy="457200"/>
+          </a:xfrm>
+          <a:prstGeom prst="rect">
+            <a:avLst/>
+          </a:prstGeom>
+          <a:noFill/>
+          <a:ln/>
+        </p:spPr>
+        <p:txBody>
+          <a:bodyPr wrap="square" lIns="0" tIns="0" rIns="0" bIns="0" rtlCol="0" anchor="ctr"/>
+          <a:lstStyle/>
+          <a:p>
+            <a:pPr indent="0" marL="0">
+              <a:buNone/>
+            </a:pPr>
+            <a:r>
+              <a:rPr lang="en-US" sz="950" dirty="0">
+                <a:solidFill>
+                  <a:srgbClr val="595959"/>
+                </a:solidFill>
+              </a:rPr>
+              <a:t>both curves drawn once per class; colours as in the legend</a:t>
+            </a:r>
+            <a:endParaRPr lang="en-US" sz="950" dirty="0"/>
+          </a:p>
+        </p:txBody>
+      </p:sp>
+      <p:sp>
+        <p:nvSpPr>
+          <p:cNvPr id="8" name="s4_titration-title-0"/>
+          <p:cNvSpPr txBox="1"/>
+          <p:nvPr/>
+        </p:nvSpPr>
+        <p:spPr>
+          <a:xfrm>
+            <a:off x="4681728" y="1005840"/>
+            <a:ext cx="3438144" cy="438912"/>
+          </a:xfrm>
+          <a:prstGeom prst="rect">
+            <a:avLst/>
+          </a:prstGeom>
+          <a:noFill/>
+          <a:ln/>
+        </p:spPr>
+        <p:txBody>
+          <a:bodyPr wrap="square" lIns="0" tIns="0" rIns="0" bIns="0" rtlCol="0" anchor="t"/>
+          <a:lstStyle/>
+          <a:p>
+            <a:pPr indent="0" marL="0">
+              <a:buNone/>
+            </a:pPr>
+            <a:r>
+              <a:rPr lang="en-US" sz="1250" b="1" dirty="0">
+                <a:solidFill>
+                  <a:srgbClr val="111111"/>
+                </a:solidFill>
+              </a:rPr>
+              <a:t>A second copy added</a:t>
+            </a:r>
+            <a:endParaRPr lang="en-US" sz="1250" dirty="0"/>
+          </a:p>
+        </p:txBody>
+      </p:sp>
+      <p:sp>
+        <p:nvSpPr>
+          <p:cNvPr id="9" name="s4_titration-sub-0"/>
+          <p:cNvSpPr txBox="1"/>
+          <p:nvPr/>
+        </p:nvSpPr>
+        <p:spPr>
+          <a:xfrm>
+            <a:off x="4681728" y="1435608"/>
+            <a:ext cx="3438144" cy="310896"/>
+          </a:xfrm>
+          <a:prstGeom prst="rect">
+            <a:avLst/>
+          </a:prstGeom>
+          <a:noFill/>
+          <a:ln/>
+        </p:spPr>
+        <p:txBody>
+          <a:bodyPr wrap="square" lIns="0" tIns="0" rIns="0" bIns="0" rtlCol="0" anchor="t"/>
+          <a:lstStyle/>
+          <a:p>
+            <a:pPr indent="0" marL="0">
+              <a:buNone/>
+            </a:pPr>
+            <a:r>
+              <a:rPr lang="en-US" sz="950" dirty="0">
+                <a:solidFill>
+                  <a:srgbClr val="595959"/>
+                </a:solidFill>
+              </a:rPr>
+              <a:t>net of a shuffled-sequence control</a:t>
+            </a:r>
+            <a:endParaRPr lang="en-US" sz="950" dirty="0"/>
+          </a:p>
+        </p:txBody>
+      </p:sp>
+      <p:pic>
+        <p:nvPicPr>
+          <p:cNvPr id="10" name="Image 2" descr="/Users/z5162865/WongLab/AlphaGenome_Ap1/Analysis/slide_figures/panels/s4_titration_c0_r0.png">    </p:cNvPr>
+          <p:cNvPicPr>
+            <a:picLocks noChangeAspect="1"/>
+          </p:cNvPicPr>
+          <p:nvPr/>
+        </p:nvPicPr>
+        <p:blipFill>
+          <a:blip r:embed="rId3"/>
+          <a:stretch>
+            <a:fillRect/>
+          </a:stretch>
+        </p:blipFill>
+        <p:spPr>
+          <a:xfrm>
+            <a:off x="5249045" y="1755648"/>
+            <a:ext cx="2303510" cy="1463040"/>
+          </a:xfrm>
+          <a:prstGeom prst="rect">
+            <a:avLst/>
+          </a:prstGeom>
+        </p:spPr>
+      </p:pic>
+      <p:pic>
+        <p:nvPicPr>
+          <p:cNvPr id="11" name="Image 3" descr="/Users/z5162865/WongLab/AlphaGenome_Ap1/Analysis/slide_figures/panels/s4_titration_c0_r1.png">    </p:cNvPr>
+          <p:cNvPicPr>
+            <a:picLocks noChangeAspect="1"/>
+          </p:cNvPicPr>
+          <p:nvPr/>
+        </p:nvPicPr>
+        <p:blipFill>
+          <a:blip r:embed="rId4"/>
+          <a:stretch>
+            <a:fillRect/>
+          </a:stretch>
+        </p:blipFill>
+        <p:spPr>
+          <a:xfrm>
+            <a:off x="5249045" y="3291840"/>
+            <a:ext cx="2303510" cy="1463040"/>
+          </a:xfrm>
+          <a:prstGeom prst="rect">
+            <a:avLst/>
+          </a:prstGeom>
+        </p:spPr>
+      </p:pic>
+      <p:sp>
+        <p:nvSpPr>
+          <p:cNvPr id="12" name="s4_titration-title-1"/>
+          <p:cNvSpPr txBox="1"/>
+          <p:nvPr/>
+        </p:nvSpPr>
+        <p:spPr>
+          <a:xfrm>
+            <a:off x="8193024" y="1005840"/>
+            <a:ext cx="3438144" cy="438912"/>
+          </a:xfrm>
+          <a:prstGeom prst="rect">
+            <a:avLst/>
+          </a:prstGeom>
+          <a:noFill/>
+          <a:ln/>
+        </p:spPr>
+        <p:txBody>
+          <a:bodyPr wrap="square" lIns="0" tIns="0" rIns="0" bIns="0" rtlCol="0" anchor="t"/>
+          <a:lstStyle/>
+          <a:p>
+            <a:pPr indent="0" marL="0">
+              <a:buNone/>
+            </a:pPr>
+            <a:r>
+              <a:rPr lang="en-US" sz="1250" b="1" dirty="0">
+                <a:solidFill>
+                  <a:srgbClr val="111111"/>
+                </a:solidFill>
+              </a:rPr>
+              <a:t>The motif moved elsewhere</a:t>
+            </a:r>
+            <a:endParaRPr lang="en-US" sz="1250" dirty="0"/>
+          </a:p>
+        </p:txBody>
+      </p:sp>
+      <p:sp>
+        <p:nvSpPr>
+          <p:cNvPr id="13" name="s4_titration-sub-1"/>
+          <p:cNvSpPr txBox="1"/>
+          <p:nvPr/>
+        </p:nvSpPr>
+        <p:spPr>
+          <a:xfrm>
+            <a:off x="8193024" y="1435608"/>
+            <a:ext cx="3438144" cy="310896"/>
+          </a:xfrm>
+          <a:prstGeom prst="rect">
+            <a:avLst/>
+          </a:prstGeom>
+          <a:noFill/>
+          <a:ln/>
+        </p:spPr>
+        <p:txBody>
+          <a:bodyPr wrap="square" lIns="0" tIns="0" rIns="0" bIns="0" rtlCol="0" anchor="t"/>
+          <a:lstStyle/>
+          <a:p>
+            <a:pPr indent="0" marL="0">
+              <a:buNone/>
+            </a:pPr>
+            <a:r>
+              <a:rPr lang="en-US" sz="950" dirty="0">
+                <a:solidFill>
+                  <a:srgbClr val="595959"/>
+                </a:solidFill>
+              </a:rPr>
+              <a:t>the motif destroyed and re-inserted, net of the same control</a:t>
+            </a:r>
+            <a:endParaRPr lang="en-US" sz="950" dirty="0"/>
+          </a:p>
+        </p:txBody>
+      </p:sp>
+      <p:pic>
+        <p:nvPicPr>
+          <p:cNvPr id="14" name="Image 4" descr="/Users/z5162865/WongLab/AlphaGenome_Ap1/Analysis/slide_figures/panels/s4_titration_c1_r0.png">    </p:cNvPr>
+          <p:cNvPicPr>
+            <a:picLocks noChangeAspect="1"/>
+          </p:cNvPicPr>
+          <p:nvPr/>
+        </p:nvPicPr>
+        <p:blipFill>
+          <a:blip r:embed="rId5"/>
+          <a:stretch>
+            <a:fillRect/>
+          </a:stretch>
+        </p:blipFill>
+        <p:spPr>
+          <a:xfrm>
+            <a:off x="8760341" y="1755648"/>
+            <a:ext cx="2303510" cy="1463040"/>
+          </a:xfrm>
+          <a:prstGeom prst="rect">
+            <a:avLst/>
+          </a:prstGeom>
+        </p:spPr>
+      </p:pic>
+      <p:pic>
+        <p:nvPicPr>
+          <p:cNvPr id="15" name="Image 5" descr="/Users/z5162865/WongLab/AlphaGenome_Ap1/Analysis/slide_figures/panels/s4_titration_c1_r1.png">    </p:cNvPr>
+          <p:cNvPicPr>
+            <a:picLocks noChangeAspect="1"/>
+          </p:cNvPicPr>
+          <p:nvPr/>
+        </p:nvPicPr>
+        <p:blipFill>
+          <a:blip r:embed="rId6"/>
+          <a:stretch>
+            <a:fillRect/>
+          </a:stretch>
+        </p:blipFill>
+        <p:spPr>
+          <a:xfrm>
+            <a:off x="8760341" y="3291840"/>
+            <a:ext cx="2303510" cy="1463040"/>
+          </a:xfrm>
+          <a:prstGeom prst="rect">
+            <a:avLst/>
+          </a:prstGeom>
+        </p:spPr>
+      </p:pic>
+      <p:sp>
+        <p:nvSpPr>
+          <p:cNvPr id="16" name="s4_titration-row-0"/>
+          <p:cNvSpPr txBox="1"/>
+          <p:nvPr/>
+        </p:nvSpPr>
+        <p:spPr>
+          <a:xfrm rot="16200000">
+            <a:off x="3639312" y="1837944"/>
+            <a:ext cx="1371600" cy="1371600"/>
+          </a:xfrm>
+          <a:prstGeom prst="rect">
+            <a:avLst/>
+          </a:prstGeom>
+          <a:noFill/>
+          <a:ln/>
+        </p:spPr>
+        <p:txBody>
+          <a:bodyPr wrap="square" lIns="0" tIns="0" rIns="0" bIns="0" rtlCol="0" anchor="ctr"/>
+          <a:lstStyle/>
+          <a:p>
+            <a:pPr algn="ctr" indent="0" marL="0">
+              <a:buNone/>
+            </a:pPr>
+            <a:r>
+              <a:rPr lang="en-US" sz="1000" dirty="0">
+                <a:solidFill>
+                  <a:srgbClr val="111111"/>
+                </a:solidFill>
+              </a:rPr>
+              <a:t>all sites, nothing controlled</a:t>
+            </a:r>
+            <a:endParaRPr lang="en-US" sz="1000" dirty="0"/>
+          </a:p>
+        </p:txBody>
+      </p:sp>
+      <p:sp>
+        <p:nvSpPr>
+          <p:cNvPr id="17" name="s4_titration-row-1"/>
+          <p:cNvSpPr txBox="1"/>
+          <p:nvPr/>
+        </p:nvSpPr>
+        <p:spPr>
+          <a:xfrm rot="16200000">
+            <a:off x="3639312" y="3374136"/>
+            <a:ext cx="1371600" cy="1371600"/>
+          </a:xfrm>
+          <a:prstGeom prst="rect">
+            <a:avLst/>
+          </a:prstGeom>
+          <a:noFill/>
+          <a:ln/>
+        </p:spPr>
+        <p:txBody>
+          <a:bodyPr wrap="square" lIns="0" tIns="0" rIns="0" bIns="0" rtlCol="0" anchor="ctr"/>
+          <a:lstStyle/>
+          <a:p>
+            <a:pPr algn="ctr" indent="0" marL="0">
+              <a:buNone/>
+            </a:pPr>
+            <a:r>
+              <a:rPr lang="en-US" sz="1000" dirty="0">
+                <a:solidFill>
+                  <a:srgbClr val="111111"/>
+                </a:solidFill>
+              </a:rPr>
+              <a:t>each class against its own matched Stable controls</a:t>
+            </a:r>
+            <a:endParaRPr lang="en-US" sz="1000" dirty="0"/>
+          </a:p>
+        </p:txBody>
+      </p:sp>
+      <p:sp>
+        <p:nvSpPr>
+          <p:cNvPr id="18" name="s4_titration-dot-0"/>
           <p:cNvSpPr/>
           <p:nvPr/>
         </p:nvSpPr>
         <p:spPr>
           <a:xfrm>
-            <a:off x="731520" y="4887468"/>
+            <a:off x="4114800" y="4960620"/>
+            <a:ext cx="109728" cy="109728"/>
+          </a:xfrm>
+          <a:prstGeom prst="ellipse">
+            <a:avLst/>
+          </a:prstGeom>
+          <a:solidFill>
+            <a:srgbClr val="4F4F4F"/>
+          </a:solidFill>
+          <a:ln w="12700">
+            <a:solidFill>
+              <a:srgbClr val="4F4F4F"/>
+            </a:solidFill>
+            <a:prstDash val="solid"/>
+          </a:ln>
+        </p:spPr>
+      </p:sp>
+      <p:sp>
+        <p:nvSpPr>
+          <p:cNvPr id="19" name="s4_titration-leg-0"/>
+          <p:cNvSpPr txBox="1"/>
+          <p:nvPr/>
+        </p:nvSpPr>
+        <p:spPr>
+          <a:xfrm>
+            <a:off x="4270248" y="4919472"/>
+            <a:ext cx="1057046" cy="201168"/>
+          </a:xfrm>
+          <a:prstGeom prst="rect">
+            <a:avLst/>
+          </a:prstGeom>
+          <a:noFill/>
+          <a:ln/>
+        </p:spPr>
+        <p:txBody>
+          <a:bodyPr wrap="square" lIns="0" tIns="0" rIns="0" bIns="0" rtlCol="0" anchor="ctr"/>
+          <a:lstStyle/>
+          <a:p>
+            <a:pPr indent="0" marL="0">
+              <a:buNone/>
+            </a:pPr>
+            <a:r>
+              <a:rPr lang="en-US" sz="1050" dirty="0">
+                <a:solidFill>
+                  <a:srgbClr val="111111"/>
+                </a:solidFill>
+              </a:rPr>
+              <a:t>Dynamic (all)</a:t>
+            </a:r>
+            <a:endParaRPr lang="en-US" sz="1050" dirty="0"/>
+          </a:p>
+        </p:txBody>
+      </p:sp>
+      <p:sp>
+        <p:nvSpPr>
+          <p:cNvPr id="20" name="s4_titration-dot-1"/>
+          <p:cNvSpPr/>
+          <p:nvPr/>
+        </p:nvSpPr>
+        <p:spPr>
+          <a:xfrm>
+            <a:off x="5437022" y="4960620"/>
+            <a:ext cx="109728" cy="109728"/>
+          </a:xfrm>
+          <a:prstGeom prst="ellipse">
+            <a:avLst/>
+          </a:prstGeom>
+          <a:solidFill>
+            <a:srgbClr val="C2551C"/>
+          </a:solidFill>
+          <a:ln w="12700">
+            <a:solidFill>
+              <a:srgbClr val="C2551C"/>
+            </a:solidFill>
+            <a:prstDash val="solid"/>
+          </a:ln>
+        </p:spPr>
+      </p:sp>
+      <p:sp>
+        <p:nvSpPr>
+          <p:cNvPr id="21" name="s4_titration-leg-1"/>
+          <p:cNvSpPr txBox="1"/>
+          <p:nvPr/>
+        </p:nvSpPr>
+        <p:spPr>
+          <a:xfrm>
+            <a:off x="5592470" y="4919472"/>
+            <a:ext cx="596189" cy="201168"/>
+          </a:xfrm>
+          <a:prstGeom prst="rect">
+            <a:avLst/>
+          </a:prstGeom>
+          <a:noFill/>
+          <a:ln/>
+        </p:spPr>
+        <p:txBody>
+          <a:bodyPr wrap="square" lIns="0" tIns="0" rIns="0" bIns="0" rtlCol="0" anchor="ctr"/>
+          <a:lstStyle/>
+          <a:p>
+            <a:pPr indent="0" marL="0">
+              <a:buNone/>
+            </a:pPr>
+            <a:r>
+              <a:rPr lang="en-US" sz="1050" dirty="0">
+                <a:solidFill>
+                  <a:srgbClr val="111111"/>
+                </a:solidFill>
+              </a:rPr>
+              <a:t>Age Up</a:t>
+            </a:r>
+            <a:endParaRPr lang="en-US" sz="1050" dirty="0"/>
+          </a:p>
+        </p:txBody>
+      </p:sp>
+      <p:sp>
+        <p:nvSpPr>
+          <p:cNvPr id="22" name="s4_titration-dot-2"/>
+          <p:cNvSpPr/>
+          <p:nvPr/>
+        </p:nvSpPr>
+        <p:spPr>
+          <a:xfrm>
+            <a:off x="6298387" y="4960620"/>
+            <a:ext cx="109728" cy="109728"/>
+          </a:xfrm>
+          <a:prstGeom prst="ellipse">
+            <a:avLst/>
+          </a:prstGeom>
+          <a:solidFill>
+            <a:srgbClr val="1F6FB2"/>
+          </a:solidFill>
+          <a:ln w="12700">
+            <a:solidFill>
+              <a:srgbClr val="1F6FB2"/>
+            </a:solidFill>
+            <a:prstDash val="solid"/>
+          </a:ln>
+        </p:spPr>
+      </p:sp>
+      <p:sp>
+        <p:nvSpPr>
+          <p:cNvPr id="23" name="s4_titration-leg-2"/>
+          <p:cNvSpPr txBox="1"/>
+          <p:nvPr/>
+        </p:nvSpPr>
+        <p:spPr>
+          <a:xfrm>
+            <a:off x="6453835" y="4919472"/>
+            <a:ext cx="727862" cy="201168"/>
+          </a:xfrm>
+          <a:prstGeom prst="rect">
+            <a:avLst/>
+          </a:prstGeom>
+          <a:noFill/>
+          <a:ln/>
+        </p:spPr>
+        <p:txBody>
+          <a:bodyPr wrap="square" lIns="0" tIns="0" rIns="0" bIns="0" rtlCol="0" anchor="ctr"/>
+          <a:lstStyle/>
+          <a:p>
+            <a:pPr indent="0" marL="0">
+              <a:buNone/>
+            </a:pPr>
+            <a:r>
+              <a:rPr lang="en-US" sz="1050" dirty="0">
+                <a:solidFill>
+                  <a:srgbClr val="111111"/>
+                </a:solidFill>
+              </a:rPr>
+              <a:t>Age Down</a:t>
+            </a:r>
+            <a:endParaRPr lang="en-US" sz="1050" dirty="0"/>
+          </a:p>
+        </p:txBody>
+      </p:sp>
+      <p:sp>
+        <p:nvSpPr>
+          <p:cNvPr id="24" name="s4_titration-dot-3"/>
+          <p:cNvSpPr/>
+          <p:nvPr/>
+        </p:nvSpPr>
+        <p:spPr>
+          <a:xfrm>
+            <a:off x="7291426" y="4960620"/>
+            <a:ext cx="109728" cy="109728"/>
+          </a:xfrm>
+          <a:prstGeom prst="ellipse">
+            <a:avLst/>
+          </a:prstGeom>
+          <a:solidFill>
+            <a:srgbClr val="2E7D32"/>
+          </a:solidFill>
+          <a:ln w="12700">
+            <a:solidFill>
+              <a:srgbClr val="2E7D32"/>
+            </a:solidFill>
+            <a:prstDash val="solid"/>
+          </a:ln>
+        </p:spPr>
+      </p:sp>
+      <p:sp>
+        <p:nvSpPr>
+          <p:cNvPr id="25" name="s4_titration-leg-3"/>
+          <p:cNvSpPr txBox="1"/>
+          <p:nvPr/>
+        </p:nvSpPr>
+        <p:spPr>
+          <a:xfrm>
+            <a:off x="7446874" y="4919472"/>
+            <a:ext cx="925373" cy="201168"/>
+          </a:xfrm>
+          <a:prstGeom prst="rect">
+            <a:avLst/>
+          </a:prstGeom>
+          <a:noFill/>
+          <a:ln/>
+        </p:spPr>
+        <p:txBody>
+          <a:bodyPr wrap="square" lIns="0" tIns="0" rIns="0" bIns="0" rtlCol="0" anchor="ctr"/>
+          <a:lstStyle/>
+          <a:p>
+            <a:pPr indent="0" marL="0">
+              <a:buNone/>
+            </a:pPr>
+            <a:r>
+              <a:rPr lang="en-US" sz="1050" dirty="0">
+                <a:solidFill>
+                  <a:srgbClr val="111111"/>
+                </a:solidFill>
+              </a:rPr>
+              <a:t>Exercise Up</a:t>
+            </a:r>
+            <a:endParaRPr lang="en-US" sz="1050" dirty="0"/>
+          </a:p>
+        </p:txBody>
+      </p:sp>
+      <p:sp>
+        <p:nvSpPr>
+          <p:cNvPr id="26" name="s4_titration-dot-4"/>
+          <p:cNvSpPr/>
+          <p:nvPr/>
+        </p:nvSpPr>
+        <p:spPr>
+          <a:xfrm>
+            <a:off x="8481974" y="4960620"/>
+            <a:ext cx="109728" cy="109728"/>
+          </a:xfrm>
+          <a:prstGeom prst="ellipse">
+            <a:avLst/>
+          </a:prstGeom>
+          <a:solidFill>
+            <a:srgbClr val="7B3FA0"/>
+          </a:solidFill>
+          <a:ln w="12700">
+            <a:solidFill>
+              <a:srgbClr val="7B3FA0"/>
+            </a:solidFill>
+            <a:prstDash val="solid"/>
+          </a:ln>
+        </p:spPr>
+      </p:sp>
+      <p:sp>
+        <p:nvSpPr>
+          <p:cNvPr id="27" name="s4_titration-leg-4"/>
+          <p:cNvSpPr txBox="1"/>
+          <p:nvPr/>
+        </p:nvSpPr>
+        <p:spPr>
+          <a:xfrm>
+            <a:off x="8637422" y="4919472"/>
+            <a:ext cx="1057046" cy="201168"/>
+          </a:xfrm>
+          <a:prstGeom prst="rect">
+            <a:avLst/>
+          </a:prstGeom>
+          <a:noFill/>
+          <a:ln/>
+        </p:spPr>
+        <p:txBody>
+          <a:bodyPr wrap="square" lIns="0" tIns="0" rIns="0" bIns="0" rtlCol="0" anchor="ctr"/>
+          <a:lstStyle/>
+          <a:p>
+            <a:pPr indent="0" marL="0">
+              <a:buNone/>
+            </a:pPr>
+            <a:r>
+              <a:rPr lang="en-US" sz="1050" dirty="0">
+                <a:solidFill>
+                  <a:srgbClr val="111111"/>
+                </a:solidFill>
+              </a:rPr>
+              <a:t>Exercise Down</a:t>
+            </a:r>
+            <a:endParaRPr lang="en-US" sz="1050" dirty="0"/>
+          </a:p>
+        </p:txBody>
+      </p:sp>
+      <p:sp>
+        <p:nvSpPr>
+          <p:cNvPr id="28" name="s4_titration-dot-5"/>
+          <p:cNvSpPr/>
+          <p:nvPr/>
+        </p:nvSpPr>
+        <p:spPr>
+          <a:xfrm>
+            <a:off x="9804197" y="4960620"/>
             <a:ext cx="109728" cy="109728"/>
           </a:xfrm>
           <a:prstGeom prst="ellipse">
@@ -3906,14 +4817,14 @@
       </p:sp>
       <p:sp>
         <p:nvSpPr>
-          <p:cNvPr id="7" name="lg-txt-5.3-0"/>
+          <p:cNvPr id="29" name="s4_titration-leg-5"/>
           <p:cNvSpPr txBox="1"/>
           <p:nvPr/>
         </p:nvSpPr>
         <p:spPr>
           <a:xfrm>
-            <a:off x="886968" y="4846320"/>
-            <a:ext cx="1320394" cy="201168"/>
+            <a:off x="9959645" y="4919472"/>
+            <a:ext cx="2373782" cy="201168"/>
           </a:xfrm>
           <a:prstGeom prst="rect">
             <a:avLst/>
@@ -3934,7 +4845,7 @@
                   <a:srgbClr val="111111"/>
                 </a:solidFill>
               </a:rPr>
-              <a:t>Matched Unchanged</a:t>
+              <a:t>Stable (all, or matched controls)</a:t>
             </a:r>
             <a:endParaRPr lang="en-US" sz="1050" dirty="0"/>
           </a:p>
@@ -3942,39 +4853,14 @@
       </p:sp>
       <p:sp>
         <p:nvSpPr>
-          <p:cNvPr id="8" name="lg-dot-5.3-1"/>
-          <p:cNvSpPr/>
-          <p:nvPr/>
-        </p:nvSpPr>
-        <p:spPr>
-          <a:xfrm>
-            <a:off x="2317090" y="4887468"/>
-            <a:ext cx="109728" cy="109728"/>
-          </a:xfrm>
-          <a:prstGeom prst="ellipse">
-            <a:avLst/>
-          </a:prstGeom>
-          <a:solidFill>
-            <a:srgbClr val="C2551C"/>
-          </a:solidFill>
-          <a:ln w="12700">
-            <a:solidFill>
-              <a:srgbClr val="C2551C"/>
-            </a:solidFill>
-            <a:prstDash val="solid"/>
-          </a:ln>
-        </p:spPr>
-      </p:sp>
-      <p:sp>
-        <p:nvSpPr>
-          <p:cNvPr id="9" name="lg-txt-5.3-1"/>
+          <p:cNvPr id="30" name="s4_titration-key"/>
           <p:cNvSpPr txBox="1"/>
           <p:nvPr/>
         </p:nvSpPr>
         <p:spPr>
           <a:xfrm>
-            <a:off x="2472538" y="4846320"/>
-            <a:ext cx="1452067" cy="201168"/>
+            <a:off x="4114800" y="5193792"/>
+            <a:ext cx="7589520" cy="502920"/>
           </a:xfrm>
           <a:prstGeom prst="rect">
             <a:avLst/>
@@ -3990,69 +4876,20 @@
               <a:buNone/>
             </a:pPr>
             <a:r>
-              <a:rPr lang="en-US" sz="1050" dirty="0">
-                <a:solidFill>
-                  <a:srgbClr val="111111"/>
-                </a:solidFill>
-              </a:rPr>
-              <a:t>Age-gained (Δscore)</a:t>
-            </a:r>
-            <a:endParaRPr lang="en-US" sz="1050" dirty="0"/>
-          </a:p>
-        </p:txBody>
-      </p:sp>
-      <p:sp>
-        <p:nvSpPr>
-          <p:cNvPr id="10" name="massaction"/>
-          <p:cNvSpPr txBox="1"/>
-          <p:nvPr/>
-        </p:nvSpPr>
-        <p:spPr>
-          <a:xfrm>
-            <a:off x="502920" y="5029200"/>
-            <a:ext cx="11155680" cy="914400"/>
-          </a:xfrm>
-          <a:prstGeom prst="rect">
-            <a:avLst/>
-          </a:prstGeom>
-          <a:solidFill>
-            <a:srgbClr val="F2F2F2"/>
-          </a:solidFill>
-          <a:ln/>
-        </p:spPr>
-        <p:txBody>
-          <a:bodyPr wrap="square" lIns="152400" tIns="152400" rIns="152400" bIns="152400" rtlCol="0" anchor="ctr"/>
-          <a:lstStyle/>
-          <a:p>
-            <a:pPr indent="0" marL="0">
-              <a:buNone/>
-            </a:pPr>
-            <a:r>
-              <a:rPr lang="en-US" sz="1700" b="1" dirty="0">
-                <a:solidFill>
-                  <a:srgbClr val="C2551C"/>
-                </a:solidFill>
-              </a:rPr>
-              <a:t>Mass action   </a:t>
-            </a:r>
-            <a:pPr indent="0" marL="0">
-              <a:buNone/>
-            </a:pPr>
-            <a:r>
-              <a:rPr lang="en-US" sz="1500" dirty="0">
-                <a:solidFill>
-                  <a:srgbClr val="000000"/>
-                </a:solidFill>
-              </a:rPr>
-              <a:t>if ageing raises AP-1 activity, occupancy rises first at the highest-affinity motifs — exactly the sites that gain. Losing binding is not the reverse: age-lost sites show no sequence signature at all.</a:t>
-            </a:r>
-            <a:endParaRPr lang="en-US" sz="1700" dirty="0"/>
-          </a:p>
-        </p:txBody>
-      </p:sp>
-      <p:sp>
-        <p:nvSpPr>
-          <p:cNvPr id="12" name="Text 0"/>
+              <a:rPr lang="en-US" sz="900" dirty="0">
+                <a:solidFill>
+                  <a:srgbClr val="595959"/>
+                </a:solidFill>
+              </a:rPr>
+              <a:t>grey line and band (top row): all Stable sites, median with 95% bootstrap CI.   grey dots (bottom row): that class's own matched Stable controls.   Stars test the class against that reference — Mann–Whitney on all sites, paired Wilcoxon on matched pairs — BH across all 20 tests.   *** p&lt;0.001   ** p&lt;0.01   * p&lt;0.05   ns ≥ 0.05</a:t>
+            </a:r>
+            <a:endParaRPr lang="en-US" sz="900" dirty="0"/>
+          </a:p>
+        </p:txBody>
+      </p:sp>
+      <p:sp>
+        <p:nvSpPr>
+          <p:cNvPr id="31" name="Text 0"/>
           <p:cNvSpPr/>
           <p:nvPr>
             <p:ph idx="101" type="body" hasCustomPrompt="1"/>
@@ -4076,6 +4913,25 @@
             <a:pPr algn="l" indent="0" marL="0">
               <a:buNone/>
             </a:pPr>
+            <a:r>
+              <a:rPr lang="en-US" sz="1500" b="1" dirty="0">
+                <a:solidFill>
+                  <a:srgbClr val="C2551C"/>
+                </a:solidFill>
+              </a:rPr>
+              <a:t>Takeaway   </a:t>
+            </a:r>
+            <a:pPr algn="l" indent="0" marL="0">
+              <a:buNone/>
+            </a:pPr>
+            <a:r>
+              <a:rPr lang="en-US" sz="1500" dirty="0">
+                <a:solidFill>
+                  <a:srgbClr val="111111"/>
+                </a:solidFill>
+              </a:rPr>
+              <a:t>a second copy is worth most at ±20–40 bp and a moved motif recovers only a third of what destroying it cost — and no class differs once context is matched</a:t>
+            </a:r>
             <a:endParaRPr lang="en-US" sz="1500" dirty="0"/>
           </a:p>
         </p:txBody>
@@ -4182,7 +5038,7 @@
                   <a:schemeClr val="tx1"/>
                 </a:solidFill>
               </a:rPr>
-              <a:t>An independent reporter assay agrees</a:t>
+              <a:t>Age-gained sites read AP-1 dosage more sharply</a:t>
             </a:r>
             <a:endParaRPr lang="en-US" sz="2800" dirty="0"/>
           </a:p>
@@ -4190,14 +5046,14 @@
       </p:sp>
       <p:sp>
         <p:nvSpPr>
-          <p:cNvPr id="3" name="mp-t1"/>
+          <p:cNvPr id="3" name="ag-t1"/>
           <p:cNvSpPr txBox="1"/>
           <p:nvPr/>
         </p:nvSpPr>
         <p:spPr>
           <a:xfrm>
-            <a:off x="731520" y="2331720"/>
-            <a:ext cx="4937760" cy="274320"/>
+            <a:off x="731520" y="1051560"/>
+            <a:ext cx="7315200" cy="292608"/>
           </a:xfrm>
           <a:prstGeom prst="rect">
             <a:avLst/>
@@ -4213,20 +5069,56 @@
               <a:buNone/>
             </a:pPr>
             <a:r>
-              <a:rPr lang="en-US" sz="1300" b="1" dirty="0">
+              <a:rPr lang="en-US" sz="1350" b="1" dirty="0">
                 <a:solidFill>
                   <a:srgbClr val="111111"/>
                 </a:solidFill>
               </a:rPr>
-              <a:t>Same answer: the motif is a small part</a:t>
-            </a:r>
-            <a:endParaRPr lang="en-US" sz="1300" dirty="0"/>
+              <a:t>Age-gained sites respond more to AP-1 dosage, both ways</a:t>
+            </a:r>
+            <a:endParaRPr lang="en-US" sz="1350" dirty="0"/>
+          </a:p>
+        </p:txBody>
+      </p:sp>
+      <p:sp>
+        <p:nvSpPr>
+          <p:cNvPr id="4" name="ag-s1"/>
+          <p:cNvSpPr txBox="1"/>
+          <p:nvPr/>
+        </p:nvSpPr>
+        <p:spPr>
+          <a:xfrm>
+            <a:off x="731520" y="1344168"/>
+            <a:ext cx="7315200" cy="292608"/>
+          </a:xfrm>
+          <a:prstGeom prst="rect">
+            <a:avLst/>
+          </a:prstGeom>
+          <a:noFill/>
+          <a:ln/>
+        </p:spPr>
+        <p:txBody>
+          <a:bodyPr wrap="square" lIns="0" tIns="0" rIns="0" bIns="0" rtlCol="0" anchor="ctr"/>
+          <a:lstStyle/>
+          <a:p>
+            <a:pPr indent="0" marL="0">
+              <a:buNone/>
+            </a:pPr>
+            <a:r>
+              <a:rPr lang="en-US" sz="1050" dirty="0">
+                <a:solidFill>
+                  <a:srgbClr val="595959"/>
+                </a:solidFill>
+              </a:rPr>
+              <a:t>Δscore definition: the top fifth of the change in TOBIAS binding score with age, against matched Unchanged sites</a:t>
+            </a:r>
+            <a:endParaRPr lang="en-US" sz="1050" dirty="0"/>
           </a:p>
         </p:txBody>
       </p:sp>
       <p:pic>
         <p:nvPicPr>
-          <p:cNvPr id="4" name="Image 0" descr="/Users/z5162865/WongLab/AlphaGenome_Ap1/Analysis/slide_figures/panels/s6_share.png">    </p:cNvPr>
+          <p:cNvPr id="5" name="Image 0" descr="/Users/z5162865/WongLab/AlphaGenome_Ap1/Analysis/slide_figures/panels/s5_age_gained.png">    </p:cNvPr>
           <p:cNvPicPr>
             <a:picLocks noChangeAspect="1"/>
           </p:cNvPicPr>
@@ -4240,8 +5132,8 @@
         </p:blipFill>
         <p:spPr>
           <a:xfrm>
-            <a:off x="1352676" y="2651760"/>
-            <a:ext cx="3695447" cy="2651760"/>
+            <a:off x="1429175" y="1737360"/>
+            <a:ext cx="5919890" cy="3017520"/>
           </a:xfrm>
           <a:prstGeom prst="rect">
             <a:avLst/>
@@ -4250,14 +5142,39 @@
       </p:pic>
       <p:sp>
         <p:nvSpPr>
-          <p:cNvPr id="5" name="mp-t2"/>
+          <p:cNvPr id="6" name="lg-dot-5.3-0"/>
+          <p:cNvSpPr/>
+          <p:nvPr/>
+        </p:nvSpPr>
+        <p:spPr>
+          <a:xfrm>
+            <a:off x="731520" y="4887468"/>
+            <a:ext cx="109728" cy="109728"/>
+          </a:xfrm>
+          <a:prstGeom prst="ellipse">
+            <a:avLst/>
+          </a:prstGeom>
+          <a:solidFill>
+            <a:srgbClr val="B3B2AE"/>
+          </a:solidFill>
+          <a:ln w="12700">
+            <a:solidFill>
+              <a:srgbClr val="B3B2AE"/>
+            </a:solidFill>
+            <a:prstDash val="solid"/>
+          </a:ln>
+        </p:spPr>
+      </p:sp>
+      <p:sp>
+        <p:nvSpPr>
+          <p:cNvPr id="7" name="lg-txt-5.3-0"/>
           <p:cNvSpPr txBox="1"/>
           <p:nvPr/>
         </p:nvSpPr>
         <p:spPr>
           <a:xfrm>
-            <a:off x="6309360" y="2331720"/>
-            <a:ext cx="5120640" cy="274320"/>
+            <a:off x="886968" y="4846320"/>
+            <a:ext cx="1320394" cy="201168"/>
           </a:xfrm>
           <a:prstGeom prst="rect">
             <a:avLst/>
@@ -4273,51 +5190,52 @@
               <a:buNone/>
             </a:pPr>
             <a:r>
-              <a:rPr lang="en-US" sz="1300" b="1" dirty="0">
+              <a:rPr lang="en-US" sz="1050" dirty="0">
                 <a:solidFill>
                   <a:srgbClr val="111111"/>
                 </a:solidFill>
               </a:rPr>
-              <a:t>But they disagree on which elements depend more</a:t>
-            </a:r>
-            <a:endParaRPr lang="en-US" sz="1300" dirty="0"/>
-          </a:p>
-        </p:txBody>
-      </p:sp>
-      <p:pic>
-        <p:nvPicPr>
-          <p:cNvPr id="6" name="Image 1" descr="/Users/z5162865/WongLab/AlphaGenome_Ap1/Analysis/slide_figures/panels/s6_direction.png">    </p:cNvPr>
-          <p:cNvPicPr>
-            <a:picLocks noChangeAspect="1"/>
-          </p:cNvPicPr>
-          <p:nvPr/>
-        </p:nvPicPr>
-        <p:blipFill>
-          <a:blip r:embed="rId2"/>
-          <a:stretch>
-            <a:fillRect/>
-          </a:stretch>
-        </p:blipFill>
-        <p:spPr>
-          <a:xfrm>
-            <a:off x="7044645" y="2651760"/>
-            <a:ext cx="3650070" cy="2651760"/>
-          </a:xfrm>
-          <a:prstGeom prst="rect">
-            <a:avLst/>
-          </a:prstGeom>
-        </p:spPr>
-      </p:pic>
-      <p:sp>
-        <p:nvSpPr>
-          <p:cNvPr id="7" name="mp-key"/>
+              <a:t>Matched Unchanged</a:t>
+            </a:r>
+            <a:endParaRPr lang="en-US" sz="1050" dirty="0"/>
+          </a:p>
+        </p:txBody>
+      </p:sp>
+      <p:sp>
+        <p:nvSpPr>
+          <p:cNvPr id="8" name="lg-dot-5.3-1"/>
+          <p:cNvSpPr/>
+          <p:nvPr/>
+        </p:nvSpPr>
+        <p:spPr>
+          <a:xfrm>
+            <a:off x="2317090" y="4887468"/>
+            <a:ext cx="109728" cy="109728"/>
+          </a:xfrm>
+          <a:prstGeom prst="ellipse">
+            <a:avLst/>
+          </a:prstGeom>
+          <a:solidFill>
+            <a:srgbClr val="C2551C"/>
+          </a:solidFill>
+          <a:ln w="12700">
+            <a:solidFill>
+              <a:srgbClr val="C2551C"/>
+            </a:solidFill>
+            <a:prstDash val="solid"/>
+          </a:ln>
+        </p:spPr>
+      </p:sp>
+      <p:sp>
+        <p:nvSpPr>
+          <p:cNvPr id="9" name="lg-txt-5.3-1"/>
           <p:cNvSpPr txBox="1"/>
           <p:nvPr/>
         </p:nvSpPr>
         <p:spPr>
           <a:xfrm>
-            <a:off x="731520" y="5349240"/>
-            <a:ext cx="10698480" cy="274320"/>
+            <a:off x="2472538" y="4846320"/>
+            <a:ext cx="1452067" cy="201168"/>
           </a:xfrm>
           <a:prstGeom prst="rect">
             <a:avLst/>
@@ -4333,218 +5251,69 @@
               <a:buNone/>
             </a:pPr>
             <a:r>
-              <a:rPr lang="en-US" sz="950" dirty="0">
-                <a:solidFill>
-                  <a:srgbClr val="595959"/>
-                </a:solidFill>
-              </a:rPr>
-              <a:t>below 1×: responsive elements lose less than Stable ones   ·   above 1×: they lose more   ·   both p &lt; 0.001</a:t>
-            </a:r>
-            <a:endParaRPr lang="en-US" sz="950" dirty="0"/>
-          </a:p>
-        </p:txBody>
-      </p:sp>
-      <p:sp>
-        <p:nvSpPr>
-          <p:cNvPr id="8" name="stat-0"/>
-          <p:cNvSpPr/>
-          <p:nvPr/>
-        </p:nvSpPr>
-        <p:spPr>
-          <a:xfrm>
-            <a:off x="502920" y="1097280"/>
-            <a:ext cx="5440680" cy="1051560"/>
-          </a:xfrm>
-          <a:prstGeom prst="roundRect">
-            <a:avLst>
-              <a:gd name="adj" fmla="val 5217"/>
-            </a:avLst>
+              <a:rPr lang="en-US" sz="1050" dirty="0">
+                <a:solidFill>
+                  <a:srgbClr val="111111"/>
+                </a:solidFill>
+              </a:rPr>
+              <a:t>Age-gained (Δscore)</a:t>
+            </a:r>
+            <a:endParaRPr lang="en-US" sz="1050" dirty="0"/>
+          </a:p>
+        </p:txBody>
+      </p:sp>
+      <p:sp>
+        <p:nvSpPr>
+          <p:cNvPr id="10" name="massaction"/>
+          <p:cNvSpPr txBox="1"/>
+          <p:nvPr/>
+        </p:nvSpPr>
+        <p:spPr>
+          <a:xfrm>
+            <a:off x="502920" y="5029200"/>
+            <a:ext cx="11155680" cy="914400"/>
+          </a:xfrm>
+          <a:prstGeom prst="rect">
+            <a:avLst/>
           </a:prstGeom>
           <a:solidFill>
             <a:srgbClr val="F2F2F2"/>
           </a:solidFill>
-          <a:ln w="12700">
-            <a:solidFill>
-              <a:srgbClr val="E2E2E2"/>
-            </a:solidFill>
-            <a:prstDash val="solid"/>
-          </a:ln>
-        </p:spPr>
-      </p:sp>
-      <p:sp>
-        <p:nvSpPr>
-          <p:cNvPr id="9" name="Text 5"/>
-          <p:cNvSpPr txBox="1"/>
-          <p:nvPr/>
-        </p:nvSpPr>
-        <p:spPr>
-          <a:xfrm>
-            <a:off x="612648" y="1188720"/>
-            <a:ext cx="5221224" cy="548640"/>
-          </a:xfrm>
-          <a:prstGeom prst="rect">
-            <a:avLst/>
-          </a:prstGeom>
-          <a:noFill/>
-          <a:ln/>
-        </p:spPr>
-        <p:txBody>
-          <a:bodyPr wrap="square" lIns="0" tIns="0" rIns="0" bIns="0" rtlCol="0" anchor="ctr"/>
-          <a:lstStyle/>
-          <a:p>
-            <a:pPr algn="ctr" indent="0" marL="0">
-              <a:buNone/>
-            </a:pPr>
-            <a:r>
-              <a:rPr lang="en-US" sz="3000" b="1" dirty="0">
-                <a:solidFill>
-                  <a:srgbClr val="1F6FB2"/>
-                </a:solidFill>
-              </a:rPr>
-              <a:t>7.5%</a:t>
-            </a:r>
-            <a:endParaRPr lang="en-US" sz="3000" dirty="0"/>
-          </a:p>
-        </p:txBody>
-      </p:sp>
-      <p:sp>
-        <p:nvSpPr>
-          <p:cNvPr id="10" name="Text 6"/>
-          <p:cNvSpPr txBox="1"/>
-          <p:nvPr/>
-        </p:nvSpPr>
-        <p:spPr>
-          <a:xfrm>
-            <a:off x="612648" y="1755648"/>
-            <a:ext cx="5221224" cy="320040"/>
-          </a:xfrm>
-          <a:prstGeom prst="rect">
-            <a:avLst/>
-          </a:prstGeom>
-          <a:noFill/>
-          <a:ln/>
-        </p:spPr>
-        <p:txBody>
-          <a:bodyPr wrap="square" lIns="0" tIns="0" rIns="0" bIns="0" rtlCol="0" anchor="ctr"/>
-          <a:lstStyle/>
-          <a:p>
-            <a:pPr algn="ctr" indent="0" marL="0">
-              <a:buNone/>
-            </a:pPr>
-            <a:r>
-              <a:rPr lang="en-US" sz="1200" dirty="0">
-                <a:solidFill>
-                  <a:srgbClr val="595959"/>
-                </a:solidFill>
-              </a:rPr>
-              <a:t>AlphaGenome: the motif's share of local dependence</a:t>
-            </a:r>
-            <a:endParaRPr lang="en-US" sz="1200" dirty="0"/>
-          </a:p>
-        </p:txBody>
-      </p:sp>
-      <p:sp>
-        <p:nvSpPr>
-          <p:cNvPr id="11" name="stat-1"/>
-          <p:cNvSpPr/>
-          <p:nvPr/>
-        </p:nvSpPr>
-        <p:spPr>
-          <a:xfrm>
-            <a:off x="6217920" y="1097280"/>
-            <a:ext cx="5440680" cy="1051560"/>
-          </a:xfrm>
-          <a:prstGeom prst="roundRect">
-            <a:avLst>
-              <a:gd name="adj" fmla="val 5217"/>
-            </a:avLst>
-          </a:prstGeom>
-          <a:solidFill>
-            <a:srgbClr val="F2F2F2"/>
-          </a:solidFill>
-          <a:ln w="12700">
-            <a:solidFill>
-              <a:srgbClr val="E2E2E2"/>
-            </a:solidFill>
-            <a:prstDash val="solid"/>
-          </a:ln>
-        </p:spPr>
-      </p:sp>
-      <p:sp>
-        <p:nvSpPr>
-          <p:cNvPr id="12" name="Text 8"/>
-          <p:cNvSpPr txBox="1"/>
-          <p:nvPr/>
-        </p:nvSpPr>
-        <p:spPr>
-          <a:xfrm>
-            <a:off x="6327648" y="1188720"/>
-            <a:ext cx="5221224" cy="548640"/>
-          </a:xfrm>
-          <a:prstGeom prst="rect">
-            <a:avLst/>
-          </a:prstGeom>
-          <a:noFill/>
-          <a:ln/>
-        </p:spPr>
-        <p:txBody>
-          <a:bodyPr wrap="square" lIns="0" tIns="0" rIns="0" bIns="0" rtlCol="0" anchor="ctr"/>
-          <a:lstStyle/>
-          <a:p>
-            <a:pPr algn="ctr" indent="0" marL="0">
-              <a:buNone/>
-            </a:pPr>
-            <a:r>
-              <a:rPr lang="en-US" sz="3000" b="1" dirty="0">
+          <a:ln/>
+        </p:spPr>
+        <p:txBody>
+          <a:bodyPr wrap="square" lIns="152400" tIns="152400" rIns="152400" bIns="152400" rtlCol="0" anchor="ctr"/>
+          <a:lstStyle/>
+          <a:p>
+            <a:pPr indent="0" marL="0">
+              <a:buNone/>
+            </a:pPr>
+            <a:r>
+              <a:rPr lang="en-US" sz="1700" b="1" dirty="0">
                 <a:solidFill>
                   <a:srgbClr val="C2551C"/>
                 </a:solidFill>
               </a:rPr>
-              <a:t>9.3%</a:t>
-            </a:r>
-            <a:endParaRPr lang="en-US" sz="3000" dirty="0"/>
-          </a:p>
-        </p:txBody>
-      </p:sp>
-      <p:sp>
-        <p:nvSpPr>
-          <p:cNvPr id="13" name="Text 9"/>
-          <p:cNvSpPr txBox="1"/>
-          <p:nvPr/>
-        </p:nvSpPr>
-        <p:spPr>
-          <a:xfrm>
-            <a:off x="6327648" y="1755648"/>
-            <a:ext cx="5221224" cy="320040"/>
-          </a:xfrm>
-          <a:prstGeom prst="rect">
-            <a:avLst/>
-          </a:prstGeom>
-          <a:noFill/>
-          <a:ln/>
-        </p:spPr>
-        <p:txBody>
-          <a:bodyPr wrap="square" lIns="0" tIns="0" rIns="0" bIns="0" rtlCol="0" anchor="ctr"/>
-          <a:lstStyle/>
-          <a:p>
-            <a:pPr algn="ctr" indent="0" marL="0">
-              <a:buNone/>
-            </a:pPr>
-            <a:r>
-              <a:rPr lang="en-US" sz="1200" dirty="0">
-                <a:solidFill>
-                  <a:srgbClr val="595959"/>
-                </a:solidFill>
-              </a:rPr>
-              <a:t>fibroblast MPRA: the same quantity, measured in the lab</a:t>
-            </a:r>
-            <a:endParaRPr lang="en-US" sz="1200" dirty="0"/>
-          </a:p>
-        </p:txBody>
-      </p:sp>
-      <p:sp>
-        <p:nvSpPr>
-          <p:cNvPr id="14" name="Text 0"/>
+              <a:t>Mass action   </a:t>
+            </a:r>
+            <a:pPr indent="0" marL="0">
+              <a:buNone/>
+            </a:pPr>
+            <a:r>
+              <a:rPr lang="en-US" sz="1500" dirty="0">
+                <a:solidFill>
+                  <a:srgbClr val="000000"/>
+                </a:solidFill>
+              </a:rPr>
+              <a:t>if ageing raises AP-1 activity, occupancy rises first at the highest-affinity motifs — exactly the sites that gain. Losing binding is not the reverse: age-lost sites show no sequence signature at all.</a:t>
+            </a:r>
+            <a:endParaRPr lang="en-US" sz="1700" dirty="0"/>
+          </a:p>
+        </p:txBody>
+      </p:sp>
+      <p:sp>
+        <p:nvSpPr>
+          <p:cNvPr id="12" name="Text 0"/>
           <p:cNvSpPr/>
           <p:nvPr>
             <p:ph idx="101" type="body" hasCustomPrompt="1"/>
@@ -4568,25 +5337,6 @@
             <a:pPr algn="l" indent="0" marL="0">
               <a:buNone/>
             </a:pPr>
-            <a:r>
-              <a:rPr lang="en-US" sz="1500" b="1" dirty="0">
-                <a:solidFill>
-                  <a:srgbClr val="C2551C"/>
-                </a:solidFill>
-              </a:rPr>
-              <a:t>Takeaway   </a:t>
-            </a:r>
-            <a:pPr algn="l" indent="0" marL="0">
-              <a:buNone/>
-            </a:pPr>
-            <a:r>
-              <a:rPr lang="en-US" sz="1500" dirty="0">
-                <a:solidFill>
-                  <a:srgbClr val="111111"/>
-                </a:solidFill>
-              </a:rPr>
-              <a:t>two assays, different cell types and readouts, both put the AP-1 motif under a tenth of its 170 bp surroundings</a:t>
-            </a:r>
             <a:endParaRPr lang="en-US" sz="1500" dirty="0"/>
           </a:p>
         </p:txBody>
@@ -4693,7 +5443,7 @@
                   <a:schemeClr val="tx1"/>
                 </a:solidFill>
               </a:rPr>
-              <a:t>What this changes</a:t>
+              <a:t>An independent reporter assay agrees</a:t>
             </a:r>
             <a:endParaRPr lang="en-US" sz="2800" dirty="0"/>
           </a:p>
@@ -4701,7 +5451,361 @@
       </p:sp>
       <p:sp>
         <p:nvSpPr>
-          <p:cNvPr id="3" name="Text 0"/>
+          <p:cNvPr id="3" name="mp-t1"/>
+          <p:cNvSpPr txBox="1"/>
+          <p:nvPr/>
+        </p:nvSpPr>
+        <p:spPr>
+          <a:xfrm>
+            <a:off x="731520" y="2331720"/>
+            <a:ext cx="4937760" cy="274320"/>
+          </a:xfrm>
+          <a:prstGeom prst="rect">
+            <a:avLst/>
+          </a:prstGeom>
+          <a:noFill/>
+          <a:ln/>
+        </p:spPr>
+        <p:txBody>
+          <a:bodyPr wrap="square" lIns="0" tIns="0" rIns="0" bIns="0" rtlCol="0" anchor="ctr"/>
+          <a:lstStyle/>
+          <a:p>
+            <a:pPr indent="0" marL="0">
+              <a:buNone/>
+            </a:pPr>
+            <a:r>
+              <a:rPr lang="en-US" sz="1300" b="1" dirty="0">
+                <a:solidFill>
+                  <a:srgbClr val="111111"/>
+                </a:solidFill>
+              </a:rPr>
+              <a:t>Same answer: the motif is a small part</a:t>
+            </a:r>
+            <a:endParaRPr lang="en-US" sz="1300" dirty="0"/>
+          </a:p>
+        </p:txBody>
+      </p:sp>
+      <p:pic>
+        <p:nvPicPr>
+          <p:cNvPr id="4" name="Image 0" descr="/Users/z5162865/WongLab/AlphaGenome_Ap1/Analysis/slide_figures/panels/s6_share.png">    </p:cNvPr>
+          <p:cNvPicPr>
+            <a:picLocks noChangeAspect="1"/>
+          </p:cNvPicPr>
+          <p:nvPr/>
+        </p:nvPicPr>
+        <p:blipFill>
+          <a:blip r:embed="rId1"/>
+          <a:stretch>
+            <a:fillRect/>
+          </a:stretch>
+        </p:blipFill>
+        <p:spPr>
+          <a:xfrm>
+            <a:off x="1352676" y="2651760"/>
+            <a:ext cx="3695447" cy="2651760"/>
+          </a:xfrm>
+          <a:prstGeom prst="rect">
+            <a:avLst/>
+          </a:prstGeom>
+        </p:spPr>
+      </p:pic>
+      <p:sp>
+        <p:nvSpPr>
+          <p:cNvPr id="5" name="mp-t2"/>
+          <p:cNvSpPr txBox="1"/>
+          <p:nvPr/>
+        </p:nvSpPr>
+        <p:spPr>
+          <a:xfrm>
+            <a:off x="6309360" y="2331720"/>
+            <a:ext cx="5120640" cy="274320"/>
+          </a:xfrm>
+          <a:prstGeom prst="rect">
+            <a:avLst/>
+          </a:prstGeom>
+          <a:noFill/>
+          <a:ln/>
+        </p:spPr>
+        <p:txBody>
+          <a:bodyPr wrap="square" lIns="0" tIns="0" rIns="0" bIns="0" rtlCol="0" anchor="ctr"/>
+          <a:lstStyle/>
+          <a:p>
+            <a:pPr indent="0" marL="0">
+              <a:buNone/>
+            </a:pPr>
+            <a:r>
+              <a:rPr lang="en-US" sz="1300" b="1" dirty="0">
+                <a:solidFill>
+                  <a:srgbClr val="111111"/>
+                </a:solidFill>
+              </a:rPr>
+              <a:t>But they disagree on which elements depend more</a:t>
+            </a:r>
+            <a:endParaRPr lang="en-US" sz="1300" dirty="0"/>
+          </a:p>
+        </p:txBody>
+      </p:sp>
+      <p:pic>
+        <p:nvPicPr>
+          <p:cNvPr id="6" name="Image 1" descr="/Users/z5162865/WongLab/AlphaGenome_Ap1/Analysis/slide_figures/panels/s6_direction.png">    </p:cNvPr>
+          <p:cNvPicPr>
+            <a:picLocks noChangeAspect="1"/>
+          </p:cNvPicPr>
+          <p:nvPr/>
+        </p:nvPicPr>
+        <p:blipFill>
+          <a:blip r:embed="rId2"/>
+          <a:stretch>
+            <a:fillRect/>
+          </a:stretch>
+        </p:blipFill>
+        <p:spPr>
+          <a:xfrm>
+            <a:off x="7044645" y="2651760"/>
+            <a:ext cx="3650070" cy="2651760"/>
+          </a:xfrm>
+          <a:prstGeom prst="rect">
+            <a:avLst/>
+          </a:prstGeom>
+        </p:spPr>
+      </p:pic>
+      <p:sp>
+        <p:nvSpPr>
+          <p:cNvPr id="7" name="mp-key"/>
+          <p:cNvSpPr txBox="1"/>
+          <p:nvPr/>
+        </p:nvSpPr>
+        <p:spPr>
+          <a:xfrm>
+            <a:off x="731520" y="5349240"/>
+            <a:ext cx="10698480" cy="274320"/>
+          </a:xfrm>
+          <a:prstGeom prst="rect">
+            <a:avLst/>
+          </a:prstGeom>
+          <a:noFill/>
+          <a:ln/>
+        </p:spPr>
+        <p:txBody>
+          <a:bodyPr wrap="square" lIns="0" tIns="0" rIns="0" bIns="0" rtlCol="0" anchor="ctr"/>
+          <a:lstStyle/>
+          <a:p>
+            <a:pPr indent="0" marL="0">
+              <a:buNone/>
+            </a:pPr>
+            <a:r>
+              <a:rPr lang="en-US" sz="950" dirty="0">
+                <a:solidFill>
+                  <a:srgbClr val="595959"/>
+                </a:solidFill>
+              </a:rPr>
+              <a:t>below 1×: responsive elements lose less than Stable ones   ·   above 1×: they lose more   ·   both p &lt; 0.001</a:t>
+            </a:r>
+            <a:endParaRPr lang="en-US" sz="950" dirty="0"/>
+          </a:p>
+        </p:txBody>
+      </p:sp>
+      <p:sp>
+        <p:nvSpPr>
+          <p:cNvPr id="8" name="stat-0"/>
+          <p:cNvSpPr/>
+          <p:nvPr/>
+        </p:nvSpPr>
+        <p:spPr>
+          <a:xfrm>
+            <a:off x="502920" y="1097280"/>
+            <a:ext cx="5440680" cy="1051560"/>
+          </a:xfrm>
+          <a:prstGeom prst="roundRect">
+            <a:avLst>
+              <a:gd name="adj" fmla="val 5217"/>
+            </a:avLst>
+          </a:prstGeom>
+          <a:solidFill>
+            <a:srgbClr val="F2F2F2"/>
+          </a:solidFill>
+          <a:ln w="12700">
+            <a:solidFill>
+              <a:srgbClr val="E2E2E2"/>
+            </a:solidFill>
+            <a:prstDash val="solid"/>
+          </a:ln>
+        </p:spPr>
+      </p:sp>
+      <p:sp>
+        <p:nvSpPr>
+          <p:cNvPr id="9" name="Text 5"/>
+          <p:cNvSpPr txBox="1"/>
+          <p:nvPr/>
+        </p:nvSpPr>
+        <p:spPr>
+          <a:xfrm>
+            <a:off x="612648" y="1188720"/>
+            <a:ext cx="5221224" cy="548640"/>
+          </a:xfrm>
+          <a:prstGeom prst="rect">
+            <a:avLst/>
+          </a:prstGeom>
+          <a:noFill/>
+          <a:ln/>
+        </p:spPr>
+        <p:txBody>
+          <a:bodyPr wrap="square" lIns="0" tIns="0" rIns="0" bIns="0" rtlCol="0" anchor="ctr"/>
+          <a:lstStyle/>
+          <a:p>
+            <a:pPr algn="ctr" indent="0" marL="0">
+              <a:buNone/>
+            </a:pPr>
+            <a:r>
+              <a:rPr lang="en-US" sz="3000" b="1" dirty="0">
+                <a:solidFill>
+                  <a:srgbClr val="1F6FB2"/>
+                </a:solidFill>
+              </a:rPr>
+              <a:t>7.5%</a:t>
+            </a:r>
+            <a:endParaRPr lang="en-US" sz="3000" dirty="0"/>
+          </a:p>
+        </p:txBody>
+      </p:sp>
+      <p:sp>
+        <p:nvSpPr>
+          <p:cNvPr id="10" name="Text 6"/>
+          <p:cNvSpPr txBox="1"/>
+          <p:nvPr/>
+        </p:nvSpPr>
+        <p:spPr>
+          <a:xfrm>
+            <a:off x="612648" y="1755648"/>
+            <a:ext cx="5221224" cy="320040"/>
+          </a:xfrm>
+          <a:prstGeom prst="rect">
+            <a:avLst/>
+          </a:prstGeom>
+          <a:noFill/>
+          <a:ln/>
+        </p:spPr>
+        <p:txBody>
+          <a:bodyPr wrap="square" lIns="0" tIns="0" rIns="0" bIns="0" rtlCol="0" anchor="ctr"/>
+          <a:lstStyle/>
+          <a:p>
+            <a:pPr algn="ctr" indent="0" marL="0">
+              <a:buNone/>
+            </a:pPr>
+            <a:r>
+              <a:rPr lang="en-US" sz="1200" dirty="0">
+                <a:solidFill>
+                  <a:srgbClr val="595959"/>
+                </a:solidFill>
+              </a:rPr>
+              <a:t>AlphaGenome: the motif's share of local dependence</a:t>
+            </a:r>
+            <a:endParaRPr lang="en-US" sz="1200" dirty="0"/>
+          </a:p>
+        </p:txBody>
+      </p:sp>
+      <p:sp>
+        <p:nvSpPr>
+          <p:cNvPr id="11" name="stat-1"/>
+          <p:cNvSpPr/>
+          <p:nvPr/>
+        </p:nvSpPr>
+        <p:spPr>
+          <a:xfrm>
+            <a:off x="6217920" y="1097280"/>
+            <a:ext cx="5440680" cy="1051560"/>
+          </a:xfrm>
+          <a:prstGeom prst="roundRect">
+            <a:avLst>
+              <a:gd name="adj" fmla="val 5217"/>
+            </a:avLst>
+          </a:prstGeom>
+          <a:solidFill>
+            <a:srgbClr val="F2F2F2"/>
+          </a:solidFill>
+          <a:ln w="12700">
+            <a:solidFill>
+              <a:srgbClr val="E2E2E2"/>
+            </a:solidFill>
+            <a:prstDash val="solid"/>
+          </a:ln>
+        </p:spPr>
+      </p:sp>
+      <p:sp>
+        <p:nvSpPr>
+          <p:cNvPr id="12" name="Text 8"/>
+          <p:cNvSpPr txBox="1"/>
+          <p:nvPr/>
+        </p:nvSpPr>
+        <p:spPr>
+          <a:xfrm>
+            <a:off x="6327648" y="1188720"/>
+            <a:ext cx="5221224" cy="548640"/>
+          </a:xfrm>
+          <a:prstGeom prst="rect">
+            <a:avLst/>
+          </a:prstGeom>
+          <a:noFill/>
+          <a:ln/>
+        </p:spPr>
+        <p:txBody>
+          <a:bodyPr wrap="square" lIns="0" tIns="0" rIns="0" bIns="0" rtlCol="0" anchor="ctr"/>
+          <a:lstStyle/>
+          <a:p>
+            <a:pPr algn="ctr" indent="0" marL="0">
+              <a:buNone/>
+            </a:pPr>
+            <a:r>
+              <a:rPr lang="en-US" sz="3000" b="1" dirty="0">
+                <a:solidFill>
+                  <a:srgbClr val="C2551C"/>
+                </a:solidFill>
+              </a:rPr>
+              <a:t>9.3%</a:t>
+            </a:r>
+            <a:endParaRPr lang="en-US" sz="3000" dirty="0"/>
+          </a:p>
+        </p:txBody>
+      </p:sp>
+      <p:sp>
+        <p:nvSpPr>
+          <p:cNvPr id="13" name="Text 9"/>
+          <p:cNvSpPr txBox="1"/>
+          <p:nvPr/>
+        </p:nvSpPr>
+        <p:spPr>
+          <a:xfrm>
+            <a:off x="6327648" y="1755648"/>
+            <a:ext cx="5221224" cy="320040"/>
+          </a:xfrm>
+          <a:prstGeom prst="rect">
+            <a:avLst/>
+          </a:prstGeom>
+          <a:noFill/>
+          <a:ln/>
+        </p:spPr>
+        <p:txBody>
+          <a:bodyPr wrap="square" lIns="0" tIns="0" rIns="0" bIns="0" rtlCol="0" anchor="ctr"/>
+          <a:lstStyle/>
+          <a:p>
+            <a:pPr algn="ctr" indent="0" marL="0">
+              <a:buNone/>
+            </a:pPr>
+            <a:r>
+              <a:rPr lang="en-US" sz="1200" dirty="0">
+                <a:solidFill>
+                  <a:srgbClr val="595959"/>
+                </a:solidFill>
+              </a:rPr>
+              <a:t>fibroblast MPRA: the same quantity, measured in the lab</a:t>
+            </a:r>
+            <a:endParaRPr lang="en-US" sz="1200" dirty="0"/>
+          </a:p>
+        </p:txBody>
+      </p:sp>
+      <p:sp>
+        <p:nvSpPr>
+          <p:cNvPr id="14" name="Text 0"/>
           <p:cNvSpPr/>
           <p:nvPr>
             <p:ph idx="101" type="body" hasCustomPrompt="1"/>
@@ -4709,8 +5813,8 @@
         </p:nvSpPr>
         <p:spPr>
           <a:xfrm>
-            <a:off x="502920" y="1234440"/>
-            <a:ext cx="11155680" cy="5120640"/>
+            <a:off x="502920" y="5943600"/>
+            <a:ext cx="11155680" cy="658368"/>
           </a:xfrm>
           <a:prstGeom prst="rect">
             <a:avLst/>
@@ -4726,121 +5830,25 @@
               <a:buNone/>
             </a:pPr>
             <a:r>
-              <a:rPr lang="en-US" sz="1900" b="1" dirty="0">
-                <a:solidFill>
-                  <a:schemeClr val="tx1"/>
-                </a:solidFill>
-              </a:rPr>
-              <a:t>A responsive AP-1 site is a marginal one, not a differently-built one</a:t>
-            </a:r>
-            <a:endParaRPr lang="en-US" sz="1700" dirty="0"/>
-          </a:p>
-          <a:p>
+              <a:rPr lang="en-US" sz="1500" b="1" dirty="0">
+                <a:solidFill>
+                  <a:srgbClr val="C2551C"/>
+                </a:solidFill>
+              </a:rPr>
+              <a:t>Takeaway   </a:t>
+            </a:r>
             <a:pPr algn="l" indent="0" marL="0">
-              <a:spcAft>
-                <a:spcPts val="1500"/>
-              </a:spcAft>
-              <a:buNone/>
-            </a:pPr>
-            <a:r>
-              <a:rPr lang="en-US" sz="1700" dirty="0">
-                <a:solidFill>
-                  <a:schemeClr val="tx1"/>
-                </a:solidFill>
-              </a:rPr>
-              <a:t>Weaker AP-1 motif, fewer AP-1 motifs around it, and its dependence spread thinly across the element instead of anchored on the motif. The same partners matter, in the same order, in every class.</a:t>
-            </a:r>
-            <a:endParaRPr lang="en-US" sz="1700" dirty="0"/>
-          </a:p>
-          <a:p>
-            <a:pPr algn="l" indent="0" marL="0">
-              <a:buNone/>
-            </a:pPr>
-            <a:r>
-              <a:rPr lang="en-US" sz="1900" b="1" dirty="0">
-                <a:solidFill>
-                  <a:schemeClr val="tx1"/>
-                </a:solidFill>
-              </a:rPr>
-              <a:t>Two things survive matching, and only two</a:t>
-            </a:r>
-            <a:endParaRPr lang="en-US" sz="1700" dirty="0"/>
-          </a:p>
-          <a:p>
-            <a:pPr algn="l" indent="0" marL="0">
-              <a:spcAft>
-                <a:spcPts val="1500"/>
-              </a:spcAft>
-              <a:buNone/>
-            </a:pPr>
-            <a:r>
-              <a:rPr lang="en-US" sz="1700" dirty="0">
-                <a:solidFill>
-                  <a:schemeClr val="tx1"/>
-                </a:solidFill>
-              </a:rPr>
-              <a:t>Scale: the 11 bp motif and the whole peak are worth the same to both classes, but replacing the 170 bp element costs a Dynamic site 0.24 less — what you expect when the dependence is spread wider. Partner: age-gained sites lack a MEF2 abutting the motif, 5.6% against 13.7% of matched controls.</a:t>
-            </a:r>
-            <a:endParaRPr lang="en-US" sz="1700" dirty="0"/>
-          </a:p>
-          <a:p>
-            <a:pPr algn="l" indent="0" marL="0">
-              <a:buNone/>
-            </a:pPr>
-            <a:r>
-              <a:rPr lang="en-US" sz="1900" b="1" dirty="0">
-                <a:solidFill>
-                  <a:schemeClr val="tx1"/>
-                </a:solidFill>
-              </a:rPr>
-              <a:t>That is why it fluctuates</a:t>
-            </a:r>
-            <a:endParaRPr lang="en-US" sz="1700" dirty="0"/>
-          </a:p>
-          <a:p>
-            <a:pPr algn="l" indent="0" marL="0">
-              <a:spcAft>
-                <a:spcPts val="1500"/>
-              </a:spcAft>
-              <a:buNone/>
-            </a:pPr>
-            <a:r>
-              <a:rPr lang="en-US" sz="1700" dirty="0">
-                <a:solidFill>
-                  <a:schemeClr val="tx1"/>
-                </a:solidFill>
-              </a:rPr>
-              <a:t>A weak motif with no close MEF2 to hold it sits near the occupancy threshold, so its binding tracks how much AP-1 protein is available — which is what ageing changes.</a:t>
-            </a:r>
-            <a:endParaRPr lang="en-US" sz="1700" dirty="0"/>
-          </a:p>
-          <a:p>
-            <a:pPr algn="l" indent="0" marL="0">
-              <a:buNone/>
-            </a:pPr>
-            <a:r>
-              <a:rPr lang="en-US" sz="1900" b="1" dirty="0">
-                <a:solidFill>
-                  <a:schemeClr val="tx1"/>
-                </a:solidFill>
-              </a:rPr>
-              <a:t>Gain and loss are different events</a:t>
-            </a:r>
-            <a:endParaRPr lang="en-US" sz="1700" dirty="0"/>
-          </a:p>
-          <a:p>
-            <a:pPr algn="l" indent="0" marL="0">
-              <a:buNone/>
-            </a:pPr>
-            <a:r>
-              <a:rPr lang="en-US" sz="1700" dirty="0">
-                <a:solidFill>
-                  <a:schemeClr val="tx1"/>
-                </a:solidFill>
-              </a:rPr>
-              <a:t>Age-gained sites have better cores and read AP-1 dosage more sharply. Age-lost sites show no sequence signature of their own.</a:t>
-            </a:r>
-            <a:endParaRPr lang="en-US" sz="1700" dirty="0"/>
+              <a:buNone/>
+            </a:pPr>
+            <a:r>
+              <a:rPr lang="en-US" sz="1500" dirty="0">
+                <a:solidFill>
+                  <a:srgbClr val="111111"/>
+                </a:solidFill>
+              </a:rPr>
+              <a:t>two assays, different cell types and readouts, both put the AP-1 motif under a tenth of its 170 bp surroundings</a:t>
+            </a:r>
+            <a:endParaRPr lang="en-US" sz="1500" dirty="0"/>
           </a:p>
         </p:txBody>
       </p:sp>
@@ -4946,7 +5954,7 @@
                   <a:schemeClr val="tx1"/>
                 </a:solidFill>
               </a:rPr>
-              <a:t>Where this goes next</a:t>
+              <a:t>What this changes</a:t>
             </a:r>
             <a:endParaRPr lang="en-US" sz="2800" dirty="0"/>
           </a:p>
@@ -4984,14 +5992,14 @@
                   <a:schemeClr val="tx1"/>
                 </a:solidFill>
               </a:rPr>
-              <a:t>Fine-tuned condition-aware head</a:t>
+              <a:t>A responsive AP-1 site is a marginal one, not a differently-built one</a:t>
             </a:r>
             <a:endParaRPr lang="en-US" sz="1700" dirty="0"/>
           </a:p>
           <a:p>
             <a:pPr algn="l" indent="0" marL="0">
               <a:spcAft>
-                <a:spcPts val="1400"/>
+                <a:spcPts val="1500"/>
               </a:spcAft>
               <a:buNone/>
             </a:pPr>
@@ -5001,7 +6009,7 @@
                   <a:schemeClr val="tx1"/>
                 </a:solidFill>
               </a:rPr>
-              <a:t>A frozen-trunk probe on our own cardiomyocyte and fibroblast ATAC already reaches profile r = 0.65 against 0.59 for the built-in heart head, training 0.01% of the model. Next: 1 bp insertion targets, then LoRA.</a:t>
+              <a:t>Weaker AP-1 motif, fewer AP-1 motifs around it, and its dependence spread thinly across the element instead of anchored on the motif. The same partners matter, in the same order, in every class.</a:t>
             </a:r>
             <a:endParaRPr lang="en-US" sz="1700" dirty="0"/>
           </a:p>
@@ -5015,14 +6023,14 @@
                   <a:schemeClr val="tx1"/>
                 </a:solidFill>
               </a:rPr>
-              <a:t>Does AP-1 activity actually rise with age?</a:t>
+              <a:t>Two things survive matching, and only two</a:t>
             </a:r>
             <a:endParaRPr lang="en-US" sz="1700" dirty="0"/>
           </a:p>
           <a:p>
             <a:pPr algn="l" indent="0" marL="0">
               <a:spcAft>
-                <a:spcPts val="1400"/>
+                <a:spcPts val="1500"/>
               </a:spcAft>
               <a:buNone/>
             </a:pPr>
@@ -5032,7 +6040,7 @@
                   <a:schemeClr val="tx1"/>
                 </a:solidFill>
               </a:rPr>
-              <a:t>The mass-action reading rests on it. One check against the RNA.</a:t>
+              <a:t>Scale: the 11 bp motif and the whole peak are worth the same to both classes, but replacing the 170 bp element costs a Dynamic site 0.24 less — what you expect when the dependence is spread wider. Partner: age-gained sites lack a MEF2 abutting the motif, 5.6% against 13.7% of matched controls.</a:t>
             </a:r>
             <a:endParaRPr lang="en-US" sz="1700" dirty="0"/>
           </a:p>
@@ -5046,12 +6054,15 @@
                   <a:schemeClr val="tx1"/>
                 </a:solidFill>
               </a:rPr>
-              <a:t>Fibroblast scan</a:t>
+              <a:t>That is why it fluctuates</a:t>
             </a:r>
             <a:endParaRPr lang="en-US" sz="1700" dirty="0"/>
           </a:p>
           <a:p>
             <a:pPr algn="l" indent="0" marL="0">
+              <a:spcAft>
+                <a:spcPts val="1500"/>
+              </a:spcAft>
               <a:buNone/>
             </a:pPr>
             <a:r>
@@ -5060,7 +6071,35 @@
                   <a:schemeClr val="tx1"/>
                 </a:solidFill>
               </a:rPr>
-              <a:t>If MEF2 also tops the partner ranking in fibroblasts, the ranking is a model artefact rather than cardiac biology. This is the sharpest available control.</a:t>
+              <a:t>A weak motif with no close MEF2 to hold it sits near the occupancy threshold, so its binding tracks how much AP-1 protein is available — which is what ageing changes.</a:t>
+            </a:r>
+            <a:endParaRPr lang="en-US" sz="1700" dirty="0"/>
+          </a:p>
+          <a:p>
+            <a:pPr algn="l" indent="0" marL="0">
+              <a:buNone/>
+            </a:pPr>
+            <a:r>
+              <a:rPr lang="en-US" sz="1900" b="1" dirty="0">
+                <a:solidFill>
+                  <a:schemeClr val="tx1"/>
+                </a:solidFill>
+              </a:rPr>
+              <a:t>Gain and loss are different events</a:t>
+            </a:r>
+            <a:endParaRPr lang="en-US" sz="1700" dirty="0"/>
+          </a:p>
+          <a:p>
+            <a:pPr algn="l" indent="0" marL="0">
+              <a:buNone/>
+            </a:pPr>
+            <a:r>
+              <a:rPr lang="en-US" sz="1700" dirty="0">
+                <a:solidFill>
+                  <a:schemeClr val="tx1"/>
+                </a:solidFill>
+              </a:rPr>
+              <a:t>Age-gained sites have better cores and read AP-1 dosage more sharply. Age-lost sites show no sequence signature of their own.</a:t>
             </a:r>
             <a:endParaRPr lang="en-US" sz="1700" dirty="0"/>
           </a:p>
@@ -5106,6 +6145,228 @@
             <a:fld id="{F7021451-1387-4CA6-816F-3879F97B5CBC}" type="slidenum">
               <a:rPr b="0" lang="en-US"/>
               <a:t>14</a:t>
+            </a:fld>
+            <a:endParaRPr lang="en-US"/>
+          </a:p>
+        </p:txBody>
+      </p:sp>
+    </p:spTree>
+  </p:cSld>
+  <p:clrMapOvr>
+    <a:masterClrMapping/>
+  </p:clrMapOvr>
+</p:sld>
+</file>
+
+<file path=ppt/slides/slide15.xml><?xml version="1.0" encoding="utf-8"?>
+<p:sld xmlns:a="http://schemas.openxmlformats.org/drawingml/2006/main" xmlns:r="http://schemas.openxmlformats.org/officeDocument/2006/relationships" xmlns:p="http://schemas.openxmlformats.org/presentationml/2006/main">
+  <p:cSld name="Slide 15">
+    <p:spTree>
+      <p:nvGrpSpPr>
+        <p:cNvPr id="1" name=""/>
+        <p:cNvGrpSpPr/>
+        <p:nvPr/>
+      </p:nvGrpSpPr>
+      <p:grpSpPr>
+        <a:xfrm>
+          <a:off x="0" y="0"/>
+          <a:ext cx="0" cy="0"/>
+          <a:chOff x="0" y="0"/>
+          <a:chExt cx="0" cy="0"/>
+        </a:xfrm>
+      </p:grpSpPr>
+      <p:sp>
+        <p:nvSpPr>
+          <p:cNvPr id="2" name="Text 0"/>
+          <p:cNvSpPr/>
+          <p:nvPr>
+            <p:ph idx="100" type="title" hasCustomPrompt="1"/>
+          </p:nvPr>
+        </p:nvSpPr>
+        <p:spPr>
+          <a:xfrm>
+            <a:off x="502920" y="301752"/>
+            <a:ext cx="11155680" cy="685800"/>
+          </a:xfrm>
+          <a:prstGeom prst="rect">
+            <a:avLst/>
+          </a:prstGeom>
+          <a:noFill/>
+          <a:ln/>
+        </p:spPr>
+        <p:txBody>
+          <a:bodyPr wrap="square" rtlCol="0" anchor="ctr"/>
+          <a:lstStyle/>
+          <a:p>
+            <a:pPr algn="l" indent="0" marL="0">
+              <a:buNone/>
+            </a:pPr>
+            <a:r>
+              <a:rPr lang="en-US" sz="2800" b="1" dirty="0">
+                <a:solidFill>
+                  <a:schemeClr val="tx1"/>
+                </a:solidFill>
+              </a:rPr>
+              <a:t>Where this goes next</a:t>
+            </a:r>
+            <a:endParaRPr lang="en-US" sz="2800" dirty="0"/>
+          </a:p>
+        </p:txBody>
+      </p:sp>
+      <p:sp>
+        <p:nvSpPr>
+          <p:cNvPr id="3" name="Text 0"/>
+          <p:cNvSpPr/>
+          <p:nvPr>
+            <p:ph idx="101" type="body" hasCustomPrompt="1"/>
+          </p:nvPr>
+        </p:nvSpPr>
+        <p:spPr>
+          <a:xfrm>
+            <a:off x="502920" y="1234440"/>
+            <a:ext cx="11155680" cy="5120640"/>
+          </a:xfrm>
+          <a:prstGeom prst="rect">
+            <a:avLst/>
+          </a:prstGeom>
+          <a:noFill/>
+          <a:ln/>
+        </p:spPr>
+        <p:txBody>
+          <a:bodyPr wrap="square" rtlCol="0" anchor="t"/>
+          <a:lstStyle/>
+          <a:p>
+            <a:pPr algn="l" indent="0" marL="0">
+              <a:buNone/>
+            </a:pPr>
+            <a:r>
+              <a:rPr lang="en-US" sz="1900" b="1" dirty="0">
+                <a:solidFill>
+                  <a:schemeClr val="tx1"/>
+                </a:solidFill>
+              </a:rPr>
+              <a:t>Fine-tuned condition-aware head</a:t>
+            </a:r>
+            <a:endParaRPr lang="en-US" sz="1700" dirty="0"/>
+          </a:p>
+          <a:p>
+            <a:pPr algn="l" indent="0" marL="0">
+              <a:spcAft>
+                <a:spcPts val="1400"/>
+              </a:spcAft>
+              <a:buNone/>
+            </a:pPr>
+            <a:r>
+              <a:rPr lang="en-US" sz="1700" dirty="0">
+                <a:solidFill>
+                  <a:schemeClr val="tx1"/>
+                </a:solidFill>
+              </a:rPr>
+              <a:t>A frozen-trunk probe on our own cardiomyocyte and fibroblast ATAC already reaches profile r = 0.65 against 0.59 for the built-in heart head, training 0.01% of the model. Next: 1 bp insertion targets, then LoRA.</a:t>
+            </a:r>
+            <a:endParaRPr lang="en-US" sz="1700" dirty="0"/>
+          </a:p>
+          <a:p>
+            <a:pPr algn="l" indent="0" marL="0">
+              <a:buNone/>
+            </a:pPr>
+            <a:r>
+              <a:rPr lang="en-US" sz="1900" b="1" dirty="0">
+                <a:solidFill>
+                  <a:schemeClr val="tx1"/>
+                </a:solidFill>
+              </a:rPr>
+              <a:t>Does AP-1 activity actually rise with age?</a:t>
+            </a:r>
+            <a:endParaRPr lang="en-US" sz="1700" dirty="0"/>
+          </a:p>
+          <a:p>
+            <a:pPr algn="l" indent="0" marL="0">
+              <a:spcAft>
+                <a:spcPts val="1400"/>
+              </a:spcAft>
+              <a:buNone/>
+            </a:pPr>
+            <a:r>
+              <a:rPr lang="en-US" sz="1700" dirty="0">
+                <a:solidFill>
+                  <a:schemeClr val="tx1"/>
+                </a:solidFill>
+              </a:rPr>
+              <a:t>The mass-action reading rests on it. One check against the RNA.</a:t>
+            </a:r>
+            <a:endParaRPr lang="en-US" sz="1700" dirty="0"/>
+          </a:p>
+          <a:p>
+            <a:pPr algn="l" indent="0" marL="0">
+              <a:buNone/>
+            </a:pPr>
+            <a:r>
+              <a:rPr lang="en-US" sz="1900" b="1" dirty="0">
+                <a:solidFill>
+                  <a:schemeClr val="tx1"/>
+                </a:solidFill>
+              </a:rPr>
+              <a:t>Fibroblast scan</a:t>
+            </a:r>
+            <a:endParaRPr lang="en-US" sz="1700" dirty="0"/>
+          </a:p>
+          <a:p>
+            <a:pPr algn="l" indent="0" marL="0">
+              <a:buNone/>
+            </a:pPr>
+            <a:r>
+              <a:rPr lang="en-US" sz="1700" dirty="0">
+                <a:solidFill>
+                  <a:schemeClr val="tx1"/>
+                </a:solidFill>
+              </a:rPr>
+              <a:t>If MEF2 also tops the partner ranking in fibroblasts, the ranking is a model artefact rather than cardiac biology. This is the sharpest available control.</a:t>
+            </a:r>
+            <a:endParaRPr lang="en-US" sz="1700" dirty="0"/>
+          </a:p>
+        </p:txBody>
+      </p:sp>
+      <p:sp>
+        <p:nvSpPr>
+          <p:cNvPr id="25" name="Slide Number Placeholder 0"/>
+          <p:cNvSpPr>
+            <a:spLocks noGrp="1"/>
+          </p:cNvSpPr>
+          <p:nvPr>
+            <p:ph type="sldNum" sz="quarter" idx="4294967295"/>
+          </p:nvPr>
+        </p:nvSpPr>
+        <p:spPr>
+          <a:xfrm>
+            <a:off x="11658600" y="6446520"/>
+            <a:ext cx="800000" cy="300000"/>
+          </a:xfrm>
+          <a:prstGeom prst="rect">
+            <a:avLst/>
+          </a:prstGeom>
+          <a:extLst>
+            <a:ext uri="{C572A759-6A51-4108-AA02-DFA0A04FC94B}">
+              <ma14:wrappingTextBoxFlag xmlns:ma14="http://schemas.microsoft.com/office/mac/drawingml/2011/main" val="0"/>
+            </a:ext>
+          </a:extLst>
+        </p:spPr>
+        <p:txBody>
+          <a:bodyPr/>
+          <a:lstStyle>
+            <a:lvl1pPr>
+              <a:defRPr sz="1000">
+                <a:solidFill>
+                  <a:srgbClr val="A6A6A6"/>
+                </a:solidFill>
+              </a:defRPr>
+            </a:lvl1pPr>
+          </a:lstStyle>
+          <a:p>
+            <a:pPr algn="l"/>
+            <a:fld id="{F7021451-1387-4CA6-816F-3879F97B5CBC}" type="slidenum">
+              <a:rPr b="0" lang="en-US"/>
+              <a:t>15</a:t>
             </a:fld>
             <a:endParaRPr lang="en-US"/>
           </a:p>
@@ -9299,15 +10560,87 @@
                   <a:schemeClr val="tx1"/>
                 </a:solidFill>
               </a:rPr>
-              <a:t>The same contrast at one pair of promoters</a:t>
+              <a:t>Is the partner missing, or just worth less?</a:t>
             </a:r>
             <a:endParaRPr lang="en-US" sz="2800" dirty="0"/>
+          </a:p>
+        </p:txBody>
+      </p:sp>
+      <p:sp>
+        <p:nvSpPr>
+          <p:cNvPr id="3" name="or-intro"/>
+          <p:cNvSpPr txBox="1"/>
+          <p:nvPr/>
+        </p:nvSpPr>
+        <p:spPr>
+          <a:xfrm>
+            <a:off x="731520" y="1005840"/>
+            <a:ext cx="10881360" cy="420624"/>
+          </a:xfrm>
+          <a:prstGeom prst="rect">
+            <a:avLst/>
+          </a:prstGeom>
+          <a:noFill/>
+          <a:ln/>
+        </p:spPr>
+        <p:txBody>
+          <a:bodyPr wrap="square" lIns="0" tIns="0" rIns="0" bIns="0" rtlCol="0" anchor="ctr"/>
+          <a:lstStyle/>
+          <a:p>
+            <a:pPr indent="0" marL="0">
+              <a:buNone/>
+            </a:pPr>
+            <a:r>
+              <a:rPr lang="en-US" sz="1150" dirty="0">
+                <a:solidFill>
+                  <a:srgbClr val="595959"/>
+                </a:solidFill>
+              </a:rPr>
+              <a:t>Rank the 60 windows within each element, take the three most damaging, and ask whether any covers that family’s footprint. A within-element question, so a class with less total dependence is not penalised for it.</a:t>
+            </a:r>
+            <a:endParaRPr lang="en-US" sz="1150" dirty="0"/>
+          </a:p>
+        </p:txBody>
+      </p:sp>
+      <p:sp>
+        <p:nvSpPr>
+          <p:cNvPr id="4" name="or-t1"/>
+          <p:cNvSpPr txBox="1"/>
+          <p:nvPr/>
+        </p:nvSpPr>
+        <p:spPr>
+          <a:xfrm>
+            <a:off x="731520" y="1517904"/>
+            <a:ext cx="3383280" cy="256032"/>
+          </a:xfrm>
+          <a:prstGeom prst="rect">
+            <a:avLst/>
+          </a:prstGeom>
+          <a:noFill/>
+          <a:ln/>
+        </p:spPr>
+        <p:txBody>
+          <a:bodyPr wrap="square" lIns="0" tIns="0" rIns="0" bIns="0" rtlCol="0" anchor="ctr"/>
+          <a:lstStyle/>
+          <a:p>
+            <a:pPr indent="0" marL="0">
+              <a:buNone/>
+            </a:pPr>
+            <a:r>
+              <a:rPr lang="en-US" sz="1300" b="1" dirty="0">
+                <a:solidFill>
+                  <a:srgbClr val="111111"/>
+                </a:solidFill>
+              </a:rPr>
+              <a:t>MEF2, all sites</a:t>
+            </a:r>
+            <a:endParaRPr lang="en-US" sz="1300" dirty="0"/>
           </a:p>
         </p:txBody>
       </p:sp>
       <p:pic>
         <p:nvPicPr>
-          <p:cNvPr id="3" name="Image 0" descr="/Users/z5162865/WongLab/AlphaGenome_Ap1/Analysis/example_track/example_scan_track.png">    </p:cNvPr>
+          <p:cNvPr id="5" name="Image 0" descr="/Users/z5162865/WongLab/AlphaGenome_Ap1/Analysis/slide_figures/panels/s10_mef2_all.png">    </p:cNvPr>
           <p:cNvPicPr>
             <a:picLocks noChangeAspect="1"/>
           </p:cNvPicPr>
@@ -9321,8 +10654,8 @@
         </p:blipFill>
         <p:spPr>
           <a:xfrm>
-            <a:off x="1202961" y="1051560"/>
-            <a:ext cx="9755599" cy="4754880"/>
+            <a:off x="731520" y="1875737"/>
+            <a:ext cx="3383280" cy="2649327"/>
           </a:xfrm>
           <a:prstGeom prst="rect">
             <a:avLst/>
@@ -9331,7 +10664,407 @@
       </p:pic>
       <p:sp>
         <p:nvSpPr>
-          <p:cNvPr id="4" name="Text 0"/>
+          <p:cNvPr id="6" name="or-t2"/>
+          <p:cNvSpPr txBox="1"/>
+          <p:nvPr/>
+        </p:nvSpPr>
+        <p:spPr>
+          <a:xfrm>
+            <a:off x="4434840" y="1517904"/>
+            <a:ext cx="3383280" cy="256032"/>
+          </a:xfrm>
+          <a:prstGeom prst="rect">
+            <a:avLst/>
+          </a:prstGeom>
+          <a:noFill/>
+          <a:ln/>
+        </p:spPr>
+        <p:txBody>
+          <a:bodyPr wrap="square" lIns="0" tIns="0" rIns="0" bIns="0" rtlCol="0" anchor="ctr"/>
+          <a:lstStyle/>
+          <a:p>
+            <a:pPr indent="0" marL="0">
+              <a:buNone/>
+            </a:pPr>
+            <a:r>
+              <a:rPr lang="en-US" sz="1300" b="1" dirty="0">
+                <a:solidFill>
+                  <a:srgbClr val="111111"/>
+                </a:solidFill>
+              </a:rPr>
+              <a:t>MEF2, context-matched</a:t>
+            </a:r>
+            <a:endParaRPr lang="en-US" sz="1300" dirty="0"/>
+          </a:p>
+        </p:txBody>
+      </p:sp>
+      <p:pic>
+        <p:nvPicPr>
+          <p:cNvPr id="7" name="Image 1" descr="/Users/z5162865/WongLab/AlphaGenome_Ap1/Analysis/slide_figures/panels/s10_mef2_matched.png">    </p:cNvPr>
+          <p:cNvPicPr>
+            <a:picLocks noChangeAspect="1"/>
+          </p:cNvPicPr>
+          <p:nvPr/>
+        </p:nvPicPr>
+        <p:blipFill>
+          <a:blip r:embed="rId2"/>
+          <a:stretch>
+            <a:fillRect/>
+          </a:stretch>
+        </p:blipFill>
+        <p:spPr>
+          <a:xfrm>
+            <a:off x="4434840" y="1875737"/>
+            <a:ext cx="3383280" cy="2649327"/>
+          </a:xfrm>
+          <a:prstGeom prst="rect">
+            <a:avLst/>
+          </a:prstGeom>
+        </p:spPr>
+      </p:pic>
+      <p:sp>
+        <p:nvSpPr>
+          <p:cNvPr id="8" name="lg-dot-5.08-0"/>
+          <p:cNvSpPr/>
+          <p:nvPr/>
+        </p:nvSpPr>
+        <p:spPr>
+          <a:xfrm>
+            <a:off x="731520" y="4686300"/>
+            <a:ext cx="109728" cy="109728"/>
+          </a:xfrm>
+          <a:prstGeom prst="ellipse">
+            <a:avLst/>
+          </a:prstGeom>
+          <a:solidFill>
+            <a:srgbClr val="C2551C"/>
+          </a:solidFill>
+          <a:ln w="12700">
+            <a:solidFill>
+              <a:srgbClr val="C2551C"/>
+            </a:solidFill>
+            <a:prstDash val="solid"/>
+          </a:ln>
+        </p:spPr>
+      </p:sp>
+      <p:sp>
+        <p:nvSpPr>
+          <p:cNvPr id="9" name="lg-txt-5.08-0"/>
+          <p:cNvSpPr txBox="1"/>
+          <p:nvPr/>
+        </p:nvSpPr>
+        <p:spPr>
+          <a:xfrm>
+            <a:off x="886968" y="4645152"/>
+            <a:ext cx="2307946" cy="201168"/>
+          </a:xfrm>
+          <a:prstGeom prst="rect">
+            <a:avLst/>
+          </a:prstGeom>
+          <a:noFill/>
+          <a:ln/>
+        </p:spPr>
+        <p:txBody>
+          <a:bodyPr wrap="square" lIns="0" tIns="0" rIns="0" bIns="0" rtlCol="0" anchor="ctr"/>
+          <a:lstStyle/>
+          <a:p>
+            <a:pPr indent="0" marL="0">
+              <a:buNone/>
+            </a:pPr>
+            <a:r>
+              <a:rPr lang="en-US" sz="1050" dirty="0">
+                <a:solidFill>
+                  <a:srgbClr val="111111"/>
+                </a:solidFill>
+              </a:rPr>
+              <a:t>does the element have one at all</a:t>
+            </a:r>
+            <a:endParaRPr lang="en-US" sz="1050" dirty="0"/>
+          </a:p>
+        </p:txBody>
+      </p:sp>
+      <p:sp>
+        <p:nvSpPr>
+          <p:cNvPr id="10" name="lg-dot-5.08-1"/>
+          <p:cNvSpPr/>
+          <p:nvPr/>
+        </p:nvSpPr>
+        <p:spPr>
+          <a:xfrm>
+            <a:off x="3304642" y="4686300"/>
+            <a:ext cx="109728" cy="109728"/>
+          </a:xfrm>
+          <a:prstGeom prst="ellipse">
+            <a:avLst/>
+          </a:prstGeom>
+          <a:solidFill>
+            <a:srgbClr val="4F4F4F"/>
+          </a:solidFill>
+          <a:ln w="12700">
+            <a:solidFill>
+              <a:srgbClr val="4F4F4F"/>
+            </a:solidFill>
+            <a:prstDash val="solid"/>
+          </a:ln>
+        </p:spPr>
+      </p:sp>
+      <p:sp>
+        <p:nvSpPr>
+          <p:cNvPr id="11" name="lg-txt-5.08-1"/>
+          <p:cNvSpPr txBox="1"/>
+          <p:nvPr/>
+        </p:nvSpPr>
+        <p:spPr>
+          <a:xfrm>
+            <a:off x="3460090" y="4645152"/>
+            <a:ext cx="2373782" cy="201168"/>
+          </a:xfrm>
+          <a:prstGeom prst="rect">
+            <a:avLst/>
+          </a:prstGeom>
+          <a:noFill/>
+          <a:ln/>
+        </p:spPr>
+        <p:txBody>
+          <a:bodyPr wrap="square" lIns="0" tIns="0" rIns="0" bIns="0" rtlCol="0" anchor="ctr"/>
+          <a:lstStyle/>
+          <a:p>
+            <a:pPr indent="0" marL="0">
+              <a:buNone/>
+            </a:pPr>
+            <a:r>
+              <a:rPr lang="en-US" sz="1050" dirty="0">
+                <a:solidFill>
+                  <a:srgbClr val="111111"/>
+                </a:solidFill>
+              </a:rPr>
+              <a:t>when it has one, is it ranked top</a:t>
+            </a:r>
+            <a:endParaRPr lang="en-US" sz="1050" dirty="0"/>
+          </a:p>
+        </p:txBody>
+      </p:sp>
+      <p:sp>
+        <p:nvSpPr>
+          <p:cNvPr id="12" name="or-t3"/>
+          <p:cNvSpPr txBox="1"/>
+          <p:nvPr/>
+        </p:nvSpPr>
+        <p:spPr>
+          <a:xfrm>
+            <a:off x="8183880" y="1517904"/>
+            <a:ext cx="3474720" cy="256032"/>
+          </a:xfrm>
+          <a:prstGeom prst="rect">
+            <a:avLst/>
+          </a:prstGeom>
+          <a:noFill/>
+          <a:ln/>
+        </p:spPr>
+        <p:txBody>
+          <a:bodyPr wrap="square" lIns="0" tIns="0" rIns="0" bIns="0" rtlCol="0" anchor="ctr"/>
+          <a:lstStyle/>
+          <a:p>
+            <a:pPr indent="0" marL="0">
+              <a:buNone/>
+            </a:pPr>
+            <a:r>
+              <a:rPr lang="en-US" sz="1300" b="1" dirty="0">
+                <a:solidFill>
+                  <a:srgbClr val="111111"/>
+                </a:solidFill>
+              </a:rPr>
+              <a:t>A second AP-1 footprint, when present</a:t>
+            </a:r>
+            <a:endParaRPr lang="en-US" sz="1300" dirty="0"/>
+          </a:p>
+        </p:txBody>
+      </p:sp>
+      <p:pic>
+        <p:nvPicPr>
+          <p:cNvPr id="13" name="Image 2" descr="/Users/z5162865/WongLab/AlphaGenome_Ap1/Analysis/slide_figures/panels/s10_ap1.png">    </p:cNvPr>
+          <p:cNvPicPr>
+            <a:picLocks noChangeAspect="1"/>
+          </p:cNvPicPr>
+          <p:nvPr/>
+        </p:nvPicPr>
+        <p:blipFill>
+          <a:blip r:embed="rId3"/>
+          <a:stretch>
+            <a:fillRect/>
+          </a:stretch>
+        </p:blipFill>
+        <p:spPr>
+          <a:xfrm>
+            <a:off x="8183880" y="1839935"/>
+            <a:ext cx="3474720" cy="2720930"/>
+          </a:xfrm>
+          <a:prstGeom prst="rect">
+            <a:avLst/>
+          </a:prstGeom>
+        </p:spPr>
+      </p:pic>
+      <p:sp>
+        <p:nvSpPr>
+          <p:cNvPr id="14" name="lg-dot-5.08-0"/>
+          <p:cNvSpPr/>
+          <p:nvPr/>
+        </p:nvSpPr>
+        <p:spPr>
+          <a:xfrm>
+            <a:off x="8183880" y="4686300"/>
+            <a:ext cx="109728" cy="109728"/>
+          </a:xfrm>
+          <a:prstGeom prst="ellipse">
+            <a:avLst/>
+          </a:prstGeom>
+          <a:solidFill>
+            <a:srgbClr val="2E7D32"/>
+          </a:solidFill>
+          <a:ln w="12700">
+            <a:solidFill>
+              <a:srgbClr val="2E7D32"/>
+            </a:solidFill>
+            <a:prstDash val="solid"/>
+          </a:ln>
+        </p:spPr>
+      </p:sp>
+      <p:sp>
+        <p:nvSpPr>
+          <p:cNvPr id="15" name="lg-txt-5.08-0"/>
+          <p:cNvSpPr txBox="1"/>
+          <p:nvPr/>
+        </p:nvSpPr>
+        <p:spPr>
+          <a:xfrm>
+            <a:off x="8339328" y="4645152"/>
+            <a:ext cx="793699" cy="201168"/>
+          </a:xfrm>
+          <a:prstGeom prst="rect">
+            <a:avLst/>
+          </a:prstGeom>
+          <a:noFill/>
+          <a:ln/>
+        </p:spPr>
+        <p:txBody>
+          <a:bodyPr wrap="square" lIns="0" tIns="0" rIns="0" bIns="0" rtlCol="0" anchor="ctr"/>
+          <a:lstStyle/>
+          <a:p>
+            <a:pPr indent="0" marL="0">
+              <a:buNone/>
+            </a:pPr>
+            <a:r>
+              <a:rPr lang="en-US" sz="1050" dirty="0">
+                <a:solidFill>
+                  <a:srgbClr val="111111"/>
+                </a:solidFill>
+              </a:rPr>
+              <a:t>all sites</a:t>
+            </a:r>
+            <a:endParaRPr lang="en-US" sz="1050" dirty="0"/>
+          </a:p>
+        </p:txBody>
+      </p:sp>
+      <p:sp>
+        <p:nvSpPr>
+          <p:cNvPr id="16" name="lg-dot-5.08-1"/>
+          <p:cNvSpPr/>
+          <p:nvPr/>
+        </p:nvSpPr>
+        <p:spPr>
+          <a:xfrm>
+            <a:off x="9242755" y="4686300"/>
+            <a:ext cx="109728" cy="109728"/>
+          </a:xfrm>
+          <a:prstGeom prst="ellipse">
+            <a:avLst/>
+          </a:prstGeom>
+          <a:solidFill>
+            <a:srgbClr val="B3B2AE"/>
+          </a:solidFill>
+          <a:ln w="12700">
+            <a:solidFill>
+              <a:srgbClr val="B3B2AE"/>
+            </a:solidFill>
+            <a:prstDash val="solid"/>
+          </a:ln>
+        </p:spPr>
+      </p:sp>
+      <p:sp>
+        <p:nvSpPr>
+          <p:cNvPr id="17" name="lg-txt-5.08-1"/>
+          <p:cNvSpPr txBox="1"/>
+          <p:nvPr/>
+        </p:nvSpPr>
+        <p:spPr>
+          <a:xfrm>
+            <a:off x="9398203" y="4645152"/>
+            <a:ext cx="662026" cy="201168"/>
+          </a:xfrm>
+          <a:prstGeom prst="rect">
+            <a:avLst/>
+          </a:prstGeom>
+          <a:noFill/>
+          <a:ln/>
+        </p:spPr>
+        <p:txBody>
+          <a:bodyPr wrap="square" lIns="0" tIns="0" rIns="0" bIns="0" rtlCol="0" anchor="ctr"/>
+          <a:lstStyle/>
+          <a:p>
+            <a:pPr indent="0" marL="0">
+              <a:buNone/>
+            </a:pPr>
+            <a:r>
+              <a:rPr lang="en-US" sz="1050" dirty="0">
+                <a:solidFill>
+                  <a:srgbClr val="111111"/>
+                </a:solidFill>
+              </a:rPr>
+              <a:t>matched</a:t>
+            </a:r>
+            <a:endParaRPr lang="en-US" sz="1050" dirty="0"/>
+          </a:p>
+        </p:txBody>
+      </p:sp>
+      <p:sp>
+        <p:nvSpPr>
+          <p:cNvPr id="18" name="or-key"/>
+          <p:cNvSpPr txBox="1"/>
+          <p:nvPr/>
+        </p:nvSpPr>
+        <p:spPr>
+          <a:xfrm>
+            <a:off x="731520" y="4983480"/>
+            <a:ext cx="10881360" cy="548640"/>
+          </a:xfrm>
+          <a:prstGeom prst="rect">
+            <a:avLst/>
+          </a:prstGeom>
+          <a:noFill/>
+          <a:ln/>
+        </p:spPr>
+        <p:txBody>
+          <a:bodyPr wrap="square" lIns="0" tIns="0" rIns="0" bIns="0" rtlCol="0" anchor="ctr"/>
+          <a:lstStyle/>
+          <a:p>
+            <a:pPr indent="0" marL="0">
+              <a:buNone/>
+            </a:pPr>
+            <a:r>
+              <a:rPr lang="en-US" sz="950" dirty="0">
+                <a:solidFill>
+                  <a:srgbClr val="595959"/>
+                </a:solidFill>
+              </a:rPr>
+              <a:t>odds ratio against all Stable sites or against each class’s own matched controls, with 95% CI; dotted line = no difference.   MEF2 unconditional on all sites: Age Up 0.45, Exercise Down 0.56, Dynamic 0.58, all FDR ≤ 0.005.   AP-1 given present, all sites: Dynamic 1.45, FDR 0.036.</a:t>
+            </a:r>
+            <a:endParaRPr lang="en-US" sz="950" dirty="0"/>
+          </a:p>
+        </p:txBody>
+      </p:sp>
+      <p:sp>
+        <p:nvSpPr>
+          <p:cNvPr id="19" name="Text 0"/>
           <p:cNvSpPr/>
           <p:nvPr>
             <p:ph idx="101" type="body" hasCustomPrompt="1"/>
@@ -9372,7 +11105,7 @@
                   <a:srgbClr val="111111"/>
                 </a:solidFill>
               </a:rPr>
-              <a:t>the stable site has MEF2 abutting its AP-1 motif at 19 bp; the age-gained site has no MEF2 anywhere in the element</a:t>
+              <a:t>the MEF2 deficit is about having one, not about how it is ranked — and responsive elements lean more on a second AP-1 site when they have one</a:t>
             </a:r>
             <a:endParaRPr lang="en-US" sz="1500" dirty="0"/>
           </a:p>
@@ -9480,7 +11213,7 @@
                   <a:schemeClr val="tx1"/>
                 </a:solidFill>
               </a:rPr>
-              <a:t>Responsive sites spread their dependence out</a:t>
+              <a:t>The same contrast at one pair of promoters</a:t>
             </a:r>
             <a:endParaRPr lang="en-US" sz="2800" dirty="0"/>
           </a:p>
@@ -9488,7 +11221,7 @@
       </p:sp>
       <p:pic>
         <p:nvPicPr>
-          <p:cNvPr id="3" name="Image 0" descr="/Users/z5162865/WongLab/AlphaGenome_Ap1/Analysis/slide_figures/panels/d_profile.png">    </p:cNvPr>
+          <p:cNvPr id="3" name="Image 0" descr="/Users/z5162865/WongLab/AlphaGenome_Ap1/Analysis/example_track/example_scan_track.png">    </p:cNvPr>
           <p:cNvPicPr>
             <a:picLocks noChangeAspect="1"/>
           </p:cNvPicPr>
@@ -9502,8 +11235,8 @@
         </p:blipFill>
         <p:spPr>
           <a:xfrm>
-            <a:off x="502920" y="1373869"/>
-            <a:ext cx="2286000" cy="1915702"/>
+            <a:off x="1202961" y="1051560"/>
+            <a:ext cx="9755599" cy="4754880"/>
           </a:xfrm>
           <a:prstGeom prst="rect">
             <a:avLst/>
@@ -9512,997 +11245,7 @@
       </p:pic>
       <p:sp>
         <p:nvSpPr>
-          <p:cNvPr id="4" name="profile-caption"/>
-          <p:cNvSpPr txBox="1"/>
-          <p:nvPr/>
-        </p:nvSpPr>
-        <p:spPr>
-          <a:xfrm>
-            <a:off x="502920" y="3337560"/>
-            <a:ext cx="2286000" cy="822960"/>
-          </a:xfrm>
-          <a:prstGeom prst="rect">
-            <a:avLst/>
-          </a:prstGeom>
-          <a:noFill/>
-          <a:ln/>
-        </p:spPr>
-        <p:txBody>
-          <a:bodyPr wrap="square" lIns="0" tIns="0" rIns="0" bIns="0" rtlCol="0" anchor="ctr"/>
-          <a:lstStyle/>
-          <a:p>
-            <a:pPr indent="0" marL="0">
-              <a:buNone/>
-            </a:pPr>
-            <a:r>
-              <a:rPr lang="en-US" sz="950" dirty="0">
-                <a:solidFill>
-                  <a:srgbClr val="595959"/>
-                </a:solidFill>
-              </a:rPr>
-              <a:t>one site’s sliding-window profile: each bar is a 10 bp window replaced, shaded band = within ±85 bp of the motif</a:t>
-            </a:r>
-            <a:endParaRPr lang="en-US" sz="950" dirty="0"/>
-          </a:p>
-        </p:txBody>
-      </p:sp>
-      <p:sp>
-        <p:nvSpPr>
-          <p:cNvPr id="5" name="s3_dependence-title-0"/>
-          <p:cNvSpPr txBox="1"/>
-          <p:nvPr/>
-        </p:nvSpPr>
-        <p:spPr>
-          <a:xfrm>
-            <a:off x="3995928" y="1005840"/>
-            <a:ext cx="1842516" cy="438912"/>
-          </a:xfrm>
-          <a:prstGeom prst="rect">
-            <a:avLst/>
-          </a:prstGeom>
-          <a:noFill/>
-          <a:ln/>
-        </p:spPr>
-        <p:txBody>
-          <a:bodyPr wrap="square" lIns="0" tIns="0" rIns="0" bIns="0" rtlCol="0" anchor="t"/>
-          <a:lstStyle/>
-          <a:p>
-            <a:pPr indent="0" marL="0">
-              <a:buNone/>
-            </a:pPr>
-            <a:r>
-              <a:rPr lang="en-US" sz="1250" b="1" dirty="0">
-                <a:solidFill>
-                  <a:srgbClr val="111111"/>
-                </a:solidFill>
-              </a:rPr>
-              <a:t>Dependence near the motif</a:t>
-            </a:r>
-            <a:endParaRPr lang="en-US" sz="1250" dirty="0"/>
-          </a:p>
-        </p:txBody>
-      </p:sp>
-      <p:sp>
-        <p:nvSpPr>
-          <p:cNvPr id="6" name="s3_dependence-sub-0"/>
-          <p:cNvSpPr txBox="1"/>
-          <p:nvPr/>
-        </p:nvSpPr>
-        <p:spPr>
-          <a:xfrm>
-            <a:off x="3995928" y="1435608"/>
-            <a:ext cx="1842516" cy="310896"/>
-          </a:xfrm>
-          <a:prstGeom prst="rect">
-            <a:avLst/>
-          </a:prstGeom>
-          <a:noFill/>
-          <a:ln/>
-        </p:spPr>
-        <p:txBody>
-          <a:bodyPr wrap="square" lIns="0" tIns="0" rIns="0" bIns="0" rtlCol="0" anchor="t"/>
-          <a:lstStyle/>
-          <a:p>
-            <a:pPr indent="0" marL="0">
-              <a:buNone/>
-            </a:pPr>
-            <a:r>
-              <a:rPr lang="en-US" sz="950" dirty="0">
-                <a:solidFill>
-                  <a:srgbClr val="595959"/>
-                </a:solidFill>
-              </a:rPr>
-              <a:t>loss summed over windows within ±85 bp</a:t>
-            </a:r>
-            <a:endParaRPr lang="en-US" sz="950" dirty="0"/>
-          </a:p>
-        </p:txBody>
-      </p:sp>
-      <p:pic>
-        <p:nvPicPr>
-          <p:cNvPr id="7" name="Image 1" descr="/Users/z5162865/WongLab/AlphaGenome_Ap1/Analysis/slide_figures/panels/s3_dependence_c0_r0.png">    </p:cNvPr>
-          <p:cNvPicPr>
-            <a:picLocks noChangeAspect="1"/>
-          </p:cNvPicPr>
-          <p:nvPr/>
-        </p:nvPicPr>
-        <p:blipFill>
-          <a:blip r:embed="rId2"/>
-          <a:stretch>
-            <a:fillRect/>
-          </a:stretch>
-        </p:blipFill>
-        <p:spPr>
-          <a:xfrm>
-            <a:off x="3995928" y="1902045"/>
-            <a:ext cx="1842516" cy="1170247"/>
-          </a:xfrm>
-          <a:prstGeom prst="rect">
-            <a:avLst/>
-          </a:prstGeom>
-        </p:spPr>
-      </p:pic>
-      <p:pic>
-        <p:nvPicPr>
-          <p:cNvPr id="8" name="Image 2" descr="/Users/z5162865/WongLab/AlphaGenome_Ap1/Analysis/slide_figures/panels/s3_dependence_c0_r1.png">    </p:cNvPr>
-          <p:cNvPicPr>
-            <a:picLocks noChangeAspect="1"/>
-          </p:cNvPicPr>
-          <p:nvPr/>
-        </p:nvPicPr>
-        <p:blipFill>
-          <a:blip r:embed="rId3"/>
-          <a:stretch>
-            <a:fillRect/>
-          </a:stretch>
-        </p:blipFill>
-        <p:spPr>
-          <a:xfrm>
-            <a:off x="3995928" y="3438237"/>
-            <a:ext cx="1842516" cy="1170247"/>
-          </a:xfrm>
-          <a:prstGeom prst="rect">
-            <a:avLst/>
-          </a:prstGeom>
-        </p:spPr>
-      </p:pic>
-      <p:sp>
-        <p:nvSpPr>
-          <p:cNvPr id="9" name="s3_dependence-title-1"/>
-          <p:cNvSpPr txBox="1"/>
-          <p:nvPr/>
-        </p:nvSpPr>
-        <p:spPr>
-          <a:xfrm>
-            <a:off x="5911596" y="1005840"/>
-            <a:ext cx="1842516" cy="438912"/>
-          </a:xfrm>
-          <a:prstGeom prst="rect">
-            <a:avLst/>
-          </a:prstGeom>
-          <a:noFill/>
-          <a:ln/>
-        </p:spPr>
-        <p:txBody>
-          <a:bodyPr wrap="square" lIns="0" tIns="0" rIns="0" bIns="0" rtlCol="0" anchor="t"/>
-          <a:lstStyle/>
-          <a:p>
-            <a:pPr indent="0" marL="0">
-              <a:buNone/>
-            </a:pPr>
-            <a:r>
-              <a:rPr lang="en-US" sz="1250" b="1" dirty="0">
-                <a:solidFill>
-                  <a:srgbClr val="111111"/>
-                </a:solidFill>
-              </a:rPr>
-              <a:t>Dependence out in the context</a:t>
-            </a:r>
-            <a:endParaRPr lang="en-US" sz="1250" dirty="0"/>
-          </a:p>
-        </p:txBody>
-      </p:sp>
-      <p:sp>
-        <p:nvSpPr>
-          <p:cNvPr id="10" name="s3_dependence-sub-1"/>
-          <p:cNvSpPr txBox="1"/>
-          <p:nvPr/>
-        </p:nvSpPr>
-        <p:spPr>
-          <a:xfrm>
-            <a:off x="5911596" y="1435608"/>
-            <a:ext cx="1842516" cy="310896"/>
-          </a:xfrm>
-          <a:prstGeom prst="rect">
-            <a:avLst/>
-          </a:prstGeom>
-          <a:noFill/>
-          <a:ln/>
-        </p:spPr>
-        <p:txBody>
-          <a:bodyPr wrap="square" lIns="0" tIns="0" rIns="0" bIns="0" rtlCol="0" anchor="t"/>
-          <a:lstStyle/>
-          <a:p>
-            <a:pPr indent="0" marL="0">
-              <a:buNone/>
-            </a:pPr>
-            <a:r>
-              <a:rPr lang="en-US" sz="950" dirty="0">
-                <a:solidFill>
-                  <a:srgbClr val="595959"/>
-                </a:solidFill>
-              </a:rPr>
-              <a:t>loss summed over windows beyond that</a:t>
-            </a:r>
-            <a:endParaRPr lang="en-US" sz="950" dirty="0"/>
-          </a:p>
-        </p:txBody>
-      </p:sp>
-      <p:pic>
-        <p:nvPicPr>
-          <p:cNvPr id="11" name="Image 3" descr="/Users/z5162865/WongLab/AlphaGenome_Ap1/Analysis/slide_figures/panels/s3_dependence_c1_r0.png">    </p:cNvPr>
-          <p:cNvPicPr>
-            <a:picLocks noChangeAspect="1"/>
-          </p:cNvPicPr>
-          <p:nvPr/>
-        </p:nvPicPr>
-        <p:blipFill>
-          <a:blip r:embed="rId4"/>
-          <a:stretch>
-            <a:fillRect/>
-          </a:stretch>
-        </p:blipFill>
-        <p:spPr>
-          <a:xfrm>
-            <a:off x="5911596" y="1902045"/>
-            <a:ext cx="1842516" cy="1170247"/>
-          </a:xfrm>
-          <a:prstGeom prst="rect">
-            <a:avLst/>
-          </a:prstGeom>
-        </p:spPr>
-      </p:pic>
-      <p:pic>
-        <p:nvPicPr>
-          <p:cNvPr id="12" name="Image 4" descr="/Users/z5162865/WongLab/AlphaGenome_Ap1/Analysis/slide_figures/panels/s3_dependence_c1_r1.png">    </p:cNvPr>
-          <p:cNvPicPr>
-            <a:picLocks noChangeAspect="1"/>
-          </p:cNvPicPr>
-          <p:nvPr/>
-        </p:nvPicPr>
-        <p:blipFill>
-          <a:blip r:embed="rId5"/>
-          <a:stretch>
-            <a:fillRect/>
-          </a:stretch>
-        </p:blipFill>
-        <p:spPr>
-          <a:xfrm>
-            <a:off x="5911596" y="3438237"/>
-            <a:ext cx="1842516" cy="1170247"/>
-          </a:xfrm>
-          <a:prstGeom prst="rect">
-            <a:avLst/>
-          </a:prstGeom>
-        </p:spPr>
-      </p:pic>
-      <p:sp>
-        <p:nvSpPr>
-          <p:cNvPr id="13" name="s3_dependence-title-2"/>
-          <p:cNvSpPr txBox="1"/>
-          <p:nvPr/>
-        </p:nvSpPr>
-        <p:spPr>
-          <a:xfrm>
-            <a:off x="7827264" y="1005840"/>
-            <a:ext cx="1842516" cy="438912"/>
-          </a:xfrm>
-          <a:prstGeom prst="rect">
-            <a:avLst/>
-          </a:prstGeom>
-          <a:noFill/>
-          <a:ln/>
-        </p:spPr>
-        <p:txBody>
-          <a:bodyPr wrap="square" lIns="0" tIns="0" rIns="0" bIns="0" rtlCol="0" anchor="t"/>
-          <a:lstStyle/>
-          <a:p>
-            <a:pPr indent="0" marL="0">
-              <a:buNone/>
-            </a:pPr>
-            <a:r>
-              <a:rPr lang="en-US" sz="1250" b="1" dirty="0">
-                <a:solidFill>
-                  <a:srgbClr val="111111"/>
-                </a:solidFill>
-              </a:rPr>
-              <a:t>Spread along the element</a:t>
-            </a:r>
-            <a:endParaRPr lang="en-US" sz="1250" dirty="0"/>
-          </a:p>
-        </p:txBody>
-      </p:sp>
-      <p:sp>
-        <p:nvSpPr>
-          <p:cNvPr id="14" name="s3_dependence-sub-2"/>
-          <p:cNvSpPr txBox="1"/>
-          <p:nvPr/>
-        </p:nvSpPr>
-        <p:spPr>
-          <a:xfrm>
-            <a:off x="7827264" y="1435608"/>
-            <a:ext cx="1842516" cy="310896"/>
-          </a:xfrm>
-          <a:prstGeom prst="rect">
-            <a:avLst/>
-          </a:prstGeom>
-          <a:noFill/>
-          <a:ln/>
-        </p:spPr>
-        <p:txBody>
-          <a:bodyPr wrap="square" lIns="0" tIns="0" rIns="0" bIns="0" rtlCol="0" anchor="t"/>
-          <a:lstStyle/>
-          <a:p>
-            <a:pPr indent="0" marL="0">
-              <a:buNone/>
-            </a:pPr>
-            <a:r>
-              <a:rPr lang="en-US" sz="950" dirty="0">
-                <a:solidFill>
-                  <a:srgbClr val="595959"/>
-                </a:solidFill>
-              </a:rPr>
-              <a:t>SD of window position, weighted by loss</a:t>
-            </a:r>
-            <a:endParaRPr lang="en-US" sz="950" dirty="0"/>
-          </a:p>
-        </p:txBody>
-      </p:sp>
-      <p:pic>
-        <p:nvPicPr>
-          <p:cNvPr id="15" name="Image 5" descr="/Users/z5162865/WongLab/AlphaGenome_Ap1/Analysis/slide_figures/panels/s3_dependence_c2_r0.png">    </p:cNvPr>
-          <p:cNvPicPr>
-            <a:picLocks noChangeAspect="1"/>
-          </p:cNvPicPr>
-          <p:nvPr/>
-        </p:nvPicPr>
-        <p:blipFill>
-          <a:blip r:embed="rId6"/>
-          <a:stretch>
-            <a:fillRect/>
-          </a:stretch>
-        </p:blipFill>
-        <p:spPr>
-          <a:xfrm>
-            <a:off x="7827264" y="1902045"/>
-            <a:ext cx="1842516" cy="1170247"/>
-          </a:xfrm>
-          <a:prstGeom prst="rect">
-            <a:avLst/>
-          </a:prstGeom>
-        </p:spPr>
-      </p:pic>
-      <p:pic>
-        <p:nvPicPr>
-          <p:cNvPr id="16" name="Image 6" descr="/Users/z5162865/WongLab/AlphaGenome_Ap1/Analysis/slide_figures/panels/s3_dependence_c2_r1.png">    </p:cNvPr>
-          <p:cNvPicPr>
-            <a:picLocks noChangeAspect="1"/>
-          </p:cNvPicPr>
-          <p:nvPr/>
-        </p:nvPicPr>
-        <p:blipFill>
-          <a:blip r:embed="rId7"/>
-          <a:stretch>
-            <a:fillRect/>
-          </a:stretch>
-        </p:blipFill>
-        <p:spPr>
-          <a:xfrm>
-            <a:off x="7827264" y="3438237"/>
-            <a:ext cx="1842516" cy="1170247"/>
-          </a:xfrm>
-          <a:prstGeom prst="rect">
-            <a:avLst/>
-          </a:prstGeom>
-        </p:spPr>
-      </p:pic>
-      <p:sp>
-        <p:nvSpPr>
-          <p:cNvPr id="17" name="s3_dependence-title-3"/>
-          <p:cNvSpPr txBox="1"/>
-          <p:nvPr/>
-        </p:nvSpPr>
-        <p:spPr>
-          <a:xfrm>
-            <a:off x="9742932" y="1005840"/>
-            <a:ext cx="1842516" cy="438912"/>
-          </a:xfrm>
-          <a:prstGeom prst="rect">
-            <a:avLst/>
-          </a:prstGeom>
-          <a:noFill/>
-          <a:ln/>
-        </p:spPr>
-        <p:txBody>
-          <a:bodyPr wrap="square" lIns="0" tIns="0" rIns="0" bIns="0" rtlCol="0" anchor="t"/>
-          <a:lstStyle/>
-          <a:p>
-            <a:pPr indent="0" marL="0">
-              <a:buNone/>
-            </a:pPr>
-            <a:r>
-              <a:rPr lang="en-US" sz="1250" b="1" dirty="0">
-                <a:solidFill>
-                  <a:srgbClr val="111111"/>
-                </a:solidFill>
-              </a:rPr>
-              <a:t>Depth of the single best base</a:t>
-            </a:r>
-            <a:endParaRPr lang="en-US" sz="1250" dirty="0"/>
-          </a:p>
-        </p:txBody>
-      </p:sp>
-      <p:sp>
-        <p:nvSpPr>
-          <p:cNvPr id="18" name="s3_dependence-sub-3"/>
-          <p:cNvSpPr txBox="1"/>
-          <p:nvPr/>
-        </p:nvSpPr>
-        <p:spPr>
-          <a:xfrm>
-            <a:off x="9742932" y="1435608"/>
-            <a:ext cx="1842516" cy="310896"/>
-          </a:xfrm>
-          <a:prstGeom prst="rect">
-            <a:avLst/>
-          </a:prstGeom>
-          <a:noFill/>
-          <a:ln/>
-        </p:spPr>
-        <p:txBody>
-          <a:bodyPr wrap="square" lIns="0" tIns="0" rIns="0" bIns="0" rtlCol="0" anchor="t"/>
-          <a:lstStyle/>
-          <a:p>
-            <a:pPr indent="0" marL="0">
-              <a:buNone/>
-            </a:pPr>
-            <a:r>
-              <a:rPr lang="en-US" sz="950" dirty="0">
-                <a:solidFill>
-                  <a:srgbClr val="595959"/>
-                </a:solidFill>
-              </a:rPr>
-              <a:t>largest effect of any one base change, ±30 bp</a:t>
-            </a:r>
-            <a:endParaRPr lang="en-US" sz="950" dirty="0"/>
-          </a:p>
-        </p:txBody>
-      </p:sp>
-      <p:pic>
-        <p:nvPicPr>
-          <p:cNvPr id="19" name="Image 7" descr="/Users/z5162865/WongLab/AlphaGenome_Ap1/Analysis/slide_figures/panels/s3_dependence_c3_r0.png">    </p:cNvPr>
-          <p:cNvPicPr>
-            <a:picLocks noChangeAspect="1"/>
-          </p:cNvPicPr>
-          <p:nvPr/>
-        </p:nvPicPr>
-        <p:blipFill>
-          <a:blip r:embed="rId8"/>
-          <a:stretch>
-            <a:fillRect/>
-          </a:stretch>
-        </p:blipFill>
-        <p:spPr>
-          <a:xfrm>
-            <a:off x="9742932" y="1902045"/>
-            <a:ext cx="1842516" cy="1170247"/>
-          </a:xfrm>
-          <a:prstGeom prst="rect">
-            <a:avLst/>
-          </a:prstGeom>
-        </p:spPr>
-      </p:pic>
-      <p:pic>
-        <p:nvPicPr>
-          <p:cNvPr id="20" name="Image 8" descr="/Users/z5162865/WongLab/AlphaGenome_Ap1/Analysis/slide_figures/panels/s3_dependence_c3_r1.png">    </p:cNvPr>
-          <p:cNvPicPr>
-            <a:picLocks noChangeAspect="1"/>
-          </p:cNvPicPr>
-          <p:nvPr/>
-        </p:nvPicPr>
-        <p:blipFill>
-          <a:blip r:embed="rId9"/>
-          <a:stretch>
-            <a:fillRect/>
-          </a:stretch>
-        </p:blipFill>
-        <p:spPr>
-          <a:xfrm>
-            <a:off x="9742932" y="3438237"/>
-            <a:ext cx="1842516" cy="1170247"/>
-          </a:xfrm>
-          <a:prstGeom prst="rect">
-            <a:avLst/>
-          </a:prstGeom>
-        </p:spPr>
-      </p:pic>
-      <p:sp>
-        <p:nvSpPr>
-          <p:cNvPr id="21" name="s3_dependence-row-0"/>
-          <p:cNvSpPr txBox="1"/>
-          <p:nvPr/>
-        </p:nvSpPr>
-        <p:spPr>
-          <a:xfrm rot="16200000">
-            <a:off x="2953512" y="1837944"/>
-            <a:ext cx="1371600" cy="1371600"/>
-          </a:xfrm>
-          <a:prstGeom prst="rect">
-            <a:avLst/>
-          </a:prstGeom>
-          <a:noFill/>
-          <a:ln/>
-        </p:spPr>
-        <p:txBody>
-          <a:bodyPr wrap="square" lIns="0" tIns="0" rIns="0" bIns="0" rtlCol="0" anchor="ctr"/>
-          <a:lstStyle/>
-          <a:p>
-            <a:pPr algn="ctr" indent="0" marL="0">
-              <a:buNone/>
-            </a:pPr>
-            <a:r>
-              <a:rPr lang="en-US" sz="1000" dirty="0">
-                <a:solidFill>
-                  <a:srgbClr val="111111"/>
-                </a:solidFill>
-              </a:rPr>
-              <a:t>all sites, nothing controlled</a:t>
-            </a:r>
-            <a:endParaRPr lang="en-US" sz="1000" dirty="0"/>
-          </a:p>
-        </p:txBody>
-      </p:sp>
-      <p:sp>
-        <p:nvSpPr>
-          <p:cNvPr id="22" name="s3_dependence-row-1"/>
-          <p:cNvSpPr txBox="1"/>
-          <p:nvPr/>
-        </p:nvSpPr>
-        <p:spPr>
-          <a:xfrm rot="16200000">
-            <a:off x="2953512" y="3374136"/>
-            <a:ext cx="1371600" cy="1371600"/>
-          </a:xfrm>
-          <a:prstGeom prst="rect">
-            <a:avLst/>
-          </a:prstGeom>
-          <a:noFill/>
-          <a:ln/>
-        </p:spPr>
-        <p:txBody>
-          <a:bodyPr wrap="square" lIns="0" tIns="0" rIns="0" bIns="0" rtlCol="0" anchor="ctr"/>
-          <a:lstStyle/>
-          <a:p>
-            <a:pPr algn="ctr" indent="0" marL="0">
-              <a:buNone/>
-            </a:pPr>
-            <a:r>
-              <a:rPr lang="en-US" sz="1000" dirty="0">
-                <a:solidFill>
-                  <a:srgbClr val="111111"/>
-                </a:solidFill>
-              </a:rPr>
-              <a:t>each class against its own matched Stable controls</a:t>
-            </a:r>
-            <a:endParaRPr lang="en-US" sz="1000" dirty="0"/>
-          </a:p>
-        </p:txBody>
-      </p:sp>
-      <p:sp>
-        <p:nvSpPr>
-          <p:cNvPr id="23" name="s3_dependence-dot-0"/>
-          <p:cNvSpPr/>
-          <p:nvPr/>
-        </p:nvSpPr>
-        <p:spPr>
-          <a:xfrm>
-            <a:off x="3429000" y="4960620"/>
-            <a:ext cx="109728" cy="109728"/>
-          </a:xfrm>
-          <a:prstGeom prst="ellipse">
-            <a:avLst/>
-          </a:prstGeom>
-          <a:solidFill>
-            <a:srgbClr val="4F4F4F"/>
-          </a:solidFill>
-          <a:ln w="12700">
-            <a:solidFill>
-              <a:srgbClr val="4F4F4F"/>
-            </a:solidFill>
-            <a:prstDash val="solid"/>
-          </a:ln>
-        </p:spPr>
-      </p:sp>
-      <p:sp>
-        <p:nvSpPr>
-          <p:cNvPr id="24" name="s3_dependence-leg-0"/>
-          <p:cNvSpPr txBox="1"/>
-          <p:nvPr/>
-        </p:nvSpPr>
-        <p:spPr>
-          <a:xfrm>
-            <a:off x="3584448" y="4919472"/>
-            <a:ext cx="1057046" cy="201168"/>
-          </a:xfrm>
-          <a:prstGeom prst="rect">
-            <a:avLst/>
-          </a:prstGeom>
-          <a:noFill/>
-          <a:ln/>
-        </p:spPr>
-        <p:txBody>
-          <a:bodyPr wrap="square" lIns="0" tIns="0" rIns="0" bIns="0" rtlCol="0" anchor="ctr"/>
-          <a:lstStyle/>
-          <a:p>
-            <a:pPr indent="0" marL="0">
-              <a:buNone/>
-            </a:pPr>
-            <a:r>
-              <a:rPr lang="en-US" sz="1050" dirty="0">
-                <a:solidFill>
-                  <a:srgbClr val="111111"/>
-                </a:solidFill>
-              </a:rPr>
-              <a:t>Dynamic (all)</a:t>
-            </a:r>
-            <a:endParaRPr lang="en-US" sz="1050" dirty="0"/>
-          </a:p>
-        </p:txBody>
-      </p:sp>
-      <p:sp>
-        <p:nvSpPr>
-          <p:cNvPr id="25" name="s3_dependence-dot-1"/>
-          <p:cNvSpPr/>
-          <p:nvPr/>
-        </p:nvSpPr>
-        <p:spPr>
-          <a:xfrm>
-            <a:off x="4751222" y="4960620"/>
-            <a:ext cx="109728" cy="109728"/>
-          </a:xfrm>
-          <a:prstGeom prst="ellipse">
-            <a:avLst/>
-          </a:prstGeom>
-          <a:solidFill>
-            <a:srgbClr val="C2551C"/>
-          </a:solidFill>
-          <a:ln w="12700">
-            <a:solidFill>
-              <a:srgbClr val="C2551C"/>
-            </a:solidFill>
-            <a:prstDash val="solid"/>
-          </a:ln>
-        </p:spPr>
-      </p:sp>
-      <p:sp>
-        <p:nvSpPr>
-          <p:cNvPr id="26" name="s3_dependence-leg-1"/>
-          <p:cNvSpPr txBox="1"/>
-          <p:nvPr/>
-        </p:nvSpPr>
-        <p:spPr>
-          <a:xfrm>
-            <a:off x="4906670" y="4919472"/>
-            <a:ext cx="596189" cy="201168"/>
-          </a:xfrm>
-          <a:prstGeom prst="rect">
-            <a:avLst/>
-          </a:prstGeom>
-          <a:noFill/>
-          <a:ln/>
-        </p:spPr>
-        <p:txBody>
-          <a:bodyPr wrap="square" lIns="0" tIns="0" rIns="0" bIns="0" rtlCol="0" anchor="ctr"/>
-          <a:lstStyle/>
-          <a:p>
-            <a:pPr indent="0" marL="0">
-              <a:buNone/>
-            </a:pPr>
-            <a:r>
-              <a:rPr lang="en-US" sz="1050" dirty="0">
-                <a:solidFill>
-                  <a:srgbClr val="111111"/>
-                </a:solidFill>
-              </a:rPr>
-              <a:t>Age Up</a:t>
-            </a:r>
-            <a:endParaRPr lang="en-US" sz="1050" dirty="0"/>
-          </a:p>
-        </p:txBody>
-      </p:sp>
-      <p:sp>
-        <p:nvSpPr>
-          <p:cNvPr id="27" name="s3_dependence-dot-2"/>
-          <p:cNvSpPr/>
-          <p:nvPr/>
-        </p:nvSpPr>
-        <p:spPr>
-          <a:xfrm>
-            <a:off x="5612587" y="4960620"/>
-            <a:ext cx="109728" cy="109728"/>
-          </a:xfrm>
-          <a:prstGeom prst="ellipse">
-            <a:avLst/>
-          </a:prstGeom>
-          <a:solidFill>
-            <a:srgbClr val="1F6FB2"/>
-          </a:solidFill>
-          <a:ln w="12700">
-            <a:solidFill>
-              <a:srgbClr val="1F6FB2"/>
-            </a:solidFill>
-            <a:prstDash val="solid"/>
-          </a:ln>
-        </p:spPr>
-      </p:sp>
-      <p:sp>
-        <p:nvSpPr>
-          <p:cNvPr id="28" name="s3_dependence-leg-2"/>
-          <p:cNvSpPr txBox="1"/>
-          <p:nvPr/>
-        </p:nvSpPr>
-        <p:spPr>
-          <a:xfrm>
-            <a:off x="5768035" y="4919472"/>
-            <a:ext cx="727862" cy="201168"/>
-          </a:xfrm>
-          <a:prstGeom prst="rect">
-            <a:avLst/>
-          </a:prstGeom>
-          <a:noFill/>
-          <a:ln/>
-        </p:spPr>
-        <p:txBody>
-          <a:bodyPr wrap="square" lIns="0" tIns="0" rIns="0" bIns="0" rtlCol="0" anchor="ctr"/>
-          <a:lstStyle/>
-          <a:p>
-            <a:pPr indent="0" marL="0">
-              <a:buNone/>
-            </a:pPr>
-            <a:r>
-              <a:rPr lang="en-US" sz="1050" dirty="0">
-                <a:solidFill>
-                  <a:srgbClr val="111111"/>
-                </a:solidFill>
-              </a:rPr>
-              <a:t>Age Down</a:t>
-            </a:r>
-            <a:endParaRPr lang="en-US" sz="1050" dirty="0"/>
-          </a:p>
-        </p:txBody>
-      </p:sp>
-      <p:sp>
-        <p:nvSpPr>
-          <p:cNvPr id="29" name="s3_dependence-dot-3"/>
-          <p:cNvSpPr/>
-          <p:nvPr/>
-        </p:nvSpPr>
-        <p:spPr>
-          <a:xfrm>
-            <a:off x="6605626" y="4960620"/>
-            <a:ext cx="109728" cy="109728"/>
-          </a:xfrm>
-          <a:prstGeom prst="ellipse">
-            <a:avLst/>
-          </a:prstGeom>
-          <a:solidFill>
-            <a:srgbClr val="2E7D32"/>
-          </a:solidFill>
-          <a:ln w="12700">
-            <a:solidFill>
-              <a:srgbClr val="2E7D32"/>
-            </a:solidFill>
-            <a:prstDash val="solid"/>
-          </a:ln>
-        </p:spPr>
-      </p:sp>
-      <p:sp>
-        <p:nvSpPr>
-          <p:cNvPr id="30" name="s3_dependence-leg-3"/>
-          <p:cNvSpPr txBox="1"/>
-          <p:nvPr/>
-        </p:nvSpPr>
-        <p:spPr>
-          <a:xfrm>
-            <a:off x="6761074" y="4919472"/>
-            <a:ext cx="925373" cy="201168"/>
-          </a:xfrm>
-          <a:prstGeom prst="rect">
-            <a:avLst/>
-          </a:prstGeom>
-          <a:noFill/>
-          <a:ln/>
-        </p:spPr>
-        <p:txBody>
-          <a:bodyPr wrap="square" lIns="0" tIns="0" rIns="0" bIns="0" rtlCol="0" anchor="ctr"/>
-          <a:lstStyle/>
-          <a:p>
-            <a:pPr indent="0" marL="0">
-              <a:buNone/>
-            </a:pPr>
-            <a:r>
-              <a:rPr lang="en-US" sz="1050" dirty="0">
-                <a:solidFill>
-                  <a:srgbClr val="111111"/>
-                </a:solidFill>
-              </a:rPr>
-              <a:t>Exercise Up</a:t>
-            </a:r>
-            <a:endParaRPr lang="en-US" sz="1050" dirty="0"/>
-          </a:p>
-        </p:txBody>
-      </p:sp>
-      <p:sp>
-        <p:nvSpPr>
-          <p:cNvPr id="31" name="s3_dependence-dot-4"/>
-          <p:cNvSpPr/>
-          <p:nvPr/>
-        </p:nvSpPr>
-        <p:spPr>
-          <a:xfrm>
-            <a:off x="7796174" y="4960620"/>
-            <a:ext cx="109728" cy="109728"/>
-          </a:xfrm>
-          <a:prstGeom prst="ellipse">
-            <a:avLst/>
-          </a:prstGeom>
-          <a:solidFill>
-            <a:srgbClr val="7B3FA0"/>
-          </a:solidFill>
-          <a:ln w="12700">
-            <a:solidFill>
-              <a:srgbClr val="7B3FA0"/>
-            </a:solidFill>
-            <a:prstDash val="solid"/>
-          </a:ln>
-        </p:spPr>
-      </p:sp>
-      <p:sp>
-        <p:nvSpPr>
-          <p:cNvPr id="32" name="s3_dependence-leg-4"/>
-          <p:cNvSpPr txBox="1"/>
-          <p:nvPr/>
-        </p:nvSpPr>
-        <p:spPr>
-          <a:xfrm>
-            <a:off x="7951622" y="4919472"/>
-            <a:ext cx="1057046" cy="201168"/>
-          </a:xfrm>
-          <a:prstGeom prst="rect">
-            <a:avLst/>
-          </a:prstGeom>
-          <a:noFill/>
-          <a:ln/>
-        </p:spPr>
-        <p:txBody>
-          <a:bodyPr wrap="square" lIns="0" tIns="0" rIns="0" bIns="0" rtlCol="0" anchor="ctr"/>
-          <a:lstStyle/>
-          <a:p>
-            <a:pPr indent="0" marL="0">
-              <a:buNone/>
-            </a:pPr>
-            <a:r>
-              <a:rPr lang="en-US" sz="1050" dirty="0">
-                <a:solidFill>
-                  <a:srgbClr val="111111"/>
-                </a:solidFill>
-              </a:rPr>
-              <a:t>Exercise Down</a:t>
-            </a:r>
-            <a:endParaRPr lang="en-US" sz="1050" dirty="0"/>
-          </a:p>
-        </p:txBody>
-      </p:sp>
-      <p:sp>
-        <p:nvSpPr>
-          <p:cNvPr id="33" name="s3_dependence-dot-5"/>
-          <p:cNvSpPr/>
-          <p:nvPr/>
-        </p:nvSpPr>
-        <p:spPr>
-          <a:xfrm>
-            <a:off x="9118397" y="4960620"/>
-            <a:ext cx="109728" cy="109728"/>
-          </a:xfrm>
-          <a:prstGeom prst="ellipse">
-            <a:avLst/>
-          </a:prstGeom>
-          <a:solidFill>
-            <a:srgbClr val="B3B2AE"/>
-          </a:solidFill>
-          <a:ln w="12700">
-            <a:solidFill>
-              <a:srgbClr val="B3B2AE"/>
-            </a:solidFill>
-            <a:prstDash val="solid"/>
-          </a:ln>
-        </p:spPr>
-      </p:sp>
-      <p:sp>
-        <p:nvSpPr>
-          <p:cNvPr id="34" name="s3_dependence-leg-5"/>
-          <p:cNvSpPr txBox="1"/>
-          <p:nvPr/>
-        </p:nvSpPr>
-        <p:spPr>
-          <a:xfrm>
-            <a:off x="9273845" y="4919472"/>
-            <a:ext cx="2373782" cy="201168"/>
-          </a:xfrm>
-          <a:prstGeom prst="rect">
-            <a:avLst/>
-          </a:prstGeom>
-          <a:noFill/>
-          <a:ln/>
-        </p:spPr>
-        <p:txBody>
-          <a:bodyPr wrap="square" lIns="0" tIns="0" rIns="0" bIns="0" rtlCol="0" anchor="ctr"/>
-          <a:lstStyle/>
-          <a:p>
-            <a:pPr indent="0" marL="0">
-              <a:buNone/>
-            </a:pPr>
-            <a:r>
-              <a:rPr lang="en-US" sz="1050" dirty="0">
-                <a:solidFill>
-                  <a:srgbClr val="111111"/>
-                </a:solidFill>
-              </a:rPr>
-              <a:t>Stable (all, or matched controls)</a:t>
-            </a:r>
-            <a:endParaRPr lang="en-US" sz="1050" dirty="0"/>
-          </a:p>
-        </p:txBody>
-      </p:sp>
-      <p:sp>
-        <p:nvSpPr>
-          <p:cNvPr id="35" name="s3_dependence-key"/>
-          <p:cNvSpPr txBox="1"/>
-          <p:nvPr/>
-        </p:nvSpPr>
-        <p:spPr>
-          <a:xfrm>
-            <a:off x="3429000" y="5193792"/>
-            <a:ext cx="8229600" cy="502920"/>
-          </a:xfrm>
-          <a:prstGeom prst="rect">
-            <a:avLst/>
-          </a:prstGeom>
-          <a:noFill/>
-          <a:ln/>
-        </p:spPr>
-        <p:txBody>
-          <a:bodyPr wrap="square" lIns="0" tIns="0" rIns="0" bIns="0" rtlCol="0" anchor="ctr"/>
-          <a:lstStyle/>
-          <a:p>
-            <a:pPr indent="0" marL="0">
-              <a:buNone/>
-            </a:pPr>
-            <a:r>
-              <a:rPr lang="en-US" sz="900" dirty="0">
-                <a:solidFill>
-                  <a:srgbClr val="595959"/>
-                </a:solidFill>
-              </a:rPr>
-              <a:t>grey line and band (top row): all Stable sites, median with 95% bootstrap CI.   grey dots (bottom row): that class's own matched Stable controls.   Stars test the class against that reference — Mann–Whitney on all sites, paired Wilcoxon on matched pairs — BH across all 40 tests.   *** p&lt;0.001   ** p&lt;0.01   * p&lt;0.05   ns ≥ 0.05</a:t>
-            </a:r>
-            <a:endParaRPr lang="en-US" sz="900" dirty="0"/>
-          </a:p>
-        </p:txBody>
-      </p:sp>
-      <p:sp>
-        <p:nvSpPr>
-          <p:cNvPr id="36" name="Text 0"/>
+          <p:cNvPr id="4" name="Text 0"/>
           <p:cNvSpPr/>
           <p:nvPr>
             <p:ph idx="101" type="body" hasCustomPrompt="1"/>
@@ -10543,7 +11286,7 @@
                   <a:srgbClr val="111111"/>
                 </a:solidFill>
               </a:rPr>
-              <a:t>the same shift in every class and on all three measures — strongest in Age Up and Exercise Down, absent only in Age Down</a:t>
+              <a:t>the stable site has MEF2 abutting its AP-1 motif at 19 bp; the age-gained site has no MEF2 anywhere in the element</a:t>
             </a:r>
             <a:endParaRPr lang="en-US" sz="1500" dirty="0"/>
           </a:p>

--- a/Analysis/AP1_AlphaGenome_results.pptx
+++ b/Analysis/AP1_AlphaGenome_results.pptx
@@ -20,9 +20,10 @@
     <p:sldId id="268" r:id="rId14"/>
     <p:sldId id="269" r:id="rId15"/>
     <p:sldId id="270" r:id="rId16"/>
+    <p:sldId id="271" r:id="rId17"/>
   </p:sldIdLst>
   <p:notesMasterIdLst>
-    <p:notesMasterId r:id="rId17"/>
+    <p:notesMasterId r:id="rId18"/>
   </p:notesMasterIdLst>
   <p:sldSz cx="12192000" cy="6858000"/>
   <p:notesSz cx="6858000" cy="12192000"/>
@@ -121,18 +122,18 @@
   <p:extLst>
     <p:ext uri="{521415D9-36F7-43E2-AB2F-B90AF26B5E84}">
       <p14:sectionLst xmlns:p14="http://schemas.microsoft.com/office/powerpoint/2010/main">
-        <p14:section name="Opening" id="{2828df0b-e917-621c-76f2-5823714ab8e8}">
+        <p14:section name="Opening" id="{27a5d981-545e-fd8f-f845-d8f8a5f61d48}">
           <p14:sldIdLst>
             <p14:sldId id="256"/>
           </p14:sldIdLst>
         </p14:section>
-        <p14:section name="Design" id="{77032ca4-f691-0c7d-274a-832605b09e8d}">
+        <p14:section name="Design" id="{b0194f64-36d0-4258-82c9-90ae778c10bb}">
           <p14:sldIdLst>
             <p14:sldId id="257"/>
             <p14:sldId id="258"/>
           </p14:sldIdLst>
         </p14:section>
-        <p14:section name="Findings" id="{da921934-714d-13f3-44b2-82ccaebf2b49}">
+        <p14:section name="Findings" id="{550918ff-3762-aa46-57e7-84480359118a}">
           <p14:sldIdLst>
             <p14:sldId id="259"/>
             <p14:sldId id="260"/>
@@ -144,12 +145,13 @@
             <p14:sldId id="266"/>
             <p14:sldId id="267"/>
             <p14:sldId id="268"/>
+            <p14:sldId id="269"/>
           </p14:sldIdLst>
         </p14:section>
-        <p14:section name="Conclusion" id="{ee1c481d-10cd-f30e-31d7-2fe2ffb12617}">
+        <p14:section name="Conclusion" id="{11ccf227-0fe8-59cb-3f57-a0b955e537ad}">
           <p14:sldIdLst>
-            <p14:sldId id="269"/>
             <p14:sldId id="270"/>
+            <p14:sldId id="271"/>
           </p14:sldIdLst>
         </p14:section>
       </p14:sectionLst>
@@ -644,7 +646,7 @@
           <a:p>
             <a:r>
               <a:rPr lang="en-US" dirty="0"/>
-              <a:t>10 of 16 scan features separate Dynamic from matched Stable. Share of dependence within 85 bp 0.63 vs 0.74, spread 94 vs 86 bp, largest single-base effect 0.74 vs 0.90. Age Up is the most diffuse class of all.</a:t>
+              <a:t>Both are promoters a few hundred bp from a TSS, matched on predicted accessibility (0.96 vs 1.12) and peak width (1359 vs 1329 bp). At the Sqstm1 promoter AP-1 is bound in all three conditions, the motif window is worth -1.00 and 81% of the loss sits within 85 bp. At the Psmd11 promoter AP-1 is absent in young and gained in both aged states, the motif is still the strongest window but only -0.58, and the loss is smeared over 114 bp against 83. Psmd11 rises with age, matching the AP-1 gain; the exercise direction does not match, so do not claim it.</a:t>
             </a:r>
             <a:endParaRPr lang="en-US" dirty="0"/>
           </a:p>
@@ -732,7 +734,7 @@
           <a:p>
             <a:r>
               <a:rPr lang="en-US" dirty="0"/>
-              <a:t>The 1-base and 7-base core results are not repeated here: they say the same thing as the motif shuffle on the earlier slide. One wrong base costs -0.45 of the -0.56 total, the dose slope tracks core quality read from the genome at rho 0.30, and orientation is irrelevant as expected for a near-palindrome.</a:t>
+              <a:t>10 of 16 scan features separate Dynamic from matched Stable. Share of dependence within 85 bp 0.63 vs 0.74, spread 94 vs 86 bp, largest single-base effect 0.74 vs 0.90. Age Up is the most diffuse class of all.</a:t>
             </a:r>
             <a:endParaRPr lang="en-US" dirty="0"/>
           </a:p>
@@ -820,7 +822,7 @@
           <a:p>
             <a:r>
               <a:rPr lang="en-US" dirty="0"/>
-              <a:t>The titration experiment was designed before this hypothesis existed, so this is a prediction rather than a fit. Caveat: the motif-sensitivity result does not survive matching on measured accessibility; the core-quality result does.</a:t>
+              <a:t>The 1-base and 7-base core results are not repeated here: they say the same thing as the motif shuffle on the earlier slide. One wrong base costs -0.45 of the -0.56 total, the dose slope tracks core quality read from the genome at rho 0.30, and orientation is irrelevant as expected for a near-palindrome.</a:t>
             </a:r>
             <a:endParaRPr lang="en-US" dirty="0"/>
           </a:p>
@@ -908,7 +910,7 @@
           <a:p>
             <a:r>
               <a:rPr lang="en-US" dirty="0"/>
-              <a:t>The comparable quantity is a ratio within each element, so assay scale cancels. The class direction disagrees: in the MPRA responsive elements depend MORE on their sequence, which separates intrinsic potential from what sets accessibility in the genome.</a:t>
+              <a:t>The titration experiment was designed before this hypothesis existed, so this is a prediction rather than a fit. Caveat: the motif-sensitivity result does not survive matching on measured accessibility; the core-quality result does.</a:t>
             </a:r>
             <a:endParaRPr lang="en-US" dirty="0"/>
           </a:p>
@@ -996,7 +998,7 @@
           <a:p>
             <a:r>
               <a:rPr lang="en-US" dirty="0"/>
-              <a:t>The mutation-response profile is a null and a well-controlled one: given the same chromatin, the two classes lose the same amount to the same kind of edit. What is not null is the scale at which that is true and the one missing partner.</a:t>
+              <a:t>The comparable quantity is a ratio within each element, so assay scale cancels. The class direction disagrees: in the MPRA responsive elements depend MORE on their sequence, which separates intrinsic potential from what sets accessibility in the genome.</a:t>
             </a:r>
             <a:endParaRPr lang="en-US" dirty="0"/>
           </a:p>
@@ -1084,7 +1086,7 @@
           <a:p>
             <a:r>
               <a:rPr lang="en-US" dirty="0"/>
-              <a:t>Also open: whether the MEF2 deficit at Dynamic sites is detection or genuine differential occupancy of equally-present motifs.</a:t>
+              <a:t>The mutation-response profile is a null and a well-controlled one: given the same chromatin, the two classes lose the same amount to the same kind of edit. What is not null is the scale at which that is true and the one missing partner.</a:t>
             </a:r>
             <a:endParaRPr lang="en-US" dirty="0"/>
           </a:p>
@@ -1108,6 +1110,94 @@
             <a:fld id="{F7021451-1387-4CA6-816F-3879F97B5CBC}" type="slidenum">
               <a:rPr lang="en-US"/>
               <a:t>15</a:t>
+            </a:fld>
+            <a:endParaRPr lang="en-US"/>
+          </a:p>
+        </p:txBody>
+      </p:sp>
+    </p:spTree>
+    <p:extLst>
+      <p:ext uri="{BB962C8B-B14F-4D97-AF65-F5344CB8AC3E}">
+        <p14:creationId xmlns:p14="http://schemas.microsoft.com/office/powerpoint/2010/main" val="1024086991"/>
+      </p:ext>
+    </p:extLst>
+  </p:cSld>
+  <p:clrMapOvr>
+    <a:masterClrMapping/>
+  </p:clrMapOvr>
+</p:notes>
+</file>
+
+<file path=ppt/notesSlides/notesSlide16.xml><?xml version="1.0" encoding="utf-8"?>
+<p:notes xmlns:a="http://schemas.openxmlformats.org/drawingml/2006/main" xmlns:r="http://schemas.openxmlformats.org/officeDocument/2006/relationships" xmlns:p="http://schemas.openxmlformats.org/presentationml/2006/main">
+  <p:cSld>
+    <p:spTree>
+      <p:nvGrpSpPr>
+        <p:cNvPr id="1" name=""/>
+        <p:cNvGrpSpPr/>
+        <p:nvPr/>
+      </p:nvGrpSpPr>
+      <p:grpSpPr>
+        <a:xfrm>
+          <a:off x="0" y="0"/>
+          <a:ext cx="0" cy="0"/>
+          <a:chOff x="0" y="0"/>
+          <a:chExt cx="0" cy="0"/>
+        </a:xfrm>
+      </p:grpSpPr>
+      <p:sp>
+        <p:nvSpPr>
+          <p:cNvPr id="2" name="Slide Image Placeholder 1"/>
+          <p:cNvSpPr>
+            <a:spLocks noGrp="1" noRot="1" noChangeAspect="1"/>
+          </p:cNvSpPr>
+          <p:nvPr>
+            <p:ph type="sldImg"/>
+          </p:nvPr>
+        </p:nvSpPr>
+        <p:spPr/>
+      </p:sp>
+      <p:sp>
+        <p:nvSpPr>
+          <p:cNvPr id="3" name="Notes Placeholder 2"/>
+          <p:cNvSpPr>
+            <a:spLocks noGrp="1"/>
+          </p:cNvSpPr>
+          <p:nvPr>
+            <p:ph type="body" idx="1"/>
+          </p:nvPr>
+        </p:nvSpPr>
+        <p:spPr/>
+        <p:txBody>
+          <a:bodyPr/>
+          <a:lstStyle/>
+          <a:p>
+            <a:r>
+              <a:rPr lang="en-US" dirty="0"/>
+              <a:t>Also open: whether the MEF2 deficit at Dynamic sites is detection or genuine differential occupancy of equally-present motifs.</a:t>
+            </a:r>
+            <a:endParaRPr lang="en-US" dirty="0"/>
+          </a:p>
+        </p:txBody>
+      </p:sp>
+      <p:sp>
+        <p:nvSpPr>
+          <p:cNvPr id="4" name="Slide Number Placeholder 3"/>
+          <p:cNvSpPr>
+            <a:spLocks noGrp="1"/>
+          </p:cNvSpPr>
+          <p:nvPr>
+            <p:ph type="sldNum" sz="quarter" idx="10"/>
+          </p:nvPr>
+        </p:nvSpPr>
+        <p:spPr/>
+        <p:txBody>
+          <a:bodyPr/>
+          <a:lstStyle/>
+          <a:p>
+            <a:fld id="{F7021451-1387-4CA6-816F-3879F97B5CBC}" type="slidenum">
+              <a:rPr lang="en-US"/>
+              <a:t>16</a:t>
             </a:fld>
             <a:endParaRPr lang="en-US"/>
           </a:p>
@@ -1700,7 +1790,7 @@
           <a:p>
             <a:r>
               <a:rPr lang="en-US" dirty="0"/>
-              <a:t>Presence vs rank is the point. MEF2 unconditional on all sites: Dynamic OR 0.58, Age Up 0.45, Exercise Down 0.56, all surviving BH; given a MEF2 is present, every class ranks it in the top three about equally often (OR 0.87-2.03, nothing significant). The same split holds under matching but with much less power (0.54 and 0.53 unconditional, p 0.008 and 0.026; 0.82 and 0.62 given present). The AP-1 panel is the one new finding: given a second AP-1 footprint is present, Dynamic elements rank it top 1.45x more often than Stable, FDR 0.036 on all sites, and the direction repeats in all four directional classes (1.43-1.62) though only the pooled comparison survives correction. Under matching it is 1.54-2.54 and nothing survives. CTCF is the design control: OR 3.0-6.5 with FDR &lt; 0.001 on all sites, 1.03-1.07 and p = 1.0 matched.</a:t>
+              <a:t>Presence vs rank is the point. MEF2, does the element have one: Dynamic OR 0.58, Age Up 0.45, Exercise Down 0.56, all surviving BH. Given a MEF2 is present, every class ranks it in the top three about equally often (0.87-2.03, nothing significant). AP-1 given present: Dynamic 1.45x, FDR 0.036, with the direction repeating in all four directional classes (1.43-1.62). CTCF is the reason to keep the matched analysis in the report even though it is off the slides: OR 3.0-6.5 here with FDR &lt; 0.001, and exactly 1.0 once accessibility is matched.</a:t>
             </a:r>
             <a:endParaRPr lang="en-US" dirty="0"/>
           </a:p>
@@ -1788,7 +1878,7 @@
           <a:p>
             <a:r>
               <a:rPr lang="en-US" dirty="0"/>
-              <a:t>Both are promoters a few hundred bp from a TSS, matched on predicted accessibility (0.96 vs 1.12) and peak width (1359 vs 1329 bp). At the Sqstm1 promoter AP-1 is bound in all three conditions, the motif window is worth -1.00 and 81% of the loss sits within 85 bp. At the Psmd11 promoter AP-1 is absent in young and gained in both aged states, the motif is still the strongest window but only -0.58, and the loss is smeared over 114 bp against 83. Psmd11 rises with age, matching the AP-1 gain; the exercise direction does not match, so do not claim it.</a:t>
+              <a:t>Chosen to illustrate the odds-ratio result on the previous slide, not as evidence in itself: n = 2. The pair is matched on predicted accessibility (0.77 vs 0.74) and peak width (758 vs 803), and both carry a comparable number of neighbouring AP-1 footprints, so the difference is which window the model weights. The age-gained site is MAS only, meaning AP-1 is called in aged sedentary but not in young or aged exercise.</a:t>
             </a:r>
             <a:endParaRPr lang="en-US" dirty="0"/>
           </a:p>
@@ -2840,7 +2930,7 @@
                   <a:schemeClr val="tx1"/>
                 </a:solidFill>
               </a:rPr>
-              <a:t>Responsive sites spread their dependence out</a:t>
+              <a:t>The same contrast at one pair of promoters</a:t>
             </a:r>
             <a:endParaRPr lang="en-US" sz="2800" dirty="0"/>
           </a:p>
@@ -2848,7 +2938,7 @@
       </p:sp>
       <p:pic>
         <p:nvPicPr>
-          <p:cNvPr id="3" name="Image 0" descr="/Users/z5162865/WongLab/AlphaGenome_Ap1/Analysis/slide_figures/panels/d_profile.png">    </p:cNvPr>
+          <p:cNvPr id="3" name="Image 0" descr="/Users/z5162865/WongLab/AlphaGenome_Ap1/Analysis/example_track/example_scan_track.png">    </p:cNvPr>
           <p:cNvPicPr>
             <a:picLocks noChangeAspect="1"/>
           </p:cNvPicPr>
@@ -2862,8 +2952,8 @@
         </p:blipFill>
         <p:spPr>
           <a:xfrm>
-            <a:off x="502920" y="1373869"/>
-            <a:ext cx="2286000" cy="1915702"/>
+            <a:off x="1202961" y="1051560"/>
+            <a:ext cx="9755599" cy="4754880"/>
           </a:xfrm>
           <a:prstGeom prst="rect">
             <a:avLst/>
@@ -2872,997 +2962,7 @@
       </p:pic>
       <p:sp>
         <p:nvSpPr>
-          <p:cNvPr id="4" name="profile-caption"/>
-          <p:cNvSpPr txBox="1"/>
-          <p:nvPr/>
-        </p:nvSpPr>
-        <p:spPr>
-          <a:xfrm>
-            <a:off x="502920" y="3337560"/>
-            <a:ext cx="2286000" cy="822960"/>
-          </a:xfrm>
-          <a:prstGeom prst="rect">
-            <a:avLst/>
-          </a:prstGeom>
-          <a:noFill/>
-          <a:ln/>
-        </p:spPr>
-        <p:txBody>
-          <a:bodyPr wrap="square" lIns="0" tIns="0" rIns="0" bIns="0" rtlCol="0" anchor="ctr"/>
-          <a:lstStyle/>
-          <a:p>
-            <a:pPr indent="0" marL="0">
-              <a:buNone/>
-            </a:pPr>
-            <a:r>
-              <a:rPr lang="en-US" sz="950" dirty="0">
-                <a:solidFill>
-                  <a:srgbClr val="595959"/>
-                </a:solidFill>
-              </a:rPr>
-              <a:t>one site’s sliding-window profile: each bar is a 10 bp window replaced, shaded band = within ±85 bp of the motif</a:t>
-            </a:r>
-            <a:endParaRPr lang="en-US" sz="950" dirty="0"/>
-          </a:p>
-        </p:txBody>
-      </p:sp>
-      <p:sp>
-        <p:nvSpPr>
-          <p:cNvPr id="5" name="s3_dependence-title-0"/>
-          <p:cNvSpPr txBox="1"/>
-          <p:nvPr/>
-        </p:nvSpPr>
-        <p:spPr>
-          <a:xfrm>
-            <a:off x="3995928" y="1005840"/>
-            <a:ext cx="1842516" cy="438912"/>
-          </a:xfrm>
-          <a:prstGeom prst="rect">
-            <a:avLst/>
-          </a:prstGeom>
-          <a:noFill/>
-          <a:ln/>
-        </p:spPr>
-        <p:txBody>
-          <a:bodyPr wrap="square" lIns="0" tIns="0" rIns="0" bIns="0" rtlCol="0" anchor="t"/>
-          <a:lstStyle/>
-          <a:p>
-            <a:pPr indent="0" marL="0">
-              <a:buNone/>
-            </a:pPr>
-            <a:r>
-              <a:rPr lang="en-US" sz="1250" b="1" dirty="0">
-                <a:solidFill>
-                  <a:srgbClr val="111111"/>
-                </a:solidFill>
-              </a:rPr>
-              <a:t>Dependence near the motif</a:t>
-            </a:r>
-            <a:endParaRPr lang="en-US" sz="1250" dirty="0"/>
-          </a:p>
-        </p:txBody>
-      </p:sp>
-      <p:sp>
-        <p:nvSpPr>
-          <p:cNvPr id="6" name="s3_dependence-sub-0"/>
-          <p:cNvSpPr txBox="1"/>
-          <p:nvPr/>
-        </p:nvSpPr>
-        <p:spPr>
-          <a:xfrm>
-            <a:off x="3995928" y="1435608"/>
-            <a:ext cx="1842516" cy="310896"/>
-          </a:xfrm>
-          <a:prstGeom prst="rect">
-            <a:avLst/>
-          </a:prstGeom>
-          <a:noFill/>
-          <a:ln/>
-        </p:spPr>
-        <p:txBody>
-          <a:bodyPr wrap="square" lIns="0" tIns="0" rIns="0" bIns="0" rtlCol="0" anchor="t"/>
-          <a:lstStyle/>
-          <a:p>
-            <a:pPr indent="0" marL="0">
-              <a:buNone/>
-            </a:pPr>
-            <a:r>
-              <a:rPr lang="en-US" sz="950" dirty="0">
-                <a:solidFill>
-                  <a:srgbClr val="595959"/>
-                </a:solidFill>
-              </a:rPr>
-              <a:t>loss summed over windows within ±85 bp</a:t>
-            </a:r>
-            <a:endParaRPr lang="en-US" sz="950" dirty="0"/>
-          </a:p>
-        </p:txBody>
-      </p:sp>
-      <p:pic>
-        <p:nvPicPr>
-          <p:cNvPr id="7" name="Image 1" descr="/Users/z5162865/WongLab/AlphaGenome_Ap1/Analysis/slide_figures/panels/s3_dependence_c0_r0.png">    </p:cNvPr>
-          <p:cNvPicPr>
-            <a:picLocks noChangeAspect="1"/>
-          </p:cNvPicPr>
-          <p:nvPr/>
-        </p:nvPicPr>
-        <p:blipFill>
-          <a:blip r:embed="rId2"/>
-          <a:stretch>
-            <a:fillRect/>
-          </a:stretch>
-        </p:blipFill>
-        <p:spPr>
-          <a:xfrm>
-            <a:off x="3995928" y="1902045"/>
-            <a:ext cx="1842516" cy="1170247"/>
-          </a:xfrm>
-          <a:prstGeom prst="rect">
-            <a:avLst/>
-          </a:prstGeom>
-        </p:spPr>
-      </p:pic>
-      <p:pic>
-        <p:nvPicPr>
-          <p:cNvPr id="8" name="Image 2" descr="/Users/z5162865/WongLab/AlphaGenome_Ap1/Analysis/slide_figures/panels/s3_dependence_c0_r1.png">    </p:cNvPr>
-          <p:cNvPicPr>
-            <a:picLocks noChangeAspect="1"/>
-          </p:cNvPicPr>
-          <p:nvPr/>
-        </p:nvPicPr>
-        <p:blipFill>
-          <a:blip r:embed="rId3"/>
-          <a:stretch>
-            <a:fillRect/>
-          </a:stretch>
-        </p:blipFill>
-        <p:spPr>
-          <a:xfrm>
-            <a:off x="3995928" y="3438237"/>
-            <a:ext cx="1842516" cy="1170247"/>
-          </a:xfrm>
-          <a:prstGeom prst="rect">
-            <a:avLst/>
-          </a:prstGeom>
-        </p:spPr>
-      </p:pic>
-      <p:sp>
-        <p:nvSpPr>
-          <p:cNvPr id="9" name="s3_dependence-title-1"/>
-          <p:cNvSpPr txBox="1"/>
-          <p:nvPr/>
-        </p:nvSpPr>
-        <p:spPr>
-          <a:xfrm>
-            <a:off x="5911596" y="1005840"/>
-            <a:ext cx="1842516" cy="438912"/>
-          </a:xfrm>
-          <a:prstGeom prst="rect">
-            <a:avLst/>
-          </a:prstGeom>
-          <a:noFill/>
-          <a:ln/>
-        </p:spPr>
-        <p:txBody>
-          <a:bodyPr wrap="square" lIns="0" tIns="0" rIns="0" bIns="0" rtlCol="0" anchor="t"/>
-          <a:lstStyle/>
-          <a:p>
-            <a:pPr indent="0" marL="0">
-              <a:buNone/>
-            </a:pPr>
-            <a:r>
-              <a:rPr lang="en-US" sz="1250" b="1" dirty="0">
-                <a:solidFill>
-                  <a:srgbClr val="111111"/>
-                </a:solidFill>
-              </a:rPr>
-              <a:t>Dependence out in the context</a:t>
-            </a:r>
-            <a:endParaRPr lang="en-US" sz="1250" dirty="0"/>
-          </a:p>
-        </p:txBody>
-      </p:sp>
-      <p:sp>
-        <p:nvSpPr>
-          <p:cNvPr id="10" name="s3_dependence-sub-1"/>
-          <p:cNvSpPr txBox="1"/>
-          <p:nvPr/>
-        </p:nvSpPr>
-        <p:spPr>
-          <a:xfrm>
-            <a:off x="5911596" y="1435608"/>
-            <a:ext cx="1842516" cy="310896"/>
-          </a:xfrm>
-          <a:prstGeom prst="rect">
-            <a:avLst/>
-          </a:prstGeom>
-          <a:noFill/>
-          <a:ln/>
-        </p:spPr>
-        <p:txBody>
-          <a:bodyPr wrap="square" lIns="0" tIns="0" rIns="0" bIns="0" rtlCol="0" anchor="t"/>
-          <a:lstStyle/>
-          <a:p>
-            <a:pPr indent="0" marL="0">
-              <a:buNone/>
-            </a:pPr>
-            <a:r>
-              <a:rPr lang="en-US" sz="950" dirty="0">
-                <a:solidFill>
-                  <a:srgbClr val="595959"/>
-                </a:solidFill>
-              </a:rPr>
-              <a:t>loss summed over windows beyond that</a:t>
-            </a:r>
-            <a:endParaRPr lang="en-US" sz="950" dirty="0"/>
-          </a:p>
-        </p:txBody>
-      </p:sp>
-      <p:pic>
-        <p:nvPicPr>
-          <p:cNvPr id="11" name="Image 3" descr="/Users/z5162865/WongLab/AlphaGenome_Ap1/Analysis/slide_figures/panels/s3_dependence_c1_r0.png">    </p:cNvPr>
-          <p:cNvPicPr>
-            <a:picLocks noChangeAspect="1"/>
-          </p:cNvPicPr>
-          <p:nvPr/>
-        </p:nvPicPr>
-        <p:blipFill>
-          <a:blip r:embed="rId4"/>
-          <a:stretch>
-            <a:fillRect/>
-          </a:stretch>
-        </p:blipFill>
-        <p:spPr>
-          <a:xfrm>
-            <a:off x="5911596" y="1902045"/>
-            <a:ext cx="1842516" cy="1170247"/>
-          </a:xfrm>
-          <a:prstGeom prst="rect">
-            <a:avLst/>
-          </a:prstGeom>
-        </p:spPr>
-      </p:pic>
-      <p:pic>
-        <p:nvPicPr>
-          <p:cNvPr id="12" name="Image 4" descr="/Users/z5162865/WongLab/AlphaGenome_Ap1/Analysis/slide_figures/panels/s3_dependence_c1_r1.png">    </p:cNvPr>
-          <p:cNvPicPr>
-            <a:picLocks noChangeAspect="1"/>
-          </p:cNvPicPr>
-          <p:nvPr/>
-        </p:nvPicPr>
-        <p:blipFill>
-          <a:blip r:embed="rId5"/>
-          <a:stretch>
-            <a:fillRect/>
-          </a:stretch>
-        </p:blipFill>
-        <p:spPr>
-          <a:xfrm>
-            <a:off x="5911596" y="3438237"/>
-            <a:ext cx="1842516" cy="1170247"/>
-          </a:xfrm>
-          <a:prstGeom prst="rect">
-            <a:avLst/>
-          </a:prstGeom>
-        </p:spPr>
-      </p:pic>
-      <p:sp>
-        <p:nvSpPr>
-          <p:cNvPr id="13" name="s3_dependence-title-2"/>
-          <p:cNvSpPr txBox="1"/>
-          <p:nvPr/>
-        </p:nvSpPr>
-        <p:spPr>
-          <a:xfrm>
-            <a:off x="7827264" y="1005840"/>
-            <a:ext cx="1842516" cy="438912"/>
-          </a:xfrm>
-          <a:prstGeom prst="rect">
-            <a:avLst/>
-          </a:prstGeom>
-          <a:noFill/>
-          <a:ln/>
-        </p:spPr>
-        <p:txBody>
-          <a:bodyPr wrap="square" lIns="0" tIns="0" rIns="0" bIns="0" rtlCol="0" anchor="t"/>
-          <a:lstStyle/>
-          <a:p>
-            <a:pPr indent="0" marL="0">
-              <a:buNone/>
-            </a:pPr>
-            <a:r>
-              <a:rPr lang="en-US" sz="1250" b="1" dirty="0">
-                <a:solidFill>
-                  <a:srgbClr val="111111"/>
-                </a:solidFill>
-              </a:rPr>
-              <a:t>Spread along the element</a:t>
-            </a:r>
-            <a:endParaRPr lang="en-US" sz="1250" dirty="0"/>
-          </a:p>
-        </p:txBody>
-      </p:sp>
-      <p:sp>
-        <p:nvSpPr>
-          <p:cNvPr id="14" name="s3_dependence-sub-2"/>
-          <p:cNvSpPr txBox="1"/>
-          <p:nvPr/>
-        </p:nvSpPr>
-        <p:spPr>
-          <a:xfrm>
-            <a:off x="7827264" y="1435608"/>
-            <a:ext cx="1842516" cy="310896"/>
-          </a:xfrm>
-          <a:prstGeom prst="rect">
-            <a:avLst/>
-          </a:prstGeom>
-          <a:noFill/>
-          <a:ln/>
-        </p:spPr>
-        <p:txBody>
-          <a:bodyPr wrap="square" lIns="0" tIns="0" rIns="0" bIns="0" rtlCol="0" anchor="t"/>
-          <a:lstStyle/>
-          <a:p>
-            <a:pPr indent="0" marL="0">
-              <a:buNone/>
-            </a:pPr>
-            <a:r>
-              <a:rPr lang="en-US" sz="950" dirty="0">
-                <a:solidFill>
-                  <a:srgbClr val="595959"/>
-                </a:solidFill>
-              </a:rPr>
-              <a:t>SD of window position, weighted by loss</a:t>
-            </a:r>
-            <a:endParaRPr lang="en-US" sz="950" dirty="0"/>
-          </a:p>
-        </p:txBody>
-      </p:sp>
-      <p:pic>
-        <p:nvPicPr>
-          <p:cNvPr id="15" name="Image 5" descr="/Users/z5162865/WongLab/AlphaGenome_Ap1/Analysis/slide_figures/panels/s3_dependence_c2_r0.png">    </p:cNvPr>
-          <p:cNvPicPr>
-            <a:picLocks noChangeAspect="1"/>
-          </p:cNvPicPr>
-          <p:nvPr/>
-        </p:nvPicPr>
-        <p:blipFill>
-          <a:blip r:embed="rId6"/>
-          <a:stretch>
-            <a:fillRect/>
-          </a:stretch>
-        </p:blipFill>
-        <p:spPr>
-          <a:xfrm>
-            <a:off x="7827264" y="1902045"/>
-            <a:ext cx="1842516" cy="1170247"/>
-          </a:xfrm>
-          <a:prstGeom prst="rect">
-            <a:avLst/>
-          </a:prstGeom>
-        </p:spPr>
-      </p:pic>
-      <p:pic>
-        <p:nvPicPr>
-          <p:cNvPr id="16" name="Image 6" descr="/Users/z5162865/WongLab/AlphaGenome_Ap1/Analysis/slide_figures/panels/s3_dependence_c2_r1.png">    </p:cNvPr>
-          <p:cNvPicPr>
-            <a:picLocks noChangeAspect="1"/>
-          </p:cNvPicPr>
-          <p:nvPr/>
-        </p:nvPicPr>
-        <p:blipFill>
-          <a:blip r:embed="rId7"/>
-          <a:stretch>
-            <a:fillRect/>
-          </a:stretch>
-        </p:blipFill>
-        <p:spPr>
-          <a:xfrm>
-            <a:off x="7827264" y="3438237"/>
-            <a:ext cx="1842516" cy="1170247"/>
-          </a:xfrm>
-          <a:prstGeom prst="rect">
-            <a:avLst/>
-          </a:prstGeom>
-        </p:spPr>
-      </p:pic>
-      <p:sp>
-        <p:nvSpPr>
-          <p:cNvPr id="17" name="s3_dependence-title-3"/>
-          <p:cNvSpPr txBox="1"/>
-          <p:nvPr/>
-        </p:nvSpPr>
-        <p:spPr>
-          <a:xfrm>
-            <a:off x="9742932" y="1005840"/>
-            <a:ext cx="1842516" cy="438912"/>
-          </a:xfrm>
-          <a:prstGeom prst="rect">
-            <a:avLst/>
-          </a:prstGeom>
-          <a:noFill/>
-          <a:ln/>
-        </p:spPr>
-        <p:txBody>
-          <a:bodyPr wrap="square" lIns="0" tIns="0" rIns="0" bIns="0" rtlCol="0" anchor="t"/>
-          <a:lstStyle/>
-          <a:p>
-            <a:pPr indent="0" marL="0">
-              <a:buNone/>
-            </a:pPr>
-            <a:r>
-              <a:rPr lang="en-US" sz="1250" b="1" dirty="0">
-                <a:solidFill>
-                  <a:srgbClr val="111111"/>
-                </a:solidFill>
-              </a:rPr>
-              <a:t>Depth of the single best base</a:t>
-            </a:r>
-            <a:endParaRPr lang="en-US" sz="1250" dirty="0"/>
-          </a:p>
-        </p:txBody>
-      </p:sp>
-      <p:sp>
-        <p:nvSpPr>
-          <p:cNvPr id="18" name="s3_dependence-sub-3"/>
-          <p:cNvSpPr txBox="1"/>
-          <p:nvPr/>
-        </p:nvSpPr>
-        <p:spPr>
-          <a:xfrm>
-            <a:off x="9742932" y="1435608"/>
-            <a:ext cx="1842516" cy="310896"/>
-          </a:xfrm>
-          <a:prstGeom prst="rect">
-            <a:avLst/>
-          </a:prstGeom>
-          <a:noFill/>
-          <a:ln/>
-        </p:spPr>
-        <p:txBody>
-          <a:bodyPr wrap="square" lIns="0" tIns="0" rIns="0" bIns="0" rtlCol="0" anchor="t"/>
-          <a:lstStyle/>
-          <a:p>
-            <a:pPr indent="0" marL="0">
-              <a:buNone/>
-            </a:pPr>
-            <a:r>
-              <a:rPr lang="en-US" sz="950" dirty="0">
-                <a:solidFill>
-                  <a:srgbClr val="595959"/>
-                </a:solidFill>
-              </a:rPr>
-              <a:t>largest effect of any one base change, ±30 bp</a:t>
-            </a:r>
-            <a:endParaRPr lang="en-US" sz="950" dirty="0"/>
-          </a:p>
-        </p:txBody>
-      </p:sp>
-      <p:pic>
-        <p:nvPicPr>
-          <p:cNvPr id="19" name="Image 7" descr="/Users/z5162865/WongLab/AlphaGenome_Ap1/Analysis/slide_figures/panels/s3_dependence_c3_r0.png">    </p:cNvPr>
-          <p:cNvPicPr>
-            <a:picLocks noChangeAspect="1"/>
-          </p:cNvPicPr>
-          <p:nvPr/>
-        </p:nvPicPr>
-        <p:blipFill>
-          <a:blip r:embed="rId8"/>
-          <a:stretch>
-            <a:fillRect/>
-          </a:stretch>
-        </p:blipFill>
-        <p:spPr>
-          <a:xfrm>
-            <a:off x="9742932" y="1902045"/>
-            <a:ext cx="1842516" cy="1170247"/>
-          </a:xfrm>
-          <a:prstGeom prst="rect">
-            <a:avLst/>
-          </a:prstGeom>
-        </p:spPr>
-      </p:pic>
-      <p:pic>
-        <p:nvPicPr>
-          <p:cNvPr id="20" name="Image 8" descr="/Users/z5162865/WongLab/AlphaGenome_Ap1/Analysis/slide_figures/panels/s3_dependence_c3_r1.png">    </p:cNvPr>
-          <p:cNvPicPr>
-            <a:picLocks noChangeAspect="1"/>
-          </p:cNvPicPr>
-          <p:nvPr/>
-        </p:nvPicPr>
-        <p:blipFill>
-          <a:blip r:embed="rId9"/>
-          <a:stretch>
-            <a:fillRect/>
-          </a:stretch>
-        </p:blipFill>
-        <p:spPr>
-          <a:xfrm>
-            <a:off x="9742932" y="3438237"/>
-            <a:ext cx="1842516" cy="1170247"/>
-          </a:xfrm>
-          <a:prstGeom prst="rect">
-            <a:avLst/>
-          </a:prstGeom>
-        </p:spPr>
-      </p:pic>
-      <p:sp>
-        <p:nvSpPr>
-          <p:cNvPr id="21" name="s3_dependence-row-0"/>
-          <p:cNvSpPr txBox="1"/>
-          <p:nvPr/>
-        </p:nvSpPr>
-        <p:spPr>
-          <a:xfrm rot="16200000">
-            <a:off x="2953512" y="1837944"/>
-            <a:ext cx="1371600" cy="1371600"/>
-          </a:xfrm>
-          <a:prstGeom prst="rect">
-            <a:avLst/>
-          </a:prstGeom>
-          <a:noFill/>
-          <a:ln/>
-        </p:spPr>
-        <p:txBody>
-          <a:bodyPr wrap="square" lIns="0" tIns="0" rIns="0" bIns="0" rtlCol="0" anchor="ctr"/>
-          <a:lstStyle/>
-          <a:p>
-            <a:pPr algn="ctr" indent="0" marL="0">
-              <a:buNone/>
-            </a:pPr>
-            <a:r>
-              <a:rPr lang="en-US" sz="1000" dirty="0">
-                <a:solidFill>
-                  <a:srgbClr val="111111"/>
-                </a:solidFill>
-              </a:rPr>
-              <a:t>all sites, nothing controlled</a:t>
-            </a:r>
-            <a:endParaRPr lang="en-US" sz="1000" dirty="0"/>
-          </a:p>
-        </p:txBody>
-      </p:sp>
-      <p:sp>
-        <p:nvSpPr>
-          <p:cNvPr id="22" name="s3_dependence-row-1"/>
-          <p:cNvSpPr txBox="1"/>
-          <p:nvPr/>
-        </p:nvSpPr>
-        <p:spPr>
-          <a:xfrm rot="16200000">
-            <a:off x="2953512" y="3374136"/>
-            <a:ext cx="1371600" cy="1371600"/>
-          </a:xfrm>
-          <a:prstGeom prst="rect">
-            <a:avLst/>
-          </a:prstGeom>
-          <a:noFill/>
-          <a:ln/>
-        </p:spPr>
-        <p:txBody>
-          <a:bodyPr wrap="square" lIns="0" tIns="0" rIns="0" bIns="0" rtlCol="0" anchor="ctr"/>
-          <a:lstStyle/>
-          <a:p>
-            <a:pPr algn="ctr" indent="0" marL="0">
-              <a:buNone/>
-            </a:pPr>
-            <a:r>
-              <a:rPr lang="en-US" sz="1000" dirty="0">
-                <a:solidFill>
-                  <a:srgbClr val="111111"/>
-                </a:solidFill>
-              </a:rPr>
-              <a:t>each class against its own matched Stable controls</a:t>
-            </a:r>
-            <a:endParaRPr lang="en-US" sz="1000" dirty="0"/>
-          </a:p>
-        </p:txBody>
-      </p:sp>
-      <p:sp>
-        <p:nvSpPr>
-          <p:cNvPr id="23" name="s3_dependence-dot-0"/>
-          <p:cNvSpPr/>
-          <p:nvPr/>
-        </p:nvSpPr>
-        <p:spPr>
-          <a:xfrm>
-            <a:off x="3429000" y="4960620"/>
-            <a:ext cx="109728" cy="109728"/>
-          </a:xfrm>
-          <a:prstGeom prst="ellipse">
-            <a:avLst/>
-          </a:prstGeom>
-          <a:solidFill>
-            <a:srgbClr val="4F4F4F"/>
-          </a:solidFill>
-          <a:ln w="12700">
-            <a:solidFill>
-              <a:srgbClr val="4F4F4F"/>
-            </a:solidFill>
-            <a:prstDash val="solid"/>
-          </a:ln>
-        </p:spPr>
-      </p:sp>
-      <p:sp>
-        <p:nvSpPr>
-          <p:cNvPr id="24" name="s3_dependence-leg-0"/>
-          <p:cNvSpPr txBox="1"/>
-          <p:nvPr/>
-        </p:nvSpPr>
-        <p:spPr>
-          <a:xfrm>
-            <a:off x="3584448" y="4919472"/>
-            <a:ext cx="1057046" cy="201168"/>
-          </a:xfrm>
-          <a:prstGeom prst="rect">
-            <a:avLst/>
-          </a:prstGeom>
-          <a:noFill/>
-          <a:ln/>
-        </p:spPr>
-        <p:txBody>
-          <a:bodyPr wrap="square" lIns="0" tIns="0" rIns="0" bIns="0" rtlCol="0" anchor="ctr"/>
-          <a:lstStyle/>
-          <a:p>
-            <a:pPr indent="0" marL="0">
-              <a:buNone/>
-            </a:pPr>
-            <a:r>
-              <a:rPr lang="en-US" sz="1050" dirty="0">
-                <a:solidFill>
-                  <a:srgbClr val="111111"/>
-                </a:solidFill>
-              </a:rPr>
-              <a:t>Dynamic (all)</a:t>
-            </a:r>
-            <a:endParaRPr lang="en-US" sz="1050" dirty="0"/>
-          </a:p>
-        </p:txBody>
-      </p:sp>
-      <p:sp>
-        <p:nvSpPr>
-          <p:cNvPr id="25" name="s3_dependence-dot-1"/>
-          <p:cNvSpPr/>
-          <p:nvPr/>
-        </p:nvSpPr>
-        <p:spPr>
-          <a:xfrm>
-            <a:off x="4751222" y="4960620"/>
-            <a:ext cx="109728" cy="109728"/>
-          </a:xfrm>
-          <a:prstGeom prst="ellipse">
-            <a:avLst/>
-          </a:prstGeom>
-          <a:solidFill>
-            <a:srgbClr val="C2551C"/>
-          </a:solidFill>
-          <a:ln w="12700">
-            <a:solidFill>
-              <a:srgbClr val="C2551C"/>
-            </a:solidFill>
-            <a:prstDash val="solid"/>
-          </a:ln>
-        </p:spPr>
-      </p:sp>
-      <p:sp>
-        <p:nvSpPr>
-          <p:cNvPr id="26" name="s3_dependence-leg-1"/>
-          <p:cNvSpPr txBox="1"/>
-          <p:nvPr/>
-        </p:nvSpPr>
-        <p:spPr>
-          <a:xfrm>
-            <a:off x="4906670" y="4919472"/>
-            <a:ext cx="596189" cy="201168"/>
-          </a:xfrm>
-          <a:prstGeom prst="rect">
-            <a:avLst/>
-          </a:prstGeom>
-          <a:noFill/>
-          <a:ln/>
-        </p:spPr>
-        <p:txBody>
-          <a:bodyPr wrap="square" lIns="0" tIns="0" rIns="0" bIns="0" rtlCol="0" anchor="ctr"/>
-          <a:lstStyle/>
-          <a:p>
-            <a:pPr indent="0" marL="0">
-              <a:buNone/>
-            </a:pPr>
-            <a:r>
-              <a:rPr lang="en-US" sz="1050" dirty="0">
-                <a:solidFill>
-                  <a:srgbClr val="111111"/>
-                </a:solidFill>
-              </a:rPr>
-              <a:t>Age Up</a:t>
-            </a:r>
-            <a:endParaRPr lang="en-US" sz="1050" dirty="0"/>
-          </a:p>
-        </p:txBody>
-      </p:sp>
-      <p:sp>
-        <p:nvSpPr>
-          <p:cNvPr id="27" name="s3_dependence-dot-2"/>
-          <p:cNvSpPr/>
-          <p:nvPr/>
-        </p:nvSpPr>
-        <p:spPr>
-          <a:xfrm>
-            <a:off x="5612587" y="4960620"/>
-            <a:ext cx="109728" cy="109728"/>
-          </a:xfrm>
-          <a:prstGeom prst="ellipse">
-            <a:avLst/>
-          </a:prstGeom>
-          <a:solidFill>
-            <a:srgbClr val="1F6FB2"/>
-          </a:solidFill>
-          <a:ln w="12700">
-            <a:solidFill>
-              <a:srgbClr val="1F6FB2"/>
-            </a:solidFill>
-            <a:prstDash val="solid"/>
-          </a:ln>
-        </p:spPr>
-      </p:sp>
-      <p:sp>
-        <p:nvSpPr>
-          <p:cNvPr id="28" name="s3_dependence-leg-2"/>
-          <p:cNvSpPr txBox="1"/>
-          <p:nvPr/>
-        </p:nvSpPr>
-        <p:spPr>
-          <a:xfrm>
-            <a:off x="5768035" y="4919472"/>
-            <a:ext cx="727862" cy="201168"/>
-          </a:xfrm>
-          <a:prstGeom prst="rect">
-            <a:avLst/>
-          </a:prstGeom>
-          <a:noFill/>
-          <a:ln/>
-        </p:spPr>
-        <p:txBody>
-          <a:bodyPr wrap="square" lIns="0" tIns="0" rIns="0" bIns="0" rtlCol="0" anchor="ctr"/>
-          <a:lstStyle/>
-          <a:p>
-            <a:pPr indent="0" marL="0">
-              <a:buNone/>
-            </a:pPr>
-            <a:r>
-              <a:rPr lang="en-US" sz="1050" dirty="0">
-                <a:solidFill>
-                  <a:srgbClr val="111111"/>
-                </a:solidFill>
-              </a:rPr>
-              <a:t>Age Down</a:t>
-            </a:r>
-            <a:endParaRPr lang="en-US" sz="1050" dirty="0"/>
-          </a:p>
-        </p:txBody>
-      </p:sp>
-      <p:sp>
-        <p:nvSpPr>
-          <p:cNvPr id="29" name="s3_dependence-dot-3"/>
-          <p:cNvSpPr/>
-          <p:nvPr/>
-        </p:nvSpPr>
-        <p:spPr>
-          <a:xfrm>
-            <a:off x="6605626" y="4960620"/>
-            <a:ext cx="109728" cy="109728"/>
-          </a:xfrm>
-          <a:prstGeom prst="ellipse">
-            <a:avLst/>
-          </a:prstGeom>
-          <a:solidFill>
-            <a:srgbClr val="2E7D32"/>
-          </a:solidFill>
-          <a:ln w="12700">
-            <a:solidFill>
-              <a:srgbClr val="2E7D32"/>
-            </a:solidFill>
-            <a:prstDash val="solid"/>
-          </a:ln>
-        </p:spPr>
-      </p:sp>
-      <p:sp>
-        <p:nvSpPr>
-          <p:cNvPr id="30" name="s3_dependence-leg-3"/>
-          <p:cNvSpPr txBox="1"/>
-          <p:nvPr/>
-        </p:nvSpPr>
-        <p:spPr>
-          <a:xfrm>
-            <a:off x="6761074" y="4919472"/>
-            <a:ext cx="925373" cy="201168"/>
-          </a:xfrm>
-          <a:prstGeom prst="rect">
-            <a:avLst/>
-          </a:prstGeom>
-          <a:noFill/>
-          <a:ln/>
-        </p:spPr>
-        <p:txBody>
-          <a:bodyPr wrap="square" lIns="0" tIns="0" rIns="0" bIns="0" rtlCol="0" anchor="ctr"/>
-          <a:lstStyle/>
-          <a:p>
-            <a:pPr indent="0" marL="0">
-              <a:buNone/>
-            </a:pPr>
-            <a:r>
-              <a:rPr lang="en-US" sz="1050" dirty="0">
-                <a:solidFill>
-                  <a:srgbClr val="111111"/>
-                </a:solidFill>
-              </a:rPr>
-              <a:t>Exercise Up</a:t>
-            </a:r>
-            <a:endParaRPr lang="en-US" sz="1050" dirty="0"/>
-          </a:p>
-        </p:txBody>
-      </p:sp>
-      <p:sp>
-        <p:nvSpPr>
-          <p:cNvPr id="31" name="s3_dependence-dot-4"/>
-          <p:cNvSpPr/>
-          <p:nvPr/>
-        </p:nvSpPr>
-        <p:spPr>
-          <a:xfrm>
-            <a:off x="7796174" y="4960620"/>
-            <a:ext cx="109728" cy="109728"/>
-          </a:xfrm>
-          <a:prstGeom prst="ellipse">
-            <a:avLst/>
-          </a:prstGeom>
-          <a:solidFill>
-            <a:srgbClr val="7B3FA0"/>
-          </a:solidFill>
-          <a:ln w="12700">
-            <a:solidFill>
-              <a:srgbClr val="7B3FA0"/>
-            </a:solidFill>
-            <a:prstDash val="solid"/>
-          </a:ln>
-        </p:spPr>
-      </p:sp>
-      <p:sp>
-        <p:nvSpPr>
-          <p:cNvPr id="32" name="s3_dependence-leg-4"/>
-          <p:cNvSpPr txBox="1"/>
-          <p:nvPr/>
-        </p:nvSpPr>
-        <p:spPr>
-          <a:xfrm>
-            <a:off x="7951622" y="4919472"/>
-            <a:ext cx="1057046" cy="201168"/>
-          </a:xfrm>
-          <a:prstGeom prst="rect">
-            <a:avLst/>
-          </a:prstGeom>
-          <a:noFill/>
-          <a:ln/>
-        </p:spPr>
-        <p:txBody>
-          <a:bodyPr wrap="square" lIns="0" tIns="0" rIns="0" bIns="0" rtlCol="0" anchor="ctr"/>
-          <a:lstStyle/>
-          <a:p>
-            <a:pPr indent="0" marL="0">
-              <a:buNone/>
-            </a:pPr>
-            <a:r>
-              <a:rPr lang="en-US" sz="1050" dirty="0">
-                <a:solidFill>
-                  <a:srgbClr val="111111"/>
-                </a:solidFill>
-              </a:rPr>
-              <a:t>Exercise Down</a:t>
-            </a:r>
-            <a:endParaRPr lang="en-US" sz="1050" dirty="0"/>
-          </a:p>
-        </p:txBody>
-      </p:sp>
-      <p:sp>
-        <p:nvSpPr>
-          <p:cNvPr id="33" name="s3_dependence-dot-5"/>
-          <p:cNvSpPr/>
-          <p:nvPr/>
-        </p:nvSpPr>
-        <p:spPr>
-          <a:xfrm>
-            <a:off x="9118397" y="4960620"/>
-            <a:ext cx="109728" cy="109728"/>
-          </a:xfrm>
-          <a:prstGeom prst="ellipse">
-            <a:avLst/>
-          </a:prstGeom>
-          <a:solidFill>
-            <a:srgbClr val="B3B2AE"/>
-          </a:solidFill>
-          <a:ln w="12700">
-            <a:solidFill>
-              <a:srgbClr val="B3B2AE"/>
-            </a:solidFill>
-            <a:prstDash val="solid"/>
-          </a:ln>
-        </p:spPr>
-      </p:sp>
-      <p:sp>
-        <p:nvSpPr>
-          <p:cNvPr id="34" name="s3_dependence-leg-5"/>
-          <p:cNvSpPr txBox="1"/>
-          <p:nvPr/>
-        </p:nvSpPr>
-        <p:spPr>
-          <a:xfrm>
-            <a:off x="9273845" y="4919472"/>
-            <a:ext cx="2373782" cy="201168"/>
-          </a:xfrm>
-          <a:prstGeom prst="rect">
-            <a:avLst/>
-          </a:prstGeom>
-          <a:noFill/>
-          <a:ln/>
-        </p:spPr>
-        <p:txBody>
-          <a:bodyPr wrap="square" lIns="0" tIns="0" rIns="0" bIns="0" rtlCol="0" anchor="ctr"/>
-          <a:lstStyle/>
-          <a:p>
-            <a:pPr indent="0" marL="0">
-              <a:buNone/>
-            </a:pPr>
-            <a:r>
-              <a:rPr lang="en-US" sz="1050" dirty="0">
-                <a:solidFill>
-                  <a:srgbClr val="111111"/>
-                </a:solidFill>
-              </a:rPr>
-              <a:t>Stable (all, or matched controls)</a:t>
-            </a:r>
-            <a:endParaRPr lang="en-US" sz="1050" dirty="0"/>
-          </a:p>
-        </p:txBody>
-      </p:sp>
-      <p:sp>
-        <p:nvSpPr>
-          <p:cNvPr id="35" name="s3_dependence-key"/>
-          <p:cNvSpPr txBox="1"/>
-          <p:nvPr/>
-        </p:nvSpPr>
-        <p:spPr>
-          <a:xfrm>
-            <a:off x="3429000" y="5193792"/>
-            <a:ext cx="8229600" cy="502920"/>
-          </a:xfrm>
-          <a:prstGeom prst="rect">
-            <a:avLst/>
-          </a:prstGeom>
-          <a:noFill/>
-          <a:ln/>
-        </p:spPr>
-        <p:txBody>
-          <a:bodyPr wrap="square" lIns="0" tIns="0" rIns="0" bIns="0" rtlCol="0" anchor="ctr"/>
-          <a:lstStyle/>
-          <a:p>
-            <a:pPr indent="0" marL="0">
-              <a:buNone/>
-            </a:pPr>
-            <a:r>
-              <a:rPr lang="en-US" sz="900" dirty="0">
-                <a:solidFill>
-                  <a:srgbClr val="595959"/>
-                </a:solidFill>
-              </a:rPr>
-              <a:t>grey line and band (top row): all Stable sites, median with 95% bootstrap CI.   grey dots (bottom row): that class's own matched Stable controls.   Stars test the class against that reference — Mann–Whitney on all sites, paired Wilcoxon on matched pairs — BH across all 40 tests.   *** p&lt;0.001   ** p&lt;0.01   * p&lt;0.05   ns ≥ 0.05</a:t>
-            </a:r>
-            <a:endParaRPr lang="en-US" sz="900" dirty="0"/>
-          </a:p>
-        </p:txBody>
-      </p:sp>
-      <p:sp>
-        <p:nvSpPr>
-          <p:cNvPr id="36" name="Text 0"/>
+          <p:cNvPr id="4" name="Text 0"/>
           <p:cNvSpPr/>
           <p:nvPr>
             <p:ph idx="101" type="body" hasCustomPrompt="1"/>
@@ -3903,7 +3003,7 @@
                   <a:srgbClr val="111111"/>
                 </a:solidFill>
               </a:rPr>
-              <a:t>the same shift in every class and on all three measures — strongest in Age Up and Exercise Down, absent only in Age Down</a:t>
+              <a:t>the stable site has MEF2 abutting its AP-1 motif at 19 bp; the age-gained site has no MEF2 anywhere in the element</a:t>
             </a:r>
             <a:endParaRPr lang="en-US" sz="1500" dirty="0"/>
           </a:p>
@@ -4011,51 +3111,15 @@
                   <a:schemeClr val="tx1"/>
                 </a:solidFill>
               </a:rPr>
-              <a:t>Position is a dial, and a moved motif never replaces the original</a:t>
+              <a:t>Responsive sites spread their dependence out</a:t>
             </a:r>
             <a:endParaRPr lang="en-US" sz="2800" dirty="0"/>
-          </a:p>
-        </p:txBody>
-      </p:sp>
-      <p:sp>
-        <p:nvSpPr>
-          <p:cNvPr id="3" name="copy-title"/>
-          <p:cNvSpPr txBox="1"/>
-          <p:nvPr/>
-        </p:nvSpPr>
-        <p:spPr>
-          <a:xfrm>
-            <a:off x="502920" y="1024128"/>
-            <a:ext cx="2834640" cy="274320"/>
-          </a:xfrm>
-          <a:prstGeom prst="rect">
-            <a:avLst/>
-          </a:prstGeom>
-          <a:noFill/>
-          <a:ln/>
-        </p:spPr>
-        <p:txBody>
-          <a:bodyPr wrap="square" lIns="0" tIns="0" rIns="0" bIns="0" rtlCol="0" anchor="ctr"/>
-          <a:lstStyle/>
-          <a:p>
-            <a:pPr indent="0" marL="0">
-              <a:buNone/>
-            </a:pPr>
-            <a:r>
-              <a:rPr lang="en-US" sz="1250" b="1" dirty="0">
-                <a:solidFill>
-                  <a:srgbClr val="111111"/>
-                </a:solidFill>
-              </a:rPr>
-              <a:t>Where the added copy works best</a:t>
-            </a:r>
-            <a:endParaRPr lang="en-US" sz="1250" dirty="0"/>
           </a:p>
         </p:txBody>
       </p:sp>
       <p:pic>
         <p:nvPicPr>
-          <p:cNvPr id="4" name="Image 0" descr="/Users/z5162865/WongLab/AlphaGenome_Ap1/Analysis/slide_figures/panels/d_addcopy.png">    </p:cNvPr>
+          <p:cNvPr id="3" name="Image 0" descr="/Users/z5162865/WongLab/AlphaGenome_Ap1/Analysis/slide_figures/panels/d_profile.png">    </p:cNvPr>
           <p:cNvPicPr>
             <a:picLocks noChangeAspect="1"/>
           </p:cNvPicPr>
@@ -4069,8 +3133,8 @@
         </p:blipFill>
         <p:spPr>
           <a:xfrm>
-            <a:off x="709758" y="1325880"/>
-            <a:ext cx="2420965" cy="1783080"/>
+            <a:off x="502920" y="1373869"/>
+            <a:ext cx="2286000" cy="1915702"/>
           </a:xfrm>
           <a:prstGeom prst="rect">
             <a:avLst/>
@@ -4079,14 +3143,14 @@
       </p:pic>
       <p:sp>
         <p:nvSpPr>
-          <p:cNvPr id="5" name="move-title"/>
+          <p:cNvPr id="4" name="profile-caption"/>
           <p:cNvSpPr txBox="1"/>
           <p:nvPr/>
         </p:nvSpPr>
         <p:spPr>
           <a:xfrm>
-            <a:off x="502920" y="3218688"/>
-            <a:ext cx="2834640" cy="274320"/>
+            <a:off x="502920" y="3337560"/>
+            <a:ext cx="2286000" cy="822960"/>
           </a:xfrm>
           <a:prstGeom prst="rect">
             <a:avLst/>
@@ -4102,20 +3166,92 @@
               <a:buNone/>
             </a:pPr>
             <a:r>
+              <a:rPr lang="en-US" sz="950" dirty="0">
+                <a:solidFill>
+                  <a:srgbClr val="595959"/>
+                </a:solidFill>
+              </a:rPr>
+              <a:t>one site’s sliding-window profile: each bar is a 10 bp window replaced, shaded band = within ±85 bp of the motif</a:t>
+            </a:r>
+            <a:endParaRPr lang="en-US" sz="950" dirty="0"/>
+          </a:p>
+        </p:txBody>
+      </p:sp>
+      <p:sp>
+        <p:nvSpPr>
+          <p:cNvPr id="5" name="s3_dependence-title-0"/>
+          <p:cNvSpPr txBox="1"/>
+          <p:nvPr/>
+        </p:nvSpPr>
+        <p:spPr>
+          <a:xfrm>
+            <a:off x="3401568" y="1143000"/>
+            <a:ext cx="1991106" cy="438912"/>
+          </a:xfrm>
+          <a:prstGeom prst="rect">
+            <a:avLst/>
+          </a:prstGeom>
+          <a:noFill/>
+          <a:ln/>
+        </p:spPr>
+        <p:txBody>
+          <a:bodyPr wrap="square" lIns="0" tIns="0" rIns="0" bIns="0" rtlCol="0" anchor="t"/>
+          <a:lstStyle/>
+          <a:p>
+            <a:pPr indent="0" marL="0">
+              <a:buNone/>
+            </a:pPr>
+            <a:r>
               <a:rPr lang="en-US" sz="1250" b="1" dirty="0">
                 <a:solidFill>
                   <a:srgbClr val="111111"/>
                 </a:solidFill>
               </a:rPr>
-              <a:t>...and where it lands when moved</a:t>
+              <a:t>Dependence near the motif</a:t>
             </a:r>
             <a:endParaRPr lang="en-US" sz="1250" dirty="0"/>
+          </a:p>
+        </p:txBody>
+      </p:sp>
+      <p:sp>
+        <p:nvSpPr>
+          <p:cNvPr id="6" name="s3_dependence-sub-0"/>
+          <p:cNvSpPr txBox="1"/>
+          <p:nvPr/>
+        </p:nvSpPr>
+        <p:spPr>
+          <a:xfrm>
+            <a:off x="3401568" y="1572768"/>
+            <a:ext cx="1991106" cy="310896"/>
+          </a:xfrm>
+          <a:prstGeom prst="rect">
+            <a:avLst/>
+          </a:prstGeom>
+          <a:noFill/>
+          <a:ln/>
+        </p:spPr>
+        <p:txBody>
+          <a:bodyPr wrap="square" lIns="0" tIns="0" rIns="0" bIns="0" rtlCol="0" anchor="t"/>
+          <a:lstStyle/>
+          <a:p>
+            <a:pPr indent="0" marL="0">
+              <a:buNone/>
+            </a:pPr>
+            <a:r>
+              <a:rPr lang="en-US" sz="950" dirty="0">
+                <a:solidFill>
+                  <a:srgbClr val="595959"/>
+                </a:solidFill>
+              </a:rPr>
+              <a:t>loss summed over windows within ±85 bp</a:t>
+            </a:r>
+            <a:endParaRPr lang="en-US" sz="950" dirty="0"/>
           </a:p>
         </p:txBody>
       </p:sp>
       <p:pic>
         <p:nvPicPr>
-          <p:cNvPr id="6" name="Image 1" descr="/Users/z5162865/WongLab/AlphaGenome_Ap1/Analysis/slide_figures/panels/d_relocate.png">    </p:cNvPr>
+          <p:cNvPr id="7" name="Image 1" descr="/Users/z5162865/WongLab/AlphaGenome_Ap1/Analysis/slide_figures/panels/s3_dependence_c0_r0.png">    </p:cNvPr>
           <p:cNvPicPr>
             <a:picLocks noChangeAspect="1"/>
           </p:cNvPicPr>
@@ -4129,8 +3265,8 @@
         </p:blipFill>
         <p:spPr>
           <a:xfrm>
-            <a:off x="662666" y="3520440"/>
-            <a:ext cx="2515149" cy="1783080"/>
+            <a:off x="3401568" y="2395936"/>
+            <a:ext cx="1991106" cy="1810096"/>
           </a:xfrm>
           <a:prstGeom prst="rect">
             <a:avLst/>
@@ -4139,107 +3275,71 @@
       </p:pic>
       <p:sp>
         <p:nvSpPr>
-          <p:cNvPr id="7" name="curve-caption"/>
+          <p:cNvPr id="8" name="s3_dependence-title-1"/>
           <p:cNvSpPr txBox="1"/>
           <p:nvPr/>
         </p:nvSpPr>
         <p:spPr>
           <a:xfrm>
-            <a:off x="502920" y="5349240"/>
-            <a:ext cx="2926080" cy="457200"/>
-          </a:xfrm>
-          <a:prstGeom prst="rect">
-            <a:avLst/>
-          </a:prstGeom>
-          <a:noFill/>
-          <a:ln/>
-        </p:spPr>
-        <p:txBody>
-          <a:bodyPr wrap="square" lIns="0" tIns="0" rIns="0" bIns="0" rtlCol="0" anchor="ctr"/>
+            <a:off x="5465826" y="1143000"/>
+            <a:ext cx="1991106" cy="438912"/>
+          </a:xfrm>
+          <a:prstGeom prst="rect">
+            <a:avLst/>
+          </a:prstGeom>
+          <a:noFill/>
+          <a:ln/>
+        </p:spPr>
+        <p:txBody>
+          <a:bodyPr wrap="square" lIns="0" tIns="0" rIns="0" bIns="0" rtlCol="0" anchor="t"/>
           <a:lstStyle/>
           <a:p>
             <a:pPr indent="0" marL="0">
               <a:buNone/>
             </a:pPr>
             <a:r>
+              <a:rPr lang="en-US" sz="1250" b="1" dirty="0">
+                <a:solidFill>
+                  <a:srgbClr val="111111"/>
+                </a:solidFill>
+              </a:rPr>
+              <a:t>Dependence out in the context</a:t>
+            </a:r>
+            <a:endParaRPr lang="en-US" sz="1250" dirty="0"/>
+          </a:p>
+        </p:txBody>
+      </p:sp>
+      <p:sp>
+        <p:nvSpPr>
+          <p:cNvPr id="9" name="s3_dependence-sub-1"/>
+          <p:cNvSpPr txBox="1"/>
+          <p:nvPr/>
+        </p:nvSpPr>
+        <p:spPr>
+          <a:xfrm>
+            <a:off x="5465826" y="1572768"/>
+            <a:ext cx="1991106" cy="310896"/>
+          </a:xfrm>
+          <a:prstGeom prst="rect">
+            <a:avLst/>
+          </a:prstGeom>
+          <a:noFill/>
+          <a:ln/>
+        </p:spPr>
+        <p:txBody>
+          <a:bodyPr wrap="square" lIns="0" tIns="0" rIns="0" bIns="0" rtlCol="0" anchor="t"/>
+          <a:lstStyle/>
+          <a:p>
+            <a:pPr indent="0" marL="0">
+              <a:buNone/>
+            </a:pPr>
+            <a:r>
               <a:rPr lang="en-US" sz="950" dirty="0">
                 <a:solidFill>
                   <a:srgbClr val="595959"/>
                 </a:solidFill>
               </a:rPr>
-              <a:t>both curves drawn once per class; colours as in the legend</a:t>
-            </a:r>
-            <a:endParaRPr lang="en-US" sz="950" dirty="0"/>
-          </a:p>
-        </p:txBody>
-      </p:sp>
-      <p:sp>
-        <p:nvSpPr>
-          <p:cNvPr id="8" name="s4_titration-title-0"/>
-          <p:cNvSpPr txBox="1"/>
-          <p:nvPr/>
-        </p:nvSpPr>
-        <p:spPr>
-          <a:xfrm>
-            <a:off x="4681728" y="1005840"/>
-            <a:ext cx="3438144" cy="438912"/>
-          </a:xfrm>
-          <a:prstGeom prst="rect">
-            <a:avLst/>
-          </a:prstGeom>
-          <a:noFill/>
-          <a:ln/>
-        </p:spPr>
-        <p:txBody>
-          <a:bodyPr wrap="square" lIns="0" tIns="0" rIns="0" bIns="0" rtlCol="0" anchor="t"/>
-          <a:lstStyle/>
-          <a:p>
-            <a:pPr indent="0" marL="0">
-              <a:buNone/>
-            </a:pPr>
-            <a:r>
-              <a:rPr lang="en-US" sz="1250" b="1" dirty="0">
-                <a:solidFill>
-                  <a:srgbClr val="111111"/>
-                </a:solidFill>
-              </a:rPr>
-              <a:t>A second copy added</a:t>
-            </a:r>
-            <a:endParaRPr lang="en-US" sz="1250" dirty="0"/>
-          </a:p>
-        </p:txBody>
-      </p:sp>
-      <p:sp>
-        <p:nvSpPr>
-          <p:cNvPr id="9" name="s4_titration-sub-0"/>
-          <p:cNvSpPr txBox="1"/>
-          <p:nvPr/>
-        </p:nvSpPr>
-        <p:spPr>
-          <a:xfrm>
-            <a:off x="4681728" y="1435608"/>
-            <a:ext cx="3438144" cy="310896"/>
-          </a:xfrm>
-          <a:prstGeom prst="rect">
-            <a:avLst/>
-          </a:prstGeom>
-          <a:noFill/>
-          <a:ln/>
-        </p:spPr>
-        <p:txBody>
-          <a:bodyPr wrap="square" lIns="0" tIns="0" rIns="0" bIns="0" rtlCol="0" anchor="t"/>
-          <a:lstStyle/>
-          <a:p>
-            <a:pPr indent="0" marL="0">
-              <a:buNone/>
-            </a:pPr>
-            <a:r>
-              <a:rPr lang="en-US" sz="950" dirty="0">
-                <a:solidFill>
-                  <a:srgbClr val="595959"/>
-                </a:solidFill>
-              </a:rPr>
-              <a:t>net of a shuffled-sequence control</a:t>
+              <a:t>loss summed over windows beyond that</a:t>
             </a:r>
             <a:endParaRPr lang="en-US" sz="950" dirty="0"/>
           </a:p>
@@ -4247,7 +3347,7 @@
       </p:sp>
       <p:pic>
         <p:nvPicPr>
-          <p:cNvPr id="10" name="Image 2" descr="/Users/z5162865/WongLab/AlphaGenome_Ap1/Analysis/slide_figures/panels/s4_titration_c0_r0.png">    </p:cNvPr>
+          <p:cNvPr id="10" name="Image 2" descr="/Users/z5162865/WongLab/AlphaGenome_Ap1/Analysis/slide_figures/panels/s3_dependence_c1_r0.png">    </p:cNvPr>
           <p:cNvPicPr>
             <a:picLocks noChangeAspect="1"/>
           </p:cNvPicPr>
@@ -4261,17 +3361,89 @@
         </p:blipFill>
         <p:spPr>
           <a:xfrm>
-            <a:off x="5249045" y="1755648"/>
-            <a:ext cx="2303510" cy="1463040"/>
+            <a:off x="5465826" y="2395936"/>
+            <a:ext cx="1991106" cy="1810096"/>
           </a:xfrm>
           <a:prstGeom prst="rect">
             <a:avLst/>
           </a:prstGeom>
         </p:spPr>
       </p:pic>
+      <p:sp>
+        <p:nvSpPr>
+          <p:cNvPr id="11" name="s3_dependence-title-2"/>
+          <p:cNvSpPr txBox="1"/>
+          <p:nvPr/>
+        </p:nvSpPr>
+        <p:spPr>
+          <a:xfrm>
+            <a:off x="7530084" y="1143000"/>
+            <a:ext cx="1991106" cy="438912"/>
+          </a:xfrm>
+          <a:prstGeom prst="rect">
+            <a:avLst/>
+          </a:prstGeom>
+          <a:noFill/>
+          <a:ln/>
+        </p:spPr>
+        <p:txBody>
+          <a:bodyPr wrap="square" lIns="0" tIns="0" rIns="0" bIns="0" rtlCol="0" anchor="t"/>
+          <a:lstStyle/>
+          <a:p>
+            <a:pPr indent="0" marL="0">
+              <a:buNone/>
+            </a:pPr>
+            <a:r>
+              <a:rPr lang="en-US" sz="1250" b="1" dirty="0">
+                <a:solidFill>
+                  <a:srgbClr val="111111"/>
+                </a:solidFill>
+              </a:rPr>
+              <a:t>Spread along the element</a:t>
+            </a:r>
+            <a:endParaRPr lang="en-US" sz="1250" dirty="0"/>
+          </a:p>
+        </p:txBody>
+      </p:sp>
+      <p:sp>
+        <p:nvSpPr>
+          <p:cNvPr id="12" name="s3_dependence-sub-2"/>
+          <p:cNvSpPr txBox="1"/>
+          <p:nvPr/>
+        </p:nvSpPr>
+        <p:spPr>
+          <a:xfrm>
+            <a:off x="7530084" y="1572768"/>
+            <a:ext cx="1991106" cy="310896"/>
+          </a:xfrm>
+          <a:prstGeom prst="rect">
+            <a:avLst/>
+          </a:prstGeom>
+          <a:noFill/>
+          <a:ln/>
+        </p:spPr>
+        <p:txBody>
+          <a:bodyPr wrap="square" lIns="0" tIns="0" rIns="0" bIns="0" rtlCol="0" anchor="t"/>
+          <a:lstStyle/>
+          <a:p>
+            <a:pPr indent="0" marL="0">
+              <a:buNone/>
+            </a:pPr>
+            <a:r>
+              <a:rPr lang="en-US" sz="950" dirty="0">
+                <a:solidFill>
+                  <a:srgbClr val="595959"/>
+                </a:solidFill>
+              </a:rPr>
+              <a:t>SD of window position, weighted by loss</a:t>
+            </a:r>
+            <a:endParaRPr lang="en-US" sz="950" dirty="0"/>
+          </a:p>
+        </p:txBody>
+      </p:sp>
       <p:pic>
         <p:nvPicPr>
-          <p:cNvPr id="11" name="Image 3" descr="/Users/z5162865/WongLab/AlphaGenome_Ap1/Analysis/slide_figures/panels/s4_titration_c0_r1.png">    </p:cNvPr>
+          <p:cNvPr id="13" name="Image 3" descr="/Users/z5162865/WongLab/AlphaGenome_Ap1/Analysis/slide_figures/panels/s3_dependence_c2_r0.png">    </p:cNvPr>
           <p:cNvPicPr>
             <a:picLocks noChangeAspect="1"/>
           </p:cNvPicPr>
@@ -4285,8 +3457,8 @@
         </p:blipFill>
         <p:spPr>
           <a:xfrm>
-            <a:off x="5249045" y="3291840"/>
-            <a:ext cx="2303510" cy="1463040"/>
+            <a:off x="7530084" y="2395936"/>
+            <a:ext cx="1991106" cy="1810096"/>
           </a:xfrm>
           <a:prstGeom prst="rect">
             <a:avLst/>
@@ -4295,14 +3467,14 @@
       </p:pic>
       <p:sp>
         <p:nvSpPr>
-          <p:cNvPr id="12" name="s4_titration-title-1"/>
+          <p:cNvPr id="14" name="s3_dependence-title-3"/>
           <p:cNvSpPr txBox="1"/>
           <p:nvPr/>
         </p:nvSpPr>
         <p:spPr>
           <a:xfrm>
-            <a:off x="8193024" y="1005840"/>
-            <a:ext cx="3438144" cy="438912"/>
+            <a:off x="9594342" y="1143000"/>
+            <a:ext cx="1991106" cy="438912"/>
           </a:xfrm>
           <a:prstGeom prst="rect">
             <a:avLst/>
@@ -4323,7 +3495,7 @@
                   <a:srgbClr val="111111"/>
                 </a:solidFill>
               </a:rPr>
-              <a:t>The motif moved elsewhere</a:t>
+              <a:t>Depth of the single best base</a:t>
             </a:r>
             <a:endParaRPr lang="en-US" sz="1250" dirty="0"/>
           </a:p>
@@ -4331,14 +3503,14 @@
       </p:sp>
       <p:sp>
         <p:nvSpPr>
-          <p:cNvPr id="13" name="s4_titration-sub-1"/>
+          <p:cNvPr id="15" name="s3_dependence-sub-3"/>
           <p:cNvSpPr txBox="1"/>
           <p:nvPr/>
         </p:nvSpPr>
         <p:spPr>
           <a:xfrm>
-            <a:off x="8193024" y="1435608"/>
-            <a:ext cx="3438144" cy="310896"/>
+            <a:off x="9594342" y="1572768"/>
+            <a:ext cx="1991106" cy="310896"/>
           </a:xfrm>
           <a:prstGeom prst="rect">
             <a:avLst/>
@@ -4359,7 +3531,7 @@
                   <a:srgbClr val="595959"/>
                 </a:solidFill>
               </a:rPr>
-              <a:t>the motif destroyed and re-inserted, net of the same control</a:t>
+              <a:t>largest effect of any one base change, ±30 bp</a:t>
             </a:r>
             <a:endParaRPr lang="en-US" sz="950" dirty="0"/>
           </a:p>
@@ -4367,7 +3539,7 @@
       </p:sp>
       <p:pic>
         <p:nvPicPr>
-          <p:cNvPr id="14" name="Image 4" descr="/Users/z5162865/WongLab/AlphaGenome_Ap1/Analysis/slide_figures/panels/s4_titration_c1_r0.png">    </p:cNvPr>
+          <p:cNvPr id="16" name="Image 4" descr="/Users/z5162865/WongLab/AlphaGenome_Ap1/Analysis/slide_figures/panels/s3_dependence_c3_r0.png">    </p:cNvPr>
           <p:cNvPicPr>
             <a:picLocks noChangeAspect="1"/>
           </p:cNvPicPr>
@@ -4381,119 +3553,23 @@
         </p:blipFill>
         <p:spPr>
           <a:xfrm>
-            <a:off x="8760341" y="1755648"/>
-            <a:ext cx="2303510" cy="1463040"/>
+            <a:off x="9594342" y="2395936"/>
+            <a:ext cx="1991106" cy="1810096"/>
           </a:xfrm>
           <a:prstGeom prst="rect">
             <a:avLst/>
           </a:prstGeom>
         </p:spPr>
       </p:pic>
-      <p:pic>
-        <p:nvPicPr>
-          <p:cNvPr id="15" name="Image 5" descr="/Users/z5162865/WongLab/AlphaGenome_Ap1/Analysis/slide_figures/panels/s4_titration_c1_r1.png">    </p:cNvPr>
-          <p:cNvPicPr>
-            <a:picLocks noChangeAspect="1"/>
-          </p:cNvPicPr>
-          <p:nvPr/>
-        </p:nvPicPr>
-        <p:blipFill>
-          <a:blip r:embed="rId6"/>
-          <a:stretch>
-            <a:fillRect/>
-          </a:stretch>
-        </p:blipFill>
-        <p:spPr>
-          <a:xfrm>
-            <a:off x="8760341" y="3291840"/>
-            <a:ext cx="2303510" cy="1463040"/>
-          </a:xfrm>
-          <a:prstGeom prst="rect">
-            <a:avLst/>
-          </a:prstGeom>
-        </p:spPr>
-      </p:pic>
-      <p:sp>
-        <p:nvSpPr>
-          <p:cNvPr id="16" name="s4_titration-row-0"/>
-          <p:cNvSpPr txBox="1"/>
-          <p:nvPr/>
-        </p:nvSpPr>
-        <p:spPr>
-          <a:xfrm rot="16200000">
-            <a:off x="3639312" y="1837944"/>
-            <a:ext cx="1371600" cy="1371600"/>
-          </a:xfrm>
-          <a:prstGeom prst="rect">
-            <a:avLst/>
-          </a:prstGeom>
-          <a:noFill/>
-          <a:ln/>
-        </p:spPr>
-        <p:txBody>
-          <a:bodyPr wrap="square" lIns="0" tIns="0" rIns="0" bIns="0" rtlCol="0" anchor="ctr"/>
-          <a:lstStyle/>
-          <a:p>
-            <a:pPr algn="ctr" indent="0" marL="0">
-              <a:buNone/>
-            </a:pPr>
-            <a:r>
-              <a:rPr lang="en-US" sz="1000" dirty="0">
-                <a:solidFill>
-                  <a:srgbClr val="111111"/>
-                </a:solidFill>
-              </a:rPr>
-              <a:t>all sites, nothing controlled</a:t>
-            </a:r>
-            <a:endParaRPr lang="en-US" sz="1000" dirty="0"/>
-          </a:p>
-        </p:txBody>
-      </p:sp>
-      <p:sp>
-        <p:nvSpPr>
-          <p:cNvPr id="17" name="s4_titration-row-1"/>
-          <p:cNvSpPr txBox="1"/>
-          <p:nvPr/>
-        </p:nvSpPr>
-        <p:spPr>
-          <a:xfrm rot="16200000">
-            <a:off x="3639312" y="3374136"/>
-            <a:ext cx="1371600" cy="1371600"/>
-          </a:xfrm>
-          <a:prstGeom prst="rect">
-            <a:avLst/>
-          </a:prstGeom>
-          <a:noFill/>
-          <a:ln/>
-        </p:spPr>
-        <p:txBody>
-          <a:bodyPr wrap="square" lIns="0" tIns="0" rIns="0" bIns="0" rtlCol="0" anchor="ctr"/>
-          <a:lstStyle/>
-          <a:p>
-            <a:pPr algn="ctr" indent="0" marL="0">
-              <a:buNone/>
-            </a:pPr>
-            <a:r>
-              <a:rPr lang="en-US" sz="1000" dirty="0">
-                <a:solidFill>
-                  <a:srgbClr val="111111"/>
-                </a:solidFill>
-              </a:rPr>
-              <a:t>each class against its own matched Stable controls</a:t>
-            </a:r>
-            <a:endParaRPr lang="en-US" sz="1000" dirty="0"/>
-          </a:p>
-        </p:txBody>
-      </p:sp>
-      <p:sp>
-        <p:nvSpPr>
-          <p:cNvPr id="18" name="s4_titration-dot-0"/>
+      <p:sp>
+        <p:nvSpPr>
+          <p:cNvPr id="17" name="s3_dependence-dot-0"/>
           <p:cNvSpPr/>
           <p:nvPr/>
         </p:nvSpPr>
         <p:spPr>
           <a:xfrm>
-            <a:off x="4114800" y="4960620"/>
+            <a:off x="3291840" y="4914900"/>
             <a:ext cx="109728" cy="109728"/>
           </a:xfrm>
           <a:prstGeom prst="ellipse">
@@ -4512,13 +3588,13 @@
       </p:sp>
       <p:sp>
         <p:nvSpPr>
-          <p:cNvPr id="19" name="s4_titration-leg-0"/>
+          <p:cNvPr id="18" name="s3_dependence-leg-0"/>
           <p:cNvSpPr txBox="1"/>
           <p:nvPr/>
         </p:nvSpPr>
         <p:spPr>
           <a:xfrm>
-            <a:off x="4270248" y="4919472"/>
+            <a:off x="3447288" y="4873752"/>
             <a:ext cx="1057046" cy="201168"/>
           </a:xfrm>
           <a:prstGeom prst="rect">
@@ -4548,13 +3624,13 @@
       </p:sp>
       <p:sp>
         <p:nvSpPr>
-          <p:cNvPr id="20" name="s4_titration-dot-1"/>
+          <p:cNvPr id="19" name="s3_dependence-dot-1"/>
           <p:cNvSpPr/>
           <p:nvPr/>
         </p:nvSpPr>
         <p:spPr>
           <a:xfrm>
-            <a:off x="5437022" y="4960620"/>
+            <a:off x="4614062" y="4914900"/>
             <a:ext cx="109728" cy="109728"/>
           </a:xfrm>
           <a:prstGeom prst="ellipse">
@@ -4573,13 +3649,13 @@
       </p:sp>
       <p:sp>
         <p:nvSpPr>
-          <p:cNvPr id="21" name="s4_titration-leg-1"/>
+          <p:cNvPr id="20" name="s3_dependence-leg-1"/>
           <p:cNvSpPr txBox="1"/>
           <p:nvPr/>
         </p:nvSpPr>
         <p:spPr>
           <a:xfrm>
-            <a:off x="5592470" y="4919472"/>
+            <a:off x="4769510" y="4873752"/>
             <a:ext cx="596189" cy="201168"/>
           </a:xfrm>
           <a:prstGeom prst="rect">
@@ -4609,13 +3685,13 @@
       </p:sp>
       <p:sp>
         <p:nvSpPr>
-          <p:cNvPr id="22" name="s4_titration-dot-2"/>
+          <p:cNvPr id="21" name="s3_dependence-dot-2"/>
           <p:cNvSpPr/>
           <p:nvPr/>
         </p:nvSpPr>
         <p:spPr>
           <a:xfrm>
-            <a:off x="6298387" y="4960620"/>
+            <a:off x="5475427" y="4914900"/>
             <a:ext cx="109728" cy="109728"/>
           </a:xfrm>
           <a:prstGeom prst="ellipse">
@@ -4634,13 +3710,13 @@
       </p:sp>
       <p:sp>
         <p:nvSpPr>
-          <p:cNvPr id="23" name="s4_titration-leg-2"/>
+          <p:cNvPr id="22" name="s3_dependence-leg-2"/>
           <p:cNvSpPr txBox="1"/>
           <p:nvPr/>
         </p:nvSpPr>
         <p:spPr>
           <a:xfrm>
-            <a:off x="6453835" y="4919472"/>
+            <a:off x="5630875" y="4873752"/>
             <a:ext cx="727862" cy="201168"/>
           </a:xfrm>
           <a:prstGeom prst="rect">
@@ -4670,13 +3746,13 @@
       </p:sp>
       <p:sp>
         <p:nvSpPr>
-          <p:cNvPr id="24" name="s4_titration-dot-3"/>
+          <p:cNvPr id="23" name="s3_dependence-dot-3"/>
           <p:cNvSpPr/>
           <p:nvPr/>
         </p:nvSpPr>
         <p:spPr>
           <a:xfrm>
-            <a:off x="7291426" y="4960620"/>
+            <a:off x="6468466" y="4914900"/>
             <a:ext cx="109728" cy="109728"/>
           </a:xfrm>
           <a:prstGeom prst="ellipse">
@@ -4695,13 +3771,13 @@
       </p:sp>
       <p:sp>
         <p:nvSpPr>
-          <p:cNvPr id="25" name="s4_titration-leg-3"/>
+          <p:cNvPr id="24" name="s3_dependence-leg-3"/>
           <p:cNvSpPr txBox="1"/>
           <p:nvPr/>
         </p:nvSpPr>
         <p:spPr>
           <a:xfrm>
-            <a:off x="7446874" y="4919472"/>
+            <a:off x="6623914" y="4873752"/>
             <a:ext cx="925373" cy="201168"/>
           </a:xfrm>
           <a:prstGeom prst="rect">
@@ -4731,13 +3807,13 @@
       </p:sp>
       <p:sp>
         <p:nvSpPr>
-          <p:cNvPr id="26" name="s4_titration-dot-4"/>
+          <p:cNvPr id="25" name="s3_dependence-dot-4"/>
           <p:cNvSpPr/>
           <p:nvPr/>
         </p:nvSpPr>
         <p:spPr>
           <a:xfrm>
-            <a:off x="8481974" y="4960620"/>
+            <a:off x="7659014" y="4914900"/>
             <a:ext cx="109728" cy="109728"/>
           </a:xfrm>
           <a:prstGeom prst="ellipse">
@@ -4756,13 +3832,13 @@
       </p:sp>
       <p:sp>
         <p:nvSpPr>
-          <p:cNvPr id="27" name="s4_titration-leg-4"/>
+          <p:cNvPr id="26" name="s3_dependence-leg-4"/>
           <p:cNvSpPr txBox="1"/>
           <p:nvPr/>
         </p:nvSpPr>
         <p:spPr>
           <a:xfrm>
-            <a:off x="8637422" y="4919472"/>
+            <a:off x="7814462" y="4873752"/>
             <a:ext cx="1057046" cy="201168"/>
           </a:xfrm>
           <a:prstGeom prst="rect">
@@ -4792,13 +3868,13 @@
       </p:sp>
       <p:sp>
         <p:nvSpPr>
-          <p:cNvPr id="28" name="s4_titration-dot-5"/>
+          <p:cNvPr id="27" name="s3_dependence-dot-5"/>
           <p:cNvSpPr/>
           <p:nvPr/>
         </p:nvSpPr>
         <p:spPr>
           <a:xfrm>
-            <a:off x="9804197" y="4960620"/>
+            <a:off x="8981237" y="4914900"/>
             <a:ext cx="109728" cy="109728"/>
           </a:xfrm>
           <a:prstGeom prst="ellipse">
@@ -4817,14 +3893,14 @@
       </p:sp>
       <p:sp>
         <p:nvSpPr>
-          <p:cNvPr id="29" name="s4_titration-leg-5"/>
+          <p:cNvPr id="28" name="s3_dependence-leg-5"/>
           <p:cNvSpPr txBox="1"/>
           <p:nvPr/>
         </p:nvSpPr>
         <p:spPr>
           <a:xfrm>
-            <a:off x="9959645" y="4919472"/>
-            <a:ext cx="2373782" cy="201168"/>
+            <a:off x="9136685" y="4873752"/>
+            <a:ext cx="1781251" cy="201168"/>
           </a:xfrm>
           <a:prstGeom prst="rect">
             <a:avLst/>
@@ -4845,7 +3921,7 @@
                   <a:srgbClr val="111111"/>
                 </a:solidFill>
               </a:rPr>
-              <a:t>Stable (all, or matched controls)</a:t>
+              <a:t>Stable (all 2,907 sites)</a:t>
             </a:r>
             <a:endParaRPr lang="en-US" sz="1050" dirty="0"/>
           </a:p>
@@ -4853,14 +3929,14 @@
       </p:sp>
       <p:sp>
         <p:nvSpPr>
-          <p:cNvPr id="30" name="s4_titration-key"/>
+          <p:cNvPr id="29" name="s3_dependence-key"/>
           <p:cNvSpPr txBox="1"/>
           <p:nvPr/>
         </p:nvSpPr>
         <p:spPr>
           <a:xfrm>
-            <a:off x="4114800" y="5193792"/>
-            <a:ext cx="7589520" cy="502920"/>
+            <a:off x="3291840" y="5148072"/>
+            <a:ext cx="8366760" cy="502920"/>
           </a:xfrm>
           <a:prstGeom prst="rect">
             <a:avLst/>
@@ -4881,7 +3957,7 @@
                   <a:srgbClr val="595959"/>
                 </a:solidFill>
               </a:rPr>
-              <a:t>grey line and band (top row): all Stable sites, median with 95% bootstrap CI.   grey dots (bottom row): that class's own matched Stable controls.   Stars test the class against that reference — Mann–Whitney on all sites, paired Wilcoxon on matched pairs — BH across all 20 tests.   *** p&lt;0.001   ** p&lt;0.01   * p&lt;0.05   ns ≥ 0.05</a:t>
+              <a:t>grey line and band: all 2,907 Stable sites, median with a 95% bootstrap CI.   Each class is every site carrying that call, tested against that reference by Mann–Whitney, BH across all 20 tests on this figure.   *** p&lt;0.001   ** p&lt;0.01   * p&lt;0.05   ns ≥ 0.05</a:t>
             </a:r>
             <a:endParaRPr lang="en-US" sz="900" dirty="0"/>
           </a:p>
@@ -4889,7 +3965,7 @@
       </p:sp>
       <p:sp>
         <p:nvSpPr>
-          <p:cNvPr id="31" name="Text 0"/>
+          <p:cNvPr id="30" name="Text 0"/>
           <p:cNvSpPr/>
           <p:nvPr>
             <p:ph idx="101" type="body" hasCustomPrompt="1"/>
@@ -4930,7 +4006,7 @@
                   <a:srgbClr val="111111"/>
                 </a:solidFill>
               </a:rPr>
-              <a:t>a second copy is worth most at ±20–40 bp and a moved motif recovers only a third of what destroying it cost — and no class differs once context is matched</a:t>
+              <a:t>the same shift in every class and on all three measures — strongest in Age Up and Exercise Down, absent only in Age Down</a:t>
             </a:r>
             <a:endParaRPr lang="en-US" sz="1500" dirty="0"/>
           </a:p>
@@ -5038,7 +4114,7 @@
                   <a:schemeClr val="tx1"/>
                 </a:solidFill>
               </a:rPr>
-              <a:t>Age-gained sites read AP-1 dosage more sharply</a:t>
+              <a:t>Position is a dial, and a moved motif never replaces the original</a:t>
             </a:r>
             <a:endParaRPr lang="en-US" sz="2800" dirty="0"/>
           </a:p>
@@ -5046,14 +4122,14 @@
       </p:sp>
       <p:sp>
         <p:nvSpPr>
-          <p:cNvPr id="3" name="ag-t1"/>
+          <p:cNvPr id="3" name="copy-title"/>
           <p:cNvSpPr txBox="1"/>
           <p:nvPr/>
         </p:nvSpPr>
         <p:spPr>
           <a:xfrm>
-            <a:off x="731520" y="1051560"/>
-            <a:ext cx="7315200" cy="292608"/>
+            <a:off x="502920" y="1024128"/>
+            <a:ext cx="2834640" cy="274320"/>
           </a:xfrm>
           <a:prstGeom prst="rect">
             <a:avLst/>
@@ -5069,56 +4145,20 @@
               <a:buNone/>
             </a:pPr>
             <a:r>
-              <a:rPr lang="en-US" sz="1350" b="1" dirty="0">
+              <a:rPr lang="en-US" sz="1250" b="1" dirty="0">
                 <a:solidFill>
                   <a:srgbClr val="111111"/>
                 </a:solidFill>
               </a:rPr>
-              <a:t>Age-gained sites respond more to AP-1 dosage, both ways</a:t>
-            </a:r>
-            <a:endParaRPr lang="en-US" sz="1350" dirty="0"/>
-          </a:p>
-        </p:txBody>
-      </p:sp>
-      <p:sp>
-        <p:nvSpPr>
-          <p:cNvPr id="4" name="ag-s1"/>
-          <p:cNvSpPr txBox="1"/>
-          <p:nvPr/>
-        </p:nvSpPr>
-        <p:spPr>
-          <a:xfrm>
-            <a:off x="731520" y="1344168"/>
-            <a:ext cx="7315200" cy="292608"/>
-          </a:xfrm>
-          <a:prstGeom prst="rect">
-            <a:avLst/>
-          </a:prstGeom>
-          <a:noFill/>
-          <a:ln/>
-        </p:spPr>
-        <p:txBody>
-          <a:bodyPr wrap="square" lIns="0" tIns="0" rIns="0" bIns="0" rtlCol="0" anchor="ctr"/>
-          <a:lstStyle/>
-          <a:p>
-            <a:pPr indent="0" marL="0">
-              <a:buNone/>
-            </a:pPr>
-            <a:r>
-              <a:rPr lang="en-US" sz="1050" dirty="0">
-                <a:solidFill>
-                  <a:srgbClr val="595959"/>
-                </a:solidFill>
-              </a:rPr>
-              <a:t>Δscore definition: the top fifth of the change in TOBIAS binding score with age, against matched Unchanged sites</a:t>
-            </a:r>
-            <a:endParaRPr lang="en-US" sz="1050" dirty="0"/>
+              <a:t>Where the added copy works best</a:t>
+            </a:r>
+            <a:endParaRPr lang="en-US" sz="1250" dirty="0"/>
           </a:p>
         </p:txBody>
       </p:sp>
       <p:pic>
         <p:nvPicPr>
-          <p:cNvPr id="5" name="Image 0" descr="/Users/z5162865/WongLab/AlphaGenome_Ap1/Analysis/slide_figures/panels/s5_age_gained.png">    </p:cNvPr>
+          <p:cNvPr id="4" name="Image 0" descr="/Users/z5162865/WongLab/AlphaGenome_Ap1/Analysis/slide_figures/panels/d_addcopy.png">    </p:cNvPr>
           <p:cNvPicPr>
             <a:picLocks noChangeAspect="1"/>
           </p:cNvPicPr>
@@ -5132,8 +4172,8 @@
         </p:blipFill>
         <p:spPr>
           <a:xfrm>
-            <a:off x="1429175" y="1737360"/>
-            <a:ext cx="5919890" cy="3017520"/>
+            <a:off x="709758" y="1325880"/>
+            <a:ext cx="2420965" cy="1783080"/>
           </a:xfrm>
           <a:prstGeom prst="rect">
             <a:avLst/>
@@ -5142,13 +4182,606 @@
       </p:pic>
       <p:sp>
         <p:nvSpPr>
-          <p:cNvPr id="6" name="lg-dot-5.3-0"/>
+          <p:cNvPr id="5" name="move-title"/>
+          <p:cNvSpPr txBox="1"/>
+          <p:nvPr/>
+        </p:nvSpPr>
+        <p:spPr>
+          <a:xfrm>
+            <a:off x="502920" y="3218688"/>
+            <a:ext cx="2834640" cy="274320"/>
+          </a:xfrm>
+          <a:prstGeom prst="rect">
+            <a:avLst/>
+          </a:prstGeom>
+          <a:noFill/>
+          <a:ln/>
+        </p:spPr>
+        <p:txBody>
+          <a:bodyPr wrap="square" lIns="0" tIns="0" rIns="0" bIns="0" rtlCol="0" anchor="ctr"/>
+          <a:lstStyle/>
+          <a:p>
+            <a:pPr indent="0" marL="0">
+              <a:buNone/>
+            </a:pPr>
+            <a:r>
+              <a:rPr lang="en-US" sz="1250" b="1" dirty="0">
+                <a:solidFill>
+                  <a:srgbClr val="111111"/>
+                </a:solidFill>
+              </a:rPr>
+              <a:t>...and where it lands when moved</a:t>
+            </a:r>
+            <a:endParaRPr lang="en-US" sz="1250" dirty="0"/>
+          </a:p>
+        </p:txBody>
+      </p:sp>
+      <p:pic>
+        <p:nvPicPr>
+          <p:cNvPr id="6" name="Image 1" descr="/Users/z5162865/WongLab/AlphaGenome_Ap1/Analysis/slide_figures/panels/d_relocate.png">    </p:cNvPr>
+          <p:cNvPicPr>
+            <a:picLocks noChangeAspect="1"/>
+          </p:cNvPicPr>
+          <p:nvPr/>
+        </p:nvPicPr>
+        <p:blipFill>
+          <a:blip r:embed="rId2"/>
+          <a:stretch>
+            <a:fillRect/>
+          </a:stretch>
+        </p:blipFill>
+        <p:spPr>
+          <a:xfrm>
+            <a:off x="662666" y="3520440"/>
+            <a:ext cx="2515149" cy="1783080"/>
+          </a:xfrm>
+          <a:prstGeom prst="rect">
+            <a:avLst/>
+          </a:prstGeom>
+        </p:spPr>
+      </p:pic>
+      <p:sp>
+        <p:nvSpPr>
+          <p:cNvPr id="7" name="curve-caption"/>
+          <p:cNvSpPr txBox="1"/>
+          <p:nvPr/>
+        </p:nvSpPr>
+        <p:spPr>
+          <a:xfrm>
+            <a:off x="502920" y="5349240"/>
+            <a:ext cx="2926080" cy="457200"/>
+          </a:xfrm>
+          <a:prstGeom prst="rect">
+            <a:avLst/>
+          </a:prstGeom>
+          <a:noFill/>
+          <a:ln/>
+        </p:spPr>
+        <p:txBody>
+          <a:bodyPr wrap="square" lIns="0" tIns="0" rIns="0" bIns="0" rtlCol="0" anchor="ctr"/>
+          <a:lstStyle/>
+          <a:p>
+            <a:pPr indent="0" marL="0">
+              <a:buNone/>
+            </a:pPr>
+            <a:r>
+              <a:rPr lang="en-US" sz="950" dirty="0">
+                <a:solidFill>
+                  <a:srgbClr val="595959"/>
+                </a:solidFill>
+              </a:rPr>
+              <a:t>both curves drawn once per class; colours as in the legend</a:t>
+            </a:r>
+            <a:endParaRPr lang="en-US" sz="950" dirty="0"/>
+          </a:p>
+        </p:txBody>
+      </p:sp>
+      <p:sp>
+        <p:nvSpPr>
+          <p:cNvPr id="8" name="s4_titration-title-0"/>
+          <p:cNvSpPr txBox="1"/>
+          <p:nvPr/>
+        </p:nvSpPr>
+        <p:spPr>
+          <a:xfrm>
+            <a:off x="4041648" y="1143000"/>
+            <a:ext cx="3735324" cy="438912"/>
+          </a:xfrm>
+          <a:prstGeom prst="rect">
+            <a:avLst/>
+          </a:prstGeom>
+          <a:noFill/>
+          <a:ln/>
+        </p:spPr>
+        <p:txBody>
+          <a:bodyPr wrap="square" lIns="0" tIns="0" rIns="0" bIns="0" rtlCol="0" anchor="t"/>
+          <a:lstStyle/>
+          <a:p>
+            <a:pPr indent="0" marL="0">
+              <a:buNone/>
+            </a:pPr>
+            <a:r>
+              <a:rPr lang="en-US" sz="1250" b="1" dirty="0">
+                <a:solidFill>
+                  <a:srgbClr val="111111"/>
+                </a:solidFill>
+              </a:rPr>
+              <a:t>A second copy added</a:t>
+            </a:r>
+            <a:endParaRPr lang="en-US" sz="1250" dirty="0"/>
+          </a:p>
+        </p:txBody>
+      </p:sp>
+      <p:sp>
+        <p:nvSpPr>
+          <p:cNvPr id="9" name="s4_titration-sub-0"/>
+          <p:cNvSpPr txBox="1"/>
+          <p:nvPr/>
+        </p:nvSpPr>
+        <p:spPr>
+          <a:xfrm>
+            <a:off x="4041648" y="1572768"/>
+            <a:ext cx="3735324" cy="310896"/>
+          </a:xfrm>
+          <a:prstGeom prst="rect">
+            <a:avLst/>
+          </a:prstGeom>
+          <a:noFill/>
+          <a:ln/>
+        </p:spPr>
+        <p:txBody>
+          <a:bodyPr wrap="square" lIns="0" tIns="0" rIns="0" bIns="0" rtlCol="0" anchor="t"/>
+          <a:lstStyle/>
+          <a:p>
+            <a:pPr indent="0" marL="0">
+              <a:buNone/>
+            </a:pPr>
+            <a:r>
+              <a:rPr lang="en-US" sz="950" dirty="0">
+                <a:solidFill>
+                  <a:srgbClr val="595959"/>
+                </a:solidFill>
+              </a:rPr>
+              <a:t>net of a shuffled-sequence control</a:t>
+            </a:r>
+            <a:endParaRPr lang="en-US" sz="950" dirty="0"/>
+          </a:p>
+        </p:txBody>
+      </p:sp>
+      <p:pic>
+        <p:nvPicPr>
+          <p:cNvPr id="10" name="Image 2" descr="/Users/z5162865/WongLab/AlphaGenome_Ap1/Analysis/slide_figures/panels/s4_titration_c0_r0.png">    </p:cNvPr>
+          <p:cNvPicPr>
+            <a:picLocks noChangeAspect="1"/>
+          </p:cNvPicPr>
+          <p:nvPr/>
+        </p:nvPicPr>
+        <p:blipFill>
+          <a:blip r:embed="rId3"/>
+          <a:stretch>
+            <a:fillRect/>
+          </a:stretch>
+        </p:blipFill>
+        <p:spPr>
+          <a:xfrm>
+            <a:off x="4360316" y="1892808"/>
+            <a:ext cx="3097987" cy="2816352"/>
+          </a:xfrm>
+          <a:prstGeom prst="rect">
+            <a:avLst/>
+          </a:prstGeom>
+        </p:spPr>
+      </p:pic>
+      <p:sp>
+        <p:nvSpPr>
+          <p:cNvPr id="11" name="s4_titration-title-1"/>
+          <p:cNvSpPr txBox="1"/>
+          <p:nvPr/>
+        </p:nvSpPr>
+        <p:spPr>
+          <a:xfrm>
+            <a:off x="7850124" y="1143000"/>
+            <a:ext cx="3735324" cy="438912"/>
+          </a:xfrm>
+          <a:prstGeom prst="rect">
+            <a:avLst/>
+          </a:prstGeom>
+          <a:noFill/>
+          <a:ln/>
+        </p:spPr>
+        <p:txBody>
+          <a:bodyPr wrap="square" lIns="0" tIns="0" rIns="0" bIns="0" rtlCol="0" anchor="t"/>
+          <a:lstStyle/>
+          <a:p>
+            <a:pPr indent="0" marL="0">
+              <a:buNone/>
+            </a:pPr>
+            <a:r>
+              <a:rPr lang="en-US" sz="1250" b="1" dirty="0">
+                <a:solidFill>
+                  <a:srgbClr val="111111"/>
+                </a:solidFill>
+              </a:rPr>
+              <a:t>The motif moved elsewhere</a:t>
+            </a:r>
+            <a:endParaRPr lang="en-US" sz="1250" dirty="0"/>
+          </a:p>
+        </p:txBody>
+      </p:sp>
+      <p:sp>
+        <p:nvSpPr>
+          <p:cNvPr id="12" name="s4_titration-sub-1"/>
+          <p:cNvSpPr txBox="1"/>
+          <p:nvPr/>
+        </p:nvSpPr>
+        <p:spPr>
+          <a:xfrm>
+            <a:off x="7850124" y="1572768"/>
+            <a:ext cx="3735324" cy="310896"/>
+          </a:xfrm>
+          <a:prstGeom prst="rect">
+            <a:avLst/>
+          </a:prstGeom>
+          <a:noFill/>
+          <a:ln/>
+        </p:spPr>
+        <p:txBody>
+          <a:bodyPr wrap="square" lIns="0" tIns="0" rIns="0" bIns="0" rtlCol="0" anchor="t"/>
+          <a:lstStyle/>
+          <a:p>
+            <a:pPr indent="0" marL="0">
+              <a:buNone/>
+            </a:pPr>
+            <a:r>
+              <a:rPr lang="en-US" sz="950" dirty="0">
+                <a:solidFill>
+                  <a:srgbClr val="595959"/>
+                </a:solidFill>
+              </a:rPr>
+              <a:t>the motif destroyed and re-inserted, net of the same control</a:t>
+            </a:r>
+            <a:endParaRPr lang="en-US" sz="950" dirty="0"/>
+          </a:p>
+        </p:txBody>
+      </p:sp>
+      <p:pic>
+        <p:nvPicPr>
+          <p:cNvPr id="13" name="Image 3" descr="/Users/z5162865/WongLab/AlphaGenome_Ap1/Analysis/slide_figures/panels/s4_titration_c1_r0.png">    </p:cNvPr>
+          <p:cNvPicPr>
+            <a:picLocks noChangeAspect="1"/>
+          </p:cNvPicPr>
+          <p:nvPr/>
+        </p:nvPicPr>
+        <p:blipFill>
+          <a:blip r:embed="rId4"/>
+          <a:stretch>
+            <a:fillRect/>
+          </a:stretch>
+        </p:blipFill>
+        <p:spPr>
+          <a:xfrm>
+            <a:off x="8168792" y="1892808"/>
+            <a:ext cx="3097987" cy="2816352"/>
+          </a:xfrm>
+          <a:prstGeom prst="rect">
+            <a:avLst/>
+          </a:prstGeom>
+        </p:spPr>
+      </p:pic>
+      <p:sp>
+        <p:nvSpPr>
+          <p:cNvPr id="14" name="s4_titration-dot-0"/>
           <p:cNvSpPr/>
           <p:nvPr/>
         </p:nvSpPr>
         <p:spPr>
           <a:xfrm>
-            <a:off x="731520" y="4887468"/>
+            <a:off x="3931920" y="4914900"/>
+            <a:ext cx="109728" cy="109728"/>
+          </a:xfrm>
+          <a:prstGeom prst="ellipse">
+            <a:avLst/>
+          </a:prstGeom>
+          <a:solidFill>
+            <a:srgbClr val="4F4F4F"/>
+          </a:solidFill>
+          <a:ln w="12700">
+            <a:solidFill>
+              <a:srgbClr val="4F4F4F"/>
+            </a:solidFill>
+            <a:prstDash val="solid"/>
+          </a:ln>
+        </p:spPr>
+      </p:sp>
+      <p:sp>
+        <p:nvSpPr>
+          <p:cNvPr id="15" name="s4_titration-leg-0"/>
+          <p:cNvSpPr txBox="1"/>
+          <p:nvPr/>
+        </p:nvSpPr>
+        <p:spPr>
+          <a:xfrm>
+            <a:off x="4087368" y="4873752"/>
+            <a:ext cx="1057046" cy="201168"/>
+          </a:xfrm>
+          <a:prstGeom prst="rect">
+            <a:avLst/>
+          </a:prstGeom>
+          <a:noFill/>
+          <a:ln/>
+        </p:spPr>
+        <p:txBody>
+          <a:bodyPr wrap="square" lIns="0" tIns="0" rIns="0" bIns="0" rtlCol="0" anchor="ctr"/>
+          <a:lstStyle/>
+          <a:p>
+            <a:pPr indent="0" marL="0">
+              <a:buNone/>
+            </a:pPr>
+            <a:r>
+              <a:rPr lang="en-US" sz="1050" dirty="0">
+                <a:solidFill>
+                  <a:srgbClr val="111111"/>
+                </a:solidFill>
+              </a:rPr>
+              <a:t>Dynamic (all)</a:t>
+            </a:r>
+            <a:endParaRPr lang="en-US" sz="1050" dirty="0"/>
+          </a:p>
+        </p:txBody>
+      </p:sp>
+      <p:sp>
+        <p:nvSpPr>
+          <p:cNvPr id="16" name="s4_titration-dot-1"/>
+          <p:cNvSpPr/>
+          <p:nvPr/>
+        </p:nvSpPr>
+        <p:spPr>
+          <a:xfrm>
+            <a:off x="5254142" y="4914900"/>
+            <a:ext cx="109728" cy="109728"/>
+          </a:xfrm>
+          <a:prstGeom prst="ellipse">
+            <a:avLst/>
+          </a:prstGeom>
+          <a:solidFill>
+            <a:srgbClr val="C2551C"/>
+          </a:solidFill>
+          <a:ln w="12700">
+            <a:solidFill>
+              <a:srgbClr val="C2551C"/>
+            </a:solidFill>
+            <a:prstDash val="solid"/>
+          </a:ln>
+        </p:spPr>
+      </p:sp>
+      <p:sp>
+        <p:nvSpPr>
+          <p:cNvPr id="17" name="s4_titration-leg-1"/>
+          <p:cNvSpPr txBox="1"/>
+          <p:nvPr/>
+        </p:nvSpPr>
+        <p:spPr>
+          <a:xfrm>
+            <a:off x="5409590" y="4873752"/>
+            <a:ext cx="596189" cy="201168"/>
+          </a:xfrm>
+          <a:prstGeom prst="rect">
+            <a:avLst/>
+          </a:prstGeom>
+          <a:noFill/>
+          <a:ln/>
+        </p:spPr>
+        <p:txBody>
+          <a:bodyPr wrap="square" lIns="0" tIns="0" rIns="0" bIns="0" rtlCol="0" anchor="ctr"/>
+          <a:lstStyle/>
+          <a:p>
+            <a:pPr indent="0" marL="0">
+              <a:buNone/>
+            </a:pPr>
+            <a:r>
+              <a:rPr lang="en-US" sz="1050" dirty="0">
+                <a:solidFill>
+                  <a:srgbClr val="111111"/>
+                </a:solidFill>
+              </a:rPr>
+              <a:t>Age Up</a:t>
+            </a:r>
+            <a:endParaRPr lang="en-US" sz="1050" dirty="0"/>
+          </a:p>
+        </p:txBody>
+      </p:sp>
+      <p:sp>
+        <p:nvSpPr>
+          <p:cNvPr id="18" name="s4_titration-dot-2"/>
+          <p:cNvSpPr/>
+          <p:nvPr/>
+        </p:nvSpPr>
+        <p:spPr>
+          <a:xfrm>
+            <a:off x="6115507" y="4914900"/>
+            <a:ext cx="109728" cy="109728"/>
+          </a:xfrm>
+          <a:prstGeom prst="ellipse">
+            <a:avLst/>
+          </a:prstGeom>
+          <a:solidFill>
+            <a:srgbClr val="1F6FB2"/>
+          </a:solidFill>
+          <a:ln w="12700">
+            <a:solidFill>
+              <a:srgbClr val="1F6FB2"/>
+            </a:solidFill>
+            <a:prstDash val="solid"/>
+          </a:ln>
+        </p:spPr>
+      </p:sp>
+      <p:sp>
+        <p:nvSpPr>
+          <p:cNvPr id="19" name="s4_titration-leg-2"/>
+          <p:cNvSpPr txBox="1"/>
+          <p:nvPr/>
+        </p:nvSpPr>
+        <p:spPr>
+          <a:xfrm>
+            <a:off x="6270955" y="4873752"/>
+            <a:ext cx="727862" cy="201168"/>
+          </a:xfrm>
+          <a:prstGeom prst="rect">
+            <a:avLst/>
+          </a:prstGeom>
+          <a:noFill/>
+          <a:ln/>
+        </p:spPr>
+        <p:txBody>
+          <a:bodyPr wrap="square" lIns="0" tIns="0" rIns="0" bIns="0" rtlCol="0" anchor="ctr"/>
+          <a:lstStyle/>
+          <a:p>
+            <a:pPr indent="0" marL="0">
+              <a:buNone/>
+            </a:pPr>
+            <a:r>
+              <a:rPr lang="en-US" sz="1050" dirty="0">
+                <a:solidFill>
+                  <a:srgbClr val="111111"/>
+                </a:solidFill>
+              </a:rPr>
+              <a:t>Age Down</a:t>
+            </a:r>
+            <a:endParaRPr lang="en-US" sz="1050" dirty="0"/>
+          </a:p>
+        </p:txBody>
+      </p:sp>
+      <p:sp>
+        <p:nvSpPr>
+          <p:cNvPr id="20" name="s4_titration-dot-3"/>
+          <p:cNvSpPr/>
+          <p:nvPr/>
+        </p:nvSpPr>
+        <p:spPr>
+          <a:xfrm>
+            <a:off x="7108546" y="4914900"/>
+            <a:ext cx="109728" cy="109728"/>
+          </a:xfrm>
+          <a:prstGeom prst="ellipse">
+            <a:avLst/>
+          </a:prstGeom>
+          <a:solidFill>
+            <a:srgbClr val="2E7D32"/>
+          </a:solidFill>
+          <a:ln w="12700">
+            <a:solidFill>
+              <a:srgbClr val="2E7D32"/>
+            </a:solidFill>
+            <a:prstDash val="solid"/>
+          </a:ln>
+        </p:spPr>
+      </p:sp>
+      <p:sp>
+        <p:nvSpPr>
+          <p:cNvPr id="21" name="s4_titration-leg-3"/>
+          <p:cNvSpPr txBox="1"/>
+          <p:nvPr/>
+        </p:nvSpPr>
+        <p:spPr>
+          <a:xfrm>
+            <a:off x="7263994" y="4873752"/>
+            <a:ext cx="925373" cy="201168"/>
+          </a:xfrm>
+          <a:prstGeom prst="rect">
+            <a:avLst/>
+          </a:prstGeom>
+          <a:noFill/>
+          <a:ln/>
+        </p:spPr>
+        <p:txBody>
+          <a:bodyPr wrap="square" lIns="0" tIns="0" rIns="0" bIns="0" rtlCol="0" anchor="ctr"/>
+          <a:lstStyle/>
+          <a:p>
+            <a:pPr indent="0" marL="0">
+              <a:buNone/>
+            </a:pPr>
+            <a:r>
+              <a:rPr lang="en-US" sz="1050" dirty="0">
+                <a:solidFill>
+                  <a:srgbClr val="111111"/>
+                </a:solidFill>
+              </a:rPr>
+              <a:t>Exercise Up</a:t>
+            </a:r>
+            <a:endParaRPr lang="en-US" sz="1050" dirty="0"/>
+          </a:p>
+        </p:txBody>
+      </p:sp>
+      <p:sp>
+        <p:nvSpPr>
+          <p:cNvPr id="22" name="s4_titration-dot-4"/>
+          <p:cNvSpPr/>
+          <p:nvPr/>
+        </p:nvSpPr>
+        <p:spPr>
+          <a:xfrm>
+            <a:off x="8299094" y="4914900"/>
+            <a:ext cx="109728" cy="109728"/>
+          </a:xfrm>
+          <a:prstGeom prst="ellipse">
+            <a:avLst/>
+          </a:prstGeom>
+          <a:solidFill>
+            <a:srgbClr val="7B3FA0"/>
+          </a:solidFill>
+          <a:ln w="12700">
+            <a:solidFill>
+              <a:srgbClr val="7B3FA0"/>
+            </a:solidFill>
+            <a:prstDash val="solid"/>
+          </a:ln>
+        </p:spPr>
+      </p:sp>
+      <p:sp>
+        <p:nvSpPr>
+          <p:cNvPr id="23" name="s4_titration-leg-4"/>
+          <p:cNvSpPr txBox="1"/>
+          <p:nvPr/>
+        </p:nvSpPr>
+        <p:spPr>
+          <a:xfrm>
+            <a:off x="8454542" y="4873752"/>
+            <a:ext cx="1057046" cy="201168"/>
+          </a:xfrm>
+          <a:prstGeom prst="rect">
+            <a:avLst/>
+          </a:prstGeom>
+          <a:noFill/>
+          <a:ln/>
+        </p:spPr>
+        <p:txBody>
+          <a:bodyPr wrap="square" lIns="0" tIns="0" rIns="0" bIns="0" rtlCol="0" anchor="ctr"/>
+          <a:lstStyle/>
+          <a:p>
+            <a:pPr indent="0" marL="0">
+              <a:buNone/>
+            </a:pPr>
+            <a:r>
+              <a:rPr lang="en-US" sz="1050" dirty="0">
+                <a:solidFill>
+                  <a:srgbClr val="111111"/>
+                </a:solidFill>
+              </a:rPr>
+              <a:t>Exercise Down</a:t>
+            </a:r>
+            <a:endParaRPr lang="en-US" sz="1050" dirty="0"/>
+          </a:p>
+        </p:txBody>
+      </p:sp>
+      <p:sp>
+        <p:nvSpPr>
+          <p:cNvPr id="24" name="s4_titration-dot-5"/>
+          <p:cNvSpPr/>
+          <p:nvPr/>
+        </p:nvSpPr>
+        <p:spPr>
+          <a:xfrm>
+            <a:off x="9621317" y="4914900"/>
             <a:ext cx="109728" cy="109728"/>
           </a:xfrm>
           <a:prstGeom prst="ellipse">
@@ -5167,14 +4800,14 @@
       </p:sp>
       <p:sp>
         <p:nvSpPr>
-          <p:cNvPr id="7" name="lg-txt-5.3-0"/>
+          <p:cNvPr id="25" name="s4_titration-leg-5"/>
           <p:cNvSpPr txBox="1"/>
           <p:nvPr/>
         </p:nvSpPr>
         <p:spPr>
           <a:xfrm>
-            <a:off x="886968" y="4846320"/>
-            <a:ext cx="1320394" cy="201168"/>
+            <a:off x="9776765" y="4873752"/>
+            <a:ext cx="1781251" cy="201168"/>
           </a:xfrm>
           <a:prstGeom prst="rect">
             <a:avLst/>
@@ -5195,7 +4828,7 @@
                   <a:srgbClr val="111111"/>
                 </a:solidFill>
               </a:rPr>
-              <a:t>Matched Unchanged</a:t>
+              <a:t>Stable (all 2,907 sites)</a:t>
             </a:r>
             <a:endParaRPr lang="en-US" sz="1050" dirty="0"/>
           </a:p>
@@ -5203,39 +4836,14 @@
       </p:sp>
       <p:sp>
         <p:nvSpPr>
-          <p:cNvPr id="8" name="lg-dot-5.3-1"/>
-          <p:cNvSpPr/>
-          <p:nvPr/>
-        </p:nvSpPr>
-        <p:spPr>
-          <a:xfrm>
-            <a:off x="2317090" y="4887468"/>
-            <a:ext cx="109728" cy="109728"/>
-          </a:xfrm>
-          <a:prstGeom prst="ellipse">
-            <a:avLst/>
-          </a:prstGeom>
-          <a:solidFill>
-            <a:srgbClr val="C2551C"/>
-          </a:solidFill>
-          <a:ln w="12700">
-            <a:solidFill>
-              <a:srgbClr val="C2551C"/>
-            </a:solidFill>
-            <a:prstDash val="solid"/>
-          </a:ln>
-        </p:spPr>
-      </p:sp>
-      <p:sp>
-        <p:nvSpPr>
-          <p:cNvPr id="9" name="lg-txt-5.3-1"/>
+          <p:cNvPr id="26" name="s4_titration-key"/>
           <p:cNvSpPr txBox="1"/>
           <p:nvPr/>
         </p:nvSpPr>
         <p:spPr>
           <a:xfrm>
-            <a:off x="2472538" y="4846320"/>
-            <a:ext cx="1452067" cy="201168"/>
+            <a:off x="3931920" y="5148072"/>
+            <a:ext cx="7726680" cy="502920"/>
           </a:xfrm>
           <a:prstGeom prst="rect">
             <a:avLst/>
@@ -5251,69 +4859,20 @@
               <a:buNone/>
             </a:pPr>
             <a:r>
-              <a:rPr lang="en-US" sz="1050" dirty="0">
-                <a:solidFill>
-                  <a:srgbClr val="111111"/>
-                </a:solidFill>
-              </a:rPr>
-              <a:t>Age-gained (Δscore)</a:t>
-            </a:r>
-            <a:endParaRPr lang="en-US" sz="1050" dirty="0"/>
-          </a:p>
-        </p:txBody>
-      </p:sp>
-      <p:sp>
-        <p:nvSpPr>
-          <p:cNvPr id="10" name="massaction"/>
-          <p:cNvSpPr txBox="1"/>
-          <p:nvPr/>
-        </p:nvSpPr>
-        <p:spPr>
-          <a:xfrm>
-            <a:off x="502920" y="5029200"/>
-            <a:ext cx="11155680" cy="914400"/>
-          </a:xfrm>
-          <a:prstGeom prst="rect">
-            <a:avLst/>
-          </a:prstGeom>
-          <a:solidFill>
-            <a:srgbClr val="F2F2F2"/>
-          </a:solidFill>
-          <a:ln/>
-        </p:spPr>
-        <p:txBody>
-          <a:bodyPr wrap="square" lIns="152400" tIns="152400" rIns="152400" bIns="152400" rtlCol="0" anchor="ctr"/>
-          <a:lstStyle/>
-          <a:p>
-            <a:pPr indent="0" marL="0">
-              <a:buNone/>
-            </a:pPr>
-            <a:r>
-              <a:rPr lang="en-US" sz="1700" b="1" dirty="0">
-                <a:solidFill>
-                  <a:srgbClr val="C2551C"/>
-                </a:solidFill>
-              </a:rPr>
-              <a:t>Mass action   </a:t>
-            </a:r>
-            <a:pPr indent="0" marL="0">
-              <a:buNone/>
-            </a:pPr>
-            <a:r>
-              <a:rPr lang="en-US" sz="1500" dirty="0">
-                <a:solidFill>
-                  <a:srgbClr val="000000"/>
-                </a:solidFill>
-              </a:rPr>
-              <a:t>if ageing raises AP-1 activity, occupancy rises first at the highest-affinity motifs — exactly the sites that gain. Losing binding is not the reverse: age-lost sites show no sequence signature at all.</a:t>
-            </a:r>
-            <a:endParaRPr lang="en-US" sz="1700" dirty="0"/>
-          </a:p>
-        </p:txBody>
-      </p:sp>
-      <p:sp>
-        <p:nvSpPr>
-          <p:cNvPr id="12" name="Text 0"/>
+              <a:rPr lang="en-US" sz="900" dirty="0">
+                <a:solidFill>
+                  <a:srgbClr val="595959"/>
+                </a:solidFill>
+              </a:rPr>
+              <a:t>grey line and band: all 2,907 Stable sites, median with a 95% bootstrap CI.   Each class is every site carrying that call, tested against that reference by Mann–Whitney, BH across all 10 tests on this figure.   *** p&lt;0.001   ** p&lt;0.01   * p&lt;0.05   ns ≥ 0.05</a:t>
+            </a:r>
+            <a:endParaRPr lang="en-US" sz="900" dirty="0"/>
+          </a:p>
+        </p:txBody>
+      </p:sp>
+      <p:sp>
+        <p:nvSpPr>
+          <p:cNvPr id="27" name="Text 0"/>
           <p:cNvSpPr/>
           <p:nvPr>
             <p:ph idx="101" type="body" hasCustomPrompt="1"/>
@@ -5337,6 +4896,25 @@
             <a:pPr algn="l" indent="0" marL="0">
               <a:buNone/>
             </a:pPr>
+            <a:r>
+              <a:rPr lang="en-US" sz="1500" b="1" dirty="0">
+                <a:solidFill>
+                  <a:srgbClr val="C2551C"/>
+                </a:solidFill>
+              </a:rPr>
+              <a:t>Takeaway   </a:t>
+            </a:r>
+            <a:pPr algn="l" indent="0" marL="0">
+              <a:buNone/>
+            </a:pPr>
+            <a:r>
+              <a:rPr lang="en-US" sz="1500" dirty="0">
+                <a:solidFill>
+                  <a:srgbClr val="111111"/>
+                </a:solidFill>
+              </a:rPr>
+              <a:t>a second copy is worth most at ±20–40 bp and a moved motif recovers only a third of what destroying it cost</a:t>
+            </a:r>
             <a:endParaRPr lang="en-US" sz="1500" dirty="0"/>
           </a:p>
         </p:txBody>
@@ -5443,7 +5021,7 @@
                   <a:schemeClr val="tx1"/>
                 </a:solidFill>
               </a:rPr>
-              <a:t>An independent reporter assay agrees</a:t>
+              <a:t>Age-gained sites read AP-1 dosage more sharply</a:t>
             </a:r>
             <a:endParaRPr lang="en-US" sz="2800" dirty="0"/>
           </a:p>
@@ -5451,14 +5029,14 @@
       </p:sp>
       <p:sp>
         <p:nvSpPr>
-          <p:cNvPr id="3" name="mp-t1"/>
+          <p:cNvPr id="3" name="ag-t1"/>
           <p:cNvSpPr txBox="1"/>
           <p:nvPr/>
         </p:nvSpPr>
         <p:spPr>
           <a:xfrm>
-            <a:off x="731520" y="2331720"/>
-            <a:ext cx="4937760" cy="274320"/>
+            <a:off x="731520" y="1051560"/>
+            <a:ext cx="7315200" cy="292608"/>
           </a:xfrm>
           <a:prstGeom prst="rect">
             <a:avLst/>
@@ -5474,20 +5052,56 @@
               <a:buNone/>
             </a:pPr>
             <a:r>
-              <a:rPr lang="en-US" sz="1300" b="1" dirty="0">
+              <a:rPr lang="en-US" sz="1350" b="1" dirty="0">
                 <a:solidFill>
                   <a:srgbClr val="111111"/>
                 </a:solidFill>
               </a:rPr>
-              <a:t>Same answer: the motif is a small part</a:t>
-            </a:r>
-            <a:endParaRPr lang="en-US" sz="1300" dirty="0"/>
+              <a:t>Age-gained sites respond more to AP-1 dosage, both ways</a:t>
+            </a:r>
+            <a:endParaRPr lang="en-US" sz="1350" dirty="0"/>
+          </a:p>
+        </p:txBody>
+      </p:sp>
+      <p:sp>
+        <p:nvSpPr>
+          <p:cNvPr id="4" name="ag-s1"/>
+          <p:cNvSpPr txBox="1"/>
+          <p:nvPr/>
+        </p:nvSpPr>
+        <p:spPr>
+          <a:xfrm>
+            <a:off x="731520" y="1344168"/>
+            <a:ext cx="7315200" cy="292608"/>
+          </a:xfrm>
+          <a:prstGeom prst="rect">
+            <a:avLst/>
+          </a:prstGeom>
+          <a:noFill/>
+          <a:ln/>
+        </p:spPr>
+        <p:txBody>
+          <a:bodyPr wrap="square" lIns="0" tIns="0" rIns="0" bIns="0" rtlCol="0" anchor="ctr"/>
+          <a:lstStyle/>
+          <a:p>
+            <a:pPr indent="0" marL="0">
+              <a:buNone/>
+            </a:pPr>
+            <a:r>
+              <a:rPr lang="en-US" sz="1050" dirty="0">
+                <a:solidFill>
+                  <a:srgbClr val="595959"/>
+                </a:solidFill>
+              </a:rPr>
+              <a:t>Δscore definition: the top fifth of the change in TOBIAS binding score with age, against matched Unchanged sites</a:t>
+            </a:r>
+            <a:endParaRPr lang="en-US" sz="1050" dirty="0"/>
           </a:p>
         </p:txBody>
       </p:sp>
       <p:pic>
         <p:nvPicPr>
-          <p:cNvPr id="4" name="Image 0" descr="/Users/z5162865/WongLab/AlphaGenome_Ap1/Analysis/slide_figures/panels/s6_share.png">    </p:cNvPr>
+          <p:cNvPr id="5" name="Image 0" descr="/Users/z5162865/WongLab/AlphaGenome_Ap1/Analysis/slide_figures/panels/s5_age_gained.png">    </p:cNvPr>
           <p:cNvPicPr>
             <a:picLocks noChangeAspect="1"/>
           </p:cNvPicPr>
@@ -5501,8 +5115,8 @@
         </p:blipFill>
         <p:spPr>
           <a:xfrm>
-            <a:off x="1352676" y="2651760"/>
-            <a:ext cx="3695447" cy="2651760"/>
+            <a:off x="1429175" y="1737360"/>
+            <a:ext cx="5919890" cy="3017520"/>
           </a:xfrm>
           <a:prstGeom prst="rect">
             <a:avLst/>
@@ -5511,14 +5125,39 @@
       </p:pic>
       <p:sp>
         <p:nvSpPr>
-          <p:cNvPr id="5" name="mp-t2"/>
+          <p:cNvPr id="6" name="lg-dot-5.3-0"/>
+          <p:cNvSpPr/>
+          <p:nvPr/>
+        </p:nvSpPr>
+        <p:spPr>
+          <a:xfrm>
+            <a:off x="731520" y="4887468"/>
+            <a:ext cx="109728" cy="109728"/>
+          </a:xfrm>
+          <a:prstGeom prst="ellipse">
+            <a:avLst/>
+          </a:prstGeom>
+          <a:solidFill>
+            <a:srgbClr val="B3B2AE"/>
+          </a:solidFill>
+          <a:ln w="12700">
+            <a:solidFill>
+              <a:srgbClr val="B3B2AE"/>
+            </a:solidFill>
+            <a:prstDash val="solid"/>
+          </a:ln>
+        </p:spPr>
+      </p:sp>
+      <p:sp>
+        <p:nvSpPr>
+          <p:cNvPr id="7" name="lg-txt-5.3-0"/>
           <p:cNvSpPr txBox="1"/>
           <p:nvPr/>
         </p:nvSpPr>
         <p:spPr>
           <a:xfrm>
-            <a:off x="6309360" y="2331720"/>
-            <a:ext cx="5120640" cy="274320"/>
+            <a:off x="886968" y="4846320"/>
+            <a:ext cx="1320394" cy="201168"/>
           </a:xfrm>
           <a:prstGeom prst="rect">
             <a:avLst/>
@@ -5534,51 +5173,52 @@
               <a:buNone/>
             </a:pPr>
             <a:r>
-              <a:rPr lang="en-US" sz="1300" b="1" dirty="0">
+              <a:rPr lang="en-US" sz="1050" dirty="0">
                 <a:solidFill>
                   <a:srgbClr val="111111"/>
                 </a:solidFill>
               </a:rPr>
-              <a:t>But they disagree on which elements depend more</a:t>
-            </a:r>
-            <a:endParaRPr lang="en-US" sz="1300" dirty="0"/>
-          </a:p>
-        </p:txBody>
-      </p:sp>
-      <p:pic>
-        <p:nvPicPr>
-          <p:cNvPr id="6" name="Image 1" descr="/Users/z5162865/WongLab/AlphaGenome_Ap1/Analysis/slide_figures/panels/s6_direction.png">    </p:cNvPr>
-          <p:cNvPicPr>
-            <a:picLocks noChangeAspect="1"/>
-          </p:cNvPicPr>
-          <p:nvPr/>
-        </p:nvPicPr>
-        <p:blipFill>
-          <a:blip r:embed="rId2"/>
-          <a:stretch>
-            <a:fillRect/>
-          </a:stretch>
-        </p:blipFill>
-        <p:spPr>
-          <a:xfrm>
-            <a:off x="7044645" y="2651760"/>
-            <a:ext cx="3650070" cy="2651760"/>
-          </a:xfrm>
-          <a:prstGeom prst="rect">
-            <a:avLst/>
-          </a:prstGeom>
-        </p:spPr>
-      </p:pic>
-      <p:sp>
-        <p:nvSpPr>
-          <p:cNvPr id="7" name="mp-key"/>
+              <a:t>Matched Unchanged</a:t>
+            </a:r>
+            <a:endParaRPr lang="en-US" sz="1050" dirty="0"/>
+          </a:p>
+        </p:txBody>
+      </p:sp>
+      <p:sp>
+        <p:nvSpPr>
+          <p:cNvPr id="8" name="lg-dot-5.3-1"/>
+          <p:cNvSpPr/>
+          <p:nvPr/>
+        </p:nvSpPr>
+        <p:spPr>
+          <a:xfrm>
+            <a:off x="2317090" y="4887468"/>
+            <a:ext cx="109728" cy="109728"/>
+          </a:xfrm>
+          <a:prstGeom prst="ellipse">
+            <a:avLst/>
+          </a:prstGeom>
+          <a:solidFill>
+            <a:srgbClr val="C2551C"/>
+          </a:solidFill>
+          <a:ln w="12700">
+            <a:solidFill>
+              <a:srgbClr val="C2551C"/>
+            </a:solidFill>
+            <a:prstDash val="solid"/>
+          </a:ln>
+        </p:spPr>
+      </p:sp>
+      <p:sp>
+        <p:nvSpPr>
+          <p:cNvPr id="9" name="lg-txt-5.3-1"/>
           <p:cNvSpPr txBox="1"/>
           <p:nvPr/>
         </p:nvSpPr>
         <p:spPr>
           <a:xfrm>
-            <a:off x="731520" y="5349240"/>
-            <a:ext cx="10698480" cy="274320"/>
+            <a:off x="2472538" y="4846320"/>
+            <a:ext cx="1452067" cy="201168"/>
           </a:xfrm>
           <a:prstGeom prst="rect">
             <a:avLst/>
@@ -5594,218 +5234,69 @@
               <a:buNone/>
             </a:pPr>
             <a:r>
-              <a:rPr lang="en-US" sz="950" dirty="0">
-                <a:solidFill>
-                  <a:srgbClr val="595959"/>
-                </a:solidFill>
-              </a:rPr>
-              <a:t>below 1×: responsive elements lose less than Stable ones   ·   above 1×: they lose more   ·   both p &lt; 0.001</a:t>
-            </a:r>
-            <a:endParaRPr lang="en-US" sz="950" dirty="0"/>
-          </a:p>
-        </p:txBody>
-      </p:sp>
-      <p:sp>
-        <p:nvSpPr>
-          <p:cNvPr id="8" name="stat-0"/>
-          <p:cNvSpPr/>
-          <p:nvPr/>
-        </p:nvSpPr>
-        <p:spPr>
-          <a:xfrm>
-            <a:off x="502920" y="1097280"/>
-            <a:ext cx="5440680" cy="1051560"/>
-          </a:xfrm>
-          <a:prstGeom prst="roundRect">
-            <a:avLst>
-              <a:gd name="adj" fmla="val 5217"/>
-            </a:avLst>
+              <a:rPr lang="en-US" sz="1050" dirty="0">
+                <a:solidFill>
+                  <a:srgbClr val="111111"/>
+                </a:solidFill>
+              </a:rPr>
+              <a:t>Age-gained (Δscore)</a:t>
+            </a:r>
+            <a:endParaRPr lang="en-US" sz="1050" dirty="0"/>
+          </a:p>
+        </p:txBody>
+      </p:sp>
+      <p:sp>
+        <p:nvSpPr>
+          <p:cNvPr id="10" name="massaction"/>
+          <p:cNvSpPr txBox="1"/>
+          <p:nvPr/>
+        </p:nvSpPr>
+        <p:spPr>
+          <a:xfrm>
+            <a:off x="502920" y="5029200"/>
+            <a:ext cx="11155680" cy="914400"/>
+          </a:xfrm>
+          <a:prstGeom prst="rect">
+            <a:avLst/>
           </a:prstGeom>
           <a:solidFill>
             <a:srgbClr val="F2F2F2"/>
           </a:solidFill>
-          <a:ln w="12700">
-            <a:solidFill>
-              <a:srgbClr val="E2E2E2"/>
-            </a:solidFill>
-            <a:prstDash val="solid"/>
-          </a:ln>
-        </p:spPr>
-      </p:sp>
-      <p:sp>
-        <p:nvSpPr>
-          <p:cNvPr id="9" name="Text 5"/>
-          <p:cNvSpPr txBox="1"/>
-          <p:nvPr/>
-        </p:nvSpPr>
-        <p:spPr>
-          <a:xfrm>
-            <a:off x="612648" y="1188720"/>
-            <a:ext cx="5221224" cy="548640"/>
-          </a:xfrm>
-          <a:prstGeom prst="rect">
-            <a:avLst/>
-          </a:prstGeom>
-          <a:noFill/>
-          <a:ln/>
-        </p:spPr>
-        <p:txBody>
-          <a:bodyPr wrap="square" lIns="0" tIns="0" rIns="0" bIns="0" rtlCol="0" anchor="ctr"/>
-          <a:lstStyle/>
-          <a:p>
-            <a:pPr algn="ctr" indent="0" marL="0">
-              <a:buNone/>
-            </a:pPr>
-            <a:r>
-              <a:rPr lang="en-US" sz="3000" b="1" dirty="0">
-                <a:solidFill>
-                  <a:srgbClr val="1F6FB2"/>
-                </a:solidFill>
-              </a:rPr>
-              <a:t>7.5%</a:t>
-            </a:r>
-            <a:endParaRPr lang="en-US" sz="3000" dirty="0"/>
-          </a:p>
-        </p:txBody>
-      </p:sp>
-      <p:sp>
-        <p:nvSpPr>
-          <p:cNvPr id="10" name="Text 6"/>
-          <p:cNvSpPr txBox="1"/>
-          <p:nvPr/>
-        </p:nvSpPr>
-        <p:spPr>
-          <a:xfrm>
-            <a:off x="612648" y="1755648"/>
-            <a:ext cx="5221224" cy="320040"/>
-          </a:xfrm>
-          <a:prstGeom prst="rect">
-            <a:avLst/>
-          </a:prstGeom>
-          <a:noFill/>
-          <a:ln/>
-        </p:spPr>
-        <p:txBody>
-          <a:bodyPr wrap="square" lIns="0" tIns="0" rIns="0" bIns="0" rtlCol="0" anchor="ctr"/>
-          <a:lstStyle/>
-          <a:p>
-            <a:pPr algn="ctr" indent="0" marL="0">
-              <a:buNone/>
-            </a:pPr>
-            <a:r>
-              <a:rPr lang="en-US" sz="1200" dirty="0">
-                <a:solidFill>
-                  <a:srgbClr val="595959"/>
-                </a:solidFill>
-              </a:rPr>
-              <a:t>AlphaGenome: the motif's share of local dependence</a:t>
-            </a:r>
-            <a:endParaRPr lang="en-US" sz="1200" dirty="0"/>
-          </a:p>
-        </p:txBody>
-      </p:sp>
-      <p:sp>
-        <p:nvSpPr>
-          <p:cNvPr id="11" name="stat-1"/>
-          <p:cNvSpPr/>
-          <p:nvPr/>
-        </p:nvSpPr>
-        <p:spPr>
-          <a:xfrm>
-            <a:off x="6217920" y="1097280"/>
-            <a:ext cx="5440680" cy="1051560"/>
-          </a:xfrm>
-          <a:prstGeom prst="roundRect">
-            <a:avLst>
-              <a:gd name="adj" fmla="val 5217"/>
-            </a:avLst>
-          </a:prstGeom>
-          <a:solidFill>
-            <a:srgbClr val="F2F2F2"/>
-          </a:solidFill>
-          <a:ln w="12700">
-            <a:solidFill>
-              <a:srgbClr val="E2E2E2"/>
-            </a:solidFill>
-            <a:prstDash val="solid"/>
-          </a:ln>
-        </p:spPr>
-      </p:sp>
-      <p:sp>
-        <p:nvSpPr>
-          <p:cNvPr id="12" name="Text 8"/>
-          <p:cNvSpPr txBox="1"/>
-          <p:nvPr/>
-        </p:nvSpPr>
-        <p:spPr>
-          <a:xfrm>
-            <a:off x="6327648" y="1188720"/>
-            <a:ext cx="5221224" cy="548640"/>
-          </a:xfrm>
-          <a:prstGeom prst="rect">
-            <a:avLst/>
-          </a:prstGeom>
-          <a:noFill/>
-          <a:ln/>
-        </p:spPr>
-        <p:txBody>
-          <a:bodyPr wrap="square" lIns="0" tIns="0" rIns="0" bIns="0" rtlCol="0" anchor="ctr"/>
-          <a:lstStyle/>
-          <a:p>
-            <a:pPr algn="ctr" indent="0" marL="0">
-              <a:buNone/>
-            </a:pPr>
-            <a:r>
-              <a:rPr lang="en-US" sz="3000" b="1" dirty="0">
+          <a:ln/>
+        </p:spPr>
+        <p:txBody>
+          <a:bodyPr wrap="square" lIns="152400" tIns="152400" rIns="152400" bIns="152400" rtlCol="0" anchor="ctr"/>
+          <a:lstStyle/>
+          <a:p>
+            <a:pPr indent="0" marL="0">
+              <a:buNone/>
+            </a:pPr>
+            <a:r>
+              <a:rPr lang="en-US" sz="1700" b="1" dirty="0">
                 <a:solidFill>
                   <a:srgbClr val="C2551C"/>
                 </a:solidFill>
               </a:rPr>
-              <a:t>9.3%</a:t>
-            </a:r>
-            <a:endParaRPr lang="en-US" sz="3000" dirty="0"/>
-          </a:p>
-        </p:txBody>
-      </p:sp>
-      <p:sp>
-        <p:nvSpPr>
-          <p:cNvPr id="13" name="Text 9"/>
-          <p:cNvSpPr txBox="1"/>
-          <p:nvPr/>
-        </p:nvSpPr>
-        <p:spPr>
-          <a:xfrm>
-            <a:off x="6327648" y="1755648"/>
-            <a:ext cx="5221224" cy="320040"/>
-          </a:xfrm>
-          <a:prstGeom prst="rect">
-            <a:avLst/>
-          </a:prstGeom>
-          <a:noFill/>
-          <a:ln/>
-        </p:spPr>
-        <p:txBody>
-          <a:bodyPr wrap="square" lIns="0" tIns="0" rIns="0" bIns="0" rtlCol="0" anchor="ctr"/>
-          <a:lstStyle/>
-          <a:p>
-            <a:pPr algn="ctr" indent="0" marL="0">
-              <a:buNone/>
-            </a:pPr>
-            <a:r>
-              <a:rPr lang="en-US" sz="1200" dirty="0">
-                <a:solidFill>
-                  <a:srgbClr val="595959"/>
-                </a:solidFill>
-              </a:rPr>
-              <a:t>fibroblast MPRA: the same quantity, measured in the lab</a:t>
-            </a:r>
-            <a:endParaRPr lang="en-US" sz="1200" dirty="0"/>
-          </a:p>
-        </p:txBody>
-      </p:sp>
-      <p:sp>
-        <p:nvSpPr>
-          <p:cNvPr id="14" name="Text 0"/>
+              <a:t>Mass action   </a:t>
+            </a:r>
+            <a:pPr indent="0" marL="0">
+              <a:buNone/>
+            </a:pPr>
+            <a:r>
+              <a:rPr lang="en-US" sz="1500" dirty="0">
+                <a:solidFill>
+                  <a:srgbClr val="000000"/>
+                </a:solidFill>
+              </a:rPr>
+              <a:t>if ageing raises AP-1 activity, occupancy rises first at the highest-affinity motifs — exactly the sites that gain. Losing binding is not the reverse: age-lost sites show no sequence signature at all.</a:t>
+            </a:r>
+            <a:endParaRPr lang="en-US" sz="1700" dirty="0"/>
+          </a:p>
+        </p:txBody>
+      </p:sp>
+      <p:sp>
+        <p:nvSpPr>
+          <p:cNvPr id="12" name="Text 0"/>
           <p:cNvSpPr/>
           <p:nvPr>
             <p:ph idx="101" type="body" hasCustomPrompt="1"/>
@@ -5829,25 +5320,6 @@
             <a:pPr algn="l" indent="0" marL="0">
               <a:buNone/>
             </a:pPr>
-            <a:r>
-              <a:rPr lang="en-US" sz="1500" b="1" dirty="0">
-                <a:solidFill>
-                  <a:srgbClr val="C2551C"/>
-                </a:solidFill>
-              </a:rPr>
-              <a:t>Takeaway   </a:t>
-            </a:r>
-            <a:pPr algn="l" indent="0" marL="0">
-              <a:buNone/>
-            </a:pPr>
-            <a:r>
-              <a:rPr lang="en-US" sz="1500" dirty="0">
-                <a:solidFill>
-                  <a:srgbClr val="111111"/>
-                </a:solidFill>
-              </a:rPr>
-              <a:t>two assays, different cell types and readouts, both put the AP-1 motif under a tenth of its 170 bp surroundings</a:t>
-            </a:r>
             <a:endParaRPr lang="en-US" sz="1500" dirty="0"/>
           </a:p>
         </p:txBody>
@@ -5954,7 +5426,7 @@
                   <a:schemeClr val="tx1"/>
                 </a:solidFill>
               </a:rPr>
-              <a:t>What this changes</a:t>
+              <a:t>An independent reporter assay agrees</a:t>
             </a:r>
             <a:endParaRPr lang="en-US" sz="2800" dirty="0"/>
           </a:p>
@@ -5962,7 +5434,361 @@
       </p:sp>
       <p:sp>
         <p:nvSpPr>
-          <p:cNvPr id="3" name="Text 0"/>
+          <p:cNvPr id="3" name="mp-t1"/>
+          <p:cNvSpPr txBox="1"/>
+          <p:nvPr/>
+        </p:nvSpPr>
+        <p:spPr>
+          <a:xfrm>
+            <a:off x="731520" y="2331720"/>
+            <a:ext cx="4937760" cy="274320"/>
+          </a:xfrm>
+          <a:prstGeom prst="rect">
+            <a:avLst/>
+          </a:prstGeom>
+          <a:noFill/>
+          <a:ln/>
+        </p:spPr>
+        <p:txBody>
+          <a:bodyPr wrap="square" lIns="0" tIns="0" rIns="0" bIns="0" rtlCol="0" anchor="ctr"/>
+          <a:lstStyle/>
+          <a:p>
+            <a:pPr indent="0" marL="0">
+              <a:buNone/>
+            </a:pPr>
+            <a:r>
+              <a:rPr lang="en-US" sz="1300" b="1" dirty="0">
+                <a:solidFill>
+                  <a:srgbClr val="111111"/>
+                </a:solidFill>
+              </a:rPr>
+              <a:t>Same answer: the motif is a small part</a:t>
+            </a:r>
+            <a:endParaRPr lang="en-US" sz="1300" dirty="0"/>
+          </a:p>
+        </p:txBody>
+      </p:sp>
+      <p:pic>
+        <p:nvPicPr>
+          <p:cNvPr id="4" name="Image 0" descr="/Users/z5162865/WongLab/AlphaGenome_Ap1/Analysis/slide_figures/panels/s6_share.png">    </p:cNvPr>
+          <p:cNvPicPr>
+            <a:picLocks noChangeAspect="1"/>
+          </p:cNvPicPr>
+          <p:nvPr/>
+        </p:nvPicPr>
+        <p:blipFill>
+          <a:blip r:embed="rId1"/>
+          <a:stretch>
+            <a:fillRect/>
+          </a:stretch>
+        </p:blipFill>
+        <p:spPr>
+          <a:xfrm>
+            <a:off x="1352676" y="2651760"/>
+            <a:ext cx="3695447" cy="2651760"/>
+          </a:xfrm>
+          <a:prstGeom prst="rect">
+            <a:avLst/>
+          </a:prstGeom>
+        </p:spPr>
+      </p:pic>
+      <p:sp>
+        <p:nvSpPr>
+          <p:cNvPr id="5" name="mp-t2"/>
+          <p:cNvSpPr txBox="1"/>
+          <p:nvPr/>
+        </p:nvSpPr>
+        <p:spPr>
+          <a:xfrm>
+            <a:off x="6309360" y="2331720"/>
+            <a:ext cx="5120640" cy="274320"/>
+          </a:xfrm>
+          <a:prstGeom prst="rect">
+            <a:avLst/>
+          </a:prstGeom>
+          <a:noFill/>
+          <a:ln/>
+        </p:spPr>
+        <p:txBody>
+          <a:bodyPr wrap="square" lIns="0" tIns="0" rIns="0" bIns="0" rtlCol="0" anchor="ctr"/>
+          <a:lstStyle/>
+          <a:p>
+            <a:pPr indent="0" marL="0">
+              <a:buNone/>
+            </a:pPr>
+            <a:r>
+              <a:rPr lang="en-US" sz="1300" b="1" dirty="0">
+                <a:solidFill>
+                  <a:srgbClr val="111111"/>
+                </a:solidFill>
+              </a:rPr>
+              <a:t>But they disagree on which elements depend more</a:t>
+            </a:r>
+            <a:endParaRPr lang="en-US" sz="1300" dirty="0"/>
+          </a:p>
+        </p:txBody>
+      </p:sp>
+      <p:pic>
+        <p:nvPicPr>
+          <p:cNvPr id="6" name="Image 1" descr="/Users/z5162865/WongLab/AlphaGenome_Ap1/Analysis/slide_figures/panels/s6_direction.png">    </p:cNvPr>
+          <p:cNvPicPr>
+            <a:picLocks noChangeAspect="1"/>
+          </p:cNvPicPr>
+          <p:nvPr/>
+        </p:nvPicPr>
+        <p:blipFill>
+          <a:blip r:embed="rId2"/>
+          <a:stretch>
+            <a:fillRect/>
+          </a:stretch>
+        </p:blipFill>
+        <p:spPr>
+          <a:xfrm>
+            <a:off x="7044645" y="2651760"/>
+            <a:ext cx="3650070" cy="2651760"/>
+          </a:xfrm>
+          <a:prstGeom prst="rect">
+            <a:avLst/>
+          </a:prstGeom>
+        </p:spPr>
+      </p:pic>
+      <p:sp>
+        <p:nvSpPr>
+          <p:cNvPr id="7" name="mp-key"/>
+          <p:cNvSpPr txBox="1"/>
+          <p:nvPr/>
+        </p:nvSpPr>
+        <p:spPr>
+          <a:xfrm>
+            <a:off x="731520" y="5349240"/>
+            <a:ext cx="10698480" cy="274320"/>
+          </a:xfrm>
+          <a:prstGeom prst="rect">
+            <a:avLst/>
+          </a:prstGeom>
+          <a:noFill/>
+          <a:ln/>
+        </p:spPr>
+        <p:txBody>
+          <a:bodyPr wrap="square" lIns="0" tIns="0" rIns="0" bIns="0" rtlCol="0" anchor="ctr"/>
+          <a:lstStyle/>
+          <a:p>
+            <a:pPr indent="0" marL="0">
+              <a:buNone/>
+            </a:pPr>
+            <a:r>
+              <a:rPr lang="en-US" sz="950" dirty="0">
+                <a:solidFill>
+                  <a:srgbClr val="595959"/>
+                </a:solidFill>
+              </a:rPr>
+              <a:t>below 1×: responsive elements lose less than Stable ones   ·   above 1×: they lose more   ·   both p &lt; 0.001</a:t>
+            </a:r>
+            <a:endParaRPr lang="en-US" sz="950" dirty="0"/>
+          </a:p>
+        </p:txBody>
+      </p:sp>
+      <p:sp>
+        <p:nvSpPr>
+          <p:cNvPr id="8" name="stat-0"/>
+          <p:cNvSpPr/>
+          <p:nvPr/>
+        </p:nvSpPr>
+        <p:spPr>
+          <a:xfrm>
+            <a:off x="502920" y="1097280"/>
+            <a:ext cx="5440680" cy="1051560"/>
+          </a:xfrm>
+          <a:prstGeom prst="roundRect">
+            <a:avLst>
+              <a:gd name="adj" fmla="val 5217"/>
+            </a:avLst>
+          </a:prstGeom>
+          <a:solidFill>
+            <a:srgbClr val="F2F2F2"/>
+          </a:solidFill>
+          <a:ln w="12700">
+            <a:solidFill>
+              <a:srgbClr val="E2E2E2"/>
+            </a:solidFill>
+            <a:prstDash val="solid"/>
+          </a:ln>
+        </p:spPr>
+      </p:sp>
+      <p:sp>
+        <p:nvSpPr>
+          <p:cNvPr id="9" name="Text 5"/>
+          <p:cNvSpPr txBox="1"/>
+          <p:nvPr/>
+        </p:nvSpPr>
+        <p:spPr>
+          <a:xfrm>
+            <a:off x="612648" y="1188720"/>
+            <a:ext cx="5221224" cy="548640"/>
+          </a:xfrm>
+          <a:prstGeom prst="rect">
+            <a:avLst/>
+          </a:prstGeom>
+          <a:noFill/>
+          <a:ln/>
+        </p:spPr>
+        <p:txBody>
+          <a:bodyPr wrap="square" lIns="0" tIns="0" rIns="0" bIns="0" rtlCol="0" anchor="ctr"/>
+          <a:lstStyle/>
+          <a:p>
+            <a:pPr algn="ctr" indent="0" marL="0">
+              <a:buNone/>
+            </a:pPr>
+            <a:r>
+              <a:rPr lang="en-US" sz="3000" b="1" dirty="0">
+                <a:solidFill>
+                  <a:srgbClr val="1F6FB2"/>
+                </a:solidFill>
+              </a:rPr>
+              <a:t>7.5%</a:t>
+            </a:r>
+            <a:endParaRPr lang="en-US" sz="3000" dirty="0"/>
+          </a:p>
+        </p:txBody>
+      </p:sp>
+      <p:sp>
+        <p:nvSpPr>
+          <p:cNvPr id="10" name="Text 6"/>
+          <p:cNvSpPr txBox="1"/>
+          <p:nvPr/>
+        </p:nvSpPr>
+        <p:spPr>
+          <a:xfrm>
+            <a:off x="612648" y="1755648"/>
+            <a:ext cx="5221224" cy="320040"/>
+          </a:xfrm>
+          <a:prstGeom prst="rect">
+            <a:avLst/>
+          </a:prstGeom>
+          <a:noFill/>
+          <a:ln/>
+        </p:spPr>
+        <p:txBody>
+          <a:bodyPr wrap="square" lIns="0" tIns="0" rIns="0" bIns="0" rtlCol="0" anchor="ctr"/>
+          <a:lstStyle/>
+          <a:p>
+            <a:pPr algn="ctr" indent="0" marL="0">
+              <a:buNone/>
+            </a:pPr>
+            <a:r>
+              <a:rPr lang="en-US" sz="1200" dirty="0">
+                <a:solidFill>
+                  <a:srgbClr val="595959"/>
+                </a:solidFill>
+              </a:rPr>
+              <a:t>AlphaGenome: the motif's share of local dependence</a:t>
+            </a:r>
+            <a:endParaRPr lang="en-US" sz="1200" dirty="0"/>
+          </a:p>
+        </p:txBody>
+      </p:sp>
+      <p:sp>
+        <p:nvSpPr>
+          <p:cNvPr id="11" name="stat-1"/>
+          <p:cNvSpPr/>
+          <p:nvPr/>
+        </p:nvSpPr>
+        <p:spPr>
+          <a:xfrm>
+            <a:off x="6217920" y="1097280"/>
+            <a:ext cx="5440680" cy="1051560"/>
+          </a:xfrm>
+          <a:prstGeom prst="roundRect">
+            <a:avLst>
+              <a:gd name="adj" fmla="val 5217"/>
+            </a:avLst>
+          </a:prstGeom>
+          <a:solidFill>
+            <a:srgbClr val="F2F2F2"/>
+          </a:solidFill>
+          <a:ln w="12700">
+            <a:solidFill>
+              <a:srgbClr val="E2E2E2"/>
+            </a:solidFill>
+            <a:prstDash val="solid"/>
+          </a:ln>
+        </p:spPr>
+      </p:sp>
+      <p:sp>
+        <p:nvSpPr>
+          <p:cNvPr id="12" name="Text 8"/>
+          <p:cNvSpPr txBox="1"/>
+          <p:nvPr/>
+        </p:nvSpPr>
+        <p:spPr>
+          <a:xfrm>
+            <a:off x="6327648" y="1188720"/>
+            <a:ext cx="5221224" cy="548640"/>
+          </a:xfrm>
+          <a:prstGeom prst="rect">
+            <a:avLst/>
+          </a:prstGeom>
+          <a:noFill/>
+          <a:ln/>
+        </p:spPr>
+        <p:txBody>
+          <a:bodyPr wrap="square" lIns="0" tIns="0" rIns="0" bIns="0" rtlCol="0" anchor="ctr"/>
+          <a:lstStyle/>
+          <a:p>
+            <a:pPr algn="ctr" indent="0" marL="0">
+              <a:buNone/>
+            </a:pPr>
+            <a:r>
+              <a:rPr lang="en-US" sz="3000" b="1" dirty="0">
+                <a:solidFill>
+                  <a:srgbClr val="C2551C"/>
+                </a:solidFill>
+              </a:rPr>
+              <a:t>9.3%</a:t>
+            </a:r>
+            <a:endParaRPr lang="en-US" sz="3000" dirty="0"/>
+          </a:p>
+        </p:txBody>
+      </p:sp>
+      <p:sp>
+        <p:nvSpPr>
+          <p:cNvPr id="13" name="Text 9"/>
+          <p:cNvSpPr txBox="1"/>
+          <p:nvPr/>
+        </p:nvSpPr>
+        <p:spPr>
+          <a:xfrm>
+            <a:off x="6327648" y="1755648"/>
+            <a:ext cx="5221224" cy="320040"/>
+          </a:xfrm>
+          <a:prstGeom prst="rect">
+            <a:avLst/>
+          </a:prstGeom>
+          <a:noFill/>
+          <a:ln/>
+        </p:spPr>
+        <p:txBody>
+          <a:bodyPr wrap="square" lIns="0" tIns="0" rIns="0" bIns="0" rtlCol="0" anchor="ctr"/>
+          <a:lstStyle/>
+          <a:p>
+            <a:pPr algn="ctr" indent="0" marL="0">
+              <a:buNone/>
+            </a:pPr>
+            <a:r>
+              <a:rPr lang="en-US" sz="1200" dirty="0">
+                <a:solidFill>
+                  <a:srgbClr val="595959"/>
+                </a:solidFill>
+              </a:rPr>
+              <a:t>fibroblast MPRA: the same quantity, measured in the lab</a:t>
+            </a:r>
+            <a:endParaRPr lang="en-US" sz="1200" dirty="0"/>
+          </a:p>
+        </p:txBody>
+      </p:sp>
+      <p:sp>
+        <p:nvSpPr>
+          <p:cNvPr id="14" name="Text 0"/>
           <p:cNvSpPr/>
           <p:nvPr>
             <p:ph idx="101" type="body" hasCustomPrompt="1"/>
@@ -5970,8 +5796,8 @@
         </p:nvSpPr>
         <p:spPr>
           <a:xfrm>
-            <a:off x="502920" y="1234440"/>
-            <a:ext cx="11155680" cy="5120640"/>
+            <a:off x="502920" y="5943600"/>
+            <a:ext cx="11155680" cy="658368"/>
           </a:xfrm>
           <a:prstGeom prst="rect">
             <a:avLst/>
@@ -5987,121 +5813,25 @@
               <a:buNone/>
             </a:pPr>
             <a:r>
-              <a:rPr lang="en-US" sz="1900" b="1" dirty="0">
-                <a:solidFill>
-                  <a:schemeClr val="tx1"/>
-                </a:solidFill>
-              </a:rPr>
-              <a:t>A responsive AP-1 site is a marginal one, not a differently-built one</a:t>
-            </a:r>
-            <a:endParaRPr lang="en-US" sz="1700" dirty="0"/>
-          </a:p>
-          <a:p>
+              <a:rPr lang="en-US" sz="1500" b="1" dirty="0">
+                <a:solidFill>
+                  <a:srgbClr val="C2551C"/>
+                </a:solidFill>
+              </a:rPr>
+              <a:t>Takeaway   </a:t>
+            </a:r>
             <a:pPr algn="l" indent="0" marL="0">
-              <a:spcAft>
-                <a:spcPts val="1500"/>
-              </a:spcAft>
-              <a:buNone/>
-            </a:pPr>
-            <a:r>
-              <a:rPr lang="en-US" sz="1700" dirty="0">
-                <a:solidFill>
-                  <a:schemeClr val="tx1"/>
-                </a:solidFill>
-              </a:rPr>
-              <a:t>Weaker AP-1 motif, fewer AP-1 motifs around it, and its dependence spread thinly across the element instead of anchored on the motif. The same partners matter, in the same order, in every class.</a:t>
-            </a:r>
-            <a:endParaRPr lang="en-US" sz="1700" dirty="0"/>
-          </a:p>
-          <a:p>
-            <a:pPr algn="l" indent="0" marL="0">
-              <a:buNone/>
-            </a:pPr>
-            <a:r>
-              <a:rPr lang="en-US" sz="1900" b="1" dirty="0">
-                <a:solidFill>
-                  <a:schemeClr val="tx1"/>
-                </a:solidFill>
-              </a:rPr>
-              <a:t>Two things survive matching, and only two</a:t>
-            </a:r>
-            <a:endParaRPr lang="en-US" sz="1700" dirty="0"/>
-          </a:p>
-          <a:p>
-            <a:pPr algn="l" indent="0" marL="0">
-              <a:spcAft>
-                <a:spcPts val="1500"/>
-              </a:spcAft>
-              <a:buNone/>
-            </a:pPr>
-            <a:r>
-              <a:rPr lang="en-US" sz="1700" dirty="0">
-                <a:solidFill>
-                  <a:schemeClr val="tx1"/>
-                </a:solidFill>
-              </a:rPr>
-              <a:t>Scale: the 11 bp motif and the whole peak are worth the same to both classes, but replacing the 170 bp element costs a Dynamic site 0.24 less — what you expect when the dependence is spread wider. Partner: age-gained sites lack a MEF2 abutting the motif, 5.6% against 13.7% of matched controls.</a:t>
-            </a:r>
-            <a:endParaRPr lang="en-US" sz="1700" dirty="0"/>
-          </a:p>
-          <a:p>
-            <a:pPr algn="l" indent="0" marL="0">
-              <a:buNone/>
-            </a:pPr>
-            <a:r>
-              <a:rPr lang="en-US" sz="1900" b="1" dirty="0">
-                <a:solidFill>
-                  <a:schemeClr val="tx1"/>
-                </a:solidFill>
-              </a:rPr>
-              <a:t>That is why it fluctuates</a:t>
-            </a:r>
-            <a:endParaRPr lang="en-US" sz="1700" dirty="0"/>
-          </a:p>
-          <a:p>
-            <a:pPr algn="l" indent="0" marL="0">
-              <a:spcAft>
-                <a:spcPts val="1500"/>
-              </a:spcAft>
-              <a:buNone/>
-            </a:pPr>
-            <a:r>
-              <a:rPr lang="en-US" sz="1700" dirty="0">
-                <a:solidFill>
-                  <a:schemeClr val="tx1"/>
-                </a:solidFill>
-              </a:rPr>
-              <a:t>A weak motif with no close MEF2 to hold it sits near the occupancy threshold, so its binding tracks how much AP-1 protein is available — which is what ageing changes.</a:t>
-            </a:r>
-            <a:endParaRPr lang="en-US" sz="1700" dirty="0"/>
-          </a:p>
-          <a:p>
-            <a:pPr algn="l" indent="0" marL="0">
-              <a:buNone/>
-            </a:pPr>
-            <a:r>
-              <a:rPr lang="en-US" sz="1900" b="1" dirty="0">
-                <a:solidFill>
-                  <a:schemeClr val="tx1"/>
-                </a:solidFill>
-              </a:rPr>
-              <a:t>Gain and loss are different events</a:t>
-            </a:r>
-            <a:endParaRPr lang="en-US" sz="1700" dirty="0"/>
-          </a:p>
-          <a:p>
-            <a:pPr algn="l" indent="0" marL="0">
-              <a:buNone/>
-            </a:pPr>
-            <a:r>
-              <a:rPr lang="en-US" sz="1700" dirty="0">
-                <a:solidFill>
-                  <a:schemeClr val="tx1"/>
-                </a:solidFill>
-              </a:rPr>
-              <a:t>Age-gained sites have better cores and read AP-1 dosage more sharply. Age-lost sites show no sequence signature of their own.</a:t>
-            </a:r>
-            <a:endParaRPr lang="en-US" sz="1700" dirty="0"/>
+              <a:buNone/>
+            </a:pPr>
+            <a:r>
+              <a:rPr lang="en-US" sz="1500" dirty="0">
+                <a:solidFill>
+                  <a:srgbClr val="111111"/>
+                </a:solidFill>
+              </a:rPr>
+              <a:t>two assays, different cell types and readouts, both put the AP-1 motif under a tenth of its 170 bp surroundings</a:t>
+            </a:r>
+            <a:endParaRPr lang="en-US" sz="1500" dirty="0"/>
           </a:p>
         </p:txBody>
       </p:sp>
@@ -6207,7 +5937,7 @@
                   <a:schemeClr val="tx1"/>
                 </a:solidFill>
               </a:rPr>
-              <a:t>Where this goes next</a:t>
+              <a:t>What this changes</a:t>
             </a:r>
             <a:endParaRPr lang="en-US" sz="2800" dirty="0"/>
           </a:p>
@@ -6245,14 +5975,14 @@
                   <a:schemeClr val="tx1"/>
                 </a:solidFill>
               </a:rPr>
-              <a:t>Fine-tuned condition-aware head</a:t>
+              <a:t>A responsive AP-1 site is a marginal one, not a differently-built one</a:t>
             </a:r>
             <a:endParaRPr lang="en-US" sz="1700" dirty="0"/>
           </a:p>
           <a:p>
             <a:pPr algn="l" indent="0" marL="0">
               <a:spcAft>
-                <a:spcPts val="1400"/>
+                <a:spcPts val="1500"/>
               </a:spcAft>
               <a:buNone/>
             </a:pPr>
@@ -6262,7 +5992,7 @@
                   <a:schemeClr val="tx1"/>
                 </a:solidFill>
               </a:rPr>
-              <a:t>A frozen-trunk probe on our own cardiomyocyte and fibroblast ATAC already reaches profile r = 0.65 against 0.59 for the built-in heart head, training 0.01% of the model. Next: 1 bp insertion targets, then LoRA.</a:t>
+              <a:t>Weaker AP-1 motif, fewer AP-1 motifs around it, and its dependence spread thinly across the element instead of anchored on the motif. The same partners matter, in the same order, in every class.</a:t>
             </a:r>
             <a:endParaRPr lang="en-US" sz="1700" dirty="0"/>
           </a:p>
@@ -6276,14 +6006,14 @@
                   <a:schemeClr val="tx1"/>
                 </a:solidFill>
               </a:rPr>
-              <a:t>Does AP-1 activity actually rise with age?</a:t>
+              <a:t>Two things survive matching, and only two</a:t>
             </a:r>
             <a:endParaRPr lang="en-US" sz="1700" dirty="0"/>
           </a:p>
           <a:p>
             <a:pPr algn="l" indent="0" marL="0">
               <a:spcAft>
-                <a:spcPts val="1400"/>
+                <a:spcPts val="1500"/>
               </a:spcAft>
               <a:buNone/>
             </a:pPr>
@@ -6293,7 +6023,7 @@
                   <a:schemeClr val="tx1"/>
                 </a:solidFill>
               </a:rPr>
-              <a:t>The mass-action reading rests on it. One check against the RNA.</a:t>
+              <a:t>Scale: the 11 bp motif and the whole peak are worth the same to both classes, but replacing the 170 bp element costs a Dynamic site 0.24 less — what you expect when the dependence is spread wider. Partner: age-gained sites lack a MEF2 abutting the motif, 5.6% against 13.7% of matched controls.</a:t>
             </a:r>
             <a:endParaRPr lang="en-US" sz="1700" dirty="0"/>
           </a:p>
@@ -6307,12 +6037,15 @@
                   <a:schemeClr val="tx1"/>
                 </a:solidFill>
               </a:rPr>
-              <a:t>Fibroblast scan</a:t>
+              <a:t>That is why it fluctuates</a:t>
             </a:r>
             <a:endParaRPr lang="en-US" sz="1700" dirty="0"/>
           </a:p>
           <a:p>
             <a:pPr algn="l" indent="0" marL="0">
+              <a:spcAft>
+                <a:spcPts val="1500"/>
+              </a:spcAft>
               <a:buNone/>
             </a:pPr>
             <a:r>
@@ -6321,7 +6054,35 @@
                   <a:schemeClr val="tx1"/>
                 </a:solidFill>
               </a:rPr>
-              <a:t>If MEF2 also tops the partner ranking in fibroblasts, the ranking is a model artefact rather than cardiac biology. This is the sharpest available control.</a:t>
+              <a:t>A weak motif with no close MEF2 to hold it sits near the occupancy threshold, so its binding tracks how much AP-1 protein is available — which is what ageing changes.</a:t>
+            </a:r>
+            <a:endParaRPr lang="en-US" sz="1700" dirty="0"/>
+          </a:p>
+          <a:p>
+            <a:pPr algn="l" indent="0" marL="0">
+              <a:buNone/>
+            </a:pPr>
+            <a:r>
+              <a:rPr lang="en-US" sz="1900" b="1" dirty="0">
+                <a:solidFill>
+                  <a:schemeClr val="tx1"/>
+                </a:solidFill>
+              </a:rPr>
+              <a:t>Gain and loss are different events</a:t>
+            </a:r>
+            <a:endParaRPr lang="en-US" sz="1700" dirty="0"/>
+          </a:p>
+          <a:p>
+            <a:pPr algn="l" indent="0" marL="0">
+              <a:buNone/>
+            </a:pPr>
+            <a:r>
+              <a:rPr lang="en-US" sz="1700" dirty="0">
+                <a:solidFill>
+                  <a:schemeClr val="tx1"/>
+                </a:solidFill>
+              </a:rPr>
+              <a:t>Age-gained sites have better cores and read AP-1 dosage more sharply. Age-lost sites show no sequence signature of their own.</a:t>
             </a:r>
             <a:endParaRPr lang="en-US" sz="1700" dirty="0"/>
           </a:p>
@@ -6367,6 +6128,228 @@
             <a:fld id="{F7021451-1387-4CA6-816F-3879F97B5CBC}" type="slidenum">
               <a:rPr b="0" lang="en-US"/>
               <a:t>15</a:t>
+            </a:fld>
+            <a:endParaRPr lang="en-US"/>
+          </a:p>
+        </p:txBody>
+      </p:sp>
+    </p:spTree>
+  </p:cSld>
+  <p:clrMapOvr>
+    <a:masterClrMapping/>
+  </p:clrMapOvr>
+</p:sld>
+</file>
+
+<file path=ppt/slides/slide16.xml><?xml version="1.0" encoding="utf-8"?>
+<p:sld xmlns:a="http://schemas.openxmlformats.org/drawingml/2006/main" xmlns:r="http://schemas.openxmlformats.org/officeDocument/2006/relationships" xmlns:p="http://schemas.openxmlformats.org/presentationml/2006/main">
+  <p:cSld name="Slide 16">
+    <p:spTree>
+      <p:nvGrpSpPr>
+        <p:cNvPr id="1" name=""/>
+        <p:cNvGrpSpPr/>
+        <p:nvPr/>
+      </p:nvGrpSpPr>
+      <p:grpSpPr>
+        <a:xfrm>
+          <a:off x="0" y="0"/>
+          <a:ext cx="0" cy="0"/>
+          <a:chOff x="0" y="0"/>
+          <a:chExt cx="0" cy="0"/>
+        </a:xfrm>
+      </p:grpSpPr>
+      <p:sp>
+        <p:nvSpPr>
+          <p:cNvPr id="2" name="Text 0"/>
+          <p:cNvSpPr/>
+          <p:nvPr>
+            <p:ph idx="100" type="title" hasCustomPrompt="1"/>
+          </p:nvPr>
+        </p:nvSpPr>
+        <p:spPr>
+          <a:xfrm>
+            <a:off x="502920" y="301752"/>
+            <a:ext cx="11155680" cy="685800"/>
+          </a:xfrm>
+          <a:prstGeom prst="rect">
+            <a:avLst/>
+          </a:prstGeom>
+          <a:noFill/>
+          <a:ln/>
+        </p:spPr>
+        <p:txBody>
+          <a:bodyPr wrap="square" rtlCol="0" anchor="ctr"/>
+          <a:lstStyle/>
+          <a:p>
+            <a:pPr algn="l" indent="0" marL="0">
+              <a:buNone/>
+            </a:pPr>
+            <a:r>
+              <a:rPr lang="en-US" sz="2800" b="1" dirty="0">
+                <a:solidFill>
+                  <a:schemeClr val="tx1"/>
+                </a:solidFill>
+              </a:rPr>
+              <a:t>Where this goes next</a:t>
+            </a:r>
+            <a:endParaRPr lang="en-US" sz="2800" dirty="0"/>
+          </a:p>
+        </p:txBody>
+      </p:sp>
+      <p:sp>
+        <p:nvSpPr>
+          <p:cNvPr id="3" name="Text 0"/>
+          <p:cNvSpPr/>
+          <p:nvPr>
+            <p:ph idx="101" type="body" hasCustomPrompt="1"/>
+          </p:nvPr>
+        </p:nvSpPr>
+        <p:spPr>
+          <a:xfrm>
+            <a:off x="502920" y="1234440"/>
+            <a:ext cx="11155680" cy="5120640"/>
+          </a:xfrm>
+          <a:prstGeom prst="rect">
+            <a:avLst/>
+          </a:prstGeom>
+          <a:noFill/>
+          <a:ln/>
+        </p:spPr>
+        <p:txBody>
+          <a:bodyPr wrap="square" rtlCol="0" anchor="t"/>
+          <a:lstStyle/>
+          <a:p>
+            <a:pPr algn="l" indent="0" marL="0">
+              <a:buNone/>
+            </a:pPr>
+            <a:r>
+              <a:rPr lang="en-US" sz="1900" b="1" dirty="0">
+                <a:solidFill>
+                  <a:schemeClr val="tx1"/>
+                </a:solidFill>
+              </a:rPr>
+              <a:t>Fine-tuned condition-aware head</a:t>
+            </a:r>
+            <a:endParaRPr lang="en-US" sz="1700" dirty="0"/>
+          </a:p>
+          <a:p>
+            <a:pPr algn="l" indent="0" marL="0">
+              <a:spcAft>
+                <a:spcPts val="1400"/>
+              </a:spcAft>
+              <a:buNone/>
+            </a:pPr>
+            <a:r>
+              <a:rPr lang="en-US" sz="1700" dirty="0">
+                <a:solidFill>
+                  <a:schemeClr val="tx1"/>
+                </a:solidFill>
+              </a:rPr>
+              <a:t>A frozen-trunk probe on our own cardiomyocyte and fibroblast ATAC already reaches profile r = 0.65 against 0.59 for the built-in heart head, training 0.01% of the model. Next: 1 bp insertion targets, then LoRA.</a:t>
+            </a:r>
+            <a:endParaRPr lang="en-US" sz="1700" dirty="0"/>
+          </a:p>
+          <a:p>
+            <a:pPr algn="l" indent="0" marL="0">
+              <a:buNone/>
+            </a:pPr>
+            <a:r>
+              <a:rPr lang="en-US" sz="1900" b="1" dirty="0">
+                <a:solidFill>
+                  <a:schemeClr val="tx1"/>
+                </a:solidFill>
+              </a:rPr>
+              <a:t>Does AP-1 activity actually rise with age?</a:t>
+            </a:r>
+            <a:endParaRPr lang="en-US" sz="1700" dirty="0"/>
+          </a:p>
+          <a:p>
+            <a:pPr algn="l" indent="0" marL="0">
+              <a:spcAft>
+                <a:spcPts val="1400"/>
+              </a:spcAft>
+              <a:buNone/>
+            </a:pPr>
+            <a:r>
+              <a:rPr lang="en-US" sz="1700" dirty="0">
+                <a:solidFill>
+                  <a:schemeClr val="tx1"/>
+                </a:solidFill>
+              </a:rPr>
+              <a:t>The mass-action reading rests on it. One check against the RNA.</a:t>
+            </a:r>
+            <a:endParaRPr lang="en-US" sz="1700" dirty="0"/>
+          </a:p>
+          <a:p>
+            <a:pPr algn="l" indent="0" marL="0">
+              <a:buNone/>
+            </a:pPr>
+            <a:r>
+              <a:rPr lang="en-US" sz="1900" b="1" dirty="0">
+                <a:solidFill>
+                  <a:schemeClr val="tx1"/>
+                </a:solidFill>
+              </a:rPr>
+              <a:t>Fibroblast scan</a:t>
+            </a:r>
+            <a:endParaRPr lang="en-US" sz="1700" dirty="0"/>
+          </a:p>
+          <a:p>
+            <a:pPr algn="l" indent="0" marL="0">
+              <a:buNone/>
+            </a:pPr>
+            <a:r>
+              <a:rPr lang="en-US" sz="1700" dirty="0">
+                <a:solidFill>
+                  <a:schemeClr val="tx1"/>
+                </a:solidFill>
+              </a:rPr>
+              <a:t>If MEF2 also tops the partner ranking in fibroblasts, the ranking is a model artefact rather than cardiac biology. This is the sharpest available control.</a:t>
+            </a:r>
+            <a:endParaRPr lang="en-US" sz="1700" dirty="0"/>
+          </a:p>
+        </p:txBody>
+      </p:sp>
+      <p:sp>
+        <p:nvSpPr>
+          <p:cNvPr id="25" name="Slide Number Placeholder 0"/>
+          <p:cNvSpPr>
+            <a:spLocks noGrp="1"/>
+          </p:cNvSpPr>
+          <p:nvPr>
+            <p:ph type="sldNum" sz="quarter" idx="4294967295"/>
+          </p:nvPr>
+        </p:nvSpPr>
+        <p:spPr>
+          <a:xfrm>
+            <a:off x="11658600" y="6446520"/>
+            <a:ext cx="800000" cy="300000"/>
+          </a:xfrm>
+          <a:prstGeom prst="rect">
+            <a:avLst/>
+          </a:prstGeom>
+          <a:extLst>
+            <a:ext uri="{C572A759-6A51-4108-AA02-DFA0A04FC94B}">
+              <ma14:wrappingTextBoxFlag xmlns:ma14="http://schemas.microsoft.com/office/mac/drawingml/2011/main" val="0"/>
+            </a:ext>
+          </a:extLst>
+        </p:spPr>
+        <p:txBody>
+          <a:bodyPr/>
+          <a:lstStyle>
+            <a:lvl1pPr>
+              <a:defRPr sz="1000">
+                <a:solidFill>
+                  <a:srgbClr val="A6A6A6"/>
+                </a:solidFill>
+              </a:defRPr>
+            </a:lvl1pPr>
+          </a:lstStyle>
+          <a:p>
+            <a:pPr algn="l"/>
+            <a:fld id="{F7021451-1387-4CA6-816F-3879F97B5CBC}" type="slidenum">
+              <a:rPr b="0" lang="en-US"/>
+              <a:t>16</a:t>
             </a:fld>
             <a:endParaRPr lang="en-US"/>
           </a:p>
@@ -7429,7 +7412,7 @@
                   <a:schemeClr val="tx1"/>
                 </a:solidFill>
               </a:rPr>
-              <a:t>Most of the difference is chromatin, not sequence</a:t>
+              <a:t>Responsive sites lose less to every edit of their element</a:t>
             </a:r>
             <a:endParaRPr lang="en-US" sz="2800" dirty="0"/>
           </a:p>
@@ -7443,8 +7426,8 @@
         </p:nvSpPr>
         <p:spPr>
           <a:xfrm>
-            <a:off x="1618488" y="1005840"/>
-            <a:ext cx="2436876" cy="438912"/>
+            <a:off x="612648" y="1143000"/>
+            <a:ext cx="2688336" cy="438912"/>
           </a:xfrm>
           <a:prstGeom prst="rect">
             <a:avLst/>
@@ -7479,8 +7462,8 @@
         </p:nvSpPr>
         <p:spPr>
           <a:xfrm>
-            <a:off x="1618488" y="1435608"/>
-            <a:ext cx="2436876" cy="310896"/>
+            <a:off x="612648" y="1572768"/>
+            <a:ext cx="2688336" cy="310896"/>
           </a:xfrm>
           <a:prstGeom prst="rect">
             <a:avLst/>
@@ -7523,17 +7506,89 @@
         </p:blipFill>
         <p:spPr>
           <a:xfrm>
-            <a:off x="1685171" y="1755648"/>
-            <a:ext cx="2303510" cy="1463040"/>
+            <a:off x="612648" y="2079013"/>
+            <a:ext cx="2688336" cy="2443942"/>
           </a:xfrm>
           <a:prstGeom prst="rect">
             <a:avLst/>
           </a:prstGeom>
         </p:spPr>
       </p:pic>
+      <p:sp>
+        <p:nvSpPr>
+          <p:cNvPr id="6" name="s2_matched_null-title-1"/>
+          <p:cNvSpPr txBox="1"/>
+          <p:nvPr/>
+        </p:nvSpPr>
+        <p:spPr>
+          <a:xfrm>
+            <a:off x="3374136" y="1143000"/>
+            <a:ext cx="2688336" cy="438912"/>
+          </a:xfrm>
+          <a:prstGeom prst="rect">
+            <a:avLst/>
+          </a:prstGeom>
+          <a:noFill/>
+          <a:ln/>
+        </p:spPr>
+        <p:txBody>
+          <a:bodyPr wrap="square" lIns="0" tIns="0" rIns="0" bIns="0" rtlCol="0" anchor="t"/>
+          <a:lstStyle/>
+          <a:p>
+            <a:pPr indent="0" marL="0">
+              <a:buNone/>
+            </a:pPr>
+            <a:r>
+              <a:rPr lang="en-US" sz="1250" b="1" dirty="0">
+                <a:solidFill>
+                  <a:srgbClr val="111111"/>
+                </a:solidFill>
+              </a:rPr>
+              <a:t>Replace the 170 bp element</a:t>
+            </a:r>
+            <a:endParaRPr lang="en-US" sz="1250" dirty="0"/>
+          </a:p>
+        </p:txBody>
+      </p:sp>
+      <p:sp>
+        <p:nvSpPr>
+          <p:cNvPr id="7" name="s2_matched_null-sub-1"/>
+          <p:cNvSpPr txBox="1"/>
+          <p:nvPr/>
+        </p:nvSpPr>
+        <p:spPr>
+          <a:xfrm>
+            <a:off x="3374136" y="1572768"/>
+            <a:ext cx="2688336" cy="310896"/>
+          </a:xfrm>
+          <a:prstGeom prst="rect">
+            <a:avLst/>
+          </a:prstGeom>
+          <a:noFill/>
+          <a:ln/>
+        </p:spPr>
+        <p:txBody>
+          <a:bodyPr wrap="square" lIns="0" tIns="0" rIns="0" bIns="0" rtlCol="0" anchor="t"/>
+          <a:lstStyle/>
+          <a:p>
+            <a:pPr indent="0" marL="0">
+              <a:buNone/>
+            </a:pPr>
+            <a:r>
+              <a:rPr lang="en-US" sz="950" dirty="0">
+                <a:solidFill>
+                  <a:srgbClr val="595959"/>
+                </a:solidFill>
+              </a:rPr>
+              <a:t>the element around it</a:t>
+            </a:r>
+            <a:endParaRPr lang="en-US" sz="950" dirty="0"/>
+          </a:p>
+        </p:txBody>
+      </p:sp>
       <p:pic>
         <p:nvPicPr>
-          <p:cNvPr id="6" name="Image 1" descr="/Users/z5162865/WongLab/AlphaGenome_Ap1/Analysis/slide_figures/panels/s2_matched_null_c0_r1.png">    </p:cNvPr>
+          <p:cNvPr id="8" name="Image 1" descr="/Users/z5162865/WongLab/AlphaGenome_Ap1/Analysis/slide_figures/panels/s2_matched_null_c1_r0.png">    </p:cNvPr>
           <p:cNvPicPr>
             <a:picLocks noChangeAspect="1"/>
           </p:cNvPicPr>
@@ -7547,8 +7602,8 @@
         </p:blipFill>
         <p:spPr>
           <a:xfrm>
-            <a:off x="1685171" y="3291840"/>
-            <a:ext cx="2303510" cy="1463040"/>
+            <a:off x="3374136" y="2079013"/>
+            <a:ext cx="2688336" cy="2443942"/>
           </a:xfrm>
           <a:prstGeom prst="rect">
             <a:avLst/>
@@ -7557,14 +7612,14 @@
       </p:pic>
       <p:sp>
         <p:nvSpPr>
-          <p:cNvPr id="7" name="s2_matched_null-title-1"/>
+          <p:cNvPr id="9" name="s2_matched_null-title-2"/>
           <p:cNvSpPr txBox="1"/>
           <p:nvPr/>
         </p:nvSpPr>
         <p:spPr>
           <a:xfrm>
-            <a:off x="4128516" y="1005840"/>
-            <a:ext cx="2436876" cy="438912"/>
+            <a:off x="6135624" y="1143000"/>
+            <a:ext cx="2688336" cy="438912"/>
           </a:xfrm>
           <a:prstGeom prst="rect">
             <a:avLst/>
@@ -7585,7 +7640,7 @@
                   <a:srgbClr val="111111"/>
                 </a:solidFill>
               </a:rPr>
-              <a:t>Replace the 170 bp element</a:t>
+              <a:t>Replace the whole peak</a:t>
             </a:r>
             <a:endParaRPr lang="en-US" sz="1250" dirty="0"/>
           </a:p>
@@ -7593,14 +7648,14 @@
       </p:sp>
       <p:sp>
         <p:nvSpPr>
-          <p:cNvPr id="8" name="s2_matched_null-sub-1"/>
+          <p:cNvPr id="10" name="s2_matched_null-sub-2"/>
           <p:cNvSpPr txBox="1"/>
           <p:nvPr/>
         </p:nvSpPr>
         <p:spPr>
           <a:xfrm>
-            <a:off x="4128516" y="1435608"/>
-            <a:ext cx="2436876" cy="310896"/>
+            <a:off x="6135624" y="1572768"/>
+            <a:ext cx="2688336" cy="310896"/>
           </a:xfrm>
           <a:prstGeom prst="rect">
             <a:avLst/>
@@ -7621,7 +7676,7 @@
                   <a:srgbClr val="595959"/>
                 </a:solidFill>
               </a:rPr>
-              <a:t>the element around it</a:t>
+              <a:t>everything, read over the peak</a:t>
             </a:r>
             <a:endParaRPr lang="en-US" sz="950" dirty="0"/>
           </a:p>
@@ -7629,7 +7684,7 @@
       </p:sp>
       <p:pic>
         <p:nvPicPr>
-          <p:cNvPr id="9" name="Image 2" descr="/Users/z5162865/WongLab/AlphaGenome_Ap1/Analysis/slide_figures/panels/s2_matched_null_c1_r0.png">    </p:cNvPr>
+          <p:cNvPr id="11" name="Image 2" descr="/Users/z5162865/WongLab/AlphaGenome_Ap1/Analysis/slide_figures/panels/s2_matched_null_c2_r0.png">    </p:cNvPr>
           <p:cNvPicPr>
             <a:picLocks noChangeAspect="1"/>
           </p:cNvPicPr>
@@ -7643,17 +7698,89 @@
         </p:blipFill>
         <p:spPr>
           <a:xfrm>
-            <a:off x="4195199" y="1755648"/>
-            <a:ext cx="2303510" cy="1463040"/>
+            <a:off x="6135624" y="2079013"/>
+            <a:ext cx="2688336" cy="2443942"/>
           </a:xfrm>
           <a:prstGeom prst="rect">
             <a:avLst/>
           </a:prstGeom>
         </p:spPr>
       </p:pic>
+      <p:sp>
+        <p:nvSpPr>
+          <p:cNvPr id="12" name="s2_matched_null-title-3"/>
+          <p:cNvSpPr txBox="1"/>
+          <p:nvPr/>
+        </p:nvSpPr>
+        <p:spPr>
+          <a:xfrm>
+            <a:off x="8897112" y="1143000"/>
+            <a:ext cx="2688336" cy="438912"/>
+          </a:xfrm>
+          <a:prstGeom prst="rect">
+            <a:avLst/>
+          </a:prstGeom>
+          <a:noFill/>
+          <a:ln/>
+        </p:spPr>
+        <p:txBody>
+          <a:bodyPr wrap="square" lIns="0" tIns="0" rIns="0" bIns="0" rtlCol="0" anchor="t"/>
+          <a:lstStyle/>
+          <a:p>
+            <a:pPr indent="0" marL="0">
+              <a:buNone/>
+            </a:pPr>
+            <a:r>
+              <a:rPr lang="en-US" sz="1250" b="1" dirty="0">
+                <a:solidFill>
+                  <a:srgbClr val="111111"/>
+                </a:solidFill>
+              </a:rPr>
+              <a:t>Edit 300 bp away</a:t>
+            </a:r>
+            <a:endParaRPr lang="en-US" sz="1250" dirty="0"/>
+          </a:p>
+        </p:txBody>
+      </p:sp>
+      <p:sp>
+        <p:nvSpPr>
+          <p:cNvPr id="13" name="s2_matched_null-sub-3"/>
+          <p:cNvSpPr txBox="1"/>
+          <p:nvPr/>
+        </p:nvSpPr>
+        <p:spPr>
+          <a:xfrm>
+            <a:off x="8897112" y="1572768"/>
+            <a:ext cx="2688336" cy="310896"/>
+          </a:xfrm>
+          <a:prstGeom prst="rect">
+            <a:avLst/>
+          </a:prstGeom>
+          <a:noFill/>
+          <a:ln/>
+        </p:spPr>
+        <p:txBody>
+          <a:bodyPr wrap="square" lIns="0" tIns="0" rIns="0" bIns="0" rtlCol="0" anchor="t"/>
+          <a:lstStyle/>
+          <a:p>
+            <a:pPr indent="0" marL="0">
+              <a:buNone/>
+            </a:pPr>
+            <a:r>
+              <a:rPr lang="en-US" sz="950" dirty="0">
+                <a:solidFill>
+                  <a:srgbClr val="595959"/>
+                </a:solidFill>
+              </a:rPr>
+              <a:t>the control: nothing at stake</a:t>
+            </a:r>
+            <a:endParaRPr lang="en-US" sz="950" dirty="0"/>
+          </a:p>
+        </p:txBody>
+      </p:sp>
       <p:pic>
         <p:nvPicPr>
-          <p:cNvPr id="10" name="Image 3" descr="/Users/z5162865/WongLab/AlphaGenome_Ap1/Analysis/slide_figures/panels/s2_matched_null_c1_r1.png">    </p:cNvPr>
+          <p:cNvPr id="14" name="Image 3" descr="/Users/z5162865/WongLab/AlphaGenome_Ap1/Analysis/slide_figures/panels/s2_matched_null_c3_r0.png">    </p:cNvPr>
           <p:cNvPicPr>
             <a:picLocks noChangeAspect="1"/>
           </p:cNvPicPr>
@@ -7667,8 +7794,8 @@
         </p:blipFill>
         <p:spPr>
           <a:xfrm>
-            <a:off x="4195199" y="3291840"/>
-            <a:ext cx="2303510" cy="1463040"/>
+            <a:off x="8897112" y="2079013"/>
+            <a:ext cx="2688336" cy="2443942"/>
           </a:xfrm>
           <a:prstGeom prst="rect">
             <a:avLst/>
@@ -7677,325 +7804,13 @@
       </p:pic>
       <p:sp>
         <p:nvSpPr>
-          <p:cNvPr id="11" name="s2_matched_null-title-2"/>
-          <p:cNvSpPr txBox="1"/>
-          <p:nvPr/>
-        </p:nvSpPr>
-        <p:spPr>
-          <a:xfrm>
-            <a:off x="6638544" y="1005840"/>
-            <a:ext cx="2436876" cy="438912"/>
-          </a:xfrm>
-          <a:prstGeom prst="rect">
-            <a:avLst/>
-          </a:prstGeom>
-          <a:noFill/>
-          <a:ln/>
-        </p:spPr>
-        <p:txBody>
-          <a:bodyPr wrap="square" lIns="0" tIns="0" rIns="0" bIns="0" rtlCol="0" anchor="t"/>
-          <a:lstStyle/>
-          <a:p>
-            <a:pPr indent="0" marL="0">
-              <a:buNone/>
-            </a:pPr>
-            <a:r>
-              <a:rPr lang="en-US" sz="1250" b="1" dirty="0">
-                <a:solidFill>
-                  <a:srgbClr val="111111"/>
-                </a:solidFill>
-              </a:rPr>
-              <a:t>Replace the whole peak</a:t>
-            </a:r>
-            <a:endParaRPr lang="en-US" sz="1250" dirty="0"/>
-          </a:p>
-        </p:txBody>
-      </p:sp>
-      <p:sp>
-        <p:nvSpPr>
-          <p:cNvPr id="12" name="s2_matched_null-sub-2"/>
-          <p:cNvSpPr txBox="1"/>
-          <p:nvPr/>
-        </p:nvSpPr>
-        <p:spPr>
-          <a:xfrm>
-            <a:off x="6638544" y="1435608"/>
-            <a:ext cx="2436876" cy="310896"/>
-          </a:xfrm>
-          <a:prstGeom prst="rect">
-            <a:avLst/>
-          </a:prstGeom>
-          <a:noFill/>
-          <a:ln/>
-        </p:spPr>
-        <p:txBody>
-          <a:bodyPr wrap="square" lIns="0" tIns="0" rIns="0" bIns="0" rtlCol="0" anchor="t"/>
-          <a:lstStyle/>
-          <a:p>
-            <a:pPr indent="0" marL="0">
-              <a:buNone/>
-            </a:pPr>
-            <a:r>
-              <a:rPr lang="en-US" sz="950" dirty="0">
-                <a:solidFill>
-                  <a:srgbClr val="595959"/>
-                </a:solidFill>
-              </a:rPr>
-              <a:t>everything, read over the peak</a:t>
-            </a:r>
-            <a:endParaRPr lang="en-US" sz="950" dirty="0"/>
-          </a:p>
-        </p:txBody>
-      </p:sp>
-      <p:pic>
-        <p:nvPicPr>
-          <p:cNvPr id="13" name="Image 4" descr="/Users/z5162865/WongLab/AlphaGenome_Ap1/Analysis/slide_figures/panels/s2_matched_null_c2_r0.png">    </p:cNvPr>
-          <p:cNvPicPr>
-            <a:picLocks noChangeAspect="1"/>
-          </p:cNvPicPr>
-          <p:nvPr/>
-        </p:nvPicPr>
-        <p:blipFill>
-          <a:blip r:embed="rId5"/>
-          <a:stretch>
-            <a:fillRect/>
-          </a:stretch>
-        </p:blipFill>
-        <p:spPr>
-          <a:xfrm>
-            <a:off x="6705227" y="1755648"/>
-            <a:ext cx="2303510" cy="1463040"/>
-          </a:xfrm>
-          <a:prstGeom prst="rect">
-            <a:avLst/>
-          </a:prstGeom>
-        </p:spPr>
-      </p:pic>
-      <p:pic>
-        <p:nvPicPr>
-          <p:cNvPr id="14" name="Image 5" descr="/Users/z5162865/WongLab/AlphaGenome_Ap1/Analysis/slide_figures/panels/s2_matched_null_c2_r1.png">    </p:cNvPr>
-          <p:cNvPicPr>
-            <a:picLocks noChangeAspect="1"/>
-          </p:cNvPicPr>
-          <p:nvPr/>
-        </p:nvPicPr>
-        <p:blipFill>
-          <a:blip r:embed="rId6"/>
-          <a:stretch>
-            <a:fillRect/>
-          </a:stretch>
-        </p:blipFill>
-        <p:spPr>
-          <a:xfrm>
-            <a:off x="6705227" y="3291840"/>
-            <a:ext cx="2303510" cy="1463040"/>
-          </a:xfrm>
-          <a:prstGeom prst="rect">
-            <a:avLst/>
-          </a:prstGeom>
-        </p:spPr>
-      </p:pic>
-      <p:sp>
-        <p:nvSpPr>
-          <p:cNvPr id="15" name="s2_matched_null-title-3"/>
-          <p:cNvSpPr txBox="1"/>
-          <p:nvPr/>
-        </p:nvSpPr>
-        <p:spPr>
-          <a:xfrm>
-            <a:off x="9148572" y="1005840"/>
-            <a:ext cx="2436876" cy="438912"/>
-          </a:xfrm>
-          <a:prstGeom prst="rect">
-            <a:avLst/>
-          </a:prstGeom>
-          <a:noFill/>
-          <a:ln/>
-        </p:spPr>
-        <p:txBody>
-          <a:bodyPr wrap="square" lIns="0" tIns="0" rIns="0" bIns="0" rtlCol="0" anchor="t"/>
-          <a:lstStyle/>
-          <a:p>
-            <a:pPr indent="0" marL="0">
-              <a:buNone/>
-            </a:pPr>
-            <a:r>
-              <a:rPr lang="en-US" sz="1250" b="1" dirty="0">
-                <a:solidFill>
-                  <a:srgbClr val="111111"/>
-                </a:solidFill>
-              </a:rPr>
-              <a:t>Edit 300 bp away</a:t>
-            </a:r>
-            <a:endParaRPr lang="en-US" sz="1250" dirty="0"/>
-          </a:p>
-        </p:txBody>
-      </p:sp>
-      <p:sp>
-        <p:nvSpPr>
-          <p:cNvPr id="16" name="s2_matched_null-sub-3"/>
-          <p:cNvSpPr txBox="1"/>
-          <p:nvPr/>
-        </p:nvSpPr>
-        <p:spPr>
-          <a:xfrm>
-            <a:off x="9148572" y="1435608"/>
-            <a:ext cx="2436876" cy="310896"/>
-          </a:xfrm>
-          <a:prstGeom prst="rect">
-            <a:avLst/>
-          </a:prstGeom>
-          <a:noFill/>
-          <a:ln/>
-        </p:spPr>
-        <p:txBody>
-          <a:bodyPr wrap="square" lIns="0" tIns="0" rIns="0" bIns="0" rtlCol="0" anchor="t"/>
-          <a:lstStyle/>
-          <a:p>
-            <a:pPr indent="0" marL="0">
-              <a:buNone/>
-            </a:pPr>
-            <a:r>
-              <a:rPr lang="en-US" sz="950" dirty="0">
-                <a:solidFill>
-                  <a:srgbClr val="595959"/>
-                </a:solidFill>
-              </a:rPr>
-              <a:t>the control: nothing at stake</a:t>
-            </a:r>
-            <a:endParaRPr lang="en-US" sz="950" dirty="0"/>
-          </a:p>
-        </p:txBody>
-      </p:sp>
-      <p:pic>
-        <p:nvPicPr>
-          <p:cNvPr id="17" name="Image 6" descr="/Users/z5162865/WongLab/AlphaGenome_Ap1/Analysis/slide_figures/panels/s2_matched_null_c3_r0.png">    </p:cNvPr>
-          <p:cNvPicPr>
-            <a:picLocks noChangeAspect="1"/>
-          </p:cNvPicPr>
-          <p:nvPr/>
-        </p:nvPicPr>
-        <p:blipFill>
-          <a:blip r:embed="rId7"/>
-          <a:stretch>
-            <a:fillRect/>
-          </a:stretch>
-        </p:blipFill>
-        <p:spPr>
-          <a:xfrm>
-            <a:off x="9215255" y="1755648"/>
-            <a:ext cx="2303510" cy="1463040"/>
-          </a:xfrm>
-          <a:prstGeom prst="rect">
-            <a:avLst/>
-          </a:prstGeom>
-        </p:spPr>
-      </p:pic>
-      <p:pic>
-        <p:nvPicPr>
-          <p:cNvPr id="18" name="Image 7" descr="/Users/z5162865/WongLab/AlphaGenome_Ap1/Analysis/slide_figures/panels/s2_matched_null_c3_r1.png">    </p:cNvPr>
-          <p:cNvPicPr>
-            <a:picLocks noChangeAspect="1"/>
-          </p:cNvPicPr>
-          <p:nvPr/>
-        </p:nvPicPr>
-        <p:blipFill>
-          <a:blip r:embed="rId8"/>
-          <a:stretch>
-            <a:fillRect/>
-          </a:stretch>
-        </p:blipFill>
-        <p:spPr>
-          <a:xfrm>
-            <a:off x="9215255" y="3291840"/>
-            <a:ext cx="2303510" cy="1463040"/>
-          </a:xfrm>
-          <a:prstGeom prst="rect">
-            <a:avLst/>
-          </a:prstGeom>
-        </p:spPr>
-      </p:pic>
-      <p:sp>
-        <p:nvSpPr>
-          <p:cNvPr id="19" name="s2_matched_null-row-0"/>
-          <p:cNvSpPr txBox="1"/>
-          <p:nvPr/>
-        </p:nvSpPr>
-        <p:spPr>
-          <a:xfrm rot="16200000">
-            <a:off x="484632" y="1837944"/>
-            <a:ext cx="1371600" cy="1371600"/>
-          </a:xfrm>
-          <a:prstGeom prst="rect">
-            <a:avLst/>
-          </a:prstGeom>
-          <a:noFill/>
-          <a:ln/>
-        </p:spPr>
-        <p:txBody>
-          <a:bodyPr wrap="square" lIns="0" tIns="0" rIns="0" bIns="0" rtlCol="0" anchor="ctr"/>
-          <a:lstStyle/>
-          <a:p>
-            <a:pPr algn="ctr" indent="0" marL="0">
-              <a:buNone/>
-            </a:pPr>
-            <a:r>
-              <a:rPr lang="en-US" sz="1000" dirty="0">
-                <a:solidFill>
-                  <a:srgbClr val="111111"/>
-                </a:solidFill>
-              </a:rPr>
-              <a:t>all sites, nothing controlled</a:t>
-            </a:r>
-            <a:endParaRPr lang="en-US" sz="1000" dirty="0"/>
-          </a:p>
-        </p:txBody>
-      </p:sp>
-      <p:sp>
-        <p:nvSpPr>
-          <p:cNvPr id="20" name="s2_matched_null-row-1"/>
-          <p:cNvSpPr txBox="1"/>
-          <p:nvPr/>
-        </p:nvSpPr>
-        <p:spPr>
-          <a:xfrm rot="16200000">
-            <a:off x="484632" y="3374136"/>
-            <a:ext cx="1371600" cy="1371600"/>
-          </a:xfrm>
-          <a:prstGeom prst="rect">
-            <a:avLst/>
-          </a:prstGeom>
-          <a:noFill/>
-          <a:ln/>
-        </p:spPr>
-        <p:txBody>
-          <a:bodyPr wrap="square" lIns="0" tIns="0" rIns="0" bIns="0" rtlCol="0" anchor="ctr"/>
-          <a:lstStyle/>
-          <a:p>
-            <a:pPr algn="ctr" indent="0" marL="0">
-              <a:buNone/>
-            </a:pPr>
-            <a:r>
-              <a:rPr lang="en-US" sz="1000" dirty="0">
-                <a:solidFill>
-                  <a:srgbClr val="111111"/>
-                </a:solidFill>
-              </a:rPr>
-              <a:t>each class against its own matched Stable controls</a:t>
-            </a:r>
-            <a:endParaRPr lang="en-US" sz="1000" dirty="0"/>
-          </a:p>
-        </p:txBody>
-      </p:sp>
-      <p:sp>
-        <p:nvSpPr>
-          <p:cNvPr id="21" name="s2_matched_null-dot-0"/>
+          <p:cNvPr id="15" name="s2_matched_null-dot-0"/>
           <p:cNvSpPr/>
           <p:nvPr/>
         </p:nvSpPr>
         <p:spPr>
           <a:xfrm>
-            <a:off x="960120" y="4960620"/>
+            <a:off x="502920" y="4914900"/>
             <a:ext cx="109728" cy="109728"/>
           </a:xfrm>
           <a:prstGeom prst="ellipse">
@@ -8014,13 +7829,13 @@
       </p:sp>
       <p:sp>
         <p:nvSpPr>
-          <p:cNvPr id="22" name="s2_matched_null-leg-0"/>
+          <p:cNvPr id="16" name="s2_matched_null-leg-0"/>
           <p:cNvSpPr txBox="1"/>
           <p:nvPr/>
         </p:nvSpPr>
         <p:spPr>
           <a:xfrm>
-            <a:off x="1115568" y="4919472"/>
+            <a:off x="658368" y="4873752"/>
             <a:ext cx="1057046" cy="201168"/>
           </a:xfrm>
           <a:prstGeom prst="rect">
@@ -8050,13 +7865,13 @@
       </p:sp>
       <p:sp>
         <p:nvSpPr>
-          <p:cNvPr id="23" name="s2_matched_null-dot-1"/>
+          <p:cNvPr id="17" name="s2_matched_null-dot-1"/>
           <p:cNvSpPr/>
           <p:nvPr/>
         </p:nvSpPr>
         <p:spPr>
           <a:xfrm>
-            <a:off x="2282342" y="4960620"/>
+            <a:off x="1825142" y="4914900"/>
             <a:ext cx="109728" cy="109728"/>
           </a:xfrm>
           <a:prstGeom prst="ellipse">
@@ -8075,13 +7890,13 @@
       </p:sp>
       <p:sp>
         <p:nvSpPr>
-          <p:cNvPr id="24" name="s2_matched_null-leg-1"/>
+          <p:cNvPr id="18" name="s2_matched_null-leg-1"/>
           <p:cNvSpPr txBox="1"/>
           <p:nvPr/>
         </p:nvSpPr>
         <p:spPr>
           <a:xfrm>
-            <a:off x="2437790" y="4919472"/>
+            <a:off x="1980590" y="4873752"/>
             <a:ext cx="596189" cy="201168"/>
           </a:xfrm>
           <a:prstGeom prst="rect">
@@ -8111,13 +7926,13 @@
       </p:sp>
       <p:sp>
         <p:nvSpPr>
-          <p:cNvPr id="25" name="s2_matched_null-dot-2"/>
+          <p:cNvPr id="19" name="s2_matched_null-dot-2"/>
           <p:cNvSpPr/>
           <p:nvPr/>
         </p:nvSpPr>
         <p:spPr>
           <a:xfrm>
-            <a:off x="3143707" y="4960620"/>
+            <a:off x="2686507" y="4914900"/>
             <a:ext cx="109728" cy="109728"/>
           </a:xfrm>
           <a:prstGeom prst="ellipse">
@@ -8136,13 +7951,13 @@
       </p:sp>
       <p:sp>
         <p:nvSpPr>
-          <p:cNvPr id="26" name="s2_matched_null-leg-2"/>
+          <p:cNvPr id="20" name="s2_matched_null-leg-2"/>
           <p:cNvSpPr txBox="1"/>
           <p:nvPr/>
         </p:nvSpPr>
         <p:spPr>
           <a:xfrm>
-            <a:off x="3299155" y="4919472"/>
+            <a:off x="2841955" y="4873752"/>
             <a:ext cx="727862" cy="201168"/>
           </a:xfrm>
           <a:prstGeom prst="rect">
@@ -8172,13 +7987,13 @@
       </p:sp>
       <p:sp>
         <p:nvSpPr>
-          <p:cNvPr id="27" name="s2_matched_null-dot-3"/>
+          <p:cNvPr id="21" name="s2_matched_null-dot-3"/>
           <p:cNvSpPr/>
           <p:nvPr/>
         </p:nvSpPr>
         <p:spPr>
           <a:xfrm>
-            <a:off x="4136746" y="4960620"/>
+            <a:off x="3679546" y="4914900"/>
             <a:ext cx="109728" cy="109728"/>
           </a:xfrm>
           <a:prstGeom prst="ellipse">
@@ -8197,13 +8012,13 @@
       </p:sp>
       <p:sp>
         <p:nvSpPr>
-          <p:cNvPr id="28" name="s2_matched_null-leg-3"/>
+          <p:cNvPr id="22" name="s2_matched_null-leg-3"/>
           <p:cNvSpPr txBox="1"/>
           <p:nvPr/>
         </p:nvSpPr>
         <p:spPr>
           <a:xfrm>
-            <a:off x="4292194" y="4919472"/>
+            <a:off x="3834994" y="4873752"/>
             <a:ext cx="925373" cy="201168"/>
           </a:xfrm>
           <a:prstGeom prst="rect">
@@ -8233,13 +8048,13 @@
       </p:sp>
       <p:sp>
         <p:nvSpPr>
-          <p:cNvPr id="29" name="s2_matched_null-dot-4"/>
+          <p:cNvPr id="23" name="s2_matched_null-dot-4"/>
           <p:cNvSpPr/>
           <p:nvPr/>
         </p:nvSpPr>
         <p:spPr>
           <a:xfrm>
-            <a:off x="5327294" y="4960620"/>
+            <a:off x="4870094" y="4914900"/>
             <a:ext cx="109728" cy="109728"/>
           </a:xfrm>
           <a:prstGeom prst="ellipse">
@@ -8258,13 +8073,13 @@
       </p:sp>
       <p:sp>
         <p:nvSpPr>
-          <p:cNvPr id="30" name="s2_matched_null-leg-4"/>
+          <p:cNvPr id="24" name="s2_matched_null-leg-4"/>
           <p:cNvSpPr txBox="1"/>
           <p:nvPr/>
         </p:nvSpPr>
         <p:spPr>
           <a:xfrm>
-            <a:off x="5482742" y="4919472"/>
+            <a:off x="5025542" y="4873752"/>
             <a:ext cx="1057046" cy="201168"/>
           </a:xfrm>
           <a:prstGeom prst="rect">
@@ -8294,13 +8109,13 @@
       </p:sp>
       <p:sp>
         <p:nvSpPr>
-          <p:cNvPr id="31" name="s2_matched_null-dot-5"/>
+          <p:cNvPr id="25" name="s2_matched_null-dot-5"/>
           <p:cNvSpPr/>
           <p:nvPr/>
         </p:nvSpPr>
         <p:spPr>
           <a:xfrm>
-            <a:off x="6649517" y="4960620"/>
+            <a:off x="6192317" y="4914900"/>
             <a:ext cx="109728" cy="109728"/>
           </a:xfrm>
           <a:prstGeom prst="ellipse">
@@ -8319,14 +8134,14 @@
       </p:sp>
       <p:sp>
         <p:nvSpPr>
-          <p:cNvPr id="32" name="s2_matched_null-leg-5"/>
+          <p:cNvPr id="26" name="s2_matched_null-leg-5"/>
           <p:cNvSpPr txBox="1"/>
           <p:nvPr/>
         </p:nvSpPr>
         <p:spPr>
           <a:xfrm>
-            <a:off x="6804965" y="4919472"/>
-            <a:ext cx="2373782" cy="201168"/>
+            <a:off x="6347765" y="4873752"/>
+            <a:ext cx="1781251" cy="201168"/>
           </a:xfrm>
           <a:prstGeom prst="rect">
             <a:avLst/>
@@ -8347,7 +8162,7 @@
                   <a:srgbClr val="111111"/>
                 </a:solidFill>
               </a:rPr>
-              <a:t>Stable (all, or matched controls)</a:t>
+              <a:t>Stable (all 2,907 sites)</a:t>
             </a:r>
             <a:endParaRPr lang="en-US" sz="1050" dirty="0"/>
           </a:p>
@@ -8355,14 +8170,14 @@
       </p:sp>
       <p:sp>
         <p:nvSpPr>
-          <p:cNvPr id="33" name="s2_matched_null-key"/>
+          <p:cNvPr id="27" name="s2_matched_null-key"/>
           <p:cNvSpPr txBox="1"/>
           <p:nvPr/>
         </p:nvSpPr>
         <p:spPr>
           <a:xfrm>
-            <a:off x="960120" y="5193792"/>
-            <a:ext cx="10698480" cy="502920"/>
+            <a:off x="502920" y="5148072"/>
+            <a:ext cx="11155680" cy="502920"/>
           </a:xfrm>
           <a:prstGeom prst="rect">
             <a:avLst/>
@@ -8383,7 +8198,7 @@
                   <a:srgbClr val="595959"/>
                 </a:solidFill>
               </a:rPr>
-              <a:t>grey line and band (top row): all Stable sites, median with 95% bootstrap CI.   grey dots (bottom row): that class's own matched Stable controls.   Stars test the class against that reference — Mann–Whitney on all sites, paired Wilcoxon on matched pairs — BH across all 40 tests.   *** p&lt;0.001   ** p&lt;0.01   * p&lt;0.05   ns ≥ 0.05</a:t>
+              <a:t>grey line and band: all 2,907 Stable sites, median with a 95% bootstrap CI.   Each class is every site carrying that call, tested against that reference by Mann–Whitney, BH across all 20 tests on this figure.   *** p&lt;0.001   ** p&lt;0.01   * p&lt;0.05   ns ≥ 0.05</a:t>
             </a:r>
             <a:endParaRPr lang="en-US" sz="900" dirty="0"/>
           </a:p>
@@ -8391,7 +8206,7 @@
       </p:sp>
       <p:sp>
         <p:nvSpPr>
-          <p:cNvPr id="34" name="Text 0"/>
+          <p:cNvPr id="28" name="Text 0"/>
           <p:cNvSpPr/>
           <p:nvPr>
             <p:ph idx="101" type="body" hasCustomPrompt="1"/>
@@ -8432,7 +8247,7 @@
                   <a:srgbClr val="111111"/>
                 </a:solidFill>
               </a:rPr>
-              <a:t>every class behaves the same way: the motif and the whole peak close up under matching, the 170 bp element does not — except Age Down, which closes up everywhere</a:t>
+              <a:t>every class loses less than Stable sites do at every scale, and the 300 bp control shows it is not a global offset</a:t>
             </a:r>
             <a:endParaRPr lang="en-US" sz="1500" dirty="0"/>
           </a:p>
@@ -8570,45 +8385,9 @@
           </a:prstGeom>
         </p:spPr>
       </p:pic>
-      <p:sp>
-        <p:nvSpPr>
-          <p:cNvPr id="4" name="pa-t1"/>
-          <p:cNvSpPr txBox="1"/>
-          <p:nvPr/>
-        </p:nvSpPr>
-        <p:spPr>
-          <a:xfrm>
-            <a:off x="731520" y="2057400"/>
-            <a:ext cx="4937760" cy="274320"/>
-          </a:xfrm>
-          <a:prstGeom prst="rect">
-            <a:avLst/>
-          </a:prstGeom>
-          <a:noFill/>
-          <a:ln/>
-        </p:spPr>
-        <p:txBody>
-          <a:bodyPr wrap="square" lIns="0" tIns="0" rIns="0" bIns="0" rtlCol="0" anchor="ctr"/>
-          <a:lstStyle/>
-          <a:p>
-            <a:pPr indent="0" marL="0">
-              <a:buNone/>
-            </a:pPr>
-            <a:r>
-              <a:rPr lang="en-US" sz="1300" b="1" dirty="0">
-                <a:solidFill>
-                  <a:srgbClr val="111111"/>
-                </a:solidFill>
-              </a:rPr>
-              <a:t>All sites, nothing controlled</a:t>
-            </a:r>
-            <a:endParaRPr lang="en-US" sz="1300" dirty="0"/>
-          </a:p>
-        </p:txBody>
-      </p:sp>
       <p:pic>
         <p:nvPicPr>
-          <p:cNvPr id="5" name="Image 1" descr="/Users/z5162865/WongLab/AlphaGenome_Ap1/Analysis/slide_figures/panels/s8_partners_all.png">    </p:cNvPr>
+          <p:cNvPr id="4" name="Image 1" descr="/Users/z5162865/WongLab/AlphaGenome_Ap1/Analysis/slide_figures/panels/s8_partners_all.png">    </p:cNvPr>
           <p:cNvPicPr>
             <a:picLocks noChangeAspect="1"/>
           </p:cNvPicPr>
@@ -8622,8 +8401,8 @@
         </p:blipFill>
         <p:spPr>
           <a:xfrm>
-            <a:off x="1295400" y="2377440"/>
-            <a:ext cx="3810000" cy="2743200"/>
+            <a:off x="3953510" y="2103120"/>
+            <a:ext cx="4254500" cy="3063240"/>
           </a:xfrm>
           <a:prstGeom prst="rect">
             <a:avLst/>
@@ -8632,73 +8411,13 @@
       </p:pic>
       <p:sp>
         <p:nvSpPr>
-          <p:cNvPr id="6" name="pa-t2"/>
-          <p:cNvSpPr txBox="1"/>
-          <p:nvPr/>
-        </p:nvSpPr>
-        <p:spPr>
-          <a:xfrm>
-            <a:off x="6309360" y="2057400"/>
-            <a:ext cx="5120640" cy="274320"/>
-          </a:xfrm>
-          <a:prstGeom prst="rect">
-            <a:avLst/>
-          </a:prstGeom>
-          <a:noFill/>
-          <a:ln/>
-        </p:spPr>
-        <p:txBody>
-          <a:bodyPr wrap="square" lIns="0" tIns="0" rIns="0" bIns="0" rtlCol="0" anchor="ctr"/>
-          <a:lstStyle/>
-          <a:p>
-            <a:pPr indent="0" marL="0">
-              <a:buNone/>
-            </a:pPr>
-            <a:r>
-              <a:rPr lang="en-US" sz="1300" b="1" dirty="0">
-                <a:solidFill>
-                  <a:srgbClr val="111111"/>
-                </a:solidFill>
-              </a:rPr>
-              <a:t>Each class against its own matched Stable controls</a:t>
-            </a:r>
-            <a:endParaRPr lang="en-US" sz="1300" dirty="0"/>
-          </a:p>
-        </p:txBody>
-      </p:sp>
-      <p:pic>
-        <p:nvPicPr>
-          <p:cNvPr id="7" name="Image 2" descr="/Users/z5162865/WongLab/AlphaGenome_Ap1/Analysis/slide_figures/panels/s8_partners_matched.png">    </p:cNvPr>
-          <p:cNvPicPr>
-            <a:picLocks noChangeAspect="1"/>
-          </p:cNvPicPr>
-          <p:nvPr/>
-        </p:nvPicPr>
-        <p:blipFill>
-          <a:blip r:embed="rId3"/>
-          <a:stretch>
-            <a:fillRect/>
-          </a:stretch>
-        </p:blipFill>
-        <p:spPr>
-          <a:xfrm>
-            <a:off x="6964680" y="2377440"/>
-            <a:ext cx="3810000" cy="2743200"/>
-          </a:xfrm>
-          <a:prstGeom prst="rect">
-            <a:avLst/>
-          </a:prstGeom>
-        </p:spPr>
-      </p:pic>
-      <p:sp>
-        <p:nvSpPr>
-          <p:cNvPr id="8" name="lg-dot-5.68-0"/>
+          <p:cNvPr id="5" name="lg-dot-5.72-0"/>
           <p:cNvSpPr/>
           <p:nvPr/>
         </p:nvSpPr>
         <p:spPr>
           <a:xfrm>
-            <a:off x="731520" y="5234940"/>
+            <a:off x="1280160" y="5271516"/>
             <a:ext cx="109728" cy="109728"/>
           </a:xfrm>
           <a:prstGeom prst="ellipse">
@@ -8717,13 +8436,13 @@
       </p:sp>
       <p:sp>
         <p:nvSpPr>
-          <p:cNvPr id="9" name="lg-txt-5.68-0"/>
+          <p:cNvPr id="6" name="lg-txt-5.72-0"/>
           <p:cNvSpPr txBox="1"/>
           <p:nvPr/>
         </p:nvSpPr>
         <p:spPr>
           <a:xfrm>
-            <a:off x="886968" y="5193792"/>
+            <a:off x="1435608" y="5230368"/>
             <a:ext cx="596189" cy="201168"/>
           </a:xfrm>
           <a:prstGeom prst="rect">
@@ -8753,13 +8472,13 @@
       </p:sp>
       <p:sp>
         <p:nvSpPr>
-          <p:cNvPr id="10" name="lg-dot-5.68-1"/>
+          <p:cNvPr id="7" name="lg-dot-5.72-1"/>
           <p:cNvSpPr/>
           <p:nvPr/>
         </p:nvSpPr>
         <p:spPr>
           <a:xfrm>
-            <a:off x="1592885" y="5234940"/>
+            <a:off x="2141525" y="5271516"/>
             <a:ext cx="109728" cy="109728"/>
           </a:xfrm>
           <a:prstGeom prst="ellipse">
@@ -8778,13 +8497,13 @@
       </p:sp>
       <p:sp>
         <p:nvSpPr>
-          <p:cNvPr id="11" name="lg-txt-5.68-1"/>
+          <p:cNvPr id="8" name="lg-txt-5.72-1"/>
           <p:cNvSpPr txBox="1"/>
           <p:nvPr/>
         </p:nvSpPr>
         <p:spPr>
           <a:xfrm>
-            <a:off x="1748333" y="5193792"/>
+            <a:off x="2296973" y="5230368"/>
             <a:ext cx="596189" cy="201168"/>
           </a:xfrm>
           <a:prstGeom prst="rect">
@@ -8814,13 +8533,13 @@
       </p:sp>
       <p:sp>
         <p:nvSpPr>
-          <p:cNvPr id="12" name="lg-dot-5.68-2"/>
+          <p:cNvPr id="9" name="lg-dot-5.72-2"/>
           <p:cNvSpPr/>
           <p:nvPr/>
         </p:nvSpPr>
         <p:spPr>
           <a:xfrm>
-            <a:off x="2454250" y="5234940"/>
+            <a:off x="3002890" y="5271516"/>
             <a:ext cx="109728" cy="109728"/>
           </a:xfrm>
           <a:prstGeom prst="ellipse">
@@ -8839,13 +8558,13 @@
       </p:sp>
       <p:sp>
         <p:nvSpPr>
-          <p:cNvPr id="13" name="lg-txt-5.68-2"/>
+          <p:cNvPr id="10" name="lg-txt-5.72-2"/>
           <p:cNvSpPr txBox="1"/>
           <p:nvPr/>
         </p:nvSpPr>
         <p:spPr>
           <a:xfrm>
-            <a:off x="2609698" y="5193792"/>
+            <a:off x="3158338" y="5230368"/>
             <a:ext cx="727862" cy="201168"/>
           </a:xfrm>
           <a:prstGeom prst="rect">
@@ -8875,13 +8594,13 @@
       </p:sp>
       <p:sp>
         <p:nvSpPr>
-          <p:cNvPr id="14" name="lg-dot-5.68-3"/>
+          <p:cNvPr id="11" name="lg-dot-5.72-3"/>
           <p:cNvSpPr/>
           <p:nvPr/>
         </p:nvSpPr>
         <p:spPr>
           <a:xfrm>
-            <a:off x="3447288" y="5234940"/>
+            <a:off x="3995928" y="5271516"/>
             <a:ext cx="109728" cy="109728"/>
           </a:xfrm>
           <a:prstGeom prst="ellipse">
@@ -8900,13 +8619,13 @@
       </p:sp>
       <p:sp>
         <p:nvSpPr>
-          <p:cNvPr id="15" name="lg-txt-5.68-3"/>
+          <p:cNvPr id="12" name="lg-txt-5.72-3"/>
           <p:cNvSpPr txBox="1"/>
           <p:nvPr/>
         </p:nvSpPr>
         <p:spPr>
           <a:xfrm>
-            <a:off x="3602736" y="5193792"/>
+            <a:off x="4151376" y="5230368"/>
             <a:ext cx="925373" cy="201168"/>
           </a:xfrm>
           <a:prstGeom prst="rect">
@@ -8936,13 +8655,13 @@
       </p:sp>
       <p:sp>
         <p:nvSpPr>
-          <p:cNvPr id="16" name="lg-dot-5.68-4"/>
+          <p:cNvPr id="13" name="lg-dot-5.72-4"/>
           <p:cNvSpPr/>
           <p:nvPr/>
         </p:nvSpPr>
         <p:spPr>
           <a:xfrm>
-            <a:off x="4637837" y="5234940"/>
+            <a:off x="5186477" y="5271516"/>
             <a:ext cx="109728" cy="109728"/>
           </a:xfrm>
           <a:prstGeom prst="ellipse">
@@ -8961,13 +8680,13 @@
       </p:sp>
       <p:sp>
         <p:nvSpPr>
-          <p:cNvPr id="17" name="lg-txt-5.68-4"/>
+          <p:cNvPr id="14" name="lg-txt-5.72-4"/>
           <p:cNvSpPr txBox="1"/>
           <p:nvPr/>
         </p:nvSpPr>
         <p:spPr>
           <a:xfrm>
-            <a:off x="4793285" y="5193792"/>
+            <a:off x="5341925" y="5230368"/>
             <a:ext cx="1057046" cy="201168"/>
           </a:xfrm>
           <a:prstGeom prst="rect">
@@ -8997,14 +8716,14 @@
       </p:sp>
       <p:sp>
         <p:nvSpPr>
-          <p:cNvPr id="18" name="pa-key"/>
+          <p:cNvPr id="15" name="pa-key"/>
           <p:cNvSpPr txBox="1"/>
           <p:nvPr/>
         </p:nvSpPr>
         <p:spPr>
           <a:xfrm>
-            <a:off x="731520" y="5468112"/>
-            <a:ext cx="10698480" cy="274320"/>
+            <a:off x="1280160" y="5504688"/>
+            <a:ext cx="10149840" cy="274320"/>
           </a:xfrm>
           <a:prstGeom prst="rect">
             <a:avLst/>
@@ -9025,7 +8744,7 @@
                   <a:srgbClr val="595959"/>
                 </a:solidFill>
               </a:rPr>
-              <a:t>six families shown, tests run over all 40 class-by-family comparisons; smallest FDR 0.04, and only before matching</a:t>
+              <a:t>six families shown; tests run over all 20 class-by-family comparisons, smallest FDR 0.02</a:t>
             </a:r>
             <a:endParaRPr lang="en-US" sz="950" dirty="0"/>
           </a:p>
@@ -9033,7 +8752,7 @@
       </p:sp>
       <p:sp>
         <p:nvSpPr>
-          <p:cNvPr id="19" name="Text 0"/>
+          <p:cNvPr id="16" name="Text 0"/>
           <p:cNvSpPr/>
           <p:nvPr>
             <p:ph idx="101" type="body" hasCustomPrompt="1"/>
@@ -9703,8 +9422,8 @@
         </p:nvSpPr>
         <p:spPr>
           <a:xfrm>
-            <a:off x="2670048" y="1005840"/>
-            <a:ext cx="3895344" cy="438912"/>
+            <a:off x="2487168" y="1143000"/>
+            <a:ext cx="3666744" cy="438912"/>
           </a:xfrm>
           <a:prstGeom prst="rect">
             <a:avLst/>
@@ -9739,8 +9458,8 @@
         </p:nvSpPr>
         <p:spPr>
           <a:xfrm>
-            <a:off x="2670048" y="1435608"/>
-            <a:ext cx="3895344" cy="310896"/>
+            <a:off x="2487168" y="1572768"/>
+            <a:ext cx="3666744" cy="310896"/>
           </a:xfrm>
           <a:prstGeom prst="rect">
             <a:avLst/>
@@ -9783,17 +9502,89 @@
         </p:blipFill>
         <p:spPr>
           <a:xfrm>
-            <a:off x="3465965" y="1755648"/>
-            <a:ext cx="2303510" cy="1463040"/>
+            <a:off x="2771546" y="1892808"/>
+            <a:ext cx="3097987" cy="2816352"/>
           </a:xfrm>
           <a:prstGeom prst="rect">
             <a:avLst/>
           </a:prstGeom>
         </p:spPr>
       </p:pic>
+      <p:sp>
+        <p:nvSpPr>
+          <p:cNvPr id="6" name="s9_mef2_by_class-title-1"/>
+          <p:cNvSpPr txBox="1"/>
+          <p:nvPr/>
+        </p:nvSpPr>
+        <p:spPr>
+          <a:xfrm>
+            <a:off x="6227064" y="1143000"/>
+            <a:ext cx="3666744" cy="438912"/>
+          </a:xfrm>
+          <a:prstGeom prst="rect">
+            <a:avLst/>
+          </a:prstGeom>
+          <a:noFill/>
+          <a:ln/>
+        </p:spPr>
+        <p:txBody>
+          <a:bodyPr wrap="square" lIns="0" tIns="0" rIns="0" bIns="0" rtlCol="0" anchor="t"/>
+          <a:lstStyle/>
+          <a:p>
+            <a:pPr indent="0" marL="0">
+              <a:buNone/>
+            </a:pPr>
+            <a:r>
+              <a:rPr lang="en-US" sz="1250" b="1" dirty="0">
+                <a:solidFill>
+                  <a:srgbClr val="111111"/>
+                </a:solidFill>
+              </a:rPr>
+              <a:t>...one the model actually leans on</a:t>
+            </a:r>
+            <a:endParaRPr lang="en-US" sz="1250" dirty="0"/>
+          </a:p>
+        </p:txBody>
+      </p:sp>
+      <p:sp>
+        <p:nvSpPr>
+          <p:cNvPr id="7" name="s9_mef2_by_class-sub-1"/>
+          <p:cNvSpPr txBox="1"/>
+          <p:nvPr/>
+        </p:nvSpPr>
+        <p:spPr>
+          <a:xfrm>
+            <a:off x="6227064" y="1572768"/>
+            <a:ext cx="3666744" cy="310896"/>
+          </a:xfrm>
+          <a:prstGeom prst="rect">
+            <a:avLst/>
+          </a:prstGeom>
+          <a:noFill/>
+          <a:ln/>
+        </p:spPr>
+        <p:txBody>
+          <a:bodyPr wrap="square" lIns="0" tIns="0" rIns="0" bIns="0" rtlCol="0" anchor="t"/>
+          <a:lstStyle/>
+          <a:p>
+            <a:pPr indent="0" marL="0">
+              <a:buNone/>
+            </a:pPr>
+            <a:r>
+              <a:rPr lang="en-US" sz="950" dirty="0">
+                <a:solidFill>
+                  <a:srgbClr val="595959"/>
+                </a:solidFill>
+              </a:rPr>
+              <a:t>restricted to tiles worth more than 0.2 log2</a:t>
+            </a:r>
+            <a:endParaRPr lang="en-US" sz="950" dirty="0"/>
+          </a:p>
+        </p:txBody>
+      </p:sp>
       <p:pic>
         <p:nvPicPr>
-          <p:cNvPr id="6" name="Image 1" descr="/Users/z5162865/WongLab/AlphaGenome_Ap1/Analysis/slide_figures/panels/s9_mef2_by_class_c0_r1.png">    </p:cNvPr>
+          <p:cNvPr id="8" name="Image 1" descr="/Users/z5162865/WongLab/AlphaGenome_Ap1/Analysis/slide_figures/panels/s9_mef2_by_class_c1_r0.png">    </p:cNvPr>
           <p:cNvPicPr>
             <a:picLocks noChangeAspect="1"/>
           </p:cNvPicPr>
@@ -9807,8 +9598,8 @@
         </p:blipFill>
         <p:spPr>
           <a:xfrm>
-            <a:off x="3465965" y="3291840"/>
-            <a:ext cx="2303510" cy="1463040"/>
+            <a:off x="6511442" y="1892808"/>
+            <a:ext cx="3097987" cy="2816352"/>
           </a:xfrm>
           <a:prstGeom prst="rect">
             <a:avLst/>
@@ -9817,205 +9608,13 @@
       </p:pic>
       <p:sp>
         <p:nvSpPr>
-          <p:cNvPr id="7" name="s9_mef2_by_class-title-1"/>
-          <p:cNvSpPr txBox="1"/>
-          <p:nvPr/>
-        </p:nvSpPr>
-        <p:spPr>
-          <a:xfrm>
-            <a:off x="6638544" y="1005840"/>
-            <a:ext cx="3895344" cy="438912"/>
-          </a:xfrm>
-          <a:prstGeom prst="rect">
-            <a:avLst/>
-          </a:prstGeom>
-          <a:noFill/>
-          <a:ln/>
-        </p:spPr>
-        <p:txBody>
-          <a:bodyPr wrap="square" lIns="0" tIns="0" rIns="0" bIns="0" rtlCol="0" anchor="t"/>
-          <a:lstStyle/>
-          <a:p>
-            <a:pPr indent="0" marL="0">
-              <a:buNone/>
-            </a:pPr>
-            <a:r>
-              <a:rPr lang="en-US" sz="1250" b="1" dirty="0">
-                <a:solidFill>
-                  <a:srgbClr val="111111"/>
-                </a:solidFill>
-              </a:rPr>
-              <a:t>...one the model actually leans on</a:t>
-            </a:r>
-            <a:endParaRPr lang="en-US" sz="1250" dirty="0"/>
-          </a:p>
-        </p:txBody>
-      </p:sp>
-      <p:sp>
-        <p:nvSpPr>
-          <p:cNvPr id="8" name="s9_mef2_by_class-sub-1"/>
-          <p:cNvSpPr txBox="1"/>
-          <p:nvPr/>
-        </p:nvSpPr>
-        <p:spPr>
-          <a:xfrm>
-            <a:off x="6638544" y="1435608"/>
-            <a:ext cx="3895344" cy="310896"/>
-          </a:xfrm>
-          <a:prstGeom prst="rect">
-            <a:avLst/>
-          </a:prstGeom>
-          <a:noFill/>
-          <a:ln/>
-        </p:spPr>
-        <p:txBody>
-          <a:bodyPr wrap="square" lIns="0" tIns="0" rIns="0" bIns="0" rtlCol="0" anchor="t"/>
-          <a:lstStyle/>
-          <a:p>
-            <a:pPr indent="0" marL="0">
-              <a:buNone/>
-            </a:pPr>
-            <a:r>
-              <a:rPr lang="en-US" sz="950" dirty="0">
-                <a:solidFill>
-                  <a:srgbClr val="595959"/>
-                </a:solidFill>
-              </a:rPr>
-              <a:t>restricted to tiles worth more than 0.2 log2</a:t>
-            </a:r>
-            <a:endParaRPr lang="en-US" sz="950" dirty="0"/>
-          </a:p>
-        </p:txBody>
-      </p:sp>
-      <p:pic>
-        <p:nvPicPr>
-          <p:cNvPr id="9" name="Image 2" descr="/Users/z5162865/WongLab/AlphaGenome_Ap1/Analysis/slide_figures/panels/s9_mef2_by_class_c1_r0.png">    </p:cNvPr>
-          <p:cNvPicPr>
-            <a:picLocks noChangeAspect="1"/>
-          </p:cNvPicPr>
-          <p:nvPr/>
-        </p:nvPicPr>
-        <p:blipFill>
-          <a:blip r:embed="rId3"/>
-          <a:stretch>
-            <a:fillRect/>
-          </a:stretch>
-        </p:blipFill>
-        <p:spPr>
-          <a:xfrm>
-            <a:off x="7434461" y="1755648"/>
-            <a:ext cx="2303510" cy="1463040"/>
-          </a:xfrm>
-          <a:prstGeom prst="rect">
-            <a:avLst/>
-          </a:prstGeom>
-        </p:spPr>
-      </p:pic>
-      <p:pic>
-        <p:nvPicPr>
-          <p:cNvPr id="10" name="Image 3" descr="/Users/z5162865/WongLab/AlphaGenome_Ap1/Analysis/slide_figures/panels/s9_mef2_by_class_c1_r1.png">    </p:cNvPr>
-          <p:cNvPicPr>
-            <a:picLocks noChangeAspect="1"/>
-          </p:cNvPicPr>
-          <p:nvPr/>
-        </p:nvPicPr>
-        <p:blipFill>
-          <a:blip r:embed="rId4"/>
-          <a:stretch>
-            <a:fillRect/>
-          </a:stretch>
-        </p:blipFill>
-        <p:spPr>
-          <a:xfrm>
-            <a:off x="7434461" y="3291840"/>
-            <a:ext cx="2303510" cy="1463040"/>
-          </a:xfrm>
-          <a:prstGeom prst="rect">
-            <a:avLst/>
-          </a:prstGeom>
-        </p:spPr>
-      </p:pic>
-      <p:sp>
-        <p:nvSpPr>
-          <p:cNvPr id="11" name="s9_mef2_by_class-row-0"/>
-          <p:cNvSpPr txBox="1"/>
-          <p:nvPr/>
-        </p:nvSpPr>
-        <p:spPr>
-          <a:xfrm rot="16200000">
-            <a:off x="1536192" y="1837944"/>
-            <a:ext cx="1371600" cy="1371600"/>
-          </a:xfrm>
-          <a:prstGeom prst="rect">
-            <a:avLst/>
-          </a:prstGeom>
-          <a:noFill/>
-          <a:ln/>
-        </p:spPr>
-        <p:txBody>
-          <a:bodyPr wrap="square" lIns="0" tIns="0" rIns="0" bIns="0" rtlCol="0" anchor="ctr"/>
-          <a:lstStyle/>
-          <a:p>
-            <a:pPr algn="ctr" indent="0" marL="0">
-              <a:buNone/>
-            </a:pPr>
-            <a:r>
-              <a:rPr lang="en-US" sz="1000" dirty="0">
-                <a:solidFill>
-                  <a:srgbClr val="111111"/>
-                </a:solidFill>
-              </a:rPr>
-              <a:t>all sites, nothing controlled</a:t>
-            </a:r>
-            <a:endParaRPr lang="en-US" sz="1000" dirty="0"/>
-          </a:p>
-        </p:txBody>
-      </p:sp>
-      <p:sp>
-        <p:nvSpPr>
-          <p:cNvPr id="12" name="s9_mef2_by_class-row-1"/>
-          <p:cNvSpPr txBox="1"/>
-          <p:nvPr/>
-        </p:nvSpPr>
-        <p:spPr>
-          <a:xfrm rot="16200000">
-            <a:off x="1536192" y="3374136"/>
-            <a:ext cx="1371600" cy="1371600"/>
-          </a:xfrm>
-          <a:prstGeom prst="rect">
-            <a:avLst/>
-          </a:prstGeom>
-          <a:noFill/>
-          <a:ln/>
-        </p:spPr>
-        <p:txBody>
-          <a:bodyPr wrap="square" lIns="0" tIns="0" rIns="0" bIns="0" rtlCol="0" anchor="ctr"/>
-          <a:lstStyle/>
-          <a:p>
-            <a:pPr algn="ctr" indent="0" marL="0">
-              <a:buNone/>
-            </a:pPr>
-            <a:r>
-              <a:rPr lang="en-US" sz="1000" dirty="0">
-                <a:solidFill>
-                  <a:srgbClr val="111111"/>
-                </a:solidFill>
-              </a:rPr>
-              <a:t>each class against its own matched Stable controls</a:t>
-            </a:r>
-            <a:endParaRPr lang="en-US" sz="1000" dirty="0"/>
-          </a:p>
-        </p:txBody>
-      </p:sp>
-      <p:sp>
-        <p:nvSpPr>
-          <p:cNvPr id="13" name="s9_mef2_by_class-dot-0"/>
+          <p:cNvPr id="9" name="s9_mef2_by_class-dot-0"/>
           <p:cNvSpPr/>
           <p:nvPr/>
         </p:nvSpPr>
         <p:spPr>
           <a:xfrm>
-            <a:off x="2011680" y="4960620"/>
+            <a:off x="2377440" y="4914900"/>
             <a:ext cx="109728" cy="109728"/>
           </a:xfrm>
           <a:prstGeom prst="ellipse">
@@ -10034,13 +9633,13 @@
       </p:sp>
       <p:sp>
         <p:nvSpPr>
-          <p:cNvPr id="14" name="s9_mef2_by_class-leg-0"/>
+          <p:cNvPr id="10" name="s9_mef2_by_class-leg-0"/>
           <p:cNvSpPr txBox="1"/>
           <p:nvPr/>
         </p:nvSpPr>
         <p:spPr>
           <a:xfrm>
-            <a:off x="2167128" y="4919472"/>
+            <a:off x="2532888" y="4873752"/>
             <a:ext cx="1057046" cy="201168"/>
           </a:xfrm>
           <a:prstGeom prst="rect">
@@ -10070,13 +9669,13 @@
       </p:sp>
       <p:sp>
         <p:nvSpPr>
-          <p:cNvPr id="15" name="s9_mef2_by_class-dot-1"/>
+          <p:cNvPr id="11" name="s9_mef2_by_class-dot-1"/>
           <p:cNvSpPr/>
           <p:nvPr/>
         </p:nvSpPr>
         <p:spPr>
           <a:xfrm>
-            <a:off x="3333902" y="4960620"/>
+            <a:off x="3699662" y="4914900"/>
             <a:ext cx="109728" cy="109728"/>
           </a:xfrm>
           <a:prstGeom prst="ellipse">
@@ -10095,13 +9694,13 @@
       </p:sp>
       <p:sp>
         <p:nvSpPr>
-          <p:cNvPr id="16" name="s9_mef2_by_class-leg-1"/>
+          <p:cNvPr id="12" name="s9_mef2_by_class-leg-1"/>
           <p:cNvSpPr txBox="1"/>
           <p:nvPr/>
         </p:nvSpPr>
         <p:spPr>
           <a:xfrm>
-            <a:off x="3489350" y="4919472"/>
+            <a:off x="3855110" y="4873752"/>
             <a:ext cx="596189" cy="201168"/>
           </a:xfrm>
           <a:prstGeom prst="rect">
@@ -10131,13 +9730,13 @@
       </p:sp>
       <p:sp>
         <p:nvSpPr>
-          <p:cNvPr id="17" name="s9_mef2_by_class-dot-2"/>
+          <p:cNvPr id="13" name="s9_mef2_by_class-dot-2"/>
           <p:cNvSpPr/>
           <p:nvPr/>
         </p:nvSpPr>
         <p:spPr>
           <a:xfrm>
-            <a:off x="4195267" y="4960620"/>
+            <a:off x="4561027" y="4914900"/>
             <a:ext cx="109728" cy="109728"/>
           </a:xfrm>
           <a:prstGeom prst="ellipse">
@@ -10156,13 +9755,13 @@
       </p:sp>
       <p:sp>
         <p:nvSpPr>
-          <p:cNvPr id="18" name="s9_mef2_by_class-leg-2"/>
+          <p:cNvPr id="14" name="s9_mef2_by_class-leg-2"/>
           <p:cNvSpPr txBox="1"/>
           <p:nvPr/>
         </p:nvSpPr>
         <p:spPr>
           <a:xfrm>
-            <a:off x="4350715" y="4919472"/>
+            <a:off x="4716475" y="4873752"/>
             <a:ext cx="727862" cy="201168"/>
           </a:xfrm>
           <a:prstGeom prst="rect">
@@ -10192,13 +9791,13 @@
       </p:sp>
       <p:sp>
         <p:nvSpPr>
-          <p:cNvPr id="19" name="s9_mef2_by_class-dot-3"/>
+          <p:cNvPr id="15" name="s9_mef2_by_class-dot-3"/>
           <p:cNvSpPr/>
           <p:nvPr/>
         </p:nvSpPr>
         <p:spPr>
           <a:xfrm>
-            <a:off x="5188306" y="4960620"/>
+            <a:off x="5554066" y="4914900"/>
             <a:ext cx="109728" cy="109728"/>
           </a:xfrm>
           <a:prstGeom prst="ellipse">
@@ -10217,13 +9816,13 @@
       </p:sp>
       <p:sp>
         <p:nvSpPr>
-          <p:cNvPr id="20" name="s9_mef2_by_class-leg-3"/>
+          <p:cNvPr id="16" name="s9_mef2_by_class-leg-3"/>
           <p:cNvSpPr txBox="1"/>
           <p:nvPr/>
         </p:nvSpPr>
         <p:spPr>
           <a:xfrm>
-            <a:off x="5343754" y="4919472"/>
+            <a:off x="5709514" y="4873752"/>
             <a:ext cx="925373" cy="201168"/>
           </a:xfrm>
           <a:prstGeom prst="rect">
@@ -10253,13 +9852,13 @@
       </p:sp>
       <p:sp>
         <p:nvSpPr>
-          <p:cNvPr id="21" name="s9_mef2_by_class-dot-4"/>
+          <p:cNvPr id="17" name="s9_mef2_by_class-dot-4"/>
           <p:cNvSpPr/>
           <p:nvPr/>
         </p:nvSpPr>
         <p:spPr>
           <a:xfrm>
-            <a:off x="6378854" y="4960620"/>
+            <a:off x="6744614" y="4914900"/>
             <a:ext cx="109728" cy="109728"/>
           </a:xfrm>
           <a:prstGeom prst="ellipse">
@@ -10278,13 +9877,13 @@
       </p:sp>
       <p:sp>
         <p:nvSpPr>
-          <p:cNvPr id="22" name="s9_mef2_by_class-leg-4"/>
+          <p:cNvPr id="18" name="s9_mef2_by_class-leg-4"/>
           <p:cNvSpPr txBox="1"/>
           <p:nvPr/>
         </p:nvSpPr>
         <p:spPr>
           <a:xfrm>
-            <a:off x="6534302" y="4919472"/>
+            <a:off x="6900062" y="4873752"/>
             <a:ext cx="1057046" cy="201168"/>
           </a:xfrm>
           <a:prstGeom prst="rect">
@@ -10314,13 +9913,13 @@
       </p:sp>
       <p:sp>
         <p:nvSpPr>
-          <p:cNvPr id="23" name="s9_mef2_by_class-dot-5"/>
+          <p:cNvPr id="19" name="s9_mef2_by_class-dot-5"/>
           <p:cNvSpPr/>
           <p:nvPr/>
         </p:nvSpPr>
         <p:spPr>
           <a:xfrm>
-            <a:off x="7701077" y="4960620"/>
+            <a:off x="8066837" y="4914900"/>
             <a:ext cx="109728" cy="109728"/>
           </a:xfrm>
           <a:prstGeom prst="ellipse">
@@ -10339,14 +9938,14 @@
       </p:sp>
       <p:sp>
         <p:nvSpPr>
-          <p:cNvPr id="24" name="s9_mef2_by_class-leg-5"/>
+          <p:cNvPr id="20" name="s9_mef2_by_class-leg-5"/>
           <p:cNvSpPr txBox="1"/>
           <p:nvPr/>
         </p:nvSpPr>
         <p:spPr>
           <a:xfrm>
-            <a:off x="7856525" y="4919472"/>
-            <a:ext cx="2373782" cy="201168"/>
+            <a:off x="8222285" y="4873752"/>
+            <a:ext cx="1781251" cy="201168"/>
           </a:xfrm>
           <a:prstGeom prst="rect">
             <a:avLst/>
@@ -10367,7 +9966,7 @@
                   <a:srgbClr val="111111"/>
                 </a:solidFill>
               </a:rPr>
-              <a:t>Stable (all, or matched controls)</a:t>
+              <a:t>Stable (all 2,907 sites)</a:t>
             </a:r>
             <a:endParaRPr lang="en-US" sz="1050" dirty="0"/>
           </a:p>
@@ -10375,14 +9974,14 @@
       </p:sp>
       <p:sp>
         <p:nvSpPr>
-          <p:cNvPr id="25" name="s9_mef2_by_class-key"/>
+          <p:cNvPr id="21" name="s9_mef2_by_class-key"/>
           <p:cNvSpPr txBox="1"/>
           <p:nvPr/>
         </p:nvSpPr>
         <p:spPr>
           <a:xfrm>
-            <a:off x="2011680" y="5193792"/>
-            <a:ext cx="8595360" cy="502920"/>
+            <a:off x="2377440" y="5148072"/>
+            <a:ext cx="7589520" cy="502920"/>
           </a:xfrm>
           <a:prstGeom prst="rect">
             <a:avLst/>
@@ -10403,7 +10002,7 @@
                   <a:srgbClr val="595959"/>
                 </a:solidFill>
               </a:rPr>
-              <a:t>grey line and band (top row): all Stable sites with a 95% bootstrap CI.   grey dots (bottom row): that class's own matched controls.   Fisher on all sites, exact McNemar on matched pairs, BH across all 20 tests.   *** p&lt;0.001   ** p&lt;0.01   * p&lt;0.05   ns ≥ 0.05</a:t>
+              <a:t>grey line and band: all 2,907 Stable sites with a 95% bootstrap CI.   Fisher's exact test against that reference, BH across all 10 tests on this figure.   *** p&lt;0.001   ** p&lt;0.01   * p&lt;0.05   ns ≥ 0.05</a:t>
             </a:r>
             <a:endParaRPr lang="en-US" sz="900" dirty="0"/>
           </a:p>
@@ -10411,7 +10010,7 @@
       </p:sp>
       <p:sp>
         <p:nvSpPr>
-          <p:cNvPr id="26" name="Text 0"/>
+          <p:cNvPr id="22" name="Text 0"/>
           <p:cNvSpPr/>
           <p:nvPr>
             <p:ph idx="101" type="body" hasCustomPrompt="1"/>
@@ -10452,7 +10051,7 @@
                   <a:srgbClr val="111111"/>
                 </a:solidFill>
               </a:rPr>
-              <a:t>Age Up 3.2% against 10.5% of its matched controls, Exercise Down 1.2% against 9.8% — and the deficit is sharper when only the MEF2 the model uses is counted</a:t>
+              <a:t>Age Up 5.8% and Exercise Down 5.4% carry a close MEF2, against 8.5% of Stable sites — and the gap is sharper when only the MEF2 the model uses is counted</a:t>
             </a:r>
             <a:endParaRPr lang="en-US" sz="1500" dirty="0"/>
           </a:p>
@@ -10610,8 +10209,8 @@
         </p:nvSpPr>
         <p:spPr>
           <a:xfrm>
-            <a:off x="731520" y="1517904"/>
-            <a:ext cx="3383280" cy="256032"/>
+            <a:off x="1371600" y="1572768"/>
+            <a:ext cx="4572000" cy="256032"/>
           </a:xfrm>
           <a:prstGeom prst="rect">
             <a:avLst/>
@@ -10627,14 +10226,14 @@
               <a:buNone/>
             </a:pPr>
             <a:r>
-              <a:rPr lang="en-US" sz="1300" b="1" dirty="0">
+              <a:rPr lang="en-US" sz="1350" b="1" dirty="0">
                 <a:solidFill>
                   <a:srgbClr val="111111"/>
                 </a:solidFill>
               </a:rPr>
-              <a:t>MEF2, all sites</a:t>
-            </a:r>
-            <a:endParaRPr lang="en-US" sz="1300" dirty="0"/>
+              <a:t>MEF2</a:t>
+            </a:r>
+            <a:endParaRPr lang="en-US" sz="1350" dirty="0"/>
           </a:p>
         </p:txBody>
       </p:sp>
@@ -10654,8 +10253,8 @@
         </p:blipFill>
         <p:spPr>
           <a:xfrm>
-            <a:off x="731520" y="1875737"/>
-            <a:ext cx="3383280" cy="2649327"/>
+            <a:off x="1730862" y="1883664"/>
+            <a:ext cx="3853476" cy="3017520"/>
           </a:xfrm>
           <a:prstGeom prst="rect">
             <a:avLst/>
@@ -10670,8 +10269,8 @@
         </p:nvSpPr>
         <p:spPr>
           <a:xfrm>
-            <a:off x="4434840" y="1517904"/>
-            <a:ext cx="3383280" cy="256032"/>
+            <a:off x="6400800" y="1572768"/>
+            <a:ext cx="4572000" cy="256032"/>
           </a:xfrm>
           <a:prstGeom prst="rect">
             <a:avLst/>
@@ -10687,20 +10286,20 @@
               <a:buNone/>
             </a:pPr>
             <a:r>
-              <a:rPr lang="en-US" sz="1300" b="1" dirty="0">
+              <a:rPr lang="en-US" sz="1350" b="1" dirty="0">
                 <a:solidFill>
                   <a:srgbClr val="111111"/>
                 </a:solidFill>
               </a:rPr>
-              <a:t>MEF2, context-matched</a:t>
-            </a:r>
-            <a:endParaRPr lang="en-US" sz="1300" dirty="0"/>
+              <a:t>A second AP-1 footprint</a:t>
+            </a:r>
+            <a:endParaRPr lang="en-US" sz="1350" dirty="0"/>
           </a:p>
         </p:txBody>
       </p:sp>
       <p:pic>
         <p:nvPicPr>
-          <p:cNvPr id="7" name="Image 1" descr="/Users/z5162865/WongLab/AlphaGenome_Ap1/Analysis/slide_figures/panels/s10_mef2_matched.png">    </p:cNvPr>
+          <p:cNvPr id="7" name="Image 1" descr="/Users/z5162865/WongLab/AlphaGenome_Ap1/Analysis/slide_figures/panels/s10_ap1.png">    </p:cNvPr>
           <p:cNvPicPr>
             <a:picLocks noChangeAspect="1"/>
           </p:cNvPicPr>
@@ -10714,8 +10313,8 @@
         </p:blipFill>
         <p:spPr>
           <a:xfrm>
-            <a:off x="4434840" y="1875737"/>
-            <a:ext cx="3383280" cy="2649327"/>
+            <a:off x="6662171" y="1883664"/>
+            <a:ext cx="4049257" cy="3017520"/>
           </a:xfrm>
           <a:prstGeom prst="rect">
             <a:avLst/>
@@ -10724,13 +10323,13 @@
       </p:pic>
       <p:sp>
         <p:nvSpPr>
-          <p:cNvPr id="8" name="lg-dot-5.08-0"/>
+          <p:cNvPr id="8" name="lg-dot-5.5-0"/>
           <p:cNvSpPr/>
           <p:nvPr/>
         </p:nvSpPr>
         <p:spPr>
           <a:xfrm>
-            <a:off x="731520" y="4686300"/>
+            <a:off x="1371600" y="5070348"/>
             <a:ext cx="109728" cy="109728"/>
           </a:xfrm>
           <a:prstGeom prst="ellipse">
@@ -10749,13 +10348,13 @@
       </p:sp>
       <p:sp>
         <p:nvSpPr>
-          <p:cNvPr id="9" name="lg-txt-5.08-0"/>
+          <p:cNvPr id="9" name="lg-txt-5.5-0"/>
           <p:cNvSpPr txBox="1"/>
           <p:nvPr/>
         </p:nvSpPr>
         <p:spPr>
           <a:xfrm>
-            <a:off x="886968" y="4645152"/>
+            <a:off x="1527048" y="5029200"/>
             <a:ext cx="2307946" cy="201168"/>
           </a:xfrm>
           <a:prstGeom prst="rect">
@@ -10785,13 +10384,13 @@
       </p:sp>
       <p:sp>
         <p:nvSpPr>
-          <p:cNvPr id="10" name="lg-dot-5.08-1"/>
+          <p:cNvPr id="10" name="lg-dot-5.5-1"/>
           <p:cNvSpPr/>
           <p:nvPr/>
         </p:nvSpPr>
         <p:spPr>
           <a:xfrm>
-            <a:off x="3304642" y="4686300"/>
+            <a:off x="3944722" y="5070348"/>
             <a:ext cx="109728" cy="109728"/>
           </a:xfrm>
           <a:prstGeom prst="ellipse">
@@ -10810,13 +10409,13 @@
       </p:sp>
       <p:sp>
         <p:nvSpPr>
-          <p:cNvPr id="11" name="lg-txt-5.08-1"/>
+          <p:cNvPr id="11" name="lg-txt-5.5-1"/>
           <p:cNvSpPr txBox="1"/>
           <p:nvPr/>
         </p:nvSpPr>
         <p:spPr>
           <a:xfrm>
-            <a:off x="3460090" y="4645152"/>
+            <a:off x="4100170" y="5029200"/>
             <a:ext cx="2373782" cy="201168"/>
           </a:xfrm>
           <a:prstGeom prst="rect">
@@ -10846,14 +10445,14 @@
       </p:sp>
       <p:sp>
         <p:nvSpPr>
-          <p:cNvPr id="12" name="or-t3"/>
+          <p:cNvPr id="12" name="or-key"/>
           <p:cNvSpPr txBox="1"/>
           <p:nvPr/>
         </p:nvSpPr>
         <p:spPr>
           <a:xfrm>
-            <a:off x="8183880" y="1517904"/>
-            <a:ext cx="3474720" cy="256032"/>
+            <a:off x="731520" y="5376672"/>
+            <a:ext cx="10881360" cy="457200"/>
           </a:xfrm>
           <a:prstGeom prst="rect">
             <a:avLst/>
@@ -10869,194 +10468,12 @@
               <a:buNone/>
             </a:pPr>
             <a:r>
-              <a:rPr lang="en-US" sz="1300" b="1" dirty="0">
-                <a:solidFill>
-                  <a:srgbClr val="111111"/>
-                </a:solidFill>
-              </a:rPr>
-              <a:t>A second AP-1 footprint, when present</a:t>
-            </a:r>
-            <a:endParaRPr lang="en-US" sz="1300" dirty="0"/>
-          </a:p>
-        </p:txBody>
-      </p:sp>
-      <p:pic>
-        <p:nvPicPr>
-          <p:cNvPr id="13" name="Image 2" descr="/Users/z5162865/WongLab/AlphaGenome_Ap1/Analysis/slide_figures/panels/s10_ap1.png">    </p:cNvPr>
-          <p:cNvPicPr>
-            <a:picLocks noChangeAspect="1"/>
-          </p:cNvPicPr>
-          <p:nvPr/>
-        </p:nvPicPr>
-        <p:blipFill>
-          <a:blip r:embed="rId3"/>
-          <a:stretch>
-            <a:fillRect/>
-          </a:stretch>
-        </p:blipFill>
-        <p:spPr>
-          <a:xfrm>
-            <a:off x="8183880" y="1839935"/>
-            <a:ext cx="3474720" cy="2720930"/>
-          </a:xfrm>
-          <a:prstGeom prst="rect">
-            <a:avLst/>
-          </a:prstGeom>
-        </p:spPr>
-      </p:pic>
-      <p:sp>
-        <p:nvSpPr>
-          <p:cNvPr id="14" name="lg-dot-5.08-0"/>
-          <p:cNvSpPr/>
-          <p:nvPr/>
-        </p:nvSpPr>
-        <p:spPr>
-          <a:xfrm>
-            <a:off x="8183880" y="4686300"/>
-            <a:ext cx="109728" cy="109728"/>
-          </a:xfrm>
-          <a:prstGeom prst="ellipse">
-            <a:avLst/>
-          </a:prstGeom>
-          <a:solidFill>
-            <a:srgbClr val="2E7D32"/>
-          </a:solidFill>
-          <a:ln w="12700">
-            <a:solidFill>
-              <a:srgbClr val="2E7D32"/>
-            </a:solidFill>
-            <a:prstDash val="solid"/>
-          </a:ln>
-        </p:spPr>
-      </p:sp>
-      <p:sp>
-        <p:nvSpPr>
-          <p:cNvPr id="15" name="lg-txt-5.08-0"/>
-          <p:cNvSpPr txBox="1"/>
-          <p:nvPr/>
-        </p:nvSpPr>
-        <p:spPr>
-          <a:xfrm>
-            <a:off x="8339328" y="4645152"/>
-            <a:ext cx="793699" cy="201168"/>
-          </a:xfrm>
-          <a:prstGeom prst="rect">
-            <a:avLst/>
-          </a:prstGeom>
-          <a:noFill/>
-          <a:ln/>
-        </p:spPr>
-        <p:txBody>
-          <a:bodyPr wrap="square" lIns="0" tIns="0" rIns="0" bIns="0" rtlCol="0" anchor="ctr"/>
-          <a:lstStyle/>
-          <a:p>
-            <a:pPr indent="0" marL="0">
-              <a:buNone/>
-            </a:pPr>
-            <a:r>
-              <a:rPr lang="en-US" sz="1050" dirty="0">
-                <a:solidFill>
-                  <a:srgbClr val="111111"/>
-                </a:solidFill>
-              </a:rPr>
-              <a:t>all sites</a:t>
-            </a:r>
-            <a:endParaRPr lang="en-US" sz="1050" dirty="0"/>
-          </a:p>
-        </p:txBody>
-      </p:sp>
-      <p:sp>
-        <p:nvSpPr>
-          <p:cNvPr id="16" name="lg-dot-5.08-1"/>
-          <p:cNvSpPr/>
-          <p:nvPr/>
-        </p:nvSpPr>
-        <p:spPr>
-          <a:xfrm>
-            <a:off x="9242755" y="4686300"/>
-            <a:ext cx="109728" cy="109728"/>
-          </a:xfrm>
-          <a:prstGeom prst="ellipse">
-            <a:avLst/>
-          </a:prstGeom>
-          <a:solidFill>
-            <a:srgbClr val="B3B2AE"/>
-          </a:solidFill>
-          <a:ln w="12700">
-            <a:solidFill>
-              <a:srgbClr val="B3B2AE"/>
-            </a:solidFill>
-            <a:prstDash val="solid"/>
-          </a:ln>
-        </p:spPr>
-      </p:sp>
-      <p:sp>
-        <p:nvSpPr>
-          <p:cNvPr id="17" name="lg-txt-5.08-1"/>
-          <p:cNvSpPr txBox="1"/>
-          <p:nvPr/>
-        </p:nvSpPr>
-        <p:spPr>
-          <a:xfrm>
-            <a:off x="9398203" y="4645152"/>
-            <a:ext cx="662026" cy="201168"/>
-          </a:xfrm>
-          <a:prstGeom prst="rect">
-            <a:avLst/>
-          </a:prstGeom>
-          <a:noFill/>
-          <a:ln/>
-        </p:spPr>
-        <p:txBody>
-          <a:bodyPr wrap="square" lIns="0" tIns="0" rIns="0" bIns="0" rtlCol="0" anchor="ctr"/>
-          <a:lstStyle/>
-          <a:p>
-            <a:pPr indent="0" marL="0">
-              <a:buNone/>
-            </a:pPr>
-            <a:r>
-              <a:rPr lang="en-US" sz="1050" dirty="0">
-                <a:solidFill>
-                  <a:srgbClr val="111111"/>
-                </a:solidFill>
-              </a:rPr>
-              <a:t>matched</a:t>
-            </a:r>
-            <a:endParaRPr lang="en-US" sz="1050" dirty="0"/>
-          </a:p>
-        </p:txBody>
-      </p:sp>
-      <p:sp>
-        <p:nvSpPr>
-          <p:cNvPr id="18" name="or-key"/>
-          <p:cNvSpPr txBox="1"/>
-          <p:nvPr/>
-        </p:nvSpPr>
-        <p:spPr>
-          <a:xfrm>
-            <a:off x="731520" y="4983480"/>
-            <a:ext cx="10881360" cy="548640"/>
-          </a:xfrm>
-          <a:prstGeom prst="rect">
-            <a:avLst/>
-          </a:prstGeom>
-          <a:noFill/>
-          <a:ln/>
-        </p:spPr>
-        <p:txBody>
-          <a:bodyPr wrap="square" lIns="0" tIns="0" rIns="0" bIns="0" rtlCol="0" anchor="ctr"/>
-          <a:lstStyle/>
-          <a:p>
-            <a:pPr indent="0" marL="0">
-              <a:buNone/>
-            </a:pPr>
-            <a:r>
               <a:rPr lang="en-US" sz="950" dirty="0">
                 <a:solidFill>
                   <a:srgbClr val="595959"/>
                 </a:solidFill>
               </a:rPr>
-              <a:t>odds ratio against all Stable sites or against each class’s own matched controls, with 95% CI; dotted line = no difference.   MEF2 unconditional on all sites: Age Up 0.45, Exercise Down 0.56, Dynamic 0.58, all FDR ≤ 0.005.   AP-1 given present, all sites: Dynamic 1.45, FDR 0.036.</a:t>
+              <a:t>odds ratio against all Stable sites with a 95% CI; dotted line = no difference.   MEF2, does it have one: Age Up 0.45, Exercise Down 0.56, Dynamic 0.58, all FDR ≤ 0.005.   AP-1, when it has one: Dynamic 1.45, FDR 0.036.</a:t>
             </a:r>
             <a:endParaRPr lang="en-US" sz="950" dirty="0"/>
           </a:p>
@@ -11064,7 +10481,7 @@
       </p:sp>
       <p:sp>
         <p:nvSpPr>
-          <p:cNvPr id="19" name="Text 0"/>
+          <p:cNvPr id="13" name="Text 0"/>
           <p:cNvSpPr/>
           <p:nvPr>
             <p:ph idx="101" type="body" hasCustomPrompt="1"/>
@@ -11213,15 +10630,98 @@
                   <a:schemeClr val="tx1"/>
                 </a:solidFill>
               </a:rPr>
-              <a:t>The same contrast at one pair of promoters</a:t>
+              <a:t>What the model leans on: its own motif, or a neighbour</a:t>
             </a:r>
             <a:endParaRPr lang="en-US" sz="2800" dirty="0"/>
+          </a:p>
+        </p:txBody>
+      </p:sp>
+      <p:sp>
+        <p:nvSpPr>
+          <p:cNvPr id="3" name="cl-intro"/>
+          <p:cNvSpPr txBox="1"/>
+          <p:nvPr/>
+        </p:nvSpPr>
+        <p:spPr>
+          <a:xfrm>
+            <a:off x="731520" y="1005840"/>
+            <a:ext cx="10881360" cy="457200"/>
+          </a:xfrm>
+          <a:prstGeom prst="rect">
+            <a:avLst/>
+          </a:prstGeom>
+          <a:noFill/>
+          <a:ln/>
+        </p:spPr>
+        <p:txBody>
+          <a:bodyPr wrap="square" lIns="0" tIns="0" rIns="0" bIns="0" rtlCol="0" anchor="ctr"/>
+          <a:lstStyle/>
+          <a:p>
+            <a:pPr indent="0" marL="0">
+              <a:buNone/>
+            </a:pPr>
+            <a:r>
+              <a:rPr lang="en-US" sz="1150" dirty="0">
+                <a:solidFill>
+                  <a:srgbClr val="595959"/>
+                </a:solidFill>
+              </a:rPr>
+              <a:t>Two elements with a comparable set of neighbouring AP-1 footprints and comparable accessibility. Coloured bars are the three most damaging windows; gold marks the called AP-1 motif; the lane below shows every other AP-1 footprint, merged where calls overlap and numbered.</a:t>
+            </a:r>
+            <a:endParaRPr lang="en-US" sz="1150" dirty="0"/>
+          </a:p>
+        </p:txBody>
+      </p:sp>
+      <p:sp>
+        <p:nvSpPr>
+          <p:cNvPr id="4" name="cl-t1"/>
+          <p:cNvSpPr txBox="1"/>
+          <p:nvPr/>
+        </p:nvSpPr>
+        <p:spPr>
+          <a:xfrm>
+            <a:off x="731520" y="1572768"/>
+            <a:ext cx="10881360" cy="256032"/>
+          </a:xfrm>
+          <a:prstGeom prst="rect">
+            <a:avLst/>
+          </a:prstGeom>
+          <a:noFill/>
+          <a:ln/>
+        </p:spPr>
+        <p:txBody>
+          <a:bodyPr wrap="square" lIns="0" tIns="0" rIns="0" bIns="0" rtlCol="0" anchor="ctr"/>
+          <a:lstStyle/>
+          <a:p>
+            <a:pPr indent="0" marL="0">
+              <a:buNone/>
+            </a:pPr>
+            <a:r>
+              <a:rPr lang="en-US" sz="1300" b="1" dirty="0">
+                <a:solidFill>
+                  <a:srgbClr val="1F6FB2"/>
+                </a:solidFill>
+              </a:rPr>
+              <a:t>Stable  </a:t>
+            </a:r>
+            <a:pPr indent="0" marL="0">
+              <a:buNone/>
+            </a:pPr>
+            <a:r>
+              <a:rPr lang="en-US" sz="1200" dirty="0">
+                <a:solidFill>
+                  <a:srgbClr val="111111"/>
+                </a:solidFill>
+              </a:rPr>
+              <a:t>chr2:110,186,562 — all three top windows are the motif itself</a:t>
+            </a:r>
+            <a:endParaRPr lang="en-US" sz="1300" dirty="0"/>
           </a:p>
         </p:txBody>
       </p:sp>
       <p:pic>
         <p:nvPicPr>
-          <p:cNvPr id="3" name="Image 0" descr="/Users/z5162865/WongLab/AlphaGenome_Ap1/Analysis/example_track/example_scan_track.png">    </p:cNvPr>
+          <p:cNvPr id="5" name="Image 0" descr="/Users/z5162865/WongLab/AlphaGenome_Ap1/Analysis/slide_figures/panels/s11_cluster_stable.png">    </p:cNvPr>
           <p:cNvPicPr>
             <a:picLocks noChangeAspect="1"/>
           </p:cNvPicPr>
@@ -11235,8 +10735,8 @@
         </p:blipFill>
         <p:spPr>
           <a:xfrm>
-            <a:off x="1202961" y="1051560"/>
-            <a:ext cx="9755599" cy="4754880"/>
+            <a:off x="1462024" y="1847088"/>
+            <a:ext cx="9420352" cy="1737360"/>
           </a:xfrm>
           <a:prstGeom prst="rect">
             <a:avLst/>
@@ -11245,7 +10745,114 @@
       </p:pic>
       <p:sp>
         <p:nvSpPr>
-          <p:cNvPr id="4" name="Text 0"/>
+          <p:cNvPr id="6" name="cl-t2"/>
+          <p:cNvSpPr txBox="1"/>
+          <p:nvPr/>
+        </p:nvSpPr>
+        <p:spPr>
+          <a:xfrm>
+            <a:off x="731520" y="3611880"/>
+            <a:ext cx="10881360" cy="256032"/>
+          </a:xfrm>
+          <a:prstGeom prst="rect">
+            <a:avLst/>
+          </a:prstGeom>
+          <a:noFill/>
+          <a:ln/>
+        </p:spPr>
+        <p:txBody>
+          <a:bodyPr wrap="square" lIns="0" tIns="0" rIns="0" bIns="0" rtlCol="0" anchor="ctr"/>
+          <a:lstStyle/>
+          <a:p>
+            <a:pPr indent="0" marL="0">
+              <a:buNone/>
+            </a:pPr>
+            <a:r>
+              <a:rPr lang="en-US" sz="1300" b="1" dirty="0">
+                <a:solidFill>
+                  <a:srgbClr val="C2551C"/>
+                </a:solidFill>
+              </a:rPr>
+              <a:t>Age-gained  </a:t>
+            </a:r>
+            <a:pPr indent="0" marL="0">
+              <a:buNone/>
+            </a:pPr>
+            <a:r>
+              <a:rPr lang="en-US" sz="1200" dirty="0">
+                <a:solidFill>
+                  <a:srgbClr val="111111"/>
+                </a:solidFill>
+              </a:rPr>
+              <a:t>chr13:35,395,938 — the two worst windows sit on a cluster of neighbouring AP-1 sites, and the called motif is only third</a:t>
+            </a:r>
+            <a:endParaRPr lang="en-US" sz="1300" dirty="0"/>
+          </a:p>
+        </p:txBody>
+      </p:sp>
+      <p:pic>
+        <p:nvPicPr>
+          <p:cNvPr id="7" name="Image 1" descr="/Users/z5162865/WongLab/AlphaGenome_Ap1/Analysis/slide_figures/panels/s11_cluster_dynamic.png">    </p:cNvPr>
+          <p:cNvPicPr>
+            <a:picLocks noChangeAspect="1"/>
+          </p:cNvPicPr>
+          <p:nvPr/>
+        </p:nvPicPr>
+        <p:blipFill>
+          <a:blip r:embed="rId2"/>
+          <a:stretch>
+            <a:fillRect/>
+          </a:stretch>
+        </p:blipFill>
+        <p:spPr>
+          <a:xfrm>
+            <a:off x="1462024" y="3886200"/>
+            <a:ext cx="9420352" cy="1737360"/>
+          </a:xfrm>
+          <a:prstGeom prst="rect">
+            <a:avLst/>
+          </a:prstGeom>
+        </p:spPr>
+      </p:pic>
+      <p:sp>
+        <p:nvSpPr>
+          <p:cNvPr id="8" name="cl-key"/>
+          <p:cNvSpPr txBox="1"/>
+          <p:nvPr/>
+        </p:nvSpPr>
+        <p:spPr>
+          <a:xfrm>
+            <a:off x="731520" y="5614416"/>
+            <a:ext cx="10881360" cy="274320"/>
+          </a:xfrm>
+          <a:prstGeom prst="rect">
+            <a:avLst/>
+          </a:prstGeom>
+          <a:noFill/>
+          <a:ln/>
+        </p:spPr>
+        <p:txBody>
+          <a:bodyPr wrap="square" lIns="0" tIns="0" rIns="0" bIns="0" rtlCol="0" anchor="ctr"/>
+          <a:lstStyle/>
+          <a:p>
+            <a:pPr indent="0" marL="0">
+              <a:buNone/>
+            </a:pPr>
+            <a:r>
+              <a:rPr lang="en-US" sz="950" dirty="0">
+                <a:solidFill>
+                  <a:srgbClr val="595959"/>
+                </a:solidFill>
+              </a:rPr>
+              <a:t>own motif −1.90 against strongest neighbour −1.18 at the Stable site; −1.56 against −2.05 at the age-gained one. 8 and 10 neighbouring AP-1 footprints respectively.</a:t>
+            </a:r>
+            <a:endParaRPr lang="en-US" sz="950" dirty="0"/>
+          </a:p>
+        </p:txBody>
+      </p:sp>
+      <p:sp>
+        <p:nvSpPr>
+          <p:cNvPr id="9" name="Text 0"/>
           <p:cNvSpPr/>
           <p:nvPr>
             <p:ph idx="101" type="body" hasCustomPrompt="1"/>
@@ -11286,7 +10893,7 @@
                   <a:srgbClr val="111111"/>
                 </a:solidFill>
               </a:rPr>
-              <a:t>the stable site has MEF2 abutting its AP-1 motif at 19 bp; the age-gained site has no MEF2 anywhere in the element</a:t>
+              <a:t>one locus showing the 1.45× result: when a responsive element has a second AP-1 site, that is what the model leans on</a:t>
             </a:r>
             <a:endParaRPr lang="en-US" sz="1500" dirty="0"/>
           </a:p>

--- a/Analysis/AP1_AlphaGenome_results.pptx
+++ b/Analysis/AP1_AlphaGenome_results.pptx
@@ -122,18 +122,18 @@
   <p:extLst>
     <p:ext uri="{521415D9-36F7-43E2-AB2F-B90AF26B5E84}">
       <p14:sectionLst xmlns:p14="http://schemas.microsoft.com/office/powerpoint/2010/main">
-        <p14:section name="Opening" id="{27a5d981-545e-fd8f-f845-d8f8a5f61d48}">
+        <p14:section name="Opening" id="{547ecadc-eff2-3d7e-5829-afcf254f3224}">
           <p14:sldIdLst>
             <p14:sldId id="256"/>
           </p14:sldIdLst>
         </p14:section>
-        <p14:section name="Design" id="{b0194f64-36d0-4258-82c9-90ae778c10bb}">
+        <p14:section name="Design" id="{9438a710-9c0e-a0e3-5f48-abc5b98ed3af}">
           <p14:sldIdLst>
             <p14:sldId id="257"/>
             <p14:sldId id="258"/>
           </p14:sldIdLst>
         </p14:section>
-        <p14:section name="Findings" id="{550918ff-3762-aa46-57e7-84480359118a}">
+        <p14:section name="Findings" id="{9b25b984-bbf0-acb1-c4eb-e7fb2733c8ef}">
           <p14:sldIdLst>
             <p14:sldId id="259"/>
             <p14:sldId id="260"/>
@@ -148,7 +148,7 @@
             <p14:sldId id="269"/>
           </p14:sldIdLst>
         </p14:section>
-        <p14:section name="Conclusion" id="{11ccf227-0fe8-59cb-3f57-a0b955e537ad}">
+        <p14:section name="Conclusion" id="{c956a467-aba6-0007-7787-75f29e203ba7}">
           <p14:sldIdLst>
             <p14:sldId id="270"/>
             <p14:sldId id="271"/>
@@ -10313,8 +10313,8 @@
         </p:blipFill>
         <p:spPr>
           <a:xfrm>
-            <a:off x="6662171" y="1883664"/>
-            <a:ext cx="4049257" cy="3017520"/>
+            <a:off x="6760062" y="1883664"/>
+            <a:ext cx="3853476" cy="3017520"/>
           </a:xfrm>
           <a:prstGeom prst="rect">
             <a:avLst/>
@@ -10473,7 +10473,7 @@
                   <a:srgbClr val="595959"/>
                 </a:solidFill>
               </a:rPr>
-              <a:t>odds ratio against all Stable sites with a 95% CI; dotted line = no difference.   MEF2, does it have one: Age Up 0.45, Exercise Down 0.56, Dynamic 0.58, all FDR ≤ 0.005.   AP-1, when it has one: Dynamic 1.45, FDR 0.036.</a:t>
+              <a:t>log2 odds ratio against all Stable sites with a 95% CI; dotted line = no difference, so −1 is half the odds and +1 is double.   MEF2, does it have one: Age Up OR 0.45, Exercise Down 0.56, Dynamic 0.58, all FDR ≤ 0.005.   AP-1, when it has one: Dynamic OR 1.45, FDR 0.036.</a:t>
             </a:r>
             <a:endParaRPr lang="en-US" sz="950" dirty="0"/>
           </a:p>

--- a/Analysis/AP1_AlphaGenome_results.pptx
+++ b/Analysis/AP1_AlphaGenome_results.pptx
@@ -122,18 +122,18 @@
   <p:extLst>
     <p:ext uri="{521415D9-36F7-43E2-AB2F-B90AF26B5E84}">
       <p14:sectionLst xmlns:p14="http://schemas.microsoft.com/office/powerpoint/2010/main">
-        <p14:section name="Opening" id="{547ecadc-eff2-3d7e-5829-afcf254f3224}">
+        <p14:section name="Opening" id="{f6d2be4c-a9ee-8d72-df68-555f6b0d13b8}">
           <p14:sldIdLst>
             <p14:sldId id="256"/>
           </p14:sldIdLst>
         </p14:section>
-        <p14:section name="Design" id="{9438a710-9c0e-a0e3-5f48-abc5b98ed3af}">
+        <p14:section name="Design" id="{be4135e1-cb32-5f10-0a90-00930f65c719}">
           <p14:sldIdLst>
             <p14:sldId id="257"/>
             <p14:sldId id="258"/>
           </p14:sldIdLst>
         </p14:section>
-        <p14:section name="Findings" id="{9b25b984-bbf0-acb1-c4eb-e7fb2733c8ef}">
+        <p14:section name="Findings" id="{b95b4155-28e7-8738-705b-f0280053a923}">
           <p14:sldIdLst>
             <p14:sldId id="259"/>
             <p14:sldId id="260"/>
@@ -148,7 +148,7 @@
             <p14:sldId id="269"/>
           </p14:sldIdLst>
         </p14:section>
-        <p14:section name="Conclusion" id="{c956a467-aba6-0007-7787-75f29e203ba7}">
+        <p14:section name="Conclusion" id="{a4b73e2f-c324-2dca-61b7-4a69002a28a5}">
           <p14:sldIdLst>
             <p14:sldId id="270"/>
             <p14:sldId id="271"/>
@@ -3133,8 +3133,8 @@
         </p:blipFill>
         <p:spPr>
           <a:xfrm>
-            <a:off x="502920" y="1373869"/>
-            <a:ext cx="2286000" cy="1915702"/>
+            <a:off x="502920" y="1400887"/>
+            <a:ext cx="2286000" cy="1861665"/>
           </a:xfrm>
           <a:prstGeom prst="rect">
             <a:avLst/>
@@ -10666,7 +10666,7 @@
                   <a:srgbClr val="595959"/>
                 </a:solidFill>
               </a:rPr>
-              <a:t>Two elements with a comparable set of neighbouring AP-1 footprints and comparable accessibility. Coloured bars are the three most damaging windows; gold marks the called AP-1 motif; the lane below shows every other AP-1 footprint, merged where calls overlap and numbered.</a:t>
+              <a:t>Two elements with comparable accessibility and a comparable set of neighbouring AP-1 footprints. Numbered circles mark the three most damaging windows, ranked; the dotted line drops from each to whatever lies beneath it. Gold is the called AP-1 motif, grey the other AP-1 footprints, merged where calls overlap.</a:t>
             </a:r>
             <a:endParaRPr lang="en-US" sz="1150" dirty="0"/>
           </a:p>
@@ -10713,7 +10713,7 @@
                   <a:srgbClr val="111111"/>
                 </a:solidFill>
               </a:rPr>
-              <a:t>chr2:110,186,562 — all three top windows are the motif itself</a:t>
+              <a:t>chr2:110,186,562 — windows 1 and 2 are the called motif; the seven AP-1 sites at +140 to +190 bp cost nothing</a:t>
             </a:r>
             <a:endParaRPr lang="en-US" sz="1300" dirty="0"/>
           </a:p>
@@ -10735,8 +10735,8 @@
         </p:blipFill>
         <p:spPr>
           <a:xfrm>
-            <a:off x="1462024" y="1847088"/>
-            <a:ext cx="9420352" cy="1737360"/>
+            <a:off x="594360" y="1828800"/>
+            <a:ext cx="10972800" cy="1828800"/>
           </a:xfrm>
           <a:prstGeom prst="rect">
             <a:avLst/>
@@ -10784,7 +10784,7 @@
                   <a:srgbClr val="111111"/>
                 </a:solidFill>
               </a:rPr>
-              <a:t>chr13:35,395,938 — the two worst windows sit on a cluster of neighbouring AP-1 sites, and the called motif is only third</a:t>
+              <a:t>chr13:35,395,938 — windows 1 and 3 sit on a cluster of ten AP-1 sites at −65 bp; the called motif is only second</a:t>
             </a:r>
             <a:endParaRPr lang="en-US" sz="1300" dirty="0"/>
           </a:p>
@@ -10806,8 +10806,8 @@
         </p:blipFill>
         <p:spPr>
           <a:xfrm>
-            <a:off x="1462024" y="3886200"/>
-            <a:ext cx="9420352" cy="1737360"/>
+            <a:off x="594360" y="3858768"/>
+            <a:ext cx="10972800" cy="1828800"/>
           </a:xfrm>
           <a:prstGeom prst="rect">
             <a:avLst/>

--- a/Analysis/AP1_AlphaGenome_results.pptx
+++ b/Analysis/AP1_AlphaGenome_results.pptx
@@ -122,20 +122,20 @@
   <p:extLst>
     <p:ext uri="{521415D9-36F7-43E2-AB2F-B90AF26B5E84}">
       <p14:sectionLst xmlns:p14="http://schemas.microsoft.com/office/powerpoint/2010/main">
-        <p14:section name="Opening" id="{f6d2be4c-a9ee-8d72-df68-555f6b0d13b8}">
+        <p14:section name="Opening" id="{68870850-c493-06a4-28c1-ad559e10795f}">
           <p14:sldIdLst>
             <p14:sldId id="256"/>
           </p14:sldIdLst>
         </p14:section>
-        <p14:section name="Design" id="{be4135e1-cb32-5f10-0a90-00930f65c719}">
+        <p14:section name="Design" id="{1e8051b2-33b3-dd73-1b7f-30e09f583768}">
           <p14:sldIdLst>
             <p14:sldId id="257"/>
             <p14:sldId id="258"/>
+            <p14:sldId id="259"/>
           </p14:sldIdLst>
         </p14:section>
-        <p14:section name="Findings" id="{b95b4155-28e7-8738-705b-f0280053a923}">
+        <p14:section name="Findings" id="{f5bd0b1b-8fbd-2b94-bf7a-7d20d310a2c0}">
           <p14:sldIdLst>
-            <p14:sldId id="259"/>
             <p14:sldId id="260"/>
             <p14:sldId id="261"/>
             <p14:sldId id="262"/>
@@ -148,7 +148,7 @@
             <p14:sldId id="269"/>
           </p14:sldIdLst>
         </p14:section>
-        <p14:section name="Conclusion" id="{a4b73e2f-c324-2dca-61b7-4a69002a28a5}">
+        <p14:section name="Conclusion" id="{3e69a788-bdb0-2f61-667a-f3b185f1f5ed}">
           <p14:sldIdLst>
             <p14:sldId id="270"/>
             <p14:sldId id="271"/>
@@ -734,7 +734,7 @@
           <a:p>
             <a:r>
               <a:rPr lang="en-US" dirty="0"/>
-              <a:t>10 of 16 scan features separate Dynamic from matched Stable. Share of dependence within 85 bp 0.63 vs 0.74, spread 94 vs 86 bp, largest single-base effect 0.74 vs 0.90. Age Up is the most diffuse class of all.</a:t>
+              <a:t>The profiles on the left are what the four measures are read off. At the core (within 15 bp) every class loses less than Stable sites do: Age Down 0.73x, Exercise Up 0.76x, Exercise Down 0.78x, Dynamic 0.80x, Age Up 0.90x, all FDR &lt;= 0.016. Normalised to each site’s own total, the core share is barely different (0.93-1.00) but the flank share beyond 85 bp is higher in Age Up 1.31x, Exercise Down 1.29x and Dynamic 1.21x, all FDR &lt;= 0.0002, while Age Down is 0.99x. So Age Down is not a redistribution, it is a weaker element throughout.</a:t>
             </a:r>
             <a:endParaRPr lang="en-US" dirty="0"/>
           </a:p>
@@ -1438,7 +1438,7 @@
           <a:p>
             <a:r>
               <a:rPr lang="en-US" dirty="0"/>
-              <a:t>Top row is the uncontrolled comparison: if the accessibility difference is itself biology, it lives there. Bottom row matches each class to its own Stable controls on predicted and measured accessibility, peak width and TSS distance. The 300 bp control is the thing to check: Age Up differs slightly even there (-0.152 vs -0.111 matched), but that offset is 0.04 against a 0.26 effect at 170 bp and runs the opposite way, so it does not explain the result.</a:t>
+              <a:t>A demonstration, not a result: this element was chosen for legibility, not because it is typical. The footprint lane is what lets a window be attributed to a factor; families are stacked into lanes only where their footprints would otherwise overlap. The same scan is also read over the 11 bp motif and over the whole peak, and the titration and single-base experiments run on the same 3,678 sites.</a:t>
             </a:r>
             <a:endParaRPr lang="en-US" dirty="0"/>
           </a:p>
@@ -1526,7 +1526,7 @@
           <a:p>
             <a:r>
               <a:rPr lang="en-US" dirty="0"/>
-              <a:t>2.49 million footprinted cardiomyocyte TFBS mapped onto the scan. Dynamic is split into its four directional classes because a gain and a loss could cancel in the pooled comparison. Tests run over all 88 matched class-by-family comparisons, not just the six families drawn. CTCF was reported as a lead earlier and is now retracted twice over: the original tile-level significance was pseudo-replication, and with the full scan and measured-accessibility matching the point estimate itself is zero (Dynamic -0.551 vs matched Stable -0.548, p = 0.98). The nearest thing to a real signal is MEF2 in Age Up, -0.53 against -0.84 in matched controls, p = 0.03 uncorrected, and in Exercise Down, p = 0.06 - the same two classes that are short of a close MEF2 on the previous slide. Neither survives correction on its own; they are worth quoting only because the proximity test points the same way.</a:t>
+              <a:t>Top row is the uncontrolled comparison: if the accessibility difference is itself biology, it lives there. Bottom row matches each class to its own Stable controls on predicted and measured accessibility, peak width and TSS distance. The 300 bp control is the thing to check: Age Up differs slightly even there (-0.152 vs -0.111 matched), but that offset is 0.04 against a 0.26 effect at 170 bp and runs the opposite way, so it does not explain the result.</a:t>
             </a:r>
             <a:endParaRPr lang="en-US" dirty="0"/>
           </a:p>
@@ -1614,7 +1614,7 @@
           <a:p>
             <a:r>
               <a:rPr lang="en-US" dirty="0"/>
-              <a:t>Left panel counts every MEF2 footprint, important or not: it is occurrence, not importance. Middle panel is importance, measured against footprint-free tiles at the same distance, so the general fall-off with distance is removed. Right panel: 5.6% of Age Up sites carry a MEF2 footprint within 25 bp against 13.7% of their matched Stable controls (Fisher p 0.004, FDR 0.03); Exercise Down is similar but weaker. No 10-11 bp repeat survives correction, so no fixed protein-protein register.</a:t>
+              <a:t>2.49 million footprinted cardiomyocyte TFBS mapped onto the scan. Dynamic is split into its four directional classes because a gain and a loss could cancel in the pooled comparison. Tests run over all 88 matched class-by-family comparisons, not just the six families drawn. CTCF was reported as a lead earlier and is now retracted twice over: the original tile-level significance was pseudo-replication, and with the full scan and measured-accessibility matching the point estimate itself is zero (Dynamic -0.551 vs matched Stable -0.548, p = 0.98). The nearest thing to a real signal is MEF2 in Age Up, -0.53 against -0.84 in matched controls, p = 0.03 uncorrected, and in Exercise Down, p = 0.06 - the same two classes that are short of a close MEF2 on the previous slide. Neither survives correction on its own; they are worth quoting only because the proximity test points the same way.</a:t>
             </a:r>
             <a:endParaRPr lang="en-US" dirty="0"/>
           </a:p>
@@ -1702,7 +1702,7 @@
           <a:p>
             <a:r>
               <a:rPr lang="en-US" dirty="0"/>
-              <a:t>Matched tests are exact McNemar on the paired sites, raw tests are Fisher, BH across all 20. Surviving: Age Up on both definitions (FDR 0.021 leaned-on, 0.045 footprint-present) and Exercise Down on the leaned-on definition (FDR 0.026); Exercise Down footprint-present does not (FDR 0.12). Age Down and Exercise Up show nothing either way. An earlier quote of p = 0.003 and p = 0.0005 for these came from Fisher applied to the matched groups as if unpaired; McNemar is the right test and gives p = 0.0021 and p = 0.0013.</a:t>
+              <a:t>Left panel counts every MEF2 footprint, important or not: it is occurrence, not importance. Middle panel is importance, measured against footprint-free tiles at the same distance, so the general fall-off with distance is removed. Right panel: 5.6% of Age Up sites carry a MEF2 footprint within 25 bp against 13.7% of their matched Stable controls (Fisher p 0.004, FDR 0.03); Exercise Down is similar but weaker. No 10-11 bp repeat survives correction, so no fixed protein-protein register.</a:t>
             </a:r>
             <a:endParaRPr lang="en-US" dirty="0"/>
           </a:p>
@@ -1790,7 +1790,7 @@
           <a:p>
             <a:r>
               <a:rPr lang="en-US" dirty="0"/>
-              <a:t>Presence vs rank is the point. MEF2, does the element have one: Dynamic OR 0.58, Age Up 0.45, Exercise Down 0.56, all surviving BH. Given a MEF2 is present, every class ranks it in the top three about equally often (0.87-2.03, nothing significant). AP-1 given present: Dynamic 1.45x, FDR 0.036, with the direction repeating in all four directional classes (1.43-1.62). CTCF is the reason to keep the matched analysis in the report even though it is off the slides: OR 3.0-6.5 here with FDR &lt; 0.001, and exactly 1.0 once accessibility is matched.</a:t>
+              <a:t>Matched tests are exact McNemar on the paired sites, raw tests are Fisher, BH across all 20. Surviving: Age Up on both definitions (FDR 0.021 leaned-on, 0.045 footprint-present) and Exercise Down on the leaned-on definition (FDR 0.026); Exercise Down footprint-present does not (FDR 0.12). Age Down and Exercise Up show nothing either way. An earlier quote of p = 0.003 and p = 0.0005 for these came from Fisher applied to the matched groups as if unpaired; McNemar is the right test and gives p = 0.0021 and p = 0.0013.</a:t>
             </a:r>
             <a:endParaRPr lang="en-US" dirty="0"/>
           </a:p>
@@ -1878,7 +1878,7 @@
           <a:p>
             <a:r>
               <a:rPr lang="en-US" dirty="0"/>
-              <a:t>Chosen to illustrate the odds-ratio result on the previous slide, not as evidence in itself: n = 2. The pair is matched on predicted accessibility (0.77 vs 0.74) and peak width (758 vs 803), and both carry a comparable number of neighbouring AP-1 footprints, so the difference is which window the model weights. The age-gained site is MAS only, meaning AP-1 is called in aged sedentary but not in young or aged exercise.</a:t>
+              <a:t>Presence vs rank is the point. MEF2, does the element have one: Dynamic OR 0.58, Age Up 0.45, Exercise Down 0.56, all surviving BH. Given a MEF2 is present, every class ranks it in the top three about equally often (0.87-2.03, nothing significant). AP-1 given present: Dynamic 1.45x, FDR 0.036, with the direction repeating in all four directional classes (1.43-1.62). CTCF is the reason to keep the matched analysis in the report even though it is off the slides: OR 3.0-6.5 here with FDR &lt; 0.001, and exactly 1.0 once accessibility is matched.</a:t>
             </a:r>
             <a:endParaRPr lang="en-US" dirty="0"/>
           </a:p>
@@ -3117,9 +3117,45 @@
           </a:p>
         </p:txBody>
       </p:sp>
+      <p:sp>
+        <p:nvSpPr>
+          <p:cNvPr id="3" name="prof-t1"/>
+          <p:cNvSpPr txBox="1"/>
+          <p:nvPr/>
+        </p:nvSpPr>
+        <p:spPr>
+          <a:xfrm>
+            <a:off x="502920" y="1143000"/>
+            <a:ext cx="2743200" cy="256032"/>
+          </a:xfrm>
+          <a:prstGeom prst="rect">
+            <a:avLst/>
+          </a:prstGeom>
+          <a:noFill/>
+          <a:ln/>
+        </p:spPr>
+        <p:txBody>
+          <a:bodyPr wrap="square" lIns="0" tIns="0" rIns="0" bIns="0" rtlCol="0" anchor="ctr"/>
+          <a:lstStyle/>
+          <a:p>
+            <a:pPr indent="0" marL="0">
+              <a:buNone/>
+            </a:pPr>
+            <a:r>
+              <a:rPr lang="en-US" sz="1250" b="1" dirty="0">
+                <a:solidFill>
+                  <a:srgbClr val="111111"/>
+                </a:solidFill>
+              </a:rPr>
+              <a:t>Where the dependence sits</a:t>
+            </a:r>
+            <a:endParaRPr lang="en-US" sz="1250" dirty="0"/>
+          </a:p>
+        </p:txBody>
+      </p:sp>
       <p:pic>
         <p:nvPicPr>
-          <p:cNvPr id="3" name="Image 0" descr="/Users/z5162865/WongLab/AlphaGenome_Ap1/Analysis/slide_figures/panels/d_profile.png">    </p:cNvPr>
+          <p:cNvPr id="4" name="Image 0" descr="/Users/z5162865/WongLab/AlphaGenome_Ap1/Analysis/slide_figures/panels/s12_profile_absolute.png">    </p:cNvPr>
           <p:cNvPicPr>
             <a:picLocks noChangeAspect="1"/>
           </p:cNvPicPr>
@@ -3133,8 +3169,8 @@
         </p:blipFill>
         <p:spPr>
           <a:xfrm>
-            <a:off x="502920" y="1400887"/>
-            <a:ext cx="2286000" cy="1861665"/>
+            <a:off x="502920" y="1544496"/>
+            <a:ext cx="2743200" cy="1455576"/>
           </a:xfrm>
           <a:prstGeom prst="rect">
             <a:avLst/>
@@ -3143,14 +3179,14 @@
       </p:pic>
       <p:sp>
         <p:nvSpPr>
-          <p:cNvPr id="4" name="profile-caption"/>
+          <p:cNvPr id="5" name="prof-t2"/>
           <p:cNvSpPr txBox="1"/>
           <p:nvPr/>
         </p:nvSpPr>
         <p:spPr>
           <a:xfrm>
-            <a:off x="502920" y="3337560"/>
-            <a:ext cx="2286000" cy="822960"/>
+            <a:off x="502920" y="3200400"/>
+            <a:ext cx="2743200" cy="256032"/>
           </a:xfrm>
           <a:prstGeom prst="rect">
             <a:avLst/>
@@ -3166,92 +3202,20 @@
               <a:buNone/>
             </a:pPr>
             <a:r>
-              <a:rPr lang="en-US" sz="950" dirty="0">
-                <a:solidFill>
-                  <a:srgbClr val="595959"/>
-                </a:solidFill>
-              </a:rPr>
-              <a:t>one site’s sliding-window profile: each bar is a 10 bp window replaced, shaded band = within ±85 bp of the motif</a:t>
-            </a:r>
-            <a:endParaRPr lang="en-US" sz="950" dirty="0"/>
-          </a:p>
-        </p:txBody>
-      </p:sp>
-      <p:sp>
-        <p:nvSpPr>
-          <p:cNvPr id="5" name="s3_dependence-title-0"/>
-          <p:cNvSpPr txBox="1"/>
-          <p:nvPr/>
-        </p:nvSpPr>
-        <p:spPr>
-          <a:xfrm>
-            <a:off x="3401568" y="1143000"/>
-            <a:ext cx="1991106" cy="438912"/>
-          </a:xfrm>
-          <a:prstGeom prst="rect">
-            <a:avLst/>
-          </a:prstGeom>
-          <a:noFill/>
-          <a:ln/>
-        </p:spPr>
-        <p:txBody>
-          <a:bodyPr wrap="square" lIns="0" tIns="0" rIns="0" bIns="0" rtlCol="0" anchor="t"/>
-          <a:lstStyle/>
-          <a:p>
-            <a:pPr indent="0" marL="0">
-              <a:buNone/>
-            </a:pPr>
-            <a:r>
               <a:rPr lang="en-US" sz="1250" b="1" dirty="0">
                 <a:solidFill>
                   <a:srgbClr val="111111"/>
                 </a:solidFill>
               </a:rPr>
-              <a:t>Dependence near the motif</a:t>
+              <a:t>...as a share of each site’s own total</a:t>
             </a:r>
             <a:endParaRPr lang="en-US" sz="1250" dirty="0"/>
-          </a:p>
-        </p:txBody>
-      </p:sp>
-      <p:sp>
-        <p:nvSpPr>
-          <p:cNvPr id="6" name="s3_dependence-sub-0"/>
-          <p:cNvSpPr txBox="1"/>
-          <p:nvPr/>
-        </p:nvSpPr>
-        <p:spPr>
-          <a:xfrm>
-            <a:off x="3401568" y="1572768"/>
-            <a:ext cx="1991106" cy="310896"/>
-          </a:xfrm>
-          <a:prstGeom prst="rect">
-            <a:avLst/>
-          </a:prstGeom>
-          <a:noFill/>
-          <a:ln/>
-        </p:spPr>
-        <p:txBody>
-          <a:bodyPr wrap="square" lIns="0" tIns="0" rIns="0" bIns="0" rtlCol="0" anchor="t"/>
-          <a:lstStyle/>
-          <a:p>
-            <a:pPr indent="0" marL="0">
-              <a:buNone/>
-            </a:pPr>
-            <a:r>
-              <a:rPr lang="en-US" sz="950" dirty="0">
-                <a:solidFill>
-                  <a:srgbClr val="595959"/>
-                </a:solidFill>
-              </a:rPr>
-              <a:t>loss summed over windows within ±85 bp</a:t>
-            </a:r>
-            <a:endParaRPr lang="en-US" sz="950" dirty="0"/>
           </a:p>
         </p:txBody>
       </p:sp>
       <p:pic>
         <p:nvPicPr>
-          <p:cNvPr id="7" name="Image 1" descr="/Users/z5162865/WongLab/AlphaGenome_Ap1/Analysis/slide_figures/panels/s3_dependence_c0_r0.png">    </p:cNvPr>
+          <p:cNvPr id="6" name="Image 1" descr="/Users/z5162865/WongLab/AlphaGenome_Ap1/Analysis/slide_figures/panels/s12_profile_shape.png">    </p:cNvPr>
           <p:cNvPicPr>
             <a:picLocks noChangeAspect="1"/>
           </p:cNvPicPr>
@@ -3265,8 +3229,8 @@
         </p:blipFill>
         <p:spPr>
           <a:xfrm>
-            <a:off x="3401568" y="2395936"/>
-            <a:ext cx="1991106" cy="1810096"/>
+            <a:off x="502920" y="3601896"/>
+            <a:ext cx="2743200" cy="1455576"/>
           </a:xfrm>
           <a:prstGeom prst="rect">
             <a:avLst/>
@@ -3275,13 +3239,49 @@
       </p:pic>
       <p:sp>
         <p:nvSpPr>
-          <p:cNvPr id="8" name="s3_dependence-title-1"/>
+          <p:cNvPr id="7" name="prof-cap"/>
           <p:cNvSpPr txBox="1"/>
           <p:nvPr/>
         </p:nvSpPr>
         <p:spPr>
           <a:xfrm>
-            <a:off x="5465826" y="1143000"/>
+            <a:off x="502920" y="5230368"/>
+            <a:ext cx="2743200" cy="548640"/>
+          </a:xfrm>
+          <a:prstGeom prst="rect">
+            <a:avLst/>
+          </a:prstGeom>
+          <a:noFill/>
+          <a:ln/>
+        </p:spPr>
+        <p:txBody>
+          <a:bodyPr wrap="square" lIns="0" tIns="0" rIns="0" bIns="0" rtlCol="0" anchor="ctr"/>
+          <a:lstStyle/>
+          <a:p>
+            <a:pPr indent="0" marL="0">
+              <a:buNone/>
+            </a:pPr>
+            <a:r>
+              <a:rPr lang="en-US" sz="850" dirty="0">
+                <a:solidFill>
+                  <a:srgbClr val="595959"/>
+                </a:solidFill>
+              </a:rPr>
+              <a:t>median over sites, smoothed over 3 windows; gold band = the ±15 bp core. Stable sites peak highest at the core; Age Up, Exercise Down and Dynamic carry 1.2–1.3× more of their total beyond ±85 bp.</a:t>
+            </a:r>
+            <a:endParaRPr lang="en-US" sz="850" dirty="0"/>
+          </a:p>
+        </p:txBody>
+      </p:sp>
+      <p:sp>
+        <p:nvSpPr>
+          <p:cNvPr id="8" name="s3_dependence-title-0"/>
+          <p:cNvSpPr txBox="1"/>
+          <p:nvPr/>
+        </p:nvSpPr>
+        <p:spPr>
+          <a:xfrm>
+            <a:off x="3401568" y="1143000"/>
             <a:ext cx="1991106" cy="438912"/>
           </a:xfrm>
           <a:prstGeom prst="rect">
@@ -3303,7 +3303,7 @@
                   <a:srgbClr val="111111"/>
                 </a:solidFill>
               </a:rPr>
-              <a:t>Dependence out in the context</a:t>
+              <a:t>Dependence near the motif</a:t>
             </a:r>
             <a:endParaRPr lang="en-US" sz="1250" dirty="0"/>
           </a:p>
@@ -3311,13 +3311,13 @@
       </p:sp>
       <p:sp>
         <p:nvSpPr>
-          <p:cNvPr id="9" name="s3_dependence-sub-1"/>
+          <p:cNvPr id="9" name="s3_dependence-sub-0"/>
           <p:cNvSpPr txBox="1"/>
           <p:nvPr/>
         </p:nvSpPr>
         <p:spPr>
           <a:xfrm>
-            <a:off x="5465826" y="1572768"/>
+            <a:off x="3401568" y="1572768"/>
             <a:ext cx="1991106" cy="310896"/>
           </a:xfrm>
           <a:prstGeom prst="rect">
@@ -3339,7 +3339,7 @@
                   <a:srgbClr val="595959"/>
                 </a:solidFill>
               </a:rPr>
-              <a:t>loss summed over windows beyond that</a:t>
+              <a:t>loss summed over windows within ±85 bp</a:t>
             </a:r>
             <a:endParaRPr lang="en-US" sz="950" dirty="0"/>
           </a:p>
@@ -3347,7 +3347,7 @@
       </p:sp>
       <p:pic>
         <p:nvPicPr>
-          <p:cNvPr id="10" name="Image 2" descr="/Users/z5162865/WongLab/AlphaGenome_Ap1/Analysis/slide_figures/panels/s3_dependence_c1_r0.png">    </p:cNvPr>
+          <p:cNvPr id="10" name="Image 2" descr="/Users/z5162865/WongLab/AlphaGenome_Ap1/Analysis/slide_figures/panels/s3_dependence_c0_r0.png">    </p:cNvPr>
           <p:cNvPicPr>
             <a:picLocks noChangeAspect="1"/>
           </p:cNvPicPr>
@@ -3361,7 +3361,7 @@
         </p:blipFill>
         <p:spPr>
           <a:xfrm>
-            <a:off x="5465826" y="2395936"/>
+            <a:off x="3401568" y="2395936"/>
             <a:ext cx="1991106" cy="1810096"/>
           </a:xfrm>
           <a:prstGeom prst="rect">
@@ -3371,13 +3371,13 @@
       </p:pic>
       <p:sp>
         <p:nvSpPr>
-          <p:cNvPr id="11" name="s3_dependence-title-2"/>
+          <p:cNvPr id="11" name="s3_dependence-title-1"/>
           <p:cNvSpPr txBox="1"/>
           <p:nvPr/>
         </p:nvSpPr>
         <p:spPr>
           <a:xfrm>
-            <a:off x="7530084" y="1143000"/>
+            <a:off x="5465826" y="1143000"/>
             <a:ext cx="1991106" cy="438912"/>
           </a:xfrm>
           <a:prstGeom prst="rect">
@@ -3399,7 +3399,7 @@
                   <a:srgbClr val="111111"/>
                 </a:solidFill>
               </a:rPr>
-              <a:t>Spread along the element</a:t>
+              <a:t>Dependence out in the context</a:t>
             </a:r>
             <a:endParaRPr lang="en-US" sz="1250" dirty="0"/>
           </a:p>
@@ -3407,13 +3407,13 @@
       </p:sp>
       <p:sp>
         <p:nvSpPr>
-          <p:cNvPr id="12" name="s3_dependence-sub-2"/>
+          <p:cNvPr id="12" name="s3_dependence-sub-1"/>
           <p:cNvSpPr txBox="1"/>
           <p:nvPr/>
         </p:nvSpPr>
         <p:spPr>
           <a:xfrm>
-            <a:off x="7530084" y="1572768"/>
+            <a:off x="5465826" y="1572768"/>
             <a:ext cx="1991106" cy="310896"/>
           </a:xfrm>
           <a:prstGeom prst="rect">
@@ -3435,7 +3435,7 @@
                   <a:srgbClr val="595959"/>
                 </a:solidFill>
               </a:rPr>
-              <a:t>SD of window position, weighted by loss</a:t>
+              <a:t>loss summed over windows beyond that</a:t>
             </a:r>
             <a:endParaRPr lang="en-US" sz="950" dirty="0"/>
           </a:p>
@@ -3443,7 +3443,7 @@
       </p:sp>
       <p:pic>
         <p:nvPicPr>
-          <p:cNvPr id="13" name="Image 3" descr="/Users/z5162865/WongLab/AlphaGenome_Ap1/Analysis/slide_figures/panels/s3_dependence_c2_r0.png">    </p:cNvPr>
+          <p:cNvPr id="13" name="Image 3" descr="/Users/z5162865/WongLab/AlphaGenome_Ap1/Analysis/slide_figures/panels/s3_dependence_c1_r0.png">    </p:cNvPr>
           <p:cNvPicPr>
             <a:picLocks noChangeAspect="1"/>
           </p:cNvPicPr>
@@ -3457,7 +3457,7 @@
         </p:blipFill>
         <p:spPr>
           <a:xfrm>
-            <a:off x="7530084" y="2395936"/>
+            <a:off x="5465826" y="2395936"/>
             <a:ext cx="1991106" cy="1810096"/>
           </a:xfrm>
           <a:prstGeom prst="rect">
@@ -3467,13 +3467,13 @@
       </p:pic>
       <p:sp>
         <p:nvSpPr>
-          <p:cNvPr id="14" name="s3_dependence-title-3"/>
+          <p:cNvPr id="14" name="s3_dependence-title-2"/>
           <p:cNvSpPr txBox="1"/>
           <p:nvPr/>
         </p:nvSpPr>
         <p:spPr>
           <a:xfrm>
-            <a:off x="9594342" y="1143000"/>
+            <a:off x="7530084" y="1143000"/>
             <a:ext cx="1991106" cy="438912"/>
           </a:xfrm>
           <a:prstGeom prst="rect">
@@ -3495,7 +3495,7 @@
                   <a:srgbClr val="111111"/>
                 </a:solidFill>
               </a:rPr>
-              <a:t>Depth of the single best base</a:t>
+              <a:t>Spread along the element</a:t>
             </a:r>
             <a:endParaRPr lang="en-US" sz="1250" dirty="0"/>
           </a:p>
@@ -3503,13 +3503,13 @@
       </p:sp>
       <p:sp>
         <p:nvSpPr>
-          <p:cNvPr id="15" name="s3_dependence-sub-3"/>
+          <p:cNvPr id="15" name="s3_dependence-sub-2"/>
           <p:cNvSpPr txBox="1"/>
           <p:nvPr/>
         </p:nvSpPr>
         <p:spPr>
           <a:xfrm>
-            <a:off x="9594342" y="1572768"/>
+            <a:off x="7530084" y="1572768"/>
             <a:ext cx="1991106" cy="310896"/>
           </a:xfrm>
           <a:prstGeom prst="rect">
@@ -3531,7 +3531,7 @@
                   <a:srgbClr val="595959"/>
                 </a:solidFill>
               </a:rPr>
-              <a:t>largest effect of any one base change, ±30 bp</a:t>
+              <a:t>SD of window position, weighted by loss</a:t>
             </a:r>
             <a:endParaRPr lang="en-US" sz="950" dirty="0"/>
           </a:p>
@@ -3539,7 +3539,7 @@
       </p:sp>
       <p:pic>
         <p:nvPicPr>
-          <p:cNvPr id="16" name="Image 4" descr="/Users/z5162865/WongLab/AlphaGenome_Ap1/Analysis/slide_figures/panels/s3_dependence_c3_r0.png">    </p:cNvPr>
+          <p:cNvPr id="16" name="Image 4" descr="/Users/z5162865/WongLab/AlphaGenome_Ap1/Analysis/slide_figures/panels/s3_dependence_c2_r0.png">    </p:cNvPr>
           <p:cNvPicPr>
             <a:picLocks noChangeAspect="1"/>
           </p:cNvPicPr>
@@ -3553,6 +3553,102 @@
         </p:blipFill>
         <p:spPr>
           <a:xfrm>
+            <a:off x="7530084" y="2395936"/>
+            <a:ext cx="1991106" cy="1810096"/>
+          </a:xfrm>
+          <a:prstGeom prst="rect">
+            <a:avLst/>
+          </a:prstGeom>
+        </p:spPr>
+      </p:pic>
+      <p:sp>
+        <p:nvSpPr>
+          <p:cNvPr id="17" name="s3_dependence-title-3"/>
+          <p:cNvSpPr txBox="1"/>
+          <p:nvPr/>
+        </p:nvSpPr>
+        <p:spPr>
+          <a:xfrm>
+            <a:off x="9594342" y="1143000"/>
+            <a:ext cx="1991106" cy="438912"/>
+          </a:xfrm>
+          <a:prstGeom prst="rect">
+            <a:avLst/>
+          </a:prstGeom>
+          <a:noFill/>
+          <a:ln/>
+        </p:spPr>
+        <p:txBody>
+          <a:bodyPr wrap="square" lIns="0" tIns="0" rIns="0" bIns="0" rtlCol="0" anchor="t"/>
+          <a:lstStyle/>
+          <a:p>
+            <a:pPr indent="0" marL="0">
+              <a:buNone/>
+            </a:pPr>
+            <a:r>
+              <a:rPr lang="en-US" sz="1250" b="1" dirty="0">
+                <a:solidFill>
+                  <a:srgbClr val="111111"/>
+                </a:solidFill>
+              </a:rPr>
+              <a:t>Depth of the single best base</a:t>
+            </a:r>
+            <a:endParaRPr lang="en-US" sz="1250" dirty="0"/>
+          </a:p>
+        </p:txBody>
+      </p:sp>
+      <p:sp>
+        <p:nvSpPr>
+          <p:cNvPr id="18" name="s3_dependence-sub-3"/>
+          <p:cNvSpPr txBox="1"/>
+          <p:nvPr/>
+        </p:nvSpPr>
+        <p:spPr>
+          <a:xfrm>
+            <a:off x="9594342" y="1572768"/>
+            <a:ext cx="1991106" cy="310896"/>
+          </a:xfrm>
+          <a:prstGeom prst="rect">
+            <a:avLst/>
+          </a:prstGeom>
+          <a:noFill/>
+          <a:ln/>
+        </p:spPr>
+        <p:txBody>
+          <a:bodyPr wrap="square" lIns="0" tIns="0" rIns="0" bIns="0" rtlCol="0" anchor="t"/>
+          <a:lstStyle/>
+          <a:p>
+            <a:pPr indent="0" marL="0">
+              <a:buNone/>
+            </a:pPr>
+            <a:r>
+              <a:rPr lang="en-US" sz="950" dirty="0">
+                <a:solidFill>
+                  <a:srgbClr val="595959"/>
+                </a:solidFill>
+              </a:rPr>
+              <a:t>largest effect of any one base change, ±30 bp</a:t>
+            </a:r>
+            <a:endParaRPr lang="en-US" sz="950" dirty="0"/>
+          </a:p>
+        </p:txBody>
+      </p:sp>
+      <p:pic>
+        <p:nvPicPr>
+          <p:cNvPr id="19" name="Image 5" descr="/Users/z5162865/WongLab/AlphaGenome_Ap1/Analysis/slide_figures/panels/s3_dependence_c3_r0.png">    </p:cNvPr>
+          <p:cNvPicPr>
+            <a:picLocks noChangeAspect="1"/>
+          </p:cNvPicPr>
+          <p:nvPr/>
+        </p:nvPicPr>
+        <p:blipFill>
+          <a:blip r:embed="rId6"/>
+          <a:stretch>
+            <a:fillRect/>
+          </a:stretch>
+        </p:blipFill>
+        <p:spPr>
+          <a:xfrm>
             <a:off x="9594342" y="2395936"/>
             <a:ext cx="1991106" cy="1810096"/>
           </a:xfrm>
@@ -3563,7 +3659,7 @@
       </p:pic>
       <p:sp>
         <p:nvSpPr>
-          <p:cNvPr id="17" name="s3_dependence-dot-0"/>
+          <p:cNvPr id="20" name="s3_dependence-dot-0"/>
           <p:cNvSpPr/>
           <p:nvPr/>
         </p:nvSpPr>
@@ -3588,7 +3684,7 @@
       </p:sp>
       <p:sp>
         <p:nvSpPr>
-          <p:cNvPr id="18" name="s3_dependence-leg-0"/>
+          <p:cNvPr id="21" name="s3_dependence-leg-0"/>
           <p:cNvSpPr txBox="1"/>
           <p:nvPr/>
         </p:nvSpPr>
@@ -3624,7 +3720,7 @@
       </p:sp>
       <p:sp>
         <p:nvSpPr>
-          <p:cNvPr id="19" name="s3_dependence-dot-1"/>
+          <p:cNvPr id="22" name="s3_dependence-dot-1"/>
           <p:cNvSpPr/>
           <p:nvPr/>
         </p:nvSpPr>
@@ -3649,7 +3745,7 @@
       </p:sp>
       <p:sp>
         <p:nvSpPr>
-          <p:cNvPr id="20" name="s3_dependence-leg-1"/>
+          <p:cNvPr id="23" name="s3_dependence-leg-1"/>
           <p:cNvSpPr txBox="1"/>
           <p:nvPr/>
         </p:nvSpPr>
@@ -3685,7 +3781,7 @@
       </p:sp>
       <p:sp>
         <p:nvSpPr>
-          <p:cNvPr id="21" name="s3_dependence-dot-2"/>
+          <p:cNvPr id="24" name="s3_dependence-dot-2"/>
           <p:cNvSpPr/>
           <p:nvPr/>
         </p:nvSpPr>
@@ -3710,7 +3806,7 @@
       </p:sp>
       <p:sp>
         <p:nvSpPr>
-          <p:cNvPr id="22" name="s3_dependence-leg-2"/>
+          <p:cNvPr id="25" name="s3_dependence-leg-2"/>
           <p:cNvSpPr txBox="1"/>
           <p:nvPr/>
         </p:nvSpPr>
@@ -3746,7 +3842,7 @@
       </p:sp>
       <p:sp>
         <p:nvSpPr>
-          <p:cNvPr id="23" name="s3_dependence-dot-3"/>
+          <p:cNvPr id="26" name="s3_dependence-dot-3"/>
           <p:cNvSpPr/>
           <p:nvPr/>
         </p:nvSpPr>
@@ -3771,7 +3867,7 @@
       </p:sp>
       <p:sp>
         <p:nvSpPr>
-          <p:cNvPr id="24" name="s3_dependence-leg-3"/>
+          <p:cNvPr id="27" name="s3_dependence-leg-3"/>
           <p:cNvSpPr txBox="1"/>
           <p:nvPr/>
         </p:nvSpPr>
@@ -3807,7 +3903,7 @@
       </p:sp>
       <p:sp>
         <p:nvSpPr>
-          <p:cNvPr id="25" name="s3_dependence-dot-4"/>
+          <p:cNvPr id="28" name="s3_dependence-dot-4"/>
           <p:cNvSpPr/>
           <p:nvPr/>
         </p:nvSpPr>
@@ -3832,7 +3928,7 @@
       </p:sp>
       <p:sp>
         <p:nvSpPr>
-          <p:cNvPr id="26" name="s3_dependence-leg-4"/>
+          <p:cNvPr id="29" name="s3_dependence-leg-4"/>
           <p:cNvSpPr txBox="1"/>
           <p:nvPr/>
         </p:nvSpPr>
@@ -3868,7 +3964,7 @@
       </p:sp>
       <p:sp>
         <p:nvSpPr>
-          <p:cNvPr id="27" name="s3_dependence-dot-5"/>
+          <p:cNvPr id="30" name="s3_dependence-dot-5"/>
           <p:cNvSpPr/>
           <p:nvPr/>
         </p:nvSpPr>
@@ -3893,7 +3989,7 @@
       </p:sp>
       <p:sp>
         <p:nvSpPr>
-          <p:cNvPr id="28" name="s3_dependence-leg-5"/>
+          <p:cNvPr id="31" name="s3_dependence-leg-5"/>
           <p:cNvSpPr txBox="1"/>
           <p:nvPr/>
         </p:nvSpPr>
@@ -3929,7 +4025,7 @@
       </p:sp>
       <p:sp>
         <p:nvSpPr>
-          <p:cNvPr id="29" name="s3_dependence-key"/>
+          <p:cNvPr id="32" name="s3_dependence-key"/>
           <p:cNvSpPr txBox="1"/>
           <p:nvPr/>
         </p:nvSpPr>
@@ -3965,7 +4061,7 @@
       </p:sp>
       <p:sp>
         <p:nvSpPr>
-          <p:cNvPr id="30" name="Text 0"/>
+          <p:cNvPr id="33" name="Text 0"/>
           <p:cNvSpPr/>
           <p:nvPr>
             <p:ph idx="101" type="body" hasCustomPrompt="1"/>
@@ -4006,7 +4102,7 @@
                   <a:srgbClr val="111111"/>
                 </a:solidFill>
               </a:rPr>
-              <a:t>the same shift in every class and on all three measures — strongest in Age Up and Exercise Down, absent only in Age Down</a:t>
+              <a:t>Stable sites peak highest at the core; Age Up, Exercise Down and Dynamic carry more of their dependence out in the flanks — Age Down simply has less of everything</a:t>
             </a:r>
             <a:endParaRPr lang="en-US" sz="1500" dirty="0"/>
           </a:p>
@@ -7412,7 +7508,7 @@
                   <a:schemeClr val="tx1"/>
                 </a:solidFill>
               </a:rPr>
-              <a:t>Responsive sites lose less to every edit of their element</a:t>
+              <a:t>The same thing at one real element</a:t>
             </a:r>
             <a:endParaRPr lang="en-US" sz="2800" dirty="0"/>
           </a:p>
@@ -7420,79 +7516,43 @@
       </p:sp>
       <p:sp>
         <p:nvSpPr>
-          <p:cNvPr id="3" name="s2_matched_null-title-0"/>
+          <p:cNvPr id="3" name="ml-intro"/>
           <p:cNvSpPr txBox="1"/>
           <p:nvPr/>
         </p:nvSpPr>
         <p:spPr>
           <a:xfrm>
-            <a:off x="612648" y="1143000"/>
-            <a:ext cx="2688336" cy="438912"/>
-          </a:xfrm>
-          <a:prstGeom prst="rect">
-            <a:avLst/>
-          </a:prstGeom>
-          <a:noFill/>
-          <a:ln/>
-        </p:spPr>
-        <p:txBody>
-          <a:bodyPr wrap="square" lIns="0" tIns="0" rIns="0" bIns="0" rtlCol="0" anchor="t"/>
+            <a:off x="731520" y="1024128"/>
+            <a:ext cx="10881360" cy="475488"/>
+          </a:xfrm>
+          <a:prstGeom prst="rect">
+            <a:avLst/>
+          </a:prstGeom>
+          <a:noFill/>
+          <a:ln/>
+        </p:spPr>
+        <p:txBody>
+          <a:bodyPr wrap="square" lIns="0" tIns="0" rIns="0" bIns="0" rtlCol="0" anchor="ctr"/>
           <a:lstStyle/>
           <a:p>
             <a:pPr indent="0" marL="0">
               <a:buNone/>
             </a:pPr>
             <a:r>
-              <a:rPr lang="en-US" sz="1250" b="1" dirty="0">
-                <a:solidFill>
-                  <a:srgbClr val="111111"/>
-                </a:solidFill>
-              </a:rPr>
-              <a:t>Replace the 11 bp motif</a:t>
-            </a:r>
-            <a:endParaRPr lang="en-US" sz="1250" dirty="0"/>
-          </a:p>
-        </p:txBody>
-      </p:sp>
-      <p:sp>
-        <p:nvSpPr>
-          <p:cNvPr id="4" name="s2_matched_null-sub-0"/>
-          <p:cNvSpPr txBox="1"/>
-          <p:nvPr/>
-        </p:nvSpPr>
-        <p:spPr>
-          <a:xfrm>
-            <a:off x="612648" y="1572768"/>
-            <a:ext cx="2688336" cy="310896"/>
-          </a:xfrm>
-          <a:prstGeom prst="rect">
-            <a:avLst/>
-          </a:prstGeom>
-          <a:noFill/>
-          <a:ln/>
-        </p:spPr>
-        <p:txBody>
-          <a:bodyPr wrap="square" lIns="0" tIns="0" rIns="0" bIns="0" rtlCol="0" anchor="t"/>
-          <a:lstStyle/>
-          <a:p>
-            <a:pPr indent="0" marL="0">
-              <a:buNone/>
-            </a:pPr>
-            <a:r>
-              <a:rPr lang="en-US" sz="950" dirty="0">
+              <a:rPr lang="en-US" sz="1150" dirty="0">
                 <a:solidFill>
                   <a:srgbClr val="595959"/>
                 </a:solidFill>
               </a:rPr>
-              <a:t>the motif alone</a:t>
-            </a:r>
-            <a:endParaRPr lang="en-US" sz="950" dirty="0"/>
+              <a:t>Every 10 bp window from −300 to +300 bp is replaced by random bases in turn, three times, and the bar is what the prediction loses over the surrounding 170 bp. Gold is the called AP-1 motif. The lane below is every other footprinted motif TOBIAS calls in this element, which is what the windows are read against.</a:t>
+            </a:r>
+            <a:endParaRPr lang="en-US" sz="1150" dirty="0"/>
           </a:p>
         </p:txBody>
       </p:sp>
       <p:pic>
         <p:nvPicPr>
-          <p:cNvPr id="5" name="Image 0" descr="/Users/z5162865/WongLab/AlphaGenome_Ap1/Analysis/slide_figures/panels/s2_matched_null_c0_r0.png">    </p:cNvPr>
+          <p:cNvPr id="4" name="Image 0" descr="/Users/z5162865/WongLab/AlphaGenome_Ap1/Analysis/slide_figures/panels/s11_method_locus.png">    </p:cNvPr>
           <p:cNvPicPr>
             <a:picLocks noChangeAspect="1"/>
           </p:cNvPicPr>
@@ -7506,8 +7566,8 @@
         </p:blipFill>
         <p:spPr>
           <a:xfrm>
-            <a:off x="612648" y="2079013"/>
-            <a:ext cx="2688336" cy="2443942"/>
+            <a:off x="502920" y="1896618"/>
+            <a:ext cx="11155680" cy="2881884"/>
           </a:xfrm>
           <a:prstGeom prst="rect">
             <a:avLst/>
@@ -7516,348 +7576,35 @@
       </p:pic>
       <p:sp>
         <p:nvSpPr>
-          <p:cNvPr id="6" name="s2_matched_null-title-1"/>
+          <p:cNvPr id="5" name="ml-cap"/>
           <p:cNvSpPr txBox="1"/>
           <p:nvPr/>
         </p:nvSpPr>
         <p:spPr>
           <a:xfrm>
-            <a:off x="3374136" y="1143000"/>
-            <a:ext cx="2688336" cy="438912"/>
-          </a:xfrm>
-          <a:prstGeom prst="rect">
-            <a:avLst/>
-          </a:prstGeom>
-          <a:noFill/>
-          <a:ln/>
-        </p:spPr>
-        <p:txBody>
-          <a:bodyPr wrap="square" lIns="0" tIns="0" rIns="0" bIns="0" rtlCol="0" anchor="t"/>
+            <a:off x="731520" y="5074920"/>
+            <a:ext cx="10881360" cy="274320"/>
+          </a:xfrm>
+          <a:prstGeom prst="rect">
+            <a:avLst/>
+          </a:prstGeom>
+          <a:noFill/>
+          <a:ln/>
+        </p:spPr>
+        <p:txBody>
+          <a:bodyPr wrap="square" lIns="0" tIns="0" rIns="0" bIns="0" rtlCol="0" anchor="ctr"/>
           <a:lstStyle/>
           <a:p>
             <a:pPr indent="0" marL="0">
               <a:buNone/>
             </a:pPr>
             <a:r>
-              <a:rPr lang="en-US" sz="1250" b="1" dirty="0">
+              <a:rPr lang="en-US" sz="1050" dirty="0">
                 <a:solidFill>
                   <a:srgbClr val="111111"/>
                 </a:solidFill>
               </a:rPr>
-              <a:t>Replace the 170 bp element</a:t>
-            </a:r>
-            <a:endParaRPr lang="en-US" sz="1250" dirty="0"/>
-          </a:p>
-        </p:txBody>
-      </p:sp>
-      <p:sp>
-        <p:nvSpPr>
-          <p:cNvPr id="7" name="s2_matched_null-sub-1"/>
-          <p:cNvSpPr txBox="1"/>
-          <p:nvPr/>
-        </p:nvSpPr>
-        <p:spPr>
-          <a:xfrm>
-            <a:off x="3374136" y="1572768"/>
-            <a:ext cx="2688336" cy="310896"/>
-          </a:xfrm>
-          <a:prstGeom prst="rect">
-            <a:avLst/>
-          </a:prstGeom>
-          <a:noFill/>
-          <a:ln/>
-        </p:spPr>
-        <p:txBody>
-          <a:bodyPr wrap="square" lIns="0" tIns="0" rIns="0" bIns="0" rtlCol="0" anchor="t"/>
-          <a:lstStyle/>
-          <a:p>
-            <a:pPr indent="0" marL="0">
-              <a:buNone/>
-            </a:pPr>
-            <a:r>
-              <a:rPr lang="en-US" sz="950" dirty="0">
-                <a:solidFill>
-                  <a:srgbClr val="595959"/>
-                </a:solidFill>
-              </a:rPr>
-              <a:t>the element around it</a:t>
-            </a:r>
-            <a:endParaRPr lang="en-US" sz="950" dirty="0"/>
-          </a:p>
-        </p:txBody>
-      </p:sp>
-      <p:pic>
-        <p:nvPicPr>
-          <p:cNvPr id="8" name="Image 1" descr="/Users/z5162865/WongLab/AlphaGenome_Ap1/Analysis/slide_figures/panels/s2_matched_null_c1_r0.png">    </p:cNvPr>
-          <p:cNvPicPr>
-            <a:picLocks noChangeAspect="1"/>
-          </p:cNvPicPr>
-          <p:nvPr/>
-        </p:nvPicPr>
-        <p:blipFill>
-          <a:blip r:embed="rId2"/>
-          <a:stretch>
-            <a:fillRect/>
-          </a:stretch>
-        </p:blipFill>
-        <p:spPr>
-          <a:xfrm>
-            <a:off x="3374136" y="2079013"/>
-            <a:ext cx="2688336" cy="2443942"/>
-          </a:xfrm>
-          <a:prstGeom prst="rect">
-            <a:avLst/>
-          </a:prstGeom>
-        </p:spPr>
-      </p:pic>
-      <p:sp>
-        <p:nvSpPr>
-          <p:cNvPr id="9" name="s2_matched_null-title-2"/>
-          <p:cNvSpPr txBox="1"/>
-          <p:nvPr/>
-        </p:nvSpPr>
-        <p:spPr>
-          <a:xfrm>
-            <a:off x="6135624" y="1143000"/>
-            <a:ext cx="2688336" cy="438912"/>
-          </a:xfrm>
-          <a:prstGeom prst="rect">
-            <a:avLst/>
-          </a:prstGeom>
-          <a:noFill/>
-          <a:ln/>
-        </p:spPr>
-        <p:txBody>
-          <a:bodyPr wrap="square" lIns="0" tIns="0" rIns="0" bIns="0" rtlCol="0" anchor="t"/>
-          <a:lstStyle/>
-          <a:p>
-            <a:pPr indent="0" marL="0">
-              <a:buNone/>
-            </a:pPr>
-            <a:r>
-              <a:rPr lang="en-US" sz="1250" b="1" dirty="0">
-                <a:solidFill>
-                  <a:srgbClr val="111111"/>
-                </a:solidFill>
-              </a:rPr>
-              <a:t>Replace the whole peak</a:t>
-            </a:r>
-            <a:endParaRPr lang="en-US" sz="1250" dirty="0"/>
-          </a:p>
-        </p:txBody>
-      </p:sp>
-      <p:sp>
-        <p:nvSpPr>
-          <p:cNvPr id="10" name="s2_matched_null-sub-2"/>
-          <p:cNvSpPr txBox="1"/>
-          <p:nvPr/>
-        </p:nvSpPr>
-        <p:spPr>
-          <a:xfrm>
-            <a:off x="6135624" y="1572768"/>
-            <a:ext cx="2688336" cy="310896"/>
-          </a:xfrm>
-          <a:prstGeom prst="rect">
-            <a:avLst/>
-          </a:prstGeom>
-          <a:noFill/>
-          <a:ln/>
-        </p:spPr>
-        <p:txBody>
-          <a:bodyPr wrap="square" lIns="0" tIns="0" rIns="0" bIns="0" rtlCol="0" anchor="t"/>
-          <a:lstStyle/>
-          <a:p>
-            <a:pPr indent="0" marL="0">
-              <a:buNone/>
-            </a:pPr>
-            <a:r>
-              <a:rPr lang="en-US" sz="950" dirty="0">
-                <a:solidFill>
-                  <a:srgbClr val="595959"/>
-                </a:solidFill>
-              </a:rPr>
-              <a:t>everything, read over the peak</a:t>
-            </a:r>
-            <a:endParaRPr lang="en-US" sz="950" dirty="0"/>
-          </a:p>
-        </p:txBody>
-      </p:sp>
-      <p:pic>
-        <p:nvPicPr>
-          <p:cNvPr id="11" name="Image 2" descr="/Users/z5162865/WongLab/AlphaGenome_Ap1/Analysis/slide_figures/panels/s2_matched_null_c2_r0.png">    </p:cNvPr>
-          <p:cNvPicPr>
-            <a:picLocks noChangeAspect="1"/>
-          </p:cNvPicPr>
-          <p:nvPr/>
-        </p:nvPicPr>
-        <p:blipFill>
-          <a:blip r:embed="rId3"/>
-          <a:stretch>
-            <a:fillRect/>
-          </a:stretch>
-        </p:blipFill>
-        <p:spPr>
-          <a:xfrm>
-            <a:off x="6135624" y="2079013"/>
-            <a:ext cx="2688336" cy="2443942"/>
-          </a:xfrm>
-          <a:prstGeom prst="rect">
-            <a:avLst/>
-          </a:prstGeom>
-        </p:spPr>
-      </p:pic>
-      <p:sp>
-        <p:nvSpPr>
-          <p:cNvPr id="12" name="s2_matched_null-title-3"/>
-          <p:cNvSpPr txBox="1"/>
-          <p:nvPr/>
-        </p:nvSpPr>
-        <p:spPr>
-          <a:xfrm>
-            <a:off x="8897112" y="1143000"/>
-            <a:ext cx="2688336" cy="438912"/>
-          </a:xfrm>
-          <a:prstGeom prst="rect">
-            <a:avLst/>
-          </a:prstGeom>
-          <a:noFill/>
-          <a:ln/>
-        </p:spPr>
-        <p:txBody>
-          <a:bodyPr wrap="square" lIns="0" tIns="0" rIns="0" bIns="0" rtlCol="0" anchor="t"/>
-          <a:lstStyle/>
-          <a:p>
-            <a:pPr indent="0" marL="0">
-              <a:buNone/>
-            </a:pPr>
-            <a:r>
-              <a:rPr lang="en-US" sz="1250" b="1" dirty="0">
-                <a:solidFill>
-                  <a:srgbClr val="111111"/>
-                </a:solidFill>
-              </a:rPr>
-              <a:t>Edit 300 bp away</a:t>
-            </a:r>
-            <a:endParaRPr lang="en-US" sz="1250" dirty="0"/>
-          </a:p>
-        </p:txBody>
-      </p:sp>
-      <p:sp>
-        <p:nvSpPr>
-          <p:cNvPr id="13" name="s2_matched_null-sub-3"/>
-          <p:cNvSpPr txBox="1"/>
-          <p:nvPr/>
-        </p:nvSpPr>
-        <p:spPr>
-          <a:xfrm>
-            <a:off x="8897112" y="1572768"/>
-            <a:ext cx="2688336" cy="310896"/>
-          </a:xfrm>
-          <a:prstGeom prst="rect">
-            <a:avLst/>
-          </a:prstGeom>
-          <a:noFill/>
-          <a:ln/>
-        </p:spPr>
-        <p:txBody>
-          <a:bodyPr wrap="square" lIns="0" tIns="0" rIns="0" bIns="0" rtlCol="0" anchor="t"/>
-          <a:lstStyle/>
-          <a:p>
-            <a:pPr indent="0" marL="0">
-              <a:buNone/>
-            </a:pPr>
-            <a:r>
-              <a:rPr lang="en-US" sz="950" dirty="0">
-                <a:solidFill>
-                  <a:srgbClr val="595959"/>
-                </a:solidFill>
-              </a:rPr>
-              <a:t>the control: nothing at stake</a:t>
-            </a:r>
-            <a:endParaRPr lang="en-US" sz="950" dirty="0"/>
-          </a:p>
-        </p:txBody>
-      </p:sp>
-      <p:pic>
-        <p:nvPicPr>
-          <p:cNvPr id="14" name="Image 3" descr="/Users/z5162865/WongLab/AlphaGenome_Ap1/Analysis/slide_figures/panels/s2_matched_null_c3_r0.png">    </p:cNvPr>
-          <p:cNvPicPr>
-            <a:picLocks noChangeAspect="1"/>
-          </p:cNvPicPr>
-          <p:nvPr/>
-        </p:nvPicPr>
-        <p:blipFill>
-          <a:blip r:embed="rId4"/>
-          <a:stretch>
-            <a:fillRect/>
-          </a:stretch>
-        </p:blipFill>
-        <p:spPr>
-          <a:xfrm>
-            <a:off x="8897112" y="2079013"/>
-            <a:ext cx="2688336" cy="2443942"/>
-          </a:xfrm>
-          <a:prstGeom prst="rect">
-            <a:avLst/>
-          </a:prstGeom>
-        </p:spPr>
-      </p:pic>
-      <p:sp>
-        <p:nvSpPr>
-          <p:cNvPr id="15" name="s2_matched_null-dot-0"/>
-          <p:cNvSpPr/>
-          <p:nvPr/>
-        </p:nvSpPr>
-        <p:spPr>
-          <a:xfrm>
-            <a:off x="502920" y="4914900"/>
-            <a:ext cx="109728" cy="109728"/>
-          </a:xfrm>
-          <a:prstGeom prst="ellipse">
-            <a:avLst/>
-          </a:prstGeom>
-          <a:solidFill>
-            <a:srgbClr val="4F4F4F"/>
-          </a:solidFill>
-          <a:ln w="12700">
-            <a:solidFill>
-              <a:srgbClr val="4F4F4F"/>
-            </a:solidFill>
-            <a:prstDash val="solid"/>
-          </a:ln>
-        </p:spPr>
-      </p:sp>
-      <p:sp>
-        <p:nvSpPr>
-          <p:cNvPr id="16" name="s2_matched_null-leg-0"/>
-          <p:cNvSpPr txBox="1"/>
-          <p:nvPr/>
-        </p:nvSpPr>
-        <p:spPr>
-          <a:xfrm>
-            <a:off x="658368" y="4873752"/>
-            <a:ext cx="1057046" cy="201168"/>
-          </a:xfrm>
-          <a:prstGeom prst="rect">
-            <a:avLst/>
-          </a:prstGeom>
-          <a:noFill/>
-          <a:ln/>
-        </p:spPr>
-        <p:txBody>
-          <a:bodyPr wrap="square" lIns="0" tIns="0" rIns="0" bIns="0" rtlCol="0" anchor="ctr"/>
-          <a:lstStyle/>
-          <a:p>
-            <a:pPr indent="0" marL="0">
-              <a:buNone/>
-            </a:pPr>
-            <a:r>
-              <a:rPr lang="en-US" sz="1050" dirty="0">
-                <a:solidFill>
-                  <a:srgbClr val="111111"/>
-                </a:solidFill>
-              </a:rPr>
-              <a:t>Dynamic (all)</a:t>
+              <a:t>chr14:77,485,003 · a Stable cardiomyocyte AP-1 site · the motif window costs −1.71, the deepest of the 60</a:t>
             </a:r>
             <a:endParaRPr lang="en-US" sz="1050" dirty="0"/>
           </a:p>
@@ -7865,348 +7612,7 @@
       </p:sp>
       <p:sp>
         <p:nvSpPr>
-          <p:cNvPr id="17" name="s2_matched_null-dot-1"/>
-          <p:cNvSpPr/>
-          <p:nvPr/>
-        </p:nvSpPr>
-        <p:spPr>
-          <a:xfrm>
-            <a:off x="1825142" y="4914900"/>
-            <a:ext cx="109728" cy="109728"/>
-          </a:xfrm>
-          <a:prstGeom prst="ellipse">
-            <a:avLst/>
-          </a:prstGeom>
-          <a:solidFill>
-            <a:srgbClr val="C2551C"/>
-          </a:solidFill>
-          <a:ln w="12700">
-            <a:solidFill>
-              <a:srgbClr val="C2551C"/>
-            </a:solidFill>
-            <a:prstDash val="solid"/>
-          </a:ln>
-        </p:spPr>
-      </p:sp>
-      <p:sp>
-        <p:nvSpPr>
-          <p:cNvPr id="18" name="s2_matched_null-leg-1"/>
-          <p:cNvSpPr txBox="1"/>
-          <p:nvPr/>
-        </p:nvSpPr>
-        <p:spPr>
-          <a:xfrm>
-            <a:off x="1980590" y="4873752"/>
-            <a:ext cx="596189" cy="201168"/>
-          </a:xfrm>
-          <a:prstGeom prst="rect">
-            <a:avLst/>
-          </a:prstGeom>
-          <a:noFill/>
-          <a:ln/>
-        </p:spPr>
-        <p:txBody>
-          <a:bodyPr wrap="square" lIns="0" tIns="0" rIns="0" bIns="0" rtlCol="0" anchor="ctr"/>
-          <a:lstStyle/>
-          <a:p>
-            <a:pPr indent="0" marL="0">
-              <a:buNone/>
-            </a:pPr>
-            <a:r>
-              <a:rPr lang="en-US" sz="1050" dirty="0">
-                <a:solidFill>
-                  <a:srgbClr val="111111"/>
-                </a:solidFill>
-              </a:rPr>
-              <a:t>Age Up</a:t>
-            </a:r>
-            <a:endParaRPr lang="en-US" sz="1050" dirty="0"/>
-          </a:p>
-        </p:txBody>
-      </p:sp>
-      <p:sp>
-        <p:nvSpPr>
-          <p:cNvPr id="19" name="s2_matched_null-dot-2"/>
-          <p:cNvSpPr/>
-          <p:nvPr/>
-        </p:nvSpPr>
-        <p:spPr>
-          <a:xfrm>
-            <a:off x="2686507" y="4914900"/>
-            <a:ext cx="109728" cy="109728"/>
-          </a:xfrm>
-          <a:prstGeom prst="ellipse">
-            <a:avLst/>
-          </a:prstGeom>
-          <a:solidFill>
-            <a:srgbClr val="1F6FB2"/>
-          </a:solidFill>
-          <a:ln w="12700">
-            <a:solidFill>
-              <a:srgbClr val="1F6FB2"/>
-            </a:solidFill>
-            <a:prstDash val="solid"/>
-          </a:ln>
-        </p:spPr>
-      </p:sp>
-      <p:sp>
-        <p:nvSpPr>
-          <p:cNvPr id="20" name="s2_matched_null-leg-2"/>
-          <p:cNvSpPr txBox="1"/>
-          <p:nvPr/>
-        </p:nvSpPr>
-        <p:spPr>
-          <a:xfrm>
-            <a:off x="2841955" y="4873752"/>
-            <a:ext cx="727862" cy="201168"/>
-          </a:xfrm>
-          <a:prstGeom prst="rect">
-            <a:avLst/>
-          </a:prstGeom>
-          <a:noFill/>
-          <a:ln/>
-        </p:spPr>
-        <p:txBody>
-          <a:bodyPr wrap="square" lIns="0" tIns="0" rIns="0" bIns="0" rtlCol="0" anchor="ctr"/>
-          <a:lstStyle/>
-          <a:p>
-            <a:pPr indent="0" marL="0">
-              <a:buNone/>
-            </a:pPr>
-            <a:r>
-              <a:rPr lang="en-US" sz="1050" dirty="0">
-                <a:solidFill>
-                  <a:srgbClr val="111111"/>
-                </a:solidFill>
-              </a:rPr>
-              <a:t>Age Down</a:t>
-            </a:r>
-            <a:endParaRPr lang="en-US" sz="1050" dirty="0"/>
-          </a:p>
-        </p:txBody>
-      </p:sp>
-      <p:sp>
-        <p:nvSpPr>
-          <p:cNvPr id="21" name="s2_matched_null-dot-3"/>
-          <p:cNvSpPr/>
-          <p:nvPr/>
-        </p:nvSpPr>
-        <p:spPr>
-          <a:xfrm>
-            <a:off x="3679546" y="4914900"/>
-            <a:ext cx="109728" cy="109728"/>
-          </a:xfrm>
-          <a:prstGeom prst="ellipse">
-            <a:avLst/>
-          </a:prstGeom>
-          <a:solidFill>
-            <a:srgbClr val="2E7D32"/>
-          </a:solidFill>
-          <a:ln w="12700">
-            <a:solidFill>
-              <a:srgbClr val="2E7D32"/>
-            </a:solidFill>
-            <a:prstDash val="solid"/>
-          </a:ln>
-        </p:spPr>
-      </p:sp>
-      <p:sp>
-        <p:nvSpPr>
-          <p:cNvPr id="22" name="s2_matched_null-leg-3"/>
-          <p:cNvSpPr txBox="1"/>
-          <p:nvPr/>
-        </p:nvSpPr>
-        <p:spPr>
-          <a:xfrm>
-            <a:off x="3834994" y="4873752"/>
-            <a:ext cx="925373" cy="201168"/>
-          </a:xfrm>
-          <a:prstGeom prst="rect">
-            <a:avLst/>
-          </a:prstGeom>
-          <a:noFill/>
-          <a:ln/>
-        </p:spPr>
-        <p:txBody>
-          <a:bodyPr wrap="square" lIns="0" tIns="0" rIns="0" bIns="0" rtlCol="0" anchor="ctr"/>
-          <a:lstStyle/>
-          <a:p>
-            <a:pPr indent="0" marL="0">
-              <a:buNone/>
-            </a:pPr>
-            <a:r>
-              <a:rPr lang="en-US" sz="1050" dirty="0">
-                <a:solidFill>
-                  <a:srgbClr val="111111"/>
-                </a:solidFill>
-              </a:rPr>
-              <a:t>Exercise Up</a:t>
-            </a:r>
-            <a:endParaRPr lang="en-US" sz="1050" dirty="0"/>
-          </a:p>
-        </p:txBody>
-      </p:sp>
-      <p:sp>
-        <p:nvSpPr>
-          <p:cNvPr id="23" name="s2_matched_null-dot-4"/>
-          <p:cNvSpPr/>
-          <p:nvPr/>
-        </p:nvSpPr>
-        <p:spPr>
-          <a:xfrm>
-            <a:off x="4870094" y="4914900"/>
-            <a:ext cx="109728" cy="109728"/>
-          </a:xfrm>
-          <a:prstGeom prst="ellipse">
-            <a:avLst/>
-          </a:prstGeom>
-          <a:solidFill>
-            <a:srgbClr val="7B3FA0"/>
-          </a:solidFill>
-          <a:ln w="12700">
-            <a:solidFill>
-              <a:srgbClr val="7B3FA0"/>
-            </a:solidFill>
-            <a:prstDash val="solid"/>
-          </a:ln>
-        </p:spPr>
-      </p:sp>
-      <p:sp>
-        <p:nvSpPr>
-          <p:cNvPr id="24" name="s2_matched_null-leg-4"/>
-          <p:cNvSpPr txBox="1"/>
-          <p:nvPr/>
-        </p:nvSpPr>
-        <p:spPr>
-          <a:xfrm>
-            <a:off x="5025542" y="4873752"/>
-            <a:ext cx="1057046" cy="201168"/>
-          </a:xfrm>
-          <a:prstGeom prst="rect">
-            <a:avLst/>
-          </a:prstGeom>
-          <a:noFill/>
-          <a:ln/>
-        </p:spPr>
-        <p:txBody>
-          <a:bodyPr wrap="square" lIns="0" tIns="0" rIns="0" bIns="0" rtlCol="0" anchor="ctr"/>
-          <a:lstStyle/>
-          <a:p>
-            <a:pPr indent="0" marL="0">
-              <a:buNone/>
-            </a:pPr>
-            <a:r>
-              <a:rPr lang="en-US" sz="1050" dirty="0">
-                <a:solidFill>
-                  <a:srgbClr val="111111"/>
-                </a:solidFill>
-              </a:rPr>
-              <a:t>Exercise Down</a:t>
-            </a:r>
-            <a:endParaRPr lang="en-US" sz="1050" dirty="0"/>
-          </a:p>
-        </p:txBody>
-      </p:sp>
-      <p:sp>
-        <p:nvSpPr>
-          <p:cNvPr id="25" name="s2_matched_null-dot-5"/>
-          <p:cNvSpPr/>
-          <p:nvPr/>
-        </p:nvSpPr>
-        <p:spPr>
-          <a:xfrm>
-            <a:off x="6192317" y="4914900"/>
-            <a:ext cx="109728" cy="109728"/>
-          </a:xfrm>
-          <a:prstGeom prst="ellipse">
-            <a:avLst/>
-          </a:prstGeom>
-          <a:solidFill>
-            <a:srgbClr val="B3B2AE"/>
-          </a:solidFill>
-          <a:ln w="12700">
-            <a:solidFill>
-              <a:srgbClr val="B3B2AE"/>
-            </a:solidFill>
-            <a:prstDash val="solid"/>
-          </a:ln>
-        </p:spPr>
-      </p:sp>
-      <p:sp>
-        <p:nvSpPr>
-          <p:cNvPr id="26" name="s2_matched_null-leg-5"/>
-          <p:cNvSpPr txBox="1"/>
-          <p:nvPr/>
-        </p:nvSpPr>
-        <p:spPr>
-          <a:xfrm>
-            <a:off x="6347765" y="4873752"/>
-            <a:ext cx="1781251" cy="201168"/>
-          </a:xfrm>
-          <a:prstGeom prst="rect">
-            <a:avLst/>
-          </a:prstGeom>
-          <a:noFill/>
-          <a:ln/>
-        </p:spPr>
-        <p:txBody>
-          <a:bodyPr wrap="square" lIns="0" tIns="0" rIns="0" bIns="0" rtlCol="0" anchor="ctr"/>
-          <a:lstStyle/>
-          <a:p>
-            <a:pPr indent="0" marL="0">
-              <a:buNone/>
-            </a:pPr>
-            <a:r>
-              <a:rPr lang="en-US" sz="1050" dirty="0">
-                <a:solidFill>
-                  <a:srgbClr val="111111"/>
-                </a:solidFill>
-              </a:rPr>
-              <a:t>Stable (all 2,907 sites)</a:t>
-            </a:r>
-            <a:endParaRPr lang="en-US" sz="1050" dirty="0"/>
-          </a:p>
-        </p:txBody>
-      </p:sp>
-      <p:sp>
-        <p:nvSpPr>
-          <p:cNvPr id="27" name="s2_matched_null-key"/>
-          <p:cNvSpPr txBox="1"/>
-          <p:nvPr/>
-        </p:nvSpPr>
-        <p:spPr>
-          <a:xfrm>
-            <a:off x="502920" y="5148072"/>
-            <a:ext cx="11155680" cy="502920"/>
-          </a:xfrm>
-          <a:prstGeom prst="rect">
-            <a:avLst/>
-          </a:prstGeom>
-          <a:noFill/>
-          <a:ln/>
-        </p:spPr>
-        <p:txBody>
-          <a:bodyPr wrap="square" lIns="0" tIns="0" rIns="0" bIns="0" rtlCol="0" anchor="ctr"/>
-          <a:lstStyle/>
-          <a:p>
-            <a:pPr indent="0" marL="0">
-              <a:buNone/>
-            </a:pPr>
-            <a:r>
-              <a:rPr lang="en-US" sz="900" dirty="0">
-                <a:solidFill>
-                  <a:srgbClr val="595959"/>
-                </a:solidFill>
-              </a:rPr>
-              <a:t>grey line and band: all 2,907 Stable sites, median with a 95% bootstrap CI.   Each class is every site carrying that call, tested against that reference by Mann–Whitney, BH across all 20 tests on this figure.   *** p&lt;0.001   ** p&lt;0.01   * p&lt;0.05   ns ≥ 0.05</a:t>
-            </a:r>
-            <a:endParaRPr lang="en-US" sz="900" dirty="0"/>
-          </a:p>
-        </p:txBody>
-      </p:sp>
-      <p:sp>
-        <p:nvSpPr>
-          <p:cNvPr id="28" name="Text 0"/>
+          <p:cNvPr id="6" name="Text 0"/>
           <p:cNvSpPr/>
           <p:nvPr>
             <p:ph idx="101" type="body" hasCustomPrompt="1"/>
@@ -8247,7 +7653,7 @@
                   <a:srgbClr val="111111"/>
                 </a:solidFill>
               </a:rPr>
-              <a:t>every class loses less than Stable sites do at every scale, and the 300 bp control shows it is not a global offset</a:t>
+              <a:t>one element, 60 windows, five footprinted families — everything that follows is this, repeated over 3,678 sites</a:t>
             </a:r>
             <a:endParaRPr lang="en-US" sz="1500" dirty="0"/>
           </a:p>
@@ -8355,15 +7761,87 @@
                   <a:schemeClr val="tx1"/>
                 </a:solidFill>
               </a:rPr>
-              <a:t>Both classes lean on the same partners</a:t>
+              <a:t>Responsive sites lose less to every edit of their element</a:t>
             </a:r>
             <a:endParaRPr lang="en-US" sz="2800" dirty="0"/>
+          </a:p>
+        </p:txBody>
+      </p:sp>
+      <p:sp>
+        <p:nvSpPr>
+          <p:cNvPr id="3" name="s2_matched_null-title-0"/>
+          <p:cNvSpPr txBox="1"/>
+          <p:nvPr/>
+        </p:nvSpPr>
+        <p:spPr>
+          <a:xfrm>
+            <a:off x="612648" y="1143000"/>
+            <a:ext cx="2688336" cy="438912"/>
+          </a:xfrm>
+          <a:prstGeom prst="rect">
+            <a:avLst/>
+          </a:prstGeom>
+          <a:noFill/>
+          <a:ln/>
+        </p:spPr>
+        <p:txBody>
+          <a:bodyPr wrap="square" lIns="0" tIns="0" rIns="0" bIns="0" rtlCol="0" anchor="t"/>
+          <a:lstStyle/>
+          <a:p>
+            <a:pPr indent="0" marL="0">
+              <a:buNone/>
+            </a:pPr>
+            <a:r>
+              <a:rPr lang="en-US" sz="1250" b="1" dirty="0">
+                <a:solidFill>
+                  <a:srgbClr val="111111"/>
+                </a:solidFill>
+              </a:rPr>
+              <a:t>Replace the 11 bp motif</a:t>
+            </a:r>
+            <a:endParaRPr lang="en-US" sz="1250" dirty="0"/>
+          </a:p>
+        </p:txBody>
+      </p:sp>
+      <p:sp>
+        <p:nvSpPr>
+          <p:cNvPr id="4" name="s2_matched_null-sub-0"/>
+          <p:cNvSpPr txBox="1"/>
+          <p:nvPr/>
+        </p:nvSpPr>
+        <p:spPr>
+          <a:xfrm>
+            <a:off x="612648" y="1572768"/>
+            <a:ext cx="2688336" cy="310896"/>
+          </a:xfrm>
+          <a:prstGeom prst="rect">
+            <a:avLst/>
+          </a:prstGeom>
+          <a:noFill/>
+          <a:ln/>
+        </p:spPr>
+        <p:txBody>
+          <a:bodyPr wrap="square" lIns="0" tIns="0" rIns="0" bIns="0" rtlCol="0" anchor="t"/>
+          <a:lstStyle/>
+          <a:p>
+            <a:pPr indent="0" marL="0">
+              <a:buNone/>
+            </a:pPr>
+            <a:r>
+              <a:rPr lang="en-US" sz="950" dirty="0">
+                <a:solidFill>
+                  <a:srgbClr val="595959"/>
+                </a:solidFill>
+              </a:rPr>
+              <a:t>the motif alone</a:t>
+            </a:r>
+            <a:endParaRPr lang="en-US" sz="950" dirty="0"/>
           </a:p>
         </p:txBody>
       </p:sp>
       <p:pic>
         <p:nvPicPr>
-          <p:cNvPr id="3" name="Image 0" descr="/Users/z5162865/WongLab/AlphaGenome_Ap1/Analysis/slide_figures/d_tile.png">    </p:cNvPr>
+          <p:cNvPr id="5" name="Image 0" descr="/Users/z5162865/WongLab/AlphaGenome_Ap1/Analysis/slide_figures/panels/s2_matched_null_c0_r0.png">    </p:cNvPr>
           <p:cNvPicPr>
             <a:picLocks noChangeAspect="1"/>
           </p:cNvPicPr>
@@ -8377,17 +7855,89 @@
         </p:blipFill>
         <p:spPr>
           <a:xfrm>
-            <a:off x="565042" y="960120"/>
-            <a:ext cx="7099516" cy="1005840"/>
+            <a:off x="612648" y="2079013"/>
+            <a:ext cx="2688336" cy="2443942"/>
           </a:xfrm>
           <a:prstGeom prst="rect">
             <a:avLst/>
           </a:prstGeom>
         </p:spPr>
       </p:pic>
+      <p:sp>
+        <p:nvSpPr>
+          <p:cNvPr id="6" name="s2_matched_null-title-1"/>
+          <p:cNvSpPr txBox="1"/>
+          <p:nvPr/>
+        </p:nvSpPr>
+        <p:spPr>
+          <a:xfrm>
+            <a:off x="3374136" y="1143000"/>
+            <a:ext cx="2688336" cy="438912"/>
+          </a:xfrm>
+          <a:prstGeom prst="rect">
+            <a:avLst/>
+          </a:prstGeom>
+          <a:noFill/>
+          <a:ln/>
+        </p:spPr>
+        <p:txBody>
+          <a:bodyPr wrap="square" lIns="0" tIns="0" rIns="0" bIns="0" rtlCol="0" anchor="t"/>
+          <a:lstStyle/>
+          <a:p>
+            <a:pPr indent="0" marL="0">
+              <a:buNone/>
+            </a:pPr>
+            <a:r>
+              <a:rPr lang="en-US" sz="1250" b="1" dirty="0">
+                <a:solidFill>
+                  <a:srgbClr val="111111"/>
+                </a:solidFill>
+              </a:rPr>
+              <a:t>Replace the 170 bp element</a:t>
+            </a:r>
+            <a:endParaRPr lang="en-US" sz="1250" dirty="0"/>
+          </a:p>
+        </p:txBody>
+      </p:sp>
+      <p:sp>
+        <p:nvSpPr>
+          <p:cNvPr id="7" name="s2_matched_null-sub-1"/>
+          <p:cNvSpPr txBox="1"/>
+          <p:nvPr/>
+        </p:nvSpPr>
+        <p:spPr>
+          <a:xfrm>
+            <a:off x="3374136" y="1572768"/>
+            <a:ext cx="2688336" cy="310896"/>
+          </a:xfrm>
+          <a:prstGeom prst="rect">
+            <a:avLst/>
+          </a:prstGeom>
+          <a:noFill/>
+          <a:ln/>
+        </p:spPr>
+        <p:txBody>
+          <a:bodyPr wrap="square" lIns="0" tIns="0" rIns="0" bIns="0" rtlCol="0" anchor="t"/>
+          <a:lstStyle/>
+          <a:p>
+            <a:pPr indent="0" marL="0">
+              <a:buNone/>
+            </a:pPr>
+            <a:r>
+              <a:rPr lang="en-US" sz="950" dirty="0">
+                <a:solidFill>
+                  <a:srgbClr val="595959"/>
+                </a:solidFill>
+              </a:rPr>
+              <a:t>the element around it</a:t>
+            </a:r>
+            <a:endParaRPr lang="en-US" sz="950" dirty="0"/>
+          </a:p>
+        </p:txBody>
+      </p:sp>
       <p:pic>
         <p:nvPicPr>
-          <p:cNvPr id="4" name="Image 1" descr="/Users/z5162865/WongLab/AlphaGenome_Ap1/Analysis/slide_figures/panels/s8_partners_all.png">    </p:cNvPr>
+          <p:cNvPr id="8" name="Image 1" descr="/Users/z5162865/WongLab/AlphaGenome_Ap1/Analysis/slide_figures/panels/s2_matched_null_c1_r0.png">    </p:cNvPr>
           <p:cNvPicPr>
             <a:picLocks noChangeAspect="1"/>
           </p:cNvPicPr>
@@ -8401,8 +7951,8 @@
         </p:blipFill>
         <p:spPr>
           <a:xfrm>
-            <a:off x="3953510" y="2103120"/>
-            <a:ext cx="4254500" cy="3063240"/>
+            <a:off x="3374136" y="2079013"/>
+            <a:ext cx="2688336" cy="2443942"/>
           </a:xfrm>
           <a:prstGeom prst="rect">
             <a:avLst/>
@@ -8411,13 +7961,510 @@
       </p:pic>
       <p:sp>
         <p:nvSpPr>
-          <p:cNvPr id="5" name="lg-dot-5.72-0"/>
+          <p:cNvPr id="9" name="s2_matched_null-title-2"/>
+          <p:cNvSpPr txBox="1"/>
+          <p:nvPr/>
+        </p:nvSpPr>
+        <p:spPr>
+          <a:xfrm>
+            <a:off x="6135624" y="1143000"/>
+            <a:ext cx="2688336" cy="438912"/>
+          </a:xfrm>
+          <a:prstGeom prst="rect">
+            <a:avLst/>
+          </a:prstGeom>
+          <a:noFill/>
+          <a:ln/>
+        </p:spPr>
+        <p:txBody>
+          <a:bodyPr wrap="square" lIns="0" tIns="0" rIns="0" bIns="0" rtlCol="0" anchor="t"/>
+          <a:lstStyle/>
+          <a:p>
+            <a:pPr indent="0" marL="0">
+              <a:buNone/>
+            </a:pPr>
+            <a:r>
+              <a:rPr lang="en-US" sz="1250" b="1" dirty="0">
+                <a:solidFill>
+                  <a:srgbClr val="111111"/>
+                </a:solidFill>
+              </a:rPr>
+              <a:t>Replace the whole peak</a:t>
+            </a:r>
+            <a:endParaRPr lang="en-US" sz="1250" dirty="0"/>
+          </a:p>
+        </p:txBody>
+      </p:sp>
+      <p:sp>
+        <p:nvSpPr>
+          <p:cNvPr id="10" name="s2_matched_null-sub-2"/>
+          <p:cNvSpPr txBox="1"/>
+          <p:nvPr/>
+        </p:nvSpPr>
+        <p:spPr>
+          <a:xfrm>
+            <a:off x="6135624" y="1572768"/>
+            <a:ext cx="2688336" cy="310896"/>
+          </a:xfrm>
+          <a:prstGeom prst="rect">
+            <a:avLst/>
+          </a:prstGeom>
+          <a:noFill/>
+          <a:ln/>
+        </p:spPr>
+        <p:txBody>
+          <a:bodyPr wrap="square" lIns="0" tIns="0" rIns="0" bIns="0" rtlCol="0" anchor="t"/>
+          <a:lstStyle/>
+          <a:p>
+            <a:pPr indent="0" marL="0">
+              <a:buNone/>
+            </a:pPr>
+            <a:r>
+              <a:rPr lang="en-US" sz="950" dirty="0">
+                <a:solidFill>
+                  <a:srgbClr val="595959"/>
+                </a:solidFill>
+              </a:rPr>
+              <a:t>everything, read over the peak</a:t>
+            </a:r>
+            <a:endParaRPr lang="en-US" sz="950" dirty="0"/>
+          </a:p>
+        </p:txBody>
+      </p:sp>
+      <p:pic>
+        <p:nvPicPr>
+          <p:cNvPr id="11" name="Image 2" descr="/Users/z5162865/WongLab/AlphaGenome_Ap1/Analysis/slide_figures/panels/s2_matched_null_c2_r0.png">    </p:cNvPr>
+          <p:cNvPicPr>
+            <a:picLocks noChangeAspect="1"/>
+          </p:cNvPicPr>
+          <p:nvPr/>
+        </p:nvPicPr>
+        <p:blipFill>
+          <a:blip r:embed="rId3"/>
+          <a:stretch>
+            <a:fillRect/>
+          </a:stretch>
+        </p:blipFill>
+        <p:spPr>
+          <a:xfrm>
+            <a:off x="6135624" y="2079013"/>
+            <a:ext cx="2688336" cy="2443942"/>
+          </a:xfrm>
+          <a:prstGeom prst="rect">
+            <a:avLst/>
+          </a:prstGeom>
+        </p:spPr>
+      </p:pic>
+      <p:sp>
+        <p:nvSpPr>
+          <p:cNvPr id="12" name="s2_matched_null-title-3"/>
+          <p:cNvSpPr txBox="1"/>
+          <p:nvPr/>
+        </p:nvSpPr>
+        <p:spPr>
+          <a:xfrm>
+            <a:off x="8897112" y="1143000"/>
+            <a:ext cx="2688336" cy="438912"/>
+          </a:xfrm>
+          <a:prstGeom prst="rect">
+            <a:avLst/>
+          </a:prstGeom>
+          <a:noFill/>
+          <a:ln/>
+        </p:spPr>
+        <p:txBody>
+          <a:bodyPr wrap="square" lIns="0" tIns="0" rIns="0" bIns="0" rtlCol="0" anchor="t"/>
+          <a:lstStyle/>
+          <a:p>
+            <a:pPr indent="0" marL="0">
+              <a:buNone/>
+            </a:pPr>
+            <a:r>
+              <a:rPr lang="en-US" sz="1250" b="1" dirty="0">
+                <a:solidFill>
+                  <a:srgbClr val="111111"/>
+                </a:solidFill>
+              </a:rPr>
+              <a:t>Edit 300 bp away</a:t>
+            </a:r>
+            <a:endParaRPr lang="en-US" sz="1250" dirty="0"/>
+          </a:p>
+        </p:txBody>
+      </p:sp>
+      <p:sp>
+        <p:nvSpPr>
+          <p:cNvPr id="13" name="s2_matched_null-sub-3"/>
+          <p:cNvSpPr txBox="1"/>
+          <p:nvPr/>
+        </p:nvSpPr>
+        <p:spPr>
+          <a:xfrm>
+            <a:off x="8897112" y="1572768"/>
+            <a:ext cx="2688336" cy="310896"/>
+          </a:xfrm>
+          <a:prstGeom prst="rect">
+            <a:avLst/>
+          </a:prstGeom>
+          <a:noFill/>
+          <a:ln/>
+        </p:spPr>
+        <p:txBody>
+          <a:bodyPr wrap="square" lIns="0" tIns="0" rIns="0" bIns="0" rtlCol="0" anchor="t"/>
+          <a:lstStyle/>
+          <a:p>
+            <a:pPr indent="0" marL="0">
+              <a:buNone/>
+            </a:pPr>
+            <a:r>
+              <a:rPr lang="en-US" sz="950" dirty="0">
+                <a:solidFill>
+                  <a:srgbClr val="595959"/>
+                </a:solidFill>
+              </a:rPr>
+              <a:t>the control: nothing at stake</a:t>
+            </a:r>
+            <a:endParaRPr lang="en-US" sz="950" dirty="0"/>
+          </a:p>
+        </p:txBody>
+      </p:sp>
+      <p:pic>
+        <p:nvPicPr>
+          <p:cNvPr id="14" name="Image 3" descr="/Users/z5162865/WongLab/AlphaGenome_Ap1/Analysis/slide_figures/panels/s2_matched_null_c3_r0.png">    </p:cNvPr>
+          <p:cNvPicPr>
+            <a:picLocks noChangeAspect="1"/>
+          </p:cNvPicPr>
+          <p:nvPr/>
+        </p:nvPicPr>
+        <p:blipFill>
+          <a:blip r:embed="rId4"/>
+          <a:stretch>
+            <a:fillRect/>
+          </a:stretch>
+        </p:blipFill>
+        <p:spPr>
+          <a:xfrm>
+            <a:off x="8897112" y="2079013"/>
+            <a:ext cx="2688336" cy="2443942"/>
+          </a:xfrm>
+          <a:prstGeom prst="rect">
+            <a:avLst/>
+          </a:prstGeom>
+        </p:spPr>
+      </p:pic>
+      <p:sp>
+        <p:nvSpPr>
+          <p:cNvPr id="15" name="s2_matched_null-dot-0"/>
           <p:cNvSpPr/>
           <p:nvPr/>
         </p:nvSpPr>
         <p:spPr>
           <a:xfrm>
-            <a:off x="1280160" y="5271516"/>
+            <a:off x="502920" y="4914900"/>
+            <a:ext cx="109728" cy="109728"/>
+          </a:xfrm>
+          <a:prstGeom prst="ellipse">
+            <a:avLst/>
+          </a:prstGeom>
+          <a:solidFill>
+            <a:srgbClr val="4F4F4F"/>
+          </a:solidFill>
+          <a:ln w="12700">
+            <a:solidFill>
+              <a:srgbClr val="4F4F4F"/>
+            </a:solidFill>
+            <a:prstDash val="solid"/>
+          </a:ln>
+        </p:spPr>
+      </p:sp>
+      <p:sp>
+        <p:nvSpPr>
+          <p:cNvPr id="16" name="s2_matched_null-leg-0"/>
+          <p:cNvSpPr txBox="1"/>
+          <p:nvPr/>
+        </p:nvSpPr>
+        <p:spPr>
+          <a:xfrm>
+            <a:off x="658368" y="4873752"/>
+            <a:ext cx="1057046" cy="201168"/>
+          </a:xfrm>
+          <a:prstGeom prst="rect">
+            <a:avLst/>
+          </a:prstGeom>
+          <a:noFill/>
+          <a:ln/>
+        </p:spPr>
+        <p:txBody>
+          <a:bodyPr wrap="square" lIns="0" tIns="0" rIns="0" bIns="0" rtlCol="0" anchor="ctr"/>
+          <a:lstStyle/>
+          <a:p>
+            <a:pPr indent="0" marL="0">
+              <a:buNone/>
+            </a:pPr>
+            <a:r>
+              <a:rPr lang="en-US" sz="1050" dirty="0">
+                <a:solidFill>
+                  <a:srgbClr val="111111"/>
+                </a:solidFill>
+              </a:rPr>
+              <a:t>Dynamic (all)</a:t>
+            </a:r>
+            <a:endParaRPr lang="en-US" sz="1050" dirty="0"/>
+          </a:p>
+        </p:txBody>
+      </p:sp>
+      <p:sp>
+        <p:nvSpPr>
+          <p:cNvPr id="17" name="s2_matched_null-dot-1"/>
+          <p:cNvSpPr/>
+          <p:nvPr/>
+        </p:nvSpPr>
+        <p:spPr>
+          <a:xfrm>
+            <a:off x="1825142" y="4914900"/>
+            <a:ext cx="109728" cy="109728"/>
+          </a:xfrm>
+          <a:prstGeom prst="ellipse">
+            <a:avLst/>
+          </a:prstGeom>
+          <a:solidFill>
+            <a:srgbClr val="C2551C"/>
+          </a:solidFill>
+          <a:ln w="12700">
+            <a:solidFill>
+              <a:srgbClr val="C2551C"/>
+            </a:solidFill>
+            <a:prstDash val="solid"/>
+          </a:ln>
+        </p:spPr>
+      </p:sp>
+      <p:sp>
+        <p:nvSpPr>
+          <p:cNvPr id="18" name="s2_matched_null-leg-1"/>
+          <p:cNvSpPr txBox="1"/>
+          <p:nvPr/>
+        </p:nvSpPr>
+        <p:spPr>
+          <a:xfrm>
+            <a:off x="1980590" y="4873752"/>
+            <a:ext cx="596189" cy="201168"/>
+          </a:xfrm>
+          <a:prstGeom prst="rect">
+            <a:avLst/>
+          </a:prstGeom>
+          <a:noFill/>
+          <a:ln/>
+        </p:spPr>
+        <p:txBody>
+          <a:bodyPr wrap="square" lIns="0" tIns="0" rIns="0" bIns="0" rtlCol="0" anchor="ctr"/>
+          <a:lstStyle/>
+          <a:p>
+            <a:pPr indent="0" marL="0">
+              <a:buNone/>
+            </a:pPr>
+            <a:r>
+              <a:rPr lang="en-US" sz="1050" dirty="0">
+                <a:solidFill>
+                  <a:srgbClr val="111111"/>
+                </a:solidFill>
+              </a:rPr>
+              <a:t>Age Up</a:t>
+            </a:r>
+            <a:endParaRPr lang="en-US" sz="1050" dirty="0"/>
+          </a:p>
+        </p:txBody>
+      </p:sp>
+      <p:sp>
+        <p:nvSpPr>
+          <p:cNvPr id="19" name="s2_matched_null-dot-2"/>
+          <p:cNvSpPr/>
+          <p:nvPr/>
+        </p:nvSpPr>
+        <p:spPr>
+          <a:xfrm>
+            <a:off x="2686507" y="4914900"/>
+            <a:ext cx="109728" cy="109728"/>
+          </a:xfrm>
+          <a:prstGeom prst="ellipse">
+            <a:avLst/>
+          </a:prstGeom>
+          <a:solidFill>
+            <a:srgbClr val="1F6FB2"/>
+          </a:solidFill>
+          <a:ln w="12700">
+            <a:solidFill>
+              <a:srgbClr val="1F6FB2"/>
+            </a:solidFill>
+            <a:prstDash val="solid"/>
+          </a:ln>
+        </p:spPr>
+      </p:sp>
+      <p:sp>
+        <p:nvSpPr>
+          <p:cNvPr id="20" name="s2_matched_null-leg-2"/>
+          <p:cNvSpPr txBox="1"/>
+          <p:nvPr/>
+        </p:nvSpPr>
+        <p:spPr>
+          <a:xfrm>
+            <a:off x="2841955" y="4873752"/>
+            <a:ext cx="727862" cy="201168"/>
+          </a:xfrm>
+          <a:prstGeom prst="rect">
+            <a:avLst/>
+          </a:prstGeom>
+          <a:noFill/>
+          <a:ln/>
+        </p:spPr>
+        <p:txBody>
+          <a:bodyPr wrap="square" lIns="0" tIns="0" rIns="0" bIns="0" rtlCol="0" anchor="ctr"/>
+          <a:lstStyle/>
+          <a:p>
+            <a:pPr indent="0" marL="0">
+              <a:buNone/>
+            </a:pPr>
+            <a:r>
+              <a:rPr lang="en-US" sz="1050" dirty="0">
+                <a:solidFill>
+                  <a:srgbClr val="111111"/>
+                </a:solidFill>
+              </a:rPr>
+              <a:t>Age Down</a:t>
+            </a:r>
+            <a:endParaRPr lang="en-US" sz="1050" dirty="0"/>
+          </a:p>
+        </p:txBody>
+      </p:sp>
+      <p:sp>
+        <p:nvSpPr>
+          <p:cNvPr id="21" name="s2_matched_null-dot-3"/>
+          <p:cNvSpPr/>
+          <p:nvPr/>
+        </p:nvSpPr>
+        <p:spPr>
+          <a:xfrm>
+            <a:off x="3679546" y="4914900"/>
+            <a:ext cx="109728" cy="109728"/>
+          </a:xfrm>
+          <a:prstGeom prst="ellipse">
+            <a:avLst/>
+          </a:prstGeom>
+          <a:solidFill>
+            <a:srgbClr val="2E7D32"/>
+          </a:solidFill>
+          <a:ln w="12700">
+            <a:solidFill>
+              <a:srgbClr val="2E7D32"/>
+            </a:solidFill>
+            <a:prstDash val="solid"/>
+          </a:ln>
+        </p:spPr>
+      </p:sp>
+      <p:sp>
+        <p:nvSpPr>
+          <p:cNvPr id="22" name="s2_matched_null-leg-3"/>
+          <p:cNvSpPr txBox="1"/>
+          <p:nvPr/>
+        </p:nvSpPr>
+        <p:spPr>
+          <a:xfrm>
+            <a:off x="3834994" y="4873752"/>
+            <a:ext cx="925373" cy="201168"/>
+          </a:xfrm>
+          <a:prstGeom prst="rect">
+            <a:avLst/>
+          </a:prstGeom>
+          <a:noFill/>
+          <a:ln/>
+        </p:spPr>
+        <p:txBody>
+          <a:bodyPr wrap="square" lIns="0" tIns="0" rIns="0" bIns="0" rtlCol="0" anchor="ctr"/>
+          <a:lstStyle/>
+          <a:p>
+            <a:pPr indent="0" marL="0">
+              <a:buNone/>
+            </a:pPr>
+            <a:r>
+              <a:rPr lang="en-US" sz="1050" dirty="0">
+                <a:solidFill>
+                  <a:srgbClr val="111111"/>
+                </a:solidFill>
+              </a:rPr>
+              <a:t>Exercise Up</a:t>
+            </a:r>
+            <a:endParaRPr lang="en-US" sz="1050" dirty="0"/>
+          </a:p>
+        </p:txBody>
+      </p:sp>
+      <p:sp>
+        <p:nvSpPr>
+          <p:cNvPr id="23" name="s2_matched_null-dot-4"/>
+          <p:cNvSpPr/>
+          <p:nvPr/>
+        </p:nvSpPr>
+        <p:spPr>
+          <a:xfrm>
+            <a:off x="4870094" y="4914900"/>
+            <a:ext cx="109728" cy="109728"/>
+          </a:xfrm>
+          <a:prstGeom prst="ellipse">
+            <a:avLst/>
+          </a:prstGeom>
+          <a:solidFill>
+            <a:srgbClr val="7B3FA0"/>
+          </a:solidFill>
+          <a:ln w="12700">
+            <a:solidFill>
+              <a:srgbClr val="7B3FA0"/>
+            </a:solidFill>
+            <a:prstDash val="solid"/>
+          </a:ln>
+        </p:spPr>
+      </p:sp>
+      <p:sp>
+        <p:nvSpPr>
+          <p:cNvPr id="24" name="s2_matched_null-leg-4"/>
+          <p:cNvSpPr txBox="1"/>
+          <p:nvPr/>
+        </p:nvSpPr>
+        <p:spPr>
+          <a:xfrm>
+            <a:off x="5025542" y="4873752"/>
+            <a:ext cx="1057046" cy="201168"/>
+          </a:xfrm>
+          <a:prstGeom prst="rect">
+            <a:avLst/>
+          </a:prstGeom>
+          <a:noFill/>
+          <a:ln/>
+        </p:spPr>
+        <p:txBody>
+          <a:bodyPr wrap="square" lIns="0" tIns="0" rIns="0" bIns="0" rtlCol="0" anchor="ctr"/>
+          <a:lstStyle/>
+          <a:p>
+            <a:pPr indent="0" marL="0">
+              <a:buNone/>
+            </a:pPr>
+            <a:r>
+              <a:rPr lang="en-US" sz="1050" dirty="0">
+                <a:solidFill>
+                  <a:srgbClr val="111111"/>
+                </a:solidFill>
+              </a:rPr>
+              <a:t>Exercise Down</a:t>
+            </a:r>
+            <a:endParaRPr lang="en-US" sz="1050" dirty="0"/>
+          </a:p>
+        </p:txBody>
+      </p:sp>
+      <p:sp>
+        <p:nvSpPr>
+          <p:cNvPr id="25" name="s2_matched_null-dot-5"/>
+          <p:cNvSpPr/>
+          <p:nvPr/>
+        </p:nvSpPr>
+        <p:spPr>
+          <a:xfrm>
+            <a:off x="6192317" y="4914900"/>
             <a:ext cx="109728" cy="109728"/>
           </a:xfrm>
           <a:prstGeom prst="ellipse">
@@ -8436,14 +8483,14 @@
       </p:sp>
       <p:sp>
         <p:nvSpPr>
-          <p:cNvPr id="6" name="lg-txt-5.72-0"/>
+          <p:cNvPr id="26" name="s2_matched_null-leg-5"/>
           <p:cNvSpPr txBox="1"/>
           <p:nvPr/>
         </p:nvSpPr>
         <p:spPr>
           <a:xfrm>
-            <a:off x="1435608" y="5230368"/>
-            <a:ext cx="596189" cy="201168"/>
+            <a:off x="6347765" y="4873752"/>
+            <a:ext cx="1781251" cy="201168"/>
           </a:xfrm>
           <a:prstGeom prst="rect">
             <a:avLst/>
@@ -8464,7 +8511,7 @@
                   <a:srgbClr val="111111"/>
                 </a:solidFill>
               </a:rPr>
-              <a:t>Stable</a:t>
+              <a:t>Stable (all 2,907 sites)</a:t>
             </a:r>
             <a:endParaRPr lang="en-US" sz="1050" dirty="0"/>
           </a:p>
@@ -8472,39 +8519,14 @@
       </p:sp>
       <p:sp>
         <p:nvSpPr>
-          <p:cNvPr id="7" name="lg-dot-5.72-1"/>
-          <p:cNvSpPr/>
-          <p:nvPr/>
-        </p:nvSpPr>
-        <p:spPr>
-          <a:xfrm>
-            <a:off x="2141525" y="5271516"/>
-            <a:ext cx="109728" cy="109728"/>
-          </a:xfrm>
-          <a:prstGeom prst="ellipse">
-            <a:avLst/>
-          </a:prstGeom>
-          <a:solidFill>
-            <a:srgbClr val="C2551C"/>
-          </a:solidFill>
-          <a:ln w="12700">
-            <a:solidFill>
-              <a:srgbClr val="C2551C"/>
-            </a:solidFill>
-            <a:prstDash val="solid"/>
-          </a:ln>
-        </p:spPr>
-      </p:sp>
-      <p:sp>
-        <p:nvSpPr>
-          <p:cNvPr id="8" name="lg-txt-5.72-1"/>
+          <p:cNvPr id="27" name="s2_matched_null-key"/>
           <p:cNvSpPr txBox="1"/>
           <p:nvPr/>
         </p:nvSpPr>
         <p:spPr>
           <a:xfrm>
-            <a:off x="2296973" y="5230368"/>
-            <a:ext cx="596189" cy="201168"/>
+            <a:off x="502920" y="5148072"/>
+            <a:ext cx="11155680" cy="502920"/>
           </a:xfrm>
           <a:prstGeom prst="rect">
             <a:avLst/>
@@ -8520,239 +8542,20 @@
               <a:buNone/>
             </a:pPr>
             <a:r>
-              <a:rPr lang="en-US" sz="1050" dirty="0">
-                <a:solidFill>
-                  <a:srgbClr val="111111"/>
-                </a:solidFill>
-              </a:rPr>
-              <a:t>Age Up</a:t>
-            </a:r>
-            <a:endParaRPr lang="en-US" sz="1050" dirty="0"/>
-          </a:p>
-        </p:txBody>
-      </p:sp>
-      <p:sp>
-        <p:nvSpPr>
-          <p:cNvPr id="9" name="lg-dot-5.72-2"/>
-          <p:cNvSpPr/>
-          <p:nvPr/>
-        </p:nvSpPr>
-        <p:spPr>
-          <a:xfrm>
-            <a:off x="3002890" y="5271516"/>
-            <a:ext cx="109728" cy="109728"/>
-          </a:xfrm>
-          <a:prstGeom prst="ellipse">
-            <a:avLst/>
-          </a:prstGeom>
-          <a:solidFill>
-            <a:srgbClr val="1F6FB2"/>
-          </a:solidFill>
-          <a:ln w="12700">
-            <a:solidFill>
-              <a:srgbClr val="1F6FB2"/>
-            </a:solidFill>
-            <a:prstDash val="solid"/>
-          </a:ln>
-        </p:spPr>
-      </p:sp>
-      <p:sp>
-        <p:nvSpPr>
-          <p:cNvPr id="10" name="lg-txt-5.72-2"/>
-          <p:cNvSpPr txBox="1"/>
-          <p:nvPr/>
-        </p:nvSpPr>
-        <p:spPr>
-          <a:xfrm>
-            <a:off x="3158338" y="5230368"/>
-            <a:ext cx="727862" cy="201168"/>
-          </a:xfrm>
-          <a:prstGeom prst="rect">
-            <a:avLst/>
-          </a:prstGeom>
-          <a:noFill/>
-          <a:ln/>
-        </p:spPr>
-        <p:txBody>
-          <a:bodyPr wrap="square" lIns="0" tIns="0" rIns="0" bIns="0" rtlCol="0" anchor="ctr"/>
-          <a:lstStyle/>
-          <a:p>
-            <a:pPr indent="0" marL="0">
-              <a:buNone/>
-            </a:pPr>
-            <a:r>
-              <a:rPr lang="en-US" sz="1050" dirty="0">
-                <a:solidFill>
-                  <a:srgbClr val="111111"/>
-                </a:solidFill>
-              </a:rPr>
-              <a:t>Age Down</a:t>
-            </a:r>
-            <a:endParaRPr lang="en-US" sz="1050" dirty="0"/>
-          </a:p>
-        </p:txBody>
-      </p:sp>
-      <p:sp>
-        <p:nvSpPr>
-          <p:cNvPr id="11" name="lg-dot-5.72-3"/>
-          <p:cNvSpPr/>
-          <p:nvPr/>
-        </p:nvSpPr>
-        <p:spPr>
-          <a:xfrm>
-            <a:off x="3995928" y="5271516"/>
-            <a:ext cx="109728" cy="109728"/>
-          </a:xfrm>
-          <a:prstGeom prst="ellipse">
-            <a:avLst/>
-          </a:prstGeom>
-          <a:solidFill>
-            <a:srgbClr val="2E7D32"/>
-          </a:solidFill>
-          <a:ln w="12700">
-            <a:solidFill>
-              <a:srgbClr val="2E7D32"/>
-            </a:solidFill>
-            <a:prstDash val="solid"/>
-          </a:ln>
-        </p:spPr>
-      </p:sp>
-      <p:sp>
-        <p:nvSpPr>
-          <p:cNvPr id="12" name="lg-txt-5.72-3"/>
-          <p:cNvSpPr txBox="1"/>
-          <p:nvPr/>
-        </p:nvSpPr>
-        <p:spPr>
-          <a:xfrm>
-            <a:off x="4151376" y="5230368"/>
-            <a:ext cx="925373" cy="201168"/>
-          </a:xfrm>
-          <a:prstGeom prst="rect">
-            <a:avLst/>
-          </a:prstGeom>
-          <a:noFill/>
-          <a:ln/>
-        </p:spPr>
-        <p:txBody>
-          <a:bodyPr wrap="square" lIns="0" tIns="0" rIns="0" bIns="0" rtlCol="0" anchor="ctr"/>
-          <a:lstStyle/>
-          <a:p>
-            <a:pPr indent="0" marL="0">
-              <a:buNone/>
-            </a:pPr>
-            <a:r>
-              <a:rPr lang="en-US" sz="1050" dirty="0">
-                <a:solidFill>
-                  <a:srgbClr val="111111"/>
-                </a:solidFill>
-              </a:rPr>
-              <a:t>Exercise Up</a:t>
-            </a:r>
-            <a:endParaRPr lang="en-US" sz="1050" dirty="0"/>
-          </a:p>
-        </p:txBody>
-      </p:sp>
-      <p:sp>
-        <p:nvSpPr>
-          <p:cNvPr id="13" name="lg-dot-5.72-4"/>
-          <p:cNvSpPr/>
-          <p:nvPr/>
-        </p:nvSpPr>
-        <p:spPr>
-          <a:xfrm>
-            <a:off x="5186477" y="5271516"/>
-            <a:ext cx="109728" cy="109728"/>
-          </a:xfrm>
-          <a:prstGeom prst="ellipse">
-            <a:avLst/>
-          </a:prstGeom>
-          <a:solidFill>
-            <a:srgbClr val="7B3FA0"/>
-          </a:solidFill>
-          <a:ln w="12700">
-            <a:solidFill>
-              <a:srgbClr val="7B3FA0"/>
-            </a:solidFill>
-            <a:prstDash val="solid"/>
-          </a:ln>
-        </p:spPr>
-      </p:sp>
-      <p:sp>
-        <p:nvSpPr>
-          <p:cNvPr id="14" name="lg-txt-5.72-4"/>
-          <p:cNvSpPr txBox="1"/>
-          <p:nvPr/>
-        </p:nvSpPr>
-        <p:spPr>
-          <a:xfrm>
-            <a:off x="5341925" y="5230368"/>
-            <a:ext cx="1057046" cy="201168"/>
-          </a:xfrm>
-          <a:prstGeom prst="rect">
-            <a:avLst/>
-          </a:prstGeom>
-          <a:noFill/>
-          <a:ln/>
-        </p:spPr>
-        <p:txBody>
-          <a:bodyPr wrap="square" lIns="0" tIns="0" rIns="0" bIns="0" rtlCol="0" anchor="ctr"/>
-          <a:lstStyle/>
-          <a:p>
-            <a:pPr indent="0" marL="0">
-              <a:buNone/>
-            </a:pPr>
-            <a:r>
-              <a:rPr lang="en-US" sz="1050" dirty="0">
-                <a:solidFill>
-                  <a:srgbClr val="111111"/>
-                </a:solidFill>
-              </a:rPr>
-              <a:t>Exercise Down</a:t>
-            </a:r>
-            <a:endParaRPr lang="en-US" sz="1050" dirty="0"/>
-          </a:p>
-        </p:txBody>
-      </p:sp>
-      <p:sp>
-        <p:nvSpPr>
-          <p:cNvPr id="15" name="pa-key"/>
-          <p:cNvSpPr txBox="1"/>
-          <p:nvPr/>
-        </p:nvSpPr>
-        <p:spPr>
-          <a:xfrm>
-            <a:off x="1280160" y="5504688"/>
-            <a:ext cx="10149840" cy="274320"/>
-          </a:xfrm>
-          <a:prstGeom prst="rect">
-            <a:avLst/>
-          </a:prstGeom>
-          <a:noFill/>
-          <a:ln/>
-        </p:spPr>
-        <p:txBody>
-          <a:bodyPr wrap="square" lIns="0" tIns="0" rIns="0" bIns="0" rtlCol="0" anchor="ctr"/>
-          <a:lstStyle/>
-          <a:p>
-            <a:pPr indent="0" marL="0">
-              <a:buNone/>
-            </a:pPr>
-            <a:r>
-              <a:rPr lang="en-US" sz="950" dirty="0">
+              <a:rPr lang="en-US" sz="900" dirty="0">
                 <a:solidFill>
                   <a:srgbClr val="595959"/>
                 </a:solidFill>
               </a:rPr>
-              <a:t>six families shown; tests run over all 20 class-by-family comparisons, smallest FDR 0.02</a:t>
-            </a:r>
-            <a:endParaRPr lang="en-US" sz="950" dirty="0"/>
-          </a:p>
-        </p:txBody>
-      </p:sp>
-      <p:sp>
-        <p:nvSpPr>
-          <p:cNvPr id="16" name="Text 0"/>
+              <a:t>grey line and band: all 2,907 Stable sites, median with a 95% bootstrap CI.   Each class is every site carrying that call, tested against that reference by Mann–Whitney, BH across all 20 tests on this figure.   *** p&lt;0.001   ** p&lt;0.01   * p&lt;0.05   ns ≥ 0.05</a:t>
+            </a:r>
+            <a:endParaRPr lang="en-US" sz="900" dirty="0"/>
+          </a:p>
+        </p:txBody>
+      </p:sp>
+      <p:sp>
+        <p:nvSpPr>
+          <p:cNvPr id="28" name="Text 0"/>
           <p:cNvSpPr/>
           <p:nvPr>
             <p:ph idx="101" type="body" hasCustomPrompt="1"/>
@@ -8793,7 +8596,7 @@
                   <a:srgbClr val="111111"/>
                 </a:solidFill>
               </a:rPr>
-              <a:t>the ranking is the validation — MEF2, GATA, NFI, TEAD, none of it told to the model; the class split is the question, and no class leans on a different partner</a:t>
+              <a:t>every class loses less than Stable sites do at every scale, and the 300 bp control shows it is not a global offset</a:t>
             </a:r>
             <a:endParaRPr lang="en-US" sz="1500" dirty="0"/>
           </a:p>
@@ -8901,87 +8704,15 @@
                   <a:schemeClr val="tx1"/>
                 </a:solidFill>
               </a:rPr>
-              <a:t>MEF2 sits right beside the AP-1 motif, and it matters</a:t>
+              <a:t>Both classes lean on the same partners</a:t>
             </a:r>
             <a:endParaRPr lang="en-US" sz="2800" dirty="0"/>
-          </a:p>
-        </p:txBody>
-      </p:sp>
-      <p:sp>
-        <p:nvSpPr>
-          <p:cNvPr id="3" name="sp-t1"/>
-          <p:cNvSpPr txBox="1"/>
-          <p:nvPr/>
-        </p:nvSpPr>
-        <p:spPr>
-          <a:xfrm>
-            <a:off x="731520" y="1051560"/>
-            <a:ext cx="4937760" cy="274320"/>
-          </a:xfrm>
-          <a:prstGeom prst="rect">
-            <a:avLst/>
-          </a:prstGeom>
-          <a:noFill/>
-          <a:ln/>
-        </p:spPr>
-        <p:txBody>
-          <a:bodyPr wrap="square" lIns="0" tIns="0" rIns="0" bIns="0" rtlCol="0" anchor="ctr"/>
-          <a:lstStyle/>
-          <a:p>
-            <a:pPr indent="0" marL="0">
-              <a:buNone/>
-            </a:pPr>
-            <a:r>
-              <a:rPr lang="en-US" sz="1350" b="1" dirty="0">
-                <a:solidFill>
-                  <a:srgbClr val="111111"/>
-                </a:solidFill>
-              </a:rPr>
-              <a:t>How often a partner sits there</a:t>
-            </a:r>
-            <a:endParaRPr lang="en-US" sz="1350" dirty="0"/>
-          </a:p>
-        </p:txBody>
-      </p:sp>
-      <p:sp>
-        <p:nvSpPr>
-          <p:cNvPr id="4" name="sp-s1"/>
-          <p:cNvSpPr txBox="1"/>
-          <p:nvPr/>
-        </p:nvSpPr>
-        <p:spPr>
-          <a:xfrm>
-            <a:off x="731520" y="1335024"/>
-            <a:ext cx="4937760" cy="274320"/>
-          </a:xfrm>
-          <a:prstGeom prst="rect">
-            <a:avLst/>
-          </a:prstGeom>
-          <a:noFill/>
-          <a:ln/>
-        </p:spPr>
-        <p:txBody>
-          <a:bodyPr wrap="square" lIns="0" tIns="0" rIns="0" bIns="0" rtlCol="0" anchor="ctr"/>
-          <a:lstStyle/>
-          <a:p>
-            <a:pPr indent="0" marL="0">
-              <a:buNone/>
-            </a:pPr>
-            <a:r>
-              <a:rPr lang="en-US" sz="1050" dirty="0">
-                <a:solidFill>
-                  <a:srgbClr val="595959"/>
-                </a:solidFill>
-              </a:rPr>
-              <a:t>every footprint of that family, important or not</a:t>
-            </a:r>
-            <a:endParaRPr lang="en-US" sz="1050" dirty="0"/>
           </a:p>
         </p:txBody>
       </p:sp>
       <p:pic>
         <p:nvPicPr>
-          <p:cNvPr id="5" name="Image 0" descr="/Users/z5162865/WongLab/AlphaGenome_Ap1/Analysis/slide_figures/panels/s7_occurrence.png">    </p:cNvPr>
+          <p:cNvPr id="3" name="Image 0" descr="/Users/z5162865/WongLab/AlphaGenome_Ap1/Analysis/slide_figures/d_tile.png">    </p:cNvPr>
           <p:cNvPicPr>
             <a:picLocks noChangeAspect="1"/>
           </p:cNvPicPr>
@@ -8995,89 +8726,17 @@
         </p:blipFill>
         <p:spPr>
           <a:xfrm>
-            <a:off x="757624" y="1691640"/>
-            <a:ext cx="4885551" cy="3200400"/>
+            <a:off x="565042" y="960120"/>
+            <a:ext cx="7099516" cy="1005840"/>
           </a:xfrm>
           <a:prstGeom prst="rect">
             <a:avLst/>
           </a:prstGeom>
         </p:spPr>
       </p:pic>
-      <p:sp>
-        <p:nvSpPr>
-          <p:cNvPr id="6" name="sp-t2"/>
-          <p:cNvSpPr txBox="1"/>
-          <p:nvPr/>
-        </p:nvSpPr>
-        <p:spPr>
-          <a:xfrm>
-            <a:off x="6309360" y="1051560"/>
-            <a:ext cx="5120640" cy="274320"/>
-          </a:xfrm>
-          <a:prstGeom prst="rect">
-            <a:avLst/>
-          </a:prstGeom>
-          <a:noFill/>
-          <a:ln/>
-        </p:spPr>
-        <p:txBody>
-          <a:bodyPr wrap="square" lIns="0" tIns="0" rIns="0" bIns="0" rtlCol="0" anchor="ctr"/>
-          <a:lstStyle/>
-          <a:p>
-            <a:pPr indent="0" marL="0">
-              <a:buNone/>
-            </a:pPr>
-            <a:r>
-              <a:rPr lang="en-US" sz="1350" b="1" dirty="0">
-                <a:solidFill>
-                  <a:srgbClr val="111111"/>
-                </a:solidFill>
-              </a:rPr>
-              <a:t>How much it matters there</a:t>
-            </a:r>
-            <a:endParaRPr lang="en-US" sz="1350" dirty="0"/>
-          </a:p>
-        </p:txBody>
-      </p:sp>
-      <p:sp>
-        <p:nvSpPr>
-          <p:cNvPr id="7" name="sp-s2"/>
-          <p:cNvSpPr txBox="1"/>
-          <p:nvPr/>
-        </p:nvSpPr>
-        <p:spPr>
-          <a:xfrm>
-            <a:off x="6309360" y="1335024"/>
-            <a:ext cx="5120640" cy="274320"/>
-          </a:xfrm>
-          <a:prstGeom prst="rect">
-            <a:avLst/>
-          </a:prstGeom>
-          <a:noFill/>
-          <a:ln/>
-        </p:spPr>
-        <p:txBody>
-          <a:bodyPr wrap="square" lIns="0" tIns="0" rIns="0" bIns="0" rtlCol="0" anchor="ctr"/>
-          <a:lstStyle/>
-          <a:p>
-            <a:pPr indent="0" marL="0">
-              <a:buNone/>
-            </a:pPr>
-            <a:r>
-              <a:rPr lang="en-US" sz="1050" dirty="0">
-                <a:solidFill>
-                  <a:srgbClr val="595959"/>
-                </a:solidFill>
-              </a:rPr>
-              <a:t>against footprint-free tiles the same distance away</a:t>
-            </a:r>
-            <a:endParaRPr lang="en-US" sz="1050" dirty="0"/>
-          </a:p>
-        </p:txBody>
-      </p:sp>
       <p:pic>
         <p:nvPicPr>
-          <p:cNvPr id="8" name="Image 1" descr="/Users/z5162865/WongLab/AlphaGenome_Ap1/Analysis/slide_figures/panels/s7_importance.png">    </p:cNvPr>
+          <p:cNvPr id="4" name="Image 1" descr="/Users/z5162865/WongLab/AlphaGenome_Ap1/Analysis/slide_figures/panels/s8_partners_all.png">    </p:cNvPr>
           <p:cNvPicPr>
             <a:picLocks noChangeAspect="1"/>
           </p:cNvPicPr>
@@ -9091,8 +8750,8 @@
         </p:blipFill>
         <p:spPr>
           <a:xfrm>
-            <a:off x="6409568" y="1691640"/>
-            <a:ext cx="4920225" cy="3200400"/>
+            <a:off x="3953510" y="2103120"/>
+            <a:ext cx="4254500" cy="3063240"/>
           </a:xfrm>
           <a:prstGeom prst="rect">
             <a:avLst/>
@@ -9101,13 +8760,74 @@
       </p:pic>
       <p:sp>
         <p:nvSpPr>
-          <p:cNvPr id="9" name="lg-dot-5.45-0"/>
+          <p:cNvPr id="5" name="lg-dot-5.72-0"/>
           <p:cNvSpPr/>
           <p:nvPr/>
         </p:nvSpPr>
         <p:spPr>
           <a:xfrm>
-            <a:off x="731520" y="5024628"/>
+            <a:off x="1280160" y="5271516"/>
+            <a:ext cx="109728" cy="109728"/>
+          </a:xfrm>
+          <a:prstGeom prst="ellipse">
+            <a:avLst/>
+          </a:prstGeom>
+          <a:solidFill>
+            <a:srgbClr val="B3B2AE"/>
+          </a:solidFill>
+          <a:ln w="12700">
+            <a:solidFill>
+              <a:srgbClr val="B3B2AE"/>
+            </a:solidFill>
+            <a:prstDash val="solid"/>
+          </a:ln>
+        </p:spPr>
+      </p:sp>
+      <p:sp>
+        <p:nvSpPr>
+          <p:cNvPr id="6" name="lg-txt-5.72-0"/>
+          <p:cNvSpPr txBox="1"/>
+          <p:nvPr/>
+        </p:nvSpPr>
+        <p:spPr>
+          <a:xfrm>
+            <a:off x="1435608" y="5230368"/>
+            <a:ext cx="596189" cy="201168"/>
+          </a:xfrm>
+          <a:prstGeom prst="rect">
+            <a:avLst/>
+          </a:prstGeom>
+          <a:noFill/>
+          <a:ln/>
+        </p:spPr>
+        <p:txBody>
+          <a:bodyPr wrap="square" lIns="0" tIns="0" rIns="0" bIns="0" rtlCol="0" anchor="ctr"/>
+          <a:lstStyle/>
+          <a:p>
+            <a:pPr indent="0" marL="0">
+              <a:buNone/>
+            </a:pPr>
+            <a:r>
+              <a:rPr lang="en-US" sz="1050" dirty="0">
+                <a:solidFill>
+                  <a:srgbClr val="111111"/>
+                </a:solidFill>
+              </a:rPr>
+              <a:t>Stable</a:t>
+            </a:r>
+            <a:endParaRPr lang="en-US" sz="1050" dirty="0"/>
+          </a:p>
+        </p:txBody>
+      </p:sp>
+      <p:sp>
+        <p:nvSpPr>
+          <p:cNvPr id="7" name="lg-dot-5.72-1"/>
+          <p:cNvSpPr/>
+          <p:nvPr/>
+        </p:nvSpPr>
+        <p:spPr>
+          <a:xfrm>
+            <a:off x="2141525" y="5271516"/>
             <a:ext cx="109728" cy="109728"/>
           </a:xfrm>
           <a:prstGeom prst="ellipse">
@@ -9126,14 +8846,14 @@
       </p:sp>
       <p:sp>
         <p:nvSpPr>
-          <p:cNvPr id="10" name="lg-txt-5.45-0"/>
+          <p:cNvPr id="8" name="lg-txt-5.72-1"/>
           <p:cNvSpPr txBox="1"/>
           <p:nvPr/>
         </p:nvSpPr>
         <p:spPr>
           <a:xfrm>
-            <a:off x="886968" y="4983480"/>
-            <a:ext cx="464515" cy="201168"/>
+            <a:off x="2296973" y="5230368"/>
+            <a:ext cx="596189" cy="201168"/>
           </a:xfrm>
           <a:prstGeom prst="rect">
             <a:avLst/>
@@ -9154,7 +8874,7 @@
                   <a:srgbClr val="111111"/>
                 </a:solidFill>
               </a:rPr>
-              <a:t>MEF2</a:t>
+              <a:t>Age Up</a:t>
             </a:r>
             <a:endParaRPr lang="en-US" sz="1050" dirty="0"/>
           </a:p>
@@ -9162,24 +8882,24 @@
       </p:sp>
       <p:sp>
         <p:nvSpPr>
-          <p:cNvPr id="11" name="lg-dot-5.45-1"/>
+          <p:cNvPr id="9" name="lg-dot-5.72-2"/>
           <p:cNvSpPr/>
           <p:nvPr/>
         </p:nvSpPr>
         <p:spPr>
           <a:xfrm>
-            <a:off x="1461211" y="5024628"/>
+            <a:off x="3002890" y="5271516"/>
             <a:ext cx="109728" cy="109728"/>
           </a:xfrm>
           <a:prstGeom prst="ellipse">
             <a:avLst/>
           </a:prstGeom>
           <a:solidFill>
-            <a:srgbClr val="9A9993"/>
+            <a:srgbClr val="1F6FB2"/>
           </a:solidFill>
           <a:ln w="12700">
             <a:solidFill>
-              <a:srgbClr val="9A9993"/>
+              <a:srgbClr val="1F6FB2"/>
             </a:solidFill>
             <a:prstDash val="solid"/>
           </a:ln>
@@ -9187,13 +8907,13 @@
       </p:sp>
       <p:sp>
         <p:nvSpPr>
-          <p:cNvPr id="12" name="lg-txt-5.45-1"/>
+          <p:cNvPr id="10" name="lg-txt-5.72-2"/>
           <p:cNvSpPr txBox="1"/>
           <p:nvPr/>
         </p:nvSpPr>
         <p:spPr>
           <a:xfrm>
-            <a:off x="1616659" y="4983480"/>
+            <a:off x="3158338" y="5230368"/>
             <a:ext cx="727862" cy="201168"/>
           </a:xfrm>
           <a:prstGeom prst="rect">
@@ -9215,7 +8935,7 @@
                   <a:srgbClr val="111111"/>
                 </a:solidFill>
               </a:rPr>
-              <a:t>KLF / SP</a:t>
+              <a:t>Age Down</a:t>
             </a:r>
             <a:endParaRPr lang="en-US" sz="1050" dirty="0"/>
           </a:p>
@@ -9223,14 +8943,39 @@
       </p:sp>
       <p:sp>
         <p:nvSpPr>
-          <p:cNvPr id="13" name="sp-key"/>
+          <p:cNvPr id="11" name="lg-dot-5.72-3"/>
+          <p:cNvSpPr/>
+          <p:nvPr/>
+        </p:nvSpPr>
+        <p:spPr>
+          <a:xfrm>
+            <a:off x="3995928" y="5271516"/>
+            <a:ext cx="109728" cy="109728"/>
+          </a:xfrm>
+          <a:prstGeom prst="ellipse">
+            <a:avLst/>
+          </a:prstGeom>
+          <a:solidFill>
+            <a:srgbClr val="2E7D32"/>
+          </a:solidFill>
+          <a:ln w="12700">
+            <a:solidFill>
+              <a:srgbClr val="2E7D32"/>
+            </a:solidFill>
+            <a:prstDash val="solid"/>
+          </a:ln>
+        </p:spPr>
+      </p:sp>
+      <p:sp>
+        <p:nvSpPr>
+          <p:cNvPr id="12" name="lg-txt-5.72-3"/>
           <p:cNvSpPr txBox="1"/>
           <p:nvPr/>
         </p:nvSpPr>
         <p:spPr>
           <a:xfrm>
-            <a:off x="731520" y="5285232"/>
-            <a:ext cx="10698480" cy="365760"/>
+            <a:off x="4151376" y="5230368"/>
+            <a:ext cx="925373" cy="201168"/>
           </a:xfrm>
           <a:prstGeom prst="rect">
             <a:avLst/>
@@ -9246,12 +8991,109 @@
               <a:buNone/>
             </a:pPr>
             <a:r>
+              <a:rPr lang="en-US" sz="1050" dirty="0">
+                <a:solidFill>
+                  <a:srgbClr val="111111"/>
+                </a:solidFill>
+              </a:rPr>
+              <a:t>Exercise Up</a:t>
+            </a:r>
+            <a:endParaRPr lang="en-US" sz="1050" dirty="0"/>
+          </a:p>
+        </p:txBody>
+      </p:sp>
+      <p:sp>
+        <p:nvSpPr>
+          <p:cNvPr id="13" name="lg-dot-5.72-4"/>
+          <p:cNvSpPr/>
+          <p:nvPr/>
+        </p:nvSpPr>
+        <p:spPr>
+          <a:xfrm>
+            <a:off x="5186477" y="5271516"/>
+            <a:ext cx="109728" cy="109728"/>
+          </a:xfrm>
+          <a:prstGeom prst="ellipse">
+            <a:avLst/>
+          </a:prstGeom>
+          <a:solidFill>
+            <a:srgbClr val="7B3FA0"/>
+          </a:solidFill>
+          <a:ln w="12700">
+            <a:solidFill>
+              <a:srgbClr val="7B3FA0"/>
+            </a:solidFill>
+            <a:prstDash val="solid"/>
+          </a:ln>
+        </p:spPr>
+      </p:sp>
+      <p:sp>
+        <p:nvSpPr>
+          <p:cNvPr id="14" name="lg-txt-5.72-4"/>
+          <p:cNvSpPr txBox="1"/>
+          <p:nvPr/>
+        </p:nvSpPr>
+        <p:spPr>
+          <a:xfrm>
+            <a:off x="5341925" y="5230368"/>
+            <a:ext cx="1057046" cy="201168"/>
+          </a:xfrm>
+          <a:prstGeom prst="rect">
+            <a:avLst/>
+          </a:prstGeom>
+          <a:noFill/>
+          <a:ln/>
+        </p:spPr>
+        <p:txBody>
+          <a:bodyPr wrap="square" lIns="0" tIns="0" rIns="0" bIns="0" rtlCol="0" anchor="ctr"/>
+          <a:lstStyle/>
+          <a:p>
+            <a:pPr indent="0" marL="0">
+              <a:buNone/>
+            </a:pPr>
+            <a:r>
+              <a:rPr lang="en-US" sz="1050" dirty="0">
+                <a:solidFill>
+                  <a:srgbClr val="111111"/>
+                </a:solidFill>
+              </a:rPr>
+              <a:t>Exercise Down</a:t>
+            </a:r>
+            <a:endParaRPr lang="en-US" sz="1050" dirty="0"/>
+          </a:p>
+        </p:txBody>
+      </p:sp>
+      <p:sp>
+        <p:nvSpPr>
+          <p:cNvPr id="15" name="pa-key"/>
+          <p:cNvSpPr txBox="1"/>
+          <p:nvPr/>
+        </p:nvSpPr>
+        <p:spPr>
+          <a:xfrm>
+            <a:off x="1280160" y="5504688"/>
+            <a:ext cx="10149840" cy="274320"/>
+          </a:xfrm>
+          <a:prstGeom prst="rect">
+            <a:avLst/>
+          </a:prstGeom>
+          <a:noFill/>
+          <a:ln/>
+        </p:spPr>
+        <p:txBody>
+          <a:bodyPr wrap="square" lIns="0" tIns="0" rIns="0" bIns="0" rtlCol="0" anchor="ctr"/>
+          <a:lstStyle/>
+          <a:p>
+            <a:pPr indent="0" marL="0">
+              <a:buNone/>
+            </a:pPr>
+            <a:r>
               <a:rPr lang="en-US" sz="950" dirty="0">
                 <a:solidFill>
                   <a:srgbClr val="595959"/>
                 </a:solidFill>
               </a:rPr>
-              <a:t>shaded band on the left: 11–25 bp, where a neighbour abuts the motif.   MEF2 is 2.67× enriched there against 1.47× for KLF/SP (FDR 0.004).</a:t>
+              <a:t>six families shown; tests run over all 20 class-by-family comparisons, smallest FDR 0.02</a:t>
             </a:r>
             <a:endParaRPr lang="en-US" sz="950" dirty="0"/>
           </a:p>
@@ -9259,7 +9101,7 @@
       </p:sp>
       <p:sp>
         <p:nvSpPr>
-          <p:cNvPr id="14" name="Text 0"/>
+          <p:cNvPr id="16" name="Text 0"/>
           <p:cNvSpPr/>
           <p:nvPr>
             <p:ph idx="101" type="body" hasCustomPrompt="1"/>
@@ -9300,7 +9142,7 @@
                   <a:srgbClr val="111111"/>
                 </a:solidFill>
               </a:rPr>
-              <a:t>MEF2 is 2.67× enriched at 11–25 bp and is worth −0.9 log2 there; KLF/SP is the commonest neighbour and is worth nothing anywhere</a:t>
+              <a:t>the ranking is the validation — MEF2, GATA, NFI, TEAD, none of it told to the model; the class split is the question, and no class leans on a different partner</a:t>
             </a:r>
             <a:endParaRPr lang="en-US" sz="1500" dirty="0"/>
           </a:p>
@@ -9408,7 +9250,7 @@
                   <a:schemeClr val="tx1"/>
                 </a:solidFill>
               </a:rPr>
-              <a:t>Age-gained sites are short of that MEF2</a:t>
+              <a:t>MEF2 sits right beside the AP-1 motif, and it matters</a:t>
             </a:r>
             <a:endParaRPr lang="en-US" sz="2800" dirty="0"/>
           </a:p>
@@ -9416,79 +9258,79 @@
       </p:sp>
       <p:sp>
         <p:nvSpPr>
-          <p:cNvPr id="3" name="s9_mef2_by_class-title-0"/>
+          <p:cNvPr id="3" name="sp-t1"/>
           <p:cNvSpPr txBox="1"/>
           <p:nvPr/>
         </p:nvSpPr>
         <p:spPr>
           <a:xfrm>
-            <a:off x="2487168" y="1143000"/>
-            <a:ext cx="3666744" cy="438912"/>
-          </a:xfrm>
-          <a:prstGeom prst="rect">
-            <a:avLst/>
-          </a:prstGeom>
-          <a:noFill/>
-          <a:ln/>
-        </p:spPr>
-        <p:txBody>
-          <a:bodyPr wrap="square" lIns="0" tIns="0" rIns="0" bIns="0" rtlCol="0" anchor="t"/>
+            <a:off x="731520" y="1051560"/>
+            <a:ext cx="4937760" cy="274320"/>
+          </a:xfrm>
+          <a:prstGeom prst="rect">
+            <a:avLst/>
+          </a:prstGeom>
+          <a:noFill/>
+          <a:ln/>
+        </p:spPr>
+        <p:txBody>
+          <a:bodyPr wrap="square" lIns="0" tIns="0" rIns="0" bIns="0" rtlCol="0" anchor="ctr"/>
           <a:lstStyle/>
           <a:p>
             <a:pPr indent="0" marL="0">
               <a:buNone/>
             </a:pPr>
             <a:r>
-              <a:rPr lang="en-US" sz="1250" b="1" dirty="0">
+              <a:rPr lang="en-US" sz="1350" b="1" dirty="0">
                 <a:solidFill>
                   <a:srgbClr val="111111"/>
                 </a:solidFill>
               </a:rPr>
-              <a:t>A MEF2 footprint within 25 bp</a:t>
-            </a:r>
-            <a:endParaRPr lang="en-US" sz="1250" dirty="0"/>
-          </a:p>
-        </p:txBody>
-      </p:sp>
-      <p:sp>
-        <p:nvSpPr>
-          <p:cNvPr id="4" name="s9_mef2_by_class-sub-0"/>
+              <a:t>How often a partner sits there</a:t>
+            </a:r>
+            <a:endParaRPr lang="en-US" sz="1350" dirty="0"/>
+          </a:p>
+        </p:txBody>
+      </p:sp>
+      <p:sp>
+        <p:nvSpPr>
+          <p:cNvPr id="4" name="sp-s1"/>
           <p:cNvSpPr txBox="1"/>
           <p:nvPr/>
         </p:nvSpPr>
         <p:spPr>
           <a:xfrm>
-            <a:off x="2487168" y="1572768"/>
-            <a:ext cx="3666744" cy="310896"/>
-          </a:xfrm>
-          <a:prstGeom prst="rect">
-            <a:avLst/>
-          </a:prstGeom>
-          <a:noFill/>
-          <a:ln/>
-        </p:spPr>
-        <p:txBody>
-          <a:bodyPr wrap="square" lIns="0" tIns="0" rIns="0" bIns="0" rtlCol="0" anchor="t"/>
+            <a:off x="731520" y="1335024"/>
+            <a:ext cx="4937760" cy="274320"/>
+          </a:xfrm>
+          <a:prstGeom prst="rect">
+            <a:avLst/>
+          </a:prstGeom>
+          <a:noFill/>
+          <a:ln/>
+        </p:spPr>
+        <p:txBody>
+          <a:bodyPr wrap="square" lIns="0" tIns="0" rIns="0" bIns="0" rtlCol="0" anchor="ctr"/>
           <a:lstStyle/>
           <a:p>
             <a:pPr indent="0" marL="0">
               <a:buNone/>
             </a:pPr>
             <a:r>
-              <a:rPr lang="en-US" sz="950" dirty="0">
+              <a:rPr lang="en-US" sz="1050" dirty="0">
                 <a:solidFill>
                   <a:srgbClr val="595959"/>
                 </a:solidFill>
               </a:rPr>
-              <a:t>counting footprints, used by the model or not</a:t>
-            </a:r>
-            <a:endParaRPr lang="en-US" sz="950" dirty="0"/>
+              <a:t>every footprint of that family, important or not</a:t>
+            </a:r>
+            <a:endParaRPr lang="en-US" sz="1050" dirty="0"/>
           </a:p>
         </p:txBody>
       </p:sp>
       <p:pic>
         <p:nvPicPr>
-          <p:cNvPr id="5" name="Image 0" descr="/Users/z5162865/WongLab/AlphaGenome_Ap1/Analysis/slide_figures/panels/s9_mef2_by_class_c0_r0.png">    </p:cNvPr>
+          <p:cNvPr id="5" name="Image 0" descr="/Users/z5162865/WongLab/AlphaGenome_Ap1/Analysis/slide_figures/panels/s7_occurrence.png">    </p:cNvPr>
           <p:cNvPicPr>
             <a:picLocks noChangeAspect="1"/>
           </p:cNvPicPr>
@@ -9502,8 +9344,8 @@
         </p:blipFill>
         <p:spPr>
           <a:xfrm>
-            <a:off x="2771546" y="1892808"/>
-            <a:ext cx="3097987" cy="2816352"/>
+            <a:off x="757624" y="1691640"/>
+            <a:ext cx="4885551" cy="3200400"/>
           </a:xfrm>
           <a:prstGeom prst="rect">
             <a:avLst/>
@@ -9512,79 +9354,79 @@
       </p:pic>
       <p:sp>
         <p:nvSpPr>
-          <p:cNvPr id="6" name="s9_mef2_by_class-title-1"/>
+          <p:cNvPr id="6" name="sp-t2"/>
           <p:cNvSpPr txBox="1"/>
           <p:nvPr/>
         </p:nvSpPr>
         <p:spPr>
           <a:xfrm>
-            <a:off x="6227064" y="1143000"/>
-            <a:ext cx="3666744" cy="438912"/>
-          </a:xfrm>
-          <a:prstGeom prst="rect">
-            <a:avLst/>
-          </a:prstGeom>
-          <a:noFill/>
-          <a:ln/>
-        </p:spPr>
-        <p:txBody>
-          <a:bodyPr wrap="square" lIns="0" tIns="0" rIns="0" bIns="0" rtlCol="0" anchor="t"/>
+            <a:off x="6309360" y="1051560"/>
+            <a:ext cx="5120640" cy="274320"/>
+          </a:xfrm>
+          <a:prstGeom prst="rect">
+            <a:avLst/>
+          </a:prstGeom>
+          <a:noFill/>
+          <a:ln/>
+        </p:spPr>
+        <p:txBody>
+          <a:bodyPr wrap="square" lIns="0" tIns="0" rIns="0" bIns="0" rtlCol="0" anchor="ctr"/>
           <a:lstStyle/>
           <a:p>
             <a:pPr indent="0" marL="0">
               <a:buNone/>
             </a:pPr>
             <a:r>
-              <a:rPr lang="en-US" sz="1250" b="1" dirty="0">
+              <a:rPr lang="en-US" sz="1350" b="1" dirty="0">
                 <a:solidFill>
                   <a:srgbClr val="111111"/>
                 </a:solidFill>
               </a:rPr>
-              <a:t>...one the model actually leans on</a:t>
-            </a:r>
-            <a:endParaRPr lang="en-US" sz="1250" dirty="0"/>
-          </a:p>
-        </p:txBody>
-      </p:sp>
-      <p:sp>
-        <p:nvSpPr>
-          <p:cNvPr id="7" name="s9_mef2_by_class-sub-1"/>
+              <a:t>How much it matters there</a:t>
+            </a:r>
+            <a:endParaRPr lang="en-US" sz="1350" dirty="0"/>
+          </a:p>
+        </p:txBody>
+      </p:sp>
+      <p:sp>
+        <p:nvSpPr>
+          <p:cNvPr id="7" name="sp-s2"/>
           <p:cNvSpPr txBox="1"/>
           <p:nvPr/>
         </p:nvSpPr>
         <p:spPr>
           <a:xfrm>
-            <a:off x="6227064" y="1572768"/>
-            <a:ext cx="3666744" cy="310896"/>
-          </a:xfrm>
-          <a:prstGeom prst="rect">
-            <a:avLst/>
-          </a:prstGeom>
-          <a:noFill/>
-          <a:ln/>
-        </p:spPr>
-        <p:txBody>
-          <a:bodyPr wrap="square" lIns="0" tIns="0" rIns="0" bIns="0" rtlCol="0" anchor="t"/>
+            <a:off x="6309360" y="1335024"/>
+            <a:ext cx="5120640" cy="274320"/>
+          </a:xfrm>
+          <a:prstGeom prst="rect">
+            <a:avLst/>
+          </a:prstGeom>
+          <a:noFill/>
+          <a:ln/>
+        </p:spPr>
+        <p:txBody>
+          <a:bodyPr wrap="square" lIns="0" tIns="0" rIns="0" bIns="0" rtlCol="0" anchor="ctr"/>
           <a:lstStyle/>
           <a:p>
             <a:pPr indent="0" marL="0">
               <a:buNone/>
             </a:pPr>
             <a:r>
-              <a:rPr lang="en-US" sz="950" dirty="0">
+              <a:rPr lang="en-US" sz="1050" dirty="0">
                 <a:solidFill>
                   <a:srgbClr val="595959"/>
                 </a:solidFill>
               </a:rPr>
-              <a:t>restricted to tiles worth more than 0.2 log2</a:t>
-            </a:r>
-            <a:endParaRPr lang="en-US" sz="950" dirty="0"/>
+              <a:t>against footprint-free tiles the same distance away</a:t>
+            </a:r>
+            <a:endParaRPr lang="en-US" sz="1050" dirty="0"/>
           </a:p>
         </p:txBody>
       </p:sp>
       <p:pic>
         <p:nvPicPr>
-          <p:cNvPr id="8" name="Image 1" descr="/Users/z5162865/WongLab/AlphaGenome_Ap1/Analysis/slide_figures/panels/s9_mef2_by_class_c1_r0.png">    </p:cNvPr>
+          <p:cNvPr id="8" name="Image 1" descr="/Users/z5162865/WongLab/AlphaGenome_Ap1/Analysis/slide_figures/panels/s7_importance.png">    </p:cNvPr>
           <p:cNvPicPr>
             <a:picLocks noChangeAspect="1"/>
           </p:cNvPicPr>
@@ -9598,8 +9440,8 @@
         </p:blipFill>
         <p:spPr>
           <a:xfrm>
-            <a:off x="6511442" y="1892808"/>
-            <a:ext cx="3097987" cy="2816352"/>
+            <a:off x="6409568" y="1691640"/>
+            <a:ext cx="4920225" cy="3200400"/>
           </a:xfrm>
           <a:prstGeom prst="rect">
             <a:avLst/>
@@ -9608,74 +9450,13 @@
       </p:pic>
       <p:sp>
         <p:nvSpPr>
-          <p:cNvPr id="9" name="s9_mef2_by_class-dot-0"/>
+          <p:cNvPr id="9" name="lg-dot-5.45-0"/>
           <p:cNvSpPr/>
           <p:nvPr/>
         </p:nvSpPr>
         <p:spPr>
           <a:xfrm>
-            <a:off x="2377440" y="4914900"/>
-            <a:ext cx="109728" cy="109728"/>
-          </a:xfrm>
-          <a:prstGeom prst="ellipse">
-            <a:avLst/>
-          </a:prstGeom>
-          <a:solidFill>
-            <a:srgbClr val="4F4F4F"/>
-          </a:solidFill>
-          <a:ln w="12700">
-            <a:solidFill>
-              <a:srgbClr val="4F4F4F"/>
-            </a:solidFill>
-            <a:prstDash val="solid"/>
-          </a:ln>
-        </p:spPr>
-      </p:sp>
-      <p:sp>
-        <p:nvSpPr>
-          <p:cNvPr id="10" name="s9_mef2_by_class-leg-0"/>
-          <p:cNvSpPr txBox="1"/>
-          <p:nvPr/>
-        </p:nvSpPr>
-        <p:spPr>
-          <a:xfrm>
-            <a:off x="2532888" y="4873752"/>
-            <a:ext cx="1057046" cy="201168"/>
-          </a:xfrm>
-          <a:prstGeom prst="rect">
-            <a:avLst/>
-          </a:prstGeom>
-          <a:noFill/>
-          <a:ln/>
-        </p:spPr>
-        <p:txBody>
-          <a:bodyPr wrap="square" lIns="0" tIns="0" rIns="0" bIns="0" rtlCol="0" anchor="ctr"/>
-          <a:lstStyle/>
-          <a:p>
-            <a:pPr indent="0" marL="0">
-              <a:buNone/>
-            </a:pPr>
-            <a:r>
-              <a:rPr lang="en-US" sz="1050" dirty="0">
-                <a:solidFill>
-                  <a:srgbClr val="111111"/>
-                </a:solidFill>
-              </a:rPr>
-              <a:t>Dynamic (all)</a:t>
-            </a:r>
-            <a:endParaRPr lang="en-US" sz="1050" dirty="0"/>
-          </a:p>
-        </p:txBody>
-      </p:sp>
-      <p:sp>
-        <p:nvSpPr>
-          <p:cNvPr id="11" name="s9_mef2_by_class-dot-1"/>
-          <p:cNvSpPr/>
-          <p:nvPr/>
-        </p:nvSpPr>
-        <p:spPr>
-          <a:xfrm>
-            <a:off x="3699662" y="4914900"/>
+            <a:off x="731520" y="5024628"/>
             <a:ext cx="109728" cy="109728"/>
           </a:xfrm>
           <a:prstGeom prst="ellipse">
@@ -9694,14 +9475,14 @@
       </p:sp>
       <p:sp>
         <p:nvSpPr>
-          <p:cNvPr id="12" name="s9_mef2_by_class-leg-1"/>
+          <p:cNvPr id="10" name="lg-txt-5.45-0"/>
           <p:cNvSpPr txBox="1"/>
           <p:nvPr/>
         </p:nvSpPr>
         <p:spPr>
           <a:xfrm>
-            <a:off x="3855110" y="4873752"/>
-            <a:ext cx="596189" cy="201168"/>
+            <a:off x="886968" y="4983480"/>
+            <a:ext cx="464515" cy="201168"/>
           </a:xfrm>
           <a:prstGeom prst="rect">
             <a:avLst/>
@@ -9722,7 +9503,7 @@
                   <a:srgbClr val="111111"/>
                 </a:solidFill>
               </a:rPr>
-              <a:t>Age Up</a:t>
+              <a:t>MEF2</a:t>
             </a:r>
             <a:endParaRPr lang="en-US" sz="1050" dirty="0"/>
           </a:p>
@@ -9730,24 +9511,24 @@
       </p:sp>
       <p:sp>
         <p:nvSpPr>
-          <p:cNvPr id="13" name="s9_mef2_by_class-dot-2"/>
+          <p:cNvPr id="11" name="lg-dot-5.45-1"/>
           <p:cNvSpPr/>
           <p:nvPr/>
         </p:nvSpPr>
         <p:spPr>
           <a:xfrm>
-            <a:off x="4561027" y="4914900"/>
+            <a:off x="1461211" y="5024628"/>
             <a:ext cx="109728" cy="109728"/>
           </a:xfrm>
           <a:prstGeom prst="ellipse">
             <a:avLst/>
           </a:prstGeom>
           <a:solidFill>
-            <a:srgbClr val="1F6FB2"/>
+            <a:srgbClr val="9A9993"/>
           </a:solidFill>
           <a:ln w="12700">
             <a:solidFill>
-              <a:srgbClr val="1F6FB2"/>
+              <a:srgbClr val="9A9993"/>
             </a:solidFill>
             <a:prstDash val="solid"/>
           </a:ln>
@@ -9755,13 +9536,13 @@
       </p:sp>
       <p:sp>
         <p:nvSpPr>
-          <p:cNvPr id="14" name="s9_mef2_by_class-leg-2"/>
+          <p:cNvPr id="12" name="lg-txt-5.45-1"/>
           <p:cNvSpPr txBox="1"/>
           <p:nvPr/>
         </p:nvSpPr>
         <p:spPr>
           <a:xfrm>
-            <a:off x="4716475" y="4873752"/>
+            <a:off x="1616659" y="4983480"/>
             <a:ext cx="727862" cy="201168"/>
           </a:xfrm>
           <a:prstGeom prst="rect">
@@ -9783,7 +9564,7 @@
                   <a:srgbClr val="111111"/>
                 </a:solidFill>
               </a:rPr>
-              <a:t>Age Down</a:t>
+              <a:t>KLF / SP</a:t>
             </a:r>
             <a:endParaRPr lang="en-US" sz="1050" dirty="0"/>
           </a:p>
@@ -9791,39 +9572,14 @@
       </p:sp>
       <p:sp>
         <p:nvSpPr>
-          <p:cNvPr id="15" name="s9_mef2_by_class-dot-3"/>
-          <p:cNvSpPr/>
-          <p:nvPr/>
-        </p:nvSpPr>
-        <p:spPr>
-          <a:xfrm>
-            <a:off x="5554066" y="4914900"/>
-            <a:ext cx="109728" cy="109728"/>
-          </a:xfrm>
-          <a:prstGeom prst="ellipse">
-            <a:avLst/>
-          </a:prstGeom>
-          <a:solidFill>
-            <a:srgbClr val="2E7D32"/>
-          </a:solidFill>
-          <a:ln w="12700">
-            <a:solidFill>
-              <a:srgbClr val="2E7D32"/>
-            </a:solidFill>
-            <a:prstDash val="solid"/>
-          </a:ln>
-        </p:spPr>
-      </p:sp>
-      <p:sp>
-        <p:nvSpPr>
-          <p:cNvPr id="16" name="s9_mef2_by_class-leg-3"/>
+          <p:cNvPr id="13" name="sp-key"/>
           <p:cNvSpPr txBox="1"/>
           <p:nvPr/>
         </p:nvSpPr>
         <p:spPr>
           <a:xfrm>
-            <a:off x="5709514" y="4873752"/>
-            <a:ext cx="925373" cy="201168"/>
+            <a:off x="731520" y="5285232"/>
+            <a:ext cx="10698480" cy="365760"/>
           </a:xfrm>
           <a:prstGeom prst="rect">
             <a:avLst/>
@@ -9839,178 +9595,20 @@
               <a:buNone/>
             </a:pPr>
             <a:r>
-              <a:rPr lang="en-US" sz="1050" dirty="0">
-                <a:solidFill>
-                  <a:srgbClr val="111111"/>
-                </a:solidFill>
-              </a:rPr>
-              <a:t>Exercise Up</a:t>
-            </a:r>
-            <a:endParaRPr lang="en-US" sz="1050" dirty="0"/>
-          </a:p>
-        </p:txBody>
-      </p:sp>
-      <p:sp>
-        <p:nvSpPr>
-          <p:cNvPr id="17" name="s9_mef2_by_class-dot-4"/>
-          <p:cNvSpPr/>
-          <p:nvPr/>
-        </p:nvSpPr>
-        <p:spPr>
-          <a:xfrm>
-            <a:off x="6744614" y="4914900"/>
-            <a:ext cx="109728" cy="109728"/>
-          </a:xfrm>
-          <a:prstGeom prst="ellipse">
-            <a:avLst/>
-          </a:prstGeom>
-          <a:solidFill>
-            <a:srgbClr val="7B3FA0"/>
-          </a:solidFill>
-          <a:ln w="12700">
-            <a:solidFill>
-              <a:srgbClr val="7B3FA0"/>
-            </a:solidFill>
-            <a:prstDash val="solid"/>
-          </a:ln>
-        </p:spPr>
-      </p:sp>
-      <p:sp>
-        <p:nvSpPr>
-          <p:cNvPr id="18" name="s9_mef2_by_class-leg-4"/>
-          <p:cNvSpPr txBox="1"/>
-          <p:nvPr/>
-        </p:nvSpPr>
-        <p:spPr>
-          <a:xfrm>
-            <a:off x="6900062" y="4873752"/>
-            <a:ext cx="1057046" cy="201168"/>
-          </a:xfrm>
-          <a:prstGeom prst="rect">
-            <a:avLst/>
-          </a:prstGeom>
-          <a:noFill/>
-          <a:ln/>
-        </p:spPr>
-        <p:txBody>
-          <a:bodyPr wrap="square" lIns="0" tIns="0" rIns="0" bIns="0" rtlCol="0" anchor="ctr"/>
-          <a:lstStyle/>
-          <a:p>
-            <a:pPr indent="0" marL="0">
-              <a:buNone/>
-            </a:pPr>
-            <a:r>
-              <a:rPr lang="en-US" sz="1050" dirty="0">
-                <a:solidFill>
-                  <a:srgbClr val="111111"/>
-                </a:solidFill>
-              </a:rPr>
-              <a:t>Exercise Down</a:t>
-            </a:r>
-            <a:endParaRPr lang="en-US" sz="1050" dirty="0"/>
-          </a:p>
-        </p:txBody>
-      </p:sp>
-      <p:sp>
-        <p:nvSpPr>
-          <p:cNvPr id="19" name="s9_mef2_by_class-dot-5"/>
-          <p:cNvSpPr/>
-          <p:nvPr/>
-        </p:nvSpPr>
-        <p:spPr>
-          <a:xfrm>
-            <a:off x="8066837" y="4914900"/>
-            <a:ext cx="109728" cy="109728"/>
-          </a:xfrm>
-          <a:prstGeom prst="ellipse">
-            <a:avLst/>
-          </a:prstGeom>
-          <a:solidFill>
-            <a:srgbClr val="B3B2AE"/>
-          </a:solidFill>
-          <a:ln w="12700">
-            <a:solidFill>
-              <a:srgbClr val="B3B2AE"/>
-            </a:solidFill>
-            <a:prstDash val="solid"/>
-          </a:ln>
-        </p:spPr>
-      </p:sp>
-      <p:sp>
-        <p:nvSpPr>
-          <p:cNvPr id="20" name="s9_mef2_by_class-leg-5"/>
-          <p:cNvSpPr txBox="1"/>
-          <p:nvPr/>
-        </p:nvSpPr>
-        <p:spPr>
-          <a:xfrm>
-            <a:off x="8222285" y="4873752"/>
-            <a:ext cx="1781251" cy="201168"/>
-          </a:xfrm>
-          <a:prstGeom prst="rect">
-            <a:avLst/>
-          </a:prstGeom>
-          <a:noFill/>
-          <a:ln/>
-        </p:spPr>
-        <p:txBody>
-          <a:bodyPr wrap="square" lIns="0" tIns="0" rIns="0" bIns="0" rtlCol="0" anchor="ctr"/>
-          <a:lstStyle/>
-          <a:p>
-            <a:pPr indent="0" marL="0">
-              <a:buNone/>
-            </a:pPr>
-            <a:r>
-              <a:rPr lang="en-US" sz="1050" dirty="0">
-                <a:solidFill>
-                  <a:srgbClr val="111111"/>
-                </a:solidFill>
-              </a:rPr>
-              <a:t>Stable (all 2,907 sites)</a:t>
-            </a:r>
-            <a:endParaRPr lang="en-US" sz="1050" dirty="0"/>
-          </a:p>
-        </p:txBody>
-      </p:sp>
-      <p:sp>
-        <p:nvSpPr>
-          <p:cNvPr id="21" name="s9_mef2_by_class-key"/>
-          <p:cNvSpPr txBox="1"/>
-          <p:nvPr/>
-        </p:nvSpPr>
-        <p:spPr>
-          <a:xfrm>
-            <a:off x="2377440" y="5148072"/>
-            <a:ext cx="7589520" cy="502920"/>
-          </a:xfrm>
-          <a:prstGeom prst="rect">
-            <a:avLst/>
-          </a:prstGeom>
-          <a:noFill/>
-          <a:ln/>
-        </p:spPr>
-        <p:txBody>
-          <a:bodyPr wrap="square" lIns="0" tIns="0" rIns="0" bIns="0" rtlCol="0" anchor="ctr"/>
-          <a:lstStyle/>
-          <a:p>
-            <a:pPr indent="0" marL="0">
-              <a:buNone/>
-            </a:pPr>
-            <a:r>
-              <a:rPr lang="en-US" sz="900" dirty="0">
+              <a:rPr lang="en-US" sz="950" dirty="0">
                 <a:solidFill>
                   <a:srgbClr val="595959"/>
                 </a:solidFill>
               </a:rPr>
-              <a:t>grey line and band: all 2,907 Stable sites with a 95% bootstrap CI.   Fisher's exact test against that reference, BH across all 10 tests on this figure.   *** p&lt;0.001   ** p&lt;0.01   * p&lt;0.05   ns ≥ 0.05</a:t>
-            </a:r>
-            <a:endParaRPr lang="en-US" sz="900" dirty="0"/>
-          </a:p>
-        </p:txBody>
-      </p:sp>
-      <p:sp>
-        <p:nvSpPr>
-          <p:cNvPr id="22" name="Text 0"/>
+              <a:t>shaded band on the left: 11–25 bp, where a neighbour abuts the motif.   MEF2 is 2.67× enriched there against 1.47× for KLF/SP (FDR 0.004).</a:t>
+            </a:r>
+            <a:endParaRPr lang="en-US" sz="950" dirty="0"/>
+          </a:p>
+        </p:txBody>
+      </p:sp>
+      <p:sp>
+        <p:nvSpPr>
+          <p:cNvPr id="14" name="Text 0"/>
           <p:cNvSpPr/>
           <p:nvPr>
             <p:ph idx="101" type="body" hasCustomPrompt="1"/>
@@ -10051,7 +9649,7 @@
                   <a:srgbClr val="111111"/>
                 </a:solidFill>
               </a:rPr>
-              <a:t>Age Up 5.8% and Exercise Down 5.4% carry a close MEF2, against 8.5% of Stable sites — and the gap is sharper when only the MEF2 the model uses is counted</a:t>
+              <a:t>MEF2 is 2.67× enriched at 11–25 bp and is worth −0.9 log2 there; KLF/SP is the commonest neighbour and is worth nothing anywhere</a:t>
             </a:r>
             <a:endParaRPr lang="en-US" sz="1500" dirty="0"/>
           </a:p>
@@ -10159,7 +9757,7 @@
                   <a:schemeClr val="tx1"/>
                 </a:solidFill>
               </a:rPr>
-              <a:t>Is the partner missing, or just worth less?</a:t>
+              <a:t>Age-gained sites are short of that MEF2</a:t>
             </a:r>
             <a:endParaRPr lang="en-US" sz="2800" dirty="0"/>
           </a:p>
@@ -10167,79 +9765,79 @@
       </p:sp>
       <p:sp>
         <p:nvSpPr>
-          <p:cNvPr id="3" name="or-intro"/>
+          <p:cNvPr id="3" name="s9_mef2_by_class-title-0"/>
           <p:cNvSpPr txBox="1"/>
           <p:nvPr/>
         </p:nvSpPr>
         <p:spPr>
           <a:xfrm>
-            <a:off x="731520" y="1005840"/>
-            <a:ext cx="10881360" cy="420624"/>
-          </a:xfrm>
-          <a:prstGeom prst="rect">
-            <a:avLst/>
-          </a:prstGeom>
-          <a:noFill/>
-          <a:ln/>
-        </p:spPr>
-        <p:txBody>
-          <a:bodyPr wrap="square" lIns="0" tIns="0" rIns="0" bIns="0" rtlCol="0" anchor="ctr"/>
+            <a:off x="2487168" y="1143000"/>
+            <a:ext cx="3666744" cy="438912"/>
+          </a:xfrm>
+          <a:prstGeom prst="rect">
+            <a:avLst/>
+          </a:prstGeom>
+          <a:noFill/>
+          <a:ln/>
+        </p:spPr>
+        <p:txBody>
+          <a:bodyPr wrap="square" lIns="0" tIns="0" rIns="0" bIns="0" rtlCol="0" anchor="t"/>
           <a:lstStyle/>
           <a:p>
             <a:pPr indent="0" marL="0">
               <a:buNone/>
             </a:pPr>
             <a:r>
-              <a:rPr lang="en-US" sz="1150" dirty="0">
+              <a:rPr lang="en-US" sz="1250" b="1" dirty="0">
+                <a:solidFill>
+                  <a:srgbClr val="111111"/>
+                </a:solidFill>
+              </a:rPr>
+              <a:t>A MEF2 footprint within 25 bp</a:t>
+            </a:r>
+            <a:endParaRPr lang="en-US" sz="1250" dirty="0"/>
+          </a:p>
+        </p:txBody>
+      </p:sp>
+      <p:sp>
+        <p:nvSpPr>
+          <p:cNvPr id="4" name="s9_mef2_by_class-sub-0"/>
+          <p:cNvSpPr txBox="1"/>
+          <p:nvPr/>
+        </p:nvSpPr>
+        <p:spPr>
+          <a:xfrm>
+            <a:off x="2487168" y="1572768"/>
+            <a:ext cx="3666744" cy="310896"/>
+          </a:xfrm>
+          <a:prstGeom prst="rect">
+            <a:avLst/>
+          </a:prstGeom>
+          <a:noFill/>
+          <a:ln/>
+        </p:spPr>
+        <p:txBody>
+          <a:bodyPr wrap="square" lIns="0" tIns="0" rIns="0" bIns="0" rtlCol="0" anchor="t"/>
+          <a:lstStyle/>
+          <a:p>
+            <a:pPr indent="0" marL="0">
+              <a:buNone/>
+            </a:pPr>
+            <a:r>
+              <a:rPr lang="en-US" sz="950" dirty="0">
                 <a:solidFill>
                   <a:srgbClr val="595959"/>
                 </a:solidFill>
               </a:rPr>
-              <a:t>Rank the 60 windows within each element, take the three most damaging, and ask whether any covers that family’s footprint. A within-element question, so a class with less total dependence is not penalised for it.</a:t>
-            </a:r>
-            <a:endParaRPr lang="en-US" sz="1150" dirty="0"/>
-          </a:p>
-        </p:txBody>
-      </p:sp>
-      <p:sp>
-        <p:nvSpPr>
-          <p:cNvPr id="4" name="or-t1"/>
-          <p:cNvSpPr txBox="1"/>
-          <p:nvPr/>
-        </p:nvSpPr>
-        <p:spPr>
-          <a:xfrm>
-            <a:off x="1371600" y="1572768"/>
-            <a:ext cx="4572000" cy="256032"/>
-          </a:xfrm>
-          <a:prstGeom prst="rect">
-            <a:avLst/>
-          </a:prstGeom>
-          <a:noFill/>
-          <a:ln/>
-        </p:spPr>
-        <p:txBody>
-          <a:bodyPr wrap="square" lIns="0" tIns="0" rIns="0" bIns="0" rtlCol="0" anchor="ctr"/>
-          <a:lstStyle/>
-          <a:p>
-            <a:pPr indent="0" marL="0">
-              <a:buNone/>
-            </a:pPr>
-            <a:r>
-              <a:rPr lang="en-US" sz="1350" b="1" dirty="0">
-                <a:solidFill>
-                  <a:srgbClr val="111111"/>
-                </a:solidFill>
-              </a:rPr>
-              <a:t>MEF2</a:t>
-            </a:r>
-            <a:endParaRPr lang="en-US" sz="1350" dirty="0"/>
+              <a:t>counting footprints, used by the model or not</a:t>
+            </a:r>
+            <a:endParaRPr lang="en-US" sz="950" dirty="0"/>
           </a:p>
         </p:txBody>
       </p:sp>
       <p:pic>
         <p:nvPicPr>
-          <p:cNvPr id="5" name="Image 0" descr="/Users/z5162865/WongLab/AlphaGenome_Ap1/Analysis/slide_figures/panels/s10_mef2_all.png">    </p:cNvPr>
+          <p:cNvPr id="5" name="Image 0" descr="/Users/z5162865/WongLab/AlphaGenome_Ap1/Analysis/slide_figures/panels/s9_mef2_by_class_c0_r0.png">    </p:cNvPr>
           <p:cNvPicPr>
             <a:picLocks noChangeAspect="1"/>
           </p:cNvPicPr>
@@ -10253,8 +9851,8 @@
         </p:blipFill>
         <p:spPr>
           <a:xfrm>
-            <a:off x="1730862" y="1883664"/>
-            <a:ext cx="3853476" cy="3017520"/>
+            <a:off x="2771546" y="1892808"/>
+            <a:ext cx="3097987" cy="2816352"/>
           </a:xfrm>
           <a:prstGeom prst="rect">
             <a:avLst/>
@@ -10263,43 +9861,79 @@
       </p:pic>
       <p:sp>
         <p:nvSpPr>
-          <p:cNvPr id="6" name="or-t2"/>
+          <p:cNvPr id="6" name="s9_mef2_by_class-title-1"/>
           <p:cNvSpPr txBox="1"/>
           <p:nvPr/>
         </p:nvSpPr>
         <p:spPr>
           <a:xfrm>
-            <a:off x="6400800" y="1572768"/>
-            <a:ext cx="4572000" cy="256032"/>
-          </a:xfrm>
-          <a:prstGeom prst="rect">
-            <a:avLst/>
-          </a:prstGeom>
-          <a:noFill/>
-          <a:ln/>
-        </p:spPr>
-        <p:txBody>
-          <a:bodyPr wrap="square" lIns="0" tIns="0" rIns="0" bIns="0" rtlCol="0" anchor="ctr"/>
+            <a:off x="6227064" y="1143000"/>
+            <a:ext cx="3666744" cy="438912"/>
+          </a:xfrm>
+          <a:prstGeom prst="rect">
+            <a:avLst/>
+          </a:prstGeom>
+          <a:noFill/>
+          <a:ln/>
+        </p:spPr>
+        <p:txBody>
+          <a:bodyPr wrap="square" lIns="0" tIns="0" rIns="0" bIns="0" rtlCol="0" anchor="t"/>
           <a:lstStyle/>
           <a:p>
             <a:pPr indent="0" marL="0">
               <a:buNone/>
             </a:pPr>
             <a:r>
-              <a:rPr lang="en-US" sz="1350" b="1" dirty="0">
+              <a:rPr lang="en-US" sz="1250" b="1" dirty="0">
                 <a:solidFill>
                   <a:srgbClr val="111111"/>
                 </a:solidFill>
               </a:rPr>
-              <a:t>A second AP-1 footprint</a:t>
-            </a:r>
-            <a:endParaRPr lang="en-US" sz="1350" dirty="0"/>
+              <a:t>...one the model actually leans on</a:t>
+            </a:r>
+            <a:endParaRPr lang="en-US" sz="1250" dirty="0"/>
+          </a:p>
+        </p:txBody>
+      </p:sp>
+      <p:sp>
+        <p:nvSpPr>
+          <p:cNvPr id="7" name="s9_mef2_by_class-sub-1"/>
+          <p:cNvSpPr txBox="1"/>
+          <p:nvPr/>
+        </p:nvSpPr>
+        <p:spPr>
+          <a:xfrm>
+            <a:off x="6227064" y="1572768"/>
+            <a:ext cx="3666744" cy="310896"/>
+          </a:xfrm>
+          <a:prstGeom prst="rect">
+            <a:avLst/>
+          </a:prstGeom>
+          <a:noFill/>
+          <a:ln/>
+        </p:spPr>
+        <p:txBody>
+          <a:bodyPr wrap="square" lIns="0" tIns="0" rIns="0" bIns="0" rtlCol="0" anchor="t"/>
+          <a:lstStyle/>
+          <a:p>
+            <a:pPr indent="0" marL="0">
+              <a:buNone/>
+            </a:pPr>
+            <a:r>
+              <a:rPr lang="en-US" sz="950" dirty="0">
+                <a:solidFill>
+                  <a:srgbClr val="595959"/>
+                </a:solidFill>
+              </a:rPr>
+              <a:t>restricted to tiles worth more than 0.2 log2</a:t>
+            </a:r>
+            <a:endParaRPr lang="en-US" sz="950" dirty="0"/>
           </a:p>
         </p:txBody>
       </p:sp>
       <p:pic>
         <p:nvPicPr>
-          <p:cNvPr id="7" name="Image 1" descr="/Users/z5162865/WongLab/AlphaGenome_Ap1/Analysis/slide_figures/panels/s10_ap1.png">    </p:cNvPr>
+          <p:cNvPr id="8" name="Image 1" descr="/Users/z5162865/WongLab/AlphaGenome_Ap1/Analysis/slide_figures/panels/s9_mef2_by_class_c1_r0.png">    </p:cNvPr>
           <p:cNvPicPr>
             <a:picLocks noChangeAspect="1"/>
           </p:cNvPicPr>
@@ -10313,8 +9947,8 @@
         </p:blipFill>
         <p:spPr>
           <a:xfrm>
-            <a:off x="6760062" y="1883664"/>
-            <a:ext cx="3853476" cy="3017520"/>
+            <a:off x="6511442" y="1892808"/>
+            <a:ext cx="3097987" cy="2816352"/>
           </a:xfrm>
           <a:prstGeom prst="rect">
             <a:avLst/>
@@ -10323,13 +9957,74 @@
       </p:pic>
       <p:sp>
         <p:nvSpPr>
-          <p:cNvPr id="8" name="lg-dot-5.5-0"/>
+          <p:cNvPr id="9" name="s9_mef2_by_class-dot-0"/>
           <p:cNvSpPr/>
           <p:nvPr/>
         </p:nvSpPr>
         <p:spPr>
           <a:xfrm>
-            <a:off x="1371600" y="5070348"/>
+            <a:off x="2377440" y="4914900"/>
+            <a:ext cx="109728" cy="109728"/>
+          </a:xfrm>
+          <a:prstGeom prst="ellipse">
+            <a:avLst/>
+          </a:prstGeom>
+          <a:solidFill>
+            <a:srgbClr val="4F4F4F"/>
+          </a:solidFill>
+          <a:ln w="12700">
+            <a:solidFill>
+              <a:srgbClr val="4F4F4F"/>
+            </a:solidFill>
+            <a:prstDash val="solid"/>
+          </a:ln>
+        </p:spPr>
+      </p:sp>
+      <p:sp>
+        <p:nvSpPr>
+          <p:cNvPr id="10" name="s9_mef2_by_class-leg-0"/>
+          <p:cNvSpPr txBox="1"/>
+          <p:nvPr/>
+        </p:nvSpPr>
+        <p:spPr>
+          <a:xfrm>
+            <a:off x="2532888" y="4873752"/>
+            <a:ext cx="1057046" cy="201168"/>
+          </a:xfrm>
+          <a:prstGeom prst="rect">
+            <a:avLst/>
+          </a:prstGeom>
+          <a:noFill/>
+          <a:ln/>
+        </p:spPr>
+        <p:txBody>
+          <a:bodyPr wrap="square" lIns="0" tIns="0" rIns="0" bIns="0" rtlCol="0" anchor="ctr"/>
+          <a:lstStyle/>
+          <a:p>
+            <a:pPr indent="0" marL="0">
+              <a:buNone/>
+            </a:pPr>
+            <a:r>
+              <a:rPr lang="en-US" sz="1050" dirty="0">
+                <a:solidFill>
+                  <a:srgbClr val="111111"/>
+                </a:solidFill>
+              </a:rPr>
+              <a:t>Dynamic (all)</a:t>
+            </a:r>
+            <a:endParaRPr lang="en-US" sz="1050" dirty="0"/>
+          </a:p>
+        </p:txBody>
+      </p:sp>
+      <p:sp>
+        <p:nvSpPr>
+          <p:cNvPr id="11" name="s9_mef2_by_class-dot-1"/>
+          <p:cNvSpPr/>
+          <p:nvPr/>
+        </p:nvSpPr>
+        <p:spPr>
+          <a:xfrm>
+            <a:off x="3699662" y="4914900"/>
             <a:ext cx="109728" cy="109728"/>
           </a:xfrm>
           <a:prstGeom prst="ellipse">
@@ -10348,14 +10043,14 @@
       </p:sp>
       <p:sp>
         <p:nvSpPr>
-          <p:cNvPr id="9" name="lg-txt-5.5-0"/>
+          <p:cNvPr id="12" name="s9_mef2_by_class-leg-1"/>
           <p:cNvSpPr txBox="1"/>
           <p:nvPr/>
         </p:nvSpPr>
         <p:spPr>
           <a:xfrm>
-            <a:off x="1527048" y="5029200"/>
-            <a:ext cx="2307946" cy="201168"/>
+            <a:off x="3855110" y="4873752"/>
+            <a:ext cx="596189" cy="201168"/>
           </a:xfrm>
           <a:prstGeom prst="rect">
             <a:avLst/>
@@ -10376,7 +10071,7 @@
                   <a:srgbClr val="111111"/>
                 </a:solidFill>
               </a:rPr>
-              <a:t>does the element have one at all</a:t>
+              <a:t>Age Up</a:t>
             </a:r>
             <a:endParaRPr lang="en-US" sz="1050" dirty="0"/>
           </a:p>
@@ -10384,24 +10079,24 @@
       </p:sp>
       <p:sp>
         <p:nvSpPr>
-          <p:cNvPr id="10" name="lg-dot-5.5-1"/>
+          <p:cNvPr id="13" name="s9_mef2_by_class-dot-2"/>
           <p:cNvSpPr/>
           <p:nvPr/>
         </p:nvSpPr>
         <p:spPr>
           <a:xfrm>
-            <a:off x="3944722" y="5070348"/>
+            <a:off x="4561027" y="4914900"/>
             <a:ext cx="109728" cy="109728"/>
           </a:xfrm>
           <a:prstGeom prst="ellipse">
             <a:avLst/>
           </a:prstGeom>
           <a:solidFill>
-            <a:srgbClr val="4F4F4F"/>
+            <a:srgbClr val="1F6FB2"/>
           </a:solidFill>
           <a:ln w="12700">
             <a:solidFill>
-              <a:srgbClr val="4F4F4F"/>
+              <a:srgbClr val="1F6FB2"/>
             </a:solidFill>
             <a:prstDash val="solid"/>
           </a:ln>
@@ -10409,14 +10104,14 @@
       </p:sp>
       <p:sp>
         <p:nvSpPr>
-          <p:cNvPr id="11" name="lg-txt-5.5-1"/>
+          <p:cNvPr id="14" name="s9_mef2_by_class-leg-2"/>
           <p:cNvSpPr txBox="1"/>
           <p:nvPr/>
         </p:nvSpPr>
         <p:spPr>
           <a:xfrm>
-            <a:off x="4100170" y="5029200"/>
-            <a:ext cx="2373782" cy="201168"/>
+            <a:off x="4716475" y="4873752"/>
+            <a:ext cx="727862" cy="201168"/>
           </a:xfrm>
           <a:prstGeom prst="rect">
             <a:avLst/>
@@ -10437,7 +10132,7 @@
                   <a:srgbClr val="111111"/>
                 </a:solidFill>
               </a:rPr>
-              <a:t>when it has one, is it ranked top</a:t>
+              <a:t>Age Down</a:t>
             </a:r>
             <a:endParaRPr lang="en-US" sz="1050" dirty="0"/>
           </a:p>
@@ -10445,14 +10140,39 @@
       </p:sp>
       <p:sp>
         <p:nvSpPr>
-          <p:cNvPr id="12" name="or-key"/>
+          <p:cNvPr id="15" name="s9_mef2_by_class-dot-3"/>
+          <p:cNvSpPr/>
+          <p:nvPr/>
+        </p:nvSpPr>
+        <p:spPr>
+          <a:xfrm>
+            <a:off x="5554066" y="4914900"/>
+            <a:ext cx="109728" cy="109728"/>
+          </a:xfrm>
+          <a:prstGeom prst="ellipse">
+            <a:avLst/>
+          </a:prstGeom>
+          <a:solidFill>
+            <a:srgbClr val="2E7D32"/>
+          </a:solidFill>
+          <a:ln w="12700">
+            <a:solidFill>
+              <a:srgbClr val="2E7D32"/>
+            </a:solidFill>
+            <a:prstDash val="solid"/>
+          </a:ln>
+        </p:spPr>
+      </p:sp>
+      <p:sp>
+        <p:nvSpPr>
+          <p:cNvPr id="16" name="s9_mef2_by_class-leg-3"/>
           <p:cNvSpPr txBox="1"/>
           <p:nvPr/>
         </p:nvSpPr>
         <p:spPr>
           <a:xfrm>
-            <a:off x="731520" y="5376672"/>
-            <a:ext cx="10881360" cy="457200"/>
+            <a:off x="5709514" y="4873752"/>
+            <a:ext cx="925373" cy="201168"/>
           </a:xfrm>
           <a:prstGeom prst="rect">
             <a:avLst/>
@@ -10468,20 +10188,178 @@
               <a:buNone/>
             </a:pPr>
             <a:r>
-              <a:rPr lang="en-US" sz="950" dirty="0">
+              <a:rPr lang="en-US" sz="1050" dirty="0">
+                <a:solidFill>
+                  <a:srgbClr val="111111"/>
+                </a:solidFill>
+              </a:rPr>
+              <a:t>Exercise Up</a:t>
+            </a:r>
+            <a:endParaRPr lang="en-US" sz="1050" dirty="0"/>
+          </a:p>
+        </p:txBody>
+      </p:sp>
+      <p:sp>
+        <p:nvSpPr>
+          <p:cNvPr id="17" name="s9_mef2_by_class-dot-4"/>
+          <p:cNvSpPr/>
+          <p:nvPr/>
+        </p:nvSpPr>
+        <p:spPr>
+          <a:xfrm>
+            <a:off x="6744614" y="4914900"/>
+            <a:ext cx="109728" cy="109728"/>
+          </a:xfrm>
+          <a:prstGeom prst="ellipse">
+            <a:avLst/>
+          </a:prstGeom>
+          <a:solidFill>
+            <a:srgbClr val="7B3FA0"/>
+          </a:solidFill>
+          <a:ln w="12700">
+            <a:solidFill>
+              <a:srgbClr val="7B3FA0"/>
+            </a:solidFill>
+            <a:prstDash val="solid"/>
+          </a:ln>
+        </p:spPr>
+      </p:sp>
+      <p:sp>
+        <p:nvSpPr>
+          <p:cNvPr id="18" name="s9_mef2_by_class-leg-4"/>
+          <p:cNvSpPr txBox="1"/>
+          <p:nvPr/>
+        </p:nvSpPr>
+        <p:spPr>
+          <a:xfrm>
+            <a:off x="6900062" y="4873752"/>
+            <a:ext cx="1057046" cy="201168"/>
+          </a:xfrm>
+          <a:prstGeom prst="rect">
+            <a:avLst/>
+          </a:prstGeom>
+          <a:noFill/>
+          <a:ln/>
+        </p:spPr>
+        <p:txBody>
+          <a:bodyPr wrap="square" lIns="0" tIns="0" rIns="0" bIns="0" rtlCol="0" anchor="ctr"/>
+          <a:lstStyle/>
+          <a:p>
+            <a:pPr indent="0" marL="0">
+              <a:buNone/>
+            </a:pPr>
+            <a:r>
+              <a:rPr lang="en-US" sz="1050" dirty="0">
+                <a:solidFill>
+                  <a:srgbClr val="111111"/>
+                </a:solidFill>
+              </a:rPr>
+              <a:t>Exercise Down</a:t>
+            </a:r>
+            <a:endParaRPr lang="en-US" sz="1050" dirty="0"/>
+          </a:p>
+        </p:txBody>
+      </p:sp>
+      <p:sp>
+        <p:nvSpPr>
+          <p:cNvPr id="19" name="s9_mef2_by_class-dot-5"/>
+          <p:cNvSpPr/>
+          <p:nvPr/>
+        </p:nvSpPr>
+        <p:spPr>
+          <a:xfrm>
+            <a:off x="8066837" y="4914900"/>
+            <a:ext cx="109728" cy="109728"/>
+          </a:xfrm>
+          <a:prstGeom prst="ellipse">
+            <a:avLst/>
+          </a:prstGeom>
+          <a:solidFill>
+            <a:srgbClr val="B3B2AE"/>
+          </a:solidFill>
+          <a:ln w="12700">
+            <a:solidFill>
+              <a:srgbClr val="B3B2AE"/>
+            </a:solidFill>
+            <a:prstDash val="solid"/>
+          </a:ln>
+        </p:spPr>
+      </p:sp>
+      <p:sp>
+        <p:nvSpPr>
+          <p:cNvPr id="20" name="s9_mef2_by_class-leg-5"/>
+          <p:cNvSpPr txBox="1"/>
+          <p:nvPr/>
+        </p:nvSpPr>
+        <p:spPr>
+          <a:xfrm>
+            <a:off x="8222285" y="4873752"/>
+            <a:ext cx="1781251" cy="201168"/>
+          </a:xfrm>
+          <a:prstGeom prst="rect">
+            <a:avLst/>
+          </a:prstGeom>
+          <a:noFill/>
+          <a:ln/>
+        </p:spPr>
+        <p:txBody>
+          <a:bodyPr wrap="square" lIns="0" tIns="0" rIns="0" bIns="0" rtlCol="0" anchor="ctr"/>
+          <a:lstStyle/>
+          <a:p>
+            <a:pPr indent="0" marL="0">
+              <a:buNone/>
+            </a:pPr>
+            <a:r>
+              <a:rPr lang="en-US" sz="1050" dirty="0">
+                <a:solidFill>
+                  <a:srgbClr val="111111"/>
+                </a:solidFill>
+              </a:rPr>
+              <a:t>Stable (all 2,907 sites)</a:t>
+            </a:r>
+            <a:endParaRPr lang="en-US" sz="1050" dirty="0"/>
+          </a:p>
+        </p:txBody>
+      </p:sp>
+      <p:sp>
+        <p:nvSpPr>
+          <p:cNvPr id="21" name="s9_mef2_by_class-key"/>
+          <p:cNvSpPr txBox="1"/>
+          <p:nvPr/>
+        </p:nvSpPr>
+        <p:spPr>
+          <a:xfrm>
+            <a:off x="2377440" y="5148072"/>
+            <a:ext cx="7589520" cy="502920"/>
+          </a:xfrm>
+          <a:prstGeom prst="rect">
+            <a:avLst/>
+          </a:prstGeom>
+          <a:noFill/>
+          <a:ln/>
+        </p:spPr>
+        <p:txBody>
+          <a:bodyPr wrap="square" lIns="0" tIns="0" rIns="0" bIns="0" rtlCol="0" anchor="ctr"/>
+          <a:lstStyle/>
+          <a:p>
+            <a:pPr indent="0" marL="0">
+              <a:buNone/>
+            </a:pPr>
+            <a:r>
+              <a:rPr lang="en-US" sz="900" dirty="0">
                 <a:solidFill>
                   <a:srgbClr val="595959"/>
                 </a:solidFill>
               </a:rPr>
-              <a:t>log2 odds ratio against all Stable sites with a 95% CI; dotted line = no difference, so −1 is half the odds and +1 is double.   MEF2, does it have one: Age Up OR 0.45, Exercise Down 0.56, Dynamic 0.58, all FDR ≤ 0.005.   AP-1, when it has one: Dynamic OR 1.45, FDR 0.036.</a:t>
-            </a:r>
-            <a:endParaRPr lang="en-US" sz="950" dirty="0"/>
-          </a:p>
-        </p:txBody>
-      </p:sp>
-      <p:sp>
-        <p:nvSpPr>
-          <p:cNvPr id="13" name="Text 0"/>
+              <a:t>grey line and band: all 2,907 Stable sites with a 95% bootstrap CI.   Fisher's exact test against that reference, BH across all 10 tests on this figure.   *** p&lt;0.001   ** p&lt;0.01   * p&lt;0.05   ns ≥ 0.05</a:t>
+            </a:r>
+            <a:endParaRPr lang="en-US" sz="900" dirty="0"/>
+          </a:p>
+        </p:txBody>
+      </p:sp>
+      <p:sp>
+        <p:nvSpPr>
+          <p:cNvPr id="22" name="Text 0"/>
           <p:cNvSpPr/>
           <p:nvPr>
             <p:ph idx="101" type="body" hasCustomPrompt="1"/>
@@ -10522,7 +10400,7 @@
                   <a:srgbClr val="111111"/>
                 </a:solidFill>
               </a:rPr>
-              <a:t>the MEF2 deficit is about having one, not about how it is ranked — and responsive elements lean more on a second AP-1 site when they have one</a:t>
+              <a:t>Age Up 5.8% and Exercise Down 5.4% carry a close MEF2, against 8.5% of Stable sites — and the gap is sharper when only the MEF2 the model uses is counted</a:t>
             </a:r>
             <a:endParaRPr lang="en-US" sz="1500" dirty="0"/>
           </a:p>
@@ -10630,7 +10508,7 @@
                   <a:schemeClr val="tx1"/>
                 </a:solidFill>
               </a:rPr>
-              <a:t>What the model leans on: its own motif, or a neighbour</a:t>
+              <a:t>Is the partner missing, or just worth less?</a:t>
             </a:r>
             <a:endParaRPr lang="en-US" sz="2800" dirty="0"/>
           </a:p>
@@ -10638,14 +10516,14 @@
       </p:sp>
       <p:sp>
         <p:nvSpPr>
-          <p:cNvPr id="3" name="cl-intro"/>
+          <p:cNvPr id="3" name="or-intro"/>
           <p:cNvSpPr txBox="1"/>
           <p:nvPr/>
         </p:nvSpPr>
         <p:spPr>
           <a:xfrm>
             <a:off x="731520" y="1005840"/>
-            <a:ext cx="10881360" cy="457200"/>
+            <a:ext cx="10881360" cy="420624"/>
           </a:xfrm>
           <a:prstGeom prst="rect">
             <a:avLst/>
@@ -10666,7 +10544,7 @@
                   <a:srgbClr val="595959"/>
                 </a:solidFill>
               </a:rPr>
-              <a:t>Two elements with comparable accessibility and a comparable set of neighbouring AP-1 footprints. Numbered circles mark the three most damaging windows, ranked; the dotted line drops from each to whatever lies beneath it. Gold is the called AP-1 motif, grey the other AP-1 footprints, merged where calls overlap.</a:t>
+              <a:t>Rank the 60 windows within each element, take the three most damaging, and ask whether any covers that family’s footprint. A within-element question, so a class with less total dependence is not penalised for it.</a:t>
             </a:r>
             <a:endParaRPr lang="en-US" sz="1150" dirty="0"/>
           </a:p>
@@ -10674,14 +10552,14 @@
       </p:sp>
       <p:sp>
         <p:nvSpPr>
-          <p:cNvPr id="4" name="cl-t1"/>
+          <p:cNvPr id="4" name="or-t1"/>
           <p:cNvSpPr txBox="1"/>
           <p:nvPr/>
         </p:nvSpPr>
         <p:spPr>
           <a:xfrm>
-            <a:off x="731520" y="1572768"/>
-            <a:ext cx="10881360" cy="256032"/>
+            <a:off x="1371600" y="1572768"/>
+            <a:ext cx="4572000" cy="256032"/>
           </a:xfrm>
           <a:prstGeom prst="rect">
             <a:avLst/>
@@ -10697,31 +10575,20 @@
               <a:buNone/>
             </a:pPr>
             <a:r>
-              <a:rPr lang="en-US" sz="1300" b="1" dirty="0">
-                <a:solidFill>
-                  <a:srgbClr val="1F6FB2"/>
-                </a:solidFill>
-              </a:rPr>
-              <a:t>Stable  </a:t>
-            </a:r>
-            <a:pPr indent="0" marL="0">
-              <a:buNone/>
-            </a:pPr>
-            <a:r>
-              <a:rPr lang="en-US" sz="1200" dirty="0">
+              <a:rPr lang="en-US" sz="1350" b="1" dirty="0">
                 <a:solidFill>
                   <a:srgbClr val="111111"/>
                 </a:solidFill>
               </a:rPr>
-              <a:t>chr2:110,186,562 — windows 1 and 2 are the called motif; the seven AP-1 sites at +140 to +190 bp cost nothing</a:t>
-            </a:r>
-            <a:endParaRPr lang="en-US" sz="1300" dirty="0"/>
+              <a:t>MEF2</a:t>
+            </a:r>
+            <a:endParaRPr lang="en-US" sz="1350" dirty="0"/>
           </a:p>
         </p:txBody>
       </p:sp>
       <p:pic>
         <p:nvPicPr>
-          <p:cNvPr id="5" name="Image 0" descr="/Users/z5162865/WongLab/AlphaGenome_Ap1/Analysis/slide_figures/panels/s11_cluster_stable.png">    </p:cNvPr>
+          <p:cNvPr id="5" name="Image 0" descr="/Users/z5162865/WongLab/AlphaGenome_Ap1/Analysis/slide_figures/panels/s10_mef2_all.png">    </p:cNvPr>
           <p:cNvPicPr>
             <a:picLocks noChangeAspect="1"/>
           </p:cNvPicPr>
@@ -10735,8 +10602,8 @@
         </p:blipFill>
         <p:spPr>
           <a:xfrm>
-            <a:off x="594360" y="1828800"/>
-            <a:ext cx="10972800" cy="1828800"/>
+            <a:off x="1730862" y="1883664"/>
+            <a:ext cx="3853476" cy="3017520"/>
           </a:xfrm>
           <a:prstGeom prst="rect">
             <a:avLst/>
@@ -10745,14 +10612,14 @@
       </p:pic>
       <p:sp>
         <p:nvSpPr>
-          <p:cNvPr id="6" name="cl-t2"/>
+          <p:cNvPr id="6" name="or-t2"/>
           <p:cNvSpPr txBox="1"/>
           <p:nvPr/>
         </p:nvSpPr>
         <p:spPr>
           <a:xfrm>
-            <a:off x="731520" y="3611880"/>
-            <a:ext cx="10881360" cy="256032"/>
+            <a:off x="6400800" y="1572768"/>
+            <a:ext cx="4572000" cy="256032"/>
           </a:xfrm>
           <a:prstGeom prst="rect">
             <a:avLst/>
@@ -10768,31 +10635,20 @@
               <a:buNone/>
             </a:pPr>
             <a:r>
-              <a:rPr lang="en-US" sz="1300" b="1" dirty="0">
-                <a:solidFill>
-                  <a:srgbClr val="C2551C"/>
-                </a:solidFill>
-              </a:rPr>
-              <a:t>Age-gained  </a:t>
-            </a:r>
-            <a:pPr indent="0" marL="0">
-              <a:buNone/>
-            </a:pPr>
-            <a:r>
-              <a:rPr lang="en-US" sz="1200" dirty="0">
+              <a:rPr lang="en-US" sz="1350" b="1" dirty="0">
                 <a:solidFill>
                   <a:srgbClr val="111111"/>
                 </a:solidFill>
               </a:rPr>
-              <a:t>chr13:35,395,938 — windows 1 and 3 sit on a cluster of ten AP-1 sites at −65 bp; the called motif is only second</a:t>
-            </a:r>
-            <a:endParaRPr lang="en-US" sz="1300" dirty="0"/>
+              <a:t>A second AP-1 footprint</a:t>
+            </a:r>
+            <a:endParaRPr lang="en-US" sz="1350" dirty="0"/>
           </a:p>
         </p:txBody>
       </p:sp>
       <p:pic>
         <p:nvPicPr>
-          <p:cNvPr id="7" name="Image 1" descr="/Users/z5162865/WongLab/AlphaGenome_Ap1/Analysis/slide_figures/panels/s11_cluster_dynamic.png">    </p:cNvPr>
+          <p:cNvPr id="7" name="Image 1" descr="/Users/z5162865/WongLab/AlphaGenome_Ap1/Analysis/slide_figures/panels/s10_ap1.png">    </p:cNvPr>
           <p:cNvPicPr>
             <a:picLocks noChangeAspect="1"/>
           </p:cNvPicPr>
@@ -10806,8 +10662,8 @@
         </p:blipFill>
         <p:spPr>
           <a:xfrm>
-            <a:off x="594360" y="3858768"/>
-            <a:ext cx="10972800" cy="1828800"/>
+            <a:off x="6760062" y="1883664"/>
+            <a:ext cx="3853476" cy="3017520"/>
           </a:xfrm>
           <a:prstGeom prst="rect">
             <a:avLst/>
@@ -10816,14 +10672,39 @@
       </p:pic>
       <p:sp>
         <p:nvSpPr>
-          <p:cNvPr id="8" name="cl-key"/>
+          <p:cNvPr id="8" name="lg-dot-5.5-0"/>
+          <p:cNvSpPr/>
+          <p:nvPr/>
+        </p:nvSpPr>
+        <p:spPr>
+          <a:xfrm>
+            <a:off x="1371600" y="5070348"/>
+            <a:ext cx="109728" cy="109728"/>
+          </a:xfrm>
+          <a:prstGeom prst="ellipse">
+            <a:avLst/>
+          </a:prstGeom>
+          <a:solidFill>
+            <a:srgbClr val="C2551C"/>
+          </a:solidFill>
+          <a:ln w="12700">
+            <a:solidFill>
+              <a:srgbClr val="C2551C"/>
+            </a:solidFill>
+            <a:prstDash val="solid"/>
+          </a:ln>
+        </p:spPr>
+      </p:sp>
+      <p:sp>
+        <p:nvSpPr>
+          <p:cNvPr id="9" name="lg-txt-5.5-0"/>
           <p:cNvSpPr txBox="1"/>
           <p:nvPr/>
         </p:nvSpPr>
         <p:spPr>
           <a:xfrm>
-            <a:off x="731520" y="5614416"/>
-            <a:ext cx="10881360" cy="274320"/>
+            <a:off x="1527048" y="5029200"/>
+            <a:ext cx="2307946" cy="201168"/>
           </a:xfrm>
           <a:prstGeom prst="rect">
             <a:avLst/>
@@ -10839,12 +10720,109 @@
               <a:buNone/>
             </a:pPr>
             <a:r>
+              <a:rPr lang="en-US" sz="1050" dirty="0">
+                <a:solidFill>
+                  <a:srgbClr val="111111"/>
+                </a:solidFill>
+              </a:rPr>
+              <a:t>does the element have one at all</a:t>
+            </a:r>
+            <a:endParaRPr lang="en-US" sz="1050" dirty="0"/>
+          </a:p>
+        </p:txBody>
+      </p:sp>
+      <p:sp>
+        <p:nvSpPr>
+          <p:cNvPr id="10" name="lg-dot-5.5-1"/>
+          <p:cNvSpPr/>
+          <p:nvPr/>
+        </p:nvSpPr>
+        <p:spPr>
+          <a:xfrm>
+            <a:off x="3944722" y="5070348"/>
+            <a:ext cx="109728" cy="109728"/>
+          </a:xfrm>
+          <a:prstGeom prst="ellipse">
+            <a:avLst/>
+          </a:prstGeom>
+          <a:solidFill>
+            <a:srgbClr val="4F4F4F"/>
+          </a:solidFill>
+          <a:ln w="12700">
+            <a:solidFill>
+              <a:srgbClr val="4F4F4F"/>
+            </a:solidFill>
+            <a:prstDash val="solid"/>
+          </a:ln>
+        </p:spPr>
+      </p:sp>
+      <p:sp>
+        <p:nvSpPr>
+          <p:cNvPr id="11" name="lg-txt-5.5-1"/>
+          <p:cNvSpPr txBox="1"/>
+          <p:nvPr/>
+        </p:nvSpPr>
+        <p:spPr>
+          <a:xfrm>
+            <a:off x="4100170" y="5029200"/>
+            <a:ext cx="2373782" cy="201168"/>
+          </a:xfrm>
+          <a:prstGeom prst="rect">
+            <a:avLst/>
+          </a:prstGeom>
+          <a:noFill/>
+          <a:ln/>
+        </p:spPr>
+        <p:txBody>
+          <a:bodyPr wrap="square" lIns="0" tIns="0" rIns="0" bIns="0" rtlCol="0" anchor="ctr"/>
+          <a:lstStyle/>
+          <a:p>
+            <a:pPr indent="0" marL="0">
+              <a:buNone/>
+            </a:pPr>
+            <a:r>
+              <a:rPr lang="en-US" sz="1050" dirty="0">
+                <a:solidFill>
+                  <a:srgbClr val="111111"/>
+                </a:solidFill>
+              </a:rPr>
+              <a:t>when it has one, is it ranked top</a:t>
+            </a:r>
+            <a:endParaRPr lang="en-US" sz="1050" dirty="0"/>
+          </a:p>
+        </p:txBody>
+      </p:sp>
+      <p:sp>
+        <p:nvSpPr>
+          <p:cNvPr id="12" name="or-key"/>
+          <p:cNvSpPr txBox="1"/>
+          <p:nvPr/>
+        </p:nvSpPr>
+        <p:spPr>
+          <a:xfrm>
+            <a:off x="731520" y="5376672"/>
+            <a:ext cx="10881360" cy="457200"/>
+          </a:xfrm>
+          <a:prstGeom prst="rect">
+            <a:avLst/>
+          </a:prstGeom>
+          <a:noFill/>
+          <a:ln/>
+        </p:spPr>
+        <p:txBody>
+          <a:bodyPr wrap="square" lIns="0" tIns="0" rIns="0" bIns="0" rtlCol="0" anchor="ctr"/>
+          <a:lstStyle/>
+          <a:p>
+            <a:pPr indent="0" marL="0">
+              <a:buNone/>
+            </a:pPr>
+            <a:r>
               <a:rPr lang="en-US" sz="950" dirty="0">
                 <a:solidFill>
                   <a:srgbClr val="595959"/>
                 </a:solidFill>
               </a:rPr>
-              <a:t>own motif −1.90 against strongest neighbour −1.18 at the Stable site; −1.56 against −2.05 at the age-gained one. 8 and 10 neighbouring AP-1 footprints respectively.</a:t>
+              <a:t>log2 odds ratio against all Stable sites with a 95% CI; dotted line = no difference, so −1 is half the odds and +1 is double.   MEF2, does it have one: Age Up OR 0.45, Exercise Down 0.56, Dynamic 0.58, all FDR ≤ 0.005.   AP-1, when it has one: Dynamic OR 1.45, FDR 0.036.</a:t>
             </a:r>
             <a:endParaRPr lang="en-US" sz="950" dirty="0"/>
           </a:p>
@@ -10852,7 +10830,7 @@
       </p:sp>
       <p:sp>
         <p:nvSpPr>
-          <p:cNvPr id="9" name="Text 0"/>
+          <p:cNvPr id="13" name="Text 0"/>
           <p:cNvSpPr/>
           <p:nvPr>
             <p:ph idx="101" type="body" hasCustomPrompt="1"/>
@@ -10893,7 +10871,7 @@
                   <a:srgbClr val="111111"/>
                 </a:solidFill>
               </a:rPr>
-              <a:t>one locus showing the 1.45× result: when a responsive element has a second AP-1 site, that is what the model leans on</a:t>
+              <a:t>the MEF2 deficit is about having one, not about how it is ranked — and responsive elements lean more on a second AP-1 site when they have one</a:t>
             </a:r>
             <a:endParaRPr lang="en-US" sz="1500" dirty="0"/>
           </a:p>

--- a/Analysis/AP1_AlphaGenome_results.pptx
+++ b/Analysis/AP1_AlphaGenome_results.pptx
@@ -122,19 +122,19 @@
   <p:extLst>
     <p:ext uri="{521415D9-36F7-43E2-AB2F-B90AF26B5E84}">
       <p14:sectionLst xmlns:p14="http://schemas.microsoft.com/office/powerpoint/2010/main">
-        <p14:section name="Opening" id="{68870850-c493-06a4-28c1-ad559e10795f}">
+        <p14:section name="Opening" id="{ab4db3d7-22e7-10d6-2505-8d49fb1ea033}">
           <p14:sldIdLst>
             <p14:sldId id="256"/>
           </p14:sldIdLst>
         </p14:section>
-        <p14:section name="Design" id="{1e8051b2-33b3-dd73-1b7f-30e09f583768}">
+        <p14:section name="Design" id="{080ae629-67bb-fef2-95cc-fb9184ce68d2}">
           <p14:sldIdLst>
             <p14:sldId id="257"/>
             <p14:sldId id="258"/>
             <p14:sldId id="259"/>
           </p14:sldIdLst>
         </p14:section>
-        <p14:section name="Findings" id="{f5bd0b1b-8fbd-2b94-bf7a-7d20d310a2c0}">
+        <p14:section name="Findings" id="{86cc99e6-2e11-4d3c-d21c-5c0f12d4359f}">
           <p14:sldIdLst>
             <p14:sldId id="260"/>
             <p14:sldId id="261"/>
@@ -148,7 +148,7 @@
             <p14:sldId id="269"/>
           </p14:sldIdLst>
         </p14:section>
-        <p14:section name="Conclusion" id="{3e69a788-bdb0-2f61-667a-f3b185f1f5ed}">
+        <p14:section name="Conclusion" id="{9c43fa31-9e8e-3214-85d5-c61e7b6a6edf}">
           <p14:sldIdLst>
             <p14:sldId id="270"/>
             <p14:sldId id="271"/>
@@ -7566,8 +7566,8 @@
         </p:blipFill>
         <p:spPr>
           <a:xfrm>
-            <a:off x="502920" y="1896618"/>
-            <a:ext cx="11155680" cy="2881884"/>
+            <a:off x="594360" y="1737360"/>
+            <a:ext cx="10972800" cy="3200400"/>
           </a:xfrm>
           <a:prstGeom prst="rect">
             <a:avLst/>

--- a/Analysis/AP1_AlphaGenome_results.pptx
+++ b/Analysis/AP1_AlphaGenome_results.pptx
@@ -122,19 +122,19 @@
   <p:extLst>
     <p:ext uri="{521415D9-36F7-43E2-AB2F-B90AF26B5E84}">
       <p14:sectionLst xmlns:p14="http://schemas.microsoft.com/office/powerpoint/2010/main">
-        <p14:section name="Opening" id="{ab4db3d7-22e7-10d6-2505-8d49fb1ea033}">
+        <p14:section name="Opening" id="{42cd2afe-29fd-82c3-7880-fec3fa0d9a32}">
           <p14:sldIdLst>
             <p14:sldId id="256"/>
           </p14:sldIdLst>
         </p14:section>
-        <p14:section name="Design" id="{080ae629-67bb-fef2-95cc-fb9184ce68d2}">
+        <p14:section name="Design" id="{9a105811-a1f9-2cd7-e5f3-533e4b6e9255}">
           <p14:sldIdLst>
             <p14:sldId id="257"/>
             <p14:sldId id="258"/>
             <p14:sldId id="259"/>
           </p14:sldIdLst>
         </p14:section>
-        <p14:section name="Findings" id="{86cc99e6-2e11-4d3c-d21c-5c0f12d4359f}">
+        <p14:section name="Findings" id="{da75b2ea-f503-3ffa-21b8-538ca9e5d235}">
           <p14:sldIdLst>
             <p14:sldId id="260"/>
             <p14:sldId id="261"/>
@@ -148,7 +148,7 @@
             <p14:sldId id="269"/>
           </p14:sldIdLst>
         </p14:section>
-        <p14:section name="Conclusion" id="{9c43fa31-9e8e-3214-85d5-c61e7b6a6edf}">
+        <p14:section name="Conclusion" id="{e8f4fd0c-1965-5a89-4862-22e2524a15d0}">
           <p14:sldIdLst>
             <p14:sldId id="270"/>
             <p14:sldId id="271"/>
@@ -3125,8 +3125,8 @@
         </p:nvSpPr>
         <p:spPr>
           <a:xfrm>
-            <a:off x="502920" y="1143000"/>
-            <a:ext cx="2743200" cy="256032"/>
+            <a:off x="502920" y="1042416"/>
+            <a:ext cx="6949440" cy="274320"/>
           </a:xfrm>
           <a:prstGeom prst="rect">
             <a:avLst/>
@@ -3142,20 +3142,56 @@
               <a:buNone/>
             </a:pPr>
             <a:r>
-              <a:rPr lang="en-US" sz="1250" b="1" dirty="0">
+              <a:rPr lang="en-US" sz="1350" b="1" dirty="0">
                 <a:solidFill>
                   <a:srgbClr val="111111"/>
                 </a:solidFill>
               </a:rPr>
-              <a:t>Where the dependence sits</a:t>
-            </a:r>
-            <a:endParaRPr lang="en-US" sz="1250" dirty="0"/>
+              <a:t>Where the dependence sits across the element</a:t>
+            </a:r>
+            <a:endParaRPr lang="en-US" sz="1350" dirty="0"/>
+          </a:p>
+        </p:txBody>
+      </p:sp>
+      <p:sp>
+        <p:nvSpPr>
+          <p:cNvPr id="4" name="prof-s1"/>
+          <p:cNvSpPr txBox="1"/>
+          <p:nvPr/>
+        </p:nvSpPr>
+        <p:spPr>
+          <a:xfrm>
+            <a:off x="502920" y="1325880"/>
+            <a:ext cx="6949440" cy="274320"/>
+          </a:xfrm>
+          <a:prstGeom prst="rect">
+            <a:avLst/>
+          </a:prstGeom>
+          <a:noFill/>
+          <a:ln/>
+        </p:spPr>
+        <p:txBody>
+          <a:bodyPr wrap="square" lIns="0" tIns="0" rIns="0" bIns="0" rtlCol="0" anchor="ctr"/>
+          <a:lstStyle/>
+          <a:p>
+            <a:pPr indent="0" marL="0">
+              <a:buNone/>
+            </a:pPr>
+            <a:r>
+              <a:rPr lang="en-US" sz="1050" dirty="0">
+                <a:solidFill>
+                  <a:srgbClr val="595959"/>
+                </a:solidFill>
+              </a:rPr>
+              <a:t>median loss at each of the 60 windows, smoothed over 3; gold band = the ±15 bp core</a:t>
+            </a:r>
+            <a:endParaRPr lang="en-US" sz="1050" dirty="0"/>
           </a:p>
         </p:txBody>
       </p:sp>
       <p:pic>
         <p:nvPicPr>
-          <p:cNvPr id="4" name="Image 0" descr="/Users/z5162865/WongLab/AlphaGenome_Ap1/Analysis/slide_figures/panels/s12_profile_absolute.png">    </p:cNvPr>
+          <p:cNvPr id="5" name="Image 0" descr="/Users/z5162865/WongLab/AlphaGenome_Ap1/Analysis/slide_figures/panels/s12_profile_absolute.png">    </p:cNvPr>
           <p:cNvPicPr>
             <a:picLocks noChangeAspect="1"/>
           </p:cNvPicPr>
@@ -3169,8 +3205,8 @@
         </p:blipFill>
         <p:spPr>
           <a:xfrm>
-            <a:off x="502920" y="1544496"/>
-            <a:ext cx="2743200" cy="1455576"/>
+            <a:off x="1139268" y="1609344"/>
+            <a:ext cx="5676744" cy="1783080"/>
           </a:xfrm>
           <a:prstGeom prst="rect">
             <a:avLst/>
@@ -3179,14 +3215,14 @@
       </p:pic>
       <p:sp>
         <p:nvSpPr>
-          <p:cNvPr id="5" name="prof-t2"/>
+          <p:cNvPr id="6" name="prof-t2"/>
           <p:cNvSpPr txBox="1"/>
           <p:nvPr/>
         </p:nvSpPr>
         <p:spPr>
           <a:xfrm>
-            <a:off x="502920" y="3200400"/>
-            <a:ext cx="2743200" cy="256032"/>
+            <a:off x="502920" y="3456432"/>
+            <a:ext cx="6949440" cy="274320"/>
           </a:xfrm>
           <a:prstGeom prst="rect">
             <a:avLst/>
@@ -3202,20 +3238,56 @@
               <a:buNone/>
             </a:pPr>
             <a:r>
-              <a:rPr lang="en-US" sz="1250" b="1" dirty="0">
+              <a:rPr lang="en-US" sz="1350" b="1" dirty="0">
                 <a:solidFill>
                   <a:srgbClr val="111111"/>
                 </a:solidFill>
               </a:rPr>
-              <a:t>...as a share of each site’s own total</a:t>
-            </a:r>
-            <a:endParaRPr lang="en-US" sz="1250" dirty="0"/>
+              <a:t>...and the same as a share of each site’s own total</a:t>
+            </a:r>
+            <a:endParaRPr lang="en-US" sz="1350" dirty="0"/>
+          </a:p>
+        </p:txBody>
+      </p:sp>
+      <p:sp>
+        <p:nvSpPr>
+          <p:cNvPr id="7" name="prof-s2"/>
+          <p:cNvSpPr txBox="1"/>
+          <p:nvPr/>
+        </p:nvSpPr>
+        <p:spPr>
+          <a:xfrm>
+            <a:off x="502920" y="3721608"/>
+            <a:ext cx="6949440" cy="274320"/>
+          </a:xfrm>
+          <a:prstGeom prst="rect">
+            <a:avLst/>
+          </a:prstGeom>
+          <a:noFill/>
+          <a:ln/>
+        </p:spPr>
+        <p:txBody>
+          <a:bodyPr wrap="square" lIns="0" tIns="0" rIns="0" bIns="0" rtlCol="0" anchor="ctr"/>
+          <a:lstStyle/>
+          <a:p>
+            <a:pPr indent="0" marL="0">
+              <a:buNone/>
+            </a:pPr>
+            <a:r>
+              <a:rPr lang="en-US" sz="1050" dirty="0">
+                <a:solidFill>
+                  <a:srgbClr val="595959"/>
+                </a:solidFill>
+              </a:rPr>
+              <a:t>depth divided out, so only the shape is compared</a:t>
+            </a:r>
+            <a:endParaRPr lang="en-US" sz="1050" dirty="0"/>
           </a:p>
         </p:txBody>
       </p:sp>
       <p:pic>
         <p:nvPicPr>
-          <p:cNvPr id="6" name="Image 1" descr="/Users/z5162865/WongLab/AlphaGenome_Ap1/Analysis/slide_figures/panels/s12_profile_shape.png">    </p:cNvPr>
+          <p:cNvPr id="8" name="Image 1" descr="/Users/z5162865/WongLab/AlphaGenome_Ap1/Analysis/slide_figures/panels/s12_profile_shape.png">    </p:cNvPr>
           <p:cNvPicPr>
             <a:picLocks noChangeAspect="1"/>
           </p:cNvPicPr>
@@ -3229,8 +3301,8 @@
         </p:blipFill>
         <p:spPr>
           <a:xfrm>
-            <a:off x="502920" y="3601896"/>
-            <a:ext cx="2743200" cy="1455576"/>
+            <a:off x="1284825" y="3950208"/>
+            <a:ext cx="5385629" cy="1691640"/>
           </a:xfrm>
           <a:prstGeom prst="rect">
             <a:avLst/>
@@ -3239,14 +3311,14 @@
       </p:pic>
       <p:sp>
         <p:nvSpPr>
-          <p:cNvPr id="7" name="prof-cap"/>
+          <p:cNvPr id="9" name="s3_dependence-title-0"/>
           <p:cNvSpPr txBox="1"/>
           <p:nvPr/>
         </p:nvSpPr>
         <p:spPr>
           <a:xfrm>
-            <a:off x="502920" y="5230368"/>
-            <a:ext cx="2743200" cy="548640"/>
+            <a:off x="7653528" y="1042416"/>
+            <a:ext cx="4005072" cy="237744"/>
           </a:xfrm>
           <a:prstGeom prst="rect">
             <a:avLst/>
@@ -3262,86 +3334,14 @@
               <a:buNone/>
             </a:pPr>
             <a:r>
-              <a:rPr lang="en-US" sz="850" dirty="0">
-                <a:solidFill>
-                  <a:srgbClr val="595959"/>
-                </a:solidFill>
-              </a:rPr>
-              <a:t>median over sites, smoothed over 3 windows; gold band = the ±15 bp core. Stable sites peak highest at the core; Age Up, Exercise Down and Dynamic carry 1.2–1.3× more of their total beyond ±85 bp.</a:t>
-            </a:r>
-            <a:endParaRPr lang="en-US" sz="850" dirty="0"/>
-          </a:p>
-        </p:txBody>
-      </p:sp>
-      <p:sp>
-        <p:nvSpPr>
-          <p:cNvPr id="8" name="s3_dependence-title-0"/>
-          <p:cNvSpPr txBox="1"/>
-          <p:nvPr/>
-        </p:nvSpPr>
-        <p:spPr>
-          <a:xfrm>
-            <a:off x="3401568" y="1143000"/>
-            <a:ext cx="1991106" cy="438912"/>
-          </a:xfrm>
-          <a:prstGeom prst="rect">
-            <a:avLst/>
-          </a:prstGeom>
-          <a:noFill/>
-          <a:ln/>
-        </p:spPr>
-        <p:txBody>
-          <a:bodyPr wrap="square" lIns="0" tIns="0" rIns="0" bIns="0" rtlCol="0" anchor="t"/>
-          <a:lstStyle/>
-          <a:p>
-            <a:pPr indent="0" marL="0">
-              <a:buNone/>
-            </a:pPr>
-            <a:r>
-              <a:rPr lang="en-US" sz="1250" b="1" dirty="0">
+              <a:rPr lang="en-US" sz="1150" b="1" dirty="0">
                 <a:solidFill>
                   <a:srgbClr val="111111"/>
                 </a:solidFill>
               </a:rPr>
               <a:t>Dependence near the motif</a:t>
             </a:r>
-            <a:endParaRPr lang="en-US" sz="1250" dirty="0"/>
-          </a:p>
-        </p:txBody>
-      </p:sp>
-      <p:sp>
-        <p:nvSpPr>
-          <p:cNvPr id="9" name="s3_dependence-sub-0"/>
-          <p:cNvSpPr txBox="1"/>
-          <p:nvPr/>
-        </p:nvSpPr>
-        <p:spPr>
-          <a:xfrm>
-            <a:off x="3401568" y="1572768"/>
-            <a:ext cx="1991106" cy="310896"/>
-          </a:xfrm>
-          <a:prstGeom prst="rect">
-            <a:avLst/>
-          </a:prstGeom>
-          <a:noFill/>
-          <a:ln/>
-        </p:spPr>
-        <p:txBody>
-          <a:bodyPr wrap="square" lIns="0" tIns="0" rIns="0" bIns="0" rtlCol="0" anchor="t"/>
-          <a:lstStyle/>
-          <a:p>
-            <a:pPr indent="0" marL="0">
-              <a:buNone/>
-            </a:pPr>
-            <a:r>
-              <a:rPr lang="en-US" sz="950" dirty="0">
-                <a:solidFill>
-                  <a:srgbClr val="595959"/>
-                </a:solidFill>
-              </a:rPr>
-              <a:t>loss summed over windows within ±85 bp</a:t>
-            </a:r>
-            <a:endParaRPr lang="en-US" sz="950" dirty="0"/>
+            <a:endParaRPr lang="en-US" sz="1150" dirty="0"/>
           </a:p>
         </p:txBody>
       </p:sp>
@@ -3361,8 +3361,8 @@
         </p:blipFill>
         <p:spPr>
           <a:xfrm>
-            <a:off x="3401568" y="2395936"/>
-            <a:ext cx="1991106" cy="1810096"/>
+            <a:off x="7653963" y="1298448"/>
+            <a:ext cx="4004201" cy="1274064"/>
           </a:xfrm>
           <a:prstGeom prst="rect">
             <a:avLst/>
@@ -3377,73 +3377,37 @@
         </p:nvSpPr>
         <p:spPr>
           <a:xfrm>
-            <a:off x="5465826" y="1143000"/>
-            <a:ext cx="1991106" cy="438912"/>
-          </a:xfrm>
-          <a:prstGeom prst="rect">
-            <a:avLst/>
-          </a:prstGeom>
-          <a:noFill/>
-          <a:ln/>
-        </p:spPr>
-        <p:txBody>
-          <a:bodyPr wrap="square" lIns="0" tIns="0" rIns="0" bIns="0" rtlCol="0" anchor="t"/>
+            <a:off x="7653528" y="2627376"/>
+            <a:ext cx="4005072" cy="237744"/>
+          </a:xfrm>
+          <a:prstGeom prst="rect">
+            <a:avLst/>
+          </a:prstGeom>
+          <a:noFill/>
+          <a:ln/>
+        </p:spPr>
+        <p:txBody>
+          <a:bodyPr wrap="square" lIns="0" tIns="0" rIns="0" bIns="0" rtlCol="0" anchor="ctr"/>
           <a:lstStyle/>
           <a:p>
             <a:pPr indent="0" marL="0">
               <a:buNone/>
             </a:pPr>
             <a:r>
-              <a:rPr lang="en-US" sz="1250" b="1" dirty="0">
+              <a:rPr lang="en-US" sz="1150" b="1" dirty="0">
                 <a:solidFill>
                   <a:srgbClr val="111111"/>
                 </a:solidFill>
               </a:rPr>
               <a:t>Dependence out in the context</a:t>
             </a:r>
-            <a:endParaRPr lang="en-US" sz="1250" dirty="0"/>
-          </a:p>
-        </p:txBody>
-      </p:sp>
-      <p:sp>
-        <p:nvSpPr>
-          <p:cNvPr id="12" name="s3_dependence-sub-1"/>
-          <p:cNvSpPr txBox="1"/>
-          <p:nvPr/>
-        </p:nvSpPr>
-        <p:spPr>
-          <a:xfrm>
-            <a:off x="5465826" y="1572768"/>
-            <a:ext cx="1991106" cy="310896"/>
-          </a:xfrm>
-          <a:prstGeom prst="rect">
-            <a:avLst/>
-          </a:prstGeom>
-          <a:noFill/>
-          <a:ln/>
-        </p:spPr>
-        <p:txBody>
-          <a:bodyPr wrap="square" lIns="0" tIns="0" rIns="0" bIns="0" rtlCol="0" anchor="t"/>
-          <a:lstStyle/>
-          <a:p>
-            <a:pPr indent="0" marL="0">
-              <a:buNone/>
-            </a:pPr>
-            <a:r>
-              <a:rPr lang="en-US" sz="950" dirty="0">
-                <a:solidFill>
-                  <a:srgbClr val="595959"/>
-                </a:solidFill>
-              </a:rPr>
-              <a:t>loss summed over windows beyond that</a:t>
-            </a:r>
-            <a:endParaRPr lang="en-US" sz="950" dirty="0"/>
+            <a:endParaRPr lang="en-US" sz="1150" dirty="0"/>
           </a:p>
         </p:txBody>
       </p:sp>
       <p:pic>
         <p:nvPicPr>
-          <p:cNvPr id="13" name="Image 3" descr="/Users/z5162865/WongLab/AlphaGenome_Ap1/Analysis/slide_figures/panels/s3_dependence_c1_r0.png">    </p:cNvPr>
+          <p:cNvPr id="12" name="Image 3" descr="/Users/z5162865/WongLab/AlphaGenome_Ap1/Analysis/slide_figures/panels/s3_dependence_c1_r0.png">    </p:cNvPr>
           <p:cNvPicPr>
             <a:picLocks noChangeAspect="1"/>
           </p:cNvPicPr>
@@ -3457,8 +3421,8 @@
         </p:blipFill>
         <p:spPr>
           <a:xfrm>
-            <a:off x="5465826" y="2395936"/>
-            <a:ext cx="1991106" cy="1810096"/>
+            <a:off x="7653963" y="2883408"/>
+            <a:ext cx="4004201" cy="1274064"/>
           </a:xfrm>
           <a:prstGeom prst="rect">
             <a:avLst/>
@@ -3467,79 +3431,43 @@
       </p:pic>
       <p:sp>
         <p:nvSpPr>
-          <p:cNvPr id="14" name="s3_dependence-title-2"/>
+          <p:cNvPr id="13" name="s3_dependence-title-2"/>
           <p:cNvSpPr txBox="1"/>
           <p:nvPr/>
         </p:nvSpPr>
         <p:spPr>
           <a:xfrm>
-            <a:off x="7530084" y="1143000"/>
-            <a:ext cx="1991106" cy="438912"/>
-          </a:xfrm>
-          <a:prstGeom prst="rect">
-            <a:avLst/>
-          </a:prstGeom>
-          <a:noFill/>
-          <a:ln/>
-        </p:spPr>
-        <p:txBody>
-          <a:bodyPr wrap="square" lIns="0" tIns="0" rIns="0" bIns="0" rtlCol="0" anchor="t"/>
+            <a:off x="7653528" y="4212336"/>
+            <a:ext cx="4005072" cy="237744"/>
+          </a:xfrm>
+          <a:prstGeom prst="rect">
+            <a:avLst/>
+          </a:prstGeom>
+          <a:noFill/>
+          <a:ln/>
+        </p:spPr>
+        <p:txBody>
+          <a:bodyPr wrap="square" lIns="0" tIns="0" rIns="0" bIns="0" rtlCol="0" anchor="ctr"/>
           <a:lstStyle/>
           <a:p>
             <a:pPr indent="0" marL="0">
               <a:buNone/>
             </a:pPr>
             <a:r>
-              <a:rPr lang="en-US" sz="1250" b="1" dirty="0">
+              <a:rPr lang="en-US" sz="1150" b="1" dirty="0">
                 <a:solidFill>
                   <a:srgbClr val="111111"/>
                 </a:solidFill>
               </a:rPr>
               <a:t>Spread along the element</a:t>
             </a:r>
-            <a:endParaRPr lang="en-US" sz="1250" dirty="0"/>
-          </a:p>
-        </p:txBody>
-      </p:sp>
-      <p:sp>
-        <p:nvSpPr>
-          <p:cNvPr id="15" name="s3_dependence-sub-2"/>
-          <p:cNvSpPr txBox="1"/>
-          <p:nvPr/>
-        </p:nvSpPr>
-        <p:spPr>
-          <a:xfrm>
-            <a:off x="7530084" y="1572768"/>
-            <a:ext cx="1991106" cy="310896"/>
-          </a:xfrm>
-          <a:prstGeom prst="rect">
-            <a:avLst/>
-          </a:prstGeom>
-          <a:noFill/>
-          <a:ln/>
-        </p:spPr>
-        <p:txBody>
-          <a:bodyPr wrap="square" lIns="0" tIns="0" rIns="0" bIns="0" rtlCol="0" anchor="t"/>
-          <a:lstStyle/>
-          <a:p>
-            <a:pPr indent="0" marL="0">
-              <a:buNone/>
-            </a:pPr>
-            <a:r>
-              <a:rPr lang="en-US" sz="950" dirty="0">
-                <a:solidFill>
-                  <a:srgbClr val="595959"/>
-                </a:solidFill>
-              </a:rPr>
-              <a:t>SD of window position, weighted by loss</a:t>
-            </a:r>
-            <a:endParaRPr lang="en-US" sz="950" dirty="0"/>
+            <a:endParaRPr lang="en-US" sz="1150" dirty="0"/>
           </a:p>
         </p:txBody>
       </p:sp>
       <p:pic>
         <p:nvPicPr>
-          <p:cNvPr id="16" name="Image 4" descr="/Users/z5162865/WongLab/AlphaGenome_Ap1/Analysis/slide_figures/panels/s3_dependence_c2_r0.png">    </p:cNvPr>
+          <p:cNvPr id="14" name="Image 4" descr="/Users/z5162865/WongLab/AlphaGenome_Ap1/Analysis/slide_figures/panels/s3_dependence_c2_r0.png">    </p:cNvPr>
           <p:cNvPicPr>
             <a:picLocks noChangeAspect="1"/>
           </p:cNvPicPr>
@@ -3553,8 +3481,8 @@
         </p:blipFill>
         <p:spPr>
           <a:xfrm>
-            <a:off x="7530084" y="2395936"/>
-            <a:ext cx="1991106" cy="1810096"/>
+            <a:off x="7653963" y="4468368"/>
+            <a:ext cx="4004201" cy="1274064"/>
           </a:xfrm>
           <a:prstGeom prst="rect">
             <a:avLst/>
@@ -3563,109 +3491,13 @@
       </p:pic>
       <p:sp>
         <p:nvSpPr>
-          <p:cNvPr id="17" name="s3_dependence-title-3"/>
-          <p:cNvSpPr txBox="1"/>
-          <p:nvPr/>
-        </p:nvSpPr>
-        <p:spPr>
-          <a:xfrm>
-            <a:off x="9594342" y="1143000"/>
-            <a:ext cx="1991106" cy="438912"/>
-          </a:xfrm>
-          <a:prstGeom prst="rect">
-            <a:avLst/>
-          </a:prstGeom>
-          <a:noFill/>
-          <a:ln/>
-        </p:spPr>
-        <p:txBody>
-          <a:bodyPr wrap="square" lIns="0" tIns="0" rIns="0" bIns="0" rtlCol="0" anchor="t"/>
-          <a:lstStyle/>
-          <a:p>
-            <a:pPr indent="0" marL="0">
-              <a:buNone/>
-            </a:pPr>
-            <a:r>
-              <a:rPr lang="en-US" sz="1250" b="1" dirty="0">
-                <a:solidFill>
-                  <a:srgbClr val="111111"/>
-                </a:solidFill>
-              </a:rPr>
-              <a:t>Depth of the single best base</a:t>
-            </a:r>
-            <a:endParaRPr lang="en-US" sz="1250" dirty="0"/>
-          </a:p>
-        </p:txBody>
-      </p:sp>
-      <p:sp>
-        <p:nvSpPr>
-          <p:cNvPr id="18" name="s3_dependence-sub-3"/>
-          <p:cNvSpPr txBox="1"/>
-          <p:nvPr/>
-        </p:nvSpPr>
-        <p:spPr>
-          <a:xfrm>
-            <a:off x="9594342" y="1572768"/>
-            <a:ext cx="1991106" cy="310896"/>
-          </a:xfrm>
-          <a:prstGeom prst="rect">
-            <a:avLst/>
-          </a:prstGeom>
-          <a:noFill/>
-          <a:ln/>
-        </p:spPr>
-        <p:txBody>
-          <a:bodyPr wrap="square" lIns="0" tIns="0" rIns="0" bIns="0" rtlCol="0" anchor="t"/>
-          <a:lstStyle/>
-          <a:p>
-            <a:pPr indent="0" marL="0">
-              <a:buNone/>
-            </a:pPr>
-            <a:r>
-              <a:rPr lang="en-US" sz="950" dirty="0">
-                <a:solidFill>
-                  <a:srgbClr val="595959"/>
-                </a:solidFill>
-              </a:rPr>
-              <a:t>largest effect of any one base change, ±30 bp</a:t>
-            </a:r>
-            <a:endParaRPr lang="en-US" sz="950" dirty="0"/>
-          </a:p>
-        </p:txBody>
-      </p:sp>
-      <p:pic>
-        <p:nvPicPr>
-          <p:cNvPr id="19" name="Image 5" descr="/Users/z5162865/WongLab/AlphaGenome_Ap1/Analysis/slide_figures/panels/s3_dependence_c3_r0.png">    </p:cNvPr>
-          <p:cNvPicPr>
-            <a:picLocks noChangeAspect="1"/>
-          </p:cNvPicPr>
-          <p:nvPr/>
-        </p:nvPicPr>
-        <p:blipFill>
-          <a:blip r:embed="rId6"/>
-          <a:stretch>
-            <a:fillRect/>
-          </a:stretch>
-        </p:blipFill>
-        <p:spPr>
-          <a:xfrm>
-            <a:off x="9594342" y="2395936"/>
-            <a:ext cx="1991106" cy="1810096"/>
-          </a:xfrm>
-          <a:prstGeom prst="rect">
-            <a:avLst/>
-          </a:prstGeom>
-        </p:spPr>
-      </p:pic>
-      <p:sp>
-        <p:nvSpPr>
-          <p:cNvPr id="20" name="s3_dependence-dot-0"/>
+          <p:cNvPr id="15" name="s3_dependence-dot-0"/>
           <p:cNvSpPr/>
           <p:nvPr/>
         </p:nvSpPr>
         <p:spPr>
           <a:xfrm>
-            <a:off x="3291840" y="4914900"/>
+            <a:off x="502920" y="5765292"/>
             <a:ext cx="109728" cy="109728"/>
           </a:xfrm>
           <a:prstGeom prst="ellipse">
@@ -3684,13 +3516,13 @@
       </p:sp>
       <p:sp>
         <p:nvSpPr>
-          <p:cNvPr id="21" name="s3_dependence-leg-0"/>
+          <p:cNvPr id="16" name="s3_dependence-leg-0"/>
           <p:cNvSpPr txBox="1"/>
           <p:nvPr/>
         </p:nvSpPr>
         <p:spPr>
           <a:xfrm>
-            <a:off x="3447288" y="4873752"/>
+            <a:off x="658368" y="5724144"/>
             <a:ext cx="1057046" cy="201168"/>
           </a:xfrm>
           <a:prstGeom prst="rect">
@@ -3720,13 +3552,13 @@
       </p:sp>
       <p:sp>
         <p:nvSpPr>
-          <p:cNvPr id="22" name="s3_dependence-dot-1"/>
+          <p:cNvPr id="17" name="s3_dependence-dot-1"/>
           <p:cNvSpPr/>
           <p:nvPr/>
         </p:nvSpPr>
         <p:spPr>
           <a:xfrm>
-            <a:off x="4614062" y="4914900"/>
+            <a:off x="1825142" y="5765292"/>
             <a:ext cx="109728" cy="109728"/>
           </a:xfrm>
           <a:prstGeom prst="ellipse">
@@ -3745,13 +3577,13 @@
       </p:sp>
       <p:sp>
         <p:nvSpPr>
-          <p:cNvPr id="23" name="s3_dependence-leg-1"/>
+          <p:cNvPr id="18" name="s3_dependence-leg-1"/>
           <p:cNvSpPr txBox="1"/>
           <p:nvPr/>
         </p:nvSpPr>
         <p:spPr>
           <a:xfrm>
-            <a:off x="4769510" y="4873752"/>
+            <a:off x="1980590" y="5724144"/>
             <a:ext cx="596189" cy="201168"/>
           </a:xfrm>
           <a:prstGeom prst="rect">
@@ -3781,13 +3613,13 @@
       </p:sp>
       <p:sp>
         <p:nvSpPr>
-          <p:cNvPr id="24" name="s3_dependence-dot-2"/>
+          <p:cNvPr id="19" name="s3_dependence-dot-2"/>
           <p:cNvSpPr/>
           <p:nvPr/>
         </p:nvSpPr>
         <p:spPr>
           <a:xfrm>
-            <a:off x="5475427" y="4914900"/>
+            <a:off x="2686507" y="5765292"/>
             <a:ext cx="109728" cy="109728"/>
           </a:xfrm>
           <a:prstGeom prst="ellipse">
@@ -3806,13 +3638,13 @@
       </p:sp>
       <p:sp>
         <p:nvSpPr>
-          <p:cNvPr id="25" name="s3_dependence-leg-2"/>
+          <p:cNvPr id="20" name="s3_dependence-leg-2"/>
           <p:cNvSpPr txBox="1"/>
           <p:nvPr/>
         </p:nvSpPr>
         <p:spPr>
           <a:xfrm>
-            <a:off x="5630875" y="4873752"/>
+            <a:off x="2841955" y="5724144"/>
             <a:ext cx="727862" cy="201168"/>
           </a:xfrm>
           <a:prstGeom prst="rect">
@@ -3842,13 +3674,13 @@
       </p:sp>
       <p:sp>
         <p:nvSpPr>
-          <p:cNvPr id="26" name="s3_dependence-dot-3"/>
+          <p:cNvPr id="21" name="s3_dependence-dot-3"/>
           <p:cNvSpPr/>
           <p:nvPr/>
         </p:nvSpPr>
         <p:spPr>
           <a:xfrm>
-            <a:off x="6468466" y="4914900"/>
+            <a:off x="3679546" y="5765292"/>
             <a:ext cx="109728" cy="109728"/>
           </a:xfrm>
           <a:prstGeom prst="ellipse">
@@ -3867,13 +3699,13 @@
       </p:sp>
       <p:sp>
         <p:nvSpPr>
-          <p:cNvPr id="27" name="s3_dependence-leg-3"/>
+          <p:cNvPr id="22" name="s3_dependence-leg-3"/>
           <p:cNvSpPr txBox="1"/>
           <p:nvPr/>
         </p:nvSpPr>
         <p:spPr>
           <a:xfrm>
-            <a:off x="6623914" y="4873752"/>
+            <a:off x="3834994" y="5724144"/>
             <a:ext cx="925373" cy="201168"/>
           </a:xfrm>
           <a:prstGeom prst="rect">
@@ -3903,13 +3735,13 @@
       </p:sp>
       <p:sp>
         <p:nvSpPr>
-          <p:cNvPr id="28" name="s3_dependence-dot-4"/>
+          <p:cNvPr id="23" name="s3_dependence-dot-4"/>
           <p:cNvSpPr/>
           <p:nvPr/>
         </p:nvSpPr>
         <p:spPr>
           <a:xfrm>
-            <a:off x="7659014" y="4914900"/>
+            <a:off x="4870094" y="5765292"/>
             <a:ext cx="109728" cy="109728"/>
           </a:xfrm>
           <a:prstGeom prst="ellipse">
@@ -3928,13 +3760,13 @@
       </p:sp>
       <p:sp>
         <p:nvSpPr>
-          <p:cNvPr id="29" name="s3_dependence-leg-4"/>
+          <p:cNvPr id="24" name="s3_dependence-leg-4"/>
           <p:cNvSpPr txBox="1"/>
           <p:nvPr/>
         </p:nvSpPr>
         <p:spPr>
           <a:xfrm>
-            <a:off x="7814462" y="4873752"/>
+            <a:off x="5025542" y="5724144"/>
             <a:ext cx="1057046" cy="201168"/>
           </a:xfrm>
           <a:prstGeom prst="rect">
@@ -3964,13 +3796,13 @@
       </p:sp>
       <p:sp>
         <p:nvSpPr>
-          <p:cNvPr id="30" name="s3_dependence-dot-5"/>
+          <p:cNvPr id="25" name="s3_dependence-dot-5"/>
           <p:cNvSpPr/>
           <p:nvPr/>
         </p:nvSpPr>
         <p:spPr>
           <a:xfrm>
-            <a:off x="8981237" y="4914900"/>
+            <a:off x="6192317" y="5765292"/>
             <a:ext cx="109728" cy="109728"/>
           </a:xfrm>
           <a:prstGeom prst="ellipse">
@@ -3989,13 +3821,13 @@
       </p:sp>
       <p:sp>
         <p:nvSpPr>
-          <p:cNvPr id="31" name="s3_dependence-leg-5"/>
+          <p:cNvPr id="26" name="s3_dependence-leg-5"/>
           <p:cNvSpPr txBox="1"/>
           <p:nvPr/>
         </p:nvSpPr>
         <p:spPr>
           <a:xfrm>
-            <a:off x="9136685" y="4873752"/>
+            <a:off x="6347765" y="5724144"/>
             <a:ext cx="1781251" cy="201168"/>
           </a:xfrm>
           <a:prstGeom prst="rect">
@@ -4025,43 +3857,7 @@
       </p:sp>
       <p:sp>
         <p:nvSpPr>
-          <p:cNvPr id="32" name="s3_dependence-key"/>
-          <p:cNvSpPr txBox="1"/>
-          <p:nvPr/>
-        </p:nvSpPr>
-        <p:spPr>
-          <a:xfrm>
-            <a:off x="3291840" y="5148072"/>
-            <a:ext cx="8366760" cy="502920"/>
-          </a:xfrm>
-          <a:prstGeom prst="rect">
-            <a:avLst/>
-          </a:prstGeom>
-          <a:noFill/>
-          <a:ln/>
-        </p:spPr>
-        <p:txBody>
-          <a:bodyPr wrap="square" lIns="0" tIns="0" rIns="0" bIns="0" rtlCol="0" anchor="ctr"/>
-          <a:lstStyle/>
-          <a:p>
-            <a:pPr indent="0" marL="0">
-              <a:buNone/>
-            </a:pPr>
-            <a:r>
-              <a:rPr lang="en-US" sz="900" dirty="0">
-                <a:solidFill>
-                  <a:srgbClr val="595959"/>
-                </a:solidFill>
-              </a:rPr>
-              <a:t>grey line and band: all 2,907 Stable sites, median with a 95% bootstrap CI.   Each class is every site carrying that call, tested against that reference by Mann–Whitney, BH across all 20 tests on this figure.   *** p&lt;0.001   ** p&lt;0.01   * p&lt;0.05   ns ≥ 0.05</a:t>
-            </a:r>
-            <a:endParaRPr lang="en-US" sz="900" dirty="0"/>
-          </a:p>
-        </p:txBody>
-      </p:sp>
-      <p:sp>
-        <p:nvSpPr>
-          <p:cNvPr id="33" name="Text 0"/>
+          <p:cNvPr id="27" name="Text 0"/>
           <p:cNvSpPr/>
           <p:nvPr>
             <p:ph idx="101" type="body" hasCustomPrompt="1"/>
@@ -7769,23 +7565,23 @@
       </p:sp>
       <p:sp>
         <p:nvSpPr>
-          <p:cNvPr id="3" name="s2_matched_null-title-0"/>
+          <p:cNvPr id="3" name="ed-t"/>
           <p:cNvSpPr txBox="1"/>
           <p:nvPr/>
         </p:nvSpPr>
         <p:spPr>
           <a:xfrm>
-            <a:off x="612648" y="1143000"/>
-            <a:ext cx="2688336" cy="438912"/>
-          </a:xfrm>
-          <a:prstGeom prst="rect">
-            <a:avLst/>
-          </a:prstGeom>
-          <a:noFill/>
-          <a:ln/>
-        </p:spPr>
-        <p:txBody>
-          <a:bodyPr wrap="square" lIns="0" tIns="0" rIns="0" bIns="0" rtlCol="0" anchor="t"/>
+            <a:off x="502920" y="987552"/>
+            <a:ext cx="4937760" cy="256032"/>
+          </a:xfrm>
+          <a:prstGeom prst="rect">
+            <a:avLst/>
+          </a:prstGeom>
+          <a:noFill/>
+          <a:ln/>
+        </p:spPr>
+        <p:txBody>
+          <a:bodyPr wrap="square" lIns="0" tIns="0" rIns="0" bIns="0" rtlCol="0" anchor="ctr"/>
           <a:lstStyle/>
           <a:p>
             <a:pPr indent="0" marL="0">
@@ -7797,51 +7593,15 @@
                   <a:srgbClr val="111111"/>
                 </a:solidFill>
               </a:rPr>
-              <a:t>Replace the 11 bp motif</a:t>
+              <a:t>The three edits, and the control</a:t>
             </a:r>
             <a:endParaRPr lang="en-US" sz="1250" dirty="0"/>
-          </a:p>
-        </p:txBody>
-      </p:sp>
-      <p:sp>
-        <p:nvSpPr>
-          <p:cNvPr id="4" name="s2_matched_null-sub-0"/>
-          <p:cNvSpPr txBox="1"/>
-          <p:nvPr/>
-        </p:nvSpPr>
-        <p:spPr>
-          <a:xfrm>
-            <a:off x="612648" y="1572768"/>
-            <a:ext cx="2688336" cy="310896"/>
-          </a:xfrm>
-          <a:prstGeom prst="rect">
-            <a:avLst/>
-          </a:prstGeom>
-          <a:noFill/>
-          <a:ln/>
-        </p:spPr>
-        <p:txBody>
-          <a:bodyPr wrap="square" lIns="0" tIns="0" rIns="0" bIns="0" rtlCol="0" anchor="t"/>
-          <a:lstStyle/>
-          <a:p>
-            <a:pPr indent="0" marL="0">
-              <a:buNone/>
-            </a:pPr>
-            <a:r>
-              <a:rPr lang="en-US" sz="950" dirty="0">
-                <a:solidFill>
-                  <a:srgbClr val="595959"/>
-                </a:solidFill>
-              </a:rPr>
-              <a:t>the motif alone</a:t>
-            </a:r>
-            <a:endParaRPr lang="en-US" sz="950" dirty="0"/>
           </a:p>
         </p:txBody>
       </p:sp>
       <p:pic>
         <p:nvPicPr>
-          <p:cNvPr id="5" name="Image 0" descr="/Users/z5162865/WongLab/AlphaGenome_Ap1/Analysis/slide_figures/panels/s2_matched_null_c0_r0.png">    </p:cNvPr>
+          <p:cNvPr id="4" name="Image 0" descr="/Users/z5162865/WongLab/AlphaGenome_Ap1/Analysis/slide_figures/panels/d_edits.png">    </p:cNvPr>
           <p:cNvPicPr>
             <a:picLocks noChangeAspect="1"/>
           </p:cNvPicPr>
@@ -7855,8 +7615,8 @@
         </p:blipFill>
         <p:spPr>
           <a:xfrm>
-            <a:off x="612648" y="2079013"/>
-            <a:ext cx="2688336" cy="2443942"/>
+            <a:off x="1008944" y="1261872"/>
+            <a:ext cx="3925711" cy="1188720"/>
           </a:xfrm>
           <a:prstGeom prst="rect">
             <a:avLst/>
@@ -7865,13 +7625,13 @@
       </p:pic>
       <p:sp>
         <p:nvSpPr>
-          <p:cNvPr id="6" name="s2_matched_null-title-1"/>
+          <p:cNvPr id="5" name="s2_matched_null-title-0"/>
           <p:cNvSpPr txBox="1"/>
           <p:nvPr/>
         </p:nvSpPr>
         <p:spPr>
           <a:xfrm>
-            <a:off x="3374136" y="1143000"/>
+            <a:off x="612648" y="2578608"/>
             <a:ext cx="2688336" cy="438912"/>
           </a:xfrm>
           <a:prstGeom prst="rect">
@@ -7893,7 +7653,7 @@
                   <a:srgbClr val="111111"/>
                 </a:solidFill>
               </a:rPr>
-              <a:t>Replace the 170 bp element</a:t>
+              <a:t>Replace the 11 bp motif</a:t>
             </a:r>
             <a:endParaRPr lang="en-US" sz="1250" dirty="0"/>
           </a:p>
@@ -7901,13 +7661,13 @@
       </p:sp>
       <p:sp>
         <p:nvSpPr>
-          <p:cNvPr id="7" name="s2_matched_null-sub-1"/>
+          <p:cNvPr id="6" name="s2_matched_null-sub-0"/>
           <p:cNvSpPr txBox="1"/>
           <p:nvPr/>
         </p:nvSpPr>
         <p:spPr>
           <a:xfrm>
-            <a:off x="3374136" y="1572768"/>
+            <a:off x="612648" y="3008376"/>
             <a:ext cx="2688336" cy="310896"/>
           </a:xfrm>
           <a:prstGeom prst="rect">
@@ -7929,7 +7689,7 @@
                   <a:srgbClr val="595959"/>
                 </a:solidFill>
               </a:rPr>
-              <a:t>the element around it</a:t>
+              <a:t>the motif alone</a:t>
             </a:r>
             <a:endParaRPr lang="en-US" sz="950" dirty="0"/>
           </a:p>
@@ -7937,7 +7697,7 @@
       </p:sp>
       <p:pic>
         <p:nvPicPr>
-          <p:cNvPr id="8" name="Image 1" descr="/Users/z5162865/WongLab/AlphaGenome_Ap1/Analysis/slide_figures/panels/s2_matched_null_c1_r0.png">    </p:cNvPr>
+          <p:cNvPr id="7" name="Image 1" descr="/Users/z5162865/WongLab/AlphaGenome_Ap1/Analysis/slide_figures/panels/s2_matched_null_c0_r0.png">    </p:cNvPr>
           <p:cNvPicPr>
             <a:picLocks noChangeAspect="1"/>
           </p:cNvPicPr>
@@ -7951,8 +7711,8 @@
         </p:blipFill>
         <p:spPr>
           <a:xfrm>
-            <a:off x="3374136" y="2079013"/>
-            <a:ext cx="2688336" cy="2443942"/>
+            <a:off x="1222553" y="3328416"/>
+            <a:ext cx="1468526" cy="1335024"/>
           </a:xfrm>
           <a:prstGeom prst="rect">
             <a:avLst/>
@@ -7961,13 +7721,13 @@
       </p:pic>
       <p:sp>
         <p:nvSpPr>
-          <p:cNvPr id="9" name="s2_matched_null-title-2"/>
+          <p:cNvPr id="8" name="s2_matched_null-title-1"/>
           <p:cNvSpPr txBox="1"/>
           <p:nvPr/>
         </p:nvSpPr>
         <p:spPr>
           <a:xfrm>
-            <a:off x="6135624" y="1143000"/>
+            <a:off x="3374136" y="2578608"/>
             <a:ext cx="2688336" cy="438912"/>
           </a:xfrm>
           <a:prstGeom prst="rect">
@@ -7989,7 +7749,7 @@
                   <a:srgbClr val="111111"/>
                 </a:solidFill>
               </a:rPr>
-              <a:t>Replace the whole peak</a:t>
+              <a:t>Replace the 170 bp element</a:t>
             </a:r>
             <a:endParaRPr lang="en-US" sz="1250" dirty="0"/>
           </a:p>
@@ -7997,13 +7757,13 @@
       </p:sp>
       <p:sp>
         <p:nvSpPr>
-          <p:cNvPr id="10" name="s2_matched_null-sub-2"/>
+          <p:cNvPr id="9" name="s2_matched_null-sub-1"/>
           <p:cNvSpPr txBox="1"/>
           <p:nvPr/>
         </p:nvSpPr>
         <p:spPr>
           <a:xfrm>
-            <a:off x="6135624" y="1572768"/>
+            <a:off x="3374136" y="3008376"/>
             <a:ext cx="2688336" cy="310896"/>
           </a:xfrm>
           <a:prstGeom prst="rect">
@@ -8025,7 +7785,7 @@
                   <a:srgbClr val="595959"/>
                 </a:solidFill>
               </a:rPr>
-              <a:t>everything, read over the peak</a:t>
+              <a:t>the element around it</a:t>
             </a:r>
             <a:endParaRPr lang="en-US" sz="950" dirty="0"/>
           </a:p>
@@ -8033,7 +7793,7 @@
       </p:sp>
       <p:pic>
         <p:nvPicPr>
-          <p:cNvPr id="11" name="Image 2" descr="/Users/z5162865/WongLab/AlphaGenome_Ap1/Analysis/slide_figures/panels/s2_matched_null_c2_r0.png">    </p:cNvPr>
+          <p:cNvPr id="10" name="Image 2" descr="/Users/z5162865/WongLab/AlphaGenome_Ap1/Analysis/slide_figures/panels/s2_matched_null_c1_r0.png">    </p:cNvPr>
           <p:cNvPicPr>
             <a:picLocks noChangeAspect="1"/>
           </p:cNvPicPr>
@@ -8047,8 +7807,8 @@
         </p:blipFill>
         <p:spPr>
           <a:xfrm>
-            <a:off x="6135624" y="2079013"/>
-            <a:ext cx="2688336" cy="2443942"/>
+            <a:off x="3984041" y="3328416"/>
+            <a:ext cx="1468526" cy="1335024"/>
           </a:xfrm>
           <a:prstGeom prst="rect">
             <a:avLst/>
@@ -8057,13 +7817,13 @@
       </p:pic>
       <p:sp>
         <p:nvSpPr>
-          <p:cNvPr id="12" name="s2_matched_null-title-3"/>
+          <p:cNvPr id="11" name="s2_matched_null-title-2"/>
           <p:cNvSpPr txBox="1"/>
           <p:nvPr/>
         </p:nvSpPr>
         <p:spPr>
           <a:xfrm>
-            <a:off x="8897112" y="1143000"/>
+            <a:off x="6135624" y="2578608"/>
             <a:ext cx="2688336" cy="438912"/>
           </a:xfrm>
           <a:prstGeom prst="rect">
@@ -8085,7 +7845,7 @@
                   <a:srgbClr val="111111"/>
                 </a:solidFill>
               </a:rPr>
-              <a:t>Edit 300 bp away</a:t>
+              <a:t>Replace the whole peak</a:t>
             </a:r>
             <a:endParaRPr lang="en-US" sz="1250" dirty="0"/>
           </a:p>
@@ -8093,13 +7853,13 @@
       </p:sp>
       <p:sp>
         <p:nvSpPr>
-          <p:cNvPr id="13" name="s2_matched_null-sub-3"/>
+          <p:cNvPr id="12" name="s2_matched_null-sub-2"/>
           <p:cNvSpPr txBox="1"/>
           <p:nvPr/>
         </p:nvSpPr>
         <p:spPr>
           <a:xfrm>
-            <a:off x="8897112" y="1572768"/>
+            <a:off x="6135624" y="3008376"/>
             <a:ext cx="2688336" cy="310896"/>
           </a:xfrm>
           <a:prstGeom prst="rect">
@@ -8121,7 +7881,7 @@
                   <a:srgbClr val="595959"/>
                 </a:solidFill>
               </a:rPr>
-              <a:t>the control: nothing at stake</a:t>
+              <a:t>everything, read over the peak</a:t>
             </a:r>
             <a:endParaRPr lang="en-US" sz="950" dirty="0"/>
           </a:p>
@@ -8129,7 +7889,7 @@
       </p:sp>
       <p:pic>
         <p:nvPicPr>
-          <p:cNvPr id="14" name="Image 3" descr="/Users/z5162865/WongLab/AlphaGenome_Ap1/Analysis/slide_figures/panels/s2_matched_null_c3_r0.png">    </p:cNvPr>
+          <p:cNvPr id="13" name="Image 3" descr="/Users/z5162865/WongLab/AlphaGenome_Ap1/Analysis/slide_figures/panels/s2_matched_null_c2_r0.png">    </p:cNvPr>
           <p:cNvPicPr>
             <a:picLocks noChangeAspect="1"/>
           </p:cNvPicPr>
@@ -8143,8 +7903,8 @@
         </p:blipFill>
         <p:spPr>
           <a:xfrm>
-            <a:off x="8897112" y="2079013"/>
-            <a:ext cx="2688336" cy="2443942"/>
+            <a:off x="6745529" y="3328416"/>
+            <a:ext cx="1468526" cy="1335024"/>
           </a:xfrm>
           <a:prstGeom prst="rect">
             <a:avLst/>
@@ -8153,13 +7913,109 @@
       </p:pic>
       <p:sp>
         <p:nvSpPr>
-          <p:cNvPr id="15" name="s2_matched_null-dot-0"/>
+          <p:cNvPr id="14" name="s2_matched_null-title-3"/>
+          <p:cNvSpPr txBox="1"/>
+          <p:nvPr/>
+        </p:nvSpPr>
+        <p:spPr>
+          <a:xfrm>
+            <a:off x="8897112" y="2578608"/>
+            <a:ext cx="2688336" cy="438912"/>
+          </a:xfrm>
+          <a:prstGeom prst="rect">
+            <a:avLst/>
+          </a:prstGeom>
+          <a:noFill/>
+          <a:ln/>
+        </p:spPr>
+        <p:txBody>
+          <a:bodyPr wrap="square" lIns="0" tIns="0" rIns="0" bIns="0" rtlCol="0" anchor="t"/>
+          <a:lstStyle/>
+          <a:p>
+            <a:pPr indent="0" marL="0">
+              <a:buNone/>
+            </a:pPr>
+            <a:r>
+              <a:rPr lang="en-US" sz="1250" b="1" dirty="0">
+                <a:solidFill>
+                  <a:srgbClr val="111111"/>
+                </a:solidFill>
+              </a:rPr>
+              <a:t>Edit 300 bp away</a:t>
+            </a:r>
+            <a:endParaRPr lang="en-US" sz="1250" dirty="0"/>
+          </a:p>
+        </p:txBody>
+      </p:sp>
+      <p:sp>
+        <p:nvSpPr>
+          <p:cNvPr id="15" name="s2_matched_null-sub-3"/>
+          <p:cNvSpPr txBox="1"/>
+          <p:nvPr/>
+        </p:nvSpPr>
+        <p:spPr>
+          <a:xfrm>
+            <a:off x="8897112" y="3008376"/>
+            <a:ext cx="2688336" cy="310896"/>
+          </a:xfrm>
+          <a:prstGeom prst="rect">
+            <a:avLst/>
+          </a:prstGeom>
+          <a:noFill/>
+          <a:ln/>
+        </p:spPr>
+        <p:txBody>
+          <a:bodyPr wrap="square" lIns="0" tIns="0" rIns="0" bIns="0" rtlCol="0" anchor="t"/>
+          <a:lstStyle/>
+          <a:p>
+            <a:pPr indent="0" marL="0">
+              <a:buNone/>
+            </a:pPr>
+            <a:r>
+              <a:rPr lang="en-US" sz="950" dirty="0">
+                <a:solidFill>
+                  <a:srgbClr val="595959"/>
+                </a:solidFill>
+              </a:rPr>
+              <a:t>the control: nothing at stake</a:t>
+            </a:r>
+            <a:endParaRPr lang="en-US" sz="950" dirty="0"/>
+          </a:p>
+        </p:txBody>
+      </p:sp>
+      <p:pic>
+        <p:nvPicPr>
+          <p:cNvPr id="16" name="Image 4" descr="/Users/z5162865/WongLab/AlphaGenome_Ap1/Analysis/slide_figures/panels/s2_matched_null_c3_r0.png">    </p:cNvPr>
+          <p:cNvPicPr>
+            <a:picLocks noChangeAspect="1"/>
+          </p:cNvPicPr>
+          <p:nvPr/>
+        </p:nvPicPr>
+        <p:blipFill>
+          <a:blip r:embed="rId5"/>
+          <a:stretch>
+            <a:fillRect/>
+          </a:stretch>
+        </p:blipFill>
+        <p:spPr>
+          <a:xfrm>
+            <a:off x="9507017" y="3328416"/>
+            <a:ext cx="1468526" cy="1335024"/>
+          </a:xfrm>
+          <a:prstGeom prst="rect">
+            <a:avLst/>
+          </a:prstGeom>
+        </p:spPr>
+      </p:pic>
+      <p:sp>
+        <p:nvSpPr>
+          <p:cNvPr id="17" name="s2_matched_null-dot-0"/>
           <p:cNvSpPr/>
           <p:nvPr/>
         </p:nvSpPr>
         <p:spPr>
           <a:xfrm>
-            <a:off x="502920" y="4914900"/>
+            <a:off x="502920" y="4869180"/>
             <a:ext cx="109728" cy="109728"/>
           </a:xfrm>
           <a:prstGeom prst="ellipse">
@@ -8178,13 +8034,13 @@
       </p:sp>
       <p:sp>
         <p:nvSpPr>
-          <p:cNvPr id="16" name="s2_matched_null-leg-0"/>
+          <p:cNvPr id="18" name="s2_matched_null-leg-0"/>
           <p:cNvSpPr txBox="1"/>
           <p:nvPr/>
         </p:nvSpPr>
         <p:spPr>
           <a:xfrm>
-            <a:off x="658368" y="4873752"/>
+            <a:off x="658368" y="4828032"/>
             <a:ext cx="1057046" cy="201168"/>
           </a:xfrm>
           <a:prstGeom prst="rect">
@@ -8214,13 +8070,13 @@
       </p:sp>
       <p:sp>
         <p:nvSpPr>
-          <p:cNvPr id="17" name="s2_matched_null-dot-1"/>
+          <p:cNvPr id="19" name="s2_matched_null-dot-1"/>
           <p:cNvSpPr/>
           <p:nvPr/>
         </p:nvSpPr>
         <p:spPr>
           <a:xfrm>
-            <a:off x="1825142" y="4914900"/>
+            <a:off x="1825142" y="4869180"/>
             <a:ext cx="109728" cy="109728"/>
           </a:xfrm>
           <a:prstGeom prst="ellipse">
@@ -8239,13 +8095,13 @@
       </p:sp>
       <p:sp>
         <p:nvSpPr>
-          <p:cNvPr id="18" name="s2_matched_null-leg-1"/>
+          <p:cNvPr id="20" name="s2_matched_null-leg-1"/>
           <p:cNvSpPr txBox="1"/>
           <p:nvPr/>
         </p:nvSpPr>
         <p:spPr>
           <a:xfrm>
-            <a:off x="1980590" y="4873752"/>
+            <a:off x="1980590" y="4828032"/>
             <a:ext cx="596189" cy="201168"/>
           </a:xfrm>
           <a:prstGeom prst="rect">
@@ -8275,13 +8131,13 @@
       </p:sp>
       <p:sp>
         <p:nvSpPr>
-          <p:cNvPr id="19" name="s2_matched_null-dot-2"/>
+          <p:cNvPr id="21" name="s2_matched_null-dot-2"/>
           <p:cNvSpPr/>
           <p:nvPr/>
         </p:nvSpPr>
         <p:spPr>
           <a:xfrm>
-            <a:off x="2686507" y="4914900"/>
+            <a:off x="2686507" y="4869180"/>
             <a:ext cx="109728" cy="109728"/>
           </a:xfrm>
           <a:prstGeom prst="ellipse">
@@ -8300,13 +8156,13 @@
       </p:sp>
       <p:sp>
         <p:nvSpPr>
-          <p:cNvPr id="20" name="s2_matched_null-leg-2"/>
+          <p:cNvPr id="22" name="s2_matched_null-leg-2"/>
           <p:cNvSpPr txBox="1"/>
           <p:nvPr/>
         </p:nvSpPr>
         <p:spPr>
           <a:xfrm>
-            <a:off x="2841955" y="4873752"/>
+            <a:off x="2841955" y="4828032"/>
             <a:ext cx="727862" cy="201168"/>
           </a:xfrm>
           <a:prstGeom prst="rect">
@@ -8336,13 +8192,13 @@
       </p:sp>
       <p:sp>
         <p:nvSpPr>
-          <p:cNvPr id="21" name="s2_matched_null-dot-3"/>
+          <p:cNvPr id="23" name="s2_matched_null-dot-3"/>
           <p:cNvSpPr/>
           <p:nvPr/>
         </p:nvSpPr>
         <p:spPr>
           <a:xfrm>
-            <a:off x="3679546" y="4914900"/>
+            <a:off x="3679546" y="4869180"/>
             <a:ext cx="109728" cy="109728"/>
           </a:xfrm>
           <a:prstGeom prst="ellipse">
@@ -8361,13 +8217,13 @@
       </p:sp>
       <p:sp>
         <p:nvSpPr>
-          <p:cNvPr id="22" name="s2_matched_null-leg-3"/>
+          <p:cNvPr id="24" name="s2_matched_null-leg-3"/>
           <p:cNvSpPr txBox="1"/>
           <p:nvPr/>
         </p:nvSpPr>
         <p:spPr>
           <a:xfrm>
-            <a:off x="3834994" y="4873752"/>
+            <a:off x="3834994" y="4828032"/>
             <a:ext cx="925373" cy="201168"/>
           </a:xfrm>
           <a:prstGeom prst="rect">
@@ -8397,13 +8253,13 @@
       </p:sp>
       <p:sp>
         <p:nvSpPr>
-          <p:cNvPr id="23" name="s2_matched_null-dot-4"/>
+          <p:cNvPr id="25" name="s2_matched_null-dot-4"/>
           <p:cNvSpPr/>
           <p:nvPr/>
         </p:nvSpPr>
         <p:spPr>
           <a:xfrm>
-            <a:off x="4870094" y="4914900"/>
+            <a:off x="4870094" y="4869180"/>
             <a:ext cx="109728" cy="109728"/>
           </a:xfrm>
           <a:prstGeom prst="ellipse">
@@ -8422,13 +8278,13 @@
       </p:sp>
       <p:sp>
         <p:nvSpPr>
-          <p:cNvPr id="24" name="s2_matched_null-leg-4"/>
+          <p:cNvPr id="26" name="s2_matched_null-leg-4"/>
           <p:cNvSpPr txBox="1"/>
           <p:nvPr/>
         </p:nvSpPr>
         <p:spPr>
           <a:xfrm>
-            <a:off x="5025542" y="4873752"/>
+            <a:off x="5025542" y="4828032"/>
             <a:ext cx="1057046" cy="201168"/>
           </a:xfrm>
           <a:prstGeom prst="rect">
@@ -8458,13 +8314,13 @@
       </p:sp>
       <p:sp>
         <p:nvSpPr>
-          <p:cNvPr id="25" name="s2_matched_null-dot-5"/>
+          <p:cNvPr id="27" name="s2_matched_null-dot-5"/>
           <p:cNvSpPr/>
           <p:nvPr/>
         </p:nvSpPr>
         <p:spPr>
           <a:xfrm>
-            <a:off x="6192317" y="4914900"/>
+            <a:off x="6192317" y="4869180"/>
             <a:ext cx="109728" cy="109728"/>
           </a:xfrm>
           <a:prstGeom prst="ellipse">
@@ -8483,13 +8339,13 @@
       </p:sp>
       <p:sp>
         <p:nvSpPr>
-          <p:cNvPr id="26" name="s2_matched_null-leg-5"/>
+          <p:cNvPr id="28" name="s2_matched_null-leg-5"/>
           <p:cNvSpPr txBox="1"/>
           <p:nvPr/>
         </p:nvSpPr>
         <p:spPr>
           <a:xfrm>
-            <a:off x="6347765" y="4873752"/>
+            <a:off x="6347765" y="4828032"/>
             <a:ext cx="1781251" cy="201168"/>
           </a:xfrm>
           <a:prstGeom prst="rect">
@@ -8519,13 +8375,13 @@
       </p:sp>
       <p:sp>
         <p:nvSpPr>
-          <p:cNvPr id="27" name="s2_matched_null-key"/>
+          <p:cNvPr id="29" name="s2_matched_null-key"/>
           <p:cNvSpPr txBox="1"/>
           <p:nvPr/>
         </p:nvSpPr>
         <p:spPr>
           <a:xfrm>
-            <a:off x="502920" y="5148072"/>
+            <a:off x="502920" y="5102352"/>
             <a:ext cx="11155680" cy="502920"/>
           </a:xfrm>
           <a:prstGeom prst="rect">
@@ -8555,7 +8411,7 @@
       </p:sp>
       <p:sp>
         <p:nvSpPr>
-          <p:cNvPr id="28" name="Text 0"/>
+          <p:cNvPr id="30" name="Text 0"/>
           <p:cNvSpPr/>
           <p:nvPr>
             <p:ph idx="101" type="body" hasCustomPrompt="1"/>

--- a/Analysis/AP1_AlphaGenome_results.pptx
+++ b/Analysis/AP1_AlphaGenome_results.pptx
@@ -122,19 +122,19 @@
   <p:extLst>
     <p:ext uri="{521415D9-36F7-43E2-AB2F-B90AF26B5E84}">
       <p14:sectionLst xmlns:p14="http://schemas.microsoft.com/office/powerpoint/2010/main">
-        <p14:section name="Opening" id="{42cd2afe-29fd-82c3-7880-fec3fa0d9a32}">
+        <p14:section name="Opening" id="{6cc0b3ca-395d-3bf2-640c-da17d9970e60}">
           <p14:sldIdLst>
             <p14:sldId id="256"/>
           </p14:sldIdLst>
         </p14:section>
-        <p14:section name="Design" id="{9a105811-a1f9-2cd7-e5f3-533e4b6e9255}">
+        <p14:section name="Design" id="{fc169d28-4261-b0f0-47a9-2ca5e60800e4}">
           <p14:sldIdLst>
             <p14:sldId id="257"/>
             <p14:sldId id="258"/>
             <p14:sldId id="259"/>
           </p14:sldIdLst>
         </p14:section>
-        <p14:section name="Findings" id="{da75b2ea-f503-3ffa-21b8-538ca9e5d235}">
+        <p14:section name="Findings" id="{99c6c798-7b3a-9644-98cf-a8bd13f61e9b}">
           <p14:sldIdLst>
             <p14:sldId id="260"/>
             <p14:sldId id="261"/>
@@ -148,7 +148,7 @@
             <p14:sldId id="269"/>
           </p14:sldIdLst>
         </p14:section>
-        <p14:section name="Conclusion" id="{e8f4fd0c-1965-5a89-4862-22e2524a15d0}">
+        <p14:section name="Conclusion" id="{ff6d1d2c-8807-6257-2a0d-b03946c72c73}">
           <p14:sldIdLst>
             <p14:sldId id="270"/>
             <p14:sldId id="271"/>
@@ -1438,7 +1438,7 @@
           <a:p>
             <a:r>
               <a:rPr lang="en-US" dirty="0"/>
-              <a:t>A demonstration, not a result: this element was chosen for legibility, not because it is typical. The footprint lane is what lets a window be attributed to a factor; families are stacked into lanes only where their footprints would otherwise overlap. The same scan is also read over the 11 bp motif and over the whole peak, and the titration and single-base experiments run on the same 3,678 sites.</a:t>
+              <a:t>A demonstration, not a result, but chosen to be typical rather than striking: the motif window, the total dependence and the deepest-neighbour pattern all sit near the median. An earlier version used a site in the top 8% for motif depth, which made the motif look far more dominant than it is. The footprint lane is every named family TOBIAS calls here, with overlapping calls of one family merged and counted; only the two catch-all bins (Other, Zinc finger other) are dropped. The same scan is also read over the 11 bp motif and over the whole peak, and the titration and single-base experiments run on the same 3,678 sites.</a:t>
             </a:r>
             <a:endParaRPr lang="en-US" dirty="0"/>
           </a:p>
@@ -7400,7 +7400,7 @@
                   <a:srgbClr val="111111"/>
                 </a:solidFill>
               </a:rPr>
-              <a:t>chr14:77,485,003 · a Stable cardiomyocyte AP-1 site · the motif window costs −1.71, the deepest of the 60</a:t>
+              <a:t>chr2:167,698,004 · the motif window costs −0.56 against a median of −0.66 across all 3,678 sites, and the deepest window is a neighbour — as it is at 69% of sites</a:t>
             </a:r>
             <a:endParaRPr lang="en-US" sz="1050" dirty="0"/>
           </a:p>
@@ -7449,7 +7449,7 @@
                   <a:srgbClr val="111111"/>
                 </a:solidFill>
               </a:rPr>
-              <a:t>one element, 60 windows, five footprinted families — everything that follows is this, repeated over 3,678 sites</a:t>
+              <a:t>the motif is one window among sixty, and usually not the deepest — everything that follows is this, repeated over 3,678 sites</a:t>
             </a:r>
             <a:endParaRPr lang="en-US" sz="1500" dirty="0"/>
           </a:p>

--- a/Analysis/AP1_AlphaGenome_results.pptx
+++ b/Analysis/AP1_AlphaGenome_results.pptx
@@ -122,19 +122,19 @@
   <p:extLst>
     <p:ext uri="{521415D9-36F7-43E2-AB2F-B90AF26B5E84}">
       <p14:sectionLst xmlns:p14="http://schemas.microsoft.com/office/powerpoint/2010/main">
-        <p14:section name="Opening" id="{6cc0b3ca-395d-3bf2-640c-da17d9970e60}">
+        <p14:section name="Opening" id="{b4670f3b-2581-cefe-17f0-6cadfd8135cb}">
           <p14:sldIdLst>
             <p14:sldId id="256"/>
           </p14:sldIdLst>
         </p14:section>
-        <p14:section name="Design" id="{fc169d28-4261-b0f0-47a9-2ca5e60800e4}">
+        <p14:section name="Design" id="{d0a7aa40-f9fc-eb03-01c0-7d2abef8def0}">
           <p14:sldIdLst>
             <p14:sldId id="257"/>
             <p14:sldId id="258"/>
             <p14:sldId id="259"/>
           </p14:sldIdLst>
         </p14:section>
-        <p14:section name="Findings" id="{99c6c798-7b3a-9644-98cf-a8bd13f61e9b}">
+        <p14:section name="Findings" id="{5f6d2a89-2256-453b-6324-a09fb860b719}">
           <p14:sldIdLst>
             <p14:sldId id="260"/>
             <p14:sldId id="261"/>
@@ -148,7 +148,7 @@
             <p14:sldId id="269"/>
           </p14:sldIdLst>
         </p14:section>
-        <p14:section name="Conclusion" id="{ff6d1d2c-8807-6257-2a0d-b03946c72c73}">
+        <p14:section name="Conclusion" id="{65a0044b-3162-4dde-0792-36e733bd482c}">
           <p14:sldIdLst>
             <p14:sldId id="270"/>
             <p14:sldId id="271"/>
@@ -734,7 +734,7 @@
           <a:p>
             <a:r>
               <a:rPr lang="en-US" dirty="0"/>
-              <a:t>The profiles on the left are what the four measures are read off. At the core (within 15 bp) every class loses less than Stable sites do: Age Down 0.73x, Exercise Up 0.76x, Exercise Down 0.78x, Dynamic 0.80x, Age Up 0.90x, all FDR &lt;= 0.016. Normalised to each site’s own total, the core share is barely different (0.93-1.00) but the flank share beyond 85 bp is higher in Age Up 1.31x, Exercise Down 1.29x and Dynamic 1.21x, all FDR &lt;= 0.0002, while Age Down is 0.99x. So Age Down is not a redistribution, it is a weaker element throughout.</a:t>
+              <a:t>The profiles are means, not medians, so the area under a curve equals the per-site totals in the panels on the right; with medians the two panels are different functions and do not correspond. Note where the difference lives: at the single deepest window Stable and Age Up are almost identical (0.68 vs 0.63 mean), and the 18% gap in loss within 85 bp comes from the shoulders, not the peak. At the core (within 15 bp) every class loses less than Stable sites do: Age Down 0.73x, Exercise Up 0.76x, Exercise Down 0.78x, Dynamic 0.80x, Age Up 0.90x, all FDR &lt;= 0.016. Normalised to each site’s own total, the core share is barely different (0.93-1.00) but the flank share beyond 85 bp is higher in Age Up 1.31x, Exercise Down 1.29x and Dynamic 1.21x, all FDR &lt;= 0.0002, while Age Down is 0.99x. So Age Down is not a redistribution, it is a weaker element throughout.</a:t>
             </a:r>
             <a:endParaRPr lang="en-US" dirty="0"/>
           </a:p>
@@ -3183,7 +3183,7 @@
                   <a:srgbClr val="595959"/>
                 </a:solidFill>
               </a:rPr>
-              <a:t>median loss at each of the 60 windows, smoothed over 3; gold band = the ±15 bp core</a:t>
+              <a:t>mean loss at each of the 60 windows, smoothed over 3; summed across windows this is exactly the quantity in the panels on the right. Gold band = the ±15 bp core.</a:t>
             </a:r>
             <a:endParaRPr lang="en-US" sz="1050" dirty="0"/>
           </a:p>

--- a/Analysis/AP1_AlphaGenome_results.pptx
+++ b/Analysis/AP1_AlphaGenome_results.pptx
@@ -122,19 +122,19 @@
   <p:extLst>
     <p:ext uri="{521415D9-36F7-43E2-AB2F-B90AF26B5E84}">
       <p14:sectionLst xmlns:p14="http://schemas.microsoft.com/office/powerpoint/2010/main">
-        <p14:section name="Opening" id="{b4670f3b-2581-cefe-17f0-6cadfd8135cb}">
+        <p14:section name="Opening" id="{9c34cc70-9536-c6db-ee69-3c55e578d846}">
           <p14:sldIdLst>
             <p14:sldId id="256"/>
           </p14:sldIdLst>
         </p14:section>
-        <p14:section name="Design" id="{d0a7aa40-f9fc-eb03-01c0-7d2abef8def0}">
+        <p14:section name="Design" id="{0f33ed6b-15a6-188f-503d-c2c5ea1bb9b8}">
           <p14:sldIdLst>
             <p14:sldId id="257"/>
             <p14:sldId id="258"/>
             <p14:sldId id="259"/>
           </p14:sldIdLst>
         </p14:section>
-        <p14:section name="Findings" id="{5f6d2a89-2256-453b-6324-a09fb860b719}">
+        <p14:section name="Findings" id="{183478aa-37fa-84be-a3ea-145a21d41cb9}">
           <p14:sldIdLst>
             <p14:sldId id="260"/>
             <p14:sldId id="261"/>
@@ -148,7 +148,7 @@
             <p14:sldId id="269"/>
           </p14:sldIdLst>
         </p14:section>
-        <p14:section name="Conclusion" id="{65a0044b-3162-4dde-0792-36e733bd482c}">
+        <p14:section name="Conclusion" id="{3cce498f-95e6-e4ce-f676-94798d9ed3a8}">
           <p14:sldIdLst>
             <p14:sldId id="270"/>
             <p14:sldId id="271"/>
@@ -734,7 +734,7 @@
           <a:p>
             <a:r>
               <a:rPr lang="en-US" dirty="0"/>
-              <a:t>The profiles are means, not medians, so the area under a curve equals the per-site totals in the panels on the right; with medians the two panels are different functions and do not correspond. Note where the difference lives: at the single deepest window Stable and Age Up are almost identical (0.68 vs 0.63 mean), and the 18% gap in loss within 85 bp comes from the shoulders, not the peak. At the core (within 15 bp) every class loses less than Stable sites do: Age Down 0.73x, Exercise Up 0.76x, Exercise Down 0.78x, Dynamic 0.80x, Age Up 0.90x, all FDR &lt;= 0.016. Normalised to each site’s own total, the core share is barely different (0.93-1.00) but the flank share beyond 85 bp is higher in Age Up 1.31x, Exercise Down 1.29x and Dynamic 1.21x, all FDR &lt;= 0.0002, while Age Down is 0.99x. So Age Down is not a redistribution, it is a weaker element throughout.</a:t>
+              <a:t>The profiles are means, not medians, so the area under a curve equals the per-site totals in the panels on the right; with medians the two panels are different functions and do not correspond. Note where the difference lives: at the single deepest window Stable and Age Up are almost identical (0.68 vs 0.63 mean), and the 18% gap in loss within 85 bp comes from the shoulders, not the peak. Spread is the standard deviation of window position when each of the 60 windows is weighted by its share of that site's total loss, measured about the centre of mass of the loss rather than about the motif. For scale: all the loss in one window gives 0 bp, confined to the central 90 bp gives 26, to the central 170 bp gives 49, and spread evenly over the whole 600 bp gives 173. Observed values run 29 to 216 with a median of 87, so a typical element draws on a window well over 100 bp wide.</a:t>
             </a:r>
             <a:endParaRPr lang="en-US" dirty="0"/>
           </a:p>
@@ -3183,7 +3183,7 @@
                   <a:srgbClr val="595959"/>
                 </a:solidFill>
               </a:rPr>
-              <a:t>mean loss at each of the 60 windows, smoothed over 3; summed across windows this is exactly the quantity in the panels on the right. Gold band = the ±15 bp core.</a:t>
+              <a:t>mean loss at each of the 60 windows, smoothed over 3 — summed across windows, exactly the quantity on the right. Gold = the ±15 bp core.</a:t>
             </a:r>
             <a:endParaRPr lang="en-US" sz="1050" dirty="0"/>
           </a:p>
@@ -3205,8 +3205,8 @@
         </p:blipFill>
         <p:spPr>
           <a:xfrm>
-            <a:off x="1139268" y="1609344"/>
-            <a:ext cx="5676744" cy="1783080"/>
+            <a:off x="1385461" y="1609344"/>
+            <a:ext cx="5184358" cy="1783080"/>
           </a:xfrm>
           <a:prstGeom prst="rect">
             <a:avLst/>
@@ -3301,8 +3301,8 @@
         </p:blipFill>
         <p:spPr>
           <a:xfrm>
-            <a:off x="1284825" y="3950208"/>
-            <a:ext cx="5385629" cy="1691640"/>
+            <a:off x="1489343" y="3950208"/>
+            <a:ext cx="4976595" cy="1691640"/>
           </a:xfrm>
           <a:prstGeom prst="rect">
             <a:avLst/>

--- a/Analysis/AP1_AlphaGenome_results.pptx
+++ b/Analysis/AP1_AlphaGenome_results.pptx
@@ -122,19 +122,19 @@
   <p:extLst>
     <p:ext uri="{521415D9-36F7-43E2-AB2F-B90AF26B5E84}">
       <p14:sectionLst xmlns:p14="http://schemas.microsoft.com/office/powerpoint/2010/main">
-        <p14:section name="Opening" id="{9c34cc70-9536-c6db-ee69-3c55e578d846}">
+        <p14:section name="Opening" id="{4581dcb1-9e71-5a9a-1e1c-23c1ecc633a2}">
           <p14:sldIdLst>
             <p14:sldId id="256"/>
           </p14:sldIdLst>
         </p14:section>
-        <p14:section name="Design" id="{0f33ed6b-15a6-188f-503d-c2c5ea1bb9b8}">
+        <p14:section name="Design" id="{09048611-57fe-0156-068f-4b07f6697b58}">
           <p14:sldIdLst>
             <p14:sldId id="257"/>
             <p14:sldId id="258"/>
             <p14:sldId id="259"/>
           </p14:sldIdLst>
         </p14:section>
-        <p14:section name="Findings" id="{183478aa-37fa-84be-a3ea-145a21d41cb9}">
+        <p14:section name="Findings" id="{76a5de9e-a77f-da28-4959-403d99750845}">
           <p14:sldIdLst>
             <p14:sldId id="260"/>
             <p14:sldId id="261"/>
@@ -148,7 +148,7 @@
             <p14:sldId id="269"/>
           </p14:sldIdLst>
         </p14:section>
-        <p14:section name="Conclusion" id="{3cce498f-95e6-e4ce-f676-94798d9ed3a8}">
+        <p14:section name="Conclusion" id="{cebae3aa-5bb8-49b8-b7e0-60aaecf36be2}">
           <p14:sldIdLst>
             <p14:sldId id="270"/>
             <p14:sldId id="271"/>
@@ -734,7 +734,7 @@
           <a:p>
             <a:r>
               <a:rPr lang="en-US" dirty="0"/>
-              <a:t>The profiles are means, not medians, so the area under a curve equals the per-site totals in the panels on the right; with medians the two panels are different functions and do not correspond. Note where the difference lives: at the single deepest window Stable and Age Up are almost identical (0.68 vs 0.63 mean), and the 18% gap in loss within 85 bp comes from the shoulders, not the peak. Spread is the standard deviation of window position when each of the 60 windows is weighted by its share of that site's total loss, measured about the centre of mass of the loss rather than about the motif. For scale: all the loss in one window gives 0 bp, confined to the central 90 bp gives 26, to the central 170 bp gives 49, and spread evenly over the whole 600 bp gives 173. Observed values run 29 to 216 with a median of 87, so a typical element draws on a window well over 100 bp wide.</a:t>
+              <a:t>The profiles are means, not medians, so the area under a curve equals the per-site totals in the panels on the right; with medians the two panels are different functions and do not correspond. Note where the difference lives: at the single deepest window Stable and Age Up are almost identical (0.68 vs 0.63 mean), and the 18% gap in loss within 85 bp comes from the shoulders, not the peak. Spread is the standard deviation of window position when each of the 60 windows is weighted by its share of that site's total loss, measured about the centre of mass of the loss rather than about the motif. For scale: all the loss in one window gives 0 bp, confined to the central 90 bp gives 26, to the central 170 bp gives 49, and spread evenly over the whole 600 bp gives 173. Observed values run 29 to 216 with a median of 87, so a typical element draws on a region well over 100 bp wide. Caveat worth having ready: spread is partly confounded with weakness. Across all sites it correlates with the Gini concentration at rho -0.71, but with the NUMBER of windows that matter at only -0.22, and the broadest fifth of sites have FEWER windows that matter (5 vs 7), a shallower motif window (-0.44 vs -0.99) and less total loss (6.4 vs 9.3) than the tightest fifth. So a broad profile here means no stretch dominates, not that many stretches contribute. The honest sentence is that responsive elements have no dominant anchor -- their dependence is both weaker and more evenly scattered -- which is the same thing the near-versus-far panels say.</a:t>
             </a:r>
             <a:endParaRPr lang="en-US" dirty="0"/>
           </a:p>
